--- a/docs/CircuitAgents_intro_ja.pptx
+++ b/docs/CircuitAgents_intro_ja.pptx
@@ -16,6 +16,12 @@
     <p:sldId id="264" r:id="rId16"/>
     <p:sldId id="265" r:id="rId17"/>
     <p:sldId id="266" r:id="rId18"/>
+    <p:sldId id="267" r:id="rId19"/>
+    <p:sldId id="268" r:id="rId20"/>
+    <p:sldId id="269" r:id="rId21"/>
+    <p:sldId id="270" r:id="rId22"/>
+    <p:sldId id="271" r:id="rId23"/>
+    <p:sldId id="272" r:id="rId24"/>
   </p:sldIdLst>
   <p:sldSz cx="12191695" cy="6858000" type="screen4x3"/>
   <p:notesSz cx="6858000" cy="9144000"/>
@@ -512,7 +518,7 @@
           <a:lstStyle/>
           <a:p>
             <a:r>
-              <a:t>本日は CircuitAgents プロジェクトを紹介します。highway-env 上で強化学習させたレース走行エージェントを、ONNX 経由で C# ゲームエンジン (RE Engine) にデプロイするまでの一連のパイプラインです。まず結果からお見せし、その後に環境・学習設定の変更点、セットアップ方法、エクスポートツールの使い方を説明します。</a:t>
+              <a:t>本日は CircuitAgents プロジェクトを 10 分で紹介します。highway-env をベースに、ゲームのレース環境に近づけるための改造を重ねて強化学習エージェントを育て、ONNX 経由で C# ゲームエンジンにデプロイするまでのパイプラインです。まず結果の映像とグラフをご覧いただき、その後で highway-env のデフォルト設定と我々が加えた変更の進化の過程、最後にセットアップとツールの使い方を説明します。</a:t>
             </a:r>
           </a:p>
         </p:txBody>
@@ -582,7 +588,7 @@
           <a:lstStyle/>
           <a:p>
             <a:r>
-              <a:t>学習済みモデルのエクスポートは export_onnx.py で行います。モードは 1 が full policy、2 が actor の channels-first、3 がエンジン用の channels-last NHWC、0 で全部です。エンジン側は必ず NHWC 版 ppo_actor_only_nhwc.onnx を使ってください。C# ビルダーは H×W×C の平坦配列を出力するため、channels-first 版に入れるとチャネルが混ざり、スロットル 0.4・ステア 0.2 程度のほぼ一定出力に退化します。トラック形状を変えたら export_track_json.py で JSON を再生成し、検証ハーネスを回します。C# 側には観測ビルダーに加えて、ステアリング平滑化・コーナー減速・スタック検出・学習と同一物理の CarController が入っています。</a:t>
+              <a:t>報酬設計です。グラフは実測した 1 ステップあたりの報酬で、状態ごとの「儲け」を示しています。設計の目標は、どんな抜け道よりも普通に走る方が得、という順序を作ることです。緑の 0.97 が正しく走った場合。壁でスタックしたら 0.45、壁に擦りながら進んでも 0.42 と、壁を使う行動は割に合いません。重要なのは青の 0.51、壁からバックで脱出する行動がスタックより明確に得なことです。実は最初、脱出報酬は壁に接触している間しか出ませんでした。すると脱出の一歩目、壁から 20 cm 離れた瞬間にバックのペナルティが復活してしまい、エージェントは「壁沿いを這う」ことを学びました。今は壁から 1 m の脱出ゾーンを設け、その中ではバック免除、壁から離れる距離に報酬を出します。もう 1 つの落とし穴が正規化です。合成報酬を [-3,3] から [0,1] に線形写像していますが、この範囲が実際の下限を覆っていないと、悪い状態が全部 0 に張り付いて「悪い」と「最悪」の区別が消え、学習が止まります。範囲の導出はコードにコメントで残し、重みを変えたら再導出するルールにしています。</a:t>
             </a:r>
           </a:p>
         </p:txBody>
@@ -652,7 +658,427 @@
           <a:lstStyle/>
           <a:p>
             <a:r>
-              <a:t>まとめです。壁の物理と報酬の経済設計を作り込むことで、PPO は 6 万ステップで周回を学習し、ランダムトラック学習によって 1 つの方策が 5 コースすべてを走れるようになりました。C# 側は観測・物理ともに Python と数値一致で検証済みなので、エンジンに載せた瞬間から学習時と同じ挙動が期待できます。今後はゲーム内での実走検証と、実車ダイナミクスに合わせた微調整が次のステップです。ご清聴ありがとうございました。</a:t>
+              <a:t>観測はデフォルトの 2 チャネルから 10 チャネルに拡張しました。周囲車両の相対位置・相対速度、自車のレーンからの横ずれ lat_off と角度ずれ ang_off などです。追い越しと車線維持の両方に必要な情報です。視野も変えました。デフォルトは前後対称 ±18 m ですが、レースで重要なのは前方です。後方 9 m・前方 27 m の非対称にしました。27 m という数字は制動距離から来ています。16 m/s から 5 m/s² でフル制動すると 25.6 m。前方視野がこれより短いと、コーナーが見えてからでは止まれません。ぎりぎり収まるのが 27 m です。重要な注意として、自車の絶対座標は観測に含まれません。これによりコース暗記が不可能になり、反射的なレーン追従を学習せざるを得なくなります。これが 5 コース汎化の種明かしです。</a:t>
+            </a:r>
+          </a:p>
+        </p:txBody>
+      </p:sp>
+      <p:sp>
+        <p:nvSpPr>
+          <p:cNvPr id="4" name="Slide Number Placeholder 3"/>
+          <p:cNvSpPr>
+            <a:spLocks noGrp="1"/>
+          </p:cNvSpPr>
+          <p:nvPr>
+            <p:ph type="sldNum" idx="5" sz="quarter"/>
+          </p:nvPr>
+        </p:nvSpPr>
+        <p:spPr/>
+      </p:sp>
+    </p:spTree>
+  </p:cSld>
+  <p:clrMapOvr>
+    <a:masterClrMapping/>
+  </p:clrMapOvr>
+</p:notes>
+</file>
+
+<file path=ppt/notesSlides/notesSlide12.xml><?xml version="1.0" encoding="utf-8"?>
+<p:notes xmlns:a="http://schemas.openxmlformats.org/drawingml/2006/main" xmlns:p="http://schemas.openxmlformats.org/presentationml/2006/main" xmlns:r="http://schemas.openxmlformats.org/officeDocument/2006/relationships">
+  <p:cSld>
+    <p:spTree>
+      <p:nvGrpSpPr>
+        <p:cNvPr id="1" name=""/>
+        <p:cNvGrpSpPr/>
+        <p:nvPr/>
+      </p:nvGrpSpPr>
+      <p:grpSpPr>
+        <a:xfrm>
+          <a:off x="0" y="0"/>
+          <a:ext cx="0" cy="0"/>
+          <a:chOff x="0" y="0"/>
+          <a:chExt cx="0" cy="0"/>
+        </a:xfrm>
+      </p:grpSpPr>
+      <p:sp>
+        <p:nvSpPr>
+          <p:cNvPr id="2" name="Slide Image Placeholder 1"/>
+          <p:cNvSpPr>
+            <a:spLocks noGrp="1"/>
+          </p:cNvSpPr>
+          <p:nvPr>
+            <p:ph type="sldImg" idx="2"/>
+          </p:nvPr>
+        </p:nvSpPr>
+        <p:spPr/>
+      </p:sp>
+      <p:sp>
+        <p:nvSpPr>
+          <p:cNvPr id="3" name="Notes Placeholder 2"/>
+          <p:cNvSpPr>
+            <a:spLocks noGrp="1"/>
+          </p:cNvSpPr>
+          <p:nvPr>
+            <p:ph type="body" idx="3" sz="quarter"/>
+          </p:nvPr>
+        </p:nvSpPr>
+        <p:spPr/>
+        <p:txBody>
+          <a:bodyPr/>
+          <a:lstStyle/>
+          <a:p>
+            <a:r>
+              <a:t>コースも 1 つから 5 つに増やしました。oval と stadium が基礎、rect は 90 度コーナーの反復、chicane は左右の切り返しと最小半径 10 m のキンク、fast がメインの難コースです。config の track を random にするとエピソードごとに再抽選され、これが汎化学習になります。各トラックは C# 側にもプリセットと JSON で複製されていて、検証ハーネスがPython と C# の幾何が一致することを自動チェックします。トラックを追加するときはrace_env にビルダーを書き、C# プリセットを足し、JSON を再生成して検証を回す、という手順です。</a:t>
+            </a:r>
+          </a:p>
+        </p:txBody>
+      </p:sp>
+      <p:sp>
+        <p:nvSpPr>
+          <p:cNvPr id="4" name="Slide Number Placeholder 3"/>
+          <p:cNvSpPr>
+            <a:spLocks noGrp="1"/>
+          </p:cNvSpPr>
+          <p:nvPr>
+            <p:ph type="sldNum" idx="5" sz="quarter"/>
+          </p:nvPr>
+        </p:nvSpPr>
+        <p:spPr/>
+      </p:sp>
+    </p:spTree>
+  </p:cSld>
+  <p:clrMapOvr>
+    <a:masterClrMapping/>
+  </p:clrMapOvr>
+</p:notes>
+</file>
+
+<file path=ppt/notesSlides/notesSlide13.xml><?xml version="1.0" encoding="utf-8"?>
+<p:notes xmlns:a="http://schemas.openxmlformats.org/drawingml/2006/main" xmlns:p="http://schemas.openxmlformats.org/presentationml/2006/main" xmlns:r="http://schemas.openxmlformats.org/officeDocument/2006/relationships">
+  <p:cSld>
+    <p:spTree>
+      <p:nvGrpSpPr>
+        <p:cNvPr id="1" name=""/>
+        <p:cNvGrpSpPr/>
+        <p:nvPr/>
+      </p:nvGrpSpPr>
+      <p:grpSpPr>
+        <a:xfrm>
+          <a:off x="0" y="0"/>
+          <a:ext cx="0" cy="0"/>
+          <a:chOff x="0" y="0"/>
+          <a:chExt cx="0" cy="0"/>
+        </a:xfrm>
+      </p:grpSpPr>
+      <p:sp>
+        <p:nvSpPr>
+          <p:cNvPr id="2" name="Slide Image Placeholder 1"/>
+          <p:cNvSpPr>
+            <a:spLocks noGrp="1"/>
+          </p:cNvSpPr>
+          <p:nvPr>
+            <p:ph type="sldImg" idx="2"/>
+          </p:nvPr>
+        </p:nvSpPr>
+        <p:spPr/>
+      </p:sp>
+      <p:sp>
+        <p:nvSpPr>
+          <p:cNvPr id="3" name="Notes Placeholder 2"/>
+          <p:cNvSpPr>
+            <a:spLocks noGrp="1"/>
+          </p:cNvSpPr>
+          <p:nvPr>
+            <p:ph type="body" idx="3" sz="quarter"/>
+          </p:nvPr>
+        </p:nvSpPr>
+        <p:spPr/>
+        <p:txBody>
+          <a:bodyPr/>
+          <a:lstStyle/>
+          <a:p>
+            <a:r>
+              <a:t>学習は 2 フェーズの PPO です。フェーズ 1 で他車なしのレーン追従を覚え、フェーズ 2 で NPC を入れて学習率を下げ、追い越しをファインチューニングします。特徴抽出はカスタム CNN で、初期方策のスロットルバイアスを +0.4 にずらして序盤の探索が前に進むようにしています。ここでの教訓は fast-dev、つまり動作確認用の短縮設定です。以前はエントロピー係数 0.10 の 6.5 万ステップで、何度回しても曲がれるようになりませんでした。原因は、エントロピー報酬が『ランダムでい続けること』に支払われるため、報酬が [0,1] に圧縮された本環境では方策が確定するインセンティブに勝ってしまうことでした。現在は本番と同じ ent 0.02・lr 2e-4 のまま 12 万ステップに短縮し、『周回まで確実に到達する最小構成』としてエンドツーエンドで実測検証済みです。また PPO は学習終盤に退行することがあるため、最終モデルではなく EvalCallback のベストモデルを採用します。ノートブックには eval 報酬を周回数に換算するヤードスティックのセルを入れてあり、TensorBoard の数字だけで進捗判断ができます。</a:t>
+            </a:r>
+          </a:p>
+        </p:txBody>
+      </p:sp>
+      <p:sp>
+        <p:nvSpPr>
+          <p:cNvPr id="4" name="Slide Number Placeholder 3"/>
+          <p:cNvSpPr>
+            <a:spLocks noGrp="1"/>
+          </p:cNvSpPr>
+          <p:nvPr>
+            <p:ph type="sldNum" idx="5" sz="quarter"/>
+          </p:nvPr>
+        </p:nvSpPr>
+        <p:spPr/>
+      </p:sp>
+    </p:spTree>
+  </p:cSld>
+  <p:clrMapOvr>
+    <a:masterClrMapping/>
+  </p:clrMapOvr>
+</p:notes>
+</file>
+
+<file path=ppt/notesSlides/notesSlide14.xml><?xml version="1.0" encoding="utf-8"?>
+<p:notes xmlns:a="http://schemas.openxmlformats.org/drawingml/2006/main" xmlns:p="http://schemas.openxmlformats.org/presentationml/2006/main" xmlns:r="http://schemas.openxmlformats.org/officeDocument/2006/relationships">
+  <p:cSld>
+    <p:spTree>
+      <p:nvGrpSpPr>
+        <p:cNvPr id="1" name=""/>
+        <p:cNvGrpSpPr/>
+        <p:nvPr/>
+      </p:nvGrpSpPr>
+      <p:grpSpPr>
+        <a:xfrm>
+          <a:off x="0" y="0"/>
+          <a:ext cx="0" cy="0"/>
+          <a:chOff x="0" y="0"/>
+          <a:chExt cx="0" cy="0"/>
+        </a:xfrm>
+      </p:grpSpPr>
+      <p:sp>
+        <p:nvSpPr>
+          <p:cNvPr id="2" name="Slide Image Placeholder 1"/>
+          <p:cNvSpPr>
+            <a:spLocks noGrp="1"/>
+          </p:cNvSpPr>
+          <p:nvPr>
+            <p:ph type="sldImg" idx="2"/>
+          </p:nvPr>
+        </p:nvSpPr>
+        <p:spPr/>
+      </p:sp>
+      <p:sp>
+        <p:nvSpPr>
+          <p:cNvPr id="3" name="Notes Placeholder 2"/>
+          <p:cNvSpPr>
+            <a:spLocks noGrp="1"/>
+          </p:cNvSpPr>
+          <p:nvPr>
+            <p:ph type="body" idx="3" sz="quarter"/>
+          </p:nvPr>
+        </p:nvSpPr>
+        <p:spPr/>
+        <p:txBody>
+          <a:bodyPr/>
+          <a:lstStyle/>
+          <a:p>
+            <a:r>
+              <a:t>学習した方策をそのままゲームに載せると、シミュレータと実車の違いが問題になります。そのために C# 側に 4 つの支援クラスを用意しました。まず SteeringSmoother。方策は観測グリッドが 3 m 刻みで量子化されている影響で、直線でステアを細かく左右に振ります。デコード後のステア角に EMA をかけるだけで、符号反転が 100 ステップあたり 34 回から 12 回に減り、直線の中央維持もむしろ改善しました。次に CorneringLimiter。実車はハンドルを瞬時に切れないのでステア速度を制限し、曲率から計算した限界速度を超えたら超過量に比例した弱いブレーキをかけます。速度床があるので絶対に止まりません。StuckRecovery は移動距離ベースのスタック検出で、前進指示なのに 1 秒で 0.3 m も動けなければ壁に刺さっていると判断してバック指示を出します。発進時は動けるので誤発動しません。最後に CarController は学習時と同一のBicycle 動力学を C# に移植したもので、Python と 1e-7 で一致します。</a:t>
+            </a:r>
+          </a:p>
+        </p:txBody>
+      </p:sp>
+      <p:sp>
+        <p:nvSpPr>
+          <p:cNvPr id="4" name="Slide Number Placeholder 3"/>
+          <p:cNvSpPr>
+            <a:spLocks noGrp="1"/>
+          </p:cNvSpPr>
+          <p:nvPr>
+            <p:ph type="sldNum" idx="5" sz="quarter"/>
+          </p:nvPr>
+        </p:nvSpPr>
+        <p:spPr/>
+      </p:sp>
+    </p:spTree>
+  </p:cSld>
+  <p:clrMapOvr>
+    <a:masterClrMapping/>
+  </p:clrMapOvr>
+</p:notes>
+</file>
+
+<file path=ppt/notesSlides/notesSlide15.xml><?xml version="1.0" encoding="utf-8"?>
+<p:notes xmlns:a="http://schemas.openxmlformats.org/drawingml/2006/main" xmlns:p="http://schemas.openxmlformats.org/presentationml/2006/main" xmlns:r="http://schemas.openxmlformats.org/officeDocument/2006/relationships">
+  <p:cSld>
+    <p:spTree>
+      <p:nvGrpSpPr>
+        <p:cNvPr id="1" name=""/>
+        <p:cNvGrpSpPr/>
+        <p:nvPr/>
+      </p:nvGrpSpPr>
+      <p:grpSpPr>
+        <a:xfrm>
+          <a:off x="0" y="0"/>
+          <a:ext cx="0" cy="0"/>
+          <a:chOff x="0" y="0"/>
+          <a:chExt cx="0" cy="0"/>
+        </a:xfrm>
+      </p:grpSpPr>
+      <p:sp>
+        <p:nvSpPr>
+          <p:cNvPr id="2" name="Slide Image Placeholder 1"/>
+          <p:cNvSpPr>
+            <a:spLocks noGrp="1"/>
+          </p:cNvSpPr>
+          <p:nvPr>
+            <p:ph type="sldImg" idx="2"/>
+          </p:nvPr>
+        </p:nvSpPr>
+        <p:spPr/>
+      </p:sp>
+      <p:sp>
+        <p:nvSpPr>
+          <p:cNvPr id="3" name="Notes Placeholder 2"/>
+          <p:cNvSpPr>
+            <a:spLocks noGrp="1"/>
+          </p:cNvSpPr>
+          <p:nvPr>
+            <p:ph type="body" idx="3" sz="quarter"/>
+          </p:nvPr>
+        </p:nvSpPr>
+        <p:spPr/>
+        <p:txBody>
+          <a:bodyPr/>
+          <a:lstStyle/>
+          <a:p>
+            <a:r>
+              <a:t>使い方です。環境構築はスライドの 1 行だけです。注意点として、リポジトリ直下のrequirements.txt は旧 TensorFlow スタック用なので使わないでください。ノートブックは 2 つ。task2 が fast トラック専用、task3 がランダムトラックの汎化学習です。設定セルの FAST_DEV_RUN で短縮学習と本番を切り替えます。学習後は軌跡プロット、トラック別評価レポート、5 トラック並列動画、そして今回のスライドに使った図と動画を生成して保存するセルまで、すべてノートブック内にあります。C# ポートの検証は re_engine/verify で dotnet run するだけです。</a:t>
+            </a:r>
+          </a:p>
+        </p:txBody>
+      </p:sp>
+      <p:sp>
+        <p:nvSpPr>
+          <p:cNvPr id="4" name="Slide Number Placeholder 3"/>
+          <p:cNvSpPr>
+            <a:spLocks noGrp="1"/>
+          </p:cNvSpPr>
+          <p:nvPr>
+            <p:ph type="sldNum" idx="5" sz="quarter"/>
+          </p:nvPr>
+        </p:nvSpPr>
+        <p:spPr/>
+      </p:sp>
+    </p:spTree>
+  </p:cSld>
+  <p:clrMapOvr>
+    <a:masterClrMapping/>
+  </p:clrMapOvr>
+</p:notes>
+</file>
+
+<file path=ppt/notesSlides/notesSlide16.xml><?xml version="1.0" encoding="utf-8"?>
+<p:notes xmlns:a="http://schemas.openxmlformats.org/drawingml/2006/main" xmlns:p="http://schemas.openxmlformats.org/presentationml/2006/main" xmlns:r="http://schemas.openxmlformats.org/officeDocument/2006/relationships">
+  <p:cSld>
+    <p:spTree>
+      <p:nvGrpSpPr>
+        <p:cNvPr id="1" name=""/>
+        <p:cNvGrpSpPr/>
+        <p:nvPr/>
+      </p:nvGrpSpPr>
+      <p:grpSpPr>
+        <a:xfrm>
+          <a:off x="0" y="0"/>
+          <a:ext cx="0" cy="0"/>
+          <a:chOff x="0" y="0"/>
+          <a:chExt cx="0" cy="0"/>
+        </a:xfrm>
+      </p:grpSpPr>
+      <p:sp>
+        <p:nvSpPr>
+          <p:cNvPr id="2" name="Slide Image Placeholder 1"/>
+          <p:cNvSpPr>
+            <a:spLocks noGrp="1"/>
+          </p:cNvSpPr>
+          <p:nvPr>
+            <p:ph type="sldImg" idx="2"/>
+          </p:nvPr>
+        </p:nvSpPr>
+        <p:spPr/>
+      </p:sp>
+      <p:sp>
+        <p:nvSpPr>
+          <p:cNvPr id="3" name="Notes Placeholder 2"/>
+          <p:cNvSpPr>
+            <a:spLocks noGrp="1"/>
+          </p:cNvSpPr>
+          <p:nvPr>
+            <p:ph type="body" idx="3" sz="quarter"/>
+          </p:nvPr>
+        </p:nvSpPr>
+        <p:spPr/>
+        <p:txBody>
+          <a:bodyPr/>
+          <a:lstStyle/>
+          <a:p>
+            <a:r>
+              <a:t>デプロイ用のエクスポートは export_onnx.py です。モード 3 がエンジン用のchannels-last NHWC 版で、これが推奨です。C# の観測ビルダーは H×W×C の平坦配列を出力するため、channels-first 版のモデルに入れるとチャネルが混ざり、スロットル 0.4・ステア 0.2 程度のほぼ一定の出力に退化します。実際にこの症状で『モデルが曲がらない』というデバッグを経験したので、症状として覚えておいてください。トラックや観測の設定を変えたら、export_track_json.py で C# 側の正解データを再生成し、検証ハーネスを回します。加速度レンジなどの定数は C# 側に意図的に複製されているので、変更時は C# 定数、JSON 再生成、検証、ONNX 再エクスポートの 4 点セットを忘れずに。</a:t>
+            </a:r>
+          </a:p>
+        </p:txBody>
+      </p:sp>
+      <p:sp>
+        <p:nvSpPr>
+          <p:cNvPr id="4" name="Slide Number Placeholder 3"/>
+          <p:cNvSpPr>
+            <a:spLocks noGrp="1"/>
+          </p:cNvSpPr>
+          <p:nvPr>
+            <p:ph type="sldNum" idx="5" sz="quarter"/>
+          </p:nvPr>
+        </p:nvSpPr>
+        <p:spPr/>
+      </p:sp>
+    </p:spTree>
+  </p:cSld>
+  <p:clrMapOvr>
+    <a:masterClrMapping/>
+  </p:clrMapOvr>
+</p:notes>
+</file>
+
+<file path=ppt/notesSlides/notesSlide17.xml><?xml version="1.0" encoding="utf-8"?>
+<p:notes xmlns:a="http://schemas.openxmlformats.org/drawingml/2006/main" xmlns:p="http://schemas.openxmlformats.org/presentationml/2006/main" xmlns:r="http://schemas.openxmlformats.org/officeDocument/2006/relationships">
+  <p:cSld>
+    <p:spTree>
+      <p:nvGrpSpPr>
+        <p:cNvPr id="1" name=""/>
+        <p:cNvGrpSpPr/>
+        <p:nvPr/>
+      </p:nvGrpSpPr>
+      <p:grpSpPr>
+        <a:xfrm>
+          <a:off x="0" y="0"/>
+          <a:ext cx="0" cy="0"/>
+          <a:chOff x="0" y="0"/>
+          <a:chExt cx="0" cy="0"/>
+        </a:xfrm>
+      </p:grpSpPr>
+      <p:sp>
+        <p:nvSpPr>
+          <p:cNvPr id="2" name="Slide Image Placeholder 1"/>
+          <p:cNvSpPr>
+            <a:spLocks noGrp="1"/>
+          </p:cNvSpPr>
+          <p:nvPr>
+            <p:ph type="sldImg" idx="2"/>
+          </p:nvPr>
+        </p:nvSpPr>
+        <p:spPr/>
+      </p:sp>
+      <p:sp>
+        <p:nvSpPr>
+          <p:cNvPr id="3" name="Notes Placeholder 2"/>
+          <p:cNvSpPr>
+            <a:spLocks noGrp="1"/>
+          </p:cNvSpPr>
+          <p:nvPr>
+            <p:ph type="body" idx="3" sz="quarter"/>
+          </p:nvPr>
+        </p:nvSpPr>
+        <p:spPr/>
+        <p:txBody>
+          <a:bodyPr/>
+          <a:lstStyle/>
+          <a:p>
+            <a:r>
+              <a:t>まとめます。highway-env のデフォルトはステアリングだけの車線追従環境でした。そこにスロットルと実車動力学、物理的な壁、速く走る報酬、前方に偏った視野を段階的に加え、壁擦りや壁這いといった抜け道をひとつずつ経済的に割に合わなくして、最終的に 6 万ステップで周回を学習する環境になりました。汎化は自己位置を見せないという観測設計から生まれ、C# 側は数値一致の検証で「移植したら挙動が変わった」を排除しています。今後は RE Engine 内での実走検証と、実車ダイナミクスへの適合が次のステップです。ご清聴ありがとうございました。</a:t>
             </a:r>
           </a:p>
         </p:txBody>
@@ -722,7 +1148,7 @@
           <a:lstStyle/>
           <a:p>
             <a:r>
-              <a:t>最初に結果です。PPO エージェントはメインの fast トラックを制限速度 16 m/s で安定走行し、800 秒のエピソードで 37 周、壁への衝突ゼロを達成しました。学習は 3 万〜6 万ステップで周回能力が立ち上がり、12 万ステップの fast-dev 設定でも周回します。さらに、ランダムトラックで学習した汎化モデルは、5 種類すべてのコースを同一の重みで走り切ります。C# 側の観測生成は Python 環境とビット一致で検証済みです。</a:t>
+              <a:t>説明の前に、まず走りをご覧ください。これはエピソードごとにコースをランダムに切り替えて学習した「汎化モデル」1 つを、5 つのコースで同時に評価した動画です。赤い点が車、軌跡の色が速度です。直線では黄色、つまり制限速度の 16 m/s 付近、コーナーでは適切に減速しているのが分かります。どのコースも 2 分間、壁への衝突ゼロで周回し続けます。では、この走りがどう作られたかを見ていきます。</a:t>
             </a:r>
           </a:p>
         </p:txBody>
@@ -792,7 +1218,7 @@
           <a:lstStyle/>
           <a:p>
             <a:r>
-              <a:t>学習の立ち上がりです。横軸が学習ステップ、縦軸がエピソードあたりの周回数です。3 万ステップでは 1 周程度で壁に刺さりますが、6 万ステップで 32 周、9 万で 36 周に達し、以降は制限速度での巡航に収束します。ランダムトラック学習 (task3) でも、最難関の chicane 評価で 5 万ステップ時点から 33 周と、ほぼ同じ速度で立ち上がります。報酬が密に設計されているため学習が速いのが特徴です。</a:t>
+              <a:t>学習の速さです。横軸が学習ステップ、縦軸が 1 エピソードあたりの周回数です。青が fast トラック単体の学習で、3 万ステップでは 1 周で壁に刺さりますが、6 万で 32 周、9 万で 36 周に達し、以降は制限速度巡航に収束します。オレンジがランダムトラック学習で、最難関の chicane 評価でも 5 万ステップから 33 周と、ほぼ同じ速度で立ち上がります。この速さは偶然ではなく、後で説明する報酬設計の結果です。</a:t>
             </a:r>
           </a:p>
         </p:txBody>
@@ -862,7 +1288,7 @@
           <a:lstStyle/>
           <a:p>
             <a:r>
-              <a:t>12 万ステップの fast-dev モデルの 2 分間の走行軌跡です。黒線がコース外壁、点の色が速度を表します。直線では 16 m/s、ヘアピンでは適切に減速して立て直しているのが分かります。以前問題になっていた e-f コーナーの壁張り付きも解消されています。</a:t>
+              <a:t>1 台分の軌跡を拡大したものです。12 万ステップの fast-dev モデルの 2 分間で、黒線がコースの物理壁、点の色が速度です。直線で最高速に達し、ヘアピン進入で青く、つまりしっかり減速し、出口で再加速しています。以前は S 字の先の e-f コーナーで壁に張り付いて動けなくなる問題がありましたが、報酬の再設計で解消しました。この「壁に張り付く」問題との戦いが、本プロジェクトの中心的なエピソードです。</a:t>
             </a:r>
           </a:p>
         </p:txBody>
@@ -932,7 +1358,7 @@
           <a:lstStyle/>
           <a:p>
             <a:r>
-              <a:t>こちらが汎化モデルの結果です。エピソードごとにトラックをランダムに切り替えて 15 万ステップ学習した1 つの方策を、5 つのコースで同時に評価しました。すべてのコースを平均 15.7 m/s、2 分間ノーミスで周回します。エージェントは自己位置を観測できないため、コース形状を暗記できず、反射的なレーン追従を学習したことが汎化の理由です。動画はスライドに埋め込んであります。再生してご覧ください。</a:t>
+              <a:t>映像で見ていただいた結果を数字でまとめます。fast トラックで 800 秒 37 周・無衝突。周回能力の獲得は 3 万から 6 万ステップ。12 万ステップの短縮設定 fast-dev でも、NPC ありのフェーズ 2 まで通して 37 周を維持します。汎化モデルは 5 コースすべてを平均 15.7 m/s で走破。そして C# 側の観測生成は Python とビット一致、車両物理も 1e-7 で一致しており、エンジンに載せた瞬間から学習時と同じ挙動が保証されます。</a:t>
             </a:r>
           </a:p>
         </p:txBody>
@@ -1002,7 +1428,7 @@
           <a:lstStyle/>
           <a:p>
             <a:r>
-              <a:t>使用している 5 つのトラックです。すべて 2 車線・幅 5 m で、直線と円弧のみで構成しています。fast は S 字と 2 つのヘアピンを持つメインコース、oval と stadium は基礎、rect は 90 度コーナーの繰り返し、chicane は左右両方向の切り返しと最小半径 10 m のキンクを持ちます。各トラックは C# 側のプリセットと track_&lt;name&gt;.json にも複製され、検証ハーネスが両者の幾何一致を自動チェックします。</a:t>
+              <a:t>ここからが本題です。ベースにした highway-env は自動運転研究向けの軽量シミュレータで、racetrack 環境がレース走行に一番近いものです。ただしデフォルト設定を詳しく見ると、ゲームのレースとはかなり違います。まず行動はステアリングのみで、速度は 0・5・10 の離散ターゲットから選ぶだけ。スロットルという概念がありません。観測は presence と on_road の2 チャネルだけで、周囲 18 m の対称視野。報酬は車線中央維持と操作量ペナルティが中心で、速く走る動機がありません。そして路外に出ても物理的な壁はなく、エピソードが終わるだけです。車両も既定ではタイヤスリップのない運動学モデルです。</a:t>
             </a:r>
           </a:p>
         </p:txBody>
@@ -1072,7 +1498,7 @@
           <a:lstStyle/>
           <a:p>
             <a:r>
-              <a:t>オリジナルの highway-env racetrack 環境との違いです。1 つ目は壁の物理です。標準では路外に出ても罰則だけですが、本環境ではコース外周だけを物理的な壁とし、車線間の白線は壁にしません。壁に当たると停止し、バックでしか脱出できません。2 つ目は報酬設計です。速度・車線中央維持・チェックポイント/ラップボーナスを生の単位で合成し、[-3,3] から [0,1] へ線形写像します。この範囲が実際の報酬の下限を覆っていないと、悪い状態がすべて 0 に飽和して勾配が消えるため、範囲の導出をコメントで管理しています。3 つ目は壁脱出の経済設計です。壁から 1 m 以内ではバック走行のペナルティを免除し、壁からの距離増加に報酬を与えます。これがないと、脱出の一歩目で罰せられて壁沿いを這う局所解を学習してしまいます。</a:t>
+              <a:t>左が highway-env デフォルトの racetrack、右が我々の fast トラックです。形状も作り直し、S 字と 2 つのヘアピンを持たせて難所を意図的に作りました。しかし本質的な違いは形ではなく物理です。左はステアリングだけ・壁なし・10 m/s、右はスロットル制御・外周が物理壁・16 m/s で、壁に当たると停止しバックでしか脱出できません。この差を埋めるために行った変更を、これから順番に説明します。</a:t>
             </a:r>
           </a:p>
         </p:txBody>
@@ -1142,7 +1568,7 @@
           <a:lstStyle/>
           <a:p>
             <a:r>
-              <a:t>観測は 10 チャネル 12x12 の OccupancyGrid で、前方 27 m・後方 9 m の非対称な視野にしています。レース走行ではコーナーの先読みが重要なためです。行動は連続値のスロットルとステアリングで、学習時と同じ動力学モデル (タイヤスリップ付き Bicycle model) を使います。学習は 2 フェーズの PPO です。フェーズ 1 で他車なしのレーン追従、フェーズ 2 で NPC を加えた追い越しをファインチューニングします。初期方策のスロットルバイアスを +0.4 にずらし、序盤の探索で前進が出やすくしています。fast-dev は 12 万ステップで、本番と同じハイパーパラメータのまま短縮した「周回まで確実に到達する最小構成」です。</a:t>
+              <a:t>最初の変更は行動空間です。ゲームの車はアクセルとブレーキを踏むので、ステアリング専用だったものを連続スロットル付きの 2 次元連続行動に変更し、加速度レンジは ±5 m/s²、ステアは ±30 度としました。車両モデルもタイヤスリップを持つ動的 Bicycle モデルに切り替えています。加速度レンジは実験で決めました。グラフの赤い破線が ±2.5 m/s² に絞った実験で、10 万ステップで 22 周までは学習できるものの巡航速度が 10 m/s に頭打ちし、終盤には退行しました。原因は制動距離です。16 m/s から 2.5 m/s² で止まるには 51 m 必要ですが、観測の前方視野は 27 m しかなく、「見えてから減速」が物理的に間に合いません。エンジン出力を絞りたい場合はブレーキだけ強い非対称レンジ [−5, +2.5] を推奨しています。</a:t>
             </a:r>
           </a:p>
         </p:txBody>
@@ -1212,7 +1638,7 @@
           <a:lstStyle/>
           <a:p>
             <a:r>
-              <a:t>環境構築はこの 1 行です。リポジトリ直下の requirements.txt は旧 TensorFlow 系スタック用なので使わないでください。ノートブックは 2 つあり、task2 が fast トラック専用、task3 がランダムトラックの汎化学習用です。設定セルの FAST_DEV_RUN を True にすると短縮学習、False にすると本番学習になります。学習の進捗は Reward yardstick セルの数値と TensorBoard で確認でき、eval/mean_reward が周回相当値を超えたら周回できています。</a:t>
+              <a:t>次に壁です。ここが一番試行錯誤した部分です。最初は壁がなく、路外に出たら終了するだけでした。これだとエージェントはコーナーを膨らんでショートカットする走りを覚えます。次に反発壁を入れましたが、今度は「壁に擦りながら曲がる」wall-riding が最速解になりました。壁が勝手に車の向きを変えてくれるので、ステアリングを学ぶ必要がなくなるんです。最終形は停止壁です。壁に当たると止まり、バックでしか脱出できない。さらに壁接触中は速度報酬をゼロにし、接触が 7 秒続いたらクラッシュ扱いで終了します。もう 1 つ重要なのは、壁はコース外周だけという点です。車線の白線を壁にすると2 車線を使ったライン取りができなくなります。この判定は最初閉じた車線単位で書いてしまい、白線が壁になるバグを踏みました。現在は「コリドー両端の車線の外側だけが壁」という実装です。</a:t>
             </a:r>
           </a:p>
         </p:txBody>
@@ -4258,18 +4684,18 @@
                 </a:solidFill>
                 <a:latin typeface="Meiryo"/>
               </a:rPr>
-              <a:t>強化学習によるサーキット走行エージェント — highway-env + PPO から RE Engine (ONNX) まで</a:t>
+              <a:t>強化学習によるサーキット走行エージェント — highway-env をゲーム環境へ進化させる</a:t>
             </a:r>
           </a:p>
           <a:p>
             <a:r>
               <a:rPr sz="1800">
                 <a:solidFill>
-                  <a:srgbClr val="666666"/>
-                </a:solidFill>
-                <a:latin typeface="Meiryo"/>
-              </a:rPr>
-              <a:t>学習環境・報酬設計・C# デプロイパイプラインの全体紹介</a:t>
+                  <a:srgbClr val="595959"/>
+                </a:solidFill>
+                <a:latin typeface="Meiryo"/>
+              </a:rPr>
+              <a:t>環境設計の変遷・学習パイプライン・RE Engine (ONNX/C#) デプロイ</a:t>
             </a:r>
           </a:p>
         </p:txBody>
@@ -4300,8 +4726,8 @@
         </p:nvSpPr>
         <p:spPr>
           <a:xfrm>
-            <a:off x="457200" y="228600"/>
-            <a:ext cx="11247120" cy="822960"/>
+            <a:off x="457200" y="201168"/>
+            <a:ext cx="11247120" cy="777240"/>
           </a:xfrm>
           <a:prstGeom prst="rect">
             <a:avLst/>
@@ -4315,27 +4741,51 @@
           <a:lstStyle/>
           <a:p>
             <a:r>
-              <a:rPr sz="3000" b="1">
+              <a:rPr sz="2800" b="1">
                 <a:solidFill>
                   <a:srgbClr val="1B5EA8"/>
                 </a:solidFill>
                 <a:latin typeface="Meiryo"/>
               </a:rPr>
-              <a:t>エクスポートツールと C# デプロイ</a:t>
-            </a:r>
-          </a:p>
-        </p:txBody>
-      </p:sp>
-      <p:sp>
-        <p:nvSpPr>
-          <p:cNvPr id="3" name="TextBox 2"/>
+              <a:t>進化 (3) 報酬の経済設計 — 抜け道より運転が得になるまで</a:t>
+            </a:r>
+          </a:p>
+        </p:txBody>
+      </p:sp>
+      <p:pic>
+        <p:nvPicPr>
+          <p:cNvPr id="3" name="Picture 2" descr="reward_economics.png"/>
+          <p:cNvPicPr>
+            <a:picLocks noChangeAspect="1"/>
+          </p:cNvPicPr>
+          <p:nvPr/>
+        </p:nvPicPr>
+        <p:blipFill>
+          <a:blip r:embed="rId3"/>
+          <a:stretch>
+            <a:fillRect/>
+          </a:stretch>
+        </p:blipFill>
+        <p:spPr>
+          <a:xfrm>
+            <a:off x="640080" y="1188720"/>
+            <a:ext cx="6766560" cy="3304599"/>
+          </a:xfrm>
+          <a:prstGeom prst="rect">
+            <a:avLst/>
+          </a:prstGeom>
+        </p:spPr>
+      </p:pic>
+      <p:sp>
+        <p:nvSpPr>
+          <p:cNvPr id="4" name="TextBox 3"/>
           <p:cNvSpPr txBox="1"/>
           <p:nvPr/>
         </p:nvSpPr>
         <p:spPr>
           <a:xfrm>
-            <a:off x="548640" y="1280160"/>
-            <a:ext cx="11064240" cy="5120640"/>
+            <a:off x="7589520" y="1371600"/>
+            <a:ext cx="4206240" cy="5394960"/>
           </a:xfrm>
           <a:prstGeom prst="rect">
             <a:avLst/>
@@ -4350,129 +4800,97 @@
           <a:p>
             <a:pPr>
               <a:spcAft>
-                <a:spcPts val="600"/>
+                <a:spcPts val="500"/>
               </a:spcAft>
             </a:pPr>
             <a:r>
-              <a:rPr sz="1700" b="1">
+              <a:rPr sz="1400" b="1">
                 <a:solidFill>
                   <a:srgbClr val="222222"/>
                 </a:solidFill>
                 <a:latin typeface="Meiryo"/>
               </a:rPr>
-              <a:t>python export_onnx.py &lt;model.zip&gt; -m 3        # エンジン用 NHWC (推奨)</a:t>
+              <a:t>目標: 運転 &gt; 脱出 &gt; 停滞 &gt; 壁擦り の順序</a:t>
+            </a:r>
+          </a:p>
+          <a:p>
+            <a:pPr>
+              <a:spcAft>
+                <a:spcPts val="500"/>
+              </a:spcAft>
+            </a:pPr>
+            <a:r>
+              <a:rPr sz="1400" b="0">
+                <a:solidFill>
+                  <a:srgbClr val="222222"/>
+                </a:solidFill>
+                <a:latin typeface="Meiryo"/>
+              </a:rPr>
+              <a:t>脱出ゾーン (壁 1 m): バック免除 +</a:t>
             </a:r>
           </a:p>
           <a:p>
             <a:pPr lvl="1">
               <a:spcAft>
-                <a:spcPts val="600"/>
+                <a:spcPts val="500"/>
               </a:spcAft>
             </a:pPr>
             <a:r>
-              <a:rPr sz="1500" b="0">
-                <a:solidFill>
-                  <a:srgbClr val="666666"/>
-                </a:solidFill>
-                <a:latin typeface="Meiryo"/>
-              </a:rPr>
-              <a:t>  -m: 1=full policy / 2=actor CHW / 3=actor NHWC / 0=全部,  -o で出力名指定</a:t>
+              <a:rPr sz="1200" b="0">
+                <a:solidFill>
+                  <a:srgbClr val="595959"/>
+                </a:solidFill>
+                <a:latin typeface="Meiryo"/>
+              </a:rPr>
+              <a:t>  距離増加に報酬 — 「壁を這う」局所解を排除</a:t>
             </a:r>
           </a:p>
           <a:p>
             <a:pPr>
               <a:spcAft>
-                <a:spcPts val="600"/>
+                <a:spcPts val="500"/>
               </a:spcAft>
             </a:pPr>
             <a:r>
-              <a:rPr sz="1700" b="0">
+              <a:rPr sz="1400" b="0">
                 <a:solidFill>
                   <a:srgbClr val="222222"/>
                 </a:solidFill>
                 <a:latin typeface="Meiryo"/>
               </a:rPr>
-              <a:t>python re_engine/convert_onnx_nhwc.py &lt;actor.onnx&gt;  # 既存 CHW を NHWC 化</a:t>
+              <a:t>lmap [-3,3]→[0,1]: 範囲が下限を覆わないと</a:t>
+            </a:r>
+          </a:p>
+          <a:p>
+            <a:pPr lvl="1">
+              <a:spcAft>
+                <a:spcPts val="500"/>
+              </a:spcAft>
+            </a:pPr>
+            <a:r>
+              <a:rPr sz="1200" b="0">
+                <a:solidFill>
+                  <a:srgbClr val="595959"/>
+                </a:solidFill>
+                <a:latin typeface="Meiryo"/>
+              </a:rPr>
+              <a:t>  勾配消失 (導出をコメントで管理)</a:t>
             </a:r>
           </a:p>
           <a:p>
             <a:pPr>
               <a:spcAft>
-                <a:spcPts val="600"/>
+                <a:spcPts val="500"/>
               </a:spcAft>
             </a:pPr>
             <a:r>
-              <a:rPr sz="1700" b="0">
+              <a:rPr sz="1400" b="0">
                 <a:solidFill>
                   <a:srgbClr val="222222"/>
                 </a:solidFill>
                 <a:latin typeface="Meiryo"/>
               </a:rPr>
-              <a:t>python re_engine/export_track_json.py  # トラック変更後に JSON + 参照観測を再生成</a:t>
-            </a:r>
-          </a:p>
-          <a:p>
-            <a:pPr>
-              <a:spcAft>
-                <a:spcPts val="600"/>
-              </a:spcAft>
-            </a:pPr>
-            <a:r>
-              <a:rPr sz="1700" b="1">
-                <a:solidFill>
-                  <a:srgbClr val="222222"/>
-                </a:solidFill>
-                <a:latin typeface="Meiryo"/>
-              </a:rPr>
-              <a:t>エンジンは ppo_actor_only_nhwc.onnx (入力 [1,12,12,10]) を使用</a:t>
-            </a:r>
-          </a:p>
-          <a:p>
-            <a:pPr lvl="1">
-              <a:spcAft>
-                <a:spcPts val="600"/>
-              </a:spcAft>
-            </a:pPr>
-            <a:r>
-              <a:rPr sz="1500" b="0">
-                <a:solidFill>
-                  <a:srgbClr val="666666"/>
-                </a:solidFill>
-                <a:latin typeface="Meiryo"/>
-              </a:rPr>
-              <a:t>  理由: C# は HWC 平坦列を出力 — CHW 版に入れると出力がほぼ一定に退化</a:t>
-            </a:r>
-          </a:p>
-          <a:p>
-            <a:pPr>
-              <a:spcAft>
-                <a:spcPts val="600"/>
-              </a:spcAft>
-            </a:pPr>
-            <a:r>
-              <a:rPr sz="1700" b="0">
-                <a:solidFill>
-                  <a:srgbClr val="222222"/>
-                </a:solidFill>
-                <a:latin typeface="Meiryo"/>
-              </a:rPr>
-              <a:t>C# 支援クラス: SteeringSmoother / CorneringLimiter / StuckRecovery / CarController</a:t>
-            </a:r>
-          </a:p>
-          <a:p>
-            <a:pPr lvl="1">
-              <a:spcAft>
-                <a:spcPts val="600"/>
-              </a:spcAft>
-            </a:pPr>
-            <a:r>
-              <a:rPr sz="1500" b="0">
-                <a:solidFill>
-                  <a:srgbClr val="666666"/>
-                </a:solidFill>
-                <a:latin typeface="Meiryo"/>
-              </a:rPr>
-              <a:t>  CarController は学習時と同一の Bicycle 動力学 (Python と 1e-7 一致) で速度 Vector3 を出力</a:t>
+              <a:t>チェックポイント/ラップボーナスは生単位で加算</a:t>
             </a:r>
           </a:p>
         </p:txBody>
@@ -4503,8 +4921,8 @@
         </p:nvSpPr>
         <p:spPr>
           <a:xfrm>
-            <a:off x="457200" y="228600"/>
-            <a:ext cx="11247120" cy="822960"/>
+            <a:off x="457200" y="201168"/>
+            <a:ext cx="11247120" cy="777240"/>
           </a:xfrm>
           <a:prstGeom prst="rect">
             <a:avLst/>
@@ -4518,13 +4936,13 @@
           <a:lstStyle/>
           <a:p>
             <a:r>
-              <a:rPr sz="3000" b="1">
+              <a:rPr sz="2800" b="1">
                 <a:solidFill>
                   <a:srgbClr val="1B5EA8"/>
                 </a:solidFill>
                 <a:latin typeface="Meiryo"/>
               </a:rPr>
-              <a:t>まとめ</a:t>
+              <a:t>進化 (4) 観測 — 2ch から 10ch へ、前方に偏った視野へ</a:t>
             </a:r>
           </a:p>
         </p:txBody>
@@ -4537,8 +4955,8 @@
         </p:nvSpPr>
         <p:spPr>
           <a:xfrm>
-            <a:off x="548640" y="1463040"/>
-            <a:ext cx="11064240" cy="5120640"/>
+            <a:off x="548640" y="1325880"/>
+            <a:ext cx="11064240" cy="5394960"/>
           </a:xfrm>
           <a:prstGeom prst="rect">
             <a:avLst/>
@@ -4553,81 +4971,1068 @@
           <a:p>
             <a:pPr>
               <a:spcAft>
-                <a:spcPts val="600"/>
+                <a:spcPts val="500"/>
               </a:spcAft>
             </a:pPr>
             <a:r>
-              <a:rPr sz="2000" b="1">
+              <a:rPr sz="1700" b="1">
                 <a:solidFill>
                   <a:srgbClr val="222222"/>
                 </a:solidFill>
                 <a:latin typeface="Meiryo"/>
               </a:rPr>
-              <a:t>報酬・壁の経済設計が学習速度を決める: 周回獲得は 3〜6 万ステップ</a:t>
+              <a:t>2ch (presence/on_road) → 10ch: + 相対位置 x,y / 相対速度 vx,vy / 向き cos_h,sin_h / lat_off / ang_off</a:t>
             </a:r>
           </a:p>
           <a:p>
             <a:pPr>
               <a:spcAft>
-                <a:spcPts val="600"/>
+                <a:spcPts val="500"/>
               </a:spcAft>
             </a:pPr>
             <a:r>
-              <a:rPr sz="2000" b="1">
+              <a:rPr sz="1700" b="1">
                 <a:solidFill>
                   <a:srgbClr val="222222"/>
                 </a:solidFill>
                 <a:latin typeface="Meiryo"/>
               </a:rPr>
-              <a:t>ランダムトラック学習で 1 方策 5 コース走破 — 自己位置非観測が汎化の鍵</a:t>
+              <a:t>視野: ±18 m 対称 → 前方 27 m / 後方 9 m の非対称 (12×12 セル, 3 m 刻み)</a:t>
+            </a:r>
+          </a:p>
+          <a:p>
+            <a:pPr lvl="1">
+              <a:spcAft>
+                <a:spcPts val="500"/>
+              </a:spcAft>
+            </a:pPr>
+            <a:r>
+              <a:rPr sz="1500" b="0">
+                <a:solidFill>
+                  <a:srgbClr val="595959"/>
+                </a:solidFill>
+                <a:latin typeface="Meiryo"/>
+              </a:rPr>
+              <a:t>根拠: 制動距離 16 m/s ÷ 5 m/s² = 25.6 m &lt; 27 m — 「見えてから止まれる」最小視野</a:t>
             </a:r>
           </a:p>
           <a:p>
             <a:pPr>
               <a:spcAft>
-                <a:spcPts val="600"/>
+                <a:spcPts val="500"/>
               </a:spcAft>
             </a:pPr>
             <a:r>
-              <a:rPr sz="2000" b="1">
+              <a:rPr sz="1700" b="1">
                 <a:solidFill>
                   <a:srgbClr val="222222"/>
                 </a:solidFill>
                 <a:latin typeface="Meiryo"/>
               </a:rPr>
-              <a:t>C# ポートは観測ビット一致 + 物理 1e-7 一致 — 「動くはず」ではなく「同じ」</a:t>
+              <a:t>自車の絶対座標は観測に含まない → コース暗記が不可能 → 汎化の鍵</a:t>
             </a:r>
           </a:p>
           <a:p>
             <a:pPr>
               <a:spcAft>
-                <a:spcPts val="600"/>
+                <a:spcPts val="500"/>
               </a:spcAft>
             </a:pPr>
             <a:r>
-              <a:rPr sz="2000" b="0">
+              <a:rPr sz="1700" b="0">
                 <a:solidFill>
                   <a:srgbClr val="222222"/>
                 </a:solidFill>
                 <a:latin typeface="Meiryo"/>
               </a:rPr>
-              <a:t>再現手順・注意点は CLAUDE.md / re_engine/README.md に集約</a:t>
-            </a:r>
-          </a:p>
+              <a:t>on_road はレーン中心線のトレース (塗りつぶしマスクではない) — C# 移植時の要注意点</a:t>
+            </a:r>
+          </a:p>
+        </p:txBody>
+      </p:sp>
+    </p:spTree>
+  </p:cSld>
+  <p:clrMapOvr>
+    <a:masterClrMapping/>
+  </p:clrMapOvr>
+</p:sld>
+</file>
+
+<file path=ppt/slides/slide12.xml><?xml version="1.0" encoding="utf-8"?>
+<p:sld xmlns:a="http://schemas.openxmlformats.org/drawingml/2006/main" xmlns:p="http://schemas.openxmlformats.org/presentationml/2006/main" xmlns:r="http://schemas.openxmlformats.org/officeDocument/2006/relationships">
+  <p:cSld>
+    <p:spTree>
+      <p:nvGrpSpPr>
+        <p:cNvPr id="1" name=""/>
+        <p:cNvGrpSpPr/>
+        <p:nvPr/>
+      </p:nvGrpSpPr>
+      <p:grpSpPr/>
+      <p:sp>
+        <p:nvSpPr>
+          <p:cNvPr id="2" name="TextBox 1"/>
+          <p:cNvSpPr txBox="1"/>
+          <p:nvPr/>
+        </p:nvSpPr>
+        <p:spPr>
+          <a:xfrm>
+            <a:off x="457200" y="201168"/>
+            <a:ext cx="11247120" cy="777240"/>
+          </a:xfrm>
+          <a:prstGeom prst="rect">
+            <a:avLst/>
+          </a:prstGeom>
+          <a:noFill/>
+        </p:spPr>
+        <p:txBody>
+          <a:bodyPr wrap="none">
+            <a:spAutoFit/>
+          </a:bodyPr>
+          <a:lstStyle/>
+          <a:p>
+            <a:r>
+              <a:rPr sz="2800" b="1">
+                <a:solidFill>
+                  <a:srgbClr val="1B5EA8"/>
+                </a:solidFill>
+                <a:latin typeface="Meiryo"/>
+              </a:rPr>
+              <a:t>進化 (5) トラックを 1 → 5 種に — 汎化学習</a:t>
+            </a:r>
+          </a:p>
+        </p:txBody>
+      </p:sp>
+      <p:pic>
+        <p:nvPicPr>
+          <p:cNvPr id="3" name="Picture 2" descr="track_shapes.png"/>
+          <p:cNvPicPr>
+            <a:picLocks noChangeAspect="1"/>
+          </p:cNvPicPr>
+          <p:nvPr/>
+        </p:nvPicPr>
+        <p:blipFill>
+          <a:blip r:embed="rId3"/>
+          <a:stretch>
+            <a:fillRect/>
+          </a:stretch>
+        </p:blipFill>
+        <p:spPr>
+          <a:xfrm>
+            <a:off x="411480" y="1554480"/>
+            <a:ext cx="11338560" cy="2267712"/>
+          </a:xfrm>
+          <a:prstGeom prst="rect">
+            <a:avLst/>
+          </a:prstGeom>
+        </p:spPr>
+      </p:pic>
+    </p:spTree>
+  </p:cSld>
+  <p:clrMapOvr>
+    <a:masterClrMapping/>
+  </p:clrMapOvr>
+</p:sld>
+</file>
+
+<file path=ppt/slides/slide13.xml><?xml version="1.0" encoding="utf-8"?>
+<p:sld xmlns:a="http://schemas.openxmlformats.org/drawingml/2006/main" xmlns:p="http://schemas.openxmlformats.org/presentationml/2006/main" xmlns:r="http://schemas.openxmlformats.org/officeDocument/2006/relationships">
+  <p:cSld>
+    <p:spTree>
+      <p:nvGrpSpPr>
+        <p:cNvPr id="1" name=""/>
+        <p:cNvGrpSpPr/>
+        <p:nvPr/>
+      </p:nvGrpSpPr>
+      <p:grpSpPr/>
+      <p:sp>
+        <p:nvSpPr>
+          <p:cNvPr id="2" name="TextBox 1"/>
+          <p:cNvSpPr txBox="1"/>
+          <p:nvPr/>
+        </p:nvSpPr>
+        <p:spPr>
+          <a:xfrm>
+            <a:off x="457200" y="201168"/>
+            <a:ext cx="11247120" cy="777240"/>
+          </a:xfrm>
+          <a:prstGeom prst="rect">
+            <a:avLst/>
+          </a:prstGeom>
+          <a:noFill/>
+        </p:spPr>
+        <p:txBody>
+          <a:bodyPr wrap="none">
+            <a:spAutoFit/>
+          </a:bodyPr>
+          <a:lstStyle/>
+          <a:p>
+            <a:r>
+              <a:rPr sz="2800" b="1">
+                <a:solidFill>
+                  <a:srgbClr val="1B5EA8"/>
+                </a:solidFill>
+                <a:latin typeface="Meiryo"/>
+              </a:rPr>
+              <a:t>学習パイプライン — 2 フェーズ PPO と fast-dev の教訓</a:t>
+            </a:r>
+          </a:p>
+        </p:txBody>
+      </p:sp>
+      <p:sp>
+        <p:nvSpPr>
+          <p:cNvPr id="3" name="TextBox 2"/>
+          <p:cNvSpPr txBox="1"/>
+          <p:nvPr/>
+        </p:nvSpPr>
+        <p:spPr>
+          <a:xfrm>
+            <a:off x="548640" y="1280160"/>
+            <a:ext cx="11064240" cy="5394960"/>
+          </a:xfrm>
+          <a:prstGeom prst="rect">
+            <a:avLst/>
+          </a:prstGeom>
+          <a:noFill/>
+        </p:spPr>
+        <p:txBody>
+          <a:bodyPr wrap="square">
+            <a:spAutoFit/>
+          </a:bodyPr>
+          <a:lstStyle/>
           <a:p>
             <a:pPr>
               <a:spcAft>
-                <a:spcPts val="600"/>
+                <a:spcPts val="500"/>
               </a:spcAft>
             </a:pPr>
             <a:r>
-              <a:rPr sz="2000" b="0">
+              <a:rPr sz="1700" b="1">
                 <a:solidFill>
                   <a:srgbClr val="222222"/>
                 </a:solidFill>
                 <a:latin typeface="Meiryo"/>
               </a:rPr>
-              <a:t>次のステップ: RE Engine 内での実走検証、実車ダイナミクスへの適合</a:t>
+              <a:t>2 フェーズ PPO: ①NPC なしレーン追従 (120k〜1M) → ②NPC あり追い越し FT (lr 減)</a:t>
+            </a:r>
+          </a:p>
+          <a:p>
+            <a:pPr>
+              <a:spcAft>
+                <a:spcPts val="500"/>
+              </a:spcAft>
+            </a:pPr>
+            <a:r>
+              <a:rPr sz="1700" b="0">
+                <a:solidFill>
+                  <a:srgbClr val="222222"/>
+                </a:solidFill>
+                <a:latin typeface="Meiryo"/>
+              </a:rPr>
+              <a:t>カスタム CNN (10ch→512) + 初期スロットルバイアス +0.4 (前進探索)</a:t>
+            </a:r>
+          </a:p>
+          <a:p>
+            <a:pPr>
+              <a:spcAft>
+                <a:spcPts val="500"/>
+              </a:spcAft>
+            </a:pPr>
+            <a:r>
+              <a:rPr sz="1700" b="1">
+                <a:solidFill>
+                  <a:srgbClr val="222222"/>
+                </a:solidFill>
+                <a:latin typeface="Meiryo"/>
+              </a:rPr>
+              <a:t>fast-dev の進化: 65k @ ent 0.10 (曲がれない) → 120k @ ent 0.02 本番ハイパラ (37 周)</a:t>
+            </a:r>
+          </a:p>
+          <a:p>
+            <a:pPr lvl="1">
+              <a:spcAft>
+                <a:spcPts val="500"/>
+              </a:spcAft>
+            </a:pPr>
+            <a:r>
+              <a:rPr sz="1500" b="0">
+                <a:solidFill>
+                  <a:srgbClr val="B32D2D"/>
+                </a:solidFill>
+                <a:latin typeface="Meiryo"/>
+              </a:rPr>
+              <a:t>  教訓: 高エントロピーは [0,1] 圧縮報酬下で「ランダムでいる」ことが得になる</a:t>
+            </a:r>
+          </a:p>
+          <a:p>
+            <a:pPr>
+              <a:spcAft>
+                <a:spcPts val="500"/>
+              </a:spcAft>
+            </a:pPr>
+            <a:r>
+              <a:rPr sz="1700" b="0">
+                <a:solidFill>
+                  <a:srgbClr val="222222"/>
+                </a:solidFill>
+                <a:latin typeface="Meiryo"/>
+              </a:rPr>
+              <a:t>EvalCallback ベストモデル採用 (PPO は終盤退行あり) — best/phase1|phase2/</a:t>
+            </a:r>
+          </a:p>
+          <a:p>
+            <a:pPr>
+              <a:spcAft>
+                <a:spcPts val="500"/>
+              </a:spcAft>
+            </a:pPr>
+            <a:r>
+              <a:rPr sz="1700" b="0">
+                <a:solidFill>
+                  <a:srgbClr val="222222"/>
+                </a:solidFill>
+                <a:latin typeface="Meiryo"/>
+              </a:rPr>
+              <a:t>Reward yardstick: 1 周 ≈ 101, アイドル床 ≈ 0.53/step — eval 値を周回数として読む</a:t>
+            </a:r>
+          </a:p>
+        </p:txBody>
+      </p:sp>
+    </p:spTree>
+  </p:cSld>
+  <p:clrMapOvr>
+    <a:masterClrMapping/>
+  </p:clrMapOvr>
+</p:sld>
+</file>
+
+<file path=ppt/slides/slide14.xml><?xml version="1.0" encoding="utf-8"?>
+<p:sld xmlns:a="http://schemas.openxmlformats.org/drawingml/2006/main" xmlns:p="http://schemas.openxmlformats.org/presentationml/2006/main" xmlns:r="http://schemas.openxmlformats.org/officeDocument/2006/relationships">
+  <p:cSld>
+    <p:spTree>
+      <p:nvGrpSpPr>
+        <p:cNvPr id="1" name=""/>
+        <p:cNvGrpSpPr/>
+        <p:nvPr/>
+      </p:nvGrpSpPr>
+      <p:grpSpPr/>
+      <p:sp>
+        <p:nvSpPr>
+          <p:cNvPr id="2" name="TextBox 1"/>
+          <p:cNvSpPr txBox="1"/>
+          <p:nvPr/>
+        </p:nvSpPr>
+        <p:spPr>
+          <a:xfrm>
+            <a:off x="457200" y="201168"/>
+            <a:ext cx="11247120" cy="777240"/>
+          </a:xfrm>
+          <a:prstGeom prst="rect">
+            <a:avLst/>
+          </a:prstGeom>
+          <a:noFill/>
+        </p:spPr>
+        <p:txBody>
+          <a:bodyPr wrap="none">
+            <a:spAutoFit/>
+          </a:bodyPr>
+          <a:lstStyle/>
+          <a:p>
+            <a:r>
+              <a:rPr sz="2800" b="1">
+                <a:solidFill>
+                  <a:srgbClr val="1B5EA8"/>
+                </a:solidFill>
+                <a:latin typeface="Meiryo"/>
+              </a:rPr>
+              <a:t>実ゲームとのギャップを埋める C# 支援クラス</a:t>
+            </a:r>
+          </a:p>
+        </p:txBody>
+      </p:sp>
+      <p:pic>
+        <p:nvPicPr>
+          <p:cNvPr id="3" name="Picture 2" descr="smoothing_effect.png"/>
+          <p:cNvPicPr>
+            <a:picLocks noChangeAspect="1"/>
+          </p:cNvPicPr>
+          <p:nvPr/>
+        </p:nvPicPr>
+        <p:blipFill>
+          <a:blip r:embed="rId3"/>
+          <a:stretch>
+            <a:fillRect/>
+          </a:stretch>
+        </p:blipFill>
+        <p:spPr>
+          <a:xfrm>
+            <a:off x="640080" y="1234440"/>
+            <a:ext cx="6035040" cy="2084832"/>
+          </a:xfrm>
+          <a:prstGeom prst="rect">
+            <a:avLst/>
+          </a:prstGeom>
+        </p:spPr>
+      </p:pic>
+      <p:sp>
+        <p:nvSpPr>
+          <p:cNvPr id="4" name="TextBox 3"/>
+          <p:cNvSpPr txBox="1"/>
+          <p:nvPr/>
+        </p:nvSpPr>
+        <p:spPr>
+          <a:xfrm>
+            <a:off x="6858000" y="1371600"/>
+            <a:ext cx="4937760" cy="5394960"/>
+          </a:xfrm>
+          <a:prstGeom prst="rect">
+            <a:avLst/>
+          </a:prstGeom>
+          <a:noFill/>
+        </p:spPr>
+        <p:txBody>
+          <a:bodyPr wrap="square">
+            <a:spAutoFit/>
+          </a:bodyPr>
+          <a:lstStyle/>
+          <a:p>
+            <a:pPr>
+              <a:spcAft>
+                <a:spcPts val="500"/>
+              </a:spcAft>
+            </a:pPr>
+            <a:r>
+              <a:rPr sz="1400" b="1">
+                <a:solidFill>
+                  <a:srgbClr val="222222"/>
+                </a:solidFill>
+                <a:latin typeface="Meiryo"/>
+              </a:rPr>
+              <a:t>SteeringSmoother: EMA α0.6 — 蛇行 34→12 回/100步</a:t>
+            </a:r>
+          </a:p>
+          <a:p>
+            <a:pPr>
+              <a:spcAft>
+                <a:spcPts val="500"/>
+              </a:spcAft>
+            </a:pPr>
+            <a:r>
+              <a:rPr sz="1400" b="1">
+                <a:solidFill>
+                  <a:srgbClr val="222222"/>
+                </a:solidFill>
+                <a:latin typeface="Meiryo"/>
+              </a:rPr>
+              <a:t>CorneringLimiter: ステア速度制限 + 比例ブレーキ</a:t>
+            </a:r>
+          </a:p>
+          <a:p>
+            <a:pPr lvl="1">
+              <a:spcAft>
+                <a:spcPts val="500"/>
+              </a:spcAft>
+            </a:pPr>
+            <a:r>
+              <a:rPr sz="1200" b="0">
+                <a:solidFill>
+                  <a:srgbClr val="595959"/>
+                </a:solidFill>
+                <a:latin typeface="Meiryo"/>
+              </a:rPr>
+              <a:t>  速度床 5 m/s — 減速はしても停止はしない</a:t>
+            </a:r>
+          </a:p>
+          <a:p>
+            <a:pPr>
+              <a:spcAft>
+                <a:spcPts val="500"/>
+              </a:spcAft>
+            </a:pPr>
+            <a:r>
+              <a:rPr sz="1400" b="1">
+                <a:solidFill>
+                  <a:srgbClr val="222222"/>
+                </a:solidFill>
+                <a:latin typeface="Meiryo"/>
+              </a:rPr>
+              <a:t>StuckRecovery: 移動距離でスタック検出→バック指示</a:t>
+            </a:r>
+          </a:p>
+          <a:p>
+            <a:pPr lvl="1">
+              <a:spcAft>
+                <a:spcPts val="500"/>
+              </a:spcAft>
+            </a:pPr>
+            <a:r>
+              <a:rPr sz="1200" b="0">
+                <a:solidFill>
+                  <a:srgbClr val="595959"/>
+                </a:solidFill>
+                <a:latin typeface="Meiryo"/>
+              </a:rPr>
+              <a:t>  発進の低速と壁刺さりを距離で区別 (レーン不要)</a:t>
+            </a:r>
+          </a:p>
+          <a:p>
+            <a:pPr>
+              <a:spcAft>
+                <a:spcPts val="500"/>
+              </a:spcAft>
+            </a:pPr>
+            <a:r>
+              <a:rPr sz="1400" b="1">
+                <a:solidFill>
+                  <a:srgbClr val="222222"/>
+                </a:solidFill>
+                <a:latin typeface="Meiryo"/>
+              </a:rPr>
+              <a:t>CarController: 学習と同一物理 (Python と 1e-7 一致)</a:t>
+            </a:r>
+          </a:p>
+        </p:txBody>
+      </p:sp>
+    </p:spTree>
+  </p:cSld>
+  <p:clrMapOvr>
+    <a:masterClrMapping/>
+  </p:clrMapOvr>
+</p:sld>
+</file>
+
+<file path=ppt/slides/slide15.xml><?xml version="1.0" encoding="utf-8"?>
+<p:sld xmlns:a="http://schemas.openxmlformats.org/drawingml/2006/main" xmlns:p="http://schemas.openxmlformats.org/presentationml/2006/main" xmlns:r="http://schemas.openxmlformats.org/officeDocument/2006/relationships">
+  <p:cSld>
+    <p:spTree>
+      <p:nvGrpSpPr>
+        <p:cNvPr id="1" name=""/>
+        <p:cNvGrpSpPr/>
+        <p:nvPr/>
+      </p:nvGrpSpPr>
+      <p:grpSpPr/>
+      <p:sp>
+        <p:nvSpPr>
+          <p:cNvPr id="2" name="TextBox 1"/>
+          <p:cNvSpPr txBox="1"/>
+          <p:nvPr/>
+        </p:nvSpPr>
+        <p:spPr>
+          <a:xfrm>
+            <a:off x="457200" y="201168"/>
+            <a:ext cx="11247120" cy="777240"/>
+          </a:xfrm>
+          <a:prstGeom prst="rect">
+            <a:avLst/>
+          </a:prstGeom>
+          <a:noFill/>
+        </p:spPr>
+        <p:txBody>
+          <a:bodyPr wrap="none">
+            <a:spAutoFit/>
+          </a:bodyPr>
+          <a:lstStyle/>
+          <a:p>
+            <a:r>
+              <a:rPr sz="2800" b="1">
+                <a:solidFill>
+                  <a:srgbClr val="1B5EA8"/>
+                </a:solidFill>
+                <a:latin typeface="Meiryo"/>
+              </a:rPr>
+              <a:t>セットアップとノートブックの使い方</a:t>
+            </a:r>
+          </a:p>
+        </p:txBody>
+      </p:sp>
+      <p:sp>
+        <p:nvSpPr>
+          <p:cNvPr id="3" name="TextBox 2"/>
+          <p:cNvSpPr txBox="1"/>
+          <p:nvPr/>
+        </p:nvSpPr>
+        <p:spPr>
+          <a:xfrm>
+            <a:off x="548640" y="1325880"/>
+            <a:ext cx="11064240" cy="5394960"/>
+          </a:xfrm>
+          <a:prstGeom prst="rect">
+            <a:avLst/>
+          </a:prstGeom>
+          <a:noFill/>
+        </p:spPr>
+        <p:txBody>
+          <a:bodyPr wrap="square">
+            <a:spAutoFit/>
+          </a:bodyPr>
+          <a:lstStyle/>
+          <a:p>
+            <a:pPr>
+              <a:spcAft>
+                <a:spcPts val="500"/>
+              </a:spcAft>
+            </a:pPr>
+            <a:r>
+              <a:rPr sz="1700" b="1">
+                <a:solidFill>
+                  <a:srgbClr val="222222"/>
+                </a:solidFill>
+                <a:latin typeface="Meiryo"/>
+              </a:rPr>
+              <a:t>pip install "highway-env&gt;=1.8" "stable-baselines3[extra]&gt;=2.0" gymnasium torch tensorboard moviepy onnx onnxruntime</a:t>
+            </a:r>
+          </a:p>
+          <a:p>
+            <a:pPr lvl="1">
+              <a:spcAft>
+                <a:spcPts val="500"/>
+              </a:spcAft>
+            </a:pPr>
+            <a:r>
+              <a:rPr sz="1500" b="0">
+                <a:solidFill>
+                  <a:srgbClr val="B32D2D"/>
+                </a:solidFill>
+                <a:latin typeface="Meiryo"/>
+              </a:rPr>
+              <a:t>(リポジトリの requirements.txt は旧スタック用 — 使わない)</a:t>
+            </a:r>
+          </a:p>
+          <a:p>
+            <a:pPr>
+              <a:spcAft>
+                <a:spcPts val="500"/>
+              </a:spcAft>
+            </a:pPr>
+            <a:r>
+              <a:rPr sz="1700" b="0">
+                <a:solidFill>
+                  <a:srgbClr val="222222"/>
+                </a:solidFill>
+                <a:latin typeface="Meiryo"/>
+              </a:rPr>
+              <a:t>task2_laning_overtaking_sb3_ppo.ipynb — fast トラック学習</a:t>
+            </a:r>
+          </a:p>
+          <a:p>
+            <a:pPr>
+              <a:spcAft>
+                <a:spcPts val="500"/>
+              </a:spcAft>
+            </a:pPr>
+            <a:r>
+              <a:rPr sz="1700" b="0">
+                <a:solidFill>
+                  <a:srgbClr val="222222"/>
+                </a:solidFill>
+                <a:latin typeface="Meiryo"/>
+              </a:rPr>
+              <a:t>task3_generalization_sb3_ppo.ipynb — random 学習 + トラック別レポート + 5 連動画</a:t>
+            </a:r>
+          </a:p>
+          <a:p>
+            <a:pPr>
+              <a:spcAft>
+                <a:spcPts val="500"/>
+              </a:spcAft>
+            </a:pPr>
+            <a:r>
+              <a:rPr sz="1700" b="1">
+                <a:solidFill>
+                  <a:srgbClr val="222222"/>
+                </a:solidFill>
+                <a:latin typeface="Meiryo"/>
+              </a:rPr>
+              <a:t>FAST_DEV_RUN=True: 12-15 万ステップ (周回到達を実測保証) / False: 本番 100 万+</a:t>
+            </a:r>
+          </a:p>
+          <a:p>
+            <a:pPr>
+              <a:spcAft>
+                <a:spcPts val="500"/>
+              </a:spcAft>
+            </a:pPr>
+            <a:r>
+              <a:rPr sz="1700" b="1">
+                <a:solidFill>
+                  <a:srgbClr val="222222"/>
+                </a:solidFill>
+                <a:latin typeface="Meiryo"/>
+              </a:rPr>
+              <a:t>Presentation Media セル: 学習曲線・軌跡・5 トラック動画を生成し VIDEO_DIR に保存</a:t>
+            </a:r>
+          </a:p>
+          <a:p>
+            <a:pPr>
+              <a:spcAft>
+                <a:spcPts val="500"/>
+              </a:spcAft>
+            </a:pPr>
+            <a:r>
+              <a:rPr sz="1700" b="0">
+                <a:solidFill>
+                  <a:srgbClr val="222222"/>
+                </a:solidFill>
+                <a:latin typeface="Meiryo"/>
+              </a:rPr>
+              <a:t>検証: cd re_engine/verify &amp;&amp; dotnet run -- ..  → ALL SCENARIOS MATCH</a:t>
+            </a:r>
+          </a:p>
+        </p:txBody>
+      </p:sp>
+    </p:spTree>
+  </p:cSld>
+  <p:clrMapOvr>
+    <a:masterClrMapping/>
+  </p:clrMapOvr>
+</p:sld>
+</file>
+
+<file path=ppt/slides/slide16.xml><?xml version="1.0" encoding="utf-8"?>
+<p:sld xmlns:a="http://schemas.openxmlformats.org/drawingml/2006/main" xmlns:p="http://schemas.openxmlformats.org/presentationml/2006/main" xmlns:r="http://schemas.openxmlformats.org/officeDocument/2006/relationships">
+  <p:cSld>
+    <p:spTree>
+      <p:nvGrpSpPr>
+        <p:cNvPr id="1" name=""/>
+        <p:cNvGrpSpPr/>
+        <p:nvPr/>
+      </p:nvGrpSpPr>
+      <p:grpSpPr/>
+      <p:sp>
+        <p:nvSpPr>
+          <p:cNvPr id="2" name="TextBox 1"/>
+          <p:cNvSpPr txBox="1"/>
+          <p:nvPr/>
+        </p:nvSpPr>
+        <p:spPr>
+          <a:xfrm>
+            <a:off x="457200" y="201168"/>
+            <a:ext cx="11247120" cy="777240"/>
+          </a:xfrm>
+          <a:prstGeom prst="rect">
+            <a:avLst/>
+          </a:prstGeom>
+          <a:noFill/>
+        </p:spPr>
+        <p:txBody>
+          <a:bodyPr wrap="none">
+            <a:spAutoFit/>
+          </a:bodyPr>
+          <a:lstStyle/>
+          <a:p>
+            <a:r>
+              <a:rPr sz="2800" b="1">
+                <a:solidFill>
+                  <a:srgbClr val="1B5EA8"/>
+                </a:solidFill>
+                <a:latin typeface="Meiryo"/>
+              </a:rPr>
+              <a:t>エクスポートツールと ONNX の注意点</a:t>
+            </a:r>
+          </a:p>
+        </p:txBody>
+      </p:sp>
+      <p:sp>
+        <p:nvSpPr>
+          <p:cNvPr id="3" name="TextBox 2"/>
+          <p:cNvSpPr txBox="1"/>
+          <p:nvPr/>
+        </p:nvSpPr>
+        <p:spPr>
+          <a:xfrm>
+            <a:off x="548640" y="1325880"/>
+            <a:ext cx="11064240" cy="5394960"/>
+          </a:xfrm>
+          <a:prstGeom prst="rect">
+            <a:avLst/>
+          </a:prstGeom>
+          <a:noFill/>
+        </p:spPr>
+        <p:txBody>
+          <a:bodyPr wrap="square">
+            <a:spAutoFit/>
+          </a:bodyPr>
+          <a:lstStyle/>
+          <a:p>
+            <a:pPr>
+              <a:spcAft>
+                <a:spcPts val="500"/>
+              </a:spcAft>
+            </a:pPr>
+            <a:r>
+              <a:rPr sz="1700" b="1">
+                <a:solidFill>
+                  <a:srgbClr val="222222"/>
+                </a:solidFill>
+                <a:latin typeface="Meiryo"/>
+              </a:rPr>
+              <a:t>python export_onnx.py &lt;model.zip&gt; -m 3   # エンジン用 NHWC [1,12,12,10] (推奨)</a:t>
+            </a:r>
+          </a:p>
+          <a:p>
+            <a:pPr lvl="1">
+              <a:spcAft>
+                <a:spcPts val="500"/>
+              </a:spcAft>
+            </a:pPr>
+            <a:r>
+              <a:rPr sz="1500" b="0">
+                <a:solidFill>
+                  <a:srgbClr val="595959"/>
+                </a:solidFill>
+                <a:latin typeface="Meiryo"/>
+              </a:rPr>
+              <a:t>  -m 1: full policy / 2: actor CHW / 3: actor NHWC / 0: 全部 — 各エクスポートは torch と自動照合</a:t>
+            </a:r>
+          </a:p>
+          <a:p>
+            <a:pPr>
+              <a:spcAft>
+                <a:spcPts val="500"/>
+              </a:spcAft>
+            </a:pPr>
+            <a:r>
+              <a:rPr sz="1700" b="0">
+                <a:solidFill>
+                  <a:srgbClr val="222222"/>
+                </a:solidFill>
+                <a:latin typeface="Meiryo"/>
+              </a:rPr>
+              <a:t>python re_engine/convert_onnx_nhwc.py &lt;actor.onnx&gt;   # 既存 CHW を NHWC 化</a:t>
+            </a:r>
+          </a:p>
+          <a:p>
+            <a:pPr>
+              <a:spcAft>
+                <a:spcPts val="500"/>
+              </a:spcAft>
+            </a:pPr>
+            <a:r>
+              <a:rPr sz="1700" b="0">
+                <a:solidFill>
+                  <a:srgbClr val="222222"/>
+                </a:solidFill>
+                <a:latin typeface="Meiryo"/>
+              </a:rPr>
+              <a:t>python re_engine/export_track_json.py   # トラック/観測変更後に参照データ再生成</a:t>
+            </a:r>
+          </a:p>
+          <a:p>
+            <a:pPr>
+              <a:spcAft>
+                <a:spcPts val="500"/>
+              </a:spcAft>
+            </a:pPr>
+            <a:r>
+              <a:rPr sz="1700" b="1">
+                <a:solidFill>
+                  <a:srgbClr val="B32D2D"/>
+                </a:solidFill>
+                <a:latin typeface="Meiryo"/>
+              </a:rPr>
+              <a:t>症状で覚える: 出力がほぼ一定 (throttle≈0.4, steer≈0.2) = レイアウト不一致</a:t>
+            </a:r>
+          </a:p>
+          <a:p>
+            <a:pPr>
+              <a:spcAft>
+                <a:spcPts val="500"/>
+              </a:spcAft>
+            </a:pPr>
+            <a:r>
+              <a:rPr sz="1700" b="0">
+                <a:solidFill>
+                  <a:srgbClr val="222222"/>
+                </a:solidFill>
+                <a:latin typeface="Meiryo"/>
+              </a:rPr>
+              <a:t>定数同期: accel/steer レンジ・5 Hz・グリッド設定は C# に複製 — 変更時は 4 点セット</a:t>
+            </a:r>
+          </a:p>
+          <a:p>
+            <a:pPr>
+              <a:spcAft>
+                <a:spcPts val="500"/>
+              </a:spcAft>
+            </a:pPr>
+            <a:r>
+              <a:rPr sz="1700" b="0">
+                <a:solidFill>
+                  <a:srgbClr val="222222"/>
+                </a:solidFill>
+                <a:latin typeface="Meiryo"/>
+              </a:rPr>
+              <a:t>単位は全て m/s・m・rad。km/h の Vector3 は KphToMs で変換 (kph 直入れは無警告で劣化)</a:t>
+            </a:r>
+          </a:p>
+        </p:txBody>
+      </p:sp>
+    </p:spTree>
+  </p:cSld>
+  <p:clrMapOvr>
+    <a:masterClrMapping/>
+  </p:clrMapOvr>
+</p:sld>
+</file>
+
+<file path=ppt/slides/slide17.xml><?xml version="1.0" encoding="utf-8"?>
+<p:sld xmlns:a="http://schemas.openxmlformats.org/drawingml/2006/main" xmlns:p="http://schemas.openxmlformats.org/presentationml/2006/main" xmlns:r="http://schemas.openxmlformats.org/officeDocument/2006/relationships">
+  <p:cSld>
+    <p:spTree>
+      <p:nvGrpSpPr>
+        <p:cNvPr id="1" name=""/>
+        <p:cNvGrpSpPr/>
+        <p:nvPr/>
+      </p:nvGrpSpPr>
+      <p:grpSpPr/>
+      <p:sp>
+        <p:nvSpPr>
+          <p:cNvPr id="2" name="TextBox 1"/>
+          <p:cNvSpPr txBox="1"/>
+          <p:nvPr/>
+        </p:nvSpPr>
+        <p:spPr>
+          <a:xfrm>
+            <a:off x="457200" y="201168"/>
+            <a:ext cx="11247120" cy="777240"/>
+          </a:xfrm>
+          <a:prstGeom prst="rect">
+            <a:avLst/>
+          </a:prstGeom>
+          <a:noFill/>
+        </p:spPr>
+        <p:txBody>
+          <a:bodyPr wrap="none">
+            <a:spAutoFit/>
+          </a:bodyPr>
+          <a:lstStyle/>
+          <a:p>
+            <a:r>
+              <a:rPr sz="2800" b="1">
+                <a:solidFill>
+                  <a:srgbClr val="1B5EA8"/>
+                </a:solidFill>
+                <a:latin typeface="Meiryo"/>
+              </a:rPr>
+              <a:t>まとめ — 環境設計こそが学習を決める</a:t>
+            </a:r>
+          </a:p>
+        </p:txBody>
+      </p:sp>
+      <p:sp>
+        <p:nvSpPr>
+          <p:cNvPr id="3" name="TextBox 2"/>
+          <p:cNvSpPr txBox="1"/>
+          <p:nvPr/>
+        </p:nvSpPr>
+        <p:spPr>
+          <a:xfrm>
+            <a:off x="548640" y="1417320"/>
+            <a:ext cx="11064240" cy="5394960"/>
+          </a:xfrm>
+          <a:prstGeom prst="rect">
+            <a:avLst/>
+          </a:prstGeom>
+          <a:noFill/>
+        </p:spPr>
+        <p:txBody>
+          <a:bodyPr wrap="square">
+            <a:spAutoFit/>
+          </a:bodyPr>
+          <a:lstStyle/>
+          <a:p>
+            <a:pPr>
+              <a:spcAft>
+                <a:spcPts val="500"/>
+              </a:spcAft>
+            </a:pPr>
+            <a:r>
+              <a:rPr sz="1900" b="1">
+                <a:solidFill>
+                  <a:srgbClr val="222222"/>
+                </a:solidFill>
+                <a:latin typeface="Meiryo"/>
+              </a:rPr>
+              <a:t>デフォルト racetrack → ゲーム環境へ: 行動・壁・報酬・観測・トラックを段階的に進化</a:t>
+            </a:r>
+          </a:p>
+          <a:p>
+            <a:pPr>
+              <a:spcAft>
+                <a:spcPts val="500"/>
+              </a:spcAft>
+            </a:pPr>
+            <a:r>
+              <a:rPr sz="1900" b="1">
+                <a:solidFill>
+                  <a:srgbClr val="222222"/>
+                </a:solidFill>
+                <a:latin typeface="Meiryo"/>
+              </a:rPr>
+              <a:t>抜け道 (ショートカット / wall-riding / 壁這い) を報酬の経済設計で排除 → 6 万ステップで周回</a:t>
+            </a:r>
+          </a:p>
+          <a:p>
+            <a:pPr>
+              <a:spcAft>
+                <a:spcPts val="500"/>
+              </a:spcAft>
+            </a:pPr>
+            <a:r>
+              <a:rPr sz="1900" b="1">
+                <a:solidFill>
+                  <a:srgbClr val="222222"/>
+                </a:solidFill>
+                <a:latin typeface="Meiryo"/>
+              </a:rPr>
+              <a:t>自己位置を観測に入れない設計が 5 コース汎化を生んだ</a:t>
+            </a:r>
+          </a:p>
+          <a:p>
+            <a:pPr>
+              <a:spcAft>
+                <a:spcPts val="500"/>
+              </a:spcAft>
+            </a:pPr>
+            <a:r>
+              <a:rPr sz="1900" b="0">
+                <a:solidFill>
+                  <a:srgbClr val="222222"/>
+                </a:solidFill>
+                <a:latin typeface="Meiryo"/>
+              </a:rPr>
+              <a:t>C# ポートは観測ビット一致 + 物理 1e-7 一致 — 「動くはず」ではなく「同じ」</a:t>
+            </a:r>
+          </a:p>
+          <a:p>
+            <a:pPr>
+              <a:spcAft>
+                <a:spcPts val="500"/>
+              </a:spcAft>
+            </a:pPr>
+            <a:r>
+              <a:rPr sz="1900" b="0">
+                <a:solidFill>
+                  <a:srgbClr val="222222"/>
+                </a:solidFill>
+                <a:latin typeface="Meiryo"/>
+              </a:rPr>
+              <a:t>媒体生成コードはすべてノートブック内 (Presentation Media セル) — 本スライドは再現可能</a:t>
+            </a:r>
+          </a:p>
+          <a:p>
+            <a:pPr>
+              <a:spcAft>
+                <a:spcPts val="500"/>
+              </a:spcAft>
+            </a:pPr>
+            <a:r>
+              <a:rPr sz="1900" b="0">
+                <a:solidFill>
+                  <a:srgbClr val="222222"/>
+                </a:solidFill>
+                <a:latin typeface="Meiryo"/>
+              </a:rPr>
+              <a:t>次のステップ: RE Engine 実走検証・実車ダイナミクス適合・NPC レース</a:t>
             </a:r>
           </a:p>
         </p:txBody>
@@ -4658,8 +6063,8 @@
         </p:nvSpPr>
         <p:spPr>
           <a:xfrm>
-            <a:off x="457200" y="228600"/>
-            <a:ext cx="11247120" cy="822960"/>
+            <a:off x="457200" y="201168"/>
+            <a:ext cx="11247120" cy="777240"/>
           </a:xfrm>
           <a:prstGeom prst="rect">
             <a:avLst/>
@@ -4673,141 +6078,101 @@
           <a:lstStyle/>
           <a:p>
             <a:r>
-              <a:rPr sz="3000" b="1">
+              <a:rPr sz="2800" b="1">
                 <a:solidFill>
                   <a:srgbClr val="1B5EA8"/>
                 </a:solidFill>
                 <a:latin typeface="Meiryo"/>
               </a:rPr>
-              <a:t>結果ハイライト</a:t>
-            </a:r>
-          </a:p>
-        </p:txBody>
-      </p:sp>
-      <p:sp>
-        <p:nvSpPr>
-          <p:cNvPr id="3" name="TextBox 2"/>
-          <p:cNvSpPr txBox="1"/>
+              <a:t>まず結果から — 1 つの方策で 5 トラック同時走行</a:t>
+            </a:r>
+          </a:p>
+        </p:txBody>
+      </p:sp>
+      <p:pic>
+        <p:nvPicPr>
+          <p:cNvPr id="3" name="Picture 2" descr="gen_tracks_grid.png"/>
+          <p:cNvPicPr>
+            <a:picLocks noChangeAspect="1"/>
+          </p:cNvPicPr>
           <p:nvPr/>
-        </p:nvSpPr>
+        </p:nvPicPr>
+        <p:blipFill>
+          <a:blip r:embed="rId3"/>
+          <a:stretch>
+            <a:fillRect/>
+          </a:stretch>
+        </p:blipFill>
         <p:spPr>
           <a:xfrm>
-            <a:off x="548640" y="1371600"/>
-            <a:ext cx="11064240" cy="5120640"/>
+            <a:off x="411480" y="1143000"/>
+            <a:ext cx="11338560" cy="2789689"/>
           </a:xfrm>
           <a:prstGeom prst="rect">
             <a:avLst/>
           </a:prstGeom>
-          <a:noFill/>
         </p:spPr>
-        <p:txBody>
-          <a:bodyPr wrap="square">
-            <a:spAutoFit/>
-          </a:bodyPr>
-          <a:lstStyle/>
-          <a:p>
-            <a:pPr>
-              <a:spcAft>
-                <a:spcPts val="600"/>
-              </a:spcAft>
-            </a:pPr>
-            <a:r>
-              <a:rPr sz="2000" b="1">
-                <a:solidFill>
-                  <a:srgbClr val="222222"/>
-                </a:solidFill>
-                <a:latin typeface="Meiryo"/>
-              </a:rPr>
-              <a:t>37 周 / 800 秒エピソード・16 m/s (制限速度) で無衝突 — fast トラック</a:t>
-            </a:r>
-          </a:p>
-          <a:p>
-            <a:pPr>
-              <a:spcAft>
-                <a:spcPts val="600"/>
-              </a:spcAft>
-            </a:pPr>
-            <a:r>
-              <a:rPr sz="2000" b="0">
-                <a:solidFill>
-                  <a:srgbClr val="222222"/>
-                </a:solidFill>
-                <a:latin typeface="Meiryo"/>
-              </a:rPr>
-              <a:t>周回能力は 3〜6 万ステップで獲得 (実測) — fast-dev (12万) でも確実に周回</a:t>
-            </a:r>
-          </a:p>
-          <a:p>
-            <a:pPr>
-              <a:spcAft>
-                <a:spcPts val="600"/>
-              </a:spcAft>
-            </a:pPr>
-            <a:r>
-              <a:rPr sz="2000" b="1">
-                <a:solidFill>
-                  <a:srgbClr val="222222"/>
-                </a:solidFill>
-                <a:latin typeface="Meiryo"/>
-              </a:rPr>
-              <a:t>汎化モデル: 1 つの方策で 5 トラックすべてを 2 分間ノーミス走行</a:t>
-            </a:r>
-          </a:p>
-          <a:p>
-            <a:pPr>
-              <a:spcAft>
-                <a:spcPts val="600"/>
-              </a:spcAft>
-            </a:pPr>
-            <a:r>
-              <a:rPr sz="2000" b="0">
-                <a:solidFill>
-                  <a:srgbClr val="222222"/>
-                </a:solidFill>
-                <a:latin typeface="Meiryo"/>
-              </a:rPr>
-              <a:t>ゼロショット転移: fast のみで学習した方策が他 4 トラックも制限速度で走行</a:t>
-            </a:r>
-          </a:p>
-          <a:p>
-            <a:pPr>
-              <a:spcAft>
-                <a:spcPts val="600"/>
-              </a:spcAft>
-            </a:pPr>
-            <a:r>
-              <a:rPr sz="2000" b="1">
-                <a:solidFill>
-                  <a:srgbClr val="222222"/>
-                </a:solidFill>
-                <a:latin typeface="Meiryo"/>
-              </a:rPr>
-              <a:t>C# 観測ポート: Python とビット一致 (maxDiff = 0.0) を検証ハーネスで保証</a:t>
-            </a:r>
-          </a:p>
-          <a:p>
-            <a:pPr>
-              <a:spcAft>
-                <a:spcPts val="600"/>
-              </a:spcAft>
-            </a:pPr>
-            <a:r>
-              <a:rPr sz="2000" b="0">
-                <a:solidFill>
-                  <a:srgbClr val="222222"/>
-                </a:solidFill>
-                <a:latin typeface="Meiryo"/>
-              </a:rPr>
-              <a:t>ONNX 3 種 (full / actor CHW / actor NHWC) をエクスポート、エンジンは NHWC を使用</a:t>
-            </a:r>
-          </a:p>
-        </p:txBody>
-      </p:sp>
+      </p:pic>
+      <p:pic>
+        <p:nvPicPr>
+          <p:cNvPr id="4" name="gen_all_tracks.mp4">
+            <a:hlinkClick r:id="" action="ppaction://media"/>
+          </p:cNvPr>
+          <p:cNvPicPr>
+            <a:picLocks noChangeAspect="1"/>
+          </p:cNvPicPr>
+          <p:nvPr>
+            <a:videoFile r:link="rId5"/>
+            <p:extLst>
+              <p:ext uri="{DAA4B4D4-6D71-4841-9C94-3DE7FCFB9230}">
+                <p14:media xmlns:p14="http://schemas.microsoft.com/office/powerpoint/2010/main" r:embed="rId4"/>
+              </p:ext>
+            </p:extLst>
+          </p:nvPr>
+        </p:nvPicPr>
+        <p:blipFill>
+          <a:blip r:embed="rId3"/>
+          <a:stretch>
+            <a:fillRect/>
+          </a:stretch>
+        </p:blipFill>
+        <p:spPr>
+          <a:xfrm>
+            <a:off x="2651760" y="3977639"/>
+            <a:ext cx="6858000" cy="2057400"/>
+          </a:xfrm>
+          <a:prstGeom prst="rect">
+            <a:avLst/>
+          </a:prstGeom>
+        </p:spPr>
+      </p:pic>
     </p:spTree>
   </p:cSld>
   <p:clrMapOvr>
     <a:masterClrMapping/>
   </p:clrMapOvr>
+  <p:timing>
+    <p:tnLst>
+      <p:par>
+        <p:cTn id="1" dur="indefinite" restart="never" nodeType="tmRoot">
+          <p:childTnLst>
+            <p:video>
+              <p:cMediaNode vol="80000">
+                <p:cTn id="2" fill="hold" display="0">
+                  <p:stCondLst>
+                    <p:cond delay="indefinite"/>
+                  </p:stCondLst>
+                </p:cTn>
+                <p:tgtEl>
+                  <p:spTgt spid="4"/>
+                </p:tgtEl>
+              </p:cMediaNode>
+            </p:video>
+          </p:childTnLst>
+        </p:cTn>
+      </p:par>
+    </p:tnLst>
+  </p:timing>
 </p:sld>
 </file>
 
@@ -4829,8 +6194,8 @@
         </p:nvSpPr>
         <p:spPr>
           <a:xfrm>
-            <a:off x="457200" y="228600"/>
-            <a:ext cx="11247120" cy="822960"/>
+            <a:off x="457200" y="201168"/>
+            <a:ext cx="11247120" cy="777240"/>
           </a:xfrm>
           <a:prstGeom prst="rect">
             <a:avLst/>
@@ -4844,13 +6209,13 @@
           <a:lstStyle/>
           <a:p>
             <a:r>
-              <a:rPr sz="3000" b="1">
+              <a:rPr sz="2800" b="1">
                 <a:solidFill>
                   <a:srgbClr val="1B5EA8"/>
                 </a:solidFill>
                 <a:latin typeface="Meiryo"/>
               </a:rPr>
-              <a:t>学習曲線 — 周回数 vs 学習ステップ</a:t>
+              <a:t>学習曲線 — 周回能力は 3〜6 万ステップで立ち上がる</a:t>
             </a:r>
           </a:p>
         </p:txBody>
@@ -4871,8 +6236,8 @@
         </p:blipFill>
         <p:spPr>
           <a:xfrm>
-            <a:off x="2377440" y="1234440"/>
-            <a:ext cx="7498079" cy="4198924"/>
+            <a:off x="2468880" y="1234440"/>
+            <a:ext cx="7315200" cy="4096512"/>
           </a:xfrm>
           <a:prstGeom prst="rect">
             <a:avLst/>
@@ -4905,8 +6270,8 @@
         </p:nvSpPr>
         <p:spPr>
           <a:xfrm>
-            <a:off x="457200" y="228600"/>
-            <a:ext cx="11247120" cy="822960"/>
+            <a:off x="457200" y="201168"/>
+            <a:ext cx="11247120" cy="777240"/>
           </a:xfrm>
           <a:prstGeom prst="rect">
             <a:avLst/>
@@ -4920,13 +6285,13 @@
           <a:lstStyle/>
           <a:p>
             <a:r>
-              <a:rPr sz="3000" b="1">
+              <a:rPr sz="2800" b="1">
                 <a:solidFill>
                   <a:srgbClr val="1B5EA8"/>
                 </a:solidFill>
                 <a:latin typeface="Meiryo"/>
               </a:rPr>
-              <a:t>走行軌跡 — fast トラック (fast-dev モデル)</a:t>
+              <a:t>走行軌跡 — 減速と立ち上がりの質</a:t>
             </a:r>
           </a:p>
         </p:txBody>
@@ -4981,8 +6346,8 @@
         </p:nvSpPr>
         <p:spPr>
           <a:xfrm>
-            <a:off x="457200" y="228600"/>
-            <a:ext cx="11247120" cy="822960"/>
+            <a:off x="457200" y="201168"/>
+            <a:ext cx="11247120" cy="777240"/>
           </a:xfrm>
           <a:prstGeom prst="rect">
             <a:avLst/>
@@ -4996,101 +6361,141 @@
           <a:lstStyle/>
           <a:p>
             <a:r>
-              <a:rPr sz="3000" b="1">
+              <a:rPr sz="2800" b="1">
                 <a:solidFill>
                   <a:srgbClr val="1B5EA8"/>
                 </a:solidFill>
                 <a:latin typeface="Meiryo"/>
               </a:rPr>
-              <a:t>汎化モデル — 1 つの方策で 5 トラック</a:t>
-            </a:r>
-          </a:p>
-        </p:txBody>
-      </p:sp>
-      <p:pic>
-        <p:nvPicPr>
-          <p:cNvPr id="3" name="Picture 2" descr="gen_tracks_grid.png"/>
-          <p:cNvPicPr>
-            <a:picLocks noChangeAspect="1"/>
-          </p:cNvPicPr>
+              <a:t>結果サマリ (すべて実測値)</a:t>
+            </a:r>
+          </a:p>
+        </p:txBody>
+      </p:sp>
+      <p:sp>
+        <p:nvSpPr>
+          <p:cNvPr id="3" name="TextBox 2"/>
+          <p:cNvSpPr txBox="1"/>
           <p:nvPr/>
-        </p:nvPicPr>
-        <p:blipFill>
-          <a:blip r:embed="rId3"/>
-          <a:stretch>
-            <a:fillRect/>
-          </a:stretch>
-        </p:blipFill>
+        </p:nvSpPr>
         <p:spPr>
           <a:xfrm>
-            <a:off x="411480" y="1371600"/>
-            <a:ext cx="11338560" cy="2789689"/>
+            <a:off x="548640" y="1325880"/>
+            <a:ext cx="11064240" cy="5394960"/>
           </a:xfrm>
           <a:prstGeom prst="rect">
             <a:avLst/>
           </a:prstGeom>
+          <a:noFill/>
         </p:spPr>
-      </p:pic>
-      <p:pic>
-        <p:nvPicPr>
-          <p:cNvPr id="4" name="gen_all_tracks.mp4">
-            <a:hlinkClick r:id="" action="ppaction://media"/>
-          </p:cNvPr>
-          <p:cNvPicPr>
-            <a:picLocks noChangeAspect="1"/>
-          </p:cNvPicPr>
-          <p:nvPr>
-            <a:videoFile r:link="rId5"/>
-            <p:extLst>
-              <p:ext uri="{DAA4B4D4-6D71-4841-9C94-3DE7FCFB9230}">
-                <p14:media xmlns:p14="http://schemas.microsoft.com/office/powerpoint/2010/main" r:embed="rId4"/>
-              </p:ext>
-            </p:extLst>
-          </p:nvPr>
-        </p:nvPicPr>
-        <p:blipFill>
-          <a:blip r:embed="rId3"/>
-          <a:stretch>
-            <a:fillRect/>
-          </a:stretch>
-        </p:blipFill>
-        <p:spPr>
-          <a:xfrm>
-            <a:off x="3566160" y="4206240"/>
-            <a:ext cx="5029200" cy="1508760"/>
-          </a:xfrm>
-          <a:prstGeom prst="rect">
-            <a:avLst/>
-          </a:prstGeom>
-        </p:spPr>
-      </p:pic>
+        <p:txBody>
+          <a:bodyPr wrap="square">
+            <a:spAutoFit/>
+          </a:bodyPr>
+          <a:lstStyle/>
+          <a:p>
+            <a:pPr>
+              <a:spcAft>
+                <a:spcPts val="500"/>
+              </a:spcAft>
+            </a:pPr>
+            <a:r>
+              <a:rPr sz="1900" b="1">
+                <a:solidFill>
+                  <a:srgbClr val="222222"/>
+                </a:solidFill>
+                <a:latin typeface="Meiryo"/>
+              </a:rPr>
+              <a:t>fast トラック: 37 周 / 800 秒・16 m/s (制限速度)・無衝突</a:t>
+            </a:r>
+          </a:p>
+          <a:p>
+            <a:pPr>
+              <a:spcAft>
+                <a:spcPts val="500"/>
+              </a:spcAft>
+            </a:pPr>
+            <a:r>
+              <a:rPr sz="1900" b="0">
+                <a:solidFill>
+                  <a:srgbClr val="222222"/>
+                </a:solidFill>
+                <a:latin typeface="Meiryo"/>
+              </a:rPr>
+              <a:t>周回能力の獲得: 3〜6 万ステップ (6 万で 32 周 → 9 万で 36 周)</a:t>
+            </a:r>
+          </a:p>
+          <a:p>
+            <a:pPr>
+              <a:spcAft>
+                <a:spcPts val="500"/>
+              </a:spcAft>
+            </a:pPr>
+            <a:r>
+              <a:rPr sz="1900" b="0">
+                <a:solidFill>
+                  <a:srgbClr val="222222"/>
+                </a:solidFill>
+                <a:latin typeface="Meiryo"/>
+              </a:rPr>
+              <a:t>fast-dev (12 万, 本番ハイパラ): フェーズ 2 (NPC あり lr 3e-4) 込みで 37 周 — 退行なし</a:t>
+            </a:r>
+          </a:p>
+          <a:p>
+            <a:pPr>
+              <a:spcAft>
+                <a:spcPts val="500"/>
+              </a:spcAft>
+            </a:pPr>
+            <a:r>
+              <a:rPr sz="1900" b="1">
+                <a:solidFill>
+                  <a:srgbClr val="222222"/>
+                </a:solidFill>
+                <a:latin typeface="Meiryo"/>
+              </a:rPr>
+              <a:t>汎化モデル (random 学習 15 万): 5 トラックすべて 2 分間ノーミス・平均 15.7 m/s</a:t>
+            </a:r>
+          </a:p>
+          <a:p>
+            <a:pPr>
+              <a:spcAft>
+                <a:spcPts val="500"/>
+              </a:spcAft>
+            </a:pPr>
+            <a:r>
+              <a:rPr sz="1900" b="0">
+                <a:solidFill>
+                  <a:srgbClr val="222222"/>
+                </a:solidFill>
+                <a:latin typeface="Meiryo"/>
+              </a:rPr>
+              <a:t>ゼロショット転移: fast 専用モデルも他 4 コースを制限速度で走行 (自己位置非観測が鍵)</a:t>
+            </a:r>
+          </a:p>
+          <a:p>
+            <a:pPr>
+              <a:spcAft>
+                <a:spcPts val="500"/>
+              </a:spcAft>
+            </a:pPr>
+            <a:r>
+              <a:rPr sz="1900" b="1">
+                <a:solidFill>
+                  <a:srgbClr val="222222"/>
+                </a:solidFill>
+                <a:latin typeface="Meiryo"/>
+              </a:rPr>
+              <a:t>C# デプロイ: 観測ビット一致 (maxDiff=0.0) + 車両物理 1e-7 一致 — 検証ハーネスで自動確認</a:t>
+            </a:r>
+          </a:p>
+        </p:txBody>
+      </p:sp>
     </p:spTree>
   </p:cSld>
   <p:clrMapOvr>
     <a:masterClrMapping/>
   </p:clrMapOvr>
-  <p:timing>
-    <p:tnLst>
-      <p:par>
-        <p:cTn id="1" dur="indefinite" restart="never" nodeType="tmRoot">
-          <p:childTnLst>
-            <p:video>
-              <p:cMediaNode vol="80000">
-                <p:cTn id="2" fill="hold" display="0">
-                  <p:stCondLst>
-                    <p:cond delay="indefinite"/>
-                  </p:stCondLst>
-                </p:cTn>
-                <p:tgtEl>
-                  <p:spTgt spid="4"/>
-                </p:tgtEl>
-              </p:cMediaNode>
-            </p:video>
-          </p:childTnLst>
-        </p:cTn>
-      </p:par>
-    </p:tnLst>
-  </p:timing>
 </p:sld>
 </file>
 
@@ -5112,8 +6517,8 @@
         </p:nvSpPr>
         <p:spPr>
           <a:xfrm>
-            <a:off x="457200" y="228600"/>
-            <a:ext cx="11247120" cy="822960"/>
+            <a:off x="457200" y="201168"/>
+            <a:ext cx="11247120" cy="777240"/>
           </a:xfrm>
           <a:prstGeom prst="rect">
             <a:avLst/>
@@ -5127,41 +6532,152 @@
           <a:lstStyle/>
           <a:p>
             <a:r>
-              <a:rPr sz="3000" b="1">
+              <a:rPr sz="2800" b="1">
                 <a:solidFill>
                   <a:srgbClr val="1B5EA8"/>
                 </a:solidFill>
                 <a:latin typeface="Meiryo"/>
               </a:rPr>
-              <a:t>学習トラック一覧 (race_env.py)</a:t>
-            </a:r>
-          </a:p>
-        </p:txBody>
-      </p:sp>
-      <p:pic>
-        <p:nvPicPr>
-          <p:cNvPr id="3" name="Picture 2" descr="track_shapes.png"/>
-          <p:cNvPicPr>
-            <a:picLocks noChangeAspect="1"/>
-          </p:cNvPicPr>
+              <a:t>ベースライン: highway-env の racetrack 環境 (デフォルト設定)</a:t>
+            </a:r>
+          </a:p>
+        </p:txBody>
+      </p:sp>
+      <p:sp>
+        <p:nvSpPr>
+          <p:cNvPr id="3" name="TextBox 2"/>
+          <p:cNvSpPr txBox="1"/>
           <p:nvPr/>
-        </p:nvPicPr>
-        <p:blipFill>
-          <a:blip r:embed="rId3"/>
-          <a:stretch>
-            <a:fillRect/>
-          </a:stretch>
-        </p:blipFill>
+        </p:nvSpPr>
         <p:spPr>
           <a:xfrm>
-            <a:off x="411480" y="1737360"/>
-            <a:ext cx="11338560" cy="2267712"/>
+            <a:off x="548640" y="1280160"/>
+            <a:ext cx="11064240" cy="5394960"/>
           </a:xfrm>
           <a:prstGeom prst="rect">
             <a:avLst/>
           </a:prstGeom>
+          <a:noFill/>
         </p:spPr>
-      </p:pic>
+        <p:txBody>
+          <a:bodyPr wrap="square">
+            <a:spAutoFit/>
+          </a:bodyPr>
+          <a:lstStyle/>
+          <a:p>
+            <a:pPr>
+              <a:spcAft>
+                <a:spcPts val="500"/>
+              </a:spcAft>
+            </a:pPr>
+            <a:r>
+              <a:rPr sz="1700" b="1">
+                <a:solidFill>
+                  <a:srgbClr val="222222"/>
+                </a:solidFill>
+                <a:latin typeface="Meiryo"/>
+              </a:rPr>
+              <a:t>行動: ステアリングのみ (longitudinal=False)。速度は離散 target_speeds [0, 5, 10] から選択</a:t>
+            </a:r>
+          </a:p>
+          <a:p>
+            <a:pPr>
+              <a:spcAft>
+                <a:spcPts val="500"/>
+              </a:spcAft>
+            </a:pPr>
+            <a:r>
+              <a:rPr sz="1700" b="1">
+                <a:solidFill>
+                  <a:srgbClr val="222222"/>
+                </a:solidFill>
+                <a:latin typeface="Meiryo"/>
+              </a:rPr>
+              <a:t>観測: OccupancyGrid 2ch (presence / on_road) のみ、±18 m の対称視野</a:t>
+            </a:r>
+          </a:p>
+          <a:p>
+            <a:pPr>
+              <a:spcAft>
+                <a:spcPts val="500"/>
+              </a:spcAft>
+            </a:pPr>
+            <a:r>
+              <a:rPr sz="1700" b="1">
+                <a:solidFill>
+                  <a:srgbClr val="222222"/>
+                </a:solidFill>
+                <a:latin typeface="Meiryo"/>
+              </a:rPr>
+              <a:t>報酬: 車線中央維持 1/(1+4·lat²) + 操作量ペナルティ −0.3·|action| + 衝突 −1</a:t>
+            </a:r>
+          </a:p>
+          <a:p>
+            <a:pPr>
+              <a:spcAft>
+                <a:spcPts val="500"/>
+              </a:spcAft>
+            </a:pPr>
+            <a:r>
+              <a:rPr sz="1700" b="0">
+                <a:solidFill>
+                  <a:srgbClr val="222222"/>
+                </a:solidFill>
+                <a:latin typeface="Meiryo"/>
+              </a:rPr>
+              <a:t>速度: speed_limit 10 m/s。「速く走る」インセンティブが存在しない</a:t>
+            </a:r>
+          </a:p>
+          <a:p>
+            <a:pPr>
+              <a:spcAft>
+                <a:spcPts val="500"/>
+              </a:spcAft>
+            </a:pPr>
+            <a:r>
+              <a:rPr sz="1700" b="1">
+                <a:solidFill>
+                  <a:srgbClr val="222222"/>
+                </a:solidFill>
+                <a:latin typeface="Meiryo"/>
+              </a:rPr>
+              <a:t>壁: 存在しない — 路外は終了 (または放置)。すり抜け・ショートカットが物理的に可能</a:t>
+            </a:r>
+          </a:p>
+          <a:p>
+            <a:pPr>
+              <a:spcAft>
+                <a:spcPts val="500"/>
+              </a:spcAft>
+            </a:pPr>
+            <a:r>
+              <a:rPr sz="1700" b="0">
+                <a:solidFill>
+                  <a:srgbClr val="222222"/>
+                </a:solidFill>
+                <a:latin typeface="Meiryo"/>
+              </a:rPr>
+              <a:t>車両: 運動学 Bicycle (スリップなし)。NPC 1 台、エピソード 300 秒</a:t>
+            </a:r>
+          </a:p>
+          <a:p>
+            <a:pPr>
+              <a:spcAft>
+                <a:spcPts val="500"/>
+              </a:spcAft>
+            </a:pPr>
+            <a:r>
+              <a:rPr sz="1700" b="1">
+                <a:solidFill>
+                  <a:srgbClr val="B32D2D"/>
+                </a:solidFill>
+                <a:latin typeface="Meiryo"/>
+              </a:rPr>
+              <a:t>→ 「レーンをなぞる」研究環境としては優秀。しかしゲームのレースには遠い</a:t>
+            </a:r>
+          </a:p>
+        </p:txBody>
+      </p:sp>
     </p:spTree>
   </p:cSld>
   <p:clrMapOvr>
@@ -5188,8 +6704,8 @@
         </p:nvSpPr>
         <p:spPr>
           <a:xfrm>
-            <a:off x="457200" y="228600"/>
-            <a:ext cx="11247120" cy="822960"/>
+            <a:off x="457200" y="201168"/>
+            <a:ext cx="11247120" cy="777240"/>
           </a:xfrm>
           <a:prstGeom prst="rect">
             <a:avLst/>
@@ -5203,168 +6719,41 @@
           <a:lstStyle/>
           <a:p>
             <a:r>
-              <a:rPr sz="3000" b="1">
+              <a:rPr sz="2800" b="1">
                 <a:solidFill>
                   <a:srgbClr val="1B5EA8"/>
                 </a:solidFill>
                 <a:latin typeface="Meiryo"/>
               </a:rPr>
-              <a:t>highway-env からの変更点 (1) 環境</a:t>
-            </a:r>
-          </a:p>
-        </p:txBody>
-      </p:sp>
-      <p:sp>
-        <p:nvSpPr>
-          <p:cNvPr id="3" name="TextBox 2"/>
-          <p:cNvSpPr txBox="1"/>
+              <a:t>デフォルト racetrack と本プロジェクトの fast トラック</a:t>
+            </a:r>
+          </a:p>
+        </p:txBody>
+      </p:sp>
+      <p:pic>
+        <p:nvPicPr>
+          <p:cNvPr id="3" name="Picture 2" descr="default_vs_ours.png"/>
+          <p:cNvPicPr>
+            <a:picLocks noChangeAspect="1"/>
+          </p:cNvPicPr>
           <p:nvPr/>
-        </p:nvSpPr>
+        </p:nvPicPr>
+        <p:blipFill>
+          <a:blip r:embed="rId3"/>
+          <a:stretch>
+            <a:fillRect/>
+          </a:stretch>
+        </p:blipFill>
         <p:spPr>
           <a:xfrm>
-            <a:off x="548640" y="1280160"/>
-            <a:ext cx="11064240" cy="5120640"/>
+            <a:off x="822960" y="1371600"/>
+            <a:ext cx="10515600" cy="3720905"/>
           </a:xfrm>
           <a:prstGeom prst="rect">
             <a:avLst/>
           </a:prstGeom>
-          <a:noFill/>
         </p:spPr>
-        <p:txBody>
-          <a:bodyPr wrap="square">
-            <a:spAutoFit/>
-          </a:bodyPr>
-          <a:lstStyle/>
-          <a:p>
-            <a:pPr>
-              <a:spcAft>
-                <a:spcPts val="600"/>
-              </a:spcAft>
-            </a:pPr>
-            <a:r>
-              <a:rPr sz="1700" b="1">
-                <a:solidFill>
-                  <a:srgbClr val="222222"/>
-                </a:solidFill>
-                <a:latin typeface="Meiryo"/>
-              </a:rPr>
-              <a:t>壁 = コース外周のみ (車線境界線は壁ではない)・接触で停止・バックで脱出</a:t>
-            </a:r>
-          </a:p>
-          <a:p>
-            <a:pPr lvl="1">
-              <a:spcAft>
-                <a:spcPts val="600"/>
-              </a:spcAft>
-            </a:pPr>
-            <a:r>
-              <a:rPr sz="1500" b="0">
-                <a:solidFill>
-                  <a:srgbClr val="666666"/>
-                </a:solidFill>
-                <a:latin typeface="Meiryo"/>
-              </a:rPr>
-              <a:t>理由: ゲーム側の物理と一致させ、壁ずり走行 (wall-riding) を防ぐ</a:t>
-            </a:r>
-          </a:p>
-          <a:p>
-            <a:pPr>
-              <a:spcAft>
-                <a:spcPts val="600"/>
-              </a:spcAft>
-            </a:pPr>
-            <a:r>
-              <a:rPr sz="1700" b="0">
-                <a:solidFill>
-                  <a:srgbClr val="222222"/>
-                </a:solidFill>
-                <a:latin typeface="Meiryo"/>
-              </a:rPr>
-              <a:t>壁接触が 35 ステップ続くとクラッシュ扱いで終了 — 壁沿い周回の悪用を遮断</a:t>
-            </a:r>
-          </a:p>
-          <a:p>
-            <a:pPr>
-              <a:spcAft>
-                <a:spcPts val="600"/>
-              </a:spcAft>
-            </a:pPr>
-            <a:r>
-              <a:rPr sz="1700" b="1">
-                <a:solidFill>
-                  <a:srgbClr val="222222"/>
-                </a:solidFill>
-                <a:latin typeface="Meiryo"/>
-              </a:rPr>
-              <a:t>報酬: 速度 + 車線中央 + チェックポイント/ラップボーナス → lmap [-3,3]→[0,1]</a:t>
-            </a:r>
-          </a:p>
-          <a:p>
-            <a:pPr lvl="1">
-              <a:spcAft>
-                <a:spcPts val="600"/>
-              </a:spcAft>
-            </a:pPr>
-            <a:r>
-              <a:rPr sz="1500" b="0">
-                <a:solidFill>
-                  <a:srgbClr val="666666"/>
-                </a:solidFill>
-                <a:latin typeface="Meiryo"/>
-              </a:rPr>
-              <a:t>理由: 範囲が真の下限を覆わないと悪い状態が 0 に飽和し勾配消失 (導出をコメントで管理)</a:t>
-            </a:r>
-          </a:p>
-          <a:p>
-            <a:pPr>
-              <a:spcAft>
-                <a:spcPts val="600"/>
-              </a:spcAft>
-            </a:pPr>
-            <a:r>
-              <a:rPr sz="1700" b="1">
-                <a:solidFill>
-                  <a:srgbClr val="222222"/>
-                </a:solidFill>
-                <a:latin typeface="Meiryo"/>
-              </a:rPr>
-              <a:t>壁脱出ゾーン (1 m): バック免除 + 距離増加に報酬</a:t>
-            </a:r>
-          </a:p>
-          <a:p>
-            <a:pPr lvl="1">
-              <a:spcAft>
-                <a:spcPts val="600"/>
-              </a:spcAft>
-            </a:pPr>
-            <a:r>
-              <a:rPr sz="1500" b="0">
-                <a:solidFill>
-                  <a:srgbClr val="666666"/>
-                </a:solidFill>
-                <a:latin typeface="Meiryo"/>
-              </a:rPr>
-              <a:t>理由: 脱出直後に罰すると「壁を這う」局所解に陥る (実測で確認)</a:t>
-            </a:r>
-          </a:p>
-          <a:p>
-            <a:pPr>
-              <a:spcAft>
-                <a:spcPts val="600"/>
-              </a:spcAft>
-            </a:pPr>
-            <a:r>
-              <a:rPr sz="1700" b="0">
-                <a:solidFill>
-                  <a:srgbClr val="222222"/>
-                </a:solidFill>
-                <a:latin typeface="Meiryo"/>
-              </a:rPr>
-              <a:t>トラック 5 種 + random (エピソード毎に再抽選) で汎化学習</a:t>
-            </a:r>
-          </a:p>
-        </p:txBody>
-      </p:sp>
+      </p:pic>
     </p:spTree>
   </p:cSld>
   <p:clrMapOvr>
@@ -5391,8 +6780,8 @@
         </p:nvSpPr>
         <p:spPr>
           <a:xfrm>
-            <a:off x="457200" y="228600"/>
-            <a:ext cx="11247120" cy="822960"/>
+            <a:off x="457200" y="201168"/>
+            <a:ext cx="11247120" cy="777240"/>
           </a:xfrm>
           <a:prstGeom prst="rect">
             <a:avLst/>
@@ -5406,13 +6795,13 @@
           <a:lstStyle/>
           <a:p>
             <a:r>
-              <a:rPr sz="3000" b="1">
+              <a:rPr sz="2800" b="1">
                 <a:solidFill>
                   <a:srgbClr val="1B5EA8"/>
                 </a:solidFill>
                 <a:latin typeface="Meiryo"/>
               </a:rPr>
-              <a:t>highway-env からの変更点 (2) 観測・行動・学習設定</a:t>
+              <a:t>進化 (1) 行動と車両 — スロットルを持たせ、実車に近づける</a:t>
             </a:r>
           </a:p>
         </p:txBody>
@@ -5425,8 +6814,8 @@
         </p:nvSpPr>
         <p:spPr>
           <a:xfrm>
-            <a:off x="548640" y="1280160"/>
-            <a:ext cx="11064240" cy="5120640"/>
+            <a:off x="548640" y="1097280"/>
+            <a:ext cx="11064240" cy="5394960"/>
           </a:xfrm>
           <a:prstGeom prst="rect">
             <a:avLst/>
@@ -5441,133 +6830,61 @@
           <a:p>
             <a:pPr>
               <a:spcAft>
-                <a:spcPts val="600"/>
+                <a:spcPts val="500"/>
               </a:spcAft>
             </a:pPr>
             <a:r>
-              <a:rPr sz="1700" b="1">
+              <a:rPr sz="1600" b="1">
                 <a:solidFill>
                   <a:srgbClr val="222222"/>
                 </a:solidFill>
                 <a:latin typeface="Meiryo"/>
               </a:rPr>
-              <a:t>観測: OccupancyGrid (10ch, 12x12), 前方 27 m / 後方 9 m の非対称視野</a:t>
-            </a:r>
-          </a:p>
-          <a:p>
-            <a:pPr lvl="1">
+              <a:t>ContinuousAction: ステアのみ → スロットル + ステア (±5 m/s², ±π/6)、dynamical=True</a:t>
+            </a:r>
+          </a:p>
+          <a:p>
+            <a:pPr>
               <a:spcAft>
-                <a:spcPts val="600"/>
+                <a:spcPts val="500"/>
               </a:spcAft>
             </a:pPr>
             <a:r>
-              <a:rPr sz="1500" b="0">
-                <a:solidFill>
-                  <a:srgbClr val="666666"/>
-                </a:solidFill>
-                <a:latin typeface="Meiryo"/>
-              </a:rPr>
-              <a:t>理由: 制動距離とコーナー先読み (16 m/s から 5 m/s² 制動で 25.6 m &lt; 27 m)</a:t>
-            </a:r>
-          </a:p>
-          <a:p>
-            <a:pPr>
-              <a:spcAft>
-                <a:spcPts val="600"/>
-              </a:spcAft>
-            </a:pPr>
-            <a:r>
-              <a:rPr sz="1700" b="0">
+              <a:rPr sz="1600" b="0">
                 <a:solidFill>
                   <a:srgbClr val="222222"/>
                 </a:solidFill>
                 <a:latin typeface="Meiryo"/>
               </a:rPr>
-              <a:t>行動: 連続スロットル [-5,5] m/s² + ステア ±π/6, dynamical=True (タイヤスリップ)</a:t>
-            </a:r>
-          </a:p>
-          <a:p>
-            <a:pPr>
-              <a:spcAft>
-                <a:spcPts val="600"/>
-              </a:spcAft>
-            </a:pPr>
-            <a:r>
-              <a:rPr sz="1700" b="1">
-                <a:solidFill>
-                  <a:srgbClr val="222222"/>
-                </a:solidFill>
-                <a:latin typeface="Meiryo"/>
-              </a:rPr>
-              <a:t>2 フェーズ PPO: ①NPC なしでレーン追従 → ②NPC ありで追い越し (lr を下げて FT)</a:t>
-            </a:r>
-          </a:p>
-          <a:p>
-            <a:pPr>
-              <a:spcAft>
-                <a:spcPts val="600"/>
-              </a:spcAft>
-            </a:pPr>
-            <a:r>
-              <a:rPr sz="1700" b="0">
-                <a:solidFill>
-                  <a:srgbClr val="222222"/>
-                </a:solidFill>
-                <a:latin typeface="Meiryo"/>
-              </a:rPr>
-              <a:t>カスタム CNN 特徴抽出器 + 初期スロットルバイアス +0.4 (前進探索を促進)</a:t>
-            </a:r>
-          </a:p>
-          <a:p>
-            <a:pPr>
-              <a:spcAft>
-                <a:spcPts val="600"/>
-              </a:spcAft>
-            </a:pPr>
-            <a:r>
-              <a:rPr sz="1700" b="1">
-                <a:solidFill>
-                  <a:srgbClr val="222222"/>
-                </a:solidFill>
-                <a:latin typeface="Meiryo"/>
-              </a:rPr>
-              <a:t>fast-dev = 12 万ステップ・本番ハイパラ (ent 0.02, lr 2e-4) — 周回到達を実測保証</a:t>
-            </a:r>
-          </a:p>
-          <a:p>
-            <a:pPr lvl="1">
-              <a:spcAft>
-                <a:spcPts val="600"/>
-              </a:spcAft>
-            </a:pPr>
-            <a:r>
-              <a:rPr sz="1500" b="0">
-                <a:solidFill>
-                  <a:srgbClr val="666666"/>
-                </a:solidFill>
-                <a:latin typeface="Meiryo"/>
-              </a:rPr>
-              <a:t>理由: 高エントロピー設定 (旧 0.10) は方策がランダムに留まり永遠に曲がれない</a:t>
-            </a:r>
-          </a:p>
-          <a:p>
-            <a:pPr>
-              <a:spcAft>
-                <a:spcPts val="600"/>
-              </a:spcAft>
-            </a:pPr>
-            <a:r>
-              <a:rPr sz="1700" b="0">
-                <a:solidFill>
-                  <a:srgbClr val="222222"/>
-                </a:solidFill>
-                <a:latin typeface="Meiryo"/>
-              </a:rPr>
-              <a:t>EvalCallback のベストモデルを採用 (PPO は終盤に退行することがある)</a:t>
-            </a:r>
-          </a:p>
-        </p:txBody>
-      </p:sp>
+              <a:t>速度上限 10 → 16 m/s、前進報酬を追加 — 「速く走る」動機を導入</a:t>
+            </a:r>
+          </a:p>
+        </p:txBody>
+      </p:sp>
+      <p:pic>
+        <p:nvPicPr>
+          <p:cNvPr id="4" name="Picture 3" descr="range_experiment.png"/>
+          <p:cNvPicPr>
+            <a:picLocks noChangeAspect="1"/>
+          </p:cNvPicPr>
+          <p:nvPr/>
+        </p:nvPicPr>
+        <p:blipFill>
+          <a:blip r:embed="rId3"/>
+          <a:stretch>
+            <a:fillRect/>
+          </a:stretch>
+        </p:blipFill>
+        <p:spPr>
+          <a:xfrm>
+            <a:off x="3017520" y="2286000"/>
+            <a:ext cx="6217920" cy="3316224"/>
+          </a:xfrm>
+          <a:prstGeom prst="rect">
+            <a:avLst/>
+          </a:prstGeom>
+        </p:spPr>
+      </p:pic>
     </p:spTree>
   </p:cSld>
   <p:clrMapOvr>
@@ -5594,8 +6911,8 @@
         </p:nvSpPr>
         <p:spPr>
           <a:xfrm>
-            <a:off x="457200" y="228600"/>
-            <a:ext cx="11247120" cy="822960"/>
+            <a:off x="457200" y="201168"/>
+            <a:ext cx="11247120" cy="777240"/>
           </a:xfrm>
           <a:prstGeom prst="rect">
             <a:avLst/>
@@ -5609,13 +6926,13 @@
           <a:lstStyle/>
           <a:p>
             <a:r>
-              <a:rPr sz="3000" b="1">
+              <a:rPr sz="2800" b="1">
                 <a:solidFill>
                   <a:srgbClr val="1B5EA8"/>
                 </a:solidFill>
                 <a:latin typeface="Meiryo"/>
               </a:rPr>
-              <a:t>セットアップとノートブックの使い方</a:t>
+              <a:t>進化 (2) 壁の物理 — 「なし → 反発 → 停止」の変遷</a:t>
             </a:r>
           </a:p>
         </p:txBody>
@@ -5628,8 +6945,8 @@
         </p:nvSpPr>
         <p:spPr>
           <a:xfrm>
-            <a:off x="548640" y="1280160"/>
-            <a:ext cx="11064240" cy="5120640"/>
+            <a:off x="548640" y="1234440"/>
+            <a:ext cx="11064240" cy="5394960"/>
           </a:xfrm>
           <a:prstGeom prst="rect">
             <a:avLst/>
@@ -5644,129 +6961,81 @@
           <a:p>
             <a:pPr>
               <a:spcAft>
-                <a:spcPts val="600"/>
+                <a:spcPts val="500"/>
               </a:spcAft>
             </a:pPr>
             <a:r>
+              <a:rPr sz="1700" b="0">
+                <a:solidFill>
+                  <a:srgbClr val="222222"/>
+                </a:solidFill>
+                <a:latin typeface="Meiryo"/>
+              </a:rPr>
+              <a:t>v0: 壁なし (デフォルト) → コーナーを路外ショートカットする走りを学習</a:t>
+            </a:r>
+          </a:p>
+          <a:p>
+            <a:pPr>
+              <a:spcAft>
+                <a:spcPts val="500"/>
+              </a:spcAft>
+            </a:pPr>
+            <a:r>
+              <a:rPr sz="1700" b="0">
+                <a:solidFill>
+                  <a:srgbClr val="B32D2D"/>
+                </a:solidFill>
+                <a:latin typeface="Meiryo"/>
+              </a:rPr>
+              <a:t>v1: 反発壁 (bounce) → 壁に擦って曲がる wall-riding が最速解に</a:t>
+            </a:r>
+          </a:p>
+          <a:p>
+            <a:pPr>
+              <a:spcAft>
+                <a:spcPts val="500"/>
+              </a:spcAft>
+            </a:pPr>
+            <a:r>
               <a:rPr sz="1700" b="1">
                 <a:solidFill>
                   <a:srgbClr val="222222"/>
                 </a:solidFill>
                 <a:latin typeface="Meiryo"/>
               </a:rPr>
-              <a:t>pip install "highway-env&gt;=1.8" "stable-baselines3[extra]&gt;=2.0" gymnasium torch tensorboard moviepy onnx onnxruntime</a:t>
+              <a:t>v2 (最終): 停止壁 (stop) + 壁接触中は速度報酬ゼロ + 接触 35 ステップで終了</a:t>
+            </a:r>
+          </a:p>
+          <a:p>
+            <a:pPr>
+              <a:spcAft>
+                <a:spcPts val="500"/>
+              </a:spcAft>
+            </a:pPr>
+            <a:r>
+              <a:rPr sz="1700" b="1">
+                <a:solidFill>
+                  <a:srgbClr val="222222"/>
+                </a:solidFill>
+                <a:latin typeface="Meiryo"/>
+              </a:rPr>
+              <a:t>壁 = コース外周のみ。車線境界の白線は壁ではない (2 車線を使うライン取りを許す)</a:t>
             </a:r>
           </a:p>
           <a:p>
             <a:pPr lvl="1">
               <a:spcAft>
-                <a:spcPts val="600"/>
+                <a:spcPts val="500"/>
               </a:spcAft>
             </a:pPr>
             <a:r>
               <a:rPr sz="1500" b="0">
                 <a:solidFill>
-                  <a:srgbClr val="666666"/>
-                </a:solidFill>
-                <a:latin typeface="Meiryo"/>
-              </a:rPr>
-              <a:t>注意: リポジトリの requirements.txt は旧スタック (TF2.6/gym0.21) 用 — 使わない</a:t>
-            </a:r>
-          </a:p>
-          <a:p>
-            <a:pPr>
-              <a:spcAft>
-                <a:spcPts val="600"/>
-              </a:spcAft>
-            </a:pPr>
-            <a:r>
-              <a:rPr sz="1700" b="0">
-                <a:solidFill>
-                  <a:srgbClr val="222222"/>
-                </a:solidFill>
-                <a:latin typeface="Meiryo"/>
-              </a:rPr>
-              <a:t>task2_laning_overtaking_sb3_ppo.ipynb — fast トラック専用の学習</a:t>
-            </a:r>
-          </a:p>
-          <a:p>
-            <a:pPr>
-              <a:spcAft>
-                <a:spcPts val="600"/>
-              </a:spcAft>
-            </a:pPr>
-            <a:r>
-              <a:rPr sz="1700" b="0">
-                <a:solidFill>
-                  <a:srgbClr val="222222"/>
-                </a:solidFill>
-                <a:latin typeface="Meiryo"/>
-              </a:rPr>
-              <a:t>task3_generalization_sb3_ppo.ipynb — random トラック学習 + トラック別評価レポート + 5 連動画</a:t>
-            </a:r>
-          </a:p>
-          <a:p>
-            <a:pPr>
-              <a:spcAft>
-                <a:spcPts val="600"/>
-              </a:spcAft>
-            </a:pPr>
-            <a:r>
-              <a:rPr sz="1700" b="1">
-                <a:solidFill>
-                  <a:srgbClr val="222222"/>
-                </a:solidFill>
-                <a:latin typeface="Meiryo"/>
-              </a:rPr>
-              <a:t>FAST_DEV_RUN=True: 12〜15 万ステップの短縮学習 (周回まで到達) / False: 本番 (100万+)</a:t>
-            </a:r>
-          </a:p>
-          <a:p>
-            <a:pPr>
-              <a:spcAft>
-                <a:spcPts val="600"/>
-              </a:spcAft>
-            </a:pPr>
-            <a:r>
-              <a:rPr sz="1700" b="0">
-                <a:solidFill>
-                  <a:srgbClr val="222222"/>
-                </a:solidFill>
-                <a:latin typeface="Meiryo"/>
-              </a:rPr>
-              <a:t>Reward yardstick セル: eval/mean_reward を「周回数」として読むための換算値を表示</a:t>
-            </a:r>
-          </a:p>
-          <a:p>
-            <a:pPr>
-              <a:spcAft>
-                <a:spcPts val="600"/>
-              </a:spcAft>
-            </a:pPr>
-            <a:r>
-              <a:rPr sz="1700" b="0">
-                <a:solidFill>
-                  <a:srgbClr val="222222"/>
-                </a:solidFill>
-                <a:latin typeface="Meiryo"/>
-              </a:rPr>
-              <a:t>ベストモデルは runs/&lt;EXP_ID&gt;/models/best/phase1|phase2/best_model.zip に保存</a:t>
-            </a:r>
-          </a:p>
-          <a:p>
-            <a:pPr>
-              <a:spcAft>
-                <a:spcPts val="600"/>
-              </a:spcAft>
-            </a:pPr>
-            <a:r>
-              <a:rPr sz="1700" b="0">
-                <a:solidFill>
-                  <a:srgbClr val="222222"/>
-                </a:solidFill>
-                <a:latin typeface="Meiryo"/>
-              </a:rPr>
-              <a:t>検証: cd re_engine/verify &amp;&amp; dotnet run -- ..  → ALL SCENARIOS MATCH</a:t>
+                  <a:srgbClr val="595959"/>
+                </a:solidFill>
+                <a:latin typeface="Meiryo"/>
+              </a:rPr>
+              <a:t>目的: ゲームの物理と一致 + 「壁を使う」抜け道をすべて塞ぐ</a:t>
             </a:r>
           </a:p>
         </p:txBody>

--- a/docs/CircuitAgents_intro_ja.pptx
+++ b/docs/CircuitAgents_intro_ja.pptx
@@ -16,12 +16,6 @@
     <p:sldId id="264" r:id="rId16"/>
     <p:sldId id="265" r:id="rId17"/>
     <p:sldId id="266" r:id="rId18"/>
-    <p:sldId id="267" r:id="rId19"/>
-    <p:sldId id="268" r:id="rId20"/>
-    <p:sldId id="269" r:id="rId21"/>
-    <p:sldId id="270" r:id="rId22"/>
-    <p:sldId id="271" r:id="rId23"/>
-    <p:sldId id="272" r:id="rId24"/>
   </p:sldIdLst>
   <p:sldSz cx="12191695" cy="6858000" type="screen4x3"/>
   <p:notesSz cx="6858000" cy="9144000"/>
@@ -518,7 +512,7 @@
           <a:lstStyle/>
           <a:p>
             <a:r>
-              <a:t>本日は CircuitAgents プロジェクトを 10 分で紹介します。highway-env をベースに、ゲームのレース環境に近づけるための改造を重ねて強化学習エージェントを育て、ONNX 経由で C# ゲームエンジンにデプロイするまでのパイプラインです。まず結果の映像とグラフをご覧いただき、その後で highway-env のデフォルト設定と我々が加えた変更の進化の過程、最後にセットアップとツールの使い方を説明します。</a:t>
+              <a:t>本日は CircuitAgents プロジェクトを紹介します。highway-env 上で強化学習させたレース走行エージェントを、ONNX 経由で C# ゲームエンジン (RE Engine) にデプロイするまでの一連のパイプラインです。まず結果からお見せし、その後に環境・学習設定の変更点、セットアップ方法、エクスポートツールの使い方を説明します。</a:t>
             </a:r>
           </a:p>
         </p:txBody>
@@ -588,7 +582,7 @@
           <a:lstStyle/>
           <a:p>
             <a:r>
-              <a:t>報酬設計です。グラフは実測した 1 ステップあたりの報酬で、状態ごとの「儲け」を示しています。設計の目標は、どんな抜け道よりも普通に走る方が得、という順序を作ることです。緑の 0.97 が正しく走った場合。壁でスタックしたら 0.45、壁に擦りながら進んでも 0.42 と、壁を使う行動は割に合いません。重要なのは青の 0.51、壁からバックで脱出する行動がスタックより明確に得なことです。実は最初、脱出報酬は壁に接触している間しか出ませんでした。すると脱出の一歩目、壁から 20 cm 離れた瞬間にバックのペナルティが復活してしまい、エージェントは「壁沿いを這う」ことを学びました。今は壁から 1 m の脱出ゾーンを設け、その中ではバック免除、壁から離れる距離に報酬を出します。もう 1 つの落とし穴が正規化です。合成報酬を [-3,3] から [0,1] に線形写像していますが、この範囲が実際の下限を覆っていないと、悪い状態が全部 0 に張り付いて「悪い」と「最悪」の区別が消え、学習が止まります。範囲の導出はコードにコメントで残し、重みを変えたら再導出するルールにしています。</a:t>
+              <a:t>学習済みモデルのエクスポートは export_onnx.py で行います。モードは 1 が full policy、2 が actor の channels-first、3 がエンジン用の channels-last NHWC、0 で全部です。エンジン側は必ず NHWC 版 ppo_actor_only_nhwc.onnx を使ってください。C# ビルダーは H×W×C の平坦配列を出力するため、channels-first 版に入れるとチャネルが混ざり、スロットル 0.4・ステア 0.2 程度のほぼ一定出力に退化します。トラック形状を変えたら export_track_json.py で JSON を再生成し、検証ハーネスを回します。C# 側には観測ビルダーに加えて、ステアリング平滑化・コーナー減速・スタック検出・学習と同一物理の CarController が入っています。</a:t>
             </a:r>
           </a:p>
         </p:txBody>
@@ -658,427 +652,7 @@
           <a:lstStyle/>
           <a:p>
             <a:r>
-              <a:t>観測はデフォルトの 2 チャネルから 10 チャネルに拡張しました。周囲車両の相対位置・相対速度、自車のレーンからの横ずれ lat_off と角度ずれ ang_off などです。追い越しと車線維持の両方に必要な情報です。視野も変えました。デフォルトは前後対称 ±18 m ですが、レースで重要なのは前方です。後方 9 m・前方 27 m の非対称にしました。27 m という数字は制動距離から来ています。16 m/s から 5 m/s² でフル制動すると 25.6 m。前方視野がこれより短いと、コーナーが見えてからでは止まれません。ぎりぎり収まるのが 27 m です。重要な注意として、自車の絶対座標は観測に含まれません。これによりコース暗記が不可能になり、反射的なレーン追従を学習せざるを得なくなります。これが 5 コース汎化の種明かしです。</a:t>
-            </a:r>
-          </a:p>
-        </p:txBody>
-      </p:sp>
-      <p:sp>
-        <p:nvSpPr>
-          <p:cNvPr id="4" name="Slide Number Placeholder 3"/>
-          <p:cNvSpPr>
-            <a:spLocks noGrp="1"/>
-          </p:cNvSpPr>
-          <p:nvPr>
-            <p:ph type="sldNum" idx="5" sz="quarter"/>
-          </p:nvPr>
-        </p:nvSpPr>
-        <p:spPr/>
-      </p:sp>
-    </p:spTree>
-  </p:cSld>
-  <p:clrMapOvr>
-    <a:masterClrMapping/>
-  </p:clrMapOvr>
-</p:notes>
-</file>
-
-<file path=ppt/notesSlides/notesSlide12.xml><?xml version="1.0" encoding="utf-8"?>
-<p:notes xmlns:a="http://schemas.openxmlformats.org/drawingml/2006/main" xmlns:p="http://schemas.openxmlformats.org/presentationml/2006/main" xmlns:r="http://schemas.openxmlformats.org/officeDocument/2006/relationships">
-  <p:cSld>
-    <p:spTree>
-      <p:nvGrpSpPr>
-        <p:cNvPr id="1" name=""/>
-        <p:cNvGrpSpPr/>
-        <p:nvPr/>
-      </p:nvGrpSpPr>
-      <p:grpSpPr>
-        <a:xfrm>
-          <a:off x="0" y="0"/>
-          <a:ext cx="0" cy="0"/>
-          <a:chOff x="0" y="0"/>
-          <a:chExt cx="0" cy="0"/>
-        </a:xfrm>
-      </p:grpSpPr>
-      <p:sp>
-        <p:nvSpPr>
-          <p:cNvPr id="2" name="Slide Image Placeholder 1"/>
-          <p:cNvSpPr>
-            <a:spLocks noGrp="1"/>
-          </p:cNvSpPr>
-          <p:nvPr>
-            <p:ph type="sldImg" idx="2"/>
-          </p:nvPr>
-        </p:nvSpPr>
-        <p:spPr/>
-      </p:sp>
-      <p:sp>
-        <p:nvSpPr>
-          <p:cNvPr id="3" name="Notes Placeholder 2"/>
-          <p:cNvSpPr>
-            <a:spLocks noGrp="1"/>
-          </p:cNvSpPr>
-          <p:nvPr>
-            <p:ph type="body" idx="3" sz="quarter"/>
-          </p:nvPr>
-        </p:nvSpPr>
-        <p:spPr/>
-        <p:txBody>
-          <a:bodyPr/>
-          <a:lstStyle/>
-          <a:p>
-            <a:r>
-              <a:t>コースも 1 つから 5 つに増やしました。oval と stadium が基礎、rect は 90 度コーナーの反復、chicane は左右の切り返しと最小半径 10 m のキンク、fast がメインの難コースです。config の track を random にするとエピソードごとに再抽選され、これが汎化学習になります。各トラックは C# 側にもプリセットと JSON で複製されていて、検証ハーネスがPython と C# の幾何が一致することを自動チェックします。トラックを追加するときはrace_env にビルダーを書き、C# プリセットを足し、JSON を再生成して検証を回す、という手順です。</a:t>
-            </a:r>
-          </a:p>
-        </p:txBody>
-      </p:sp>
-      <p:sp>
-        <p:nvSpPr>
-          <p:cNvPr id="4" name="Slide Number Placeholder 3"/>
-          <p:cNvSpPr>
-            <a:spLocks noGrp="1"/>
-          </p:cNvSpPr>
-          <p:nvPr>
-            <p:ph type="sldNum" idx="5" sz="quarter"/>
-          </p:nvPr>
-        </p:nvSpPr>
-        <p:spPr/>
-      </p:sp>
-    </p:spTree>
-  </p:cSld>
-  <p:clrMapOvr>
-    <a:masterClrMapping/>
-  </p:clrMapOvr>
-</p:notes>
-</file>
-
-<file path=ppt/notesSlides/notesSlide13.xml><?xml version="1.0" encoding="utf-8"?>
-<p:notes xmlns:a="http://schemas.openxmlformats.org/drawingml/2006/main" xmlns:p="http://schemas.openxmlformats.org/presentationml/2006/main" xmlns:r="http://schemas.openxmlformats.org/officeDocument/2006/relationships">
-  <p:cSld>
-    <p:spTree>
-      <p:nvGrpSpPr>
-        <p:cNvPr id="1" name=""/>
-        <p:cNvGrpSpPr/>
-        <p:nvPr/>
-      </p:nvGrpSpPr>
-      <p:grpSpPr>
-        <a:xfrm>
-          <a:off x="0" y="0"/>
-          <a:ext cx="0" cy="0"/>
-          <a:chOff x="0" y="0"/>
-          <a:chExt cx="0" cy="0"/>
-        </a:xfrm>
-      </p:grpSpPr>
-      <p:sp>
-        <p:nvSpPr>
-          <p:cNvPr id="2" name="Slide Image Placeholder 1"/>
-          <p:cNvSpPr>
-            <a:spLocks noGrp="1"/>
-          </p:cNvSpPr>
-          <p:nvPr>
-            <p:ph type="sldImg" idx="2"/>
-          </p:nvPr>
-        </p:nvSpPr>
-        <p:spPr/>
-      </p:sp>
-      <p:sp>
-        <p:nvSpPr>
-          <p:cNvPr id="3" name="Notes Placeholder 2"/>
-          <p:cNvSpPr>
-            <a:spLocks noGrp="1"/>
-          </p:cNvSpPr>
-          <p:nvPr>
-            <p:ph type="body" idx="3" sz="quarter"/>
-          </p:nvPr>
-        </p:nvSpPr>
-        <p:spPr/>
-        <p:txBody>
-          <a:bodyPr/>
-          <a:lstStyle/>
-          <a:p>
-            <a:r>
-              <a:t>学習は 2 フェーズの PPO です。フェーズ 1 で他車なしのレーン追従を覚え、フェーズ 2 で NPC を入れて学習率を下げ、追い越しをファインチューニングします。特徴抽出はカスタム CNN で、初期方策のスロットルバイアスを +0.4 にずらして序盤の探索が前に進むようにしています。ここでの教訓は fast-dev、つまり動作確認用の短縮設定です。以前はエントロピー係数 0.10 の 6.5 万ステップで、何度回しても曲がれるようになりませんでした。原因は、エントロピー報酬が『ランダムでい続けること』に支払われるため、報酬が [0,1] に圧縮された本環境では方策が確定するインセンティブに勝ってしまうことでした。現在は本番と同じ ent 0.02・lr 2e-4 のまま 12 万ステップに短縮し、『周回まで確実に到達する最小構成』としてエンドツーエンドで実測検証済みです。また PPO は学習終盤に退行することがあるため、最終モデルではなく EvalCallback のベストモデルを採用します。ノートブックには eval 報酬を周回数に換算するヤードスティックのセルを入れてあり、TensorBoard の数字だけで進捗判断ができます。</a:t>
-            </a:r>
-          </a:p>
-        </p:txBody>
-      </p:sp>
-      <p:sp>
-        <p:nvSpPr>
-          <p:cNvPr id="4" name="Slide Number Placeholder 3"/>
-          <p:cNvSpPr>
-            <a:spLocks noGrp="1"/>
-          </p:cNvSpPr>
-          <p:nvPr>
-            <p:ph type="sldNum" idx="5" sz="quarter"/>
-          </p:nvPr>
-        </p:nvSpPr>
-        <p:spPr/>
-      </p:sp>
-    </p:spTree>
-  </p:cSld>
-  <p:clrMapOvr>
-    <a:masterClrMapping/>
-  </p:clrMapOvr>
-</p:notes>
-</file>
-
-<file path=ppt/notesSlides/notesSlide14.xml><?xml version="1.0" encoding="utf-8"?>
-<p:notes xmlns:a="http://schemas.openxmlformats.org/drawingml/2006/main" xmlns:p="http://schemas.openxmlformats.org/presentationml/2006/main" xmlns:r="http://schemas.openxmlformats.org/officeDocument/2006/relationships">
-  <p:cSld>
-    <p:spTree>
-      <p:nvGrpSpPr>
-        <p:cNvPr id="1" name=""/>
-        <p:cNvGrpSpPr/>
-        <p:nvPr/>
-      </p:nvGrpSpPr>
-      <p:grpSpPr>
-        <a:xfrm>
-          <a:off x="0" y="0"/>
-          <a:ext cx="0" cy="0"/>
-          <a:chOff x="0" y="0"/>
-          <a:chExt cx="0" cy="0"/>
-        </a:xfrm>
-      </p:grpSpPr>
-      <p:sp>
-        <p:nvSpPr>
-          <p:cNvPr id="2" name="Slide Image Placeholder 1"/>
-          <p:cNvSpPr>
-            <a:spLocks noGrp="1"/>
-          </p:cNvSpPr>
-          <p:nvPr>
-            <p:ph type="sldImg" idx="2"/>
-          </p:nvPr>
-        </p:nvSpPr>
-        <p:spPr/>
-      </p:sp>
-      <p:sp>
-        <p:nvSpPr>
-          <p:cNvPr id="3" name="Notes Placeholder 2"/>
-          <p:cNvSpPr>
-            <a:spLocks noGrp="1"/>
-          </p:cNvSpPr>
-          <p:nvPr>
-            <p:ph type="body" idx="3" sz="quarter"/>
-          </p:nvPr>
-        </p:nvSpPr>
-        <p:spPr/>
-        <p:txBody>
-          <a:bodyPr/>
-          <a:lstStyle/>
-          <a:p>
-            <a:r>
-              <a:t>学習した方策をそのままゲームに載せると、シミュレータと実車の違いが問題になります。そのために C# 側に 4 つの支援クラスを用意しました。まず SteeringSmoother。方策は観測グリッドが 3 m 刻みで量子化されている影響で、直線でステアを細かく左右に振ります。デコード後のステア角に EMA をかけるだけで、符号反転が 100 ステップあたり 34 回から 12 回に減り、直線の中央維持もむしろ改善しました。次に CorneringLimiter。実車はハンドルを瞬時に切れないのでステア速度を制限し、曲率から計算した限界速度を超えたら超過量に比例した弱いブレーキをかけます。速度床があるので絶対に止まりません。StuckRecovery は移動距離ベースのスタック検出で、前進指示なのに 1 秒で 0.3 m も動けなければ壁に刺さっていると判断してバック指示を出します。発進時は動けるので誤発動しません。最後に CarController は学習時と同一のBicycle 動力学を C# に移植したもので、Python と 1e-7 で一致します。</a:t>
-            </a:r>
-          </a:p>
-        </p:txBody>
-      </p:sp>
-      <p:sp>
-        <p:nvSpPr>
-          <p:cNvPr id="4" name="Slide Number Placeholder 3"/>
-          <p:cNvSpPr>
-            <a:spLocks noGrp="1"/>
-          </p:cNvSpPr>
-          <p:nvPr>
-            <p:ph type="sldNum" idx="5" sz="quarter"/>
-          </p:nvPr>
-        </p:nvSpPr>
-        <p:spPr/>
-      </p:sp>
-    </p:spTree>
-  </p:cSld>
-  <p:clrMapOvr>
-    <a:masterClrMapping/>
-  </p:clrMapOvr>
-</p:notes>
-</file>
-
-<file path=ppt/notesSlides/notesSlide15.xml><?xml version="1.0" encoding="utf-8"?>
-<p:notes xmlns:a="http://schemas.openxmlformats.org/drawingml/2006/main" xmlns:p="http://schemas.openxmlformats.org/presentationml/2006/main" xmlns:r="http://schemas.openxmlformats.org/officeDocument/2006/relationships">
-  <p:cSld>
-    <p:spTree>
-      <p:nvGrpSpPr>
-        <p:cNvPr id="1" name=""/>
-        <p:cNvGrpSpPr/>
-        <p:nvPr/>
-      </p:nvGrpSpPr>
-      <p:grpSpPr>
-        <a:xfrm>
-          <a:off x="0" y="0"/>
-          <a:ext cx="0" cy="0"/>
-          <a:chOff x="0" y="0"/>
-          <a:chExt cx="0" cy="0"/>
-        </a:xfrm>
-      </p:grpSpPr>
-      <p:sp>
-        <p:nvSpPr>
-          <p:cNvPr id="2" name="Slide Image Placeholder 1"/>
-          <p:cNvSpPr>
-            <a:spLocks noGrp="1"/>
-          </p:cNvSpPr>
-          <p:nvPr>
-            <p:ph type="sldImg" idx="2"/>
-          </p:nvPr>
-        </p:nvSpPr>
-        <p:spPr/>
-      </p:sp>
-      <p:sp>
-        <p:nvSpPr>
-          <p:cNvPr id="3" name="Notes Placeholder 2"/>
-          <p:cNvSpPr>
-            <a:spLocks noGrp="1"/>
-          </p:cNvSpPr>
-          <p:nvPr>
-            <p:ph type="body" idx="3" sz="quarter"/>
-          </p:nvPr>
-        </p:nvSpPr>
-        <p:spPr/>
-        <p:txBody>
-          <a:bodyPr/>
-          <a:lstStyle/>
-          <a:p>
-            <a:r>
-              <a:t>使い方です。環境構築はスライドの 1 行だけです。注意点として、リポジトリ直下のrequirements.txt は旧 TensorFlow スタック用なので使わないでください。ノートブックは 2 つ。task2 が fast トラック専用、task3 がランダムトラックの汎化学習です。設定セルの FAST_DEV_RUN で短縮学習と本番を切り替えます。学習後は軌跡プロット、トラック別評価レポート、5 トラック並列動画、そして今回のスライドに使った図と動画を生成して保存するセルまで、すべてノートブック内にあります。C# ポートの検証は re_engine/verify で dotnet run するだけです。</a:t>
-            </a:r>
-          </a:p>
-        </p:txBody>
-      </p:sp>
-      <p:sp>
-        <p:nvSpPr>
-          <p:cNvPr id="4" name="Slide Number Placeholder 3"/>
-          <p:cNvSpPr>
-            <a:spLocks noGrp="1"/>
-          </p:cNvSpPr>
-          <p:nvPr>
-            <p:ph type="sldNum" idx="5" sz="quarter"/>
-          </p:nvPr>
-        </p:nvSpPr>
-        <p:spPr/>
-      </p:sp>
-    </p:spTree>
-  </p:cSld>
-  <p:clrMapOvr>
-    <a:masterClrMapping/>
-  </p:clrMapOvr>
-</p:notes>
-</file>
-
-<file path=ppt/notesSlides/notesSlide16.xml><?xml version="1.0" encoding="utf-8"?>
-<p:notes xmlns:a="http://schemas.openxmlformats.org/drawingml/2006/main" xmlns:p="http://schemas.openxmlformats.org/presentationml/2006/main" xmlns:r="http://schemas.openxmlformats.org/officeDocument/2006/relationships">
-  <p:cSld>
-    <p:spTree>
-      <p:nvGrpSpPr>
-        <p:cNvPr id="1" name=""/>
-        <p:cNvGrpSpPr/>
-        <p:nvPr/>
-      </p:nvGrpSpPr>
-      <p:grpSpPr>
-        <a:xfrm>
-          <a:off x="0" y="0"/>
-          <a:ext cx="0" cy="0"/>
-          <a:chOff x="0" y="0"/>
-          <a:chExt cx="0" cy="0"/>
-        </a:xfrm>
-      </p:grpSpPr>
-      <p:sp>
-        <p:nvSpPr>
-          <p:cNvPr id="2" name="Slide Image Placeholder 1"/>
-          <p:cNvSpPr>
-            <a:spLocks noGrp="1"/>
-          </p:cNvSpPr>
-          <p:nvPr>
-            <p:ph type="sldImg" idx="2"/>
-          </p:nvPr>
-        </p:nvSpPr>
-        <p:spPr/>
-      </p:sp>
-      <p:sp>
-        <p:nvSpPr>
-          <p:cNvPr id="3" name="Notes Placeholder 2"/>
-          <p:cNvSpPr>
-            <a:spLocks noGrp="1"/>
-          </p:cNvSpPr>
-          <p:nvPr>
-            <p:ph type="body" idx="3" sz="quarter"/>
-          </p:nvPr>
-        </p:nvSpPr>
-        <p:spPr/>
-        <p:txBody>
-          <a:bodyPr/>
-          <a:lstStyle/>
-          <a:p>
-            <a:r>
-              <a:t>デプロイ用のエクスポートは export_onnx.py です。モード 3 がエンジン用のchannels-last NHWC 版で、これが推奨です。C# の観測ビルダーは H×W×C の平坦配列を出力するため、channels-first 版のモデルに入れるとチャネルが混ざり、スロットル 0.4・ステア 0.2 程度のほぼ一定の出力に退化します。実際にこの症状で『モデルが曲がらない』というデバッグを経験したので、症状として覚えておいてください。トラックや観測の設定を変えたら、export_track_json.py で C# 側の正解データを再生成し、検証ハーネスを回します。加速度レンジなどの定数は C# 側に意図的に複製されているので、変更時は C# 定数、JSON 再生成、検証、ONNX 再エクスポートの 4 点セットを忘れずに。</a:t>
-            </a:r>
-          </a:p>
-        </p:txBody>
-      </p:sp>
-      <p:sp>
-        <p:nvSpPr>
-          <p:cNvPr id="4" name="Slide Number Placeholder 3"/>
-          <p:cNvSpPr>
-            <a:spLocks noGrp="1"/>
-          </p:cNvSpPr>
-          <p:nvPr>
-            <p:ph type="sldNum" idx="5" sz="quarter"/>
-          </p:nvPr>
-        </p:nvSpPr>
-        <p:spPr/>
-      </p:sp>
-    </p:spTree>
-  </p:cSld>
-  <p:clrMapOvr>
-    <a:masterClrMapping/>
-  </p:clrMapOvr>
-</p:notes>
-</file>
-
-<file path=ppt/notesSlides/notesSlide17.xml><?xml version="1.0" encoding="utf-8"?>
-<p:notes xmlns:a="http://schemas.openxmlformats.org/drawingml/2006/main" xmlns:p="http://schemas.openxmlformats.org/presentationml/2006/main" xmlns:r="http://schemas.openxmlformats.org/officeDocument/2006/relationships">
-  <p:cSld>
-    <p:spTree>
-      <p:nvGrpSpPr>
-        <p:cNvPr id="1" name=""/>
-        <p:cNvGrpSpPr/>
-        <p:nvPr/>
-      </p:nvGrpSpPr>
-      <p:grpSpPr>
-        <a:xfrm>
-          <a:off x="0" y="0"/>
-          <a:ext cx="0" cy="0"/>
-          <a:chOff x="0" y="0"/>
-          <a:chExt cx="0" cy="0"/>
-        </a:xfrm>
-      </p:grpSpPr>
-      <p:sp>
-        <p:nvSpPr>
-          <p:cNvPr id="2" name="Slide Image Placeholder 1"/>
-          <p:cNvSpPr>
-            <a:spLocks noGrp="1"/>
-          </p:cNvSpPr>
-          <p:nvPr>
-            <p:ph type="sldImg" idx="2"/>
-          </p:nvPr>
-        </p:nvSpPr>
-        <p:spPr/>
-      </p:sp>
-      <p:sp>
-        <p:nvSpPr>
-          <p:cNvPr id="3" name="Notes Placeholder 2"/>
-          <p:cNvSpPr>
-            <a:spLocks noGrp="1"/>
-          </p:cNvSpPr>
-          <p:nvPr>
-            <p:ph type="body" idx="3" sz="quarter"/>
-          </p:nvPr>
-        </p:nvSpPr>
-        <p:spPr/>
-        <p:txBody>
-          <a:bodyPr/>
-          <a:lstStyle/>
-          <a:p>
-            <a:r>
-              <a:t>まとめます。highway-env のデフォルトはステアリングだけの車線追従環境でした。そこにスロットルと実車動力学、物理的な壁、速く走る報酬、前方に偏った視野を段階的に加え、壁擦りや壁這いといった抜け道をひとつずつ経済的に割に合わなくして、最終的に 6 万ステップで周回を学習する環境になりました。汎化は自己位置を見せないという観測設計から生まれ、C# 側は数値一致の検証で「移植したら挙動が変わった」を排除しています。今後は RE Engine 内での実走検証と、実車ダイナミクスへの適合が次のステップです。ご清聴ありがとうございました。</a:t>
+              <a:t>まとめです。壁の物理と報酬の経済設計を作り込むことで、PPO は 6 万ステップで周回を学習し、ランダムトラック学習によって 1 つの方策が 5 コースすべてを走れるようになりました。C# 側は観測・物理ともに Python と数値一致で検証済みなので、エンジンに載せた瞬間から学習時と同じ挙動が期待できます。今後はゲーム内での実走検証と、実車ダイナミクスに合わせた微調整が次のステップです。ご清聴ありがとうございました。</a:t>
             </a:r>
           </a:p>
         </p:txBody>
@@ -1148,7 +722,7 @@
           <a:lstStyle/>
           <a:p>
             <a:r>
-              <a:t>説明の前に、まず走りをご覧ください。これはエピソードごとにコースをランダムに切り替えて学習した「汎化モデル」1 つを、5 つのコースで同時に評価した動画です。赤い点が車、軌跡の色が速度です。直線では黄色、つまり制限速度の 16 m/s 付近、コーナーでは適切に減速しているのが分かります。どのコースも 2 分間、壁への衝突ゼロで周回し続けます。では、この走りがどう作られたかを見ていきます。</a:t>
+              <a:t>最初に結果です。PPO エージェントはメインの fast トラックを制限速度 16 m/s で安定走行し、800 秒のエピソードで 37 周、壁への衝突ゼロを達成しました。学習は 3 万〜6 万ステップで周回能力が立ち上がり、12 万ステップの fast-dev 設定でも周回します。さらに、ランダムトラックで学習した汎化モデルは、5 種類すべてのコースを同一の重みで走り切ります。C# 側の観測生成は Python 環境とビット一致で検証済みです。</a:t>
             </a:r>
           </a:p>
         </p:txBody>
@@ -1218,7 +792,7 @@
           <a:lstStyle/>
           <a:p>
             <a:r>
-              <a:t>学習の速さです。横軸が学習ステップ、縦軸が 1 エピソードあたりの周回数です。青が fast トラック単体の学習で、3 万ステップでは 1 周で壁に刺さりますが、6 万で 32 周、9 万で 36 周に達し、以降は制限速度巡航に収束します。オレンジがランダムトラック学習で、最難関の chicane 評価でも 5 万ステップから 33 周と、ほぼ同じ速度で立ち上がります。この速さは偶然ではなく、後で説明する報酬設計の結果です。</a:t>
+              <a:t>学習の立ち上がりです。横軸が学習ステップ、縦軸がエピソードあたりの周回数です。3 万ステップでは 1 周程度で壁に刺さりますが、6 万ステップで 32 周、9 万で 36 周に達し、以降は制限速度での巡航に収束します。ランダムトラック学習 (task3) でも、最難関の chicane 評価で 5 万ステップ時点から 33 周と、ほぼ同じ速度で立ち上がります。報酬が密に設計されているため学習が速いのが特徴です。</a:t>
             </a:r>
           </a:p>
         </p:txBody>
@@ -1288,7 +862,7 @@
           <a:lstStyle/>
           <a:p>
             <a:r>
-              <a:t>1 台分の軌跡を拡大したものです。12 万ステップの fast-dev モデルの 2 分間で、黒線がコースの物理壁、点の色が速度です。直線で最高速に達し、ヘアピン進入で青く、つまりしっかり減速し、出口で再加速しています。以前は S 字の先の e-f コーナーで壁に張り付いて動けなくなる問題がありましたが、報酬の再設計で解消しました。この「壁に張り付く」問題との戦いが、本プロジェクトの中心的なエピソードです。</a:t>
+              <a:t>12 万ステップの fast-dev モデルの 2 分間の走行軌跡です。黒線がコース外壁、点の色が速度を表します。直線では 16 m/s、ヘアピンでは適切に減速して立て直しているのが分かります。以前問題になっていた e-f コーナーの壁張り付きも解消されています。</a:t>
             </a:r>
           </a:p>
         </p:txBody>
@@ -1358,7 +932,7 @@
           <a:lstStyle/>
           <a:p>
             <a:r>
-              <a:t>映像で見ていただいた結果を数字でまとめます。fast トラックで 800 秒 37 周・無衝突。周回能力の獲得は 3 万から 6 万ステップ。12 万ステップの短縮設定 fast-dev でも、NPC ありのフェーズ 2 まで通して 37 周を維持します。汎化モデルは 5 コースすべてを平均 15.7 m/s で走破。そして C# 側の観測生成は Python とビット一致、車両物理も 1e-7 で一致しており、エンジンに載せた瞬間から学習時と同じ挙動が保証されます。</a:t>
+              <a:t>こちらが汎化モデルの結果です。エピソードごとにトラックをランダムに切り替えて 15 万ステップ学習した1 つの方策を、5 つのコースで同時に評価しました。すべてのコースを平均 15.7 m/s、2 分間ノーミスで周回します。エージェントは自己位置を観測できないため、コース形状を暗記できず、反射的なレーン追従を学習したことが汎化の理由です。動画はスライドに埋め込んであります。再生してご覧ください。</a:t>
             </a:r>
           </a:p>
         </p:txBody>
@@ -1428,7 +1002,7 @@
           <a:lstStyle/>
           <a:p>
             <a:r>
-              <a:t>ここからが本題です。ベースにした highway-env は自動運転研究向けの軽量シミュレータで、racetrack 環境がレース走行に一番近いものです。ただしデフォルト設定を詳しく見ると、ゲームのレースとはかなり違います。まず行動はステアリングのみで、速度は 0・5・10 の離散ターゲットから選ぶだけ。スロットルという概念がありません。観測は presence と on_road の2 チャネルだけで、周囲 18 m の対称視野。報酬は車線中央維持と操作量ペナルティが中心で、速く走る動機がありません。そして路外に出ても物理的な壁はなく、エピソードが終わるだけです。車両も既定ではタイヤスリップのない運動学モデルです。</a:t>
+              <a:t>使用している 5 つのトラックです。すべて 2 車線・幅 5 m で、直線と円弧のみで構成しています。fast は S 字と 2 つのヘアピンを持つメインコース、oval と stadium は基礎、rect は 90 度コーナーの繰り返し、chicane は左右両方向の切り返しと最小半径 10 m のキンクを持ちます。各トラックは C# 側のプリセットと track_&lt;name&gt;.json にも複製され、検証ハーネスが両者の幾何一致を自動チェックします。</a:t>
             </a:r>
           </a:p>
         </p:txBody>
@@ -1498,7 +1072,7 @@
           <a:lstStyle/>
           <a:p>
             <a:r>
-              <a:t>左が highway-env デフォルトの racetrack、右が我々の fast トラックです。形状も作り直し、S 字と 2 つのヘアピンを持たせて難所を意図的に作りました。しかし本質的な違いは形ではなく物理です。左はステアリングだけ・壁なし・10 m/s、右はスロットル制御・外周が物理壁・16 m/s で、壁に当たると停止しバックでしか脱出できません。この差を埋めるために行った変更を、これから順番に説明します。</a:t>
+              <a:t>オリジナルの highway-env racetrack 環境との違いです。1 つ目は壁の物理です。標準では路外に出ても罰則だけですが、本環境ではコース外周だけを物理的な壁とし、車線間の白線は壁にしません。壁に当たると停止し、バックでしか脱出できません。2 つ目は報酬設計です。速度・車線中央維持・チェックポイント/ラップボーナスを生の単位で合成し、[-3,3] から [0,1] へ線形写像します。この範囲が実際の報酬の下限を覆っていないと、悪い状態がすべて 0 に飽和して勾配が消えるため、範囲の導出をコメントで管理しています。3 つ目は壁脱出の経済設計です。壁から 1 m 以内ではバック走行のペナルティを免除し、壁からの距離増加に報酬を与えます。これがないと、脱出の一歩目で罰せられて壁沿いを這う局所解を学習してしまいます。</a:t>
             </a:r>
           </a:p>
         </p:txBody>
@@ -1568,7 +1142,7 @@
           <a:lstStyle/>
           <a:p>
             <a:r>
-              <a:t>最初の変更は行動空間です。ゲームの車はアクセルとブレーキを踏むので、ステアリング専用だったものを連続スロットル付きの 2 次元連続行動に変更し、加速度レンジは ±5 m/s²、ステアは ±30 度としました。車両モデルもタイヤスリップを持つ動的 Bicycle モデルに切り替えています。加速度レンジは実験で決めました。グラフの赤い破線が ±2.5 m/s² に絞った実験で、10 万ステップで 22 周までは学習できるものの巡航速度が 10 m/s に頭打ちし、終盤には退行しました。原因は制動距離です。16 m/s から 2.5 m/s² で止まるには 51 m 必要ですが、観測の前方視野は 27 m しかなく、「見えてから減速」が物理的に間に合いません。エンジン出力を絞りたい場合はブレーキだけ強い非対称レンジ [−5, +2.5] を推奨しています。</a:t>
+              <a:t>観測は 10 チャネル 12x12 の OccupancyGrid で、前方 27 m・後方 9 m の非対称な視野にしています。レース走行ではコーナーの先読みが重要なためです。行動は連続値のスロットルとステアリングで、学習時と同じ動力学モデル (タイヤスリップ付き Bicycle model) を使います。学習は 2 フェーズの PPO です。フェーズ 1 で他車なしのレーン追従、フェーズ 2 で NPC を加えた追い越しをファインチューニングします。初期方策のスロットルバイアスを +0.4 にずらし、序盤の探索で前進が出やすくしています。fast-dev は 12 万ステップで、本番と同じハイパーパラメータのまま短縮した「周回まで確実に到達する最小構成」です。</a:t>
             </a:r>
           </a:p>
         </p:txBody>
@@ -1638,7 +1212,7 @@
           <a:lstStyle/>
           <a:p>
             <a:r>
-              <a:t>次に壁です。ここが一番試行錯誤した部分です。最初は壁がなく、路外に出たら終了するだけでした。これだとエージェントはコーナーを膨らんでショートカットする走りを覚えます。次に反発壁を入れましたが、今度は「壁に擦りながら曲がる」wall-riding が最速解になりました。壁が勝手に車の向きを変えてくれるので、ステアリングを学ぶ必要がなくなるんです。最終形は停止壁です。壁に当たると止まり、バックでしか脱出できない。さらに壁接触中は速度報酬をゼロにし、接触が 7 秒続いたらクラッシュ扱いで終了します。もう 1 つ重要なのは、壁はコース外周だけという点です。車線の白線を壁にすると2 車線を使ったライン取りができなくなります。この判定は最初閉じた車線単位で書いてしまい、白線が壁になるバグを踏みました。現在は「コリドー両端の車線の外側だけが壁」という実装です。</a:t>
+              <a:t>環境構築はこの 1 行です。リポジトリ直下の requirements.txt は旧 TensorFlow 系スタック用なので使わないでください。ノートブックは 2 つあり、task2 が fast トラック専用、task3 がランダムトラックの汎化学習用です。設定セルの FAST_DEV_RUN を True にすると短縮学習、False にすると本番学習になります。学習の進捗は Reward yardstick セルの数値と TensorBoard で確認でき、eval/mean_reward が周回相当値を超えたら周回できています。</a:t>
             </a:r>
           </a:p>
         </p:txBody>
@@ -4684,18 +4258,18 @@
                 </a:solidFill>
                 <a:latin typeface="Meiryo"/>
               </a:rPr>
-              <a:t>強化学習によるサーキット走行エージェント — highway-env をゲーム環境へ進化させる</a:t>
+              <a:t>強化学習によるサーキット走行エージェント — highway-env + PPO から RE Engine (ONNX) まで</a:t>
             </a:r>
           </a:p>
           <a:p>
             <a:r>
               <a:rPr sz="1800">
                 <a:solidFill>
-                  <a:srgbClr val="595959"/>
+                  <a:srgbClr val="666666"/>
                 </a:solidFill>
                 <a:latin typeface="Meiryo"/>
               </a:rPr>
-              <a:t>環境設計の変遷・学習パイプライン・RE Engine (ONNX/C#) デプロイ</a:t>
+              <a:t>学習環境・報酬設計・C# デプロイパイプラインの全体紹介</a:t>
             </a:r>
           </a:p>
         </p:txBody>
@@ -4726,8 +4300,8 @@
         </p:nvSpPr>
         <p:spPr>
           <a:xfrm>
-            <a:off x="457200" y="201168"/>
-            <a:ext cx="11247120" cy="777240"/>
+            <a:off x="457200" y="228600"/>
+            <a:ext cx="11247120" cy="822960"/>
           </a:xfrm>
           <a:prstGeom prst="rect">
             <a:avLst/>
@@ -4741,51 +4315,27 @@
           <a:lstStyle/>
           <a:p>
             <a:r>
-              <a:rPr sz="2800" b="1">
+              <a:rPr sz="3000" b="1">
                 <a:solidFill>
                   <a:srgbClr val="1B5EA8"/>
                 </a:solidFill>
                 <a:latin typeface="Meiryo"/>
               </a:rPr>
-              <a:t>進化 (3) 報酬の経済設計 — 抜け道より運転が得になるまで</a:t>
-            </a:r>
-          </a:p>
-        </p:txBody>
-      </p:sp>
-      <p:pic>
-        <p:nvPicPr>
-          <p:cNvPr id="3" name="Picture 2" descr="reward_economics.png"/>
-          <p:cNvPicPr>
-            <a:picLocks noChangeAspect="1"/>
-          </p:cNvPicPr>
+              <a:t>エクスポートツールと C# デプロイ</a:t>
+            </a:r>
+          </a:p>
+        </p:txBody>
+      </p:sp>
+      <p:sp>
+        <p:nvSpPr>
+          <p:cNvPr id="3" name="TextBox 2"/>
+          <p:cNvSpPr txBox="1"/>
           <p:nvPr/>
-        </p:nvPicPr>
-        <p:blipFill>
-          <a:blip r:embed="rId3"/>
-          <a:stretch>
-            <a:fillRect/>
-          </a:stretch>
-        </p:blipFill>
+        </p:nvSpPr>
         <p:spPr>
           <a:xfrm>
-            <a:off x="640080" y="1188720"/>
-            <a:ext cx="6766560" cy="3304599"/>
-          </a:xfrm>
-          <a:prstGeom prst="rect">
-            <a:avLst/>
-          </a:prstGeom>
-        </p:spPr>
-      </p:pic>
-      <p:sp>
-        <p:nvSpPr>
-          <p:cNvPr id="4" name="TextBox 3"/>
-          <p:cNvSpPr txBox="1"/>
-          <p:nvPr/>
-        </p:nvSpPr>
-        <p:spPr>
-          <a:xfrm>
-            <a:off x="7589520" y="1371600"/>
-            <a:ext cx="4206240" cy="5394960"/>
+            <a:off x="548640" y="1280160"/>
+            <a:ext cx="11064240" cy="5120640"/>
           </a:xfrm>
           <a:prstGeom prst="rect">
             <a:avLst/>
@@ -4800,97 +4350,129 @@
           <a:p>
             <a:pPr>
               <a:spcAft>
-                <a:spcPts val="500"/>
+                <a:spcPts val="600"/>
               </a:spcAft>
             </a:pPr>
             <a:r>
-              <a:rPr sz="1400" b="1">
+              <a:rPr sz="1700" b="1">
                 <a:solidFill>
                   <a:srgbClr val="222222"/>
                 </a:solidFill>
                 <a:latin typeface="Meiryo"/>
               </a:rPr>
-              <a:t>目標: 運転 &gt; 脱出 &gt; 停滞 &gt; 壁擦り の順序</a:t>
+              <a:t>python export_onnx.py &lt;model.zip&gt; -m 3        # エンジン用 NHWC (推奨)</a:t>
+            </a:r>
+          </a:p>
+          <a:p>
+            <a:pPr lvl="1">
+              <a:spcAft>
+                <a:spcPts val="600"/>
+              </a:spcAft>
+            </a:pPr>
+            <a:r>
+              <a:rPr sz="1500" b="0">
+                <a:solidFill>
+                  <a:srgbClr val="666666"/>
+                </a:solidFill>
+                <a:latin typeface="Meiryo"/>
+              </a:rPr>
+              <a:t>  -m: 1=full policy / 2=actor CHW / 3=actor NHWC / 0=全部,  -o で出力名指定</a:t>
             </a:r>
           </a:p>
           <a:p>
             <a:pPr>
               <a:spcAft>
-                <a:spcPts val="500"/>
+                <a:spcPts val="600"/>
               </a:spcAft>
             </a:pPr>
             <a:r>
-              <a:rPr sz="1400" b="0">
+              <a:rPr sz="1700" b="0">
                 <a:solidFill>
                   <a:srgbClr val="222222"/>
                 </a:solidFill>
                 <a:latin typeface="Meiryo"/>
               </a:rPr>
-              <a:t>脱出ゾーン (壁 1 m): バック免除 +</a:t>
+              <a:t>python re_engine/convert_onnx_nhwc.py &lt;actor.onnx&gt;  # 既存 CHW を NHWC 化</a:t>
+            </a:r>
+          </a:p>
+          <a:p>
+            <a:pPr>
+              <a:spcAft>
+                <a:spcPts val="600"/>
+              </a:spcAft>
+            </a:pPr>
+            <a:r>
+              <a:rPr sz="1700" b="0">
+                <a:solidFill>
+                  <a:srgbClr val="222222"/>
+                </a:solidFill>
+                <a:latin typeface="Meiryo"/>
+              </a:rPr>
+              <a:t>python re_engine/export_track_json.py  # トラック変更後に JSON + 参照観測を再生成</a:t>
+            </a:r>
+          </a:p>
+          <a:p>
+            <a:pPr>
+              <a:spcAft>
+                <a:spcPts val="600"/>
+              </a:spcAft>
+            </a:pPr>
+            <a:r>
+              <a:rPr sz="1700" b="1">
+                <a:solidFill>
+                  <a:srgbClr val="222222"/>
+                </a:solidFill>
+                <a:latin typeface="Meiryo"/>
+              </a:rPr>
+              <a:t>エンジンは ppo_actor_only_nhwc.onnx (入力 [1,12,12,10]) を使用</a:t>
             </a:r>
           </a:p>
           <a:p>
             <a:pPr lvl="1">
               <a:spcAft>
-                <a:spcPts val="500"/>
+                <a:spcPts val="600"/>
               </a:spcAft>
             </a:pPr>
             <a:r>
-              <a:rPr sz="1200" b="0">
-                <a:solidFill>
-                  <a:srgbClr val="595959"/>
+              <a:rPr sz="1500" b="0">
+                <a:solidFill>
+                  <a:srgbClr val="666666"/>
                 </a:solidFill>
                 <a:latin typeface="Meiryo"/>
               </a:rPr>
-              <a:t>  距離増加に報酬 — 「壁を這う」局所解を排除</a:t>
+              <a:t>  理由: C# は HWC 平坦列を出力 — CHW 版に入れると出力がほぼ一定に退化</a:t>
             </a:r>
           </a:p>
           <a:p>
             <a:pPr>
               <a:spcAft>
-                <a:spcPts val="500"/>
+                <a:spcPts val="600"/>
               </a:spcAft>
             </a:pPr>
             <a:r>
-              <a:rPr sz="1400" b="0">
+              <a:rPr sz="1700" b="0">
                 <a:solidFill>
                   <a:srgbClr val="222222"/>
                 </a:solidFill>
                 <a:latin typeface="Meiryo"/>
               </a:rPr>
-              <a:t>lmap [-3,3]→[0,1]: 範囲が下限を覆わないと</a:t>
+              <a:t>C# 支援クラス: SteeringSmoother / CorneringLimiter / StuckRecovery / CarController</a:t>
             </a:r>
           </a:p>
           <a:p>
             <a:pPr lvl="1">
               <a:spcAft>
-                <a:spcPts val="500"/>
+                <a:spcPts val="600"/>
               </a:spcAft>
             </a:pPr>
             <a:r>
-              <a:rPr sz="1200" b="0">
-                <a:solidFill>
-                  <a:srgbClr val="595959"/>
+              <a:rPr sz="1500" b="0">
+                <a:solidFill>
+                  <a:srgbClr val="666666"/>
                 </a:solidFill>
                 <a:latin typeface="Meiryo"/>
               </a:rPr>
-              <a:t>  勾配消失 (導出をコメントで管理)</a:t>
-            </a:r>
-          </a:p>
-          <a:p>
-            <a:pPr>
-              <a:spcAft>
-                <a:spcPts val="500"/>
-              </a:spcAft>
-            </a:pPr>
-            <a:r>
-              <a:rPr sz="1400" b="0">
-                <a:solidFill>
-                  <a:srgbClr val="222222"/>
-                </a:solidFill>
-                <a:latin typeface="Meiryo"/>
-              </a:rPr>
-              <a:t>チェックポイント/ラップボーナスは生単位で加算</a:t>
+              <a:t>  CarController は学習時と同一の Bicycle 動力学 (Python と 1e-7 一致) で速度 Vector3 を出力</a:t>
             </a:r>
           </a:p>
         </p:txBody>
@@ -4921,8 +4503,8 @@
         </p:nvSpPr>
         <p:spPr>
           <a:xfrm>
-            <a:off x="457200" y="201168"/>
-            <a:ext cx="11247120" cy="777240"/>
+            <a:off x="457200" y="228600"/>
+            <a:ext cx="11247120" cy="822960"/>
           </a:xfrm>
           <a:prstGeom prst="rect">
             <a:avLst/>
@@ -4936,13 +4518,13 @@
           <a:lstStyle/>
           <a:p>
             <a:r>
-              <a:rPr sz="2800" b="1">
+              <a:rPr sz="3000" b="1">
                 <a:solidFill>
                   <a:srgbClr val="1B5EA8"/>
                 </a:solidFill>
                 <a:latin typeface="Meiryo"/>
               </a:rPr>
-              <a:t>進化 (4) 観測 — 2ch から 10ch へ、前方に偏った視野へ</a:t>
+              <a:t>まとめ</a:t>
             </a:r>
           </a:p>
         </p:txBody>
@@ -4955,8 +4537,8 @@
         </p:nvSpPr>
         <p:spPr>
           <a:xfrm>
-            <a:off x="548640" y="1325880"/>
-            <a:ext cx="11064240" cy="5394960"/>
+            <a:off x="548640" y="1463040"/>
+            <a:ext cx="11064240" cy="5120640"/>
           </a:xfrm>
           <a:prstGeom prst="rect">
             <a:avLst/>
@@ -4971,1030 +4553,43 @@
           <a:p>
             <a:pPr>
               <a:spcAft>
-                <a:spcPts val="500"/>
+                <a:spcPts val="600"/>
               </a:spcAft>
             </a:pPr>
             <a:r>
-              <a:rPr sz="1700" b="1">
+              <a:rPr sz="2000" b="1">
                 <a:solidFill>
                   <a:srgbClr val="222222"/>
                 </a:solidFill>
                 <a:latin typeface="Meiryo"/>
               </a:rPr>
-              <a:t>2ch (presence/on_road) → 10ch: + 相対位置 x,y / 相対速度 vx,vy / 向き cos_h,sin_h / lat_off / ang_off</a:t>
+              <a:t>報酬・壁の経済設計が学習速度を決める: 周回獲得は 3〜6 万ステップ</a:t>
             </a:r>
           </a:p>
           <a:p>
             <a:pPr>
               <a:spcAft>
-                <a:spcPts val="500"/>
+                <a:spcPts val="600"/>
               </a:spcAft>
             </a:pPr>
             <a:r>
-              <a:rPr sz="1700" b="1">
+              <a:rPr sz="2000" b="1">
                 <a:solidFill>
                   <a:srgbClr val="222222"/>
                 </a:solidFill>
                 <a:latin typeface="Meiryo"/>
               </a:rPr>
-              <a:t>視野: ±18 m 対称 → 前方 27 m / 後方 9 m の非対称 (12×12 セル, 3 m 刻み)</a:t>
-            </a:r>
-          </a:p>
-          <a:p>
-            <a:pPr lvl="1">
+              <a:t>ランダムトラック学習で 1 方策 5 コース走破 — 自己位置非観測が汎化の鍵</a:t>
+            </a:r>
+          </a:p>
+          <a:p>
+            <a:pPr>
               <a:spcAft>
-                <a:spcPts val="500"/>
+                <a:spcPts val="600"/>
               </a:spcAft>
             </a:pPr>
             <a:r>
-              <a:rPr sz="1500" b="0">
-                <a:solidFill>
-                  <a:srgbClr val="595959"/>
-                </a:solidFill>
-                <a:latin typeface="Meiryo"/>
-              </a:rPr>
-              <a:t>根拠: 制動距離 16 m/s ÷ 5 m/s² = 25.6 m &lt; 27 m — 「見えてから止まれる」最小視野</a:t>
-            </a:r>
-          </a:p>
-          <a:p>
-            <a:pPr>
-              <a:spcAft>
-                <a:spcPts val="500"/>
-              </a:spcAft>
-            </a:pPr>
-            <a:r>
-              <a:rPr sz="1700" b="1">
-                <a:solidFill>
-                  <a:srgbClr val="222222"/>
-                </a:solidFill>
-                <a:latin typeface="Meiryo"/>
-              </a:rPr>
-              <a:t>自車の絶対座標は観測に含まない → コース暗記が不可能 → 汎化の鍵</a:t>
-            </a:r>
-          </a:p>
-          <a:p>
-            <a:pPr>
-              <a:spcAft>
-                <a:spcPts val="500"/>
-              </a:spcAft>
-            </a:pPr>
-            <a:r>
-              <a:rPr sz="1700" b="0">
-                <a:solidFill>
-                  <a:srgbClr val="222222"/>
-                </a:solidFill>
-                <a:latin typeface="Meiryo"/>
-              </a:rPr>
-              <a:t>on_road はレーン中心線のトレース (塗りつぶしマスクではない) — C# 移植時の要注意点</a:t>
-            </a:r>
-          </a:p>
-        </p:txBody>
-      </p:sp>
-    </p:spTree>
-  </p:cSld>
-  <p:clrMapOvr>
-    <a:masterClrMapping/>
-  </p:clrMapOvr>
-</p:sld>
-</file>
-
-<file path=ppt/slides/slide12.xml><?xml version="1.0" encoding="utf-8"?>
-<p:sld xmlns:a="http://schemas.openxmlformats.org/drawingml/2006/main" xmlns:p="http://schemas.openxmlformats.org/presentationml/2006/main" xmlns:r="http://schemas.openxmlformats.org/officeDocument/2006/relationships">
-  <p:cSld>
-    <p:spTree>
-      <p:nvGrpSpPr>
-        <p:cNvPr id="1" name=""/>
-        <p:cNvGrpSpPr/>
-        <p:nvPr/>
-      </p:nvGrpSpPr>
-      <p:grpSpPr/>
-      <p:sp>
-        <p:nvSpPr>
-          <p:cNvPr id="2" name="TextBox 1"/>
-          <p:cNvSpPr txBox="1"/>
-          <p:nvPr/>
-        </p:nvSpPr>
-        <p:spPr>
-          <a:xfrm>
-            <a:off x="457200" y="201168"/>
-            <a:ext cx="11247120" cy="777240"/>
-          </a:xfrm>
-          <a:prstGeom prst="rect">
-            <a:avLst/>
-          </a:prstGeom>
-          <a:noFill/>
-        </p:spPr>
-        <p:txBody>
-          <a:bodyPr wrap="none">
-            <a:spAutoFit/>
-          </a:bodyPr>
-          <a:lstStyle/>
-          <a:p>
-            <a:r>
-              <a:rPr sz="2800" b="1">
-                <a:solidFill>
-                  <a:srgbClr val="1B5EA8"/>
-                </a:solidFill>
-                <a:latin typeface="Meiryo"/>
-              </a:rPr>
-              <a:t>進化 (5) トラックを 1 → 5 種に — 汎化学習</a:t>
-            </a:r>
-          </a:p>
-        </p:txBody>
-      </p:sp>
-      <p:pic>
-        <p:nvPicPr>
-          <p:cNvPr id="3" name="Picture 2" descr="track_shapes.png"/>
-          <p:cNvPicPr>
-            <a:picLocks noChangeAspect="1"/>
-          </p:cNvPicPr>
-          <p:nvPr/>
-        </p:nvPicPr>
-        <p:blipFill>
-          <a:blip r:embed="rId3"/>
-          <a:stretch>
-            <a:fillRect/>
-          </a:stretch>
-        </p:blipFill>
-        <p:spPr>
-          <a:xfrm>
-            <a:off x="411480" y="1554480"/>
-            <a:ext cx="11338560" cy="2267712"/>
-          </a:xfrm>
-          <a:prstGeom prst="rect">
-            <a:avLst/>
-          </a:prstGeom>
-        </p:spPr>
-      </p:pic>
-    </p:spTree>
-  </p:cSld>
-  <p:clrMapOvr>
-    <a:masterClrMapping/>
-  </p:clrMapOvr>
-</p:sld>
-</file>
-
-<file path=ppt/slides/slide13.xml><?xml version="1.0" encoding="utf-8"?>
-<p:sld xmlns:a="http://schemas.openxmlformats.org/drawingml/2006/main" xmlns:p="http://schemas.openxmlformats.org/presentationml/2006/main" xmlns:r="http://schemas.openxmlformats.org/officeDocument/2006/relationships">
-  <p:cSld>
-    <p:spTree>
-      <p:nvGrpSpPr>
-        <p:cNvPr id="1" name=""/>
-        <p:cNvGrpSpPr/>
-        <p:nvPr/>
-      </p:nvGrpSpPr>
-      <p:grpSpPr/>
-      <p:sp>
-        <p:nvSpPr>
-          <p:cNvPr id="2" name="TextBox 1"/>
-          <p:cNvSpPr txBox="1"/>
-          <p:nvPr/>
-        </p:nvSpPr>
-        <p:spPr>
-          <a:xfrm>
-            <a:off x="457200" y="201168"/>
-            <a:ext cx="11247120" cy="777240"/>
-          </a:xfrm>
-          <a:prstGeom prst="rect">
-            <a:avLst/>
-          </a:prstGeom>
-          <a:noFill/>
-        </p:spPr>
-        <p:txBody>
-          <a:bodyPr wrap="none">
-            <a:spAutoFit/>
-          </a:bodyPr>
-          <a:lstStyle/>
-          <a:p>
-            <a:r>
-              <a:rPr sz="2800" b="1">
-                <a:solidFill>
-                  <a:srgbClr val="1B5EA8"/>
-                </a:solidFill>
-                <a:latin typeface="Meiryo"/>
-              </a:rPr>
-              <a:t>学習パイプライン — 2 フェーズ PPO と fast-dev の教訓</a:t>
-            </a:r>
-          </a:p>
-        </p:txBody>
-      </p:sp>
-      <p:sp>
-        <p:nvSpPr>
-          <p:cNvPr id="3" name="TextBox 2"/>
-          <p:cNvSpPr txBox="1"/>
-          <p:nvPr/>
-        </p:nvSpPr>
-        <p:spPr>
-          <a:xfrm>
-            <a:off x="548640" y="1280160"/>
-            <a:ext cx="11064240" cy="5394960"/>
-          </a:xfrm>
-          <a:prstGeom prst="rect">
-            <a:avLst/>
-          </a:prstGeom>
-          <a:noFill/>
-        </p:spPr>
-        <p:txBody>
-          <a:bodyPr wrap="square">
-            <a:spAutoFit/>
-          </a:bodyPr>
-          <a:lstStyle/>
-          <a:p>
-            <a:pPr>
-              <a:spcAft>
-                <a:spcPts val="500"/>
-              </a:spcAft>
-            </a:pPr>
-            <a:r>
-              <a:rPr sz="1700" b="1">
-                <a:solidFill>
-                  <a:srgbClr val="222222"/>
-                </a:solidFill>
-                <a:latin typeface="Meiryo"/>
-              </a:rPr>
-              <a:t>2 フェーズ PPO: ①NPC なしレーン追従 (120k〜1M) → ②NPC あり追い越し FT (lr 減)</a:t>
-            </a:r>
-          </a:p>
-          <a:p>
-            <a:pPr>
-              <a:spcAft>
-                <a:spcPts val="500"/>
-              </a:spcAft>
-            </a:pPr>
-            <a:r>
-              <a:rPr sz="1700" b="0">
-                <a:solidFill>
-                  <a:srgbClr val="222222"/>
-                </a:solidFill>
-                <a:latin typeface="Meiryo"/>
-              </a:rPr>
-              <a:t>カスタム CNN (10ch→512) + 初期スロットルバイアス +0.4 (前進探索)</a:t>
-            </a:r>
-          </a:p>
-          <a:p>
-            <a:pPr>
-              <a:spcAft>
-                <a:spcPts val="500"/>
-              </a:spcAft>
-            </a:pPr>
-            <a:r>
-              <a:rPr sz="1700" b="1">
-                <a:solidFill>
-                  <a:srgbClr val="222222"/>
-                </a:solidFill>
-                <a:latin typeface="Meiryo"/>
-              </a:rPr>
-              <a:t>fast-dev の進化: 65k @ ent 0.10 (曲がれない) → 120k @ ent 0.02 本番ハイパラ (37 周)</a:t>
-            </a:r>
-          </a:p>
-          <a:p>
-            <a:pPr lvl="1">
-              <a:spcAft>
-                <a:spcPts val="500"/>
-              </a:spcAft>
-            </a:pPr>
-            <a:r>
-              <a:rPr sz="1500" b="0">
-                <a:solidFill>
-                  <a:srgbClr val="B32D2D"/>
-                </a:solidFill>
-                <a:latin typeface="Meiryo"/>
-              </a:rPr>
-              <a:t>  教訓: 高エントロピーは [0,1] 圧縮報酬下で「ランダムでいる」ことが得になる</a:t>
-            </a:r>
-          </a:p>
-          <a:p>
-            <a:pPr>
-              <a:spcAft>
-                <a:spcPts val="500"/>
-              </a:spcAft>
-            </a:pPr>
-            <a:r>
-              <a:rPr sz="1700" b="0">
-                <a:solidFill>
-                  <a:srgbClr val="222222"/>
-                </a:solidFill>
-                <a:latin typeface="Meiryo"/>
-              </a:rPr>
-              <a:t>EvalCallback ベストモデル採用 (PPO は終盤退行あり) — best/phase1|phase2/</a:t>
-            </a:r>
-          </a:p>
-          <a:p>
-            <a:pPr>
-              <a:spcAft>
-                <a:spcPts val="500"/>
-              </a:spcAft>
-            </a:pPr>
-            <a:r>
-              <a:rPr sz="1700" b="0">
-                <a:solidFill>
-                  <a:srgbClr val="222222"/>
-                </a:solidFill>
-                <a:latin typeface="Meiryo"/>
-              </a:rPr>
-              <a:t>Reward yardstick: 1 周 ≈ 101, アイドル床 ≈ 0.53/step — eval 値を周回数として読む</a:t>
-            </a:r>
-          </a:p>
-        </p:txBody>
-      </p:sp>
-    </p:spTree>
-  </p:cSld>
-  <p:clrMapOvr>
-    <a:masterClrMapping/>
-  </p:clrMapOvr>
-</p:sld>
-</file>
-
-<file path=ppt/slides/slide14.xml><?xml version="1.0" encoding="utf-8"?>
-<p:sld xmlns:a="http://schemas.openxmlformats.org/drawingml/2006/main" xmlns:p="http://schemas.openxmlformats.org/presentationml/2006/main" xmlns:r="http://schemas.openxmlformats.org/officeDocument/2006/relationships">
-  <p:cSld>
-    <p:spTree>
-      <p:nvGrpSpPr>
-        <p:cNvPr id="1" name=""/>
-        <p:cNvGrpSpPr/>
-        <p:nvPr/>
-      </p:nvGrpSpPr>
-      <p:grpSpPr/>
-      <p:sp>
-        <p:nvSpPr>
-          <p:cNvPr id="2" name="TextBox 1"/>
-          <p:cNvSpPr txBox="1"/>
-          <p:nvPr/>
-        </p:nvSpPr>
-        <p:spPr>
-          <a:xfrm>
-            <a:off x="457200" y="201168"/>
-            <a:ext cx="11247120" cy="777240"/>
-          </a:xfrm>
-          <a:prstGeom prst="rect">
-            <a:avLst/>
-          </a:prstGeom>
-          <a:noFill/>
-        </p:spPr>
-        <p:txBody>
-          <a:bodyPr wrap="none">
-            <a:spAutoFit/>
-          </a:bodyPr>
-          <a:lstStyle/>
-          <a:p>
-            <a:r>
-              <a:rPr sz="2800" b="1">
-                <a:solidFill>
-                  <a:srgbClr val="1B5EA8"/>
-                </a:solidFill>
-                <a:latin typeface="Meiryo"/>
-              </a:rPr>
-              <a:t>実ゲームとのギャップを埋める C# 支援クラス</a:t>
-            </a:r>
-          </a:p>
-        </p:txBody>
-      </p:sp>
-      <p:pic>
-        <p:nvPicPr>
-          <p:cNvPr id="3" name="Picture 2" descr="smoothing_effect.png"/>
-          <p:cNvPicPr>
-            <a:picLocks noChangeAspect="1"/>
-          </p:cNvPicPr>
-          <p:nvPr/>
-        </p:nvPicPr>
-        <p:blipFill>
-          <a:blip r:embed="rId3"/>
-          <a:stretch>
-            <a:fillRect/>
-          </a:stretch>
-        </p:blipFill>
-        <p:spPr>
-          <a:xfrm>
-            <a:off x="640080" y="1234440"/>
-            <a:ext cx="6035040" cy="2084832"/>
-          </a:xfrm>
-          <a:prstGeom prst="rect">
-            <a:avLst/>
-          </a:prstGeom>
-        </p:spPr>
-      </p:pic>
-      <p:sp>
-        <p:nvSpPr>
-          <p:cNvPr id="4" name="TextBox 3"/>
-          <p:cNvSpPr txBox="1"/>
-          <p:nvPr/>
-        </p:nvSpPr>
-        <p:spPr>
-          <a:xfrm>
-            <a:off x="6858000" y="1371600"/>
-            <a:ext cx="4937760" cy="5394960"/>
-          </a:xfrm>
-          <a:prstGeom prst="rect">
-            <a:avLst/>
-          </a:prstGeom>
-          <a:noFill/>
-        </p:spPr>
-        <p:txBody>
-          <a:bodyPr wrap="square">
-            <a:spAutoFit/>
-          </a:bodyPr>
-          <a:lstStyle/>
-          <a:p>
-            <a:pPr>
-              <a:spcAft>
-                <a:spcPts val="500"/>
-              </a:spcAft>
-            </a:pPr>
-            <a:r>
-              <a:rPr sz="1400" b="1">
-                <a:solidFill>
-                  <a:srgbClr val="222222"/>
-                </a:solidFill>
-                <a:latin typeface="Meiryo"/>
-              </a:rPr>
-              <a:t>SteeringSmoother: EMA α0.6 — 蛇行 34→12 回/100步</a:t>
-            </a:r>
-          </a:p>
-          <a:p>
-            <a:pPr>
-              <a:spcAft>
-                <a:spcPts val="500"/>
-              </a:spcAft>
-            </a:pPr>
-            <a:r>
-              <a:rPr sz="1400" b="1">
-                <a:solidFill>
-                  <a:srgbClr val="222222"/>
-                </a:solidFill>
-                <a:latin typeface="Meiryo"/>
-              </a:rPr>
-              <a:t>CorneringLimiter: ステア速度制限 + 比例ブレーキ</a:t>
-            </a:r>
-          </a:p>
-          <a:p>
-            <a:pPr lvl="1">
-              <a:spcAft>
-                <a:spcPts val="500"/>
-              </a:spcAft>
-            </a:pPr>
-            <a:r>
-              <a:rPr sz="1200" b="0">
-                <a:solidFill>
-                  <a:srgbClr val="595959"/>
-                </a:solidFill>
-                <a:latin typeface="Meiryo"/>
-              </a:rPr>
-              <a:t>  速度床 5 m/s — 減速はしても停止はしない</a:t>
-            </a:r>
-          </a:p>
-          <a:p>
-            <a:pPr>
-              <a:spcAft>
-                <a:spcPts val="500"/>
-              </a:spcAft>
-            </a:pPr>
-            <a:r>
-              <a:rPr sz="1400" b="1">
-                <a:solidFill>
-                  <a:srgbClr val="222222"/>
-                </a:solidFill>
-                <a:latin typeface="Meiryo"/>
-              </a:rPr>
-              <a:t>StuckRecovery: 移動距離でスタック検出→バック指示</a:t>
-            </a:r>
-          </a:p>
-          <a:p>
-            <a:pPr lvl="1">
-              <a:spcAft>
-                <a:spcPts val="500"/>
-              </a:spcAft>
-            </a:pPr>
-            <a:r>
-              <a:rPr sz="1200" b="0">
-                <a:solidFill>
-                  <a:srgbClr val="595959"/>
-                </a:solidFill>
-                <a:latin typeface="Meiryo"/>
-              </a:rPr>
-              <a:t>  発進の低速と壁刺さりを距離で区別 (レーン不要)</a:t>
-            </a:r>
-          </a:p>
-          <a:p>
-            <a:pPr>
-              <a:spcAft>
-                <a:spcPts val="500"/>
-              </a:spcAft>
-            </a:pPr>
-            <a:r>
-              <a:rPr sz="1400" b="1">
-                <a:solidFill>
-                  <a:srgbClr val="222222"/>
-                </a:solidFill>
-                <a:latin typeface="Meiryo"/>
-              </a:rPr>
-              <a:t>CarController: 学習と同一物理 (Python と 1e-7 一致)</a:t>
-            </a:r>
-          </a:p>
-        </p:txBody>
-      </p:sp>
-    </p:spTree>
-  </p:cSld>
-  <p:clrMapOvr>
-    <a:masterClrMapping/>
-  </p:clrMapOvr>
-</p:sld>
-</file>
-
-<file path=ppt/slides/slide15.xml><?xml version="1.0" encoding="utf-8"?>
-<p:sld xmlns:a="http://schemas.openxmlformats.org/drawingml/2006/main" xmlns:p="http://schemas.openxmlformats.org/presentationml/2006/main" xmlns:r="http://schemas.openxmlformats.org/officeDocument/2006/relationships">
-  <p:cSld>
-    <p:spTree>
-      <p:nvGrpSpPr>
-        <p:cNvPr id="1" name=""/>
-        <p:cNvGrpSpPr/>
-        <p:nvPr/>
-      </p:nvGrpSpPr>
-      <p:grpSpPr/>
-      <p:sp>
-        <p:nvSpPr>
-          <p:cNvPr id="2" name="TextBox 1"/>
-          <p:cNvSpPr txBox="1"/>
-          <p:nvPr/>
-        </p:nvSpPr>
-        <p:spPr>
-          <a:xfrm>
-            <a:off x="457200" y="201168"/>
-            <a:ext cx="11247120" cy="777240"/>
-          </a:xfrm>
-          <a:prstGeom prst="rect">
-            <a:avLst/>
-          </a:prstGeom>
-          <a:noFill/>
-        </p:spPr>
-        <p:txBody>
-          <a:bodyPr wrap="none">
-            <a:spAutoFit/>
-          </a:bodyPr>
-          <a:lstStyle/>
-          <a:p>
-            <a:r>
-              <a:rPr sz="2800" b="1">
-                <a:solidFill>
-                  <a:srgbClr val="1B5EA8"/>
-                </a:solidFill>
-                <a:latin typeface="Meiryo"/>
-              </a:rPr>
-              <a:t>セットアップとノートブックの使い方</a:t>
-            </a:r>
-          </a:p>
-        </p:txBody>
-      </p:sp>
-      <p:sp>
-        <p:nvSpPr>
-          <p:cNvPr id="3" name="TextBox 2"/>
-          <p:cNvSpPr txBox="1"/>
-          <p:nvPr/>
-        </p:nvSpPr>
-        <p:spPr>
-          <a:xfrm>
-            <a:off x="548640" y="1325880"/>
-            <a:ext cx="11064240" cy="5394960"/>
-          </a:xfrm>
-          <a:prstGeom prst="rect">
-            <a:avLst/>
-          </a:prstGeom>
-          <a:noFill/>
-        </p:spPr>
-        <p:txBody>
-          <a:bodyPr wrap="square">
-            <a:spAutoFit/>
-          </a:bodyPr>
-          <a:lstStyle/>
-          <a:p>
-            <a:pPr>
-              <a:spcAft>
-                <a:spcPts val="500"/>
-              </a:spcAft>
-            </a:pPr>
-            <a:r>
-              <a:rPr sz="1700" b="1">
-                <a:solidFill>
-                  <a:srgbClr val="222222"/>
-                </a:solidFill>
-                <a:latin typeface="Meiryo"/>
-              </a:rPr>
-              <a:t>pip install "highway-env&gt;=1.8" "stable-baselines3[extra]&gt;=2.0" gymnasium torch tensorboard moviepy onnx onnxruntime</a:t>
-            </a:r>
-          </a:p>
-          <a:p>
-            <a:pPr lvl="1">
-              <a:spcAft>
-                <a:spcPts val="500"/>
-              </a:spcAft>
-            </a:pPr>
-            <a:r>
-              <a:rPr sz="1500" b="0">
-                <a:solidFill>
-                  <a:srgbClr val="B32D2D"/>
-                </a:solidFill>
-                <a:latin typeface="Meiryo"/>
-              </a:rPr>
-              <a:t>(リポジトリの requirements.txt は旧スタック用 — 使わない)</a:t>
-            </a:r>
-          </a:p>
-          <a:p>
-            <a:pPr>
-              <a:spcAft>
-                <a:spcPts val="500"/>
-              </a:spcAft>
-            </a:pPr>
-            <a:r>
-              <a:rPr sz="1700" b="0">
-                <a:solidFill>
-                  <a:srgbClr val="222222"/>
-                </a:solidFill>
-                <a:latin typeface="Meiryo"/>
-              </a:rPr>
-              <a:t>task2_laning_overtaking_sb3_ppo.ipynb — fast トラック学習</a:t>
-            </a:r>
-          </a:p>
-          <a:p>
-            <a:pPr>
-              <a:spcAft>
-                <a:spcPts val="500"/>
-              </a:spcAft>
-            </a:pPr>
-            <a:r>
-              <a:rPr sz="1700" b="0">
-                <a:solidFill>
-                  <a:srgbClr val="222222"/>
-                </a:solidFill>
-                <a:latin typeface="Meiryo"/>
-              </a:rPr>
-              <a:t>task3_generalization_sb3_ppo.ipynb — random 学習 + トラック別レポート + 5 連動画</a:t>
-            </a:r>
-          </a:p>
-          <a:p>
-            <a:pPr>
-              <a:spcAft>
-                <a:spcPts val="500"/>
-              </a:spcAft>
-            </a:pPr>
-            <a:r>
-              <a:rPr sz="1700" b="1">
-                <a:solidFill>
-                  <a:srgbClr val="222222"/>
-                </a:solidFill>
-                <a:latin typeface="Meiryo"/>
-              </a:rPr>
-              <a:t>FAST_DEV_RUN=True: 12-15 万ステップ (周回到達を実測保証) / False: 本番 100 万+</a:t>
-            </a:r>
-          </a:p>
-          <a:p>
-            <a:pPr>
-              <a:spcAft>
-                <a:spcPts val="500"/>
-              </a:spcAft>
-            </a:pPr>
-            <a:r>
-              <a:rPr sz="1700" b="1">
-                <a:solidFill>
-                  <a:srgbClr val="222222"/>
-                </a:solidFill>
-                <a:latin typeface="Meiryo"/>
-              </a:rPr>
-              <a:t>Presentation Media セル: 学習曲線・軌跡・5 トラック動画を生成し VIDEO_DIR に保存</a:t>
-            </a:r>
-          </a:p>
-          <a:p>
-            <a:pPr>
-              <a:spcAft>
-                <a:spcPts val="500"/>
-              </a:spcAft>
-            </a:pPr>
-            <a:r>
-              <a:rPr sz="1700" b="0">
-                <a:solidFill>
-                  <a:srgbClr val="222222"/>
-                </a:solidFill>
-                <a:latin typeface="Meiryo"/>
-              </a:rPr>
-              <a:t>検証: cd re_engine/verify &amp;&amp; dotnet run -- ..  → ALL SCENARIOS MATCH</a:t>
-            </a:r>
-          </a:p>
-        </p:txBody>
-      </p:sp>
-    </p:spTree>
-  </p:cSld>
-  <p:clrMapOvr>
-    <a:masterClrMapping/>
-  </p:clrMapOvr>
-</p:sld>
-</file>
-
-<file path=ppt/slides/slide16.xml><?xml version="1.0" encoding="utf-8"?>
-<p:sld xmlns:a="http://schemas.openxmlformats.org/drawingml/2006/main" xmlns:p="http://schemas.openxmlformats.org/presentationml/2006/main" xmlns:r="http://schemas.openxmlformats.org/officeDocument/2006/relationships">
-  <p:cSld>
-    <p:spTree>
-      <p:nvGrpSpPr>
-        <p:cNvPr id="1" name=""/>
-        <p:cNvGrpSpPr/>
-        <p:nvPr/>
-      </p:nvGrpSpPr>
-      <p:grpSpPr/>
-      <p:sp>
-        <p:nvSpPr>
-          <p:cNvPr id="2" name="TextBox 1"/>
-          <p:cNvSpPr txBox="1"/>
-          <p:nvPr/>
-        </p:nvSpPr>
-        <p:spPr>
-          <a:xfrm>
-            <a:off x="457200" y="201168"/>
-            <a:ext cx="11247120" cy="777240"/>
-          </a:xfrm>
-          <a:prstGeom prst="rect">
-            <a:avLst/>
-          </a:prstGeom>
-          <a:noFill/>
-        </p:spPr>
-        <p:txBody>
-          <a:bodyPr wrap="none">
-            <a:spAutoFit/>
-          </a:bodyPr>
-          <a:lstStyle/>
-          <a:p>
-            <a:r>
-              <a:rPr sz="2800" b="1">
-                <a:solidFill>
-                  <a:srgbClr val="1B5EA8"/>
-                </a:solidFill>
-                <a:latin typeface="Meiryo"/>
-              </a:rPr>
-              <a:t>エクスポートツールと ONNX の注意点</a:t>
-            </a:r>
-          </a:p>
-        </p:txBody>
-      </p:sp>
-      <p:sp>
-        <p:nvSpPr>
-          <p:cNvPr id="3" name="TextBox 2"/>
-          <p:cNvSpPr txBox="1"/>
-          <p:nvPr/>
-        </p:nvSpPr>
-        <p:spPr>
-          <a:xfrm>
-            <a:off x="548640" y="1325880"/>
-            <a:ext cx="11064240" cy="5394960"/>
-          </a:xfrm>
-          <a:prstGeom prst="rect">
-            <a:avLst/>
-          </a:prstGeom>
-          <a:noFill/>
-        </p:spPr>
-        <p:txBody>
-          <a:bodyPr wrap="square">
-            <a:spAutoFit/>
-          </a:bodyPr>
-          <a:lstStyle/>
-          <a:p>
-            <a:pPr>
-              <a:spcAft>
-                <a:spcPts val="500"/>
-              </a:spcAft>
-            </a:pPr>
-            <a:r>
-              <a:rPr sz="1700" b="1">
-                <a:solidFill>
-                  <a:srgbClr val="222222"/>
-                </a:solidFill>
-                <a:latin typeface="Meiryo"/>
-              </a:rPr>
-              <a:t>python export_onnx.py &lt;model.zip&gt; -m 3   # エンジン用 NHWC [1,12,12,10] (推奨)</a:t>
-            </a:r>
-          </a:p>
-          <a:p>
-            <a:pPr lvl="1">
-              <a:spcAft>
-                <a:spcPts val="500"/>
-              </a:spcAft>
-            </a:pPr>
-            <a:r>
-              <a:rPr sz="1500" b="0">
-                <a:solidFill>
-                  <a:srgbClr val="595959"/>
-                </a:solidFill>
-                <a:latin typeface="Meiryo"/>
-              </a:rPr>
-              <a:t>  -m 1: full policy / 2: actor CHW / 3: actor NHWC / 0: 全部 — 各エクスポートは torch と自動照合</a:t>
-            </a:r>
-          </a:p>
-          <a:p>
-            <a:pPr>
-              <a:spcAft>
-                <a:spcPts val="500"/>
-              </a:spcAft>
-            </a:pPr>
-            <a:r>
-              <a:rPr sz="1700" b="0">
-                <a:solidFill>
-                  <a:srgbClr val="222222"/>
-                </a:solidFill>
-                <a:latin typeface="Meiryo"/>
-              </a:rPr>
-              <a:t>python re_engine/convert_onnx_nhwc.py &lt;actor.onnx&gt;   # 既存 CHW を NHWC 化</a:t>
-            </a:r>
-          </a:p>
-          <a:p>
-            <a:pPr>
-              <a:spcAft>
-                <a:spcPts val="500"/>
-              </a:spcAft>
-            </a:pPr>
-            <a:r>
-              <a:rPr sz="1700" b="0">
-                <a:solidFill>
-                  <a:srgbClr val="222222"/>
-                </a:solidFill>
-                <a:latin typeface="Meiryo"/>
-              </a:rPr>
-              <a:t>python re_engine/export_track_json.py   # トラック/観測変更後に参照データ再生成</a:t>
-            </a:r>
-          </a:p>
-          <a:p>
-            <a:pPr>
-              <a:spcAft>
-                <a:spcPts val="500"/>
-              </a:spcAft>
-            </a:pPr>
-            <a:r>
-              <a:rPr sz="1700" b="1">
-                <a:solidFill>
-                  <a:srgbClr val="B32D2D"/>
-                </a:solidFill>
-                <a:latin typeface="Meiryo"/>
-              </a:rPr>
-              <a:t>症状で覚える: 出力がほぼ一定 (throttle≈0.4, steer≈0.2) = レイアウト不一致</a:t>
-            </a:r>
-          </a:p>
-          <a:p>
-            <a:pPr>
-              <a:spcAft>
-                <a:spcPts val="500"/>
-              </a:spcAft>
-            </a:pPr>
-            <a:r>
-              <a:rPr sz="1700" b="0">
-                <a:solidFill>
-                  <a:srgbClr val="222222"/>
-                </a:solidFill>
-                <a:latin typeface="Meiryo"/>
-              </a:rPr>
-              <a:t>定数同期: accel/steer レンジ・5 Hz・グリッド設定は C# に複製 — 変更時は 4 点セット</a:t>
-            </a:r>
-          </a:p>
-          <a:p>
-            <a:pPr>
-              <a:spcAft>
-                <a:spcPts val="500"/>
-              </a:spcAft>
-            </a:pPr>
-            <a:r>
-              <a:rPr sz="1700" b="0">
-                <a:solidFill>
-                  <a:srgbClr val="222222"/>
-                </a:solidFill>
-                <a:latin typeface="Meiryo"/>
-              </a:rPr>
-              <a:t>単位は全て m/s・m・rad。km/h の Vector3 は KphToMs で変換 (kph 直入れは無警告で劣化)</a:t>
-            </a:r>
-          </a:p>
-        </p:txBody>
-      </p:sp>
-    </p:spTree>
-  </p:cSld>
-  <p:clrMapOvr>
-    <a:masterClrMapping/>
-  </p:clrMapOvr>
-</p:sld>
-</file>
-
-<file path=ppt/slides/slide17.xml><?xml version="1.0" encoding="utf-8"?>
-<p:sld xmlns:a="http://schemas.openxmlformats.org/drawingml/2006/main" xmlns:p="http://schemas.openxmlformats.org/presentationml/2006/main" xmlns:r="http://schemas.openxmlformats.org/officeDocument/2006/relationships">
-  <p:cSld>
-    <p:spTree>
-      <p:nvGrpSpPr>
-        <p:cNvPr id="1" name=""/>
-        <p:cNvGrpSpPr/>
-        <p:nvPr/>
-      </p:nvGrpSpPr>
-      <p:grpSpPr/>
-      <p:sp>
-        <p:nvSpPr>
-          <p:cNvPr id="2" name="TextBox 1"/>
-          <p:cNvSpPr txBox="1"/>
-          <p:nvPr/>
-        </p:nvSpPr>
-        <p:spPr>
-          <a:xfrm>
-            <a:off x="457200" y="201168"/>
-            <a:ext cx="11247120" cy="777240"/>
-          </a:xfrm>
-          <a:prstGeom prst="rect">
-            <a:avLst/>
-          </a:prstGeom>
-          <a:noFill/>
-        </p:spPr>
-        <p:txBody>
-          <a:bodyPr wrap="none">
-            <a:spAutoFit/>
-          </a:bodyPr>
-          <a:lstStyle/>
-          <a:p>
-            <a:r>
-              <a:rPr sz="2800" b="1">
-                <a:solidFill>
-                  <a:srgbClr val="1B5EA8"/>
-                </a:solidFill>
-                <a:latin typeface="Meiryo"/>
-              </a:rPr>
-              <a:t>まとめ — 環境設計こそが学習を決める</a:t>
-            </a:r>
-          </a:p>
-        </p:txBody>
-      </p:sp>
-      <p:sp>
-        <p:nvSpPr>
-          <p:cNvPr id="3" name="TextBox 2"/>
-          <p:cNvSpPr txBox="1"/>
-          <p:nvPr/>
-        </p:nvSpPr>
-        <p:spPr>
-          <a:xfrm>
-            <a:off x="548640" y="1417320"/>
-            <a:ext cx="11064240" cy="5394960"/>
-          </a:xfrm>
-          <a:prstGeom prst="rect">
-            <a:avLst/>
-          </a:prstGeom>
-          <a:noFill/>
-        </p:spPr>
-        <p:txBody>
-          <a:bodyPr wrap="square">
-            <a:spAutoFit/>
-          </a:bodyPr>
-          <a:lstStyle/>
-          <a:p>
-            <a:pPr>
-              <a:spcAft>
-                <a:spcPts val="500"/>
-              </a:spcAft>
-            </a:pPr>
-            <a:r>
-              <a:rPr sz="1900" b="1">
-                <a:solidFill>
-                  <a:srgbClr val="222222"/>
-                </a:solidFill>
-                <a:latin typeface="Meiryo"/>
-              </a:rPr>
-              <a:t>デフォルト racetrack → ゲーム環境へ: 行動・壁・報酬・観測・トラックを段階的に進化</a:t>
-            </a:r>
-          </a:p>
-          <a:p>
-            <a:pPr>
-              <a:spcAft>
-                <a:spcPts val="500"/>
-              </a:spcAft>
-            </a:pPr>
-            <a:r>
-              <a:rPr sz="1900" b="1">
-                <a:solidFill>
-                  <a:srgbClr val="222222"/>
-                </a:solidFill>
-                <a:latin typeface="Meiryo"/>
-              </a:rPr>
-              <a:t>抜け道 (ショートカット / wall-riding / 壁這い) を報酬の経済設計で排除 → 6 万ステップで周回</a:t>
-            </a:r>
-          </a:p>
-          <a:p>
-            <a:pPr>
-              <a:spcAft>
-                <a:spcPts val="500"/>
-              </a:spcAft>
-            </a:pPr>
-            <a:r>
-              <a:rPr sz="1900" b="1">
-                <a:solidFill>
-                  <a:srgbClr val="222222"/>
-                </a:solidFill>
-                <a:latin typeface="Meiryo"/>
-              </a:rPr>
-              <a:t>自己位置を観測に入れない設計が 5 コース汎化を生んだ</a:t>
-            </a:r>
-          </a:p>
-          <a:p>
-            <a:pPr>
-              <a:spcAft>
-                <a:spcPts val="500"/>
-              </a:spcAft>
-            </a:pPr>
-            <a:r>
-              <a:rPr sz="1900" b="0">
+              <a:rPr sz="2000" b="1">
                 <a:solidFill>
                   <a:srgbClr val="222222"/>
                 </a:solidFill>
@@ -6006,33 +4601,33 @@
           <a:p>
             <a:pPr>
               <a:spcAft>
-                <a:spcPts val="500"/>
+                <a:spcPts val="600"/>
               </a:spcAft>
             </a:pPr>
             <a:r>
-              <a:rPr sz="1900" b="0">
+              <a:rPr sz="2000" b="0">
                 <a:solidFill>
                   <a:srgbClr val="222222"/>
                 </a:solidFill>
                 <a:latin typeface="Meiryo"/>
               </a:rPr>
-              <a:t>媒体生成コードはすべてノートブック内 (Presentation Media セル) — 本スライドは再現可能</a:t>
+              <a:t>再現手順・注意点は CLAUDE.md / re_engine/README.md に集約</a:t>
             </a:r>
           </a:p>
           <a:p>
             <a:pPr>
               <a:spcAft>
-                <a:spcPts val="500"/>
+                <a:spcPts val="600"/>
               </a:spcAft>
             </a:pPr>
             <a:r>
-              <a:rPr sz="1900" b="0">
+              <a:rPr sz="2000" b="0">
                 <a:solidFill>
                   <a:srgbClr val="222222"/>
                 </a:solidFill>
                 <a:latin typeface="Meiryo"/>
               </a:rPr>
-              <a:t>次のステップ: RE Engine 実走検証・実車ダイナミクス適合・NPC レース</a:t>
+              <a:t>次のステップ: RE Engine 内での実走検証、実車ダイナミクスへの適合</a:t>
             </a:r>
           </a:p>
         </p:txBody>
@@ -6063,8 +4658,8 @@
         </p:nvSpPr>
         <p:spPr>
           <a:xfrm>
-            <a:off x="457200" y="201168"/>
-            <a:ext cx="11247120" cy="777240"/>
+            <a:off x="457200" y="228600"/>
+            <a:ext cx="11247120" cy="822960"/>
           </a:xfrm>
           <a:prstGeom prst="rect">
             <a:avLst/>
@@ -6078,101 +4673,141 @@
           <a:lstStyle/>
           <a:p>
             <a:r>
-              <a:rPr sz="2800" b="1">
+              <a:rPr sz="3000" b="1">
                 <a:solidFill>
                   <a:srgbClr val="1B5EA8"/>
                 </a:solidFill>
                 <a:latin typeface="Meiryo"/>
               </a:rPr>
-              <a:t>まず結果から — 1 つの方策で 5 トラック同時走行</a:t>
-            </a:r>
-          </a:p>
-        </p:txBody>
-      </p:sp>
-      <p:pic>
-        <p:nvPicPr>
-          <p:cNvPr id="3" name="Picture 2" descr="gen_tracks_grid.png"/>
-          <p:cNvPicPr>
-            <a:picLocks noChangeAspect="1"/>
-          </p:cNvPicPr>
+              <a:t>結果ハイライト</a:t>
+            </a:r>
+          </a:p>
+        </p:txBody>
+      </p:sp>
+      <p:sp>
+        <p:nvSpPr>
+          <p:cNvPr id="3" name="TextBox 2"/>
+          <p:cNvSpPr txBox="1"/>
           <p:nvPr/>
-        </p:nvPicPr>
-        <p:blipFill>
-          <a:blip r:embed="rId3"/>
-          <a:stretch>
-            <a:fillRect/>
-          </a:stretch>
-        </p:blipFill>
+        </p:nvSpPr>
         <p:spPr>
           <a:xfrm>
-            <a:off x="411480" y="1143000"/>
-            <a:ext cx="11338560" cy="2789689"/>
+            <a:off x="548640" y="1371600"/>
+            <a:ext cx="11064240" cy="5120640"/>
           </a:xfrm>
           <a:prstGeom prst="rect">
             <a:avLst/>
           </a:prstGeom>
+          <a:noFill/>
         </p:spPr>
-      </p:pic>
-      <p:pic>
-        <p:nvPicPr>
-          <p:cNvPr id="4" name="gen_all_tracks.mp4">
-            <a:hlinkClick r:id="" action="ppaction://media"/>
-          </p:cNvPr>
-          <p:cNvPicPr>
-            <a:picLocks noChangeAspect="1"/>
-          </p:cNvPicPr>
-          <p:nvPr>
-            <a:videoFile r:link="rId5"/>
-            <p:extLst>
-              <p:ext uri="{DAA4B4D4-6D71-4841-9C94-3DE7FCFB9230}">
-                <p14:media xmlns:p14="http://schemas.microsoft.com/office/powerpoint/2010/main" r:embed="rId4"/>
-              </p:ext>
-            </p:extLst>
-          </p:nvPr>
-        </p:nvPicPr>
-        <p:blipFill>
-          <a:blip r:embed="rId3"/>
-          <a:stretch>
-            <a:fillRect/>
-          </a:stretch>
-        </p:blipFill>
-        <p:spPr>
-          <a:xfrm>
-            <a:off x="2651760" y="3977639"/>
-            <a:ext cx="6858000" cy="2057400"/>
-          </a:xfrm>
-          <a:prstGeom prst="rect">
-            <a:avLst/>
-          </a:prstGeom>
-        </p:spPr>
-      </p:pic>
+        <p:txBody>
+          <a:bodyPr wrap="square">
+            <a:spAutoFit/>
+          </a:bodyPr>
+          <a:lstStyle/>
+          <a:p>
+            <a:pPr>
+              <a:spcAft>
+                <a:spcPts val="600"/>
+              </a:spcAft>
+            </a:pPr>
+            <a:r>
+              <a:rPr sz="2000" b="1">
+                <a:solidFill>
+                  <a:srgbClr val="222222"/>
+                </a:solidFill>
+                <a:latin typeface="Meiryo"/>
+              </a:rPr>
+              <a:t>37 周 / 800 秒エピソード・16 m/s (制限速度) で無衝突 — fast トラック</a:t>
+            </a:r>
+          </a:p>
+          <a:p>
+            <a:pPr>
+              <a:spcAft>
+                <a:spcPts val="600"/>
+              </a:spcAft>
+            </a:pPr>
+            <a:r>
+              <a:rPr sz="2000" b="0">
+                <a:solidFill>
+                  <a:srgbClr val="222222"/>
+                </a:solidFill>
+                <a:latin typeface="Meiryo"/>
+              </a:rPr>
+              <a:t>周回能力は 3〜6 万ステップで獲得 (実測) — fast-dev (12万) でも確実に周回</a:t>
+            </a:r>
+          </a:p>
+          <a:p>
+            <a:pPr>
+              <a:spcAft>
+                <a:spcPts val="600"/>
+              </a:spcAft>
+            </a:pPr>
+            <a:r>
+              <a:rPr sz="2000" b="1">
+                <a:solidFill>
+                  <a:srgbClr val="222222"/>
+                </a:solidFill>
+                <a:latin typeface="Meiryo"/>
+              </a:rPr>
+              <a:t>汎化モデル: 1 つの方策で 5 トラックすべてを 2 分間ノーミス走行</a:t>
+            </a:r>
+          </a:p>
+          <a:p>
+            <a:pPr>
+              <a:spcAft>
+                <a:spcPts val="600"/>
+              </a:spcAft>
+            </a:pPr>
+            <a:r>
+              <a:rPr sz="2000" b="0">
+                <a:solidFill>
+                  <a:srgbClr val="222222"/>
+                </a:solidFill>
+                <a:latin typeface="Meiryo"/>
+              </a:rPr>
+              <a:t>ゼロショット転移: fast のみで学習した方策が他 4 トラックも制限速度で走行</a:t>
+            </a:r>
+          </a:p>
+          <a:p>
+            <a:pPr>
+              <a:spcAft>
+                <a:spcPts val="600"/>
+              </a:spcAft>
+            </a:pPr>
+            <a:r>
+              <a:rPr sz="2000" b="1">
+                <a:solidFill>
+                  <a:srgbClr val="222222"/>
+                </a:solidFill>
+                <a:latin typeface="Meiryo"/>
+              </a:rPr>
+              <a:t>C# 観測ポート: Python とビット一致 (maxDiff = 0.0) を検証ハーネスで保証</a:t>
+            </a:r>
+          </a:p>
+          <a:p>
+            <a:pPr>
+              <a:spcAft>
+                <a:spcPts val="600"/>
+              </a:spcAft>
+            </a:pPr>
+            <a:r>
+              <a:rPr sz="2000" b="0">
+                <a:solidFill>
+                  <a:srgbClr val="222222"/>
+                </a:solidFill>
+                <a:latin typeface="Meiryo"/>
+              </a:rPr>
+              <a:t>ONNX 3 種 (full / actor CHW / actor NHWC) をエクスポート、エンジンは NHWC を使用</a:t>
+            </a:r>
+          </a:p>
+        </p:txBody>
+      </p:sp>
     </p:spTree>
   </p:cSld>
   <p:clrMapOvr>
     <a:masterClrMapping/>
   </p:clrMapOvr>
-  <p:timing>
-    <p:tnLst>
-      <p:par>
-        <p:cTn id="1" dur="indefinite" restart="never" nodeType="tmRoot">
-          <p:childTnLst>
-            <p:video>
-              <p:cMediaNode vol="80000">
-                <p:cTn id="2" fill="hold" display="0">
-                  <p:stCondLst>
-                    <p:cond delay="indefinite"/>
-                  </p:stCondLst>
-                </p:cTn>
-                <p:tgtEl>
-                  <p:spTgt spid="4"/>
-                </p:tgtEl>
-              </p:cMediaNode>
-            </p:video>
-          </p:childTnLst>
-        </p:cTn>
-      </p:par>
-    </p:tnLst>
-  </p:timing>
 </p:sld>
 </file>
 
@@ -6194,8 +4829,8 @@
         </p:nvSpPr>
         <p:spPr>
           <a:xfrm>
-            <a:off x="457200" y="201168"/>
-            <a:ext cx="11247120" cy="777240"/>
+            <a:off x="457200" y="228600"/>
+            <a:ext cx="11247120" cy="822960"/>
           </a:xfrm>
           <a:prstGeom prst="rect">
             <a:avLst/>
@@ -6209,13 +4844,13 @@
           <a:lstStyle/>
           <a:p>
             <a:r>
-              <a:rPr sz="2800" b="1">
+              <a:rPr sz="3000" b="1">
                 <a:solidFill>
                   <a:srgbClr val="1B5EA8"/>
                 </a:solidFill>
                 <a:latin typeface="Meiryo"/>
               </a:rPr>
-              <a:t>学習曲線 — 周回能力は 3〜6 万ステップで立ち上がる</a:t>
+              <a:t>学習曲線 — 周回数 vs 学習ステップ</a:t>
             </a:r>
           </a:p>
         </p:txBody>
@@ -6236,8 +4871,8 @@
         </p:blipFill>
         <p:spPr>
           <a:xfrm>
-            <a:off x="2468880" y="1234440"/>
-            <a:ext cx="7315200" cy="4096512"/>
+            <a:off x="2377440" y="1234440"/>
+            <a:ext cx="7498079" cy="4198924"/>
           </a:xfrm>
           <a:prstGeom prst="rect">
             <a:avLst/>
@@ -6270,8 +4905,8 @@
         </p:nvSpPr>
         <p:spPr>
           <a:xfrm>
-            <a:off x="457200" y="201168"/>
-            <a:ext cx="11247120" cy="777240"/>
+            <a:off x="457200" y="228600"/>
+            <a:ext cx="11247120" cy="822960"/>
           </a:xfrm>
           <a:prstGeom prst="rect">
             <a:avLst/>
@@ -6285,13 +4920,13 @@
           <a:lstStyle/>
           <a:p>
             <a:r>
-              <a:rPr sz="2800" b="1">
+              <a:rPr sz="3000" b="1">
                 <a:solidFill>
                   <a:srgbClr val="1B5EA8"/>
                 </a:solidFill>
                 <a:latin typeface="Meiryo"/>
               </a:rPr>
-              <a:t>走行軌跡 — 減速と立ち上がりの質</a:t>
+              <a:t>走行軌跡 — fast トラック (fast-dev モデル)</a:t>
             </a:r>
           </a:p>
         </p:txBody>
@@ -6346,8 +4981,8 @@
         </p:nvSpPr>
         <p:spPr>
           <a:xfrm>
-            <a:off x="457200" y="201168"/>
-            <a:ext cx="11247120" cy="777240"/>
+            <a:off x="457200" y="228600"/>
+            <a:ext cx="11247120" cy="822960"/>
           </a:xfrm>
           <a:prstGeom prst="rect">
             <a:avLst/>
@@ -6361,141 +4996,101 @@
           <a:lstStyle/>
           <a:p>
             <a:r>
-              <a:rPr sz="2800" b="1">
+              <a:rPr sz="3000" b="1">
                 <a:solidFill>
                   <a:srgbClr val="1B5EA8"/>
                 </a:solidFill>
                 <a:latin typeface="Meiryo"/>
               </a:rPr>
-              <a:t>結果サマリ (すべて実測値)</a:t>
-            </a:r>
-          </a:p>
-        </p:txBody>
-      </p:sp>
-      <p:sp>
-        <p:nvSpPr>
-          <p:cNvPr id="3" name="TextBox 2"/>
-          <p:cNvSpPr txBox="1"/>
+              <a:t>汎化モデル — 1 つの方策で 5 トラック</a:t>
+            </a:r>
+          </a:p>
+        </p:txBody>
+      </p:sp>
+      <p:pic>
+        <p:nvPicPr>
+          <p:cNvPr id="3" name="Picture 2" descr="gen_tracks_grid.png"/>
+          <p:cNvPicPr>
+            <a:picLocks noChangeAspect="1"/>
+          </p:cNvPicPr>
           <p:nvPr/>
-        </p:nvSpPr>
+        </p:nvPicPr>
+        <p:blipFill>
+          <a:blip r:embed="rId3"/>
+          <a:stretch>
+            <a:fillRect/>
+          </a:stretch>
+        </p:blipFill>
         <p:spPr>
           <a:xfrm>
-            <a:off x="548640" y="1325880"/>
-            <a:ext cx="11064240" cy="5394960"/>
+            <a:off x="411480" y="1371600"/>
+            <a:ext cx="11338560" cy="2789689"/>
           </a:xfrm>
           <a:prstGeom prst="rect">
             <a:avLst/>
           </a:prstGeom>
-          <a:noFill/>
         </p:spPr>
-        <p:txBody>
-          <a:bodyPr wrap="square">
-            <a:spAutoFit/>
-          </a:bodyPr>
-          <a:lstStyle/>
-          <a:p>
-            <a:pPr>
-              <a:spcAft>
-                <a:spcPts val="500"/>
-              </a:spcAft>
-            </a:pPr>
-            <a:r>
-              <a:rPr sz="1900" b="1">
-                <a:solidFill>
-                  <a:srgbClr val="222222"/>
-                </a:solidFill>
-                <a:latin typeface="Meiryo"/>
-              </a:rPr>
-              <a:t>fast トラック: 37 周 / 800 秒・16 m/s (制限速度)・無衝突</a:t>
-            </a:r>
-          </a:p>
-          <a:p>
-            <a:pPr>
-              <a:spcAft>
-                <a:spcPts val="500"/>
-              </a:spcAft>
-            </a:pPr>
-            <a:r>
-              <a:rPr sz="1900" b="0">
-                <a:solidFill>
-                  <a:srgbClr val="222222"/>
-                </a:solidFill>
-                <a:latin typeface="Meiryo"/>
-              </a:rPr>
-              <a:t>周回能力の獲得: 3〜6 万ステップ (6 万で 32 周 → 9 万で 36 周)</a:t>
-            </a:r>
-          </a:p>
-          <a:p>
-            <a:pPr>
-              <a:spcAft>
-                <a:spcPts val="500"/>
-              </a:spcAft>
-            </a:pPr>
-            <a:r>
-              <a:rPr sz="1900" b="0">
-                <a:solidFill>
-                  <a:srgbClr val="222222"/>
-                </a:solidFill>
-                <a:latin typeface="Meiryo"/>
-              </a:rPr>
-              <a:t>fast-dev (12 万, 本番ハイパラ): フェーズ 2 (NPC あり lr 3e-4) 込みで 37 周 — 退行なし</a:t>
-            </a:r>
-          </a:p>
-          <a:p>
-            <a:pPr>
-              <a:spcAft>
-                <a:spcPts val="500"/>
-              </a:spcAft>
-            </a:pPr>
-            <a:r>
-              <a:rPr sz="1900" b="1">
-                <a:solidFill>
-                  <a:srgbClr val="222222"/>
-                </a:solidFill>
-                <a:latin typeface="Meiryo"/>
-              </a:rPr>
-              <a:t>汎化モデル (random 学習 15 万): 5 トラックすべて 2 分間ノーミス・平均 15.7 m/s</a:t>
-            </a:r>
-          </a:p>
-          <a:p>
-            <a:pPr>
-              <a:spcAft>
-                <a:spcPts val="500"/>
-              </a:spcAft>
-            </a:pPr>
-            <a:r>
-              <a:rPr sz="1900" b="0">
-                <a:solidFill>
-                  <a:srgbClr val="222222"/>
-                </a:solidFill>
-                <a:latin typeface="Meiryo"/>
-              </a:rPr>
-              <a:t>ゼロショット転移: fast 専用モデルも他 4 コースを制限速度で走行 (自己位置非観測が鍵)</a:t>
-            </a:r>
-          </a:p>
-          <a:p>
-            <a:pPr>
-              <a:spcAft>
-                <a:spcPts val="500"/>
-              </a:spcAft>
-            </a:pPr>
-            <a:r>
-              <a:rPr sz="1900" b="1">
-                <a:solidFill>
-                  <a:srgbClr val="222222"/>
-                </a:solidFill>
-                <a:latin typeface="Meiryo"/>
-              </a:rPr>
-              <a:t>C# デプロイ: 観測ビット一致 (maxDiff=0.0) + 車両物理 1e-7 一致 — 検証ハーネスで自動確認</a:t>
-            </a:r>
-          </a:p>
-        </p:txBody>
-      </p:sp>
+      </p:pic>
+      <p:pic>
+        <p:nvPicPr>
+          <p:cNvPr id="4" name="gen_all_tracks.mp4">
+            <a:hlinkClick r:id="" action="ppaction://media"/>
+          </p:cNvPr>
+          <p:cNvPicPr>
+            <a:picLocks noChangeAspect="1"/>
+          </p:cNvPicPr>
+          <p:nvPr>
+            <a:videoFile r:link="rId5"/>
+            <p:extLst>
+              <p:ext uri="{DAA4B4D4-6D71-4841-9C94-3DE7FCFB9230}">
+                <p14:media xmlns:p14="http://schemas.microsoft.com/office/powerpoint/2010/main" r:embed="rId4"/>
+              </p:ext>
+            </p:extLst>
+          </p:nvPr>
+        </p:nvPicPr>
+        <p:blipFill>
+          <a:blip r:embed="rId3"/>
+          <a:stretch>
+            <a:fillRect/>
+          </a:stretch>
+        </p:blipFill>
+        <p:spPr>
+          <a:xfrm>
+            <a:off x="3566160" y="4206240"/>
+            <a:ext cx="5029200" cy="1508760"/>
+          </a:xfrm>
+          <a:prstGeom prst="rect">
+            <a:avLst/>
+          </a:prstGeom>
+        </p:spPr>
+      </p:pic>
     </p:spTree>
   </p:cSld>
   <p:clrMapOvr>
     <a:masterClrMapping/>
   </p:clrMapOvr>
+  <p:timing>
+    <p:tnLst>
+      <p:par>
+        <p:cTn id="1" dur="indefinite" restart="never" nodeType="tmRoot">
+          <p:childTnLst>
+            <p:video>
+              <p:cMediaNode vol="80000">
+                <p:cTn id="2" fill="hold" display="0">
+                  <p:stCondLst>
+                    <p:cond delay="indefinite"/>
+                  </p:stCondLst>
+                </p:cTn>
+                <p:tgtEl>
+                  <p:spTgt spid="4"/>
+                </p:tgtEl>
+              </p:cMediaNode>
+            </p:video>
+          </p:childTnLst>
+        </p:cTn>
+      </p:par>
+    </p:tnLst>
+  </p:timing>
 </p:sld>
 </file>
 
@@ -6517,8 +5112,8 @@
         </p:nvSpPr>
         <p:spPr>
           <a:xfrm>
-            <a:off x="457200" y="201168"/>
-            <a:ext cx="11247120" cy="777240"/>
+            <a:off x="457200" y="228600"/>
+            <a:ext cx="11247120" cy="822960"/>
           </a:xfrm>
           <a:prstGeom prst="rect">
             <a:avLst/>
@@ -6532,152 +5127,41 @@
           <a:lstStyle/>
           <a:p>
             <a:r>
-              <a:rPr sz="2800" b="1">
+              <a:rPr sz="3000" b="1">
                 <a:solidFill>
                   <a:srgbClr val="1B5EA8"/>
                 </a:solidFill>
                 <a:latin typeface="Meiryo"/>
               </a:rPr>
-              <a:t>ベースライン: highway-env の racetrack 環境 (デフォルト設定)</a:t>
-            </a:r>
-          </a:p>
-        </p:txBody>
-      </p:sp>
-      <p:sp>
-        <p:nvSpPr>
-          <p:cNvPr id="3" name="TextBox 2"/>
-          <p:cNvSpPr txBox="1"/>
+              <a:t>学習トラック一覧 (race_env.py)</a:t>
+            </a:r>
+          </a:p>
+        </p:txBody>
+      </p:sp>
+      <p:pic>
+        <p:nvPicPr>
+          <p:cNvPr id="3" name="Picture 2" descr="track_shapes.png"/>
+          <p:cNvPicPr>
+            <a:picLocks noChangeAspect="1"/>
+          </p:cNvPicPr>
           <p:nvPr/>
-        </p:nvSpPr>
+        </p:nvPicPr>
+        <p:blipFill>
+          <a:blip r:embed="rId3"/>
+          <a:stretch>
+            <a:fillRect/>
+          </a:stretch>
+        </p:blipFill>
         <p:spPr>
           <a:xfrm>
-            <a:off x="548640" y="1280160"/>
-            <a:ext cx="11064240" cy="5394960"/>
+            <a:off x="411480" y="1737360"/>
+            <a:ext cx="11338560" cy="2267712"/>
           </a:xfrm>
           <a:prstGeom prst="rect">
             <a:avLst/>
           </a:prstGeom>
-          <a:noFill/>
         </p:spPr>
-        <p:txBody>
-          <a:bodyPr wrap="square">
-            <a:spAutoFit/>
-          </a:bodyPr>
-          <a:lstStyle/>
-          <a:p>
-            <a:pPr>
-              <a:spcAft>
-                <a:spcPts val="500"/>
-              </a:spcAft>
-            </a:pPr>
-            <a:r>
-              <a:rPr sz="1700" b="1">
-                <a:solidFill>
-                  <a:srgbClr val="222222"/>
-                </a:solidFill>
-                <a:latin typeface="Meiryo"/>
-              </a:rPr>
-              <a:t>行動: ステアリングのみ (longitudinal=False)。速度は離散 target_speeds [0, 5, 10] から選択</a:t>
-            </a:r>
-          </a:p>
-          <a:p>
-            <a:pPr>
-              <a:spcAft>
-                <a:spcPts val="500"/>
-              </a:spcAft>
-            </a:pPr>
-            <a:r>
-              <a:rPr sz="1700" b="1">
-                <a:solidFill>
-                  <a:srgbClr val="222222"/>
-                </a:solidFill>
-                <a:latin typeface="Meiryo"/>
-              </a:rPr>
-              <a:t>観測: OccupancyGrid 2ch (presence / on_road) のみ、±18 m の対称視野</a:t>
-            </a:r>
-          </a:p>
-          <a:p>
-            <a:pPr>
-              <a:spcAft>
-                <a:spcPts val="500"/>
-              </a:spcAft>
-            </a:pPr>
-            <a:r>
-              <a:rPr sz="1700" b="1">
-                <a:solidFill>
-                  <a:srgbClr val="222222"/>
-                </a:solidFill>
-                <a:latin typeface="Meiryo"/>
-              </a:rPr>
-              <a:t>報酬: 車線中央維持 1/(1+4·lat²) + 操作量ペナルティ −0.3·|action| + 衝突 −1</a:t>
-            </a:r>
-          </a:p>
-          <a:p>
-            <a:pPr>
-              <a:spcAft>
-                <a:spcPts val="500"/>
-              </a:spcAft>
-            </a:pPr>
-            <a:r>
-              <a:rPr sz="1700" b="0">
-                <a:solidFill>
-                  <a:srgbClr val="222222"/>
-                </a:solidFill>
-                <a:latin typeface="Meiryo"/>
-              </a:rPr>
-              <a:t>速度: speed_limit 10 m/s。「速く走る」インセンティブが存在しない</a:t>
-            </a:r>
-          </a:p>
-          <a:p>
-            <a:pPr>
-              <a:spcAft>
-                <a:spcPts val="500"/>
-              </a:spcAft>
-            </a:pPr>
-            <a:r>
-              <a:rPr sz="1700" b="1">
-                <a:solidFill>
-                  <a:srgbClr val="222222"/>
-                </a:solidFill>
-                <a:latin typeface="Meiryo"/>
-              </a:rPr>
-              <a:t>壁: 存在しない — 路外は終了 (または放置)。すり抜け・ショートカットが物理的に可能</a:t>
-            </a:r>
-          </a:p>
-          <a:p>
-            <a:pPr>
-              <a:spcAft>
-                <a:spcPts val="500"/>
-              </a:spcAft>
-            </a:pPr>
-            <a:r>
-              <a:rPr sz="1700" b="0">
-                <a:solidFill>
-                  <a:srgbClr val="222222"/>
-                </a:solidFill>
-                <a:latin typeface="Meiryo"/>
-              </a:rPr>
-              <a:t>車両: 運動学 Bicycle (スリップなし)。NPC 1 台、エピソード 300 秒</a:t>
-            </a:r>
-          </a:p>
-          <a:p>
-            <a:pPr>
-              <a:spcAft>
-                <a:spcPts val="500"/>
-              </a:spcAft>
-            </a:pPr>
-            <a:r>
-              <a:rPr sz="1700" b="1">
-                <a:solidFill>
-                  <a:srgbClr val="B32D2D"/>
-                </a:solidFill>
-                <a:latin typeface="Meiryo"/>
-              </a:rPr>
-              <a:t>→ 「レーンをなぞる」研究環境としては優秀。しかしゲームのレースには遠い</a:t>
-            </a:r>
-          </a:p>
-        </p:txBody>
-      </p:sp>
+      </p:pic>
     </p:spTree>
   </p:cSld>
   <p:clrMapOvr>
@@ -6704,8 +5188,8 @@
         </p:nvSpPr>
         <p:spPr>
           <a:xfrm>
-            <a:off x="457200" y="201168"/>
-            <a:ext cx="11247120" cy="777240"/>
+            <a:off x="457200" y="228600"/>
+            <a:ext cx="11247120" cy="822960"/>
           </a:xfrm>
           <a:prstGeom prst="rect">
             <a:avLst/>
@@ -6719,41 +5203,168 @@
           <a:lstStyle/>
           <a:p>
             <a:r>
-              <a:rPr sz="2800" b="1">
+              <a:rPr sz="3000" b="1">
                 <a:solidFill>
                   <a:srgbClr val="1B5EA8"/>
                 </a:solidFill>
                 <a:latin typeface="Meiryo"/>
               </a:rPr>
-              <a:t>デフォルト racetrack と本プロジェクトの fast トラック</a:t>
-            </a:r>
-          </a:p>
-        </p:txBody>
-      </p:sp>
-      <p:pic>
-        <p:nvPicPr>
-          <p:cNvPr id="3" name="Picture 2" descr="default_vs_ours.png"/>
-          <p:cNvPicPr>
-            <a:picLocks noChangeAspect="1"/>
-          </p:cNvPicPr>
+              <a:t>highway-env からの変更点 (1) 環境</a:t>
+            </a:r>
+          </a:p>
+        </p:txBody>
+      </p:sp>
+      <p:sp>
+        <p:nvSpPr>
+          <p:cNvPr id="3" name="TextBox 2"/>
+          <p:cNvSpPr txBox="1"/>
           <p:nvPr/>
-        </p:nvPicPr>
-        <p:blipFill>
-          <a:blip r:embed="rId3"/>
-          <a:stretch>
-            <a:fillRect/>
-          </a:stretch>
-        </p:blipFill>
+        </p:nvSpPr>
         <p:spPr>
           <a:xfrm>
-            <a:off x="822960" y="1371600"/>
-            <a:ext cx="10515600" cy="3720905"/>
+            <a:off x="548640" y="1280160"/>
+            <a:ext cx="11064240" cy="5120640"/>
           </a:xfrm>
           <a:prstGeom prst="rect">
             <a:avLst/>
           </a:prstGeom>
+          <a:noFill/>
         </p:spPr>
-      </p:pic>
+        <p:txBody>
+          <a:bodyPr wrap="square">
+            <a:spAutoFit/>
+          </a:bodyPr>
+          <a:lstStyle/>
+          <a:p>
+            <a:pPr>
+              <a:spcAft>
+                <a:spcPts val="600"/>
+              </a:spcAft>
+            </a:pPr>
+            <a:r>
+              <a:rPr sz="1700" b="1">
+                <a:solidFill>
+                  <a:srgbClr val="222222"/>
+                </a:solidFill>
+                <a:latin typeface="Meiryo"/>
+              </a:rPr>
+              <a:t>壁 = コース外周のみ (車線境界線は壁ではない)・接触で停止・バックで脱出</a:t>
+            </a:r>
+          </a:p>
+          <a:p>
+            <a:pPr lvl="1">
+              <a:spcAft>
+                <a:spcPts val="600"/>
+              </a:spcAft>
+            </a:pPr>
+            <a:r>
+              <a:rPr sz="1500" b="0">
+                <a:solidFill>
+                  <a:srgbClr val="666666"/>
+                </a:solidFill>
+                <a:latin typeface="Meiryo"/>
+              </a:rPr>
+              <a:t>理由: ゲーム側の物理と一致させ、壁ずり走行 (wall-riding) を防ぐ</a:t>
+            </a:r>
+          </a:p>
+          <a:p>
+            <a:pPr>
+              <a:spcAft>
+                <a:spcPts val="600"/>
+              </a:spcAft>
+            </a:pPr>
+            <a:r>
+              <a:rPr sz="1700" b="0">
+                <a:solidFill>
+                  <a:srgbClr val="222222"/>
+                </a:solidFill>
+                <a:latin typeface="Meiryo"/>
+              </a:rPr>
+              <a:t>壁接触が 35 ステップ続くとクラッシュ扱いで終了 — 壁沿い周回の悪用を遮断</a:t>
+            </a:r>
+          </a:p>
+          <a:p>
+            <a:pPr>
+              <a:spcAft>
+                <a:spcPts val="600"/>
+              </a:spcAft>
+            </a:pPr>
+            <a:r>
+              <a:rPr sz="1700" b="1">
+                <a:solidFill>
+                  <a:srgbClr val="222222"/>
+                </a:solidFill>
+                <a:latin typeface="Meiryo"/>
+              </a:rPr>
+              <a:t>報酬: 速度 + 車線中央 + チェックポイント/ラップボーナス → lmap [-3,3]→[0,1]</a:t>
+            </a:r>
+          </a:p>
+          <a:p>
+            <a:pPr lvl="1">
+              <a:spcAft>
+                <a:spcPts val="600"/>
+              </a:spcAft>
+            </a:pPr>
+            <a:r>
+              <a:rPr sz="1500" b="0">
+                <a:solidFill>
+                  <a:srgbClr val="666666"/>
+                </a:solidFill>
+                <a:latin typeface="Meiryo"/>
+              </a:rPr>
+              <a:t>理由: 範囲が真の下限を覆わないと悪い状態が 0 に飽和し勾配消失 (導出をコメントで管理)</a:t>
+            </a:r>
+          </a:p>
+          <a:p>
+            <a:pPr>
+              <a:spcAft>
+                <a:spcPts val="600"/>
+              </a:spcAft>
+            </a:pPr>
+            <a:r>
+              <a:rPr sz="1700" b="1">
+                <a:solidFill>
+                  <a:srgbClr val="222222"/>
+                </a:solidFill>
+                <a:latin typeface="Meiryo"/>
+              </a:rPr>
+              <a:t>壁脱出ゾーン (1 m): バック免除 + 距離増加に報酬</a:t>
+            </a:r>
+          </a:p>
+          <a:p>
+            <a:pPr lvl="1">
+              <a:spcAft>
+                <a:spcPts val="600"/>
+              </a:spcAft>
+            </a:pPr>
+            <a:r>
+              <a:rPr sz="1500" b="0">
+                <a:solidFill>
+                  <a:srgbClr val="666666"/>
+                </a:solidFill>
+                <a:latin typeface="Meiryo"/>
+              </a:rPr>
+              <a:t>理由: 脱出直後に罰すると「壁を這う」局所解に陥る (実測で確認)</a:t>
+            </a:r>
+          </a:p>
+          <a:p>
+            <a:pPr>
+              <a:spcAft>
+                <a:spcPts val="600"/>
+              </a:spcAft>
+            </a:pPr>
+            <a:r>
+              <a:rPr sz="1700" b="0">
+                <a:solidFill>
+                  <a:srgbClr val="222222"/>
+                </a:solidFill>
+                <a:latin typeface="Meiryo"/>
+              </a:rPr>
+              <a:t>トラック 5 種 + random (エピソード毎に再抽選) で汎化学習</a:t>
+            </a:r>
+          </a:p>
+        </p:txBody>
+      </p:sp>
     </p:spTree>
   </p:cSld>
   <p:clrMapOvr>
@@ -6780,8 +5391,8 @@
         </p:nvSpPr>
         <p:spPr>
           <a:xfrm>
-            <a:off x="457200" y="201168"/>
-            <a:ext cx="11247120" cy="777240"/>
+            <a:off x="457200" y="228600"/>
+            <a:ext cx="11247120" cy="822960"/>
           </a:xfrm>
           <a:prstGeom prst="rect">
             <a:avLst/>
@@ -6795,13 +5406,13 @@
           <a:lstStyle/>
           <a:p>
             <a:r>
-              <a:rPr sz="2800" b="1">
+              <a:rPr sz="3000" b="1">
                 <a:solidFill>
                   <a:srgbClr val="1B5EA8"/>
                 </a:solidFill>
                 <a:latin typeface="Meiryo"/>
               </a:rPr>
-              <a:t>進化 (1) 行動と車両 — スロットルを持たせ、実車に近づける</a:t>
+              <a:t>highway-env からの変更点 (2) 観測・行動・学習設定</a:t>
             </a:r>
           </a:p>
         </p:txBody>
@@ -6814,8 +5425,8 @@
         </p:nvSpPr>
         <p:spPr>
           <a:xfrm>
-            <a:off x="548640" y="1097280"/>
-            <a:ext cx="11064240" cy="5394960"/>
+            <a:off x="548640" y="1280160"/>
+            <a:ext cx="11064240" cy="5120640"/>
           </a:xfrm>
           <a:prstGeom prst="rect">
             <a:avLst/>
@@ -6830,61 +5441,133 @@
           <a:p>
             <a:pPr>
               <a:spcAft>
-                <a:spcPts val="500"/>
+                <a:spcPts val="600"/>
               </a:spcAft>
             </a:pPr>
             <a:r>
-              <a:rPr sz="1600" b="1">
+              <a:rPr sz="1700" b="1">
                 <a:solidFill>
                   <a:srgbClr val="222222"/>
                 </a:solidFill>
                 <a:latin typeface="Meiryo"/>
               </a:rPr>
-              <a:t>ContinuousAction: ステアのみ → スロットル + ステア (±5 m/s², ±π/6)、dynamical=True</a:t>
+              <a:t>観測: OccupancyGrid (10ch, 12x12), 前方 27 m / 後方 9 m の非対称視野</a:t>
+            </a:r>
+          </a:p>
+          <a:p>
+            <a:pPr lvl="1">
+              <a:spcAft>
+                <a:spcPts val="600"/>
+              </a:spcAft>
+            </a:pPr>
+            <a:r>
+              <a:rPr sz="1500" b="0">
+                <a:solidFill>
+                  <a:srgbClr val="666666"/>
+                </a:solidFill>
+                <a:latin typeface="Meiryo"/>
+              </a:rPr>
+              <a:t>理由: 制動距離とコーナー先読み (16 m/s から 5 m/s² 制動で 25.6 m &lt; 27 m)</a:t>
             </a:r>
           </a:p>
           <a:p>
             <a:pPr>
               <a:spcAft>
-                <a:spcPts val="500"/>
+                <a:spcPts val="600"/>
               </a:spcAft>
             </a:pPr>
             <a:r>
-              <a:rPr sz="1600" b="0">
+              <a:rPr sz="1700" b="0">
                 <a:solidFill>
                   <a:srgbClr val="222222"/>
                 </a:solidFill>
                 <a:latin typeface="Meiryo"/>
               </a:rPr>
-              <a:t>速度上限 10 → 16 m/s、前進報酬を追加 — 「速く走る」動機を導入</a:t>
-            </a:r>
-          </a:p>
-        </p:txBody>
-      </p:sp>
-      <p:pic>
-        <p:nvPicPr>
-          <p:cNvPr id="4" name="Picture 3" descr="range_experiment.png"/>
-          <p:cNvPicPr>
-            <a:picLocks noChangeAspect="1"/>
-          </p:cNvPicPr>
-          <p:nvPr/>
-        </p:nvPicPr>
-        <p:blipFill>
-          <a:blip r:embed="rId3"/>
-          <a:stretch>
-            <a:fillRect/>
-          </a:stretch>
-        </p:blipFill>
-        <p:spPr>
-          <a:xfrm>
-            <a:off x="3017520" y="2286000"/>
-            <a:ext cx="6217920" cy="3316224"/>
-          </a:xfrm>
-          <a:prstGeom prst="rect">
-            <a:avLst/>
-          </a:prstGeom>
-        </p:spPr>
-      </p:pic>
+              <a:t>行動: 連続スロットル [-5,5] m/s² + ステア ±π/6, dynamical=True (タイヤスリップ)</a:t>
+            </a:r>
+          </a:p>
+          <a:p>
+            <a:pPr>
+              <a:spcAft>
+                <a:spcPts val="600"/>
+              </a:spcAft>
+            </a:pPr>
+            <a:r>
+              <a:rPr sz="1700" b="1">
+                <a:solidFill>
+                  <a:srgbClr val="222222"/>
+                </a:solidFill>
+                <a:latin typeface="Meiryo"/>
+              </a:rPr>
+              <a:t>2 フェーズ PPO: ①NPC なしでレーン追従 → ②NPC ありで追い越し (lr を下げて FT)</a:t>
+            </a:r>
+          </a:p>
+          <a:p>
+            <a:pPr>
+              <a:spcAft>
+                <a:spcPts val="600"/>
+              </a:spcAft>
+            </a:pPr>
+            <a:r>
+              <a:rPr sz="1700" b="0">
+                <a:solidFill>
+                  <a:srgbClr val="222222"/>
+                </a:solidFill>
+                <a:latin typeface="Meiryo"/>
+              </a:rPr>
+              <a:t>カスタム CNN 特徴抽出器 + 初期スロットルバイアス +0.4 (前進探索を促進)</a:t>
+            </a:r>
+          </a:p>
+          <a:p>
+            <a:pPr>
+              <a:spcAft>
+                <a:spcPts val="600"/>
+              </a:spcAft>
+            </a:pPr>
+            <a:r>
+              <a:rPr sz="1700" b="1">
+                <a:solidFill>
+                  <a:srgbClr val="222222"/>
+                </a:solidFill>
+                <a:latin typeface="Meiryo"/>
+              </a:rPr>
+              <a:t>fast-dev = 12 万ステップ・本番ハイパラ (ent 0.02, lr 2e-4) — 周回到達を実測保証</a:t>
+            </a:r>
+          </a:p>
+          <a:p>
+            <a:pPr lvl="1">
+              <a:spcAft>
+                <a:spcPts val="600"/>
+              </a:spcAft>
+            </a:pPr>
+            <a:r>
+              <a:rPr sz="1500" b="0">
+                <a:solidFill>
+                  <a:srgbClr val="666666"/>
+                </a:solidFill>
+                <a:latin typeface="Meiryo"/>
+              </a:rPr>
+              <a:t>理由: 高エントロピー設定 (旧 0.10) は方策がランダムに留まり永遠に曲がれない</a:t>
+            </a:r>
+          </a:p>
+          <a:p>
+            <a:pPr>
+              <a:spcAft>
+                <a:spcPts val="600"/>
+              </a:spcAft>
+            </a:pPr>
+            <a:r>
+              <a:rPr sz="1700" b="0">
+                <a:solidFill>
+                  <a:srgbClr val="222222"/>
+                </a:solidFill>
+                <a:latin typeface="Meiryo"/>
+              </a:rPr>
+              <a:t>EvalCallback のベストモデルを採用 (PPO は終盤に退行することがある)</a:t>
+            </a:r>
+          </a:p>
+        </p:txBody>
+      </p:sp>
     </p:spTree>
   </p:cSld>
   <p:clrMapOvr>
@@ -6911,8 +5594,8 @@
         </p:nvSpPr>
         <p:spPr>
           <a:xfrm>
-            <a:off x="457200" y="201168"/>
-            <a:ext cx="11247120" cy="777240"/>
+            <a:off x="457200" y="228600"/>
+            <a:ext cx="11247120" cy="822960"/>
           </a:xfrm>
           <a:prstGeom prst="rect">
             <a:avLst/>
@@ -6926,13 +5609,13 @@
           <a:lstStyle/>
           <a:p>
             <a:r>
-              <a:rPr sz="2800" b="1">
+              <a:rPr sz="3000" b="1">
                 <a:solidFill>
                   <a:srgbClr val="1B5EA8"/>
                 </a:solidFill>
                 <a:latin typeface="Meiryo"/>
               </a:rPr>
-              <a:t>進化 (2) 壁の物理 — 「なし → 反発 → 停止」の変遷</a:t>
+              <a:t>セットアップとノートブックの使い方</a:t>
             </a:r>
           </a:p>
         </p:txBody>
@@ -6945,8 +5628,8 @@
         </p:nvSpPr>
         <p:spPr>
           <a:xfrm>
-            <a:off x="548640" y="1234440"/>
-            <a:ext cx="11064240" cy="5394960"/>
+            <a:off x="548640" y="1280160"/>
+            <a:ext cx="11064240" cy="5120640"/>
           </a:xfrm>
           <a:prstGeom prst="rect">
             <a:avLst/>
@@ -6961,55 +5644,71 @@
           <a:p>
             <a:pPr>
               <a:spcAft>
-                <a:spcPts val="500"/>
+                <a:spcPts val="600"/>
               </a:spcAft>
             </a:pPr>
             <a:r>
-              <a:rPr sz="1700" b="0">
+              <a:rPr sz="1700" b="1">
                 <a:solidFill>
                   <a:srgbClr val="222222"/>
                 </a:solidFill>
                 <a:latin typeface="Meiryo"/>
               </a:rPr>
-              <a:t>v0: 壁なし (デフォルト) → コーナーを路外ショートカットする走りを学習</a:t>
+              <a:t>pip install "highway-env&gt;=1.8" "stable-baselines3[extra]&gt;=2.0" gymnasium torch tensorboard moviepy onnx onnxruntime</a:t>
+            </a:r>
+          </a:p>
+          <a:p>
+            <a:pPr lvl="1">
+              <a:spcAft>
+                <a:spcPts val="600"/>
+              </a:spcAft>
+            </a:pPr>
+            <a:r>
+              <a:rPr sz="1500" b="0">
+                <a:solidFill>
+                  <a:srgbClr val="666666"/>
+                </a:solidFill>
+                <a:latin typeface="Meiryo"/>
+              </a:rPr>
+              <a:t>注意: リポジトリの requirements.txt は旧スタック (TF2.6/gym0.21) 用 — 使わない</a:t>
             </a:r>
           </a:p>
           <a:p>
             <a:pPr>
               <a:spcAft>
-                <a:spcPts val="500"/>
+                <a:spcPts val="600"/>
               </a:spcAft>
             </a:pPr>
             <a:r>
               <a:rPr sz="1700" b="0">
                 <a:solidFill>
-                  <a:srgbClr val="B32D2D"/>
+                  <a:srgbClr val="222222"/>
                 </a:solidFill>
                 <a:latin typeface="Meiryo"/>
               </a:rPr>
-              <a:t>v1: 反発壁 (bounce) → 壁に擦って曲がる wall-riding が最速解に</a:t>
+              <a:t>task2_laning_overtaking_sb3_ppo.ipynb — fast トラック専用の学習</a:t>
             </a:r>
           </a:p>
           <a:p>
             <a:pPr>
               <a:spcAft>
-                <a:spcPts val="500"/>
+                <a:spcPts val="600"/>
               </a:spcAft>
             </a:pPr>
             <a:r>
-              <a:rPr sz="1700" b="1">
+              <a:rPr sz="1700" b="0">
                 <a:solidFill>
                   <a:srgbClr val="222222"/>
                 </a:solidFill>
                 <a:latin typeface="Meiryo"/>
               </a:rPr>
-              <a:t>v2 (最終): 停止壁 (stop) + 壁接触中は速度報酬ゼロ + 接触 35 ステップで終了</a:t>
+              <a:t>task3_generalization_sb3_ppo.ipynb — random トラック学習 + トラック別評価レポート + 5 連動画</a:t>
             </a:r>
           </a:p>
           <a:p>
             <a:pPr>
               <a:spcAft>
-                <a:spcPts val="500"/>
+                <a:spcPts val="600"/>
               </a:spcAft>
             </a:pPr>
             <a:r>
@@ -7019,23 +5718,55 @@
                 </a:solidFill>
                 <a:latin typeface="Meiryo"/>
               </a:rPr>
-              <a:t>壁 = コース外周のみ。車線境界の白線は壁ではない (2 車線を使うライン取りを許す)</a:t>
-            </a:r>
-          </a:p>
-          <a:p>
-            <a:pPr lvl="1">
+              <a:t>FAST_DEV_RUN=True: 12〜15 万ステップの短縮学習 (周回まで到達) / False: 本番 (100万+)</a:t>
+            </a:r>
+          </a:p>
+          <a:p>
+            <a:pPr>
               <a:spcAft>
-                <a:spcPts val="500"/>
+                <a:spcPts val="600"/>
               </a:spcAft>
             </a:pPr>
             <a:r>
-              <a:rPr sz="1500" b="0">
-                <a:solidFill>
-                  <a:srgbClr val="595959"/>
+              <a:rPr sz="1700" b="0">
+                <a:solidFill>
+                  <a:srgbClr val="222222"/>
                 </a:solidFill>
                 <a:latin typeface="Meiryo"/>
               </a:rPr>
-              <a:t>目的: ゲームの物理と一致 + 「壁を使う」抜け道をすべて塞ぐ</a:t>
+              <a:t>Reward yardstick セル: eval/mean_reward を「周回数」として読むための換算値を表示</a:t>
+            </a:r>
+          </a:p>
+          <a:p>
+            <a:pPr>
+              <a:spcAft>
+                <a:spcPts val="600"/>
+              </a:spcAft>
+            </a:pPr>
+            <a:r>
+              <a:rPr sz="1700" b="0">
+                <a:solidFill>
+                  <a:srgbClr val="222222"/>
+                </a:solidFill>
+                <a:latin typeface="Meiryo"/>
+              </a:rPr>
+              <a:t>ベストモデルは runs/&lt;EXP_ID&gt;/models/best/phase1|phase2/best_model.zip に保存</a:t>
+            </a:r>
+          </a:p>
+          <a:p>
+            <a:pPr>
+              <a:spcAft>
+                <a:spcPts val="600"/>
+              </a:spcAft>
+            </a:pPr>
+            <a:r>
+              <a:rPr sz="1700" b="0">
+                <a:solidFill>
+                  <a:srgbClr val="222222"/>
+                </a:solidFill>
+                <a:latin typeface="Meiryo"/>
+              </a:rPr>
+              <a:t>検証: cd re_engine/verify &amp;&amp; dotnet run -- ..  → ALL SCENARIOS MATCH</a:t>
             </a:r>
           </a:p>
         </p:txBody>

--- a/docs/CircuitAgents_intro_ja.pptx
+++ b/docs/CircuitAgents_intro_ja.pptx
@@ -16,6 +16,16 @@
     <p:sldId id="264" r:id="rId16"/>
     <p:sldId id="265" r:id="rId17"/>
     <p:sldId id="266" r:id="rId18"/>
+    <p:sldId id="267" r:id="rId19"/>
+    <p:sldId id="268" r:id="rId20"/>
+    <p:sldId id="269" r:id="rId21"/>
+    <p:sldId id="270" r:id="rId22"/>
+    <p:sldId id="271" r:id="rId23"/>
+    <p:sldId id="272" r:id="rId24"/>
+    <p:sldId id="273" r:id="rId25"/>
+    <p:sldId id="274" r:id="rId26"/>
+    <p:sldId id="275" r:id="rId27"/>
+    <p:sldId id="276" r:id="rId28"/>
   </p:sldIdLst>
   <p:sldSz cx="12191695" cy="6858000" type="screen4x3"/>
   <p:notesSz cx="6858000" cy="9144000"/>
@@ -512,7 +522,7 @@
           <a:lstStyle/>
           <a:p>
             <a:r>
-              <a:t>本日は CircuitAgents プロジェクトを紹介します。highway-env 上で強化学習させたレース走行エージェントを、ONNX 経由で C# ゲームエンジン (RE Engine) にデプロイするまでの一連のパイプラインです。まず結果からお見せし、その後に環境・学習設定の変更点、セットアップ方法、エクスポートツールの使い方を説明します。</a:t>
+              <a:t>本日は CircuitAgents プロジェクトを 10 分で紹介します。highway-env をベースに、ゲームのレース環境に近づけるための改造を重ねて強化学習エージェントを育て、ONNX 経由で C# ゲームエンジンにデプロイするまでのパイプラインです。まず結果の映像とグラフをご覧いただき、その後で highway-env のデフォルト設定と我々が加えた変更の進化の過程、最後にセットアップとツールの使い方を説明します。</a:t>
             </a:r>
           </a:p>
         </p:txBody>
@@ -582,7 +592,7 @@
           <a:lstStyle/>
           <a:p>
             <a:r>
-              <a:t>学習済みモデルのエクスポートは export_onnx.py で行います。モードは 1 が full policy、2 が actor の channels-first、3 がエンジン用の channels-last NHWC、0 で全部です。エンジン側は必ず NHWC 版 ppo_actor_only_nhwc.onnx を使ってください。C# ビルダーは H×W×C の平坦配列を出力するため、channels-first 版に入れるとチャネルが混ざり、スロットル 0.4・ステア 0.2 程度のほぼ一定出力に退化します。トラック形状を変えたら export_track_json.py で JSON を再生成し、検証ハーネスを回します。C# 側には観測ビルダーに加えて、ステアリング平滑化・コーナー減速・スタック検出・学習と同一物理の CarController が入っています。</a:t>
+              <a:t>次に壁です。ここが一番試行錯誤した部分です。最初は壁がなく、路外に出たら終了するだけでした。これだとエージェントはコーナーを膨らんでショートカットする走りを覚えます。次に反発壁を入れましたが、今度は「壁に擦りながら曲がる」wall-riding が最速解になりました。壁が勝手に車の向きを変えてくれるので、ステアリングを学ぶ必要がなくなるんです。最終形は停止壁です。壁に当たると止まり、バックでしか脱出できない。さらに壁接触中は速度報酬をゼロにし、接触が 7 秒続いたらクラッシュ扱いで終了します。もう 1 つ重要なのは、壁はコース外周だけという点です。車線の白線を壁にすると2 車線を使ったライン取りができなくなります。この判定は最初閉じた車線単位で書いてしまい、白線が壁になるバグを踏みました。現在は「コリドー両端の車線の外側だけが壁」という実装です。</a:t>
             </a:r>
           </a:p>
         </p:txBody>
@@ -652,7 +662,567 @@
           <a:lstStyle/>
           <a:p>
             <a:r>
-              <a:t>まとめです。壁の物理と報酬の経済設計を作り込むことで、PPO は 6 万ステップで周回を学習し、ランダムトラック学習によって 1 つの方策が 5 コースすべてを走れるようになりました。C# 側は観測・物理ともに Python と数値一致で検証済みなので、エンジンに載せた瞬間から学習時と同じ挙動が期待できます。今後はゲーム内での実走検証と、実車ダイナミクスに合わせた微調整が次のステップです。ご清聴ありがとうございました。</a:t>
+              <a:t>報酬設計です。グラフは実測した 1 ステップあたりの報酬で、状態ごとの「儲け」を示しています。設計の目標は、どんな抜け道よりも普通に走る方が得、という順序を作ることです。緑の 0.97 が正しく走った場合。壁でスタックしたら 0.45、壁に擦りながら進んでも 0.42 と、壁を使う行動は割に合いません。重要なのは青の 0.51、壁からバックで脱出する行動がスタックより明確に得なことです。実は最初、脱出報酬は壁に接触している間しか出ませんでした。すると脱出の一歩目、壁から 20 cm 離れた瞬間にバックのペナルティが復活してしまい、エージェントは「壁沿いを這う」ことを学びました。今は壁から 1 m の脱出ゾーンを設け、その中ではバック免除、壁から離れる距離に報酬を出します。もう 1 つの落とし穴が正規化です。合成報酬を [-3,3] から [0,1] に線形写像していますが、この範囲が実際の下限を覆っていないと、悪い状態が全部 0 に張り付いて「悪い」と「最悪」の区別が消え、学習が止まります。範囲の導出はコードにコメントで残し、重みを変えたら再導出するルールにしています。</a:t>
+            </a:r>
+          </a:p>
+        </p:txBody>
+      </p:sp>
+      <p:sp>
+        <p:nvSpPr>
+          <p:cNvPr id="4" name="Slide Number Placeholder 3"/>
+          <p:cNvSpPr>
+            <a:spLocks noGrp="1"/>
+          </p:cNvSpPr>
+          <p:nvPr>
+            <p:ph type="sldNum" idx="5" sz="quarter"/>
+          </p:nvPr>
+        </p:nvSpPr>
+        <p:spPr/>
+      </p:sp>
+    </p:spTree>
+  </p:cSld>
+  <p:clrMapOvr>
+    <a:masterClrMapping/>
+  </p:clrMapOvr>
+</p:notes>
+</file>
+
+<file path=ppt/notesSlides/notesSlide12.xml><?xml version="1.0" encoding="utf-8"?>
+<p:notes xmlns:a="http://schemas.openxmlformats.org/drawingml/2006/main" xmlns:p="http://schemas.openxmlformats.org/presentationml/2006/main" xmlns:r="http://schemas.openxmlformats.org/officeDocument/2006/relationships">
+  <p:cSld>
+    <p:spTree>
+      <p:nvGrpSpPr>
+        <p:cNvPr id="1" name=""/>
+        <p:cNvGrpSpPr/>
+        <p:nvPr/>
+      </p:nvGrpSpPr>
+      <p:grpSpPr>
+        <a:xfrm>
+          <a:off x="0" y="0"/>
+          <a:ext cx="0" cy="0"/>
+          <a:chOff x="0" y="0"/>
+          <a:chExt cx="0" cy="0"/>
+        </a:xfrm>
+      </p:grpSpPr>
+      <p:sp>
+        <p:nvSpPr>
+          <p:cNvPr id="2" name="Slide Image Placeholder 1"/>
+          <p:cNvSpPr>
+            <a:spLocks noGrp="1"/>
+          </p:cNvSpPr>
+          <p:nvPr>
+            <p:ph type="sldImg" idx="2"/>
+          </p:nvPr>
+        </p:nvSpPr>
+        <p:spPr/>
+      </p:sp>
+      <p:sp>
+        <p:nvSpPr>
+          <p:cNvPr id="3" name="Notes Placeholder 2"/>
+          <p:cNvSpPr>
+            <a:spLocks noGrp="1"/>
+          </p:cNvSpPr>
+          <p:nvPr>
+            <p:ph type="body" idx="3" sz="quarter"/>
+          </p:nvPr>
+        </p:nvSpPr>
+        <p:spPr/>
+        <p:txBody>
+          <a:bodyPr/>
+          <a:lstStyle/>
+          <a:p>
+            <a:r>
+              <a:t>いま見た壁擦り・壁這いは、文献で言う specification gaming、報酬ハッキングの実例です。報酬関数の字面を最適化した結果、設計者の意図しない解に到達する現象で、本プロジェクトでは 3 種類を実際に踏みました。対策の理論的支柱が 2 つあります。1 つは potential-based reward shaping です。壁からのクリアランスをポテンシャル関数として、その差分に報酬を与える形にすることで、最適方策を原理的に歪めずに探索だけを誘導できます。Ng らの 1999 年の結果が根拠です。もう 1 つは報酬の順序設計で、全状態の per-step 報酬を実測し、意図する行動が抜け道より必ず高くなることをテーブルで検証しています。また milestone 報酬 (チェックポイント) はsparse な進捗信号として dense な shaping と併用し、正規化後の飽和 (クリップ) は意図的に milestone ステップにのみ許しています。</a:t>
+            </a:r>
+          </a:p>
+        </p:txBody>
+      </p:sp>
+      <p:sp>
+        <p:nvSpPr>
+          <p:cNvPr id="4" name="Slide Number Placeholder 3"/>
+          <p:cNvSpPr>
+            <a:spLocks noGrp="1"/>
+          </p:cNvSpPr>
+          <p:nvPr>
+            <p:ph type="sldNum" idx="5" sz="quarter"/>
+          </p:nvPr>
+        </p:nvSpPr>
+        <p:spPr/>
+      </p:sp>
+    </p:spTree>
+  </p:cSld>
+  <p:clrMapOvr>
+    <a:masterClrMapping/>
+  </p:clrMapOvr>
+</p:notes>
+</file>
+
+<file path=ppt/notesSlides/notesSlide13.xml><?xml version="1.0" encoding="utf-8"?>
+<p:notes xmlns:a="http://schemas.openxmlformats.org/drawingml/2006/main" xmlns:p="http://schemas.openxmlformats.org/presentationml/2006/main" xmlns:r="http://schemas.openxmlformats.org/officeDocument/2006/relationships">
+  <p:cSld>
+    <p:spTree>
+      <p:nvGrpSpPr>
+        <p:cNvPr id="1" name=""/>
+        <p:cNvGrpSpPr/>
+        <p:nvPr/>
+      </p:nvGrpSpPr>
+      <p:grpSpPr>
+        <a:xfrm>
+          <a:off x="0" y="0"/>
+          <a:ext cx="0" cy="0"/>
+          <a:chOff x="0" y="0"/>
+          <a:chExt cx="0" cy="0"/>
+        </a:xfrm>
+      </p:grpSpPr>
+      <p:sp>
+        <p:nvSpPr>
+          <p:cNvPr id="2" name="Slide Image Placeholder 1"/>
+          <p:cNvSpPr>
+            <a:spLocks noGrp="1"/>
+          </p:cNvSpPr>
+          <p:nvPr>
+            <p:ph type="sldImg" idx="2"/>
+          </p:nvPr>
+        </p:nvSpPr>
+        <p:spPr/>
+      </p:sp>
+      <p:sp>
+        <p:nvSpPr>
+          <p:cNvPr id="3" name="Notes Placeholder 2"/>
+          <p:cNvSpPr>
+            <a:spLocks noGrp="1"/>
+          </p:cNvSpPr>
+          <p:nvPr>
+            <p:ph type="body" idx="3" sz="quarter"/>
+          </p:nvPr>
+        </p:nvSpPr>
+        <p:spPr/>
+        <p:txBody>
+          <a:bodyPr/>
+          <a:lstStyle/>
+          <a:p>
+            <a:r>
+              <a:t>観測はデフォルトの 2 チャネルから 10 チャネルに拡張しました。周囲車両の相対位置・相対速度、自車のレーンからの横ずれ lat_off と角度ずれ ang_off などです。追い越しと車線維持の両方に必要な情報です。視野も変えました。デフォルトは前後対称 ±18 m ですが、レースで重要なのは前方です。後方 9 m・前方 27 m の非対称にしました。27 m という数字は制動距離から来ています。16 m/s から 5 m/s² でフル制動すると 25.6 m。前方視野がこれより短いと、コーナーが見えてからでは止まれません。ぎりぎり収まるのが 27 m です。重要な注意として、自車の絶対座標は観測に含まれません。これによりコース暗記が不可能になり、反射的なレーン追従を学習せざるを得なくなります。これが 5 コース汎化の種明かしです。</a:t>
+            </a:r>
+          </a:p>
+        </p:txBody>
+      </p:sp>
+      <p:sp>
+        <p:nvSpPr>
+          <p:cNvPr id="4" name="Slide Number Placeholder 3"/>
+          <p:cNvSpPr>
+            <a:spLocks noGrp="1"/>
+          </p:cNvSpPr>
+          <p:nvPr>
+            <p:ph type="sldNum" idx="5" sz="quarter"/>
+          </p:nvPr>
+        </p:nvSpPr>
+        <p:spPr/>
+      </p:sp>
+    </p:spTree>
+  </p:cSld>
+  <p:clrMapOvr>
+    <a:masterClrMapping/>
+  </p:clrMapOvr>
+</p:notes>
+</file>
+
+<file path=ppt/notesSlides/notesSlide14.xml><?xml version="1.0" encoding="utf-8"?>
+<p:notes xmlns:a="http://schemas.openxmlformats.org/drawingml/2006/main" xmlns:p="http://schemas.openxmlformats.org/presentationml/2006/main" xmlns:r="http://schemas.openxmlformats.org/officeDocument/2006/relationships">
+  <p:cSld>
+    <p:spTree>
+      <p:nvGrpSpPr>
+        <p:cNvPr id="1" name=""/>
+        <p:cNvGrpSpPr/>
+        <p:nvPr/>
+      </p:nvGrpSpPr>
+      <p:grpSpPr>
+        <a:xfrm>
+          <a:off x="0" y="0"/>
+          <a:ext cx="0" cy="0"/>
+          <a:chOff x="0" y="0"/>
+          <a:chExt cx="0" cy="0"/>
+        </a:xfrm>
+      </p:grpSpPr>
+      <p:sp>
+        <p:nvSpPr>
+          <p:cNvPr id="2" name="Slide Image Placeholder 1"/>
+          <p:cNvSpPr>
+            <a:spLocks noGrp="1"/>
+          </p:cNvSpPr>
+          <p:nvPr>
+            <p:ph type="sldImg" idx="2"/>
+          </p:nvPr>
+        </p:nvSpPr>
+        <p:spPr/>
+      </p:sp>
+      <p:sp>
+        <p:nvSpPr>
+          <p:cNvPr id="3" name="Notes Placeholder 2"/>
+          <p:cNvSpPr>
+            <a:spLocks noGrp="1"/>
+          </p:cNvSpPr>
+          <p:nvPr>
+            <p:ph type="body" idx="3" sz="quarter"/>
+          </p:nvPr>
+        </p:nvSpPr>
+        <p:spPr/>
+        <p:txBody>
+          <a:bodyPr/>
+          <a:lstStyle/>
+          <a:p>
+            <a:r>
+              <a:t>コースも 1 つから 5 つに増やしました。oval と stadium が基礎、rect は 90 度コーナーの反復、chicane は左右の切り返しと最小半径 10 m のキンク、fast がメインの難コースです。config の track を random にするとエピソードごとに再抽選され、これが汎化学習になります。各トラックは C# 側にもプリセットと JSON で複製されていて、検証ハーネスがPython と C# の幾何が一致することを自動チェックします。トラックを追加するときはrace_env にビルダーを書き、C# プリセットを足し、JSON を再生成して検証を回す、という手順です。</a:t>
+            </a:r>
+          </a:p>
+        </p:txBody>
+      </p:sp>
+      <p:sp>
+        <p:nvSpPr>
+          <p:cNvPr id="4" name="Slide Number Placeholder 3"/>
+          <p:cNvSpPr>
+            <a:spLocks noGrp="1"/>
+          </p:cNvSpPr>
+          <p:nvPr>
+            <p:ph type="sldNum" idx="5" sz="quarter"/>
+          </p:nvPr>
+        </p:nvSpPr>
+        <p:spPr/>
+      </p:sp>
+    </p:spTree>
+  </p:cSld>
+  <p:clrMapOvr>
+    <a:masterClrMapping/>
+  </p:clrMapOvr>
+</p:notes>
+</file>
+
+<file path=ppt/notesSlides/notesSlide15.xml><?xml version="1.0" encoding="utf-8"?>
+<p:notes xmlns:a="http://schemas.openxmlformats.org/drawingml/2006/main" xmlns:p="http://schemas.openxmlformats.org/presentationml/2006/main" xmlns:r="http://schemas.openxmlformats.org/officeDocument/2006/relationships">
+  <p:cSld>
+    <p:spTree>
+      <p:nvGrpSpPr>
+        <p:cNvPr id="1" name=""/>
+        <p:cNvGrpSpPr/>
+        <p:nvPr/>
+      </p:nvGrpSpPr>
+      <p:grpSpPr>
+        <a:xfrm>
+          <a:off x="0" y="0"/>
+          <a:ext cx="0" cy="0"/>
+          <a:chOff x="0" y="0"/>
+          <a:chExt cx="0" cy="0"/>
+        </a:xfrm>
+      </p:grpSpPr>
+      <p:sp>
+        <p:nvSpPr>
+          <p:cNvPr id="2" name="Slide Image Placeholder 1"/>
+          <p:cNvSpPr>
+            <a:spLocks noGrp="1"/>
+          </p:cNvSpPr>
+          <p:nvPr>
+            <p:ph type="sldImg" idx="2"/>
+          </p:nvPr>
+        </p:nvSpPr>
+        <p:spPr/>
+      </p:sp>
+      <p:sp>
+        <p:nvSpPr>
+          <p:cNvPr id="3" name="Notes Placeholder 2"/>
+          <p:cNvSpPr>
+            <a:spLocks noGrp="1"/>
+          </p:cNvSpPr>
+          <p:nvPr>
+            <p:ph type="body" idx="3" sz="quarter"/>
+          </p:nvPr>
+        </p:nvSpPr>
+        <p:spPr/>
+        <p:txBody>
+          <a:bodyPr/>
+          <a:lstStyle/>
+          <a:p>
+            <a:r>
+              <a:t>学習は 2 フェーズの PPO です。フェーズ 1 で他車なしのレーン追従を覚え、フェーズ 2 で NPC を入れて学習率を下げ、追い越しをファインチューニングします。特徴抽出はカスタム CNN で、初期方策のスロットルバイアスを +0.4 にずらして序盤の探索が前に進むようにしています。ここでの教訓は fast-dev、つまり動作確認用の短縮設定です。以前はエントロピー係数 0.10 の 6.5 万ステップで、何度回しても曲がれるようになりませんでした。原因は、エントロピー報酬が『ランダムでい続けること』に支払われるため、報酬が [0,1] に圧縮された本環境では方策が確定するインセンティブに勝ってしまうことでした。現在は本番と同じ ent 0.02・lr 2e-4 のまま 12 万ステップに短縮し、『周回まで確実に到達する最小構成』としてエンドツーエンドで実測検証済みです。また PPO は学習終盤に退行することがあるため、最終モデルではなく EvalCallback のベストモデルを採用します。ノートブックには eval 報酬を周回数に換算するヤードスティックのセルを入れてあり、TensorBoard の数字だけで進捗判断ができます。</a:t>
+            </a:r>
+          </a:p>
+        </p:txBody>
+      </p:sp>
+      <p:sp>
+        <p:nvSpPr>
+          <p:cNvPr id="4" name="Slide Number Placeholder 3"/>
+          <p:cNvSpPr>
+            <a:spLocks noGrp="1"/>
+          </p:cNvSpPr>
+          <p:nvPr>
+            <p:ph type="sldNum" idx="5" sz="quarter"/>
+          </p:nvPr>
+        </p:nvSpPr>
+        <p:spPr/>
+      </p:sp>
+    </p:spTree>
+  </p:cSld>
+  <p:clrMapOvr>
+    <a:masterClrMapping/>
+  </p:clrMapOvr>
+</p:notes>
+</file>
+
+<file path=ppt/notesSlides/notesSlide16.xml><?xml version="1.0" encoding="utf-8"?>
+<p:notes xmlns:a="http://schemas.openxmlformats.org/drawingml/2006/main" xmlns:p="http://schemas.openxmlformats.org/presentationml/2006/main" xmlns:r="http://schemas.openxmlformats.org/officeDocument/2006/relationships">
+  <p:cSld>
+    <p:spTree>
+      <p:nvGrpSpPr>
+        <p:cNvPr id="1" name=""/>
+        <p:cNvGrpSpPr/>
+        <p:nvPr/>
+      </p:nvGrpSpPr>
+      <p:grpSpPr>
+        <a:xfrm>
+          <a:off x="0" y="0"/>
+          <a:ext cx="0" cy="0"/>
+          <a:chOff x="0" y="0"/>
+          <a:chExt cx="0" cy="0"/>
+        </a:xfrm>
+      </p:grpSpPr>
+      <p:sp>
+        <p:nvSpPr>
+          <p:cNvPr id="2" name="Slide Image Placeholder 1"/>
+          <p:cNvSpPr>
+            <a:spLocks noGrp="1"/>
+          </p:cNvSpPr>
+          <p:nvPr>
+            <p:ph type="sldImg" idx="2"/>
+          </p:nvPr>
+        </p:nvSpPr>
+        <p:spPr/>
+      </p:sp>
+      <p:sp>
+        <p:nvSpPr>
+          <p:cNvPr id="3" name="Notes Placeholder 2"/>
+          <p:cNvSpPr>
+            <a:spLocks noGrp="1"/>
+          </p:cNvSpPr>
+          <p:nvPr>
+            <p:ph type="body" idx="3" sz="quarter"/>
+          </p:nvPr>
+        </p:nvSpPr>
+        <p:spPr/>
+        <p:txBody>
+          <a:bodyPr/>
+          <a:lstStyle/>
+          <a:p>
+            <a:r>
+              <a:t>PPO の設定を専門的に補足します。オンポリシー法を選んだ理由は、環境改造を繰り返す本プロジェクトではリプレイバッファの古いデータが即座に無効になること、シミュレータが軽くサンプル効率より壁時計効率が支配的なことです。クリップ範囲は 0.15 と標準の 0.2 より狭くしています。2 次元連続行動で方策更新が大きく振れると、壁ペナルティ由来の高分散アドバンテージで崩壊しやすいためです。GAE λ は 0.98 と高めで、密な報酬のおかげで分散増を許容しつつ、コーナー 1 つ分の時間スケールの信用割当を確保します。エントロピー係数は報酬スケールと結合する点に注意が必要です。報酬が [0,1] に圧縮された環境では、係数 0.10 はエントロピー項が報酬差を支配し、方策標準偏差が 1.6 まで成長して事実上ランダムのままでした。0.02 が均衡点です。初期化は SB3 標準の直交初期化のあと、スロットル次元のバイアスだけ +0.4 に手動シフトします。ガウス方策の平均が 0 のままだと前進と後退が等確率で、前進報酬に到達する前に壁ペナルティばかり集めるためです。</a:t>
+            </a:r>
+          </a:p>
+        </p:txBody>
+      </p:sp>
+      <p:sp>
+        <p:nvSpPr>
+          <p:cNvPr id="4" name="Slide Number Placeholder 3"/>
+          <p:cNvSpPr>
+            <a:spLocks noGrp="1"/>
+          </p:cNvSpPr>
+          <p:nvPr>
+            <p:ph type="sldNum" idx="5" sz="quarter"/>
+          </p:nvPr>
+        </p:nvSpPr>
+        <p:spPr/>
+      </p:sp>
+    </p:spTree>
+  </p:cSld>
+  <p:clrMapOvr>
+    <a:masterClrMapping/>
+  </p:clrMapOvr>
+</p:notes>
+</file>
+
+<file path=ppt/notesSlides/notesSlide17.xml><?xml version="1.0" encoding="utf-8"?>
+<p:notes xmlns:a="http://schemas.openxmlformats.org/drawingml/2006/main" xmlns:p="http://schemas.openxmlformats.org/presentationml/2006/main" xmlns:r="http://schemas.openxmlformats.org/officeDocument/2006/relationships">
+  <p:cSld>
+    <p:spTree>
+      <p:nvGrpSpPr>
+        <p:cNvPr id="1" name=""/>
+        <p:cNvGrpSpPr/>
+        <p:nvPr/>
+      </p:nvGrpSpPr>
+      <p:grpSpPr>
+        <a:xfrm>
+          <a:off x="0" y="0"/>
+          <a:ext cx="0" cy="0"/>
+          <a:chOff x="0" y="0"/>
+          <a:chExt cx="0" cy="0"/>
+        </a:xfrm>
+      </p:grpSpPr>
+      <p:sp>
+        <p:nvSpPr>
+          <p:cNvPr id="2" name="Slide Image Placeholder 1"/>
+          <p:cNvSpPr>
+            <a:spLocks noGrp="1"/>
+          </p:cNvSpPr>
+          <p:nvPr>
+            <p:ph type="sldImg" idx="2"/>
+          </p:nvPr>
+        </p:nvSpPr>
+        <p:spPr/>
+      </p:sp>
+      <p:sp>
+        <p:nvSpPr>
+          <p:cNvPr id="3" name="Notes Placeholder 2"/>
+          <p:cNvSpPr>
+            <a:spLocks noGrp="1"/>
+          </p:cNvSpPr>
+          <p:nvPr>
+            <p:ph type="body" idx="3" sz="quarter"/>
+          </p:nvPr>
+        </p:nvSpPr>
+        <p:spPr/>
+        <p:txBody>
+          <a:bodyPr/>
+          <a:lstStyle/>
+          <a:p>
+            <a:r>
+              <a:t>学習した方策をそのままゲームに載せると、シミュレータと実車の違いが問題になります。そのために C# 側に 4 つの支援クラスを用意しました。まず SteeringSmoother。方策は観測グリッドが 3 m 刻みで量子化されている影響で、直線でステアを細かく左右に振ります。デコード後のステア角に EMA をかけるだけで、符号反転が 100 ステップあたり 34 回から 12 回に減り、直線の中央維持もむしろ改善しました。次に CorneringLimiter。実車はハンドルを瞬時に切れないのでステア速度を制限し、曲率から計算した限界速度を超えたら超過量に比例した弱いブレーキをかけます。速度床があるので絶対に止まりません。StuckRecovery は移動距離ベースのスタック検出で、前進指示なのに 1 秒で 0.3 m も動けなければ壁に刺さっていると判断してバック指示を出します。発進時は動けるので誤発動しません。最後に CarController は学習時と同一のBicycle 動力学を C# に移植したもので、Python と 1e-7 で一致します。</a:t>
+            </a:r>
+          </a:p>
+        </p:txBody>
+      </p:sp>
+      <p:sp>
+        <p:nvSpPr>
+          <p:cNvPr id="4" name="Slide Number Placeholder 3"/>
+          <p:cNvSpPr>
+            <a:spLocks noGrp="1"/>
+          </p:cNvSpPr>
+          <p:nvPr>
+            <p:ph type="sldNum" idx="5" sz="quarter"/>
+          </p:nvPr>
+        </p:nvSpPr>
+        <p:spPr/>
+      </p:sp>
+    </p:spTree>
+  </p:cSld>
+  <p:clrMapOvr>
+    <a:masterClrMapping/>
+  </p:clrMapOvr>
+</p:notes>
+</file>
+
+<file path=ppt/notesSlides/notesSlide18.xml><?xml version="1.0" encoding="utf-8"?>
+<p:notes xmlns:a="http://schemas.openxmlformats.org/drawingml/2006/main" xmlns:p="http://schemas.openxmlformats.org/presentationml/2006/main" xmlns:r="http://schemas.openxmlformats.org/officeDocument/2006/relationships">
+  <p:cSld>
+    <p:spTree>
+      <p:nvGrpSpPr>
+        <p:cNvPr id="1" name=""/>
+        <p:cNvGrpSpPr/>
+        <p:nvPr/>
+      </p:nvGrpSpPr>
+      <p:grpSpPr>
+        <a:xfrm>
+          <a:off x="0" y="0"/>
+          <a:ext cx="0" cy="0"/>
+          <a:chOff x="0" y="0"/>
+          <a:chExt cx="0" cy="0"/>
+        </a:xfrm>
+      </p:grpSpPr>
+      <p:sp>
+        <p:nvSpPr>
+          <p:cNvPr id="2" name="Slide Image Placeholder 1"/>
+          <p:cNvSpPr>
+            <a:spLocks noGrp="1"/>
+          </p:cNvSpPr>
+          <p:nvPr>
+            <p:ph type="sldImg" idx="2"/>
+          </p:nvPr>
+        </p:nvSpPr>
+        <p:spPr/>
+      </p:sp>
+      <p:sp>
+        <p:nvSpPr>
+          <p:cNvPr id="3" name="Notes Placeholder 2"/>
+          <p:cNvSpPr>
+            <a:spLocks noGrp="1"/>
+          </p:cNvSpPr>
+          <p:nvPr>
+            <p:ph type="body" idx="3" sz="quarter"/>
+          </p:nvPr>
+        </p:nvSpPr>
+        <p:spPr/>
+        <p:txBody>
+          <a:bodyPr/>
+          <a:lstStyle/>
+          <a:p>
+            <a:r>
+              <a:t>デプロイを見据えた汎化の設計です。トラックのランダム化はドメインランダマイゼーションの一種で、方策がコース固有の系列を暗記することを分布レベルで禁止します。ただし本質はむしろ観測の帰納バイアスです。自己座標を観測に入れず、エゴセントリックなグリッドにすることで、方策は平行移動と回転に対して不変になり、「見えている道路形状への反射」だけが学習可能な解空間になります。実際、fast 単体で学習した方策が未見の 4 コースをゼロショットで走ったのはこの不変性の帰結です。sim-to-real ギャップへの対処は 2 層です。観測と車両物理は C# に数値一致で移植し、ギャップ自体を消す。残るゲーム固有の動力学差は、方策を再学習せずデプロイ側のアクションフィルタ(平滑化・レートリミット・旋回ブレーキ) で吸収します。フィルタは閉ループ特性を変えるため、シミュレータ内で同じフィルタを通した評価で周回数が落ちないことを確認済みです。</a:t>
+            </a:r>
+          </a:p>
+        </p:txBody>
+      </p:sp>
+      <p:sp>
+        <p:nvSpPr>
+          <p:cNvPr id="4" name="Slide Number Placeholder 3"/>
+          <p:cNvSpPr>
+            <a:spLocks noGrp="1"/>
+          </p:cNvSpPr>
+          <p:nvPr>
+            <p:ph type="sldNum" idx="5" sz="quarter"/>
+          </p:nvPr>
+        </p:nvSpPr>
+        <p:spPr/>
+      </p:sp>
+    </p:spTree>
+  </p:cSld>
+  <p:clrMapOvr>
+    <a:masterClrMapping/>
+  </p:clrMapOvr>
+</p:notes>
+</file>
+
+<file path=ppt/notesSlides/notesSlide19.xml><?xml version="1.0" encoding="utf-8"?>
+<p:notes xmlns:a="http://schemas.openxmlformats.org/drawingml/2006/main" xmlns:p="http://schemas.openxmlformats.org/presentationml/2006/main" xmlns:r="http://schemas.openxmlformats.org/officeDocument/2006/relationships">
+  <p:cSld>
+    <p:spTree>
+      <p:nvGrpSpPr>
+        <p:cNvPr id="1" name=""/>
+        <p:cNvGrpSpPr/>
+        <p:nvPr/>
+      </p:nvGrpSpPr>
+      <p:grpSpPr>
+        <a:xfrm>
+          <a:off x="0" y="0"/>
+          <a:ext cx="0" cy="0"/>
+          <a:chOff x="0" y="0"/>
+          <a:chExt cx="0" cy="0"/>
+        </a:xfrm>
+      </p:grpSpPr>
+      <p:sp>
+        <p:nvSpPr>
+          <p:cNvPr id="2" name="Slide Image Placeholder 1"/>
+          <p:cNvSpPr>
+            <a:spLocks noGrp="1"/>
+          </p:cNvSpPr>
+          <p:nvPr>
+            <p:ph type="sldImg" idx="2"/>
+          </p:nvPr>
+        </p:nvSpPr>
+        <p:spPr/>
+      </p:sp>
+      <p:sp>
+        <p:nvSpPr>
+          <p:cNvPr id="3" name="Notes Placeholder 2"/>
+          <p:cNvSpPr>
+            <a:spLocks noGrp="1"/>
+          </p:cNvSpPr>
+          <p:nvPr>
+            <p:ph type="body" idx="3" sz="quarter"/>
+          </p:nvPr>
+        </p:nvSpPr>
+        <p:spPr/>
+        <p:txBody>
+          <a:bodyPr/>
+          <a:lstStyle/>
+          <a:p>
+            <a:r>
+              <a:t>使い方です。環境構築はスライドの 1 行だけです。注意点として、リポジトリ直下のrequirements.txt は旧 TensorFlow スタック用なので使わないでください。ノートブックは 2 つ。task2 が fast トラック専用、task3 がランダムトラックの汎化学習です。設定セルの FAST_DEV_RUN で短縮学習と本番を切り替えます。学習後は軌跡プロット、トラック別評価レポート、5 トラック並列動画、そして今回のスライドに使った図と動画を生成して保存するセルまで、すべてノートブック内にあります。C# ポートの検証は re_engine/verify で dotnet run するだけです。</a:t>
             </a:r>
           </a:p>
         </p:txBody>
@@ -722,7 +1292,147 @@
           <a:lstStyle/>
           <a:p>
             <a:r>
-              <a:t>最初に結果です。PPO エージェントはメインの fast トラックを制限速度 16 m/s で安定走行し、800 秒のエピソードで 37 周、壁への衝突ゼロを達成しました。学習は 3 万〜6 万ステップで周回能力が立ち上がり、12 万ステップの fast-dev 設定でも周回します。さらに、ランダムトラックで学習した汎化モデルは、5 種類すべてのコースを同一の重みで走り切ります。C# 側の観測生成は Python 環境とビット一致で検証済みです。</a:t>
+              <a:t>説明の前に、まず走りをご覧ください。これはエピソードごとにコースをランダムに切り替えて学習した「汎化モデル」1 つを、5 つのコースで同時に評価した動画です。赤い点が車、軌跡の色が速度です。直線では黄色、つまり制限速度の 16 m/s 付近、コーナーでは適切に減速しているのが分かります。どのコースも 2 分間、壁への衝突ゼロで周回し続けます。では、この走りがどう作られたかを見ていきます。</a:t>
+            </a:r>
+          </a:p>
+        </p:txBody>
+      </p:sp>
+      <p:sp>
+        <p:nvSpPr>
+          <p:cNvPr id="4" name="Slide Number Placeholder 3"/>
+          <p:cNvSpPr>
+            <a:spLocks noGrp="1"/>
+          </p:cNvSpPr>
+          <p:nvPr>
+            <p:ph type="sldNum" idx="5" sz="quarter"/>
+          </p:nvPr>
+        </p:nvSpPr>
+        <p:spPr/>
+      </p:sp>
+    </p:spTree>
+  </p:cSld>
+  <p:clrMapOvr>
+    <a:masterClrMapping/>
+  </p:clrMapOvr>
+</p:notes>
+</file>
+
+<file path=ppt/notesSlides/notesSlide20.xml><?xml version="1.0" encoding="utf-8"?>
+<p:notes xmlns:a="http://schemas.openxmlformats.org/drawingml/2006/main" xmlns:p="http://schemas.openxmlformats.org/presentationml/2006/main" xmlns:r="http://schemas.openxmlformats.org/officeDocument/2006/relationships">
+  <p:cSld>
+    <p:spTree>
+      <p:nvGrpSpPr>
+        <p:cNvPr id="1" name=""/>
+        <p:cNvGrpSpPr/>
+        <p:nvPr/>
+      </p:nvGrpSpPr>
+      <p:grpSpPr>
+        <a:xfrm>
+          <a:off x="0" y="0"/>
+          <a:ext cx="0" cy="0"/>
+          <a:chOff x="0" y="0"/>
+          <a:chExt cx="0" cy="0"/>
+        </a:xfrm>
+      </p:grpSpPr>
+      <p:sp>
+        <p:nvSpPr>
+          <p:cNvPr id="2" name="Slide Image Placeholder 1"/>
+          <p:cNvSpPr>
+            <a:spLocks noGrp="1"/>
+          </p:cNvSpPr>
+          <p:nvPr>
+            <p:ph type="sldImg" idx="2"/>
+          </p:nvPr>
+        </p:nvSpPr>
+        <p:spPr/>
+      </p:sp>
+      <p:sp>
+        <p:nvSpPr>
+          <p:cNvPr id="3" name="Notes Placeholder 2"/>
+          <p:cNvSpPr>
+            <a:spLocks noGrp="1"/>
+          </p:cNvSpPr>
+          <p:nvPr>
+            <p:ph type="body" idx="3" sz="quarter"/>
+          </p:nvPr>
+        </p:nvSpPr>
+        <p:spPr/>
+        <p:txBody>
+          <a:bodyPr/>
+          <a:lstStyle/>
+          <a:p>
+            <a:r>
+              <a:t>デプロイ用のエクスポートは export_onnx.py です。モード 3 がエンジン用のchannels-last NHWC 版で、これが推奨です。C# の観測ビルダーは H×W×C の平坦配列を出力するため、channels-first 版のモデルに入れるとチャネルが混ざり、スロットル 0.4・ステア 0.2 程度のほぼ一定の出力に退化します。実際にこの症状で『モデルが曲がらない』というデバッグを経験したので、症状として覚えておいてください。トラックや観測の設定を変えたら、export_track_json.py で C# 側の正解データを再生成し、検証ハーネスを回します。加速度レンジなどの定数は C# 側に意図的に複製されているので、変更時は C# 定数、JSON 再生成、検証、ONNX 再エクスポートの 4 点セットを忘れずに。</a:t>
+            </a:r>
+          </a:p>
+        </p:txBody>
+      </p:sp>
+      <p:sp>
+        <p:nvSpPr>
+          <p:cNvPr id="4" name="Slide Number Placeholder 3"/>
+          <p:cNvSpPr>
+            <a:spLocks noGrp="1"/>
+          </p:cNvSpPr>
+          <p:nvPr>
+            <p:ph type="sldNum" idx="5" sz="quarter"/>
+          </p:nvPr>
+        </p:nvSpPr>
+        <p:spPr/>
+      </p:sp>
+    </p:spTree>
+  </p:cSld>
+  <p:clrMapOvr>
+    <a:masterClrMapping/>
+  </p:clrMapOvr>
+</p:notes>
+</file>
+
+<file path=ppt/notesSlides/notesSlide21.xml><?xml version="1.0" encoding="utf-8"?>
+<p:notes xmlns:a="http://schemas.openxmlformats.org/drawingml/2006/main" xmlns:p="http://schemas.openxmlformats.org/presentationml/2006/main" xmlns:r="http://schemas.openxmlformats.org/officeDocument/2006/relationships">
+  <p:cSld>
+    <p:spTree>
+      <p:nvGrpSpPr>
+        <p:cNvPr id="1" name=""/>
+        <p:cNvGrpSpPr/>
+        <p:nvPr/>
+      </p:nvGrpSpPr>
+      <p:grpSpPr>
+        <a:xfrm>
+          <a:off x="0" y="0"/>
+          <a:ext cx="0" cy="0"/>
+          <a:chOff x="0" y="0"/>
+          <a:chExt cx="0" cy="0"/>
+        </a:xfrm>
+      </p:grpSpPr>
+      <p:sp>
+        <p:nvSpPr>
+          <p:cNvPr id="2" name="Slide Image Placeholder 1"/>
+          <p:cNvSpPr>
+            <a:spLocks noGrp="1"/>
+          </p:cNvSpPr>
+          <p:nvPr>
+            <p:ph type="sldImg" idx="2"/>
+          </p:nvPr>
+        </p:nvSpPr>
+        <p:spPr/>
+      </p:sp>
+      <p:sp>
+        <p:nvSpPr>
+          <p:cNvPr id="3" name="Notes Placeholder 2"/>
+          <p:cNvSpPr>
+            <a:spLocks noGrp="1"/>
+          </p:cNvSpPr>
+          <p:nvPr>
+            <p:ph type="body" idx="3" sz="quarter"/>
+          </p:nvPr>
+        </p:nvSpPr>
+        <p:spPr/>
+        <p:txBody>
+          <a:bodyPr/>
+          <a:lstStyle/>
+          <a:p>
+            <a:r>
+              <a:t>まとめます。highway-env のデフォルトはステアリングだけの車線追従環境でした。そこにスロットルと実車動力学、物理的な壁、速く走る報酬、前方に偏った視野を段階的に加え、壁擦りや壁這いといった抜け道をひとつずつ経済的に割に合わなくして、最終的に 6 万ステップで周回を学習する環境になりました。汎化は自己位置を見せないという観測設計から生まれ、C# 側は数値一致の検証で「移植したら挙動が変わった」を排除しています。今後は RE Engine 内での実走検証と、実車ダイナミクスへの適合が次のステップです。ご清聴ありがとうございました。</a:t>
             </a:r>
           </a:p>
         </p:txBody>
@@ -792,7 +1502,7 @@
           <a:lstStyle/>
           <a:p>
             <a:r>
-              <a:t>学習の立ち上がりです。横軸が学習ステップ、縦軸がエピソードあたりの周回数です。3 万ステップでは 1 周程度で壁に刺さりますが、6 万ステップで 32 周、9 万で 36 周に達し、以降は制限速度での巡航に収束します。ランダムトラック学習 (task3) でも、最難関の chicane 評価で 5 万ステップ時点から 33 周と、ほぼ同じ速度で立ち上がります。報酬が密に設計されているため学習が速いのが特徴です。</a:t>
+              <a:t>学習の速さです。横軸が学習ステップ、縦軸が 1 エピソードあたりの周回数です。青が fast トラック単体の学習で、3 万ステップでは 1 周で壁に刺さりますが、6 万で 32 周、9 万で 36 周に達し、以降は制限速度巡航に収束します。オレンジがランダムトラック学習で、最難関の chicane 評価でも 5 万ステップから 33 周と、ほぼ同じ速度で立ち上がります。この速さは偶然ではなく、後で説明する報酬設計の結果です。</a:t>
             </a:r>
           </a:p>
         </p:txBody>
@@ -862,7 +1572,7 @@
           <a:lstStyle/>
           <a:p>
             <a:r>
-              <a:t>12 万ステップの fast-dev モデルの 2 分間の走行軌跡です。黒線がコース外壁、点の色が速度を表します。直線では 16 m/s、ヘアピンでは適切に減速して立て直しているのが分かります。以前問題になっていた e-f コーナーの壁張り付きも解消されています。</a:t>
+              <a:t>1 台分の軌跡を拡大したものです。12 万ステップの fast-dev モデルの 2 分間で、黒線がコースの物理壁、点の色が速度です。直線で最高速に達し、ヘアピン進入で青く、つまりしっかり減速し、出口で再加速しています。以前は S 字の先の e-f コーナーで壁に張り付いて動けなくなる問題がありましたが、報酬の再設計で解消しました。この「壁に張り付く」問題との戦いが、本プロジェクトの中心的なエピソードです。</a:t>
             </a:r>
           </a:p>
         </p:txBody>
@@ -932,7 +1642,7 @@
           <a:lstStyle/>
           <a:p>
             <a:r>
-              <a:t>こちらが汎化モデルの結果です。エピソードごとにトラックをランダムに切り替えて 15 万ステップ学習した1 つの方策を、5 つのコースで同時に評価しました。すべてのコースを平均 15.7 m/s、2 分間ノーミスで周回します。エージェントは自己位置を観測できないため、コース形状を暗記できず、反射的なレーン追従を学習したことが汎化の理由です。動画はスライドに埋め込んであります。再生してご覧ください。</a:t>
+              <a:t>映像で見ていただいた結果を数字でまとめます。fast トラックで 800 秒 37 周・無衝突。周回能力の獲得は 3 万から 6 万ステップ。12 万ステップの短縮設定 fast-dev でも、NPC ありのフェーズ 2 まで通して 37 周を維持します。汎化モデルは 5 コースすべてを平均 15.7 m/s で走破。そして C# 側の観測生成は Python とビット一致、車両物理も 1e-7 で一致しており、エンジンに載せた瞬間から学習時と同じ挙動が保証されます。</a:t>
             </a:r>
           </a:p>
         </p:txBody>
@@ -1002,7 +1712,7 @@
           <a:lstStyle/>
           <a:p>
             <a:r>
-              <a:t>使用している 5 つのトラックです。すべて 2 車線・幅 5 m で、直線と円弧のみで構成しています。fast は S 字と 2 つのヘアピンを持つメインコース、oval と stadium は基礎、rect は 90 度コーナーの繰り返し、chicane は左右両方向の切り返しと最小半径 10 m のキンクを持ちます。各トラックは C# 側のプリセットと track_&lt;name&gt;.json にも複製され、検証ハーネスが両者の幾何一致を自動チェックします。</a:t>
+              <a:t>ここからが本題です。ベースにした highway-env は自動運転研究向けの軽量シミュレータで、racetrack 環境がレース走行に一番近いものです。ただしデフォルト設定を詳しく見ると、ゲームのレースとはかなり違います。まず行動はステアリングのみで、速度は 0・5・10 の離散ターゲットから選ぶだけ。スロットルという概念がありません。観測は presence と on_road の2 チャネルだけで、周囲 18 m の対称視野。報酬は車線中央維持と操作量ペナルティが中心で、速く走る動機がありません。そして路外に出ても物理的な壁はなく、エピソードが終わるだけです。車両も既定ではタイヤスリップのない運動学モデルです。</a:t>
             </a:r>
           </a:p>
         </p:txBody>
@@ -1072,7 +1782,7 @@
           <a:lstStyle/>
           <a:p>
             <a:r>
-              <a:t>オリジナルの highway-env racetrack 環境との違いです。1 つ目は壁の物理です。標準では路外に出ても罰則だけですが、本環境ではコース外周だけを物理的な壁とし、車線間の白線は壁にしません。壁に当たると停止し、バックでしか脱出できません。2 つ目は報酬設計です。速度・車線中央維持・チェックポイント/ラップボーナスを生の単位で合成し、[-3,3] から [0,1] へ線形写像します。この範囲が実際の報酬の下限を覆っていないと、悪い状態がすべて 0 に飽和して勾配が消えるため、範囲の導出をコメントで管理しています。3 つ目は壁脱出の経済設計です。壁から 1 m 以内ではバック走行のペナルティを免除し、壁からの距離増加に報酬を与えます。これがないと、脱出の一歩目で罰せられて壁沿いを這う局所解を学習してしまいます。</a:t>
+              <a:t>左が highway-env デフォルトの racetrack、右が我々の fast トラックです。形状も作り直し、S 字と 2 つのヘアピンを持たせて難所を意図的に作りました。しかし本質的な違いは形ではなく物理です。左はステアリングだけ・壁なし・10 m/s、右はスロットル制御・外周が物理壁・16 m/s で、壁に当たると停止しバックでしか脱出できません。この差を埋めるために行った変更を、これから順番に説明します。</a:t>
             </a:r>
           </a:p>
         </p:txBody>
@@ -1142,7 +1852,7 @@
           <a:lstStyle/>
           <a:p>
             <a:r>
-              <a:t>観測は 10 チャネル 12x12 の OccupancyGrid で、前方 27 m・後方 9 m の非対称な視野にしています。レース走行ではコーナーの先読みが重要なためです。行動は連続値のスロットルとステアリングで、学習時と同じ動力学モデル (タイヤスリップ付き Bicycle model) を使います。学習は 2 フェーズの PPO です。フェーズ 1 で他車なしのレーン追従、フェーズ 2 で NPC を加えた追い越しをファインチューニングします。初期方策のスロットルバイアスを +0.4 にずらし、序盤の探索で前進が出やすくしています。fast-dev は 12 万ステップで、本番と同じハイパーパラメータのまま短縮した「周回まで確実に到達する最小構成」です。</a:t>
+              <a:t>専門家向けに問題設定を形式化しておきます。タスクは部分観測マルコフ決定過程です。エージェントは 5 Hz で意思決定し、物理は 15 Hz で刻みます。1 アクションを 3 物理ステップ保持するフレームスキップ構成です。観測に相対速度と自車の速度由来特徴が含まれるため、フレームスタックなしでも近似的にマルコフ性が成り立ちます。割引率 0.99 は 5 Hz で実効ホライズン約 20 秒、つまりちょうど 1 周分に相当し、コーナー進入前の減速判断に必要な信用割当が 1 周スケールで届く設計です。報酬は毎ステップ [0,1] に正規化されており、PPO のアドバンテージ正規化と併せてスケール不変な学習を狙っています。</a:t>
             </a:r>
           </a:p>
         </p:txBody>
@@ -1212,7 +1922,7 @@
           <a:lstStyle/>
           <a:p>
             <a:r>
-              <a:t>環境構築はこの 1 行です。リポジトリ直下の requirements.txt は旧 TensorFlow 系スタック用なので使わないでください。ノートブックは 2 つあり、task2 が fast トラック専用、task3 がランダムトラックの汎化学習用です。設定セルの FAST_DEV_RUN を True にすると短縮学習、False にすると本番学習になります。学習の進捗は Reward yardstick セルの数値と TensorBoard で確認でき、eval/mean_reward が周回相当値を超えたら周回できています。</a:t>
+              <a:t>最初の変更は行動空間です。ゲームの車はアクセルとブレーキを踏むので、ステアリング専用だったものを連続スロットル付きの 2 次元連続行動に変更し、加速度レンジは ±5 m/s²、ステアは ±30 度としました。車両モデルもタイヤスリップを持つ動的 Bicycle モデルに切り替えています。加速度レンジは実験で決めました。グラフの赤い破線が ±2.5 m/s² に絞った実験で、10 万ステップで 22 周までは学習できるものの巡航速度が 10 m/s に頭打ちし、終盤には退行しました。原因は制動距離です。16 m/s から 2.5 m/s² で止まるには 51 m 必要ですが、観測の前方視野は 27 m しかなく、「見えてから減速」が物理的に間に合いません。エンジン出力を絞りたい場合はブレーキだけ強い非対称レンジ [−5, +2.5] を推奨しています。</a:t>
             </a:r>
           </a:p>
         </p:txBody>
@@ -4258,18 +4968,18 @@
                 </a:solidFill>
                 <a:latin typeface="Meiryo"/>
               </a:rPr>
-              <a:t>強化学習によるサーキット走行エージェント — highway-env + PPO から RE Engine (ONNX) まで</a:t>
+              <a:t>強化学習によるサーキット走行エージェント — highway-env をゲーム環境へ進化させる</a:t>
             </a:r>
           </a:p>
           <a:p>
             <a:r>
               <a:rPr sz="1800">
                 <a:solidFill>
-                  <a:srgbClr val="666666"/>
-                </a:solidFill>
-                <a:latin typeface="Meiryo"/>
-              </a:rPr>
-              <a:t>学習環境・報酬設計・C# デプロイパイプラインの全体紹介</a:t>
+                  <a:srgbClr val="595959"/>
+                </a:solidFill>
+                <a:latin typeface="Meiryo"/>
+              </a:rPr>
+              <a:t>環境設計の変遷・学習パイプライン・RE Engine (ONNX/C#) デプロイ</a:t>
             </a:r>
           </a:p>
         </p:txBody>
@@ -4300,8 +5010,8 @@
         </p:nvSpPr>
         <p:spPr>
           <a:xfrm>
-            <a:off x="457200" y="228600"/>
-            <a:ext cx="11247120" cy="822960"/>
+            <a:off x="457200" y="201168"/>
+            <a:ext cx="11247120" cy="777240"/>
           </a:xfrm>
           <a:prstGeom prst="rect">
             <a:avLst/>
@@ -4315,13 +5025,13 @@
           <a:lstStyle/>
           <a:p>
             <a:r>
-              <a:rPr sz="3000" b="1">
+              <a:rPr sz="2800" b="1">
                 <a:solidFill>
                   <a:srgbClr val="1B5EA8"/>
                 </a:solidFill>
                 <a:latin typeface="Meiryo"/>
               </a:rPr>
-              <a:t>エクスポートツールと C# デプロイ</a:t>
+              <a:t>進化 (2) 壁の物理 — 「なし → 反発 → 停止」の変遷</a:t>
             </a:r>
           </a:p>
         </p:txBody>
@@ -4334,8 +5044,8 @@
         </p:nvSpPr>
         <p:spPr>
           <a:xfrm>
-            <a:off x="548640" y="1280160"/>
-            <a:ext cx="11064240" cy="5120640"/>
+            <a:off x="548640" y="1234440"/>
+            <a:ext cx="11064240" cy="5394960"/>
           </a:xfrm>
           <a:prstGeom prst="rect">
             <a:avLst/>
@@ -4350,129 +5060,81 @@
           <a:p>
             <a:pPr>
               <a:spcAft>
-                <a:spcPts val="600"/>
+                <a:spcPts val="500"/>
               </a:spcAft>
             </a:pPr>
             <a:r>
+              <a:rPr sz="1700" b="0">
+                <a:solidFill>
+                  <a:srgbClr val="222222"/>
+                </a:solidFill>
+                <a:latin typeface="Meiryo"/>
+              </a:rPr>
+              <a:t>v0: 壁なし (デフォルト) → コーナーを路外ショートカットする走りを学習</a:t>
+            </a:r>
+          </a:p>
+          <a:p>
+            <a:pPr>
+              <a:spcAft>
+                <a:spcPts val="500"/>
+              </a:spcAft>
+            </a:pPr>
+            <a:r>
+              <a:rPr sz="1700" b="0">
+                <a:solidFill>
+                  <a:srgbClr val="B32D2D"/>
+                </a:solidFill>
+                <a:latin typeface="Meiryo"/>
+              </a:rPr>
+              <a:t>v1: 反発壁 (bounce) → 壁に擦って曲がる wall-riding が最速解に</a:t>
+            </a:r>
+          </a:p>
+          <a:p>
+            <a:pPr>
+              <a:spcAft>
+                <a:spcPts val="500"/>
+              </a:spcAft>
+            </a:pPr>
+            <a:r>
               <a:rPr sz="1700" b="1">
                 <a:solidFill>
                   <a:srgbClr val="222222"/>
                 </a:solidFill>
                 <a:latin typeface="Meiryo"/>
               </a:rPr>
-              <a:t>python export_onnx.py &lt;model.zip&gt; -m 3        # エンジン用 NHWC (推奨)</a:t>
+              <a:t>v2 (最終): 停止壁 (stop) + 壁接触中は速度報酬ゼロ + 接触 35 ステップで終了</a:t>
+            </a:r>
+          </a:p>
+          <a:p>
+            <a:pPr>
+              <a:spcAft>
+                <a:spcPts val="500"/>
+              </a:spcAft>
+            </a:pPr>
+            <a:r>
+              <a:rPr sz="1700" b="1">
+                <a:solidFill>
+                  <a:srgbClr val="222222"/>
+                </a:solidFill>
+                <a:latin typeface="Meiryo"/>
+              </a:rPr>
+              <a:t>壁 = コース外周のみ。車線境界の白線は壁ではない (2 車線を使うライン取りを許す)</a:t>
             </a:r>
           </a:p>
           <a:p>
             <a:pPr lvl="1">
               <a:spcAft>
-                <a:spcPts val="600"/>
+                <a:spcPts val="500"/>
               </a:spcAft>
             </a:pPr>
             <a:r>
               <a:rPr sz="1500" b="0">
                 <a:solidFill>
-                  <a:srgbClr val="666666"/>
-                </a:solidFill>
-                <a:latin typeface="Meiryo"/>
-              </a:rPr>
-              <a:t>  -m: 1=full policy / 2=actor CHW / 3=actor NHWC / 0=全部,  -o で出力名指定</a:t>
-            </a:r>
-          </a:p>
-          <a:p>
-            <a:pPr>
-              <a:spcAft>
-                <a:spcPts val="600"/>
-              </a:spcAft>
-            </a:pPr>
-            <a:r>
-              <a:rPr sz="1700" b="0">
-                <a:solidFill>
-                  <a:srgbClr val="222222"/>
-                </a:solidFill>
-                <a:latin typeface="Meiryo"/>
-              </a:rPr>
-              <a:t>python re_engine/convert_onnx_nhwc.py &lt;actor.onnx&gt;  # 既存 CHW を NHWC 化</a:t>
-            </a:r>
-          </a:p>
-          <a:p>
-            <a:pPr>
-              <a:spcAft>
-                <a:spcPts val="600"/>
-              </a:spcAft>
-            </a:pPr>
-            <a:r>
-              <a:rPr sz="1700" b="0">
-                <a:solidFill>
-                  <a:srgbClr val="222222"/>
-                </a:solidFill>
-                <a:latin typeface="Meiryo"/>
-              </a:rPr>
-              <a:t>python re_engine/export_track_json.py  # トラック変更後に JSON + 参照観測を再生成</a:t>
-            </a:r>
-          </a:p>
-          <a:p>
-            <a:pPr>
-              <a:spcAft>
-                <a:spcPts val="600"/>
-              </a:spcAft>
-            </a:pPr>
-            <a:r>
-              <a:rPr sz="1700" b="1">
-                <a:solidFill>
-                  <a:srgbClr val="222222"/>
-                </a:solidFill>
-                <a:latin typeface="Meiryo"/>
-              </a:rPr>
-              <a:t>エンジンは ppo_actor_only_nhwc.onnx (入力 [1,12,12,10]) を使用</a:t>
-            </a:r>
-          </a:p>
-          <a:p>
-            <a:pPr lvl="1">
-              <a:spcAft>
-                <a:spcPts val="600"/>
-              </a:spcAft>
-            </a:pPr>
-            <a:r>
-              <a:rPr sz="1500" b="0">
-                <a:solidFill>
-                  <a:srgbClr val="666666"/>
-                </a:solidFill>
-                <a:latin typeface="Meiryo"/>
-              </a:rPr>
-              <a:t>  理由: C# は HWC 平坦列を出力 — CHW 版に入れると出力がほぼ一定に退化</a:t>
-            </a:r>
-          </a:p>
-          <a:p>
-            <a:pPr>
-              <a:spcAft>
-                <a:spcPts val="600"/>
-              </a:spcAft>
-            </a:pPr>
-            <a:r>
-              <a:rPr sz="1700" b="0">
-                <a:solidFill>
-                  <a:srgbClr val="222222"/>
-                </a:solidFill>
-                <a:latin typeface="Meiryo"/>
-              </a:rPr>
-              <a:t>C# 支援クラス: SteeringSmoother / CorneringLimiter / StuckRecovery / CarController</a:t>
-            </a:r>
-          </a:p>
-          <a:p>
-            <a:pPr lvl="1">
-              <a:spcAft>
-                <a:spcPts val="600"/>
-              </a:spcAft>
-            </a:pPr>
-            <a:r>
-              <a:rPr sz="1500" b="0">
-                <a:solidFill>
-                  <a:srgbClr val="666666"/>
-                </a:solidFill>
-                <a:latin typeface="Meiryo"/>
-              </a:rPr>
-              <a:t>  CarController は学習時と同一の Bicycle 動力学 (Python と 1e-7 一致) で速度 Vector3 を出力</a:t>
+                  <a:srgbClr val="595959"/>
+                </a:solidFill>
+                <a:latin typeface="Meiryo"/>
+              </a:rPr>
+              <a:t>目的: ゲームの物理と一致 + 「壁を使う」抜け道をすべて塞ぐ</a:t>
             </a:r>
           </a:p>
         </p:txBody>
@@ -4503,8 +5165,8 @@
         </p:nvSpPr>
         <p:spPr>
           <a:xfrm>
-            <a:off x="457200" y="228600"/>
-            <a:ext cx="11247120" cy="822960"/>
+            <a:off x="457200" y="201168"/>
+            <a:ext cx="11247120" cy="777240"/>
           </a:xfrm>
           <a:prstGeom prst="rect">
             <a:avLst/>
@@ -4518,27 +5180,51 @@
           <a:lstStyle/>
           <a:p>
             <a:r>
-              <a:rPr sz="3000" b="1">
+              <a:rPr sz="2800" b="1">
                 <a:solidFill>
                   <a:srgbClr val="1B5EA8"/>
                 </a:solidFill>
                 <a:latin typeface="Meiryo"/>
               </a:rPr>
-              <a:t>まとめ</a:t>
-            </a:r>
-          </a:p>
-        </p:txBody>
-      </p:sp>
-      <p:sp>
-        <p:nvSpPr>
-          <p:cNvPr id="3" name="TextBox 2"/>
+              <a:t>進化 (3) 報酬の経済設計 — 抜け道より運転が得になるまで</a:t>
+            </a:r>
+          </a:p>
+        </p:txBody>
+      </p:sp>
+      <p:pic>
+        <p:nvPicPr>
+          <p:cNvPr id="3" name="Picture 2" descr="reward_economics.png"/>
+          <p:cNvPicPr>
+            <a:picLocks noChangeAspect="1"/>
+          </p:cNvPicPr>
+          <p:nvPr/>
+        </p:nvPicPr>
+        <p:blipFill>
+          <a:blip r:embed="rId3"/>
+          <a:stretch>
+            <a:fillRect/>
+          </a:stretch>
+        </p:blipFill>
+        <p:spPr>
+          <a:xfrm>
+            <a:off x="640080" y="1188720"/>
+            <a:ext cx="6766560" cy="3304599"/>
+          </a:xfrm>
+          <a:prstGeom prst="rect">
+            <a:avLst/>
+          </a:prstGeom>
+        </p:spPr>
+      </p:pic>
+      <p:sp>
+        <p:nvSpPr>
+          <p:cNvPr id="4" name="TextBox 3"/>
           <p:cNvSpPr txBox="1"/>
           <p:nvPr/>
         </p:nvSpPr>
         <p:spPr>
           <a:xfrm>
-            <a:off x="548640" y="1463040"/>
-            <a:ext cx="11064240" cy="5120640"/>
+            <a:off x="7589520" y="1371600"/>
+            <a:ext cx="4206240" cy="5394960"/>
           </a:xfrm>
           <a:prstGeom prst="rect">
             <a:avLst/>
@@ -4553,81 +5239,1394 @@
           <a:p>
             <a:pPr>
               <a:spcAft>
-                <a:spcPts val="600"/>
+                <a:spcPts val="500"/>
               </a:spcAft>
             </a:pPr>
             <a:r>
-              <a:rPr sz="2000" b="1">
+              <a:rPr sz="1400" b="1">
                 <a:solidFill>
                   <a:srgbClr val="222222"/>
                 </a:solidFill>
                 <a:latin typeface="Meiryo"/>
               </a:rPr>
-              <a:t>報酬・壁の経済設計が学習速度を決める: 周回獲得は 3〜6 万ステップ</a:t>
+              <a:t>目標: 運転 &gt; 脱出 &gt; 停滞 &gt; 壁擦り の順序</a:t>
             </a:r>
           </a:p>
           <a:p>
             <a:pPr>
               <a:spcAft>
-                <a:spcPts val="600"/>
+                <a:spcPts val="500"/>
               </a:spcAft>
             </a:pPr>
             <a:r>
-              <a:rPr sz="2000" b="1">
+              <a:rPr sz="1400" b="0">
                 <a:solidFill>
                   <a:srgbClr val="222222"/>
                 </a:solidFill>
                 <a:latin typeface="Meiryo"/>
               </a:rPr>
-              <a:t>ランダムトラック学習で 1 方策 5 コース走破 — 自己位置非観測が汎化の鍵</a:t>
+              <a:t>脱出ゾーン (壁 1 m): バック免除 +</a:t>
+            </a:r>
+          </a:p>
+          <a:p>
+            <a:pPr lvl="1">
+              <a:spcAft>
+                <a:spcPts val="500"/>
+              </a:spcAft>
+            </a:pPr>
+            <a:r>
+              <a:rPr sz="1200" b="0">
+                <a:solidFill>
+                  <a:srgbClr val="595959"/>
+                </a:solidFill>
+                <a:latin typeface="Meiryo"/>
+              </a:rPr>
+              <a:t>  距離増加に報酬 — 「壁を這う」局所解を排除</a:t>
             </a:r>
           </a:p>
           <a:p>
             <a:pPr>
               <a:spcAft>
-                <a:spcPts val="600"/>
+                <a:spcPts val="500"/>
               </a:spcAft>
             </a:pPr>
             <a:r>
-              <a:rPr sz="2000" b="1">
+              <a:rPr sz="1400" b="0">
                 <a:solidFill>
                   <a:srgbClr val="222222"/>
                 </a:solidFill>
                 <a:latin typeface="Meiryo"/>
               </a:rPr>
-              <a:t>C# ポートは観測ビット一致 + 物理 1e-7 一致 — 「動くはず」ではなく「同じ」</a:t>
+              <a:t>lmap [-3,3]→[0,1]: 範囲が下限を覆わないと</a:t>
+            </a:r>
+          </a:p>
+          <a:p>
+            <a:pPr lvl="1">
+              <a:spcAft>
+                <a:spcPts val="500"/>
+              </a:spcAft>
+            </a:pPr>
+            <a:r>
+              <a:rPr sz="1200" b="0">
+                <a:solidFill>
+                  <a:srgbClr val="595959"/>
+                </a:solidFill>
+                <a:latin typeface="Meiryo"/>
+              </a:rPr>
+              <a:t>  勾配消失 (導出をコメントで管理)</a:t>
             </a:r>
           </a:p>
           <a:p>
             <a:pPr>
               <a:spcAft>
-                <a:spcPts val="600"/>
+                <a:spcPts val="500"/>
               </a:spcAft>
             </a:pPr>
             <a:r>
-              <a:rPr sz="2000" b="0">
+              <a:rPr sz="1400" b="0">
                 <a:solidFill>
                   <a:srgbClr val="222222"/>
                 </a:solidFill>
                 <a:latin typeface="Meiryo"/>
               </a:rPr>
-              <a:t>再現手順・注意点は CLAUDE.md / re_engine/README.md に集約</a:t>
-            </a:r>
-          </a:p>
+              <a:t>チェックポイント/ラップボーナスは生単位で加算</a:t>
+            </a:r>
+          </a:p>
+        </p:txBody>
+      </p:sp>
+    </p:spTree>
+  </p:cSld>
+  <p:clrMapOvr>
+    <a:masterClrMapping/>
+  </p:clrMapOvr>
+</p:sld>
+</file>
+
+<file path=ppt/slides/slide12.xml><?xml version="1.0" encoding="utf-8"?>
+<p:sld xmlns:a="http://schemas.openxmlformats.org/drawingml/2006/main" xmlns:p="http://schemas.openxmlformats.org/presentationml/2006/main" xmlns:r="http://schemas.openxmlformats.org/officeDocument/2006/relationships">
+  <p:cSld>
+    <p:spTree>
+      <p:nvGrpSpPr>
+        <p:cNvPr id="1" name=""/>
+        <p:cNvGrpSpPr/>
+        <p:nvPr/>
+      </p:nvGrpSpPr>
+      <p:grpSpPr/>
+      <p:sp>
+        <p:nvSpPr>
+          <p:cNvPr id="2" name="TextBox 1"/>
+          <p:cNvSpPr txBox="1"/>
+          <p:nvPr/>
+        </p:nvSpPr>
+        <p:spPr>
+          <a:xfrm>
+            <a:off x="457200" y="201168"/>
+            <a:ext cx="11247120" cy="777240"/>
+          </a:xfrm>
+          <a:prstGeom prst="rect">
+            <a:avLst/>
+          </a:prstGeom>
+          <a:noFill/>
+        </p:spPr>
+        <p:txBody>
+          <a:bodyPr wrap="none">
+            <a:spAutoFit/>
+          </a:bodyPr>
+          <a:lstStyle/>
+          <a:p>
+            <a:r>
+              <a:rPr sz="2800" b="1">
+                <a:solidFill>
+                  <a:srgbClr val="1B5EA8"/>
+                </a:solidFill>
+                <a:latin typeface="Meiryo"/>
+              </a:rPr>
+              <a:t>報酬設計の理論背景 — specification gaming と shaping</a:t>
+            </a:r>
+          </a:p>
+        </p:txBody>
+      </p:sp>
+      <p:sp>
+        <p:nvSpPr>
+          <p:cNvPr id="3" name="TextBox 2"/>
+          <p:cNvSpPr txBox="1"/>
+          <p:nvPr/>
+        </p:nvSpPr>
+        <p:spPr>
+          <a:xfrm>
+            <a:off x="548640" y="1325880"/>
+            <a:ext cx="11064240" cy="5394960"/>
+          </a:xfrm>
+          <a:prstGeom prst="rect">
+            <a:avLst/>
+          </a:prstGeom>
+          <a:noFill/>
+        </p:spPr>
+        <p:txBody>
+          <a:bodyPr wrap="square">
+            <a:spAutoFit/>
+          </a:bodyPr>
+          <a:lstStyle/>
           <a:p>
             <a:pPr>
               <a:spcAft>
-                <a:spcPts val="600"/>
+                <a:spcPts val="500"/>
               </a:spcAft>
             </a:pPr>
             <a:r>
-              <a:rPr sz="2000" b="0">
+              <a:rPr sz="1700" b="1">
                 <a:solidFill>
                   <a:srgbClr val="222222"/>
                 </a:solidFill>
                 <a:latin typeface="Meiryo"/>
               </a:rPr>
-              <a:t>次のステップ: RE Engine 内での実走検証、実車ダイナミクスへの適合</a:t>
+              <a:t>観測された specification gaming: ①路外ショートカット ②wall-riding ③壁這い (creeping)</a:t>
+            </a:r>
+          </a:p>
+          <a:p>
+            <a:pPr>
+              <a:spcAft>
+                <a:spcPts val="500"/>
+              </a:spcAft>
+            </a:pPr>
+            <a:r>
+              <a:rPr sz="1700" b="1">
+                <a:solidFill>
+                  <a:srgbClr val="222222"/>
+                </a:solidFill>
+                <a:latin typeface="Meiryo"/>
+              </a:rPr>
+              <a:t>対策 1: potential-based shaping (Ng+ 1999) — 壁クリアランス φ の差分報酬は最適方策を保存</a:t>
+            </a:r>
+          </a:p>
+          <a:p>
+            <a:pPr>
+              <a:spcAft>
+                <a:spcPts val="500"/>
+              </a:spcAft>
+            </a:pPr>
+            <a:r>
+              <a:rPr sz="1700" b="0">
+                <a:solidFill>
+                  <a:srgbClr val="222222"/>
+                </a:solidFill>
+                <a:latin typeface="Meiryo"/>
+              </a:rPr>
+              <a:t>対策 2: 状態別 per-step 報酬の実測テーブルで順序 (運転&gt;脱出&gt;停滞&gt;壁擦り) を検証</a:t>
+            </a:r>
+          </a:p>
+          <a:p>
+            <a:pPr>
+              <a:spcAft>
+                <a:spcPts val="500"/>
+              </a:spcAft>
+            </a:pPr>
+            <a:r>
+              <a:rPr sz="1700" b="0">
+                <a:solidFill>
+                  <a:srgbClr val="222222"/>
+                </a:solidFill>
+                <a:latin typeface="Meiryo"/>
+              </a:rPr>
+              <a:t>dense (速度・車線) + sparse (チェックポイント) のハイブリッド — 学習速度と方向性の両立</a:t>
+            </a:r>
+          </a:p>
+          <a:p>
+            <a:pPr>
+              <a:spcAft>
+                <a:spcPts val="500"/>
+              </a:spcAft>
+            </a:pPr>
+            <a:r>
+              <a:rPr sz="1700" b="1">
+                <a:solidFill>
+                  <a:srgbClr val="222222"/>
+                </a:solidFill>
+                <a:latin typeface="Meiryo"/>
+              </a:rPr>
+              <a:t>正規化 [0,1] はクリップを伴う → 範囲設計を誤ると勾配消失。飽和は milestone のみに許容</a:t>
+            </a:r>
+          </a:p>
+          <a:p>
+            <a:pPr>
+              <a:spcAft>
+                <a:spcPts val="500"/>
+              </a:spcAft>
+            </a:pPr>
+            <a:r>
+              <a:rPr sz="1700" b="0">
+                <a:solidFill>
+                  <a:srgbClr val="222222"/>
+                </a:solidFill>
+                <a:latin typeface="Meiryo"/>
+              </a:rPr>
+              <a:t>PPO はアドバンテージ正規化により報酬のアフィン変換に不変 — 正規化は診断のための設計</a:t>
+            </a:r>
+          </a:p>
+        </p:txBody>
+      </p:sp>
+    </p:spTree>
+  </p:cSld>
+  <p:clrMapOvr>
+    <a:masterClrMapping/>
+  </p:clrMapOvr>
+</p:sld>
+</file>
+
+<file path=ppt/slides/slide13.xml><?xml version="1.0" encoding="utf-8"?>
+<p:sld xmlns:a="http://schemas.openxmlformats.org/drawingml/2006/main" xmlns:p="http://schemas.openxmlformats.org/presentationml/2006/main" xmlns:r="http://schemas.openxmlformats.org/officeDocument/2006/relationships">
+  <p:cSld>
+    <p:spTree>
+      <p:nvGrpSpPr>
+        <p:cNvPr id="1" name=""/>
+        <p:cNvGrpSpPr/>
+        <p:nvPr/>
+      </p:nvGrpSpPr>
+      <p:grpSpPr/>
+      <p:sp>
+        <p:nvSpPr>
+          <p:cNvPr id="2" name="TextBox 1"/>
+          <p:cNvSpPr txBox="1"/>
+          <p:nvPr/>
+        </p:nvSpPr>
+        <p:spPr>
+          <a:xfrm>
+            <a:off x="457200" y="201168"/>
+            <a:ext cx="11247120" cy="777240"/>
+          </a:xfrm>
+          <a:prstGeom prst="rect">
+            <a:avLst/>
+          </a:prstGeom>
+          <a:noFill/>
+        </p:spPr>
+        <p:txBody>
+          <a:bodyPr wrap="none">
+            <a:spAutoFit/>
+          </a:bodyPr>
+          <a:lstStyle/>
+          <a:p>
+            <a:r>
+              <a:rPr sz="2800" b="1">
+                <a:solidFill>
+                  <a:srgbClr val="1B5EA8"/>
+                </a:solidFill>
+                <a:latin typeface="Meiryo"/>
+              </a:rPr>
+              <a:t>進化 (4) 観測 — 2ch から 10ch へ、前方に偏った視野へ</a:t>
+            </a:r>
+          </a:p>
+        </p:txBody>
+      </p:sp>
+      <p:sp>
+        <p:nvSpPr>
+          <p:cNvPr id="3" name="TextBox 2"/>
+          <p:cNvSpPr txBox="1"/>
+          <p:nvPr/>
+        </p:nvSpPr>
+        <p:spPr>
+          <a:xfrm>
+            <a:off x="548640" y="1325880"/>
+            <a:ext cx="11064240" cy="5394960"/>
+          </a:xfrm>
+          <a:prstGeom prst="rect">
+            <a:avLst/>
+          </a:prstGeom>
+          <a:noFill/>
+        </p:spPr>
+        <p:txBody>
+          <a:bodyPr wrap="square">
+            <a:spAutoFit/>
+          </a:bodyPr>
+          <a:lstStyle/>
+          <a:p>
+            <a:pPr>
+              <a:spcAft>
+                <a:spcPts val="500"/>
+              </a:spcAft>
+            </a:pPr>
+            <a:r>
+              <a:rPr sz="1700" b="1">
+                <a:solidFill>
+                  <a:srgbClr val="222222"/>
+                </a:solidFill>
+                <a:latin typeface="Meiryo"/>
+              </a:rPr>
+              <a:t>2ch (presence/on_road) → 10ch: + 相対位置 x,y / 相対速度 vx,vy / 向き cos_h,sin_h / lat_off / ang_off</a:t>
+            </a:r>
+          </a:p>
+          <a:p>
+            <a:pPr>
+              <a:spcAft>
+                <a:spcPts val="500"/>
+              </a:spcAft>
+            </a:pPr>
+            <a:r>
+              <a:rPr sz="1700" b="1">
+                <a:solidFill>
+                  <a:srgbClr val="222222"/>
+                </a:solidFill>
+                <a:latin typeface="Meiryo"/>
+              </a:rPr>
+              <a:t>視野: ±18 m 対称 → 前方 27 m / 後方 9 m の非対称 (12×12 セル, 3 m 刻み)</a:t>
+            </a:r>
+          </a:p>
+          <a:p>
+            <a:pPr lvl="1">
+              <a:spcAft>
+                <a:spcPts val="500"/>
+              </a:spcAft>
+            </a:pPr>
+            <a:r>
+              <a:rPr sz="1500" b="0">
+                <a:solidFill>
+                  <a:srgbClr val="595959"/>
+                </a:solidFill>
+                <a:latin typeface="Meiryo"/>
+              </a:rPr>
+              <a:t>根拠: 制動距離 16 m/s ÷ 5 m/s² = 25.6 m &lt; 27 m — 「見えてから止まれる」最小視野</a:t>
+            </a:r>
+          </a:p>
+          <a:p>
+            <a:pPr>
+              <a:spcAft>
+                <a:spcPts val="500"/>
+              </a:spcAft>
+            </a:pPr>
+            <a:r>
+              <a:rPr sz="1700" b="1">
+                <a:solidFill>
+                  <a:srgbClr val="222222"/>
+                </a:solidFill>
+                <a:latin typeface="Meiryo"/>
+              </a:rPr>
+              <a:t>自車の絶対座標は観測に含まない → コース暗記が不可能 → 汎化の鍵</a:t>
+            </a:r>
+          </a:p>
+          <a:p>
+            <a:pPr>
+              <a:spcAft>
+                <a:spcPts val="500"/>
+              </a:spcAft>
+            </a:pPr>
+            <a:r>
+              <a:rPr sz="1700" b="0">
+                <a:solidFill>
+                  <a:srgbClr val="222222"/>
+                </a:solidFill>
+                <a:latin typeface="Meiryo"/>
+              </a:rPr>
+              <a:t>on_road はレーン中心線のトレース (塗りつぶしマスクではない) — C# 移植時の要注意点</a:t>
+            </a:r>
+          </a:p>
+        </p:txBody>
+      </p:sp>
+    </p:spTree>
+  </p:cSld>
+  <p:clrMapOvr>
+    <a:masterClrMapping/>
+  </p:clrMapOvr>
+</p:sld>
+</file>
+
+<file path=ppt/slides/slide14.xml><?xml version="1.0" encoding="utf-8"?>
+<p:sld xmlns:a="http://schemas.openxmlformats.org/drawingml/2006/main" xmlns:p="http://schemas.openxmlformats.org/presentationml/2006/main" xmlns:r="http://schemas.openxmlformats.org/officeDocument/2006/relationships">
+  <p:cSld>
+    <p:spTree>
+      <p:nvGrpSpPr>
+        <p:cNvPr id="1" name=""/>
+        <p:cNvGrpSpPr/>
+        <p:nvPr/>
+      </p:nvGrpSpPr>
+      <p:grpSpPr/>
+      <p:sp>
+        <p:nvSpPr>
+          <p:cNvPr id="2" name="TextBox 1"/>
+          <p:cNvSpPr txBox="1"/>
+          <p:nvPr/>
+        </p:nvSpPr>
+        <p:spPr>
+          <a:xfrm>
+            <a:off x="457200" y="201168"/>
+            <a:ext cx="11247120" cy="777240"/>
+          </a:xfrm>
+          <a:prstGeom prst="rect">
+            <a:avLst/>
+          </a:prstGeom>
+          <a:noFill/>
+        </p:spPr>
+        <p:txBody>
+          <a:bodyPr wrap="none">
+            <a:spAutoFit/>
+          </a:bodyPr>
+          <a:lstStyle/>
+          <a:p>
+            <a:r>
+              <a:rPr sz="2800" b="1">
+                <a:solidFill>
+                  <a:srgbClr val="1B5EA8"/>
+                </a:solidFill>
+                <a:latin typeface="Meiryo"/>
+              </a:rPr>
+              <a:t>進化 (5) トラックを 1 → 5 種に — 汎化学習</a:t>
+            </a:r>
+          </a:p>
+        </p:txBody>
+      </p:sp>
+      <p:pic>
+        <p:nvPicPr>
+          <p:cNvPr id="3" name="Picture 2" descr="track_shapes.png"/>
+          <p:cNvPicPr>
+            <a:picLocks noChangeAspect="1"/>
+          </p:cNvPicPr>
+          <p:nvPr/>
+        </p:nvPicPr>
+        <p:blipFill>
+          <a:blip r:embed="rId3"/>
+          <a:stretch>
+            <a:fillRect/>
+          </a:stretch>
+        </p:blipFill>
+        <p:spPr>
+          <a:xfrm>
+            <a:off x="411480" y="1554480"/>
+            <a:ext cx="11338560" cy="2267712"/>
+          </a:xfrm>
+          <a:prstGeom prst="rect">
+            <a:avLst/>
+          </a:prstGeom>
+        </p:spPr>
+      </p:pic>
+    </p:spTree>
+  </p:cSld>
+  <p:clrMapOvr>
+    <a:masterClrMapping/>
+  </p:clrMapOvr>
+</p:sld>
+</file>
+
+<file path=ppt/slides/slide15.xml><?xml version="1.0" encoding="utf-8"?>
+<p:sld xmlns:a="http://schemas.openxmlformats.org/drawingml/2006/main" xmlns:p="http://schemas.openxmlformats.org/presentationml/2006/main" xmlns:r="http://schemas.openxmlformats.org/officeDocument/2006/relationships">
+  <p:cSld>
+    <p:spTree>
+      <p:nvGrpSpPr>
+        <p:cNvPr id="1" name=""/>
+        <p:cNvGrpSpPr/>
+        <p:nvPr/>
+      </p:nvGrpSpPr>
+      <p:grpSpPr/>
+      <p:sp>
+        <p:nvSpPr>
+          <p:cNvPr id="2" name="TextBox 1"/>
+          <p:cNvSpPr txBox="1"/>
+          <p:nvPr/>
+        </p:nvSpPr>
+        <p:spPr>
+          <a:xfrm>
+            <a:off x="457200" y="201168"/>
+            <a:ext cx="11247120" cy="777240"/>
+          </a:xfrm>
+          <a:prstGeom prst="rect">
+            <a:avLst/>
+          </a:prstGeom>
+          <a:noFill/>
+        </p:spPr>
+        <p:txBody>
+          <a:bodyPr wrap="none">
+            <a:spAutoFit/>
+          </a:bodyPr>
+          <a:lstStyle/>
+          <a:p>
+            <a:r>
+              <a:rPr sz="2800" b="1">
+                <a:solidFill>
+                  <a:srgbClr val="1B5EA8"/>
+                </a:solidFill>
+                <a:latin typeface="Meiryo"/>
+              </a:rPr>
+              <a:t>学習パイプライン — 2 フェーズ PPO と fast-dev の教訓</a:t>
+            </a:r>
+          </a:p>
+        </p:txBody>
+      </p:sp>
+      <p:sp>
+        <p:nvSpPr>
+          <p:cNvPr id="3" name="TextBox 2"/>
+          <p:cNvSpPr txBox="1"/>
+          <p:nvPr/>
+        </p:nvSpPr>
+        <p:spPr>
+          <a:xfrm>
+            <a:off x="548640" y="1280160"/>
+            <a:ext cx="11064240" cy="5394960"/>
+          </a:xfrm>
+          <a:prstGeom prst="rect">
+            <a:avLst/>
+          </a:prstGeom>
+          <a:noFill/>
+        </p:spPr>
+        <p:txBody>
+          <a:bodyPr wrap="square">
+            <a:spAutoFit/>
+          </a:bodyPr>
+          <a:lstStyle/>
+          <a:p>
+            <a:pPr>
+              <a:spcAft>
+                <a:spcPts val="500"/>
+              </a:spcAft>
+            </a:pPr>
+            <a:r>
+              <a:rPr sz="1700" b="1">
+                <a:solidFill>
+                  <a:srgbClr val="222222"/>
+                </a:solidFill>
+                <a:latin typeface="Meiryo"/>
+              </a:rPr>
+              <a:t>2 フェーズ PPO: ①NPC なしレーン追従 (120k〜1M) → ②NPC あり追い越し FT (lr 減)</a:t>
+            </a:r>
+          </a:p>
+          <a:p>
+            <a:pPr>
+              <a:spcAft>
+                <a:spcPts val="500"/>
+              </a:spcAft>
+            </a:pPr>
+            <a:r>
+              <a:rPr sz="1700" b="0">
+                <a:solidFill>
+                  <a:srgbClr val="222222"/>
+                </a:solidFill>
+                <a:latin typeface="Meiryo"/>
+              </a:rPr>
+              <a:t>カスタム CNN (10ch→512) + 初期スロットルバイアス +0.4 (前進探索)</a:t>
+            </a:r>
+          </a:p>
+          <a:p>
+            <a:pPr>
+              <a:spcAft>
+                <a:spcPts val="500"/>
+              </a:spcAft>
+            </a:pPr>
+            <a:r>
+              <a:rPr sz="1700" b="1">
+                <a:solidFill>
+                  <a:srgbClr val="222222"/>
+                </a:solidFill>
+                <a:latin typeface="Meiryo"/>
+              </a:rPr>
+              <a:t>fast-dev の進化: 65k @ ent 0.10 (曲がれない) → 120k @ ent 0.02 本番ハイパラ (37 周)</a:t>
+            </a:r>
+          </a:p>
+          <a:p>
+            <a:pPr lvl="1">
+              <a:spcAft>
+                <a:spcPts val="500"/>
+              </a:spcAft>
+            </a:pPr>
+            <a:r>
+              <a:rPr sz="1500" b="0">
+                <a:solidFill>
+                  <a:srgbClr val="B32D2D"/>
+                </a:solidFill>
+                <a:latin typeface="Meiryo"/>
+              </a:rPr>
+              <a:t>  教訓: 高エントロピーは [0,1] 圧縮報酬下で「ランダムでいる」ことが得になる</a:t>
+            </a:r>
+          </a:p>
+          <a:p>
+            <a:pPr>
+              <a:spcAft>
+                <a:spcPts val="500"/>
+              </a:spcAft>
+            </a:pPr>
+            <a:r>
+              <a:rPr sz="1700" b="0">
+                <a:solidFill>
+                  <a:srgbClr val="222222"/>
+                </a:solidFill>
+                <a:latin typeface="Meiryo"/>
+              </a:rPr>
+              <a:t>EvalCallback ベストモデル採用 (PPO は終盤退行あり) — best/phase1|phase2/</a:t>
+            </a:r>
+          </a:p>
+          <a:p>
+            <a:pPr>
+              <a:spcAft>
+                <a:spcPts val="500"/>
+              </a:spcAft>
+            </a:pPr>
+            <a:r>
+              <a:rPr sz="1700" b="0">
+                <a:solidFill>
+                  <a:srgbClr val="222222"/>
+                </a:solidFill>
+                <a:latin typeface="Meiryo"/>
+              </a:rPr>
+              <a:t>Reward yardstick: 1 周 ≈ 101, アイドル床 ≈ 0.53/step — eval 値を周回数として読む</a:t>
+            </a:r>
+          </a:p>
+        </p:txBody>
+      </p:sp>
+    </p:spTree>
+  </p:cSld>
+  <p:clrMapOvr>
+    <a:masterClrMapping/>
+  </p:clrMapOvr>
+</p:sld>
+</file>
+
+<file path=ppt/slides/slide16.xml><?xml version="1.0" encoding="utf-8"?>
+<p:sld xmlns:a="http://schemas.openxmlformats.org/drawingml/2006/main" xmlns:p="http://schemas.openxmlformats.org/presentationml/2006/main" xmlns:r="http://schemas.openxmlformats.org/officeDocument/2006/relationships">
+  <p:cSld>
+    <p:spTree>
+      <p:nvGrpSpPr>
+        <p:cNvPr id="1" name=""/>
+        <p:cNvGrpSpPr/>
+        <p:nvPr/>
+      </p:nvGrpSpPr>
+      <p:grpSpPr/>
+      <p:sp>
+        <p:nvSpPr>
+          <p:cNvPr id="2" name="TextBox 1"/>
+          <p:cNvSpPr txBox="1"/>
+          <p:nvPr/>
+        </p:nvSpPr>
+        <p:spPr>
+          <a:xfrm>
+            <a:off x="457200" y="201168"/>
+            <a:ext cx="11247120" cy="777240"/>
+          </a:xfrm>
+          <a:prstGeom prst="rect">
+            <a:avLst/>
+          </a:prstGeom>
+          <a:noFill/>
+        </p:spPr>
+        <p:txBody>
+          <a:bodyPr wrap="none">
+            <a:spAutoFit/>
+          </a:bodyPr>
+          <a:lstStyle/>
+          <a:p>
+            <a:r>
+              <a:rPr sz="2800" b="1">
+                <a:solidFill>
+                  <a:srgbClr val="1B5EA8"/>
+                </a:solidFill>
+                <a:latin typeface="Meiryo"/>
+              </a:rPr>
+              <a:t>PPO ハイパーパラメータの設計判断</a:t>
+            </a:r>
+          </a:p>
+        </p:txBody>
+      </p:sp>
+      <p:sp>
+        <p:nvSpPr>
+          <p:cNvPr id="3" name="TextBox 2"/>
+          <p:cNvSpPr txBox="1"/>
+          <p:nvPr/>
+        </p:nvSpPr>
+        <p:spPr>
+          <a:xfrm>
+            <a:off x="548640" y="1325880"/>
+            <a:ext cx="11064240" cy="5394960"/>
+          </a:xfrm>
+          <a:prstGeom prst="rect">
+            <a:avLst/>
+          </a:prstGeom>
+          <a:noFill/>
+        </p:spPr>
+        <p:txBody>
+          <a:bodyPr wrap="square">
+            <a:spAutoFit/>
+          </a:bodyPr>
+          <a:lstStyle/>
+          <a:p>
+            <a:pPr>
+              <a:spcAft>
+                <a:spcPts val="500"/>
+              </a:spcAft>
+            </a:pPr>
+            <a:r>
+              <a:rPr sz="1700" b="1">
+                <a:solidFill>
+                  <a:srgbClr val="222222"/>
+                </a:solidFill>
+                <a:latin typeface="Meiryo"/>
+              </a:rPr>
+              <a:t>オンポリシー選択: 環境を頻繁に改造 → 古い経験が即無効。sim が軽く wall-clock 優位</a:t>
+            </a:r>
+          </a:p>
+          <a:p>
+            <a:pPr>
+              <a:spcAft>
+                <a:spcPts val="500"/>
+              </a:spcAft>
+            </a:pPr>
+            <a:r>
+              <a:rPr sz="1700" b="0">
+                <a:solidFill>
+                  <a:srgbClr val="222222"/>
+                </a:solidFill>
+                <a:latin typeface="Meiryo"/>
+              </a:rPr>
+              <a:t>clip ε = 0.15 (&lt; 標準 0.2): 高分散アドバンテージ下での方策崩壊を抑制</a:t>
+            </a:r>
+          </a:p>
+          <a:p>
+            <a:pPr>
+              <a:spcAft>
+                <a:spcPts val="500"/>
+              </a:spcAft>
+            </a:pPr>
+            <a:r>
+              <a:rPr sz="1700" b="0">
+                <a:solidFill>
+                  <a:srgbClr val="222222"/>
+                </a:solidFill>
+                <a:latin typeface="Meiryo"/>
+              </a:rPr>
+              <a:t>γ 0.99 / GAE λ 0.98 / n_steps 512 × 8 env / minibatch 256 / 8–15 epochs / linear LR decay</a:t>
+            </a:r>
+          </a:p>
+          <a:p>
+            <a:pPr>
+              <a:spcAft>
+                <a:spcPts val="500"/>
+              </a:spcAft>
+            </a:pPr>
+            <a:r>
+              <a:rPr sz="1700" b="1">
+                <a:solidFill>
+                  <a:srgbClr val="222222"/>
+                </a:solidFill>
+                <a:latin typeface="Meiryo"/>
+              </a:rPr>
+              <a:t>ent_coef は報酬スケールと結合: [0,1] 圧縮下で 0.10 → σ≈1.6 の実質ランダム方策 (実測)</a:t>
+            </a:r>
+          </a:p>
+          <a:p>
+            <a:pPr>
+              <a:spcAft>
+                <a:spcPts val="500"/>
+              </a:spcAft>
+            </a:pPr>
+            <a:r>
+              <a:rPr sz="1700" b="0">
+                <a:solidFill>
+                  <a:srgbClr val="222222"/>
+                </a:solidFill>
+                <a:latin typeface="Meiryo"/>
+              </a:rPr>
+              <a:t>直交初期化 + throttle バイアス +0.4: 探索の対称性を意図的に破り前進を先に発見させる</a:t>
+            </a:r>
+          </a:p>
+          <a:p>
+            <a:pPr>
+              <a:spcAft>
+                <a:spcPts val="500"/>
+              </a:spcAft>
+            </a:pPr>
+            <a:r>
+              <a:rPr sz="1700" b="0">
+                <a:solidFill>
+                  <a:srgbClr val="222222"/>
+                </a:solidFill>
+                <a:latin typeface="Meiryo"/>
+              </a:rPr>
+              <a:t>EvalCallback (決定論的評価) でモデル選択 — 方策エントロピー残存下の stochastic 評価は過小評価</a:t>
+            </a:r>
+          </a:p>
+        </p:txBody>
+      </p:sp>
+    </p:spTree>
+  </p:cSld>
+  <p:clrMapOvr>
+    <a:masterClrMapping/>
+  </p:clrMapOvr>
+</p:sld>
+</file>
+
+<file path=ppt/slides/slide17.xml><?xml version="1.0" encoding="utf-8"?>
+<p:sld xmlns:a="http://schemas.openxmlformats.org/drawingml/2006/main" xmlns:p="http://schemas.openxmlformats.org/presentationml/2006/main" xmlns:r="http://schemas.openxmlformats.org/officeDocument/2006/relationships">
+  <p:cSld>
+    <p:spTree>
+      <p:nvGrpSpPr>
+        <p:cNvPr id="1" name=""/>
+        <p:cNvGrpSpPr/>
+        <p:nvPr/>
+      </p:nvGrpSpPr>
+      <p:grpSpPr/>
+      <p:sp>
+        <p:nvSpPr>
+          <p:cNvPr id="2" name="TextBox 1"/>
+          <p:cNvSpPr txBox="1"/>
+          <p:nvPr/>
+        </p:nvSpPr>
+        <p:spPr>
+          <a:xfrm>
+            <a:off x="457200" y="201168"/>
+            <a:ext cx="11247120" cy="777240"/>
+          </a:xfrm>
+          <a:prstGeom prst="rect">
+            <a:avLst/>
+          </a:prstGeom>
+          <a:noFill/>
+        </p:spPr>
+        <p:txBody>
+          <a:bodyPr wrap="none">
+            <a:spAutoFit/>
+          </a:bodyPr>
+          <a:lstStyle/>
+          <a:p>
+            <a:r>
+              <a:rPr sz="2800" b="1">
+                <a:solidFill>
+                  <a:srgbClr val="1B5EA8"/>
+                </a:solidFill>
+                <a:latin typeface="Meiryo"/>
+              </a:rPr>
+              <a:t>実ゲームとのギャップを埋める C# 支援クラス</a:t>
+            </a:r>
+          </a:p>
+        </p:txBody>
+      </p:sp>
+      <p:pic>
+        <p:nvPicPr>
+          <p:cNvPr id="3" name="Picture 2" descr="smoothing_effect.png"/>
+          <p:cNvPicPr>
+            <a:picLocks noChangeAspect="1"/>
+          </p:cNvPicPr>
+          <p:nvPr/>
+        </p:nvPicPr>
+        <p:blipFill>
+          <a:blip r:embed="rId3"/>
+          <a:stretch>
+            <a:fillRect/>
+          </a:stretch>
+        </p:blipFill>
+        <p:spPr>
+          <a:xfrm>
+            <a:off x="640080" y="1234440"/>
+            <a:ext cx="6035040" cy="2084832"/>
+          </a:xfrm>
+          <a:prstGeom prst="rect">
+            <a:avLst/>
+          </a:prstGeom>
+        </p:spPr>
+      </p:pic>
+      <p:sp>
+        <p:nvSpPr>
+          <p:cNvPr id="4" name="TextBox 3"/>
+          <p:cNvSpPr txBox="1"/>
+          <p:nvPr/>
+        </p:nvSpPr>
+        <p:spPr>
+          <a:xfrm>
+            <a:off x="6858000" y="1371600"/>
+            <a:ext cx="4937760" cy="5394960"/>
+          </a:xfrm>
+          <a:prstGeom prst="rect">
+            <a:avLst/>
+          </a:prstGeom>
+          <a:noFill/>
+        </p:spPr>
+        <p:txBody>
+          <a:bodyPr wrap="square">
+            <a:spAutoFit/>
+          </a:bodyPr>
+          <a:lstStyle/>
+          <a:p>
+            <a:pPr>
+              <a:spcAft>
+                <a:spcPts val="500"/>
+              </a:spcAft>
+            </a:pPr>
+            <a:r>
+              <a:rPr sz="1400" b="1">
+                <a:solidFill>
+                  <a:srgbClr val="222222"/>
+                </a:solidFill>
+                <a:latin typeface="Meiryo"/>
+              </a:rPr>
+              <a:t>SteeringSmoother: EMA α0.6 — 蛇行 34→12 回/100步</a:t>
+            </a:r>
+          </a:p>
+          <a:p>
+            <a:pPr>
+              <a:spcAft>
+                <a:spcPts val="500"/>
+              </a:spcAft>
+            </a:pPr>
+            <a:r>
+              <a:rPr sz="1400" b="1">
+                <a:solidFill>
+                  <a:srgbClr val="222222"/>
+                </a:solidFill>
+                <a:latin typeface="Meiryo"/>
+              </a:rPr>
+              <a:t>CorneringLimiter: ステア速度制限 + 比例ブレーキ</a:t>
+            </a:r>
+          </a:p>
+          <a:p>
+            <a:pPr lvl="1">
+              <a:spcAft>
+                <a:spcPts val="500"/>
+              </a:spcAft>
+            </a:pPr>
+            <a:r>
+              <a:rPr sz="1200" b="0">
+                <a:solidFill>
+                  <a:srgbClr val="595959"/>
+                </a:solidFill>
+                <a:latin typeface="Meiryo"/>
+              </a:rPr>
+              <a:t>  速度床 5 m/s — 減速はしても停止はしない</a:t>
+            </a:r>
+          </a:p>
+          <a:p>
+            <a:pPr>
+              <a:spcAft>
+                <a:spcPts val="500"/>
+              </a:spcAft>
+            </a:pPr>
+            <a:r>
+              <a:rPr sz="1400" b="1">
+                <a:solidFill>
+                  <a:srgbClr val="222222"/>
+                </a:solidFill>
+                <a:latin typeface="Meiryo"/>
+              </a:rPr>
+              <a:t>StuckRecovery: 移動距離でスタック検出→バック指示</a:t>
+            </a:r>
+          </a:p>
+          <a:p>
+            <a:pPr lvl="1">
+              <a:spcAft>
+                <a:spcPts val="500"/>
+              </a:spcAft>
+            </a:pPr>
+            <a:r>
+              <a:rPr sz="1200" b="0">
+                <a:solidFill>
+                  <a:srgbClr val="595959"/>
+                </a:solidFill>
+                <a:latin typeface="Meiryo"/>
+              </a:rPr>
+              <a:t>  発進の低速と壁刺さりを距離で区別 (レーン不要)</a:t>
+            </a:r>
+          </a:p>
+          <a:p>
+            <a:pPr>
+              <a:spcAft>
+                <a:spcPts val="500"/>
+              </a:spcAft>
+            </a:pPr>
+            <a:r>
+              <a:rPr sz="1400" b="1">
+                <a:solidFill>
+                  <a:srgbClr val="222222"/>
+                </a:solidFill>
+                <a:latin typeface="Meiryo"/>
+              </a:rPr>
+              <a:t>CarController: 学習と同一物理 (Python と 1e-7 一致)</a:t>
+            </a:r>
+          </a:p>
+        </p:txBody>
+      </p:sp>
+    </p:spTree>
+  </p:cSld>
+  <p:clrMapOvr>
+    <a:masterClrMapping/>
+  </p:clrMapOvr>
+</p:sld>
+</file>
+
+<file path=ppt/slides/slide18.xml><?xml version="1.0" encoding="utf-8"?>
+<p:sld xmlns:a="http://schemas.openxmlformats.org/drawingml/2006/main" xmlns:p="http://schemas.openxmlformats.org/presentationml/2006/main" xmlns:r="http://schemas.openxmlformats.org/officeDocument/2006/relationships">
+  <p:cSld>
+    <p:spTree>
+      <p:nvGrpSpPr>
+        <p:cNvPr id="1" name=""/>
+        <p:cNvGrpSpPr/>
+        <p:nvPr/>
+      </p:nvGrpSpPr>
+      <p:grpSpPr/>
+      <p:sp>
+        <p:nvSpPr>
+          <p:cNvPr id="2" name="TextBox 1"/>
+          <p:cNvSpPr txBox="1"/>
+          <p:nvPr/>
+        </p:nvSpPr>
+        <p:spPr>
+          <a:xfrm>
+            <a:off x="457200" y="201168"/>
+            <a:ext cx="11247120" cy="777240"/>
+          </a:xfrm>
+          <a:prstGeom prst="rect">
+            <a:avLst/>
+          </a:prstGeom>
+          <a:noFill/>
+        </p:spPr>
+        <p:txBody>
+          <a:bodyPr wrap="none">
+            <a:spAutoFit/>
+          </a:bodyPr>
+          <a:lstStyle/>
+          <a:p>
+            <a:r>
+              <a:rPr sz="2800" b="1">
+                <a:solidFill>
+                  <a:srgbClr val="1B5EA8"/>
+                </a:solidFill>
+                <a:latin typeface="Meiryo"/>
+              </a:rPr>
+              <a:t>汎化・sim-to-real の設計 — 何が転移を担保するか</a:t>
+            </a:r>
+          </a:p>
+        </p:txBody>
+      </p:sp>
+      <p:sp>
+        <p:nvSpPr>
+          <p:cNvPr id="3" name="TextBox 2"/>
+          <p:cNvSpPr txBox="1"/>
+          <p:nvPr/>
+        </p:nvSpPr>
+        <p:spPr>
+          <a:xfrm>
+            <a:off x="548640" y="1325880"/>
+            <a:ext cx="11064240" cy="5394960"/>
+          </a:xfrm>
+          <a:prstGeom prst="rect">
+            <a:avLst/>
+          </a:prstGeom>
+          <a:noFill/>
+        </p:spPr>
+        <p:txBody>
+          <a:bodyPr wrap="square">
+            <a:spAutoFit/>
+          </a:bodyPr>
+          <a:lstStyle/>
+          <a:p>
+            <a:pPr>
+              <a:spcAft>
+                <a:spcPts val="500"/>
+              </a:spcAft>
+            </a:pPr>
+            <a:r>
+              <a:rPr sz="1700" b="1">
+                <a:solidFill>
+                  <a:srgbClr val="222222"/>
+                </a:solidFill>
+                <a:latin typeface="Meiryo"/>
+              </a:rPr>
+              <a:t>トラックランダム化 = ドメインランダマイゼーション — 暗記解を分布レベルで排除</a:t>
+            </a:r>
+          </a:p>
+          <a:p>
+            <a:pPr>
+              <a:spcAft>
+                <a:spcPts val="500"/>
+              </a:spcAft>
+            </a:pPr>
+            <a:r>
+              <a:rPr sz="1700" b="1">
+                <a:solidFill>
+                  <a:srgbClr val="222222"/>
+                </a:solidFill>
+                <a:latin typeface="Meiryo"/>
+              </a:rPr>
+              <a:t>より本質: エゴセントリック観測 + 自己座標なし → 平行移動・回転不変な方策クラスに制約</a:t>
+            </a:r>
+          </a:p>
+          <a:p>
+            <a:pPr>
+              <a:spcAft>
+                <a:spcPts val="500"/>
+              </a:spcAft>
+            </a:pPr>
+            <a:r>
+              <a:rPr sz="1700" b="0">
+                <a:solidFill>
+                  <a:srgbClr val="222222"/>
+                </a:solidFill>
+                <a:latin typeface="Meiryo"/>
+              </a:rPr>
+              <a:t>ゼロショット転移 (fast→他4コース) はこの不変性の帰結 — 検証済み</a:t>
+            </a:r>
+          </a:p>
+          <a:p>
+            <a:pPr>
+              <a:spcAft>
+                <a:spcPts val="500"/>
+              </a:spcAft>
+            </a:pPr>
+            <a:r>
+              <a:rPr sz="1700" b="1">
+                <a:solidFill>
+                  <a:srgbClr val="222222"/>
+                </a:solidFill>
+                <a:latin typeface="Meiryo"/>
+              </a:rPr>
+              <a:t>sim-to-real 層 1: 観測ビット一致・物理 1e-7 一致の移植でギャップ自体を消す</a:t>
+            </a:r>
+          </a:p>
+          <a:p>
+            <a:pPr>
+              <a:spcAft>
+                <a:spcPts val="500"/>
+              </a:spcAft>
+            </a:pPr>
+            <a:r>
+              <a:rPr sz="1700" b="0">
+                <a:solidFill>
+                  <a:srgbClr val="222222"/>
+                </a:solidFill>
+                <a:latin typeface="Meiryo"/>
+              </a:rPr>
+              <a:t>層 2: 残差はデプロイ側アクションフィルタで吸収 (平滑化/レート制限/旋回ブレーキ)</a:t>
+            </a:r>
+          </a:p>
+          <a:p>
+            <a:pPr lvl="1">
+              <a:spcAft>
+                <a:spcPts val="500"/>
+              </a:spcAft>
+            </a:pPr>
+            <a:r>
+              <a:rPr sz="1500" b="0">
+                <a:solidFill>
+                  <a:srgbClr val="595959"/>
+                </a:solidFill>
+                <a:latin typeface="Meiryo"/>
+              </a:rPr>
+              <a:t>  フィルタは閉ループを変える → sim 内で同フィルタ通し評価し周回数維持を確認</a:t>
+            </a:r>
+          </a:p>
+        </p:txBody>
+      </p:sp>
+    </p:spTree>
+  </p:cSld>
+  <p:clrMapOvr>
+    <a:masterClrMapping/>
+  </p:clrMapOvr>
+</p:sld>
+</file>
+
+<file path=ppt/slides/slide19.xml><?xml version="1.0" encoding="utf-8"?>
+<p:sld xmlns:a="http://schemas.openxmlformats.org/drawingml/2006/main" xmlns:p="http://schemas.openxmlformats.org/presentationml/2006/main" xmlns:r="http://schemas.openxmlformats.org/officeDocument/2006/relationships">
+  <p:cSld>
+    <p:spTree>
+      <p:nvGrpSpPr>
+        <p:cNvPr id="1" name=""/>
+        <p:cNvGrpSpPr/>
+        <p:nvPr/>
+      </p:nvGrpSpPr>
+      <p:grpSpPr/>
+      <p:sp>
+        <p:nvSpPr>
+          <p:cNvPr id="2" name="TextBox 1"/>
+          <p:cNvSpPr txBox="1"/>
+          <p:nvPr/>
+        </p:nvSpPr>
+        <p:spPr>
+          <a:xfrm>
+            <a:off x="457200" y="201168"/>
+            <a:ext cx="11247120" cy="777240"/>
+          </a:xfrm>
+          <a:prstGeom prst="rect">
+            <a:avLst/>
+          </a:prstGeom>
+          <a:noFill/>
+        </p:spPr>
+        <p:txBody>
+          <a:bodyPr wrap="none">
+            <a:spAutoFit/>
+          </a:bodyPr>
+          <a:lstStyle/>
+          <a:p>
+            <a:r>
+              <a:rPr sz="2800" b="1">
+                <a:solidFill>
+                  <a:srgbClr val="1B5EA8"/>
+                </a:solidFill>
+                <a:latin typeface="Meiryo"/>
+              </a:rPr>
+              <a:t>セットアップとノートブックの使い方</a:t>
+            </a:r>
+          </a:p>
+        </p:txBody>
+      </p:sp>
+      <p:sp>
+        <p:nvSpPr>
+          <p:cNvPr id="3" name="TextBox 2"/>
+          <p:cNvSpPr txBox="1"/>
+          <p:nvPr/>
+        </p:nvSpPr>
+        <p:spPr>
+          <a:xfrm>
+            <a:off x="548640" y="1325880"/>
+            <a:ext cx="11064240" cy="5394960"/>
+          </a:xfrm>
+          <a:prstGeom prst="rect">
+            <a:avLst/>
+          </a:prstGeom>
+          <a:noFill/>
+        </p:spPr>
+        <p:txBody>
+          <a:bodyPr wrap="square">
+            <a:spAutoFit/>
+          </a:bodyPr>
+          <a:lstStyle/>
+          <a:p>
+            <a:pPr>
+              <a:spcAft>
+                <a:spcPts val="500"/>
+              </a:spcAft>
+            </a:pPr>
+            <a:r>
+              <a:rPr sz="1700" b="1">
+                <a:solidFill>
+                  <a:srgbClr val="222222"/>
+                </a:solidFill>
+                <a:latin typeface="Meiryo"/>
+              </a:rPr>
+              <a:t>pip install "highway-env&gt;=1.8" "stable-baselines3[extra]&gt;=2.0" gymnasium torch tensorboard moviepy onnx onnxruntime</a:t>
+            </a:r>
+          </a:p>
+          <a:p>
+            <a:pPr lvl="1">
+              <a:spcAft>
+                <a:spcPts val="500"/>
+              </a:spcAft>
+            </a:pPr>
+            <a:r>
+              <a:rPr sz="1500" b="0">
+                <a:solidFill>
+                  <a:srgbClr val="B32D2D"/>
+                </a:solidFill>
+                <a:latin typeface="Meiryo"/>
+              </a:rPr>
+              <a:t>(リポジトリの requirements.txt は旧スタック用 — 使わない)</a:t>
+            </a:r>
+          </a:p>
+          <a:p>
+            <a:pPr>
+              <a:spcAft>
+                <a:spcPts val="500"/>
+              </a:spcAft>
+            </a:pPr>
+            <a:r>
+              <a:rPr sz="1700" b="0">
+                <a:solidFill>
+                  <a:srgbClr val="222222"/>
+                </a:solidFill>
+                <a:latin typeface="Meiryo"/>
+              </a:rPr>
+              <a:t>task2_laning_overtaking_sb3_ppo.ipynb — fast トラック学習</a:t>
+            </a:r>
+          </a:p>
+          <a:p>
+            <a:pPr>
+              <a:spcAft>
+                <a:spcPts val="500"/>
+              </a:spcAft>
+            </a:pPr>
+            <a:r>
+              <a:rPr sz="1700" b="0">
+                <a:solidFill>
+                  <a:srgbClr val="222222"/>
+                </a:solidFill>
+                <a:latin typeface="Meiryo"/>
+              </a:rPr>
+              <a:t>task3_generalization_sb3_ppo.ipynb — random 学習 + トラック別レポート + 5 連動画</a:t>
+            </a:r>
+          </a:p>
+          <a:p>
+            <a:pPr>
+              <a:spcAft>
+                <a:spcPts val="500"/>
+              </a:spcAft>
+            </a:pPr>
+            <a:r>
+              <a:rPr sz="1700" b="1">
+                <a:solidFill>
+                  <a:srgbClr val="222222"/>
+                </a:solidFill>
+                <a:latin typeface="Meiryo"/>
+              </a:rPr>
+              <a:t>FAST_DEV_RUN=True: 12-15 万ステップ (周回到達を実測保証) / False: 本番 100 万+</a:t>
+            </a:r>
+          </a:p>
+          <a:p>
+            <a:pPr>
+              <a:spcAft>
+                <a:spcPts val="500"/>
+              </a:spcAft>
+            </a:pPr>
+            <a:r>
+              <a:rPr sz="1700" b="1">
+                <a:solidFill>
+                  <a:srgbClr val="222222"/>
+                </a:solidFill>
+                <a:latin typeface="Meiryo"/>
+              </a:rPr>
+              <a:t>Presentation Media セル: 学習曲線・軌跡・5 トラック動画を生成し VIDEO_DIR に保存</a:t>
+            </a:r>
+          </a:p>
+          <a:p>
+            <a:pPr>
+              <a:spcAft>
+                <a:spcPts val="500"/>
+              </a:spcAft>
+            </a:pPr>
+            <a:r>
+              <a:rPr sz="1700" b="0">
+                <a:solidFill>
+                  <a:srgbClr val="222222"/>
+                </a:solidFill>
+                <a:latin typeface="Meiryo"/>
+              </a:rPr>
+              <a:t>検証: cd re_engine/verify &amp;&amp; dotnet run -- ..  → ALL SCENARIOS MATCH</a:t>
             </a:r>
           </a:p>
         </p:txBody>
@@ -4658,8 +6657,8 @@
         </p:nvSpPr>
         <p:spPr>
           <a:xfrm>
-            <a:off x="457200" y="228600"/>
-            <a:ext cx="11247120" cy="822960"/>
+            <a:off x="457200" y="201168"/>
+            <a:ext cx="11247120" cy="777240"/>
           </a:xfrm>
           <a:prstGeom prst="rect">
             <a:avLst/>
@@ -4673,27 +6672,124 @@
           <a:lstStyle/>
           <a:p>
             <a:r>
-              <a:rPr sz="3000" b="1">
+              <a:rPr sz="2800" b="1">
                 <a:solidFill>
                   <a:srgbClr val="1B5EA8"/>
                 </a:solidFill>
                 <a:latin typeface="Meiryo"/>
               </a:rPr>
-              <a:t>結果ハイライト</a:t>
-            </a:r>
-          </a:p>
-        </p:txBody>
-      </p:sp>
-      <p:sp>
-        <p:nvSpPr>
-          <p:cNvPr id="3" name="TextBox 2"/>
+              <a:t>まず結果から — 1 つの方策で 5 トラック同時走行</a:t>
+            </a:r>
+          </a:p>
+        </p:txBody>
+      </p:sp>
+      <p:pic>
+        <p:nvPicPr>
+          <p:cNvPr id="3" name="Picture 2" descr="gen_tracks_grid.png"/>
+          <p:cNvPicPr>
+            <a:picLocks noChangeAspect="1"/>
+          </p:cNvPicPr>
+          <p:nvPr/>
+        </p:nvPicPr>
+        <p:blipFill>
+          <a:blip r:embed="rId3"/>
+          <a:stretch>
+            <a:fillRect/>
+          </a:stretch>
+        </p:blipFill>
+        <p:spPr>
+          <a:xfrm>
+            <a:off x="411480" y="1143000"/>
+            <a:ext cx="11338560" cy="2789689"/>
+          </a:xfrm>
+          <a:prstGeom prst="rect">
+            <a:avLst/>
+          </a:prstGeom>
+        </p:spPr>
+      </p:pic>
+      <p:pic>
+        <p:nvPicPr>
+          <p:cNvPr id="4" name="gen_all_tracks.mp4">
+            <a:hlinkClick r:id="" action="ppaction://media"/>
+          </p:cNvPr>
+          <p:cNvPicPr>
+            <a:picLocks noChangeAspect="1"/>
+          </p:cNvPicPr>
+          <p:nvPr>
+            <a:videoFile r:link="rId5"/>
+            <p:extLst>
+              <p:ext uri="{DAA4B4D4-6D71-4841-9C94-3DE7FCFB9230}">
+                <p14:media xmlns:p14="http://schemas.microsoft.com/office/powerpoint/2010/main" r:embed="rId4"/>
+              </p:ext>
+            </p:extLst>
+          </p:nvPr>
+        </p:nvPicPr>
+        <p:blipFill>
+          <a:blip r:embed="rId3"/>
+          <a:stretch>
+            <a:fillRect/>
+          </a:stretch>
+        </p:blipFill>
+        <p:spPr>
+          <a:xfrm>
+            <a:off x="2651760" y="3977639"/>
+            <a:ext cx="6858000" cy="2057400"/>
+          </a:xfrm>
+          <a:prstGeom prst="rect">
+            <a:avLst/>
+          </a:prstGeom>
+        </p:spPr>
+      </p:pic>
+    </p:spTree>
+  </p:cSld>
+  <p:clrMapOvr>
+    <a:masterClrMapping/>
+  </p:clrMapOvr>
+  <p:timing>
+    <p:tnLst>
+      <p:par>
+        <p:cTn id="1" dur="indefinite" restart="never" nodeType="tmRoot">
+          <p:childTnLst>
+            <p:video>
+              <p:cMediaNode vol="80000">
+                <p:cTn id="2" fill="hold" display="0">
+                  <p:stCondLst>
+                    <p:cond delay="indefinite"/>
+                  </p:stCondLst>
+                </p:cTn>
+                <p:tgtEl>
+                  <p:spTgt spid="4"/>
+                </p:tgtEl>
+              </p:cMediaNode>
+            </p:video>
+          </p:childTnLst>
+        </p:cTn>
+      </p:par>
+    </p:tnLst>
+  </p:timing>
+</p:sld>
+</file>
+
+<file path=ppt/slides/slide20.xml><?xml version="1.0" encoding="utf-8"?>
+<p:sld xmlns:a="http://schemas.openxmlformats.org/drawingml/2006/main" xmlns:p="http://schemas.openxmlformats.org/presentationml/2006/main" xmlns:r="http://schemas.openxmlformats.org/officeDocument/2006/relationships">
+  <p:cSld>
+    <p:spTree>
+      <p:nvGrpSpPr>
+        <p:cNvPr id="1" name=""/>
+        <p:cNvGrpSpPr/>
+        <p:nvPr/>
+      </p:nvGrpSpPr>
+      <p:grpSpPr/>
+      <p:sp>
+        <p:nvSpPr>
+          <p:cNvPr id="2" name="TextBox 1"/>
           <p:cNvSpPr txBox="1"/>
           <p:nvPr/>
         </p:nvSpPr>
         <p:spPr>
           <a:xfrm>
-            <a:off x="548640" y="1371600"/>
-            <a:ext cx="11064240" cy="5120640"/>
+            <a:off x="457200" y="201168"/>
+            <a:ext cx="11247120" cy="777240"/>
           </a:xfrm>
           <a:prstGeom prst="rect">
             <a:avLst/>
@@ -4701,6 +6797,40 @@
           <a:noFill/>
         </p:spPr>
         <p:txBody>
+          <a:bodyPr wrap="none">
+            <a:spAutoFit/>
+          </a:bodyPr>
+          <a:lstStyle/>
+          <a:p>
+            <a:r>
+              <a:rPr sz="2800" b="1">
+                <a:solidFill>
+                  <a:srgbClr val="1B5EA8"/>
+                </a:solidFill>
+                <a:latin typeface="Meiryo"/>
+              </a:rPr>
+              <a:t>エクスポートツールと ONNX の注意点</a:t>
+            </a:r>
+          </a:p>
+        </p:txBody>
+      </p:sp>
+      <p:sp>
+        <p:nvSpPr>
+          <p:cNvPr id="3" name="TextBox 2"/>
+          <p:cNvSpPr txBox="1"/>
+          <p:nvPr/>
+        </p:nvSpPr>
+        <p:spPr>
+          <a:xfrm>
+            <a:off x="548640" y="1325880"/>
+            <a:ext cx="11064240" cy="5394960"/>
+          </a:xfrm>
+          <a:prstGeom prst="rect">
+            <a:avLst/>
+          </a:prstGeom>
+          <a:noFill/>
+        </p:spPr>
+        <p:txBody>
           <a:bodyPr wrap="square">
             <a:spAutoFit/>
           </a:bodyPr>
@@ -4708,97 +6838,284 @@
           <a:p>
             <a:pPr>
               <a:spcAft>
-                <a:spcPts val="600"/>
+                <a:spcPts val="500"/>
               </a:spcAft>
             </a:pPr>
             <a:r>
-              <a:rPr sz="2000" b="1">
+              <a:rPr sz="1700" b="1">
                 <a:solidFill>
                   <a:srgbClr val="222222"/>
                 </a:solidFill>
                 <a:latin typeface="Meiryo"/>
               </a:rPr>
-              <a:t>37 周 / 800 秒エピソード・16 m/s (制限速度) で無衝突 — fast トラック</a:t>
+              <a:t>python export_onnx.py &lt;model.zip&gt; -m 3   # エンジン用 NHWC [1,12,12,10] (推奨)</a:t>
+            </a:r>
+          </a:p>
+          <a:p>
+            <a:pPr lvl="1">
+              <a:spcAft>
+                <a:spcPts val="500"/>
+              </a:spcAft>
+            </a:pPr>
+            <a:r>
+              <a:rPr sz="1500" b="0">
+                <a:solidFill>
+                  <a:srgbClr val="595959"/>
+                </a:solidFill>
+                <a:latin typeface="Meiryo"/>
+              </a:rPr>
+              <a:t>  -m 1: full policy / 2: actor CHW / 3: actor NHWC / 0: 全部 — 各エクスポートは torch と自動照合</a:t>
             </a:r>
           </a:p>
           <a:p>
             <a:pPr>
               <a:spcAft>
-                <a:spcPts val="600"/>
+                <a:spcPts val="500"/>
               </a:spcAft>
             </a:pPr>
             <a:r>
-              <a:rPr sz="2000" b="0">
+              <a:rPr sz="1700" b="0">
                 <a:solidFill>
                   <a:srgbClr val="222222"/>
                 </a:solidFill>
                 <a:latin typeface="Meiryo"/>
               </a:rPr>
-              <a:t>周回能力は 3〜6 万ステップで獲得 (実測) — fast-dev (12万) でも確実に周回</a:t>
+              <a:t>python re_engine/convert_onnx_nhwc.py &lt;actor.onnx&gt;   # 既存 CHW を NHWC 化</a:t>
             </a:r>
           </a:p>
           <a:p>
             <a:pPr>
               <a:spcAft>
-                <a:spcPts val="600"/>
+                <a:spcPts val="500"/>
               </a:spcAft>
             </a:pPr>
             <a:r>
-              <a:rPr sz="2000" b="1">
+              <a:rPr sz="1700" b="0">
                 <a:solidFill>
                   <a:srgbClr val="222222"/>
                 </a:solidFill>
                 <a:latin typeface="Meiryo"/>
               </a:rPr>
-              <a:t>汎化モデル: 1 つの方策で 5 トラックすべてを 2 分間ノーミス走行</a:t>
+              <a:t>python re_engine/export_track_json.py   # トラック/観測変更後に参照データ再生成</a:t>
             </a:r>
           </a:p>
           <a:p>
             <a:pPr>
               <a:spcAft>
-                <a:spcPts val="600"/>
+                <a:spcPts val="500"/>
               </a:spcAft>
             </a:pPr>
             <a:r>
-              <a:rPr sz="2000" b="0">
-                <a:solidFill>
-                  <a:srgbClr val="222222"/>
-                </a:solidFill>
-                <a:latin typeface="Meiryo"/>
-              </a:rPr>
-              <a:t>ゼロショット転移: fast のみで学習した方策が他 4 トラックも制限速度で走行</a:t>
+              <a:rPr sz="1700" b="1">
+                <a:solidFill>
+                  <a:srgbClr val="B32D2D"/>
+                </a:solidFill>
+                <a:latin typeface="Meiryo"/>
+              </a:rPr>
+              <a:t>症状で覚える: 出力がほぼ一定 (throttle≈0.4, steer≈0.2) = レイアウト不一致</a:t>
             </a:r>
           </a:p>
           <a:p>
             <a:pPr>
               <a:spcAft>
-                <a:spcPts val="600"/>
+                <a:spcPts val="500"/>
               </a:spcAft>
             </a:pPr>
             <a:r>
-              <a:rPr sz="2000" b="1">
+              <a:rPr sz="1700" b="0">
                 <a:solidFill>
                   <a:srgbClr val="222222"/>
                 </a:solidFill>
                 <a:latin typeface="Meiryo"/>
               </a:rPr>
-              <a:t>C# 観測ポート: Python とビット一致 (maxDiff = 0.0) を検証ハーネスで保証</a:t>
+              <a:t>定数同期: accel/steer レンジ・5 Hz・グリッド設定は C# に複製 — 変更時は 4 点セット</a:t>
             </a:r>
           </a:p>
           <a:p>
             <a:pPr>
               <a:spcAft>
-                <a:spcPts val="600"/>
+                <a:spcPts val="500"/>
               </a:spcAft>
             </a:pPr>
             <a:r>
-              <a:rPr sz="2000" b="0">
+              <a:rPr sz="1700" b="0">
                 <a:solidFill>
                   <a:srgbClr val="222222"/>
                 </a:solidFill>
                 <a:latin typeface="Meiryo"/>
               </a:rPr>
-              <a:t>ONNX 3 種 (full / actor CHW / actor NHWC) をエクスポート、エンジンは NHWC を使用</a:t>
+              <a:t>単位は全て m/s・m・rad。km/h の Vector3 は KphToMs で変換 (kph 直入れは無警告で劣化)</a:t>
+            </a:r>
+          </a:p>
+        </p:txBody>
+      </p:sp>
+    </p:spTree>
+  </p:cSld>
+  <p:clrMapOvr>
+    <a:masterClrMapping/>
+  </p:clrMapOvr>
+</p:sld>
+</file>
+
+<file path=ppt/slides/slide21.xml><?xml version="1.0" encoding="utf-8"?>
+<p:sld xmlns:a="http://schemas.openxmlformats.org/drawingml/2006/main" xmlns:p="http://schemas.openxmlformats.org/presentationml/2006/main" xmlns:r="http://schemas.openxmlformats.org/officeDocument/2006/relationships">
+  <p:cSld>
+    <p:spTree>
+      <p:nvGrpSpPr>
+        <p:cNvPr id="1" name=""/>
+        <p:cNvGrpSpPr/>
+        <p:nvPr/>
+      </p:nvGrpSpPr>
+      <p:grpSpPr/>
+      <p:sp>
+        <p:nvSpPr>
+          <p:cNvPr id="2" name="TextBox 1"/>
+          <p:cNvSpPr txBox="1"/>
+          <p:nvPr/>
+        </p:nvSpPr>
+        <p:spPr>
+          <a:xfrm>
+            <a:off x="457200" y="201168"/>
+            <a:ext cx="11247120" cy="777240"/>
+          </a:xfrm>
+          <a:prstGeom prst="rect">
+            <a:avLst/>
+          </a:prstGeom>
+          <a:noFill/>
+        </p:spPr>
+        <p:txBody>
+          <a:bodyPr wrap="none">
+            <a:spAutoFit/>
+          </a:bodyPr>
+          <a:lstStyle/>
+          <a:p>
+            <a:r>
+              <a:rPr sz="2800" b="1">
+                <a:solidFill>
+                  <a:srgbClr val="1B5EA8"/>
+                </a:solidFill>
+                <a:latin typeface="Meiryo"/>
+              </a:rPr>
+              <a:t>まとめ — 環境設計こそが学習を決める</a:t>
+            </a:r>
+          </a:p>
+        </p:txBody>
+      </p:sp>
+      <p:sp>
+        <p:nvSpPr>
+          <p:cNvPr id="3" name="TextBox 2"/>
+          <p:cNvSpPr txBox="1"/>
+          <p:nvPr/>
+        </p:nvSpPr>
+        <p:spPr>
+          <a:xfrm>
+            <a:off x="548640" y="1417320"/>
+            <a:ext cx="11064240" cy="5394960"/>
+          </a:xfrm>
+          <a:prstGeom prst="rect">
+            <a:avLst/>
+          </a:prstGeom>
+          <a:noFill/>
+        </p:spPr>
+        <p:txBody>
+          <a:bodyPr wrap="square">
+            <a:spAutoFit/>
+          </a:bodyPr>
+          <a:lstStyle/>
+          <a:p>
+            <a:pPr>
+              <a:spcAft>
+                <a:spcPts val="500"/>
+              </a:spcAft>
+            </a:pPr>
+            <a:r>
+              <a:rPr sz="1900" b="1">
+                <a:solidFill>
+                  <a:srgbClr val="222222"/>
+                </a:solidFill>
+                <a:latin typeface="Meiryo"/>
+              </a:rPr>
+              <a:t>デフォルト racetrack → ゲーム環境へ: 行動・壁・報酬・観測・トラックを段階的に進化</a:t>
+            </a:r>
+          </a:p>
+          <a:p>
+            <a:pPr>
+              <a:spcAft>
+                <a:spcPts val="500"/>
+              </a:spcAft>
+            </a:pPr>
+            <a:r>
+              <a:rPr sz="1900" b="1">
+                <a:solidFill>
+                  <a:srgbClr val="222222"/>
+                </a:solidFill>
+                <a:latin typeface="Meiryo"/>
+              </a:rPr>
+              <a:t>抜け道 (ショートカット / wall-riding / 壁這い) を報酬の経済設計で排除 → 6 万ステップで周回</a:t>
+            </a:r>
+          </a:p>
+          <a:p>
+            <a:pPr>
+              <a:spcAft>
+                <a:spcPts val="500"/>
+              </a:spcAft>
+            </a:pPr>
+            <a:r>
+              <a:rPr sz="1900" b="1">
+                <a:solidFill>
+                  <a:srgbClr val="222222"/>
+                </a:solidFill>
+                <a:latin typeface="Meiryo"/>
+              </a:rPr>
+              <a:t>自己位置を観測に入れない設計が 5 コース汎化を生んだ</a:t>
+            </a:r>
+          </a:p>
+          <a:p>
+            <a:pPr>
+              <a:spcAft>
+                <a:spcPts val="500"/>
+              </a:spcAft>
+            </a:pPr>
+            <a:r>
+              <a:rPr sz="1900" b="0">
+                <a:solidFill>
+                  <a:srgbClr val="222222"/>
+                </a:solidFill>
+                <a:latin typeface="Meiryo"/>
+              </a:rPr>
+              <a:t>C# ポートは観測ビット一致 + 物理 1e-7 一致 — 「動くはず」ではなく「同じ」</a:t>
+            </a:r>
+          </a:p>
+          <a:p>
+            <a:pPr>
+              <a:spcAft>
+                <a:spcPts val="500"/>
+              </a:spcAft>
+            </a:pPr>
+            <a:r>
+              <a:rPr sz="1900" b="0">
+                <a:solidFill>
+                  <a:srgbClr val="222222"/>
+                </a:solidFill>
+                <a:latin typeface="Meiryo"/>
+              </a:rPr>
+              <a:t>媒体生成コードはすべてノートブック内 (Presentation Media セル) — 本スライドは再現可能</a:t>
+            </a:r>
+          </a:p>
+          <a:p>
+            <a:pPr>
+              <a:spcAft>
+                <a:spcPts val="500"/>
+              </a:spcAft>
+            </a:pPr>
+            <a:r>
+              <a:rPr sz="1900" b="0">
+                <a:solidFill>
+                  <a:srgbClr val="222222"/>
+                </a:solidFill>
+                <a:latin typeface="Meiryo"/>
+              </a:rPr>
+              <a:t>次のステップ: RE Engine 実走検証・実車ダイナミクス適合・NPC レース</a:t>
             </a:r>
           </a:p>
         </p:txBody>
@@ -4829,8 +7146,8 @@
         </p:nvSpPr>
         <p:spPr>
           <a:xfrm>
-            <a:off x="457200" y="228600"/>
-            <a:ext cx="11247120" cy="822960"/>
+            <a:off x="457200" y="201168"/>
+            <a:ext cx="11247120" cy="777240"/>
           </a:xfrm>
           <a:prstGeom prst="rect">
             <a:avLst/>
@@ -4844,13 +7161,13 @@
           <a:lstStyle/>
           <a:p>
             <a:r>
-              <a:rPr sz="3000" b="1">
+              <a:rPr sz="2800" b="1">
                 <a:solidFill>
                   <a:srgbClr val="1B5EA8"/>
                 </a:solidFill>
                 <a:latin typeface="Meiryo"/>
               </a:rPr>
-              <a:t>学習曲線 — 周回数 vs 学習ステップ</a:t>
+              <a:t>学習曲線 — 周回能力は 3〜6 万ステップで立ち上がる</a:t>
             </a:r>
           </a:p>
         </p:txBody>
@@ -4871,8 +7188,8 @@
         </p:blipFill>
         <p:spPr>
           <a:xfrm>
-            <a:off x="2377440" y="1234440"/>
-            <a:ext cx="7498079" cy="4198924"/>
+            <a:off x="2468880" y="1234440"/>
+            <a:ext cx="7315200" cy="4096512"/>
           </a:xfrm>
           <a:prstGeom prst="rect">
             <a:avLst/>
@@ -4905,8 +7222,8 @@
         </p:nvSpPr>
         <p:spPr>
           <a:xfrm>
-            <a:off x="457200" y="228600"/>
-            <a:ext cx="11247120" cy="822960"/>
+            <a:off x="457200" y="201168"/>
+            <a:ext cx="11247120" cy="777240"/>
           </a:xfrm>
           <a:prstGeom prst="rect">
             <a:avLst/>
@@ -4920,13 +7237,13 @@
           <a:lstStyle/>
           <a:p>
             <a:r>
-              <a:rPr sz="3000" b="1">
+              <a:rPr sz="2800" b="1">
                 <a:solidFill>
                   <a:srgbClr val="1B5EA8"/>
                 </a:solidFill>
                 <a:latin typeface="Meiryo"/>
               </a:rPr>
-              <a:t>走行軌跡 — fast トラック (fast-dev モデル)</a:t>
+              <a:t>走行軌跡 — 減速と立ち上がりの質</a:t>
             </a:r>
           </a:p>
         </p:txBody>
@@ -4981,8 +7298,8 @@
         </p:nvSpPr>
         <p:spPr>
           <a:xfrm>
-            <a:off x="457200" y="228600"/>
-            <a:ext cx="11247120" cy="822960"/>
+            <a:off x="457200" y="201168"/>
+            <a:ext cx="11247120" cy="777240"/>
           </a:xfrm>
           <a:prstGeom prst="rect">
             <a:avLst/>
@@ -4996,101 +7313,141 @@
           <a:lstStyle/>
           <a:p>
             <a:r>
-              <a:rPr sz="3000" b="1">
+              <a:rPr sz="2800" b="1">
                 <a:solidFill>
                   <a:srgbClr val="1B5EA8"/>
                 </a:solidFill>
                 <a:latin typeface="Meiryo"/>
               </a:rPr>
-              <a:t>汎化モデル — 1 つの方策で 5 トラック</a:t>
-            </a:r>
-          </a:p>
-        </p:txBody>
-      </p:sp>
-      <p:pic>
-        <p:nvPicPr>
-          <p:cNvPr id="3" name="Picture 2" descr="gen_tracks_grid.png"/>
-          <p:cNvPicPr>
-            <a:picLocks noChangeAspect="1"/>
-          </p:cNvPicPr>
+              <a:t>結果サマリ (すべて実測値)</a:t>
+            </a:r>
+          </a:p>
+        </p:txBody>
+      </p:sp>
+      <p:sp>
+        <p:nvSpPr>
+          <p:cNvPr id="3" name="TextBox 2"/>
+          <p:cNvSpPr txBox="1"/>
           <p:nvPr/>
-        </p:nvPicPr>
-        <p:blipFill>
-          <a:blip r:embed="rId3"/>
-          <a:stretch>
-            <a:fillRect/>
-          </a:stretch>
-        </p:blipFill>
+        </p:nvSpPr>
         <p:spPr>
           <a:xfrm>
-            <a:off x="411480" y="1371600"/>
-            <a:ext cx="11338560" cy="2789689"/>
+            <a:off x="548640" y="1325880"/>
+            <a:ext cx="11064240" cy="5394960"/>
           </a:xfrm>
           <a:prstGeom prst="rect">
             <a:avLst/>
           </a:prstGeom>
+          <a:noFill/>
         </p:spPr>
-      </p:pic>
-      <p:pic>
-        <p:nvPicPr>
-          <p:cNvPr id="4" name="gen_all_tracks.mp4">
-            <a:hlinkClick r:id="" action="ppaction://media"/>
-          </p:cNvPr>
-          <p:cNvPicPr>
-            <a:picLocks noChangeAspect="1"/>
-          </p:cNvPicPr>
-          <p:nvPr>
-            <a:videoFile r:link="rId5"/>
-            <p:extLst>
-              <p:ext uri="{DAA4B4D4-6D71-4841-9C94-3DE7FCFB9230}">
-                <p14:media xmlns:p14="http://schemas.microsoft.com/office/powerpoint/2010/main" r:embed="rId4"/>
-              </p:ext>
-            </p:extLst>
-          </p:nvPr>
-        </p:nvPicPr>
-        <p:blipFill>
-          <a:blip r:embed="rId3"/>
-          <a:stretch>
-            <a:fillRect/>
-          </a:stretch>
-        </p:blipFill>
-        <p:spPr>
-          <a:xfrm>
-            <a:off x="3566160" y="4206240"/>
-            <a:ext cx="5029200" cy="1508760"/>
-          </a:xfrm>
-          <a:prstGeom prst="rect">
-            <a:avLst/>
-          </a:prstGeom>
-        </p:spPr>
-      </p:pic>
+        <p:txBody>
+          <a:bodyPr wrap="square">
+            <a:spAutoFit/>
+          </a:bodyPr>
+          <a:lstStyle/>
+          <a:p>
+            <a:pPr>
+              <a:spcAft>
+                <a:spcPts val="500"/>
+              </a:spcAft>
+            </a:pPr>
+            <a:r>
+              <a:rPr sz="1900" b="1">
+                <a:solidFill>
+                  <a:srgbClr val="222222"/>
+                </a:solidFill>
+                <a:latin typeface="Meiryo"/>
+              </a:rPr>
+              <a:t>fast トラック: 37 周 / 800 秒・16 m/s (制限速度)・無衝突</a:t>
+            </a:r>
+          </a:p>
+          <a:p>
+            <a:pPr>
+              <a:spcAft>
+                <a:spcPts val="500"/>
+              </a:spcAft>
+            </a:pPr>
+            <a:r>
+              <a:rPr sz="1900" b="0">
+                <a:solidFill>
+                  <a:srgbClr val="222222"/>
+                </a:solidFill>
+                <a:latin typeface="Meiryo"/>
+              </a:rPr>
+              <a:t>周回能力の獲得: 3〜6 万ステップ (6 万で 32 周 → 9 万で 36 周)</a:t>
+            </a:r>
+          </a:p>
+          <a:p>
+            <a:pPr>
+              <a:spcAft>
+                <a:spcPts val="500"/>
+              </a:spcAft>
+            </a:pPr>
+            <a:r>
+              <a:rPr sz="1900" b="0">
+                <a:solidFill>
+                  <a:srgbClr val="222222"/>
+                </a:solidFill>
+                <a:latin typeface="Meiryo"/>
+              </a:rPr>
+              <a:t>fast-dev (12 万, 本番ハイパラ): フェーズ 2 (NPC あり lr 3e-4) 込みで 37 周 — 退行なし</a:t>
+            </a:r>
+          </a:p>
+          <a:p>
+            <a:pPr>
+              <a:spcAft>
+                <a:spcPts val="500"/>
+              </a:spcAft>
+            </a:pPr>
+            <a:r>
+              <a:rPr sz="1900" b="1">
+                <a:solidFill>
+                  <a:srgbClr val="222222"/>
+                </a:solidFill>
+                <a:latin typeface="Meiryo"/>
+              </a:rPr>
+              <a:t>汎化モデル (random 学習 15 万): 5 トラックすべて 2 分間ノーミス・平均 15.7 m/s</a:t>
+            </a:r>
+          </a:p>
+          <a:p>
+            <a:pPr>
+              <a:spcAft>
+                <a:spcPts val="500"/>
+              </a:spcAft>
+            </a:pPr>
+            <a:r>
+              <a:rPr sz="1900" b="0">
+                <a:solidFill>
+                  <a:srgbClr val="222222"/>
+                </a:solidFill>
+                <a:latin typeface="Meiryo"/>
+              </a:rPr>
+              <a:t>ゼロショット転移: fast 専用モデルも他 4 コースを制限速度で走行 (自己位置非観測が鍵)</a:t>
+            </a:r>
+          </a:p>
+          <a:p>
+            <a:pPr>
+              <a:spcAft>
+                <a:spcPts val="500"/>
+              </a:spcAft>
+            </a:pPr>
+            <a:r>
+              <a:rPr sz="1900" b="1">
+                <a:solidFill>
+                  <a:srgbClr val="222222"/>
+                </a:solidFill>
+                <a:latin typeface="Meiryo"/>
+              </a:rPr>
+              <a:t>C# デプロイ: 観測ビット一致 (maxDiff=0.0) + 車両物理 1e-7 一致 — 検証ハーネスで自動確認</a:t>
+            </a:r>
+          </a:p>
+        </p:txBody>
+      </p:sp>
     </p:spTree>
   </p:cSld>
   <p:clrMapOvr>
     <a:masterClrMapping/>
   </p:clrMapOvr>
-  <p:timing>
-    <p:tnLst>
-      <p:par>
-        <p:cTn id="1" dur="indefinite" restart="never" nodeType="tmRoot">
-          <p:childTnLst>
-            <p:video>
-              <p:cMediaNode vol="80000">
-                <p:cTn id="2" fill="hold" display="0">
-                  <p:stCondLst>
-                    <p:cond delay="indefinite"/>
-                  </p:stCondLst>
-                </p:cTn>
-                <p:tgtEl>
-                  <p:spTgt spid="4"/>
-                </p:tgtEl>
-              </p:cMediaNode>
-            </p:video>
-          </p:childTnLst>
-        </p:cTn>
-      </p:par>
-    </p:tnLst>
-  </p:timing>
 </p:sld>
 </file>
 
@@ -5112,8 +7469,8 @@
         </p:nvSpPr>
         <p:spPr>
           <a:xfrm>
-            <a:off x="457200" y="228600"/>
-            <a:ext cx="11247120" cy="822960"/>
+            <a:off x="457200" y="201168"/>
+            <a:ext cx="11247120" cy="777240"/>
           </a:xfrm>
           <a:prstGeom prst="rect">
             <a:avLst/>
@@ -5127,41 +7484,152 @@
           <a:lstStyle/>
           <a:p>
             <a:r>
-              <a:rPr sz="3000" b="1">
+              <a:rPr sz="2800" b="1">
                 <a:solidFill>
                   <a:srgbClr val="1B5EA8"/>
                 </a:solidFill>
                 <a:latin typeface="Meiryo"/>
               </a:rPr>
-              <a:t>学習トラック一覧 (race_env.py)</a:t>
-            </a:r>
-          </a:p>
-        </p:txBody>
-      </p:sp>
-      <p:pic>
-        <p:nvPicPr>
-          <p:cNvPr id="3" name="Picture 2" descr="track_shapes.png"/>
-          <p:cNvPicPr>
-            <a:picLocks noChangeAspect="1"/>
-          </p:cNvPicPr>
+              <a:t>ベースライン: highway-env の racetrack 環境 (デフォルト設定)</a:t>
+            </a:r>
+          </a:p>
+        </p:txBody>
+      </p:sp>
+      <p:sp>
+        <p:nvSpPr>
+          <p:cNvPr id="3" name="TextBox 2"/>
+          <p:cNvSpPr txBox="1"/>
           <p:nvPr/>
-        </p:nvPicPr>
-        <p:blipFill>
-          <a:blip r:embed="rId3"/>
-          <a:stretch>
-            <a:fillRect/>
-          </a:stretch>
-        </p:blipFill>
+        </p:nvSpPr>
         <p:spPr>
           <a:xfrm>
-            <a:off x="411480" y="1737360"/>
-            <a:ext cx="11338560" cy="2267712"/>
+            <a:off x="548640" y="1280160"/>
+            <a:ext cx="11064240" cy="5394960"/>
           </a:xfrm>
           <a:prstGeom prst="rect">
             <a:avLst/>
           </a:prstGeom>
+          <a:noFill/>
         </p:spPr>
-      </p:pic>
+        <p:txBody>
+          <a:bodyPr wrap="square">
+            <a:spAutoFit/>
+          </a:bodyPr>
+          <a:lstStyle/>
+          <a:p>
+            <a:pPr>
+              <a:spcAft>
+                <a:spcPts val="500"/>
+              </a:spcAft>
+            </a:pPr>
+            <a:r>
+              <a:rPr sz="1700" b="1">
+                <a:solidFill>
+                  <a:srgbClr val="222222"/>
+                </a:solidFill>
+                <a:latin typeface="Meiryo"/>
+              </a:rPr>
+              <a:t>行動: ステアリングのみ (longitudinal=False)。速度は離散 target_speeds [0, 5, 10] から選択</a:t>
+            </a:r>
+          </a:p>
+          <a:p>
+            <a:pPr>
+              <a:spcAft>
+                <a:spcPts val="500"/>
+              </a:spcAft>
+            </a:pPr>
+            <a:r>
+              <a:rPr sz="1700" b="1">
+                <a:solidFill>
+                  <a:srgbClr val="222222"/>
+                </a:solidFill>
+                <a:latin typeface="Meiryo"/>
+              </a:rPr>
+              <a:t>観測: OccupancyGrid 2ch (presence / on_road) のみ、±18 m の対称視野</a:t>
+            </a:r>
+          </a:p>
+          <a:p>
+            <a:pPr>
+              <a:spcAft>
+                <a:spcPts val="500"/>
+              </a:spcAft>
+            </a:pPr>
+            <a:r>
+              <a:rPr sz="1700" b="1">
+                <a:solidFill>
+                  <a:srgbClr val="222222"/>
+                </a:solidFill>
+                <a:latin typeface="Meiryo"/>
+              </a:rPr>
+              <a:t>報酬: 車線中央維持 1/(1+4·lat²) + 操作量ペナルティ −0.3·|action| + 衝突 −1</a:t>
+            </a:r>
+          </a:p>
+          <a:p>
+            <a:pPr>
+              <a:spcAft>
+                <a:spcPts val="500"/>
+              </a:spcAft>
+            </a:pPr>
+            <a:r>
+              <a:rPr sz="1700" b="0">
+                <a:solidFill>
+                  <a:srgbClr val="222222"/>
+                </a:solidFill>
+                <a:latin typeface="Meiryo"/>
+              </a:rPr>
+              <a:t>速度: speed_limit 10 m/s。「速く走る」インセンティブが存在しない</a:t>
+            </a:r>
+          </a:p>
+          <a:p>
+            <a:pPr>
+              <a:spcAft>
+                <a:spcPts val="500"/>
+              </a:spcAft>
+            </a:pPr>
+            <a:r>
+              <a:rPr sz="1700" b="1">
+                <a:solidFill>
+                  <a:srgbClr val="222222"/>
+                </a:solidFill>
+                <a:latin typeface="Meiryo"/>
+              </a:rPr>
+              <a:t>壁: 存在しない — 路外は終了 (または放置)。すり抜け・ショートカットが物理的に可能</a:t>
+            </a:r>
+          </a:p>
+          <a:p>
+            <a:pPr>
+              <a:spcAft>
+                <a:spcPts val="500"/>
+              </a:spcAft>
+            </a:pPr>
+            <a:r>
+              <a:rPr sz="1700" b="0">
+                <a:solidFill>
+                  <a:srgbClr val="222222"/>
+                </a:solidFill>
+                <a:latin typeface="Meiryo"/>
+              </a:rPr>
+              <a:t>車両: 運動学 Bicycle (スリップなし)。NPC 1 台、エピソード 300 秒</a:t>
+            </a:r>
+          </a:p>
+          <a:p>
+            <a:pPr>
+              <a:spcAft>
+                <a:spcPts val="500"/>
+              </a:spcAft>
+            </a:pPr>
+            <a:r>
+              <a:rPr sz="1700" b="1">
+                <a:solidFill>
+                  <a:srgbClr val="B32D2D"/>
+                </a:solidFill>
+                <a:latin typeface="Meiryo"/>
+              </a:rPr>
+              <a:t>→ 「レーンをなぞる」研究環境としては優秀。しかしゲームのレースには遠い</a:t>
+            </a:r>
+          </a:p>
+        </p:txBody>
+      </p:sp>
     </p:spTree>
   </p:cSld>
   <p:clrMapOvr>
@@ -5188,8 +7656,8 @@
         </p:nvSpPr>
         <p:spPr>
           <a:xfrm>
-            <a:off x="457200" y="228600"/>
-            <a:ext cx="11247120" cy="822960"/>
+            <a:off x="457200" y="201168"/>
+            <a:ext cx="11247120" cy="777240"/>
           </a:xfrm>
           <a:prstGeom prst="rect">
             <a:avLst/>
@@ -5203,168 +7671,41 @@
           <a:lstStyle/>
           <a:p>
             <a:r>
-              <a:rPr sz="3000" b="1">
+              <a:rPr sz="2800" b="1">
                 <a:solidFill>
                   <a:srgbClr val="1B5EA8"/>
                 </a:solidFill>
                 <a:latin typeface="Meiryo"/>
               </a:rPr>
-              <a:t>highway-env からの変更点 (1) 環境</a:t>
-            </a:r>
-          </a:p>
-        </p:txBody>
-      </p:sp>
-      <p:sp>
-        <p:nvSpPr>
-          <p:cNvPr id="3" name="TextBox 2"/>
-          <p:cNvSpPr txBox="1"/>
+              <a:t>デフォルト racetrack と本プロジェクトの fast トラック</a:t>
+            </a:r>
+          </a:p>
+        </p:txBody>
+      </p:sp>
+      <p:pic>
+        <p:nvPicPr>
+          <p:cNvPr id="3" name="Picture 2" descr="default_vs_ours.png"/>
+          <p:cNvPicPr>
+            <a:picLocks noChangeAspect="1"/>
+          </p:cNvPicPr>
           <p:nvPr/>
-        </p:nvSpPr>
+        </p:nvPicPr>
+        <p:blipFill>
+          <a:blip r:embed="rId3"/>
+          <a:stretch>
+            <a:fillRect/>
+          </a:stretch>
+        </p:blipFill>
         <p:spPr>
           <a:xfrm>
-            <a:off x="548640" y="1280160"/>
-            <a:ext cx="11064240" cy="5120640"/>
+            <a:off x="822960" y="1371600"/>
+            <a:ext cx="10515600" cy="3720905"/>
           </a:xfrm>
           <a:prstGeom prst="rect">
             <a:avLst/>
           </a:prstGeom>
-          <a:noFill/>
         </p:spPr>
-        <p:txBody>
-          <a:bodyPr wrap="square">
-            <a:spAutoFit/>
-          </a:bodyPr>
-          <a:lstStyle/>
-          <a:p>
-            <a:pPr>
-              <a:spcAft>
-                <a:spcPts val="600"/>
-              </a:spcAft>
-            </a:pPr>
-            <a:r>
-              <a:rPr sz="1700" b="1">
-                <a:solidFill>
-                  <a:srgbClr val="222222"/>
-                </a:solidFill>
-                <a:latin typeface="Meiryo"/>
-              </a:rPr>
-              <a:t>壁 = コース外周のみ (車線境界線は壁ではない)・接触で停止・バックで脱出</a:t>
-            </a:r>
-          </a:p>
-          <a:p>
-            <a:pPr lvl="1">
-              <a:spcAft>
-                <a:spcPts val="600"/>
-              </a:spcAft>
-            </a:pPr>
-            <a:r>
-              <a:rPr sz="1500" b="0">
-                <a:solidFill>
-                  <a:srgbClr val="666666"/>
-                </a:solidFill>
-                <a:latin typeface="Meiryo"/>
-              </a:rPr>
-              <a:t>理由: ゲーム側の物理と一致させ、壁ずり走行 (wall-riding) を防ぐ</a:t>
-            </a:r>
-          </a:p>
-          <a:p>
-            <a:pPr>
-              <a:spcAft>
-                <a:spcPts val="600"/>
-              </a:spcAft>
-            </a:pPr>
-            <a:r>
-              <a:rPr sz="1700" b="0">
-                <a:solidFill>
-                  <a:srgbClr val="222222"/>
-                </a:solidFill>
-                <a:latin typeface="Meiryo"/>
-              </a:rPr>
-              <a:t>壁接触が 35 ステップ続くとクラッシュ扱いで終了 — 壁沿い周回の悪用を遮断</a:t>
-            </a:r>
-          </a:p>
-          <a:p>
-            <a:pPr>
-              <a:spcAft>
-                <a:spcPts val="600"/>
-              </a:spcAft>
-            </a:pPr>
-            <a:r>
-              <a:rPr sz="1700" b="1">
-                <a:solidFill>
-                  <a:srgbClr val="222222"/>
-                </a:solidFill>
-                <a:latin typeface="Meiryo"/>
-              </a:rPr>
-              <a:t>報酬: 速度 + 車線中央 + チェックポイント/ラップボーナス → lmap [-3,3]→[0,1]</a:t>
-            </a:r>
-          </a:p>
-          <a:p>
-            <a:pPr lvl="1">
-              <a:spcAft>
-                <a:spcPts val="600"/>
-              </a:spcAft>
-            </a:pPr>
-            <a:r>
-              <a:rPr sz="1500" b="0">
-                <a:solidFill>
-                  <a:srgbClr val="666666"/>
-                </a:solidFill>
-                <a:latin typeface="Meiryo"/>
-              </a:rPr>
-              <a:t>理由: 範囲が真の下限を覆わないと悪い状態が 0 に飽和し勾配消失 (導出をコメントで管理)</a:t>
-            </a:r>
-          </a:p>
-          <a:p>
-            <a:pPr>
-              <a:spcAft>
-                <a:spcPts val="600"/>
-              </a:spcAft>
-            </a:pPr>
-            <a:r>
-              <a:rPr sz="1700" b="1">
-                <a:solidFill>
-                  <a:srgbClr val="222222"/>
-                </a:solidFill>
-                <a:latin typeface="Meiryo"/>
-              </a:rPr>
-              <a:t>壁脱出ゾーン (1 m): バック免除 + 距離増加に報酬</a:t>
-            </a:r>
-          </a:p>
-          <a:p>
-            <a:pPr lvl="1">
-              <a:spcAft>
-                <a:spcPts val="600"/>
-              </a:spcAft>
-            </a:pPr>
-            <a:r>
-              <a:rPr sz="1500" b="0">
-                <a:solidFill>
-                  <a:srgbClr val="666666"/>
-                </a:solidFill>
-                <a:latin typeface="Meiryo"/>
-              </a:rPr>
-              <a:t>理由: 脱出直後に罰すると「壁を這う」局所解に陥る (実測で確認)</a:t>
-            </a:r>
-          </a:p>
-          <a:p>
-            <a:pPr>
-              <a:spcAft>
-                <a:spcPts val="600"/>
-              </a:spcAft>
-            </a:pPr>
-            <a:r>
-              <a:rPr sz="1700" b="0">
-                <a:solidFill>
-                  <a:srgbClr val="222222"/>
-                </a:solidFill>
-                <a:latin typeface="Meiryo"/>
-              </a:rPr>
-              <a:t>トラック 5 種 + random (エピソード毎に再抽選) で汎化学習</a:t>
-            </a:r>
-          </a:p>
-        </p:txBody>
-      </p:sp>
+      </p:pic>
     </p:spTree>
   </p:cSld>
   <p:clrMapOvr>
@@ -5391,8 +7732,8 @@
         </p:nvSpPr>
         <p:spPr>
           <a:xfrm>
-            <a:off x="457200" y="228600"/>
-            <a:ext cx="11247120" cy="822960"/>
+            <a:off x="457200" y="201168"/>
+            <a:ext cx="11247120" cy="777240"/>
           </a:xfrm>
           <a:prstGeom prst="rect">
             <a:avLst/>
@@ -5406,13 +7747,13 @@
           <a:lstStyle/>
           <a:p>
             <a:r>
-              <a:rPr sz="3000" b="1">
+              <a:rPr sz="2800" b="1">
                 <a:solidFill>
                   <a:srgbClr val="1B5EA8"/>
                 </a:solidFill>
                 <a:latin typeface="Meiryo"/>
               </a:rPr>
-              <a:t>highway-env からの変更点 (2) 観測・行動・学習設定</a:t>
+              <a:t>問題の形式化 — POMDP・意思決定周波数・割引</a:t>
             </a:r>
           </a:p>
         </p:txBody>
@@ -5425,8 +7766,8 @@
         </p:nvSpPr>
         <p:spPr>
           <a:xfrm>
-            <a:off x="548640" y="1280160"/>
-            <a:ext cx="11064240" cy="5120640"/>
+            <a:off x="548640" y="1325880"/>
+            <a:ext cx="11064240" cy="5394960"/>
           </a:xfrm>
           <a:prstGeom prst="rect">
             <a:avLst/>
@@ -5441,7 +7782,7 @@
           <a:p>
             <a:pPr>
               <a:spcAft>
-                <a:spcPts val="600"/>
+                <a:spcPts val="500"/>
               </a:spcAft>
             </a:pPr>
             <a:r>
@@ -5451,29 +7792,29 @@
                 </a:solidFill>
                 <a:latin typeface="Meiryo"/>
               </a:rPr>
-              <a:t>観測: OccupancyGrid (10ch, 12x12), 前方 27 m / 後方 9 m の非対称視野</a:t>
-            </a:r>
-          </a:p>
-          <a:p>
-            <a:pPr lvl="1">
+              <a:t>POMDP: 自己位置なし・前方 27 m の局所観測 — 方策は反射的 (メモリレス) に制約</a:t>
+            </a:r>
+          </a:p>
+          <a:p>
+            <a:pPr>
               <a:spcAft>
-                <a:spcPts val="600"/>
+                <a:spcPts val="500"/>
               </a:spcAft>
             </a:pPr>
             <a:r>
-              <a:rPr sz="1500" b="0">
-                <a:solidFill>
-                  <a:srgbClr val="666666"/>
-                </a:solidFill>
-                <a:latin typeface="Meiryo"/>
-              </a:rPr>
-              <a:t>理由: 制動距離とコーナー先読み (16 m/s から 5 m/s² 制動で 25.6 m &lt; 27 m)</a:t>
+              <a:rPr sz="1700" b="0">
+                <a:solidFill>
+                  <a:srgbClr val="222222"/>
+                </a:solidFill>
+                <a:latin typeface="Meiryo"/>
+              </a:rPr>
+              <a:t>意思決定 5 Hz / 物理 15 Hz (action repeat = 3) — 制御の滑らかさと学習効率のトレード</a:t>
             </a:r>
           </a:p>
           <a:p>
             <a:pPr>
               <a:spcAft>
-                <a:spcPts val="600"/>
+                <a:spcPts val="500"/>
               </a:spcAft>
             </a:pPr>
             <a:r>
@@ -5483,13 +7824,13 @@
                 </a:solidFill>
                 <a:latin typeface="Meiryo"/>
               </a:rPr>
-              <a:t>行動: 連続スロットル [-5,5] m/s² + ステア ±π/6, dynamical=True (タイヤスリップ)</a:t>
+              <a:t>フレームスタック不使用: 相対速度 vx,vy と lat/ang_off が状態を近似マルコフ化</a:t>
             </a:r>
           </a:p>
           <a:p>
             <a:pPr>
               <a:spcAft>
-                <a:spcPts val="600"/>
+                <a:spcPts val="500"/>
               </a:spcAft>
             </a:pPr>
             <a:r>
@@ -5499,13 +7840,13 @@
                 </a:solidFill>
                 <a:latin typeface="Meiryo"/>
               </a:rPr>
-              <a:t>2 フェーズ PPO: ①NPC なしでレーン追従 → ②NPC ありで追い越し (lr を下げて FT)</a:t>
+              <a:t>γ = 0.99 @5 Hz → 実効ホライズン ≈ 20 s ≈ 1 周 — コーナー進入の信用割当が届く</a:t>
             </a:r>
           </a:p>
           <a:p>
             <a:pPr>
               <a:spcAft>
-                <a:spcPts val="600"/>
+                <a:spcPts val="500"/>
               </a:spcAft>
             </a:pPr>
             <a:r>
@@ -5515,55 +7856,23 @@
                 </a:solidFill>
                 <a:latin typeface="Meiryo"/>
               </a:rPr>
-              <a:t>カスタム CNN 特徴抽出器 + 初期スロットルバイアス +0.4 (前進探索を促進)</a:t>
+              <a:t>GAE λ = 0.98: 長ホライズンのバイアス-分散トレードを分散側に寄せる (密報酬なので許容)</a:t>
             </a:r>
           </a:p>
           <a:p>
             <a:pPr>
               <a:spcAft>
-                <a:spcPts val="600"/>
+                <a:spcPts val="500"/>
               </a:spcAft>
             </a:pPr>
             <a:r>
-              <a:rPr sz="1700" b="1">
+              <a:rPr sz="1700" b="0">
                 <a:solidFill>
                   <a:srgbClr val="222222"/>
                 </a:solidFill>
                 <a:latin typeface="Meiryo"/>
               </a:rPr>
-              <a:t>fast-dev = 12 万ステップ・本番ハイパラ (ent 0.02, lr 2e-4) — 周回到達を実測保証</a:t>
-            </a:r>
-          </a:p>
-          <a:p>
-            <a:pPr lvl="1">
-              <a:spcAft>
-                <a:spcPts val="600"/>
-              </a:spcAft>
-            </a:pPr>
-            <a:r>
-              <a:rPr sz="1500" b="0">
-                <a:solidFill>
-                  <a:srgbClr val="666666"/>
-                </a:solidFill>
-                <a:latin typeface="Meiryo"/>
-              </a:rPr>
-              <a:t>理由: 高エントロピー設定 (旧 0.10) は方策がランダムに留まり永遠に曲がれない</a:t>
-            </a:r>
-          </a:p>
-          <a:p>
-            <a:pPr>
-              <a:spcAft>
-                <a:spcPts val="600"/>
-              </a:spcAft>
-            </a:pPr>
-            <a:r>
-              <a:rPr sz="1700" b="0">
-                <a:solidFill>
-                  <a:srgbClr val="222222"/>
-                </a:solidFill>
-                <a:latin typeface="Meiryo"/>
-              </a:rPr>
-              <a:t>EvalCallback のベストモデルを採用 (PPO は終盤に退行することがある)</a:t>
+              <a:t>報酬 ∈ [0,1]/step → 理論上の episodic return 上限 = ステップ数 (4000) — 診断が容易</a:t>
             </a:r>
           </a:p>
         </p:txBody>
@@ -5594,8 +7903,8 @@
         </p:nvSpPr>
         <p:spPr>
           <a:xfrm>
-            <a:off x="457200" y="228600"/>
-            <a:ext cx="11247120" cy="822960"/>
+            <a:off x="457200" y="201168"/>
+            <a:ext cx="11247120" cy="777240"/>
           </a:xfrm>
           <a:prstGeom prst="rect">
             <a:avLst/>
@@ -5609,13 +7918,13 @@
           <a:lstStyle/>
           <a:p>
             <a:r>
-              <a:rPr sz="3000" b="1">
+              <a:rPr sz="2800" b="1">
                 <a:solidFill>
                   <a:srgbClr val="1B5EA8"/>
                 </a:solidFill>
                 <a:latin typeface="Meiryo"/>
               </a:rPr>
-              <a:t>セットアップとノートブックの使い方</a:t>
+              <a:t>進化 (1) 行動と車両 — スロットルを持たせ、実車に近づける</a:t>
             </a:r>
           </a:p>
         </p:txBody>
@@ -5628,8 +7937,8 @@
         </p:nvSpPr>
         <p:spPr>
           <a:xfrm>
-            <a:off x="548640" y="1280160"/>
-            <a:ext cx="11064240" cy="5120640"/>
+            <a:off x="548640" y="1097280"/>
+            <a:ext cx="11064240" cy="5394960"/>
           </a:xfrm>
           <a:prstGeom prst="rect">
             <a:avLst/>
@@ -5644,133 +7953,61 @@
           <a:p>
             <a:pPr>
               <a:spcAft>
-                <a:spcPts val="600"/>
+                <a:spcPts val="500"/>
               </a:spcAft>
             </a:pPr>
             <a:r>
-              <a:rPr sz="1700" b="1">
+              <a:rPr sz="1600" b="1">
                 <a:solidFill>
                   <a:srgbClr val="222222"/>
                 </a:solidFill>
                 <a:latin typeface="Meiryo"/>
               </a:rPr>
-              <a:t>pip install "highway-env&gt;=1.8" "stable-baselines3[extra]&gt;=2.0" gymnasium torch tensorboard moviepy onnx onnxruntime</a:t>
-            </a:r>
-          </a:p>
-          <a:p>
-            <a:pPr lvl="1">
+              <a:t>ContinuousAction: ステアのみ → スロットル + ステア (±5 m/s², ±π/6)、dynamical=True</a:t>
+            </a:r>
+          </a:p>
+          <a:p>
+            <a:pPr>
               <a:spcAft>
-                <a:spcPts val="600"/>
+                <a:spcPts val="500"/>
               </a:spcAft>
             </a:pPr>
             <a:r>
-              <a:rPr sz="1500" b="0">
-                <a:solidFill>
-                  <a:srgbClr val="666666"/>
-                </a:solidFill>
-                <a:latin typeface="Meiryo"/>
-              </a:rPr>
-              <a:t>注意: リポジトリの requirements.txt は旧スタック (TF2.6/gym0.21) 用 — 使わない</a:t>
-            </a:r>
-          </a:p>
-          <a:p>
-            <a:pPr>
-              <a:spcAft>
-                <a:spcPts val="600"/>
-              </a:spcAft>
-            </a:pPr>
-            <a:r>
-              <a:rPr sz="1700" b="0">
+              <a:rPr sz="1600" b="0">
                 <a:solidFill>
                   <a:srgbClr val="222222"/>
                 </a:solidFill>
                 <a:latin typeface="Meiryo"/>
               </a:rPr>
-              <a:t>task2_laning_overtaking_sb3_ppo.ipynb — fast トラック専用の学習</a:t>
-            </a:r>
-          </a:p>
-          <a:p>
-            <a:pPr>
-              <a:spcAft>
-                <a:spcPts val="600"/>
-              </a:spcAft>
-            </a:pPr>
-            <a:r>
-              <a:rPr sz="1700" b="0">
-                <a:solidFill>
-                  <a:srgbClr val="222222"/>
-                </a:solidFill>
-                <a:latin typeface="Meiryo"/>
-              </a:rPr>
-              <a:t>task3_generalization_sb3_ppo.ipynb — random トラック学習 + トラック別評価レポート + 5 連動画</a:t>
-            </a:r>
-          </a:p>
-          <a:p>
-            <a:pPr>
-              <a:spcAft>
-                <a:spcPts val="600"/>
-              </a:spcAft>
-            </a:pPr>
-            <a:r>
-              <a:rPr sz="1700" b="1">
-                <a:solidFill>
-                  <a:srgbClr val="222222"/>
-                </a:solidFill>
-                <a:latin typeface="Meiryo"/>
-              </a:rPr>
-              <a:t>FAST_DEV_RUN=True: 12〜15 万ステップの短縮学習 (周回まで到達) / False: 本番 (100万+)</a:t>
-            </a:r>
-          </a:p>
-          <a:p>
-            <a:pPr>
-              <a:spcAft>
-                <a:spcPts val="600"/>
-              </a:spcAft>
-            </a:pPr>
-            <a:r>
-              <a:rPr sz="1700" b="0">
-                <a:solidFill>
-                  <a:srgbClr val="222222"/>
-                </a:solidFill>
-                <a:latin typeface="Meiryo"/>
-              </a:rPr>
-              <a:t>Reward yardstick セル: eval/mean_reward を「周回数」として読むための換算値を表示</a:t>
-            </a:r>
-          </a:p>
-          <a:p>
-            <a:pPr>
-              <a:spcAft>
-                <a:spcPts val="600"/>
-              </a:spcAft>
-            </a:pPr>
-            <a:r>
-              <a:rPr sz="1700" b="0">
-                <a:solidFill>
-                  <a:srgbClr val="222222"/>
-                </a:solidFill>
-                <a:latin typeface="Meiryo"/>
-              </a:rPr>
-              <a:t>ベストモデルは runs/&lt;EXP_ID&gt;/models/best/phase1|phase2/best_model.zip に保存</a:t>
-            </a:r>
-          </a:p>
-          <a:p>
-            <a:pPr>
-              <a:spcAft>
-                <a:spcPts val="600"/>
-              </a:spcAft>
-            </a:pPr>
-            <a:r>
-              <a:rPr sz="1700" b="0">
-                <a:solidFill>
-                  <a:srgbClr val="222222"/>
-                </a:solidFill>
-                <a:latin typeface="Meiryo"/>
-              </a:rPr>
-              <a:t>検証: cd re_engine/verify &amp;&amp; dotnet run -- ..  → ALL SCENARIOS MATCH</a:t>
-            </a:r>
-          </a:p>
-        </p:txBody>
-      </p:sp>
+              <a:t>速度上限 10 → 16 m/s、前進報酬を追加 — 「速く走る」動機を導入</a:t>
+            </a:r>
+          </a:p>
+        </p:txBody>
+      </p:sp>
+      <p:pic>
+        <p:nvPicPr>
+          <p:cNvPr id="4" name="Picture 3" descr="range_experiment.png"/>
+          <p:cNvPicPr>
+            <a:picLocks noChangeAspect="1"/>
+          </p:cNvPicPr>
+          <p:nvPr/>
+        </p:nvPicPr>
+        <p:blipFill>
+          <a:blip r:embed="rId3"/>
+          <a:stretch>
+            <a:fillRect/>
+          </a:stretch>
+        </p:blipFill>
+        <p:spPr>
+          <a:xfrm>
+            <a:off x="3017520" y="2286000"/>
+            <a:ext cx="6217920" cy="3316224"/>
+          </a:xfrm>
+          <a:prstGeom prst="rect">
+            <a:avLst/>
+          </a:prstGeom>
+        </p:spPr>
+      </p:pic>
     </p:spTree>
   </p:cSld>
   <p:clrMapOvr>

--- a/docs/CircuitAgents_intro_ja.pptx
+++ b/docs/CircuitAgents_intro_ja.pptx
@@ -25,7 +25,6 @@
     <p:sldId id="273" r:id="rId25"/>
     <p:sldId id="274" r:id="rId26"/>
     <p:sldId id="275" r:id="rId27"/>
-    <p:sldId id="276" r:id="rId28"/>
   </p:sldIdLst>
   <p:sldSz cx="12191695" cy="6858000" type="screen4x3"/>
   <p:notesSz cx="6858000" cy="9144000"/>
@@ -522,7 +521,7 @@
           <a:lstStyle/>
           <a:p>
             <a:r>
-              <a:t>本日は CircuitAgents プロジェクトを 10 分で紹介します。highway-env をベースに、ゲームのレース環境に近づけるための改造を重ねて強化学習エージェントを育て、ONNX 経由で C# ゲームエンジンにデプロイするまでのパイプラインです。まず結果の映像とグラフをご覧いただき、その後で highway-env のデフォルト設定と我々が加えた変更の進化の過程、最後にセットアップとツールの使い方を説明します。</a:t>
+              <a:t>本日は CircuitAgents プロジェクトを 10 分で紹介します。highway-env をベースに、ゲームのレース環境へ段階的に近づけながら強化学習エージェントを育て、ONNX 経由で C# ゲームエンジンにデプロイするまでのパイプラインです。構成は、結果の映像 → 前提知識 → highway-env のデフォルトからの進化の過程 → 実ゲームとのギャップ → 使い方、の順です。</a:t>
             </a:r>
           </a:p>
         </p:txBody>
@@ -592,7 +591,7 @@
           <a:lstStyle/>
           <a:p>
             <a:r>
-              <a:t>次に壁です。ここが一番試行錯誤した部分です。最初は壁がなく、路外に出たら終了するだけでした。これだとエージェントはコーナーを膨らんでショートカットする走りを覚えます。次に反発壁を入れましたが、今度は「壁に擦りながら曲がる」wall-riding が最速解になりました。壁が勝手に車の向きを変えてくれるので、ステアリングを学ぶ必要がなくなるんです。最終形は停止壁です。壁に当たると止まり、バックでしか脱出できない。さらに壁接触中は速度報酬をゼロにし、接触が 7 秒続いたらクラッシュ扱いで終了します。もう 1 つ重要なのは、壁はコース外周だけという点です。車線の白線を壁にすると2 車線を使ったライン取りができなくなります。この判定は最初閉じた車線単位で書いてしまい、白線が壁になるバグを踏みました。現在は「コリドー両端の車線の外側だけが壁」という実装です。</a:t>
+              <a:t>第二の変更、壁です。ここが一番試行錯誤しました。壁なしではコーナーを路外ショートカットする走りを学習します。反発壁を入れると、今度は壁に擦って曲がる wall-riding が最速解になりました。壁が方向転換を代行するのでステアを学ぶ必要がなくなるんです。最終形は停止壁です。壁に当たると止まり、バックでしか脱出できない。壁接触中は速度報酬ゼロ、接触 7 秒でクラッシュ扱い終了。加えて壁摩擦 0.6 を設定し、接線方向速度を物理フレーム毎に減衰させます。もう 1 つの要点は壁の定義で、コース外周のみが壁です。実装当初、最も近い車線単位で判定してしまい車線境界の白線が壁になるバグを踏みました。現在はコリドー両端の車線の外側だけを壁とする実装です。</a:t>
             </a:r>
           </a:p>
         </p:txBody>
@@ -662,7 +661,7 @@
           <a:lstStyle/>
           <a:p>
             <a:r>
-              <a:t>報酬設計です。グラフは実測した 1 ステップあたりの報酬で、状態ごとの「儲け」を示しています。設計の目標は、どんな抜け道よりも普通に走る方が得、という順序を作ることです。緑の 0.97 が正しく走った場合。壁でスタックしたら 0.45、壁に擦りながら進んでも 0.42 と、壁を使う行動は割に合いません。重要なのは青の 0.51、壁からバックで脱出する行動がスタックより明確に得なことです。実は最初、脱出報酬は壁に接触している間しか出ませんでした。すると脱出の一歩目、壁から 20 cm 離れた瞬間にバックのペナルティが復活してしまい、エージェントは「壁沿いを這う」ことを学びました。今は壁から 1 m の脱出ゾーンを設け、その中ではバック免除、壁から離れる距離に報酬を出します。もう 1 つの落とし穴が正規化です。合成報酬を [-3,3] から [0,1] に線形写像していますが、この範囲が実際の下限を覆っていないと、悪い状態が全部 0 に張り付いて「悪い」と「最悪」の区別が消え、学習が止まります。範囲の導出はコードにコメントで残し、重みを変えたら再導出するルールにしています。</a:t>
+              <a:t>第三の変更、報酬です。左のグラフは代表状態の 1 ステップ報酬の実測値です。設計目標は、どんな抜け道よりも普通に走る方が儲かる順序を作ること。運転 0.97 が最上位、壁からのバック脱出 0.51 がスタック 0.45 や壁擦り 0.42 より上、というのが要点です。壁脱出は最初、壁接触中しか報酬が出ず、脱出の一歩目でバックペナルティが復活して「壁を這う」局所解を生みました。現在は壁から 1 m の脱出ゾーンでバック免除、クリアランス増加に報酬を与えます。理論的には、クリアランスをポテンシャル関数とする potential-based shaping で、最適方策を原理的に歪めない形です。正規化にも罠があり、合成報酬を [-3,3]→[0,1] に写像しますが、この範囲が真の下限を覆わないと悪い状態が全部 0 に飽和し勾配が消えます。範囲の導出はコードにコメントで残し、重み変更時に再導出するルールです。</a:t>
             </a:r>
           </a:p>
         </p:txBody>
@@ -732,7 +731,7 @@
           <a:lstStyle/>
           <a:p>
             <a:r>
-              <a:t>いま見た壁擦り・壁這いは、文献で言う specification gaming、報酬ハッキングの実例です。報酬関数の字面を最適化した結果、設計者の意図しない解に到達する現象で、本プロジェクトでは 3 種類を実際に踏みました。対策の理論的支柱が 2 つあります。1 つは potential-based reward shaping です。壁からのクリアランスをポテンシャル関数として、その差分に報酬を与える形にすることで、最適方策を原理的に歪めずに探索だけを誘導できます。Ng らの 1999 年の結果が根拠です。もう 1 つは報酬の順序設計で、全状態の per-step 報酬を実測し、意図する行動が抜け道より必ず高くなることをテーブルで検証しています。また milestone 報酬 (チェックポイント) はsparse な進捗信号として dense な shaping と併用し、正規化後の飽和 (クリップ) は意図的に milestone ステップにのみ許しています。</a:t>
+              <a:t>第四の変更、観測です。2 チャネルから 10 チャネルに拡張しました。各チャネルの意味を説明します。presence は車がいるセルに 1。on_road はレーン中心線が通るセルに 1 で、塗りつぶした路面マスクではない点が移植時の要注意です。x, y, vx, vy は他車の自車相対の位置と速度で、値はトラック座標系のまま、セルの位置だけが自車向きに回転します。cos_h, sin_h は各車の絶対進行方向。lat_off は最寄りレーン中心からの横ずれ、ang_off はレーン方向との角度差で、この 2 つが車線維持の主信号です。features_range は正規化の分母で、例えば vx の ±20 m/s は「±20 を ±1 に写像する」という意味です。ここに km/h の値を入れると 3.6 倍されて飽和する、という単位事故がデプロイで最も起きやすい罠です。視野は前方 27 m・後方 9 m の非対称で、27 m は制動距離 25.6 m から逆算しています。右の軌跡でヘアピン手前の減速開始位置がちょうど視野に対応しているのが分かります。</a:t>
             </a:r>
           </a:p>
         </p:txBody>
@@ -802,7 +801,7 @@
           <a:lstStyle/>
           <a:p>
             <a:r>
-              <a:t>観測はデフォルトの 2 チャネルから 10 チャネルに拡張しました。周囲車両の相対位置・相対速度、自車のレーンからの横ずれ lat_off と角度ずれ ang_off などです。追い越しと車線維持の両方に必要な情報です。視野も変えました。デフォルトは前後対称 ±18 m ですが、レースで重要なのは前方です。後方 9 m・前方 27 m の非対称にしました。27 m という数字は制動距離から来ています。16 m/s から 5 m/s² でフル制動すると 25.6 m。前方視野がこれより短いと、コーナーが見えてからでは止まれません。ぎりぎり収まるのが 27 m です。重要な注意として、自車の絶対座標は観測に含まれません。これによりコース暗記が不可能になり、反射的なレーン追従を学習せざるを得なくなります。これが 5 コース汎化の種明かしです。</a:t>
+              <a:t>第五の変更、トラックです。oval と stadium が基礎、rect が 90 度の反復、chicane が左右切り返しと最小半径 10 m のキンク、fast がメインの難コース。track を random にするとエピソード毎に再抽選され、これはドメインランダマイゼーションの一種です。ただし汎化の本質は観測の帰納バイアス側にあり、fast 単体学習の方策も未見 4 コースをゼロショットで走ります。各トラックは C# プリセットと JSON に複製され、検証ハーネスが幾何一致を自動チェックします。</a:t>
             </a:r>
           </a:p>
         </p:txBody>
@@ -872,7 +871,7 @@
           <a:lstStyle/>
           <a:p>
             <a:r>
-              <a:t>コースも 1 つから 5 つに増やしました。oval と stadium が基礎、rect は 90 度コーナーの反復、chicane は左右の切り返しと最小半径 10 m のキンク、fast がメインの難コースです。config の track を random にするとエピソードごとに再抽選され、これが汎化学習になります。各トラックは C# 側にもプリセットと JSON で複製されていて、検証ハーネスがPython と C# の幾何が一致することを自動チェックします。トラックを追加するときはrace_env にビルダーを書き、C# プリセットを足し、JSON を再生成して検証を回す、という手順です。</a:t>
+              <a:t>学習の全体像です。フェーズ 1 で他車なしのレーン追従、フェーズ 2 で NPC を入れて学習率を下げ追い越しを学習します。特徴抽出はカスタム CNN で、初期方策のスロットルバイアスを +0.4 に手動シフトします。ガウス方策の平均が 0 のままだと前進と後退が等確率で、前進報酬を発見する前に壁ペナルティばかり集めるためです。動作確認用の fast-dev はかつてエントロピー係数 0.10 で、何度回しても曲がれませんでした。エントロピーボーナスが「ランダムでいること」に支払われ、[0,1] に圧縮された報酬差に勝ってしまうためです。現在は本番ハイパラのまま 12 万ステップに短縮し、周回到達をエンドツーエンドで実測保証しています。</a:t>
             </a:r>
           </a:p>
         </p:txBody>
@@ -942,7 +941,7 @@
           <a:lstStyle/>
           <a:p>
             <a:r>
-              <a:t>学習は 2 フェーズの PPO です。フェーズ 1 で他車なしのレーン追従を覚え、フェーズ 2 で NPC を入れて学習率を下げ、追い越しをファインチューニングします。特徴抽出はカスタム CNN で、初期方策のスロットルバイアスを +0.4 にずらして序盤の探索が前に進むようにしています。ここでの教訓は fast-dev、つまり動作確認用の短縮設定です。以前はエントロピー係数 0.10 の 6.5 万ステップで、何度回しても曲がれるようになりませんでした。原因は、エントロピー報酬が『ランダムでい続けること』に支払われるため、報酬が [0,1] に圧縮された本環境では方策が確定するインセンティブに勝ってしまうことでした。現在は本番と同じ ent 0.02・lr 2e-4 のまま 12 万ステップに短縮し、『周回まで確実に到達する最小構成』としてエンドツーエンドで実測検証済みです。また PPO は学習終盤に退行することがあるため、最終モデルではなく EvalCallback のベストモデルを採用します。ノートブックには eval 報酬を周回数に換算するヤードスティックのセルを入れてあり、TensorBoard の数字だけで進捗判断ができます。</a:t>
+              <a:t>PPO の設定判断です。オンポリシーを選んだのは、環境を頻繁に改造するためリプレイ経験がすぐ無効になること、シミュレータが軽く壁時計効率が支配的なことによります。クリップ範囲 0.15 は標準の 0.2 より狭く、壁ペナルティ由来の高分散アドバンテージでの方策崩壊を抑えます。GAE λ 0.98 は密報酬前提で分散側に寄せ、コーナー 1 つ分の信用割当を確保します。エントロピー係数は報酬スケールと結合する、が本プロジェクト最大の教訓の 1 つです。なお PPO はアドバンテージ正規化により報酬のアフィン変換に不変なので、[0,1] 正規化自体は学習のためではなく診断のための設計です。</a:t>
             </a:r>
           </a:p>
         </p:txBody>
@@ -1012,7 +1011,7 @@
           <a:lstStyle/>
           <a:p>
             <a:r>
-              <a:t>PPO の設定を専門的に補足します。オンポリシー法を選んだ理由は、環境改造を繰り返す本プロジェクトではリプレイバッファの古いデータが即座に無効になること、シミュレータが軽くサンプル効率より壁時計効率が支配的なことです。クリップ範囲は 0.15 と標準の 0.2 より狭くしています。2 次元連続行動で方策更新が大きく振れると、壁ペナルティ由来の高分散アドバンテージで崩壊しやすいためです。GAE λ は 0.98 と高めで、密な報酬のおかげで分散増を許容しつつ、コーナー 1 つ分の時間スケールの信用割当を確保します。エントロピー係数は報酬スケールと結合する点に注意が必要です。報酬が [0,1] に圧縮された環境では、係数 0.10 はエントロピー項が報酬差を支配し、方策標準偏差が 1.6 まで成長して事実上ランダムのままでした。0.02 が均衡点です。初期化は SB3 標準の直交初期化のあと、スロットル次元のバイアスだけ +0.4 に手動シフトします。ガウス方策の平均が 0 のままだと前進と後退が等確率で、前進報酬に到達する前に壁ペナルティばかり集めるためです。</a:t>
+              <a:t>ここは正直に、シミュレータが実ゲームから何を省いているかの一覧です。車両動力学では、タイヤが線形モデルでグリップ飽和がありません。実車はスリップ角が深くなると横力が頭打ちになりますが、シムでは増え続けます。質量は 1 kg の正規化値で、荷重移動もサスもない。加速度は直接指令で、エンジン特性・ギア・空気抵抗・転がり抵抗がありません。つまりシムの車は惰性で減速しない。壁は速度を消す理想化された壁で、実ゲームの衝突インパルスや車体の回転、ダメージはモデル化していません。壁摩擦 0.6 も実測合わせが必要な仮の値です。ステアは瞬時に舵角が立つ理想アクチュエータ。タイミング面では、5 Hz の等間隔意思決定を仮定しており、フレーム時間の揺らぎや推論レイテンシ 1 フレーム分は学習に含まれていません。地形も 2D 平面で、縁石・バンク・高低差・路面 μ の変化はありません。</a:t>
             </a:r>
           </a:p>
         </p:txBody>
@@ -1082,7 +1081,7 @@
           <a:lstStyle/>
           <a:p>
             <a:r>
-              <a:t>学習した方策をそのままゲームに載せると、シミュレータと実車の違いが問題になります。そのために C# 側に 4 つの支援クラスを用意しました。まず SteeringSmoother。方策は観測グリッドが 3 m 刻みで量子化されている影響で、直線でステアを細かく左右に振ります。デコード後のステア角に EMA をかけるだけで、符号反転が 100 ステップあたり 34 回から 12 回に減り、直線の中央維持もむしろ改善しました。次に CorneringLimiter。実車はハンドルを瞬時に切れないのでステア速度を制限し、曲率から計算した限界速度を超えたら超過量に比例した弱いブレーキをかけます。速度床があるので絶対に止まりません。StuckRecovery は移動距離ベースのスタック検出で、前進指示なのに 1 秒で 0.3 m も動けなければ壁に刺さっていると判断してバック指示を出します。発進時は動けるので誤発動しません。最後に CarController は学習時と同一のBicycle 動力学を C# に移植したもので、Python と 1e-7 で一致します。</a:t>
+              <a:t>ギャップへの対処は二層です。第一層、消せるギャップは移植の数値一致で消す。観測ビルダーはビット一致、車両物理は 1e-7 一致で C# に移植済みなので、『移植したら挙動が変わった』という自由度は存在しません。第二層、実ゲーム固有の動力学差は方策を再学習せず、デプロイ側のアクションフィルタで吸収します。EMA 平滑化は観測の 3 m 量子化由来のステア蛇行を消し、実測で符号反転が 1/3 になります。CorneringLimiter はステア速度制限と、曲率から計算した限界速度超過に比例する弱いブレーキで、グリップ飽和がないシム方策の過信を抑えます。StuckRecovery は移動距離ベースで壁刺さりを検出しバックを指示します。フィルタは閉ループ特性を変えるため、シミュレータ内で同じフィルタを通した評価で周回数が落ちないことを確認しています。それでも残る差が大きければ、壁摩擦・加速度レンジなどを実ゲーム実測に合わせて環境側を再調整し、再学習する道があります。</a:t>
             </a:r>
           </a:p>
         </p:txBody>
@@ -1152,7 +1151,7 @@
           <a:lstStyle/>
           <a:p>
             <a:r>
-              <a:t>デプロイを見据えた汎化の設計です。トラックのランダム化はドメインランダマイゼーションの一種で、方策がコース固有の系列を暗記することを分布レベルで禁止します。ただし本質はむしろ観測の帰納バイアスです。自己座標を観測に入れず、エゴセントリックなグリッドにすることで、方策は平行移動と回転に対して不変になり、「見えている道路形状への反射」だけが学習可能な解空間になります。実際、fast 単体で学習した方策が未見の 4 コースをゼロショットで走ったのはこの不変性の帰結です。sim-to-real ギャップへの対処は 2 層です。観測と車両物理は C# に数値一致で移植し、ギャップ自体を消す。残るゲーム固有の動力学差は、方策を再学習せずデプロイ側のアクションフィルタ(平滑化・レートリミット・旋回ブレーキ) で吸収します。フィルタは閉ループ特性を変えるため、シミュレータ内で同じフィルタを通した評価で周回数が落ちないことを確認済みです。</a:t>
+              <a:t>使い方です。環境構築は 1 行。リポジトリ直下の requirements.txt は旧スタック用なので使いません。ノートブックは task2 が fast 専用、task3 が汎化学習。FAST_DEV_RUN で短縮と本番を切り替えます。学習の判断材料として、eval 報酬を周回数に換算するヤードスティックセルがあり、TensorBoard の数字だけで局所解か周回かを判別できます。スライドの図と動画を生成・保存するセルもノートブック内にあります。</a:t>
             </a:r>
           </a:p>
         </p:txBody>
@@ -1222,7 +1221,7 @@
           <a:lstStyle/>
           <a:p>
             <a:r>
-              <a:t>使い方です。環境構築はスライドの 1 行だけです。注意点として、リポジトリ直下のrequirements.txt は旧 TensorFlow スタック用なので使わないでください。ノートブックは 2 つ。task2 が fast トラック専用、task3 がランダムトラックの汎化学習です。設定セルの FAST_DEV_RUN で短縮学習と本番を切り替えます。学習後は軌跡プロット、トラック別評価レポート、5 トラック並列動画、そして今回のスライドに使った図と動画を生成して保存するセルまで、すべてノートブック内にあります。C# ポートの検証は re_engine/verify で dotnet run するだけです。</a:t>
+              <a:t>エクスポートは export_onnx.py で、モード 3 のエンジン用 NHWC 版が推奨です。C# ビルダーは H×W×C の平坦配列を出すため、channels-first 版に入れるとチャネルが混ざり、スロットル 0.4・ステア 0.2 程度のほぼ一定出力に退化します。この症状は実際にデバッグで踏んだので、症状として覚えてください。トラックや観測を変えたらexport_track_json.py で C# 側の正解データを再生成し検証ハーネスを回します。レンジ等の定数は C# に意図的に複製されているので、変更時は 4 点セットを忘れずに。</a:t>
             </a:r>
           </a:p>
         </p:txBody>
@@ -1292,7 +1291,7 @@
           <a:lstStyle/>
           <a:p>
             <a:r>
-              <a:t>説明の前に、まず走りをご覧ください。これはエピソードごとにコースをランダムに切り替えて学習した「汎化モデル」1 つを、5 つのコースで同時に評価した動画です。赤い点が車、軌跡の色が速度です。直線では黄色、つまり制限速度の 16 m/s 付近、コーナーでは適切に減速しているのが分かります。どのコースも 2 分間、壁への衝突ゼロで周回し続けます。では、この走りがどう作られたかを見ていきます。</a:t>
+              <a:t>説明の前に走りをご覧ください。コースをエピソード毎にランダムに切り替えて学習した汎化モデル 1 つを、5 コースで同時評価した動画です。赤い点が車、軌跡の色が速度。直線は黄色 (制限速度 16 m/s 付近)、コーナーで適切に減速します。どのコースも 2 分間、壁衝突ゼロで周回し続けます。</a:t>
             </a:r>
           </a:p>
         </p:txBody>
@@ -1362,77 +1361,7 @@
           <a:lstStyle/>
           <a:p>
             <a:r>
-              <a:t>デプロイ用のエクスポートは export_onnx.py です。モード 3 がエンジン用のchannels-last NHWC 版で、これが推奨です。C# の観測ビルダーは H×W×C の平坦配列を出力するため、channels-first 版のモデルに入れるとチャネルが混ざり、スロットル 0.4・ステア 0.2 程度のほぼ一定の出力に退化します。実際にこの症状で『モデルが曲がらない』というデバッグを経験したので、症状として覚えておいてください。トラックや観測の設定を変えたら、export_track_json.py で C# 側の正解データを再生成し、検証ハーネスを回します。加速度レンジなどの定数は C# 側に意図的に複製されているので、変更時は C# 定数、JSON 再生成、検証、ONNX 再エクスポートの 4 点セットを忘れずに。</a:t>
-            </a:r>
-          </a:p>
-        </p:txBody>
-      </p:sp>
-      <p:sp>
-        <p:nvSpPr>
-          <p:cNvPr id="4" name="Slide Number Placeholder 3"/>
-          <p:cNvSpPr>
-            <a:spLocks noGrp="1"/>
-          </p:cNvSpPr>
-          <p:nvPr>
-            <p:ph type="sldNum" idx="5" sz="quarter"/>
-          </p:nvPr>
-        </p:nvSpPr>
-        <p:spPr/>
-      </p:sp>
-    </p:spTree>
-  </p:cSld>
-  <p:clrMapOvr>
-    <a:masterClrMapping/>
-  </p:clrMapOvr>
-</p:notes>
-</file>
-
-<file path=ppt/notesSlides/notesSlide21.xml><?xml version="1.0" encoding="utf-8"?>
-<p:notes xmlns:a="http://schemas.openxmlformats.org/drawingml/2006/main" xmlns:p="http://schemas.openxmlformats.org/presentationml/2006/main" xmlns:r="http://schemas.openxmlformats.org/officeDocument/2006/relationships">
-  <p:cSld>
-    <p:spTree>
-      <p:nvGrpSpPr>
-        <p:cNvPr id="1" name=""/>
-        <p:cNvGrpSpPr/>
-        <p:nvPr/>
-      </p:nvGrpSpPr>
-      <p:grpSpPr>
-        <a:xfrm>
-          <a:off x="0" y="0"/>
-          <a:ext cx="0" cy="0"/>
-          <a:chOff x="0" y="0"/>
-          <a:chExt cx="0" cy="0"/>
-        </a:xfrm>
-      </p:grpSpPr>
-      <p:sp>
-        <p:nvSpPr>
-          <p:cNvPr id="2" name="Slide Image Placeholder 1"/>
-          <p:cNvSpPr>
-            <a:spLocks noGrp="1"/>
-          </p:cNvSpPr>
-          <p:nvPr>
-            <p:ph type="sldImg" idx="2"/>
-          </p:nvPr>
-        </p:nvSpPr>
-        <p:spPr/>
-      </p:sp>
-      <p:sp>
-        <p:nvSpPr>
-          <p:cNvPr id="3" name="Notes Placeholder 2"/>
-          <p:cNvSpPr>
-            <a:spLocks noGrp="1"/>
-          </p:cNvSpPr>
-          <p:nvPr>
-            <p:ph type="body" idx="3" sz="quarter"/>
-          </p:nvPr>
-        </p:nvSpPr>
-        <p:spPr/>
-        <p:txBody>
-          <a:bodyPr/>
-          <a:lstStyle/>
-          <a:p>
-            <a:r>
-              <a:t>まとめます。highway-env のデフォルトはステアリングだけの車線追従環境でした。そこにスロットルと実車動力学、物理的な壁、速く走る報酬、前方に偏った視野を段階的に加え、壁擦りや壁這いといった抜け道をひとつずつ経済的に割に合わなくして、最終的に 6 万ステップで周回を学習する環境になりました。汎化は自己位置を見せないという観測設計から生まれ、C# 側は数値一致の検証で「移植したら挙動が変わった」を排除しています。今後は RE Engine 内での実走検証と、実車ダイナミクスへの適合が次のステップです。ご清聴ありがとうございました。</a:t>
+              <a:t>まとめです。デフォルトのステア専用レーン追従環境に、行動・壁・報酬・観測・トラックの5 段階の進化を施し、抜け道を経済的に割に合わなくした結果、6 万ステップで周回を学習する環境になりました。汎化は自己位置を見せない観測設計の帰結です。実ゲームとのギャップは一覧化した上で、消せるものは数値一致移植で消し、残差はデプロイ側フィルタで吸収する二層戦略を取っています。次のステップは RE Engine 内での実走検証と、実測に基づく壁摩擦・動力学パラメータの適合です。ご清聴ありがとうございました。</a:t>
             </a:r>
           </a:p>
         </p:txBody>
@@ -1502,7 +1431,7 @@
           <a:lstStyle/>
           <a:p>
             <a:r>
-              <a:t>学習の速さです。横軸が学習ステップ、縦軸が 1 エピソードあたりの周回数です。青が fast トラック単体の学習で、3 万ステップでは 1 周で壁に刺さりますが、6 万で 32 周、9 万で 36 周に達し、以降は制限速度巡航に収束します。オレンジがランダムトラック学習で、最難関の chicane 評価でも 5 万ステップから 33 周と、ほぼ同じ速度で立ち上がります。この速さは偶然ではなく、後で説明する報酬設計の結果です。</a:t>
+              <a:t>横軸が学習ステップ、縦軸がエピソードあたり周回数です。青の fast 単体学習は3 万で 1 周、6 万で 32 周、9 万で 36 周。オレンジのランダムトラック学習も最難関 chicane評価で 5 万から 33 周。この立ち上がりの速さは、後述する密な報酬設計の直接の結果です。</a:t>
             </a:r>
           </a:p>
         </p:txBody>
@@ -1572,7 +1501,7 @@
           <a:lstStyle/>
           <a:p>
             <a:r>
-              <a:t>1 台分の軌跡を拡大したものです。12 万ステップの fast-dev モデルの 2 分間で、黒線がコースの物理壁、点の色が速度です。直線で最高速に達し、ヘアピン進入で青く、つまりしっかり減速し、出口で再加速しています。以前は S 字の先の e-f コーナーで壁に張り付いて動けなくなる問題がありましたが、報酬の再設計で解消しました。この「壁に張り付く」問題との戦いが、本プロジェクトの中心的なエピソードです。</a:t>
+              <a:t>1 台分の軌跡です。黒線が物理壁、色が速度。直線で最高速、ヘアピン進入で減速、出口で再加速。以前は e-f コーナーで壁に張り付く問題があり、その解決過程が本プロジェクトの中心的なエピソードになっています。</a:t>
             </a:r>
           </a:p>
         </p:txBody>
@@ -1642,7 +1571,7 @@
           <a:lstStyle/>
           <a:p>
             <a:r>
-              <a:t>映像で見ていただいた結果を数字でまとめます。fast トラックで 800 秒 37 周・無衝突。周回能力の獲得は 3 万から 6 万ステップ。12 万ステップの短縮設定 fast-dev でも、NPC ありのフェーズ 2 まで通して 37 周を維持します。汎化モデルは 5 コースすべてを平均 15.7 m/s で走破。そして C# 側の観測生成は Python とビット一致、車両物理も 1e-7 で一致しており、エンジンに載せた瞬間から学習時と同じ挙動が保証されます。</a:t>
+              <a:t>数字でまとめます。fast トラック 800 秒 37 周・無衝突。周回獲得は 3〜6 万ステップ。12 万ステップの短縮設定でもフェーズ 2 込みで 37 周。汎化モデルは 5 コース平均 15.7 m/s。C# 側は観測ビット一致・物理 1e-7 一致で、移植による挙動変化を排除しています。</a:t>
             </a:r>
           </a:p>
         </p:txBody>
@@ -1712,7 +1641,7 @@
           <a:lstStyle/>
           <a:p>
             <a:r>
-              <a:t>ここからが本題です。ベースにした highway-env は自動運転研究向けの軽量シミュレータで、racetrack 環境がレース走行に一番近いものです。ただしデフォルト設定を詳しく見ると、ゲームのレースとはかなり違います。まず行動はステアリングのみで、速度は 0・5・10 の離散ターゲットから選ぶだけ。スロットルという概念がありません。観測は presence と on_road の2 チャネルだけで、周囲 18 m の対称視野。報酬は車線中央維持と操作量ペナルティが中心で、速く走る動機がありません。そして路外に出ても物理的な壁はなく、エピソードが終わるだけです。車両も既定ではタイヤスリップのない運動学モデルです。</a:t>
+              <a:t>詳細に入る前に前提を揃えます。highway-env は自動運転研究向けの 2 次元シミュレータで、道路をレーン中心線の集合として解析的に表現します。観測は OccupancyGrid、つまり自車周辺を格子に切って特徴を書き込む鳥瞰表現が標準です。本タスクはこの上でのサーキット周回で、強化学習的には連続制御の POMDP です。自己座標を観測に入れないため、方策はコースを暗記できず、見えている道路形状への反射として運転を学習します。意思決定は 5 Hz、物理は 15 Hz で、1 アクションを 3 物理ステップ保持するフレームスキップ構成。割引率 0.99 は 5 Hz で実効ホライズン約 20 秒、ちょうど 1 周分に相当します。</a:t>
             </a:r>
           </a:p>
         </p:txBody>
@@ -1782,7 +1711,7 @@
           <a:lstStyle/>
           <a:p>
             <a:r>
-              <a:t>左が highway-env デフォルトの racetrack、右が我々の fast トラックです。形状も作り直し、S 字と 2 つのヘアピンを持たせて難所を意図的に作りました。しかし本質的な違いは形ではなく物理です。左はステアリングだけ・壁なし・10 m/s、右はスロットル制御・外周が物理壁・16 m/s で、壁に当たると停止しバックでしか脱出できません。この差を埋めるために行った変更を、これから順番に説明します。</a:t>
+              <a:t>デフォルト設定をインストール版のソースから正確に押さえます。行動はステアリングのみで、速度は 0・5・10 の離散ターゲット。観測は presence と on_road の 2 チャネルだけ。報酬は車線中央維持と操作量ペナルティで、速く走る動機がそもそもありません。壁は存在せず、路外に出たらエピソードが終わるだけ。車両は既定ではスリップなしの運動学モデルです。車線をなぞる研究には十分ですが、アクセルを踏み、壁があり、速さを競うゲームのレースとは前提が異なります。</a:t>
             </a:r>
           </a:p>
         </p:txBody>
@@ -1852,7 +1781,7 @@
           <a:lstStyle/>
           <a:p>
             <a:r>
-              <a:t>専門家向けに問題設定を形式化しておきます。タスクは部分観測マルコフ決定過程です。エージェントは 5 Hz で意思決定し、物理は 15 Hz で刻みます。1 アクションを 3 物理ステップ保持するフレームスキップ構成です。観測に相対速度と自車の速度由来特徴が含まれるため、フレームスタックなしでも近似的にマルコフ性が成り立ちます。割引率 0.99 は 5 Hz で実効ホライズン約 20 秒、つまりちょうど 1 周分に相当し、コーナー進入前の減速判断に必要な信用割当が 1 周スケールで届く設計です。報酬は毎ステップ [0,1] に正規化されており、PPO のアドバンテージ正規化と併せてスケール不変な学習を狙っています。</a:t>
+              <a:t>左がデフォルト、右が我々の fast トラックです。形状は S 字と 2 つのヘアピンを持たせて難所を意図的に作りました。ただし本質は形ではなく物理です。左はステアのみ・壁なし・10 m/s、右はスロットル制御・外周が物理壁・16 m/s。この差を 5 段階で埋めていきます。</a:t>
             </a:r>
           </a:p>
         </p:txBody>
@@ -1922,7 +1851,7 @@
           <a:lstStyle/>
           <a:p>
             <a:r>
-              <a:t>最初の変更は行動空間です。ゲームの車はアクセルとブレーキを踏むので、ステアリング専用だったものを連続スロットル付きの 2 次元連続行動に変更し、加速度レンジは ±5 m/s²、ステアは ±30 度としました。車両モデルもタイヤスリップを持つ動的 Bicycle モデルに切り替えています。加速度レンジは実験で決めました。グラフの赤い破線が ±2.5 m/s² に絞った実験で、10 万ステップで 22 周までは学習できるものの巡航速度が 10 m/s に頭打ちし、終盤には退行しました。原因は制動距離です。16 m/s から 2.5 m/s² で止まるには 51 m 必要ですが、観測の前方視野は 27 m しかなく、「見えてから減速」が物理的に間に合いません。エンジン出力を絞りたい場合はブレーキだけ強い非対称レンジ [−5, +2.5] を推奨しています。</a:t>
+              <a:t>第一の変更は行動空間です。連続スロットルとステアの 2 次元にし、動的 Bicycle モデルに切り替えました。ここで各レンジの意味を明確にしておきます。acceleration_range ±5 m/s² は方策の正規化出力 [−1,1] を実際の加速度に線形写像する係数です。steering_range ±π/6 は前輪舵角の上限で、最小旋回半径約 8 m を与え、最小コーナー半径 10 m に余裕を持って対応します。±5 という数字は実験で正当化しています。右のグラフの赤破線が ±2.5 m/s² 実験で、22 周までは学習するものの巡航が 10 m/s に頭打ちし終盤退行しました。原因は制動距離で、16 m/s から 2.5 m/s² では 51 m 必要ですが前方視野は 27 m しかない。「見えてから減速」が物理的に間に合わないのです。出力を絞るならブレーキだけ残す非対称 [−5, +2.5] を推奨します。</a:t>
             </a:r>
           </a:p>
         </p:txBody>
@@ -5010,8 +4939,8 @@
         </p:nvSpPr>
         <p:spPr>
           <a:xfrm>
-            <a:off x="457200" y="201168"/>
-            <a:ext cx="11247120" cy="777240"/>
+            <a:off x="457200" y="182880"/>
+            <a:ext cx="11247120" cy="731520"/>
           </a:xfrm>
           <a:prstGeom prst="rect">
             <a:avLst/>
@@ -5025,13 +4954,13 @@
           <a:lstStyle/>
           <a:p>
             <a:r>
-              <a:rPr sz="2800" b="1">
+              <a:rPr sz="2700" b="1">
                 <a:solidFill>
                   <a:srgbClr val="1B5EA8"/>
                 </a:solidFill>
                 <a:latin typeface="Meiryo"/>
               </a:rPr>
-              <a:t>進化 (2) 壁の物理 — 「なし → 反発 → 停止」の変遷</a:t>
+              <a:t>進化 (2) 壁の物理 — なし → 反発 → 停止</a:t>
             </a:r>
           </a:p>
         </p:txBody>
@@ -5044,8 +4973,8 @@
         </p:nvSpPr>
         <p:spPr>
           <a:xfrm>
-            <a:off x="548640" y="1234440"/>
-            <a:ext cx="11064240" cy="5394960"/>
+            <a:off x="548640" y="1097280"/>
+            <a:ext cx="11064240" cy="5486400"/>
           </a:xfrm>
           <a:prstGeom prst="rect">
             <a:avLst/>
@@ -5060,81 +4989,177 @@
           <a:p>
             <a:pPr>
               <a:spcAft>
-                <a:spcPts val="500"/>
-              </a:spcAft>
-            </a:pPr>
-            <a:r>
-              <a:rPr sz="1700" b="0">
+                <a:spcPts val="600"/>
+              </a:spcAft>
+            </a:pPr>
+            <a:r>
+              <a:rPr sz="1500" b="1">
                 <a:solidFill>
                   <a:srgbClr val="222222"/>
                 </a:solidFill>
                 <a:latin typeface="Meiryo"/>
               </a:rPr>
-              <a:t>v0: 壁なし (デフォルト) → コーナーを路外ショートカットする走りを学習</a:t>
+              <a:t>変遷と各段階の失敗</a:t>
+            </a:r>
+          </a:p>
+          <a:p>
+            <a:pPr lvl="1">
+              <a:spcAft>
+                <a:spcPts val="200"/>
+              </a:spcAft>
+            </a:pPr>
+            <a:r>
+              <a:rPr sz="1300" b="0">
+                <a:solidFill>
+                  <a:srgbClr val="595959"/>
+                </a:solidFill>
+                <a:latin typeface="Meiryo"/>
+              </a:rPr>
+              <a:t>・v0 壁なし (デフォルト): 路外ショートカットを学習</a:t>
+            </a:r>
+          </a:p>
+          <a:p>
+            <a:pPr lvl="1">
+              <a:spcAft>
+                <a:spcPts val="200"/>
+              </a:spcAft>
+            </a:pPr>
+            <a:r>
+              <a:rPr sz="1300" b="0">
+                <a:solidFill>
+                  <a:srgbClr val="B32D2D"/>
+                </a:solidFill>
+                <a:latin typeface="Meiryo"/>
+              </a:rPr>
+              <a:t>・v1 反発壁 (bounce): wall-riding — 壁が方向転換を代行し最速解に</a:t>
+            </a:r>
+          </a:p>
+          <a:p>
+            <a:pPr lvl="1">
+              <a:spcAft>
+                <a:spcPts val="200"/>
+              </a:spcAft>
+            </a:pPr>
+            <a:r>
+              <a:rPr sz="1300" b="1">
+                <a:solidFill>
+                  <a:srgbClr val="595959"/>
+                </a:solidFill>
+                <a:latin typeface="Meiryo"/>
+              </a:rPr>
+              <a:t>・v2 停止壁 (stop): 接触で停止、バックのみで脱出可 — ゲーム物理と一致</a:t>
             </a:r>
           </a:p>
           <a:p>
             <a:pPr>
               <a:spcAft>
-                <a:spcPts val="500"/>
-              </a:spcAft>
-            </a:pPr>
-            <a:r>
-              <a:rPr sz="1700" b="0">
-                <a:solidFill>
-                  <a:srgbClr val="B32D2D"/>
-                </a:solidFill>
-                <a:latin typeface="Meiryo"/>
-              </a:rPr>
-              <a:t>v1: 反発壁 (bounce) → 壁に擦って曲がる wall-riding が最速解に</a:t>
+                <a:spcPts val="600"/>
+              </a:spcAft>
+            </a:pPr>
+            <a:r>
+              <a:rPr sz="1500" b="1">
+                <a:solidFill>
+                  <a:srgbClr val="222222"/>
+                </a:solidFill>
+                <a:latin typeface="Meiryo"/>
+              </a:rPr>
+              <a:t>抜け道の遮断</a:t>
+            </a:r>
+          </a:p>
+          <a:p>
+            <a:pPr lvl="1">
+              <a:spcAft>
+                <a:spcPts val="200"/>
+              </a:spcAft>
+            </a:pPr>
+            <a:r>
+              <a:rPr sz="1300" b="0">
+                <a:solidFill>
+                  <a:srgbClr val="595959"/>
+                </a:solidFill>
+                <a:latin typeface="Meiryo"/>
+              </a:rPr>
+              <a:t>・壁接触中は速度・前進報酬をゼロ化 (wall-riding の収益を絶つ)</a:t>
+            </a:r>
+          </a:p>
+          <a:p>
+            <a:pPr lvl="1">
+              <a:spcAft>
+                <a:spcPts val="200"/>
+              </a:spcAft>
+            </a:pPr>
+            <a:r>
+              <a:rPr sz="1300" b="0">
+                <a:solidFill>
+                  <a:srgbClr val="595959"/>
+                </a:solidFill>
+                <a:latin typeface="Meiryo"/>
+              </a:rPr>
+              <a:t>・接触 35 ステップ (7 秒) 継続でクラッシュ扱い終了 (壁沿い周回の禁止)</a:t>
+            </a:r>
+          </a:p>
+          <a:p>
+            <a:pPr lvl="1">
+              <a:spcAft>
+                <a:spcPts val="200"/>
+              </a:spcAft>
+            </a:pPr>
+            <a:r>
+              <a:rPr sz="1300" b="0">
+                <a:solidFill>
+                  <a:srgbClr val="595959"/>
+                </a:solidFill>
+                <a:latin typeface="Meiryo"/>
+              </a:rPr>
+              <a:t>・壁摩擦 0.6: 接線速度を物理フレーム毎に減衰 — 擦っても速度が残らない</a:t>
             </a:r>
           </a:p>
           <a:p>
             <a:pPr>
               <a:spcAft>
-                <a:spcPts val="500"/>
-              </a:spcAft>
-            </a:pPr>
-            <a:r>
-              <a:rPr sz="1700" b="1">
+                <a:spcPts val="600"/>
+              </a:spcAft>
+            </a:pPr>
+            <a:r>
+              <a:rPr sz="1500" b="1">
                 <a:solidFill>
                   <a:srgbClr val="222222"/>
                 </a:solidFill>
                 <a:latin typeface="Meiryo"/>
               </a:rPr>
-              <a:t>v2 (最終): 停止壁 (stop) + 壁接触中は速度報酬ゼロ + 接触 35 ステップで終了</a:t>
-            </a:r>
-          </a:p>
-          <a:p>
-            <a:pPr>
-              <a:spcAft>
-                <a:spcPts val="500"/>
-              </a:spcAft>
-            </a:pPr>
-            <a:r>
-              <a:rPr sz="1700" b="1">
-                <a:solidFill>
-                  <a:srgbClr val="222222"/>
-                </a:solidFill>
-                <a:latin typeface="Meiryo"/>
-              </a:rPr>
-              <a:t>壁 = コース外周のみ。車線境界の白線は壁ではない (2 車線を使うライン取りを許す)</a:t>
+              <a:t>壁の定義</a:t>
             </a:r>
           </a:p>
           <a:p>
             <a:pPr lvl="1">
               <a:spcAft>
-                <a:spcPts val="500"/>
-              </a:spcAft>
-            </a:pPr>
-            <a:r>
-              <a:rPr sz="1500" b="0">
+                <a:spcPts val="200"/>
+              </a:spcAft>
+            </a:pPr>
+            <a:r>
+              <a:rPr sz="1300" b="1">
                 <a:solidFill>
                   <a:srgbClr val="595959"/>
                 </a:solidFill>
                 <a:latin typeface="Meiryo"/>
               </a:rPr>
-              <a:t>目的: ゲームの物理と一致 + 「壁を使う」抜け道をすべて塞ぐ</a:t>
+              <a:t>・コース外周のみが壁。車線境界の白線は壁ではない (2 車線を使うライン取りを許す)</a:t>
+            </a:r>
+          </a:p>
+          <a:p>
+            <a:pPr lvl="2">
+              <a:spcAft>
+                <a:spcPts val="200"/>
+              </a:spcAft>
+            </a:pPr>
+            <a:r>
+              <a:rPr sz="1100" b="0">
+                <a:solidFill>
+                  <a:srgbClr val="595959"/>
+                </a:solidFill>
+                <a:latin typeface="Meiryo"/>
+              </a:rPr>
+              <a:t>− 初期実装は車線単位判定で白線が壁化するバグ → コリドー両端判定に修正</a:t>
             </a:r>
           </a:p>
         </p:txBody>
@@ -5165,8 +5190,8 @@
         </p:nvSpPr>
         <p:spPr>
           <a:xfrm>
-            <a:off x="457200" y="201168"/>
-            <a:ext cx="11247120" cy="777240"/>
+            <a:off x="457200" y="182880"/>
+            <a:ext cx="11247120" cy="731520"/>
           </a:xfrm>
           <a:prstGeom prst="rect">
             <a:avLst/>
@@ -5180,13 +5205,13 @@
           <a:lstStyle/>
           <a:p>
             <a:r>
-              <a:rPr sz="2800" b="1">
+              <a:rPr sz="2700" b="1">
                 <a:solidFill>
                   <a:srgbClr val="1B5EA8"/>
                 </a:solidFill>
                 <a:latin typeface="Meiryo"/>
               </a:rPr>
-              <a:t>進化 (3) 報酬の経済設計 — 抜け道より運転が得になるまで</a:t>
+              <a:t>進化 (3) 報酬の経済設計 — 実測で順序を保証する</a:t>
             </a:r>
           </a:p>
         </p:txBody>
@@ -5207,8 +5232,8 @@
         </p:blipFill>
         <p:spPr>
           <a:xfrm>
-            <a:off x="640080" y="1188720"/>
-            <a:ext cx="6766560" cy="3304599"/>
+            <a:off x="502920" y="1234440"/>
+            <a:ext cx="6583680" cy="3215286"/>
           </a:xfrm>
           <a:prstGeom prst="rect">
             <a:avLst/>
@@ -5223,8 +5248,8 @@
         </p:nvSpPr>
         <p:spPr>
           <a:xfrm>
-            <a:off x="7589520" y="1371600"/>
-            <a:ext cx="4206240" cy="5394960"/>
+            <a:off x="7315200" y="1234440"/>
+            <a:ext cx="4480560" cy="5486400"/>
           </a:xfrm>
           <a:prstGeom prst="rect">
             <a:avLst/>
@@ -5239,7 +5264,7 @@
           <a:p>
             <a:pPr>
               <a:spcAft>
-                <a:spcPts val="500"/>
+                <a:spcPts val="600"/>
               </a:spcAft>
             </a:pPr>
             <a:r>
@@ -5249,29 +5274,77 @@
                 </a:solidFill>
                 <a:latin typeface="Meiryo"/>
               </a:rPr>
-              <a:t>目標: 運転 &gt; 脱出 &gt; 停滞 &gt; 壁擦り の順序</a:t>
+              <a:t>報酬の構成</a:t>
+            </a:r>
+          </a:p>
+          <a:p>
+            <a:pPr lvl="1">
+              <a:spcAft>
+                <a:spcPts val="200"/>
+              </a:spcAft>
+            </a:pPr>
+            <a:r>
+              <a:rPr sz="1200" b="0">
+                <a:solidFill>
+                  <a:srgbClr val="595959"/>
+                </a:solidFill>
+                <a:latin typeface="Meiryo"/>
+              </a:rPr>
+              <a:t>・dense: 速度 + 車線中央 + 前進投影</a:t>
+            </a:r>
+          </a:p>
+          <a:p>
+            <a:pPr lvl="1">
+              <a:spcAft>
+                <a:spcPts val="200"/>
+              </a:spcAft>
+            </a:pPr>
+            <a:r>
+              <a:rPr sz="1200" b="0">
+                <a:solidFill>
+                  <a:srgbClr val="595959"/>
+                </a:solidFill>
+                <a:latin typeface="Meiryo"/>
+              </a:rPr>
+              <a:t>・sparse: チェックポイント/ラップ (生単位で加算)</a:t>
             </a:r>
           </a:p>
           <a:p>
             <a:pPr>
               <a:spcAft>
-                <a:spcPts val="500"/>
-              </a:spcAft>
-            </a:pPr>
-            <a:r>
-              <a:rPr sz="1400" b="0">
+                <a:spcPts val="600"/>
+              </a:spcAft>
+            </a:pPr>
+            <a:r>
+              <a:rPr sz="1400" b="1">
                 <a:solidFill>
                   <a:srgbClr val="222222"/>
                 </a:solidFill>
                 <a:latin typeface="Meiryo"/>
               </a:rPr>
-              <a:t>脱出ゾーン (壁 1 m): バック免除 +</a:t>
+              <a:t>順序の設計 (実測で検証)</a:t>
             </a:r>
           </a:p>
           <a:p>
             <a:pPr lvl="1">
               <a:spcAft>
-                <a:spcPts val="500"/>
+                <a:spcPts val="200"/>
+              </a:spcAft>
+            </a:pPr>
+            <a:r>
+              <a:rPr sz="1200" b="1">
+                <a:solidFill>
+                  <a:srgbClr val="595959"/>
+                </a:solidFill>
+                <a:latin typeface="Meiryo"/>
+              </a:rPr>
+              <a:t>・運転 &gt; 脱出 &gt; 停滞 &gt; 壁擦り</a:t>
+            </a:r>
+          </a:p>
+          <a:p>
+            <a:pPr lvl="1">
+              <a:spcAft>
+                <a:spcPts val="200"/>
               </a:spcAft>
             </a:pPr>
             <a:r>
@@ -5281,29 +5354,45 @@
                 </a:solidFill>
                 <a:latin typeface="Meiryo"/>
               </a:rPr>
-              <a:t>  距離増加に報酬 — 「壁を這う」局所解を排除</a:t>
+              <a:t>・脱出ゾーン 1 m: バック免除 + Δクリアランス報酬</a:t>
+            </a:r>
+          </a:p>
+          <a:p>
+            <a:pPr lvl="2">
+              <a:spcAft>
+                <a:spcPts val="200"/>
+              </a:spcAft>
+            </a:pPr>
+            <a:r>
+              <a:rPr sz="1000" b="0">
+                <a:solidFill>
+                  <a:srgbClr val="595959"/>
+                </a:solidFill>
+                <a:latin typeface="Meiryo"/>
+              </a:rPr>
+              <a:t>− = potential-based shaping (Ng+ 1999)</a:t>
             </a:r>
           </a:p>
           <a:p>
             <a:pPr>
               <a:spcAft>
-                <a:spcPts val="500"/>
-              </a:spcAft>
-            </a:pPr>
-            <a:r>
-              <a:rPr sz="1400" b="0">
+                <a:spcPts val="600"/>
+              </a:spcAft>
+            </a:pPr>
+            <a:r>
+              <a:rPr sz="1400" b="1">
                 <a:solidFill>
                   <a:srgbClr val="222222"/>
                 </a:solidFill>
                 <a:latin typeface="Meiryo"/>
               </a:rPr>
-              <a:t>lmap [-3,3]→[0,1]: 範囲が下限を覆わないと</a:t>
+              <a:t>正規化の罠</a:t>
             </a:r>
           </a:p>
           <a:p>
             <a:pPr lvl="1">
               <a:spcAft>
-                <a:spcPts val="500"/>
+                <a:spcPts val="200"/>
               </a:spcAft>
             </a:pPr>
             <a:r>
@@ -5313,23 +5402,23 @@
                 </a:solidFill>
                 <a:latin typeface="Meiryo"/>
               </a:rPr>
-              <a:t>  勾配消失 (導出をコメントで管理)</a:t>
-            </a:r>
-          </a:p>
-          <a:p>
-            <a:pPr>
-              <a:spcAft>
-                <a:spcPts val="500"/>
-              </a:spcAft>
-            </a:pPr>
-            <a:r>
-              <a:rPr sz="1400" b="0">
-                <a:solidFill>
-                  <a:srgbClr val="222222"/>
-                </a:solidFill>
-                <a:latin typeface="Meiryo"/>
-              </a:rPr>
-              <a:t>チェックポイント/ラップボーナスは生単位で加算</a:t>
+              <a:t>・lmap [-3,3]→[0,1]: 範囲が下限を覆わないと勾配消失</a:t>
+            </a:r>
+          </a:p>
+          <a:p>
+            <a:pPr lvl="2">
+              <a:spcAft>
+                <a:spcPts val="200"/>
+              </a:spcAft>
+            </a:pPr>
+            <a:r>
+              <a:rPr sz="1000" b="0">
+                <a:solidFill>
+                  <a:srgbClr val="595959"/>
+                </a:solidFill>
+                <a:latin typeface="Meiryo"/>
+              </a:rPr>
+              <a:t>− 飽和は milestone ステップのみに意図的に許容</a:t>
             </a:r>
           </a:p>
         </p:txBody>
@@ -5360,8 +5449,8 @@
         </p:nvSpPr>
         <p:spPr>
           <a:xfrm>
-            <a:off x="457200" y="201168"/>
-            <a:ext cx="11247120" cy="777240"/>
+            <a:off x="457200" y="182880"/>
+            <a:ext cx="11247120" cy="731520"/>
           </a:xfrm>
           <a:prstGeom prst="rect">
             <a:avLst/>
@@ -5375,13 +5464,13 @@
           <a:lstStyle/>
           <a:p>
             <a:r>
-              <a:rPr sz="2800" b="1">
+              <a:rPr sz="2700" b="1">
                 <a:solidFill>
                   <a:srgbClr val="1B5EA8"/>
                 </a:solidFill>
                 <a:latin typeface="Meiryo"/>
               </a:rPr>
-              <a:t>報酬設計の理論背景 — specification gaming と shaping</a:t>
+              <a:t>進化 (4) 観測 — 10 チャネルの内訳と正規化レンジ</a:t>
             </a:r>
           </a:p>
         </p:txBody>
@@ -5394,8 +5483,8 @@
         </p:nvSpPr>
         <p:spPr>
           <a:xfrm>
-            <a:off x="548640" y="1325880"/>
-            <a:ext cx="11064240" cy="5394960"/>
+            <a:off x="548640" y="1143000"/>
+            <a:ext cx="11064240" cy="5486400"/>
           </a:xfrm>
           <a:prstGeom prst="rect">
             <a:avLst/>
@@ -5410,101 +5499,157 @@
           <a:p>
             <a:pPr>
               <a:spcAft>
-                <a:spcPts val="500"/>
-              </a:spcAft>
-            </a:pPr>
-            <a:r>
-              <a:rPr sz="1700" b="1">
+                <a:spcPts val="600"/>
+              </a:spcAft>
+            </a:pPr>
+            <a:r>
+              <a:rPr sz="1500" b="1">
                 <a:solidFill>
                   <a:srgbClr val="222222"/>
                 </a:solidFill>
                 <a:latin typeface="Meiryo"/>
               </a:rPr>
-              <a:t>観測された specification gaming: ①路外ショートカット ②wall-riding ③壁這い (creeping)</a:t>
+              <a:t>10 チャネルの意味 (12×12 セル、3 m 刻み)</a:t>
+            </a:r>
+          </a:p>
+          <a:p>
+            <a:pPr lvl="1">
+              <a:spcAft>
+                <a:spcPts val="200"/>
+              </a:spcAft>
+            </a:pPr>
+            <a:r>
+              <a:rPr sz="1300" b="0">
+                <a:solidFill>
+                  <a:srgbClr val="595959"/>
+                </a:solidFill>
+                <a:latin typeface="Meiryo"/>
+              </a:rPr>
+              <a:t>・presence: 車の存在 / on_road: レーン中心線のトレース (塗りつぶしではない!)</a:t>
+            </a:r>
+          </a:p>
+          <a:p>
+            <a:pPr lvl="1">
+              <a:spcAft>
+                <a:spcPts val="200"/>
+              </a:spcAft>
+            </a:pPr>
+            <a:r>
+              <a:rPr sz="1300" b="0">
+                <a:solidFill>
+                  <a:srgbClr val="595959"/>
+                </a:solidFill>
+                <a:latin typeface="Meiryo"/>
+              </a:rPr>
+              <a:t>・x, y (÷100 m) / vx, vy (÷20 m/s): 他車の自車相対の位置・速度 — 値はトラック座標のまま</a:t>
+            </a:r>
+          </a:p>
+          <a:p>
+            <a:pPr lvl="1">
+              <a:spcAft>
+                <a:spcPts val="200"/>
+              </a:spcAft>
+            </a:pPr>
+            <a:r>
+              <a:rPr sz="1300" b="0">
+                <a:solidFill>
+                  <a:srgbClr val="595959"/>
+                </a:solidFill>
+                <a:latin typeface="Meiryo"/>
+              </a:rPr>
+              <a:t>・cos_h, sin_h: 各車の絶対進行方向 (正規化不要)</a:t>
+            </a:r>
+          </a:p>
+          <a:p>
+            <a:pPr lvl="1">
+              <a:spcAft>
+                <a:spcPts val="200"/>
+              </a:spcAft>
+            </a:pPr>
+            <a:r>
+              <a:rPr sz="1300" b="0">
+                <a:solidFill>
+                  <a:srgbClr val="595959"/>
+                </a:solidFill>
+                <a:latin typeface="Meiryo"/>
+              </a:rPr>
+              <a:t>・lat_off (÷4 m) / ang_off (÷π): レーン中心からの横ずれ・角度ずれ — 車線維持の主信号</a:t>
             </a:r>
           </a:p>
           <a:p>
             <a:pPr>
               <a:spcAft>
-                <a:spcPts val="500"/>
-              </a:spcAft>
-            </a:pPr>
-            <a:r>
-              <a:rPr sz="1700" b="1">
+                <a:spcPts val="600"/>
+              </a:spcAft>
+            </a:pPr>
+            <a:r>
+              <a:rPr sz="1500" b="1">
                 <a:solidFill>
                   <a:srgbClr val="222222"/>
                 </a:solidFill>
                 <a:latin typeface="Meiryo"/>
               </a:rPr>
-              <a:t>対策 1: potential-based shaping (Ng+ 1999) — 壁クリアランス φ の差分報酬は最適方策を保存</a:t>
+              <a:t>features_range = 正規化の分母 ([−range, +range] → [−1, 1] に写像し clip)</a:t>
             </a:r>
           </a:p>
           <a:p>
             <a:pPr>
               <a:spcAft>
-                <a:spcPts val="500"/>
-              </a:spcAft>
-            </a:pPr>
-            <a:r>
-              <a:rPr sz="1700" b="0">
+                <a:spcPts val="600"/>
+              </a:spcAft>
+            </a:pPr>
+            <a:r>
+              <a:rPr sz="1500" b="1">
                 <a:solidFill>
                   <a:srgbClr val="222222"/>
                 </a:solidFill>
                 <a:latin typeface="Meiryo"/>
               </a:rPr>
-              <a:t>対策 2: 状態別 per-step 報酬の実測テーブルで順序 (運転&gt;脱出&gt;停滞&gt;壁擦り) を検証</a:t>
+              <a:t>視野: 前方 27 m / 後方 9 m の非対称 — 制動距離 16 m/s ÷ 5 m/s² = 25.6 m &lt; 27 m</a:t>
             </a:r>
           </a:p>
           <a:p>
             <a:pPr>
               <a:spcAft>
-                <a:spcPts val="500"/>
-              </a:spcAft>
-            </a:pPr>
-            <a:r>
-              <a:rPr sz="1700" b="0">
+                <a:spcPts val="600"/>
+              </a:spcAft>
+            </a:pPr>
+            <a:r>
+              <a:rPr sz="1500" b="0">
                 <a:solidFill>
                   <a:srgbClr val="222222"/>
                 </a:solidFill>
                 <a:latin typeface="Meiryo"/>
               </a:rPr>
-              <a:t>dense (速度・車線) + sparse (チェックポイント) のハイブリッド — 学習速度と方向性の両立</a:t>
-            </a:r>
-          </a:p>
-          <a:p>
-            <a:pPr>
-              <a:spcAft>
-                <a:spcPts val="500"/>
-              </a:spcAft>
-            </a:pPr>
-            <a:r>
-              <a:rPr sz="1700" b="1">
-                <a:solidFill>
-                  <a:srgbClr val="222222"/>
-                </a:solidFill>
-                <a:latin typeface="Meiryo"/>
-              </a:rPr>
-              <a:t>正規化 [0,1] はクリップを伴う → 範囲設計を誤ると勾配消失。飽和は milestone のみに許容</a:t>
-            </a:r>
-          </a:p>
-          <a:p>
-            <a:pPr>
-              <a:spcAft>
-                <a:spcPts val="500"/>
-              </a:spcAft>
-            </a:pPr>
-            <a:r>
-              <a:rPr sz="1700" b="0">
-                <a:solidFill>
-                  <a:srgbClr val="222222"/>
-                </a:solidFill>
-                <a:latin typeface="Meiryo"/>
-              </a:rPr>
-              <a:t>PPO はアドバンテージ正規化により報酬のアフィン変換に不変 — 正規化は診断のための設計</a:t>
-            </a:r>
-          </a:p>
-        </p:txBody>
-      </p:sp>
+              <a:t>自車の絶対座標は含まない → 暗記不能 → 汎化 (前提知識スライドの帰納バイアス)</a:t>
+            </a:r>
+          </a:p>
+        </p:txBody>
+      </p:sp>
+      <p:pic>
+        <p:nvPicPr>
+          <p:cNvPr id="4" name="Picture 3" descr="fastdev_trajectory.png"/>
+          <p:cNvPicPr>
+            <a:picLocks noChangeAspect="1"/>
+          </p:cNvPicPr>
+          <p:nvPr/>
+        </p:nvPicPr>
+        <p:blipFill>
+          <a:blip r:embed="rId3"/>
+          <a:stretch>
+            <a:fillRect/>
+          </a:stretch>
+        </p:blipFill>
+        <p:spPr>
+          <a:xfrm>
+            <a:off x="8001000" y="4160520"/>
+            <a:ext cx="3840480" cy="2560320"/>
+          </a:xfrm>
+          <a:prstGeom prst="rect">
+            <a:avLst/>
+          </a:prstGeom>
+        </p:spPr>
+      </p:pic>
     </p:spTree>
   </p:cSld>
   <p:clrMapOvr>
@@ -5531,8 +5676,8 @@
         </p:nvSpPr>
         <p:spPr>
           <a:xfrm>
-            <a:off x="457200" y="201168"/>
-            <a:ext cx="11247120" cy="777240"/>
+            <a:off x="457200" y="182880"/>
+            <a:ext cx="11247120" cy="731520"/>
           </a:xfrm>
           <a:prstGeom prst="rect">
             <a:avLst/>
@@ -5546,27 +5691,51 @@
           <a:lstStyle/>
           <a:p>
             <a:r>
-              <a:rPr sz="2800" b="1">
+              <a:rPr sz="2700" b="1">
                 <a:solidFill>
                   <a:srgbClr val="1B5EA8"/>
                 </a:solidFill>
                 <a:latin typeface="Meiryo"/>
               </a:rPr>
-              <a:t>進化 (4) 観測 — 2ch から 10ch へ、前方に偏った視野へ</a:t>
-            </a:r>
-          </a:p>
-        </p:txBody>
-      </p:sp>
-      <p:sp>
-        <p:nvSpPr>
-          <p:cNvPr id="3" name="TextBox 2"/>
+              <a:t>進化 (5) トラック 1 → 5 種 — ドメインランダム化</a:t>
+            </a:r>
+          </a:p>
+        </p:txBody>
+      </p:sp>
+      <p:pic>
+        <p:nvPicPr>
+          <p:cNvPr id="3" name="Picture 2" descr="track_shapes.png"/>
+          <p:cNvPicPr>
+            <a:picLocks noChangeAspect="1"/>
+          </p:cNvPicPr>
+          <p:nvPr/>
+        </p:nvPicPr>
+        <p:blipFill>
+          <a:blip r:embed="rId3"/>
+          <a:stretch>
+            <a:fillRect/>
+          </a:stretch>
+        </p:blipFill>
+        <p:spPr>
+          <a:xfrm>
+            <a:off x="411480" y="1417320"/>
+            <a:ext cx="11338560" cy="2267712"/>
+          </a:xfrm>
+          <a:prstGeom prst="rect">
+            <a:avLst/>
+          </a:prstGeom>
+        </p:spPr>
+      </p:pic>
+      <p:sp>
+        <p:nvSpPr>
+          <p:cNvPr id="4" name="TextBox 3"/>
           <p:cNvSpPr txBox="1"/>
           <p:nvPr/>
         </p:nvSpPr>
         <p:spPr>
           <a:xfrm>
-            <a:off x="548640" y="1325880"/>
-            <a:ext cx="11064240" cy="5394960"/>
+            <a:off x="548640" y="5943600"/>
+            <a:ext cx="11064240" cy="731520"/>
           </a:xfrm>
           <a:prstGeom prst="rect">
             <a:avLst/>
@@ -5581,81 +5750,17 @@
           <a:p>
             <a:pPr>
               <a:spcAft>
-                <a:spcPts val="500"/>
-              </a:spcAft>
-            </a:pPr>
-            <a:r>
-              <a:rPr sz="1700" b="1">
+                <a:spcPts val="600"/>
+              </a:spcAft>
+            </a:pPr>
+            <a:r>
+              <a:rPr sz="1400" b="0">
                 <a:solidFill>
                   <a:srgbClr val="222222"/>
                 </a:solidFill>
                 <a:latin typeface="Meiryo"/>
               </a:rPr>
-              <a:t>2ch (presence/on_road) → 10ch: + 相対位置 x,y / 相対速度 vx,vy / 向き cos_h,sin_h / lat_off / ang_off</a:t>
-            </a:r>
-          </a:p>
-          <a:p>
-            <a:pPr>
-              <a:spcAft>
-                <a:spcPts val="500"/>
-              </a:spcAft>
-            </a:pPr>
-            <a:r>
-              <a:rPr sz="1700" b="1">
-                <a:solidFill>
-                  <a:srgbClr val="222222"/>
-                </a:solidFill>
-                <a:latin typeface="Meiryo"/>
-              </a:rPr>
-              <a:t>視野: ±18 m 対称 → 前方 27 m / 後方 9 m の非対称 (12×12 セル, 3 m 刻み)</a:t>
-            </a:r>
-          </a:p>
-          <a:p>
-            <a:pPr lvl="1">
-              <a:spcAft>
-                <a:spcPts val="500"/>
-              </a:spcAft>
-            </a:pPr>
-            <a:r>
-              <a:rPr sz="1500" b="0">
-                <a:solidFill>
-                  <a:srgbClr val="595959"/>
-                </a:solidFill>
-                <a:latin typeface="Meiryo"/>
-              </a:rPr>
-              <a:t>根拠: 制動距離 16 m/s ÷ 5 m/s² = 25.6 m &lt; 27 m — 「見えてから止まれる」最小視野</a:t>
-            </a:r>
-          </a:p>
-          <a:p>
-            <a:pPr>
-              <a:spcAft>
-                <a:spcPts val="500"/>
-              </a:spcAft>
-            </a:pPr>
-            <a:r>
-              <a:rPr sz="1700" b="1">
-                <a:solidFill>
-                  <a:srgbClr val="222222"/>
-                </a:solidFill>
-                <a:latin typeface="Meiryo"/>
-              </a:rPr>
-              <a:t>自車の絶対座標は観測に含まない → コース暗記が不可能 → 汎化の鍵</a:t>
-            </a:r>
-          </a:p>
-          <a:p>
-            <a:pPr>
-              <a:spcAft>
-                <a:spcPts val="500"/>
-              </a:spcAft>
-            </a:pPr>
-            <a:r>
-              <a:rPr sz="1700" b="0">
-                <a:solidFill>
-                  <a:srgbClr val="222222"/>
-                </a:solidFill>
-                <a:latin typeface="Meiryo"/>
-              </a:rPr>
-              <a:t>on_road はレーン中心線のトレース (塗りつぶしマスクではない) — C# 移植時の要注意点</a:t>
+              <a:t>追加手順: race_env にビルダー → C# プリセット → export_track_json.py → 検証ハーネス</a:t>
             </a:r>
           </a:p>
         </p:txBody>
@@ -5686,8 +5791,8 @@
         </p:nvSpPr>
         <p:spPr>
           <a:xfrm>
-            <a:off x="457200" y="201168"/>
-            <a:ext cx="11247120" cy="777240"/>
+            <a:off x="457200" y="182880"/>
+            <a:ext cx="11247120" cy="731520"/>
           </a:xfrm>
           <a:prstGeom prst="rect">
             <a:avLst/>
@@ -5701,41 +5806,200 @@
           <a:lstStyle/>
           <a:p>
             <a:r>
-              <a:rPr sz="2800" b="1">
+              <a:rPr sz="2700" b="1">
                 <a:solidFill>
                   <a:srgbClr val="1B5EA8"/>
                 </a:solidFill>
                 <a:latin typeface="Meiryo"/>
               </a:rPr>
-              <a:t>進化 (5) トラックを 1 → 5 種に — 汎化学習</a:t>
-            </a:r>
-          </a:p>
-        </p:txBody>
-      </p:sp>
-      <p:pic>
-        <p:nvPicPr>
-          <p:cNvPr id="3" name="Picture 2" descr="track_shapes.png"/>
-          <p:cNvPicPr>
-            <a:picLocks noChangeAspect="1"/>
-          </p:cNvPicPr>
+              <a:t>学習パイプライン — 2 フェーズ PPO</a:t>
+            </a:r>
+          </a:p>
+        </p:txBody>
+      </p:sp>
+      <p:sp>
+        <p:nvSpPr>
+          <p:cNvPr id="3" name="TextBox 2"/>
+          <p:cNvSpPr txBox="1"/>
           <p:nvPr/>
-        </p:nvPicPr>
-        <p:blipFill>
-          <a:blip r:embed="rId3"/>
-          <a:stretch>
-            <a:fillRect/>
-          </a:stretch>
-        </p:blipFill>
+        </p:nvSpPr>
         <p:spPr>
           <a:xfrm>
-            <a:off x="411480" y="1554480"/>
-            <a:ext cx="11338560" cy="2267712"/>
+            <a:off x="548640" y="1143000"/>
+            <a:ext cx="11064240" cy="5486400"/>
           </a:xfrm>
           <a:prstGeom prst="rect">
             <a:avLst/>
           </a:prstGeom>
+          <a:noFill/>
         </p:spPr>
-      </p:pic>
+        <p:txBody>
+          <a:bodyPr wrap="square">
+            <a:spAutoFit/>
+          </a:bodyPr>
+          <a:lstStyle/>
+          <a:p>
+            <a:pPr>
+              <a:spcAft>
+                <a:spcPts val="600"/>
+              </a:spcAft>
+            </a:pPr>
+            <a:r>
+              <a:rPr sz="1500" b="1">
+                <a:solidFill>
+                  <a:srgbClr val="222222"/>
+                </a:solidFill>
+                <a:latin typeface="Meiryo"/>
+              </a:rPr>
+              <a:t>カリキュラム</a:t>
+            </a:r>
+          </a:p>
+          <a:p>
+            <a:pPr lvl="1">
+              <a:spcAft>
+                <a:spcPts val="200"/>
+              </a:spcAft>
+            </a:pPr>
+            <a:r>
+              <a:rPr sz="1300" b="0">
+                <a:solidFill>
+                  <a:srgbClr val="595959"/>
+                </a:solidFill>
+                <a:latin typeface="Meiryo"/>
+              </a:rPr>
+              <a:t>・フェーズ 1: NPC なしレーン追従 (12 万〜100 万 step)</a:t>
+            </a:r>
+          </a:p>
+          <a:p>
+            <a:pPr lvl="1">
+              <a:spcAft>
+                <a:spcPts val="200"/>
+              </a:spcAft>
+            </a:pPr>
+            <a:r>
+              <a:rPr sz="1300" b="0">
+                <a:solidFill>
+                  <a:srgbClr val="595959"/>
+                </a:solidFill>
+                <a:latin typeface="Meiryo"/>
+              </a:rPr>
+              <a:t>・フェーズ 2: NPC あり追い越し FT (学習率を下げて継続)</a:t>
+            </a:r>
+          </a:p>
+          <a:p>
+            <a:pPr>
+              <a:spcAft>
+                <a:spcPts val="600"/>
+              </a:spcAft>
+            </a:pPr>
+            <a:r>
+              <a:rPr sz="1500" b="1">
+                <a:solidFill>
+                  <a:srgbClr val="222222"/>
+                </a:solidFill>
+                <a:latin typeface="Meiryo"/>
+              </a:rPr>
+              <a:t>方策・初期化</a:t>
+            </a:r>
+          </a:p>
+          <a:p>
+            <a:pPr lvl="1">
+              <a:spcAft>
+                <a:spcPts val="200"/>
+              </a:spcAft>
+            </a:pPr>
+            <a:r>
+              <a:rPr sz="1300" b="0">
+                <a:solidFill>
+                  <a:srgbClr val="595959"/>
+                </a:solidFill>
+                <a:latin typeface="Meiryo"/>
+              </a:rPr>
+              <a:t>・カスタム CNN (10ch → 512) + 直交初期化 + throttle バイアス +0.4 (探索の対称性を破る)</a:t>
+            </a:r>
+          </a:p>
+          <a:p>
+            <a:pPr>
+              <a:spcAft>
+                <a:spcPts val="600"/>
+              </a:spcAft>
+            </a:pPr>
+            <a:r>
+              <a:rPr sz="1500" b="1">
+                <a:solidFill>
+                  <a:srgbClr val="222222"/>
+                </a:solidFill>
+                <a:latin typeface="Meiryo"/>
+              </a:rPr>
+              <a:t>fast-dev の教訓</a:t>
+            </a:r>
+          </a:p>
+          <a:p>
+            <a:pPr lvl="1">
+              <a:spcAft>
+                <a:spcPts val="200"/>
+              </a:spcAft>
+            </a:pPr>
+            <a:r>
+              <a:rPr sz="1300" b="0">
+                <a:solidFill>
+                  <a:srgbClr val="B32D2D"/>
+                </a:solidFill>
+                <a:latin typeface="Meiryo"/>
+              </a:rPr>
+              <a:t>・旧: 65k @ ent 0.10 → 方策 σ が 1.6 まで成長し実質ランダム (実測)</a:t>
+            </a:r>
+          </a:p>
+          <a:p>
+            <a:pPr lvl="1">
+              <a:spcAft>
+                <a:spcPts val="200"/>
+              </a:spcAft>
+            </a:pPr>
+            <a:r>
+              <a:rPr sz="1300" b="1">
+                <a:solidFill>
+                  <a:srgbClr val="595959"/>
+                </a:solidFill>
+                <a:latin typeface="Meiryo"/>
+              </a:rPr>
+              <a:t>・新: 120k @ ent 0.02 / lr 2e-4 / batch 256 — フェーズ 2 込みで 37 周を実測保証</a:t>
+            </a:r>
+          </a:p>
+          <a:p>
+            <a:pPr>
+              <a:spcAft>
+                <a:spcPts val="600"/>
+              </a:spcAft>
+            </a:pPr>
+            <a:r>
+              <a:rPr sz="1500" b="1">
+                <a:solidFill>
+                  <a:srgbClr val="222222"/>
+                </a:solidFill>
+                <a:latin typeface="Meiryo"/>
+              </a:rPr>
+              <a:t>モデル選択</a:t>
+            </a:r>
+          </a:p>
+          <a:p>
+            <a:pPr lvl="1">
+              <a:spcAft>
+                <a:spcPts val="200"/>
+              </a:spcAft>
+            </a:pPr>
+            <a:r>
+              <a:rPr sz="1300" b="0">
+                <a:solidFill>
+                  <a:srgbClr val="595959"/>
+                </a:solidFill>
+                <a:latin typeface="Meiryo"/>
+              </a:rPr>
+              <a:t>・EvalCallback の決定論的評価ベスト採用 (PPO は終盤退行あり / stochastic 評価は過小評価)</a:t>
+            </a:r>
+          </a:p>
+        </p:txBody>
+      </p:sp>
     </p:spTree>
   </p:cSld>
   <p:clrMapOvr>
@@ -5762,8 +6026,8 @@
         </p:nvSpPr>
         <p:spPr>
           <a:xfrm>
-            <a:off x="457200" y="201168"/>
-            <a:ext cx="11247120" cy="777240"/>
+            <a:off x="457200" y="182880"/>
+            <a:ext cx="11247120" cy="731520"/>
           </a:xfrm>
           <a:prstGeom prst="rect">
             <a:avLst/>
@@ -5777,13 +6041,13 @@
           <a:lstStyle/>
           <a:p>
             <a:r>
-              <a:rPr sz="2800" b="1">
+              <a:rPr sz="2700" b="1">
                 <a:solidFill>
                   <a:srgbClr val="1B5EA8"/>
                 </a:solidFill>
                 <a:latin typeface="Meiryo"/>
               </a:rPr>
-              <a:t>学習パイプライン — 2 フェーズ PPO と fast-dev の教訓</a:t>
+              <a:t>PPO ハイパーパラメータの設計判断 (専門家向け)</a:t>
             </a:r>
           </a:p>
         </p:txBody>
@@ -5796,8 +6060,8 @@
         </p:nvSpPr>
         <p:spPr>
           <a:xfrm>
-            <a:off x="548640" y="1280160"/>
-            <a:ext cx="11064240" cy="5394960"/>
+            <a:off x="548640" y="1188720"/>
+            <a:ext cx="11064240" cy="5486400"/>
           </a:xfrm>
           <a:prstGeom prst="rect">
             <a:avLst/>
@@ -5812,97 +6076,129 @@
           <a:p>
             <a:pPr>
               <a:spcAft>
-                <a:spcPts val="500"/>
-              </a:spcAft>
-            </a:pPr>
-            <a:r>
-              <a:rPr sz="1700" b="1">
+                <a:spcPts val="600"/>
+              </a:spcAft>
+            </a:pPr>
+            <a:r>
+              <a:rPr sz="1600" b="1">
                 <a:solidFill>
                   <a:srgbClr val="222222"/>
                 </a:solidFill>
                 <a:latin typeface="Meiryo"/>
               </a:rPr>
-              <a:t>2 フェーズ PPO: ①NPC なしレーン追従 (120k〜1M) → ②NPC あり追い越し FT (lr 減)</a:t>
+              <a:t>アルゴリズム選択</a:t>
+            </a:r>
+          </a:p>
+          <a:p>
+            <a:pPr lvl="1">
+              <a:spcAft>
+                <a:spcPts val="200"/>
+              </a:spcAft>
+            </a:pPr>
+            <a:r>
+              <a:rPr sz="1400" b="0">
+                <a:solidFill>
+                  <a:srgbClr val="595959"/>
+                </a:solidFill>
+                <a:latin typeface="Meiryo"/>
+              </a:rPr>
+              <a:t>・オンポリシー (PPO): 環境改造が頻繁 → 古い経験が即無効 / sim 軽量で wall-clock 優位</a:t>
             </a:r>
           </a:p>
           <a:p>
             <a:pPr>
               <a:spcAft>
-                <a:spcPts val="500"/>
-              </a:spcAft>
-            </a:pPr>
-            <a:r>
-              <a:rPr sz="1700" b="0">
+                <a:spcPts val="600"/>
+              </a:spcAft>
+            </a:pPr>
+            <a:r>
+              <a:rPr sz="1600" b="1">
                 <a:solidFill>
                   <a:srgbClr val="222222"/>
                 </a:solidFill>
                 <a:latin typeface="Meiryo"/>
               </a:rPr>
-              <a:t>カスタム CNN (10ch→512) + 初期スロットルバイアス +0.4 (前進探索)</a:t>
+              <a:t>主要ハイパラ</a:t>
+            </a:r>
+          </a:p>
+          <a:p>
+            <a:pPr lvl="1">
+              <a:spcAft>
+                <a:spcPts val="200"/>
+              </a:spcAft>
+            </a:pPr>
+            <a:r>
+              <a:rPr sz="1400" b="0">
+                <a:solidFill>
+                  <a:srgbClr val="595959"/>
+                </a:solidFill>
+                <a:latin typeface="Meiryo"/>
+              </a:rPr>
+              <a:t>・clip ε 0.15 (&lt;0.2): 高分散アドバンテージ下の方策崩壊を抑制</a:t>
+            </a:r>
+          </a:p>
+          <a:p>
+            <a:pPr lvl="1">
+              <a:spcAft>
+                <a:spcPts val="200"/>
+              </a:spcAft>
+            </a:pPr>
+            <a:r>
+              <a:rPr sz="1400" b="0">
+                <a:solidFill>
+                  <a:srgbClr val="595959"/>
+                </a:solidFill>
+                <a:latin typeface="Meiryo"/>
+              </a:rPr>
+              <a:t>・γ 0.99 / GAE λ 0.98 / n_steps 512×8env / minibatch 256 / 8〜15 epochs / linear LR decay</a:t>
+            </a:r>
+          </a:p>
+          <a:p>
+            <a:pPr lvl="1">
+              <a:spcAft>
+                <a:spcPts val="200"/>
+              </a:spcAft>
+            </a:pPr>
+            <a:r>
+              <a:rPr sz="1400" b="1">
+                <a:solidFill>
+                  <a:srgbClr val="595959"/>
+                </a:solidFill>
+                <a:latin typeface="Meiryo"/>
+              </a:rPr>
+              <a:t>・ent_coef 0.02: [0,1] 圧縮報酬との結合に注意 (0.10 は実質ランダム方策に収束)</a:t>
             </a:r>
           </a:p>
           <a:p>
             <a:pPr>
               <a:spcAft>
-                <a:spcPts val="500"/>
-              </a:spcAft>
-            </a:pPr>
-            <a:r>
-              <a:rPr sz="1700" b="1">
+                <a:spcPts val="600"/>
+              </a:spcAft>
+            </a:pPr>
+            <a:r>
+              <a:rPr sz="1600" b="1">
                 <a:solidFill>
                   <a:srgbClr val="222222"/>
                 </a:solidFill>
                 <a:latin typeface="Meiryo"/>
               </a:rPr>
-              <a:t>fast-dev の進化: 65k @ ent 0.10 (曲がれない) → 120k @ ent 0.02 本番ハイパラ (37 周)</a:t>
+              <a:t>備考</a:t>
             </a:r>
           </a:p>
           <a:p>
             <a:pPr lvl="1">
               <a:spcAft>
-                <a:spcPts val="500"/>
-              </a:spcAft>
-            </a:pPr>
-            <a:r>
-              <a:rPr sz="1500" b="0">
-                <a:solidFill>
-                  <a:srgbClr val="B32D2D"/>
-                </a:solidFill>
-                <a:latin typeface="Meiryo"/>
-              </a:rPr>
-              <a:t>  教訓: 高エントロピーは [0,1] 圧縮報酬下で「ランダムでいる」ことが得になる</a:t>
-            </a:r>
-          </a:p>
-          <a:p>
-            <a:pPr>
-              <a:spcAft>
-                <a:spcPts val="500"/>
-              </a:spcAft>
-            </a:pPr>
-            <a:r>
-              <a:rPr sz="1700" b="0">
-                <a:solidFill>
-                  <a:srgbClr val="222222"/>
-                </a:solidFill>
-                <a:latin typeface="Meiryo"/>
-              </a:rPr>
-              <a:t>EvalCallback ベストモデル採用 (PPO は終盤退行あり) — best/phase1|phase2/</a:t>
-            </a:r>
-          </a:p>
-          <a:p>
-            <a:pPr>
-              <a:spcAft>
-                <a:spcPts val="500"/>
-              </a:spcAft>
-            </a:pPr>
-            <a:r>
-              <a:rPr sz="1700" b="0">
-                <a:solidFill>
-                  <a:srgbClr val="222222"/>
-                </a:solidFill>
-                <a:latin typeface="Meiryo"/>
-              </a:rPr>
-              <a:t>Reward yardstick: 1 周 ≈ 101, アイドル床 ≈ 0.53/step — eval 値を周回数として読む</a:t>
+                <a:spcPts val="200"/>
+              </a:spcAft>
+            </a:pPr>
+            <a:r>
+              <a:rPr sz="1400" b="0">
+                <a:solidFill>
+                  <a:srgbClr val="595959"/>
+                </a:solidFill>
+                <a:latin typeface="Meiryo"/>
+              </a:rPr>
+              <a:t>・アドバンテージ正規化 → 報酬のアフィン変換に不変。[0,1] 化は診断用の設計</a:t>
             </a:r>
           </a:p>
         </p:txBody>
@@ -5933,8 +6229,8 @@
         </p:nvSpPr>
         <p:spPr>
           <a:xfrm>
-            <a:off x="457200" y="201168"/>
-            <a:ext cx="11247120" cy="777240"/>
+            <a:off x="457200" y="182880"/>
+            <a:ext cx="11247120" cy="731520"/>
           </a:xfrm>
           <a:prstGeom prst="rect">
             <a:avLst/>
@@ -5948,13 +6244,13 @@
           <a:lstStyle/>
           <a:p>
             <a:r>
-              <a:rPr sz="2800" b="1">
+              <a:rPr sz="2700" b="1">
                 <a:solidFill>
                   <a:srgbClr val="1B5EA8"/>
                 </a:solidFill>
                 <a:latin typeface="Meiryo"/>
               </a:rPr>
-              <a:t>PPO ハイパーパラメータの設計判断</a:t>
+              <a:t>実ゲームとのギャップ — シミュレーションが省いているもの</a:t>
             </a:r>
           </a:p>
         </p:txBody>
@@ -5967,8 +6263,8 @@
         </p:nvSpPr>
         <p:spPr>
           <a:xfrm>
-            <a:off x="548640" y="1325880"/>
-            <a:ext cx="11064240" cy="5394960"/>
+            <a:off x="548640" y="1143000"/>
+            <a:ext cx="11064240" cy="5486400"/>
           </a:xfrm>
           <a:prstGeom prst="rect">
             <a:avLst/>
@@ -5983,97 +6279,161 @@
           <a:p>
             <a:pPr>
               <a:spcAft>
-                <a:spcPts val="500"/>
-              </a:spcAft>
-            </a:pPr>
-            <a:r>
-              <a:rPr sz="1700" b="1">
+                <a:spcPts val="600"/>
+              </a:spcAft>
+            </a:pPr>
+            <a:r>
+              <a:rPr sz="1500" b="1">
                 <a:solidFill>
                   <a:srgbClr val="222222"/>
                 </a:solidFill>
                 <a:latin typeface="Meiryo"/>
               </a:rPr>
-              <a:t>オンポリシー選択: 環境を頻繁に改造 → 古い経験が即無効。sim が軽く wall-clock 優位</a:t>
+              <a:t>車両動力学</a:t>
+            </a:r>
+          </a:p>
+          <a:p>
+            <a:pPr lvl="1">
+              <a:spcAft>
+                <a:spcPts val="200"/>
+              </a:spcAft>
+            </a:pPr>
+            <a:r>
+              <a:rPr sz="1300" b="0">
+                <a:solidFill>
+                  <a:srgbClr val="595959"/>
+                </a:solidFill>
+                <a:latin typeface="Meiryo"/>
+              </a:rPr>
+              <a:t>・線形タイヤ (グリップ飽和なし) / 質量 1 kg 正規化 / 荷重移動・サスなし</a:t>
+            </a:r>
+          </a:p>
+          <a:p>
+            <a:pPr lvl="1">
+              <a:spcAft>
+                <a:spcPts val="200"/>
+              </a:spcAft>
+            </a:pPr>
+            <a:r>
+              <a:rPr sz="1300" b="0">
+                <a:solidFill>
+                  <a:srgbClr val="595959"/>
+                </a:solidFill>
+                <a:latin typeface="Meiryo"/>
+              </a:rPr>
+              <a:t>・加速度は直接指令: エンジン/ブレーキ特性・ギア・空気抵抗・転がり抵抗なし (惰性で減速しない)</a:t>
             </a:r>
           </a:p>
           <a:p>
             <a:pPr>
               <a:spcAft>
-                <a:spcPts val="500"/>
-              </a:spcAft>
-            </a:pPr>
-            <a:r>
-              <a:rPr sz="1700" b="0">
+                <a:spcPts val="600"/>
+              </a:spcAft>
+            </a:pPr>
+            <a:r>
+              <a:rPr sz="1500" b="1">
                 <a:solidFill>
                   <a:srgbClr val="222222"/>
                 </a:solidFill>
                 <a:latin typeface="Meiryo"/>
               </a:rPr>
-              <a:t>clip ε = 0.15 (&lt; 標準 0.2): 高分散アドバンテージ下での方策崩壊を抑制</a:t>
+              <a:t>壁・衝突</a:t>
+            </a:r>
+          </a:p>
+          <a:p>
+            <a:pPr lvl="1">
+              <a:spcAft>
+                <a:spcPts val="200"/>
+              </a:spcAft>
+            </a:pPr>
+            <a:r>
+              <a:rPr sz="1300" b="0">
+                <a:solidFill>
+                  <a:srgbClr val="595959"/>
+                </a:solidFill>
+                <a:latin typeface="Meiryo"/>
+              </a:rPr>
+              <a:t>・停止壁は理想化 (速度を消すだけ): 衝突インパルス・スピン・ダメージなし</a:t>
+            </a:r>
+          </a:p>
+          <a:p>
+            <a:pPr lvl="1">
+              <a:spcAft>
+                <a:spcPts val="200"/>
+              </a:spcAft>
+            </a:pPr>
+            <a:r>
+              <a:rPr sz="1300" b="0">
+                <a:solidFill>
+                  <a:srgbClr val="595959"/>
+                </a:solidFill>
+                <a:latin typeface="Meiryo"/>
+              </a:rPr>
+              <a:t>・壁摩擦 0.6 は仮値 — 実ゲームの壁材質に合わせた再調整ポイント</a:t>
             </a:r>
           </a:p>
           <a:p>
             <a:pPr>
               <a:spcAft>
-                <a:spcPts val="500"/>
-              </a:spcAft>
-            </a:pPr>
-            <a:r>
-              <a:rPr sz="1700" b="0">
+                <a:spcPts val="600"/>
+              </a:spcAft>
+            </a:pPr>
+            <a:r>
+              <a:rPr sz="1500" b="1">
                 <a:solidFill>
                   <a:srgbClr val="222222"/>
                 </a:solidFill>
                 <a:latin typeface="Meiryo"/>
               </a:rPr>
-              <a:t>γ 0.99 / GAE λ 0.98 / n_steps 512 × 8 env / minibatch 256 / 8–15 epochs / linear LR decay</a:t>
+              <a:t>制御・タイミング</a:t>
+            </a:r>
+          </a:p>
+          <a:p>
+            <a:pPr lvl="1">
+              <a:spcAft>
+                <a:spcPts val="200"/>
+              </a:spcAft>
+            </a:pPr>
+            <a:r>
+              <a:rPr sz="1300" b="0">
+                <a:solidFill>
+                  <a:srgbClr val="595959"/>
+                </a:solidFill>
+                <a:latin typeface="Meiryo"/>
+              </a:rPr>
+              <a:t>・ステア瞬時応答 (アクチュエータ遅れなし) / 5 Hz 等間隔・推論レイテンシ未モデル化</a:t>
             </a:r>
           </a:p>
           <a:p>
             <a:pPr>
               <a:spcAft>
-                <a:spcPts val="500"/>
-              </a:spcAft>
-            </a:pPr>
-            <a:r>
-              <a:rPr sz="1700" b="1">
+                <a:spcPts val="600"/>
+              </a:spcAft>
+            </a:pPr>
+            <a:r>
+              <a:rPr sz="1500" b="1">
                 <a:solidFill>
                   <a:srgbClr val="222222"/>
                 </a:solidFill>
                 <a:latin typeface="Meiryo"/>
               </a:rPr>
-              <a:t>ent_coef は報酬スケールと結合: [0,1] 圧縮下で 0.10 → σ≈1.6 の実質ランダム方策 (実測)</a:t>
-            </a:r>
-          </a:p>
-          <a:p>
-            <a:pPr>
-              <a:spcAft>
-                <a:spcPts val="500"/>
-              </a:spcAft>
-            </a:pPr>
-            <a:r>
-              <a:rPr sz="1700" b="0">
-                <a:solidFill>
-                  <a:srgbClr val="222222"/>
-                </a:solidFill>
-                <a:latin typeface="Meiryo"/>
-              </a:rPr>
-              <a:t>直交初期化 + throttle バイアス +0.4: 探索の対称性を意図的に破り前進を先に発見させる</a:t>
-            </a:r>
-          </a:p>
-          <a:p>
-            <a:pPr>
-              <a:spcAft>
-                <a:spcPts val="500"/>
-              </a:spcAft>
-            </a:pPr>
-            <a:r>
-              <a:rPr sz="1700" b="0">
-                <a:solidFill>
-                  <a:srgbClr val="222222"/>
-                </a:solidFill>
-                <a:latin typeface="Meiryo"/>
-              </a:rPr>
-              <a:t>EvalCallback (決定論的評価) でモデル選択 — 方策エントロピー残存下の stochastic 評価は過小評価</a:t>
+              <a:t>環境</a:t>
+            </a:r>
+          </a:p>
+          <a:p>
+            <a:pPr lvl="1">
+              <a:spcAft>
+                <a:spcPts val="200"/>
+              </a:spcAft>
+            </a:pPr>
+            <a:r>
+              <a:rPr sz="1300" b="0">
+                <a:solidFill>
+                  <a:srgbClr val="595959"/>
+                </a:solidFill>
+                <a:latin typeface="Meiryo"/>
+              </a:rPr>
+              <a:t>・2D 平面: 縁石・バンク・高低差・路面 μ 変化なし / NPC は IDM (ゲーム AI と別物)</a:t>
             </a:r>
           </a:p>
         </p:txBody>
@@ -6104,8 +6464,8 @@
         </p:nvSpPr>
         <p:spPr>
           <a:xfrm>
-            <a:off x="457200" y="201168"/>
-            <a:ext cx="11247120" cy="777240"/>
+            <a:off x="457200" y="182880"/>
+            <a:ext cx="11247120" cy="731520"/>
           </a:xfrm>
           <a:prstGeom prst="rect">
             <a:avLst/>
@@ -6119,20 +6479,171 @@
           <a:lstStyle/>
           <a:p>
             <a:r>
-              <a:rPr sz="2800" b="1">
+              <a:rPr sz="2700" b="1">
                 <a:solidFill>
                   <a:srgbClr val="1B5EA8"/>
                 </a:solidFill>
                 <a:latin typeface="Meiryo"/>
               </a:rPr>
-              <a:t>実ゲームとのギャップを埋める C# 支援クラス</a:t>
+              <a:t>ギャップの二層戦略 — 消せるものは消し、残りは吸収する</a:t>
+            </a:r>
+          </a:p>
+        </p:txBody>
+      </p:sp>
+      <p:sp>
+        <p:nvSpPr>
+          <p:cNvPr id="3" name="TextBox 2"/>
+          <p:cNvSpPr txBox="1"/>
+          <p:nvPr/>
+        </p:nvSpPr>
+        <p:spPr>
+          <a:xfrm>
+            <a:off x="548640" y="1188720"/>
+            <a:ext cx="11064240" cy="5486400"/>
+          </a:xfrm>
+          <a:prstGeom prst="rect">
+            <a:avLst/>
+          </a:prstGeom>
+          <a:noFill/>
+        </p:spPr>
+        <p:txBody>
+          <a:bodyPr wrap="square">
+            <a:spAutoFit/>
+          </a:bodyPr>
+          <a:lstStyle/>
+          <a:p>
+            <a:pPr>
+              <a:spcAft>
+                <a:spcPts val="600"/>
+              </a:spcAft>
+            </a:pPr>
+            <a:r>
+              <a:rPr sz="1500" b="1">
+                <a:solidFill>
+                  <a:srgbClr val="222222"/>
+                </a:solidFill>
+                <a:latin typeface="Meiryo"/>
+              </a:rPr>
+              <a:t>第一層: ギャップ自体を消す</a:t>
+            </a:r>
+          </a:p>
+          <a:p>
+            <a:pPr lvl="1">
+              <a:spcAft>
+                <a:spcPts val="200"/>
+              </a:spcAft>
+            </a:pPr>
+            <a:r>
+              <a:rPr sz="1300" b="0">
+                <a:solidFill>
+                  <a:srgbClr val="595959"/>
+                </a:solidFill>
+                <a:latin typeface="Meiryo"/>
+              </a:rPr>
+              <a:t>・観測ビット一致 + 物理 1e-7 一致の C# 移植 — 移植起因の挙動差をゼロに</a:t>
+            </a:r>
+          </a:p>
+          <a:p>
+            <a:pPr>
+              <a:spcAft>
+                <a:spcPts val="600"/>
+              </a:spcAft>
+            </a:pPr>
+            <a:r>
+              <a:rPr sz="1500" b="1">
+                <a:solidFill>
+                  <a:srgbClr val="222222"/>
+                </a:solidFill>
+                <a:latin typeface="Meiryo"/>
+              </a:rPr>
+              <a:t>第二層: 残差をデプロイ側フィルタで吸収 (再学習不要)</a:t>
+            </a:r>
+          </a:p>
+          <a:p>
+            <a:pPr lvl="1">
+              <a:spcAft>
+                <a:spcPts val="200"/>
+              </a:spcAft>
+            </a:pPr>
+            <a:r>
+              <a:rPr sz="1300" b="0">
+                <a:solidFill>
+                  <a:srgbClr val="595959"/>
+                </a:solidFill>
+                <a:latin typeface="Meiryo"/>
+              </a:rPr>
+              <a:t>・SteeringSmoother (EMA α0.6): 蛇行 34→12 回/100步、直線の中央維持も改善</a:t>
+            </a:r>
+          </a:p>
+          <a:p>
+            <a:pPr lvl="1">
+              <a:spcAft>
+                <a:spcPts val="200"/>
+              </a:spcAft>
+            </a:pPr>
+            <a:r>
+              <a:rPr sz="1300" b="0">
+                <a:solidFill>
+                  <a:srgbClr val="595959"/>
+                </a:solidFill>
+                <a:latin typeface="Meiryo"/>
+              </a:rPr>
+              <a:t>・CorneringLimiter: ステア速度制限 + 曲率ベース比例ブレーキ (速度床 5 m/s で停止しない)</a:t>
+            </a:r>
+          </a:p>
+          <a:p>
+            <a:pPr lvl="1">
+              <a:spcAft>
+                <a:spcPts val="200"/>
+              </a:spcAft>
+            </a:pPr>
+            <a:r>
+              <a:rPr sz="1300" b="0">
+                <a:solidFill>
+                  <a:srgbClr val="595959"/>
+                </a:solidFill>
+                <a:latin typeface="Meiryo"/>
+              </a:rPr>
+              <a:t>・StuckRecovery: 「前進指示なのに 1 秒 0.3 m 未満」で壁刺さり検出 → バック 1.6 秒</a:t>
+            </a:r>
+          </a:p>
+          <a:p>
+            <a:pPr lvl="2">
+              <a:spcAft>
+                <a:spcPts val="200"/>
+              </a:spcAft>
+            </a:pPr>
+            <a:r>
+              <a:rPr sz="1100" b="0">
+                <a:solidFill>
+                  <a:srgbClr val="595959"/>
+                </a:solidFill>
+                <a:latin typeface="Meiryo"/>
+              </a:rPr>
+              <a:t>− 検証: フィルタ通しでシム内評価 — 周回数維持を確認 (閉ループ変化のチェック)</a:t>
+            </a:r>
+          </a:p>
+          <a:p>
+            <a:pPr>
+              <a:spcAft>
+                <a:spcPts val="600"/>
+              </a:spcAft>
+            </a:pPr>
+            <a:r>
+              <a:rPr sz="1500" b="0">
+                <a:solidFill>
+                  <a:srgbClr val="222222"/>
+                </a:solidFill>
+                <a:latin typeface="Meiryo"/>
+              </a:rPr>
+              <a:t>第三層 (必要時): 壁摩擦・レンジを実測に合わせ環境を再調整して再学習</a:t>
             </a:r>
           </a:p>
         </p:txBody>
       </p:sp>
       <p:pic>
         <p:nvPicPr>
-          <p:cNvPr id="3" name="Picture 2" descr="smoothing_effect.png"/>
+          <p:cNvPr id="4" name="Picture 3" descr="smoothing_effect.png"/>
           <p:cNvPicPr>
             <a:picLocks noChangeAspect="1"/>
           </p:cNvPicPr>
@@ -6146,133 +6657,14 @@
         </p:blipFill>
         <p:spPr>
           <a:xfrm>
-            <a:off x="640080" y="1234440"/>
-            <a:ext cx="6035040" cy="2084832"/>
+            <a:off x="6949440" y="4434840"/>
+            <a:ext cx="4846320" cy="1674183"/>
           </a:xfrm>
           <a:prstGeom prst="rect">
             <a:avLst/>
           </a:prstGeom>
         </p:spPr>
       </p:pic>
-      <p:sp>
-        <p:nvSpPr>
-          <p:cNvPr id="4" name="TextBox 3"/>
-          <p:cNvSpPr txBox="1"/>
-          <p:nvPr/>
-        </p:nvSpPr>
-        <p:spPr>
-          <a:xfrm>
-            <a:off x="6858000" y="1371600"/>
-            <a:ext cx="4937760" cy="5394960"/>
-          </a:xfrm>
-          <a:prstGeom prst="rect">
-            <a:avLst/>
-          </a:prstGeom>
-          <a:noFill/>
-        </p:spPr>
-        <p:txBody>
-          <a:bodyPr wrap="square">
-            <a:spAutoFit/>
-          </a:bodyPr>
-          <a:lstStyle/>
-          <a:p>
-            <a:pPr>
-              <a:spcAft>
-                <a:spcPts val="500"/>
-              </a:spcAft>
-            </a:pPr>
-            <a:r>
-              <a:rPr sz="1400" b="1">
-                <a:solidFill>
-                  <a:srgbClr val="222222"/>
-                </a:solidFill>
-                <a:latin typeface="Meiryo"/>
-              </a:rPr>
-              <a:t>SteeringSmoother: EMA α0.6 — 蛇行 34→12 回/100步</a:t>
-            </a:r>
-          </a:p>
-          <a:p>
-            <a:pPr>
-              <a:spcAft>
-                <a:spcPts val="500"/>
-              </a:spcAft>
-            </a:pPr>
-            <a:r>
-              <a:rPr sz="1400" b="1">
-                <a:solidFill>
-                  <a:srgbClr val="222222"/>
-                </a:solidFill>
-                <a:latin typeface="Meiryo"/>
-              </a:rPr>
-              <a:t>CorneringLimiter: ステア速度制限 + 比例ブレーキ</a:t>
-            </a:r>
-          </a:p>
-          <a:p>
-            <a:pPr lvl="1">
-              <a:spcAft>
-                <a:spcPts val="500"/>
-              </a:spcAft>
-            </a:pPr>
-            <a:r>
-              <a:rPr sz="1200" b="0">
-                <a:solidFill>
-                  <a:srgbClr val="595959"/>
-                </a:solidFill>
-                <a:latin typeface="Meiryo"/>
-              </a:rPr>
-              <a:t>  速度床 5 m/s — 減速はしても停止はしない</a:t>
-            </a:r>
-          </a:p>
-          <a:p>
-            <a:pPr>
-              <a:spcAft>
-                <a:spcPts val="500"/>
-              </a:spcAft>
-            </a:pPr>
-            <a:r>
-              <a:rPr sz="1400" b="1">
-                <a:solidFill>
-                  <a:srgbClr val="222222"/>
-                </a:solidFill>
-                <a:latin typeface="Meiryo"/>
-              </a:rPr>
-              <a:t>StuckRecovery: 移動距離でスタック検出→バック指示</a:t>
-            </a:r>
-          </a:p>
-          <a:p>
-            <a:pPr lvl="1">
-              <a:spcAft>
-                <a:spcPts val="500"/>
-              </a:spcAft>
-            </a:pPr>
-            <a:r>
-              <a:rPr sz="1200" b="0">
-                <a:solidFill>
-                  <a:srgbClr val="595959"/>
-                </a:solidFill>
-                <a:latin typeface="Meiryo"/>
-              </a:rPr>
-              <a:t>  発進の低速と壁刺さりを距離で区別 (レーン不要)</a:t>
-            </a:r>
-          </a:p>
-          <a:p>
-            <a:pPr>
-              <a:spcAft>
-                <a:spcPts val="500"/>
-              </a:spcAft>
-            </a:pPr>
-            <a:r>
-              <a:rPr sz="1400" b="1">
-                <a:solidFill>
-                  <a:srgbClr val="222222"/>
-                </a:solidFill>
-                <a:latin typeface="Meiryo"/>
-              </a:rPr>
-              <a:t>CarController: 学習と同一物理 (Python と 1e-7 一致)</a:t>
-            </a:r>
-          </a:p>
-        </p:txBody>
-      </p:sp>
     </p:spTree>
   </p:cSld>
   <p:clrMapOvr>
@@ -6299,8 +6691,8 @@
         </p:nvSpPr>
         <p:spPr>
           <a:xfrm>
-            <a:off x="457200" y="201168"/>
-            <a:ext cx="11247120" cy="777240"/>
+            <a:off x="457200" y="182880"/>
+            <a:ext cx="11247120" cy="731520"/>
           </a:xfrm>
           <a:prstGeom prst="rect">
             <a:avLst/>
@@ -6314,13 +6706,13 @@
           <a:lstStyle/>
           <a:p>
             <a:r>
-              <a:rPr sz="2800" b="1">
+              <a:rPr sz="2700" b="1">
                 <a:solidFill>
                   <a:srgbClr val="1B5EA8"/>
                 </a:solidFill>
                 <a:latin typeface="Meiryo"/>
               </a:rPr>
-              <a:t>汎化・sim-to-real の設計 — 何が転移を担保するか</a:t>
+              <a:t>セットアップとノートブックの使い方</a:t>
             </a:r>
           </a:p>
         </p:txBody>
@@ -6333,8 +6725,8 @@
         </p:nvSpPr>
         <p:spPr>
           <a:xfrm>
-            <a:off x="548640" y="1325880"/>
-            <a:ext cx="11064240" cy="5394960"/>
+            <a:off x="548640" y="1188720"/>
+            <a:ext cx="11064240" cy="5486400"/>
           </a:xfrm>
           <a:prstGeom prst="rect">
             <a:avLst/>
@@ -6349,97 +6741,161 @@
           <a:p>
             <a:pPr>
               <a:spcAft>
-                <a:spcPts val="500"/>
-              </a:spcAft>
-            </a:pPr>
-            <a:r>
-              <a:rPr sz="1700" b="1">
+                <a:spcPts val="600"/>
+              </a:spcAft>
+            </a:pPr>
+            <a:r>
+              <a:rPr sz="1600" b="1">
                 <a:solidFill>
                   <a:srgbClr val="222222"/>
                 </a:solidFill>
                 <a:latin typeface="Meiryo"/>
               </a:rPr>
-              <a:t>トラックランダム化 = ドメインランダマイゼーション — 暗記解を分布レベルで排除</a:t>
+              <a:t>環境構築</a:t>
+            </a:r>
+          </a:p>
+          <a:p>
+            <a:pPr lvl="1">
+              <a:spcAft>
+                <a:spcPts val="200"/>
+              </a:spcAft>
+            </a:pPr>
+            <a:r>
+              <a:rPr sz="1400" b="0">
+                <a:solidFill>
+                  <a:srgbClr val="595959"/>
+                </a:solidFill>
+                <a:latin typeface="Meiryo"/>
+              </a:rPr>
+              <a:t>・pip install "highway-env&gt;=1.8" "stable-baselines3[extra]&gt;=2.0" gymnasium torch tensorboard moviepy onnx onnxruntime</a:t>
+            </a:r>
+          </a:p>
+          <a:p>
+            <a:pPr lvl="1">
+              <a:spcAft>
+                <a:spcPts val="200"/>
+              </a:spcAft>
+            </a:pPr>
+            <a:r>
+              <a:rPr sz="1400" b="0">
+                <a:solidFill>
+                  <a:srgbClr val="B32D2D"/>
+                </a:solidFill>
+                <a:latin typeface="Meiryo"/>
+              </a:rPr>
+              <a:t>・リポジトリの requirements.txt は旧 TF スタック用 — 使わない</a:t>
             </a:r>
           </a:p>
           <a:p>
             <a:pPr>
               <a:spcAft>
-                <a:spcPts val="500"/>
-              </a:spcAft>
-            </a:pPr>
-            <a:r>
-              <a:rPr sz="1700" b="1">
+                <a:spcPts val="600"/>
+              </a:spcAft>
+            </a:pPr>
+            <a:r>
+              <a:rPr sz="1600" b="1">
                 <a:solidFill>
                   <a:srgbClr val="222222"/>
                 </a:solidFill>
                 <a:latin typeface="Meiryo"/>
               </a:rPr>
-              <a:t>より本質: エゴセントリック観測 + 自己座標なし → 平行移動・回転不変な方策クラスに制約</a:t>
+              <a:t>ノートブック</a:t>
+            </a:r>
+          </a:p>
+          <a:p>
+            <a:pPr lvl="1">
+              <a:spcAft>
+                <a:spcPts val="200"/>
+              </a:spcAft>
+            </a:pPr>
+            <a:r>
+              <a:rPr sz="1400" b="0">
+                <a:solidFill>
+                  <a:srgbClr val="595959"/>
+                </a:solidFill>
+                <a:latin typeface="Meiryo"/>
+              </a:rPr>
+              <a:t>・task2: fast トラック学習 / task3: random 学習 + トラック別レポート + 5 連動画</a:t>
+            </a:r>
+          </a:p>
+          <a:p>
+            <a:pPr lvl="1">
+              <a:spcAft>
+                <a:spcPts val="200"/>
+              </a:spcAft>
+            </a:pPr>
+            <a:r>
+              <a:rPr sz="1400" b="0">
+                <a:solidFill>
+                  <a:srgbClr val="595959"/>
+                </a:solidFill>
+                <a:latin typeface="Meiryo"/>
+              </a:rPr>
+              <a:t>・FAST_DEV_RUN=True: 12〜15 万 step (周回到達を実測保証) / False: 本番 100 万+</a:t>
             </a:r>
           </a:p>
           <a:p>
             <a:pPr>
               <a:spcAft>
-                <a:spcPts val="500"/>
-              </a:spcAft>
-            </a:pPr>
-            <a:r>
-              <a:rPr sz="1700" b="0">
+                <a:spcPts val="600"/>
+              </a:spcAft>
+            </a:pPr>
+            <a:r>
+              <a:rPr sz="1600" b="1">
                 <a:solidFill>
                   <a:srgbClr val="222222"/>
                 </a:solidFill>
                 <a:latin typeface="Meiryo"/>
               </a:rPr>
-              <a:t>ゼロショット転移 (fast→他4コース) はこの不変性の帰結 — 検証済み</a:t>
+              <a:t>進捗の読み方</a:t>
+            </a:r>
+          </a:p>
+          <a:p>
+            <a:pPr lvl="1">
+              <a:spcAft>
+                <a:spcPts val="200"/>
+              </a:spcAft>
+            </a:pPr>
+            <a:r>
+              <a:rPr sz="1400" b="0">
+                <a:solidFill>
+                  <a:srgbClr val="595959"/>
+                </a:solidFill>
+                <a:latin typeface="Meiryo"/>
+              </a:rPr>
+              <a:t>・Reward yardstick: 1 周 ≈ 101 / アイドル床 ≈ 0.53/step — eval 値を周回数として読む</a:t>
+            </a:r>
+          </a:p>
+          <a:p>
+            <a:pPr lvl="1">
+              <a:spcAft>
+                <a:spcPts val="200"/>
+              </a:spcAft>
+            </a:pPr>
+            <a:r>
+              <a:rPr sz="1400" b="0">
+                <a:solidFill>
+                  <a:srgbClr val="595959"/>
+                </a:solidFill>
+                <a:latin typeface="Meiryo"/>
+              </a:rPr>
+              <a:t>・Presentation Media セル: 学習曲線・軌跡・5 連動画を生成し VIDEO_DIR に保存</a:t>
             </a:r>
           </a:p>
           <a:p>
             <a:pPr>
               <a:spcAft>
-                <a:spcPts val="500"/>
-              </a:spcAft>
-            </a:pPr>
-            <a:r>
-              <a:rPr sz="1700" b="1">
+                <a:spcPts val="600"/>
+              </a:spcAft>
+            </a:pPr>
+            <a:r>
+              <a:rPr sz="1600" b="0">
                 <a:solidFill>
                   <a:srgbClr val="222222"/>
                 </a:solidFill>
                 <a:latin typeface="Meiryo"/>
               </a:rPr>
-              <a:t>sim-to-real 層 1: 観測ビット一致・物理 1e-7 一致の移植でギャップ自体を消す</a:t>
-            </a:r>
-          </a:p>
-          <a:p>
-            <a:pPr>
-              <a:spcAft>
-                <a:spcPts val="500"/>
-              </a:spcAft>
-            </a:pPr>
-            <a:r>
-              <a:rPr sz="1700" b="0">
-                <a:solidFill>
-                  <a:srgbClr val="222222"/>
-                </a:solidFill>
-                <a:latin typeface="Meiryo"/>
-              </a:rPr>
-              <a:t>層 2: 残差はデプロイ側アクションフィルタで吸収 (平滑化/レート制限/旋回ブレーキ)</a:t>
-            </a:r>
-          </a:p>
-          <a:p>
-            <a:pPr lvl="1">
-              <a:spcAft>
-                <a:spcPts val="500"/>
-              </a:spcAft>
-            </a:pPr>
-            <a:r>
-              <a:rPr sz="1500" b="0">
-                <a:solidFill>
-                  <a:srgbClr val="595959"/>
-                </a:solidFill>
-                <a:latin typeface="Meiryo"/>
-              </a:rPr>
-              <a:t>  フィルタは閉ループを変える → sim 内で同フィルタ通し評価し周回数維持を確認</a:t>
+              <a:t>C# 検証: cd re_engine/verify &amp;&amp; dotnet run -- ..  → ALL SCENARIOS MATCH</a:t>
             </a:r>
           </a:p>
         </p:txBody>
@@ -6470,8 +6926,8 @@
         </p:nvSpPr>
         <p:spPr>
           <a:xfrm>
-            <a:off x="457200" y="201168"/>
-            <a:ext cx="11247120" cy="777240"/>
+            <a:off x="457200" y="182880"/>
+            <a:ext cx="11247120" cy="731520"/>
           </a:xfrm>
           <a:prstGeom prst="rect">
             <a:avLst/>
@@ -6485,13 +6941,13 @@
           <a:lstStyle/>
           <a:p>
             <a:r>
-              <a:rPr sz="2800" b="1">
+              <a:rPr sz="2700" b="1">
                 <a:solidFill>
                   <a:srgbClr val="1B5EA8"/>
                 </a:solidFill>
                 <a:latin typeface="Meiryo"/>
               </a:rPr>
-              <a:t>セットアップとノートブックの使い方</a:t>
+              <a:t>エクスポートツールと ONNX の注意点</a:t>
             </a:r>
           </a:p>
         </p:txBody>
@@ -6504,8 +6960,8 @@
         </p:nvSpPr>
         <p:spPr>
           <a:xfrm>
-            <a:off x="548640" y="1325880"/>
-            <a:ext cx="11064240" cy="5394960"/>
+            <a:off x="548640" y="1143000"/>
+            <a:ext cx="11064240" cy="5486400"/>
           </a:xfrm>
           <a:prstGeom prst="rect">
             <a:avLst/>
@@ -6520,113 +6976,177 @@
           <a:p>
             <a:pPr>
               <a:spcAft>
-                <a:spcPts val="500"/>
-              </a:spcAft>
-            </a:pPr>
-            <a:r>
-              <a:rPr sz="1700" b="1">
+                <a:spcPts val="600"/>
+              </a:spcAft>
+            </a:pPr>
+            <a:r>
+              <a:rPr sz="1500" b="1">
                 <a:solidFill>
                   <a:srgbClr val="222222"/>
                 </a:solidFill>
                 <a:latin typeface="Meiryo"/>
               </a:rPr>
-              <a:t>pip install "highway-env&gt;=1.8" "stable-baselines3[extra]&gt;=2.0" gymnasium torch tensorboard moviepy onnx onnxruntime</a:t>
+              <a:t>エクスポート</a:t>
             </a:r>
           </a:p>
           <a:p>
             <a:pPr lvl="1">
               <a:spcAft>
-                <a:spcPts val="500"/>
+                <a:spcPts val="200"/>
+              </a:spcAft>
+            </a:pPr>
+            <a:r>
+              <a:rPr sz="1300" b="1">
+                <a:solidFill>
+                  <a:srgbClr val="595959"/>
+                </a:solidFill>
+                <a:latin typeface="Meiryo"/>
+              </a:rPr>
+              <a:t>・python export_onnx.py &lt;model.zip&gt; -m 3   # NHWC [1,12,12,10] エンジン用 (推奨)</a:t>
+            </a:r>
+          </a:p>
+          <a:p>
+            <a:pPr lvl="2">
+              <a:spcAft>
+                <a:spcPts val="200"/>
+              </a:spcAft>
+            </a:pPr>
+            <a:r>
+              <a:rPr sz="1100" b="0">
+                <a:solidFill>
+                  <a:srgbClr val="595959"/>
+                </a:solidFill>
+                <a:latin typeface="Meiryo"/>
+              </a:rPr>
+              <a:t>− -m 1: full policy / 2: actor CHW / 0: 全部 — 各出力は torch と自動照合 (≤4e-6)</a:t>
+            </a:r>
+          </a:p>
+          <a:p>
+            <a:pPr lvl="1">
+              <a:spcAft>
+                <a:spcPts val="200"/>
+              </a:spcAft>
+            </a:pPr>
+            <a:r>
+              <a:rPr sz="1300" b="0">
+                <a:solidFill>
+                  <a:srgbClr val="595959"/>
+                </a:solidFill>
+                <a:latin typeface="Meiryo"/>
+              </a:rPr>
+              <a:t>・python re_engine/convert_onnx_nhwc.py &lt;actor.onnx&gt;  # 既存 CHW の NHWC 化</a:t>
+            </a:r>
+          </a:p>
+          <a:p>
+            <a:pPr>
+              <a:spcAft>
+                <a:spcPts val="600"/>
+              </a:spcAft>
+            </a:pPr>
+            <a:r>
+              <a:rPr sz="1500" b="1">
+                <a:solidFill>
+                  <a:srgbClr val="222222"/>
+                </a:solidFill>
+                <a:latin typeface="Meiryo"/>
+              </a:rPr>
+              <a:t>再生成・検証</a:t>
+            </a:r>
+          </a:p>
+          <a:p>
+            <a:pPr lvl="1">
+              <a:spcAft>
+                <a:spcPts val="200"/>
+              </a:spcAft>
+            </a:pPr>
+            <a:r>
+              <a:rPr sz="1300" b="0">
+                <a:solidFill>
+                  <a:srgbClr val="595959"/>
+                </a:solidFill>
+                <a:latin typeface="Meiryo"/>
+              </a:rPr>
+              <a:t>・python re_engine/export_track_json.py  → dotnet run で ALL SCENARIOS MATCH を確認</a:t>
+            </a:r>
+          </a:p>
+          <a:p>
+            <a:pPr>
+              <a:spcAft>
+                <a:spcPts val="600"/>
+              </a:spcAft>
+            </a:pPr>
+            <a:r>
+              <a:rPr sz="1500" b="1">
+                <a:solidFill>
+                  <a:srgbClr val="222222"/>
+                </a:solidFill>
+                <a:latin typeface="Meiryo"/>
+              </a:rPr>
+              <a:t>よくある事故 (症状で覚える)</a:t>
+            </a:r>
+          </a:p>
+          <a:p>
+            <a:pPr lvl="1">
+              <a:spcAft>
+                <a:spcPts val="200"/>
+              </a:spcAft>
+            </a:pPr>
+            <a:r>
+              <a:rPr sz="1300" b="1">
+                <a:solidFill>
+                  <a:srgbClr val="B32D2D"/>
+                </a:solidFill>
+                <a:latin typeface="Meiryo"/>
+              </a:rPr>
+              <a:t>・出力がほぼ一定 (thr≈0.4, str≈0.2) = テンソルレイアウト不一致</a:t>
+            </a:r>
+          </a:p>
+          <a:p>
+            <a:pPr lvl="1">
+              <a:spcAft>
+                <a:spcPts val="200"/>
+              </a:spcAft>
+            </a:pPr>
+            <a:r>
+              <a:rPr sz="1300" b="0">
+                <a:solidFill>
+                  <a:srgbClr val="B32D2D"/>
+                </a:solidFill>
+                <a:latin typeface="Meiryo"/>
+              </a:rPr>
+              <a:t>・観測が全部飽和・挙動が雑 = km/h を m/s に変換し忘れ (KphToMs)</a:t>
+            </a:r>
+          </a:p>
+          <a:p>
+            <a:pPr lvl="1">
+              <a:spcAft>
+                <a:spcPts val="200"/>
+              </a:spcAft>
+            </a:pPr>
+            <a:r>
+              <a:rPr sz="1300" b="0">
+                <a:solidFill>
+                  <a:srgbClr val="B32D2D"/>
+                </a:solidFill>
+                <a:latin typeface="Meiryo"/>
+              </a:rPr>
+              <a:t>・グリッドが横向き = heading に生の yaw を使用 (正: 90° − yaw または forward から Atan2)</a:t>
+            </a:r>
+          </a:p>
+          <a:p>
+            <a:pPr>
+              <a:spcAft>
+                <a:spcPts val="600"/>
               </a:spcAft>
             </a:pPr>
             <a:r>
               <a:rPr sz="1500" b="0">
                 <a:solidFill>
-                  <a:srgbClr val="B32D2D"/>
-                </a:solidFill>
-                <a:latin typeface="Meiryo"/>
-              </a:rPr>
-              <a:t>(リポジトリの requirements.txt は旧スタック用 — 使わない)</a:t>
-            </a:r>
-          </a:p>
-          <a:p>
-            <a:pPr>
-              <a:spcAft>
-                <a:spcPts val="500"/>
-              </a:spcAft>
-            </a:pPr>
-            <a:r>
-              <a:rPr sz="1700" b="0">
-                <a:solidFill>
                   <a:srgbClr val="222222"/>
                 </a:solidFill>
                 <a:latin typeface="Meiryo"/>
               </a:rPr>
-              <a:t>task2_laning_overtaking_sb3_ppo.ipynb — fast トラック学習</a:t>
-            </a:r>
-          </a:p>
-          <a:p>
-            <a:pPr>
-              <a:spcAft>
-                <a:spcPts val="500"/>
-              </a:spcAft>
-            </a:pPr>
-            <a:r>
-              <a:rPr sz="1700" b="0">
-                <a:solidFill>
-                  <a:srgbClr val="222222"/>
-                </a:solidFill>
-                <a:latin typeface="Meiryo"/>
-              </a:rPr>
-              <a:t>task3_generalization_sb3_ppo.ipynb — random 学習 + トラック別レポート + 5 連動画</a:t>
-            </a:r>
-          </a:p>
-          <a:p>
-            <a:pPr>
-              <a:spcAft>
-                <a:spcPts val="500"/>
-              </a:spcAft>
-            </a:pPr>
-            <a:r>
-              <a:rPr sz="1700" b="1">
-                <a:solidFill>
-                  <a:srgbClr val="222222"/>
-                </a:solidFill>
-                <a:latin typeface="Meiryo"/>
-              </a:rPr>
-              <a:t>FAST_DEV_RUN=True: 12-15 万ステップ (周回到達を実測保証) / False: 本番 100 万+</a:t>
-            </a:r>
-          </a:p>
-          <a:p>
-            <a:pPr>
-              <a:spcAft>
-                <a:spcPts val="500"/>
-              </a:spcAft>
-            </a:pPr>
-            <a:r>
-              <a:rPr sz="1700" b="1">
-                <a:solidFill>
-                  <a:srgbClr val="222222"/>
-                </a:solidFill>
-                <a:latin typeface="Meiryo"/>
-              </a:rPr>
-              <a:t>Presentation Media セル: 学習曲線・軌跡・5 トラック動画を生成し VIDEO_DIR に保存</a:t>
-            </a:r>
-          </a:p>
-          <a:p>
-            <a:pPr>
-              <a:spcAft>
-                <a:spcPts val="500"/>
-              </a:spcAft>
-            </a:pPr>
-            <a:r>
-              <a:rPr sz="1700" b="0">
-                <a:solidFill>
-                  <a:srgbClr val="222222"/>
-                </a:solidFill>
-                <a:latin typeface="Meiryo"/>
-              </a:rPr>
-              <a:t>検証: cd re_engine/verify &amp;&amp; dotnet run -- ..  → ALL SCENARIOS MATCH</a:t>
+              <a:t>定数同期: レンジ・5 Hz・グリッド設定の変更は C# 定数 + JSON + 検証 + ONNX の 4 点セット</a:t>
             </a:r>
           </a:p>
         </p:txBody>
@@ -6657,8 +7177,8 @@
         </p:nvSpPr>
         <p:spPr>
           <a:xfrm>
-            <a:off x="457200" y="201168"/>
-            <a:ext cx="11247120" cy="777240"/>
+            <a:off x="457200" y="182880"/>
+            <a:ext cx="11247120" cy="731520"/>
           </a:xfrm>
           <a:prstGeom prst="rect">
             <a:avLst/>
@@ -6672,7 +7192,7 @@
           <a:lstStyle/>
           <a:p>
             <a:r>
-              <a:rPr sz="2800" b="1">
+              <a:rPr sz="2700" b="1">
                 <a:solidFill>
                   <a:srgbClr val="1B5EA8"/>
                 </a:solidFill>
@@ -6699,7 +7219,7 @@
         </p:blipFill>
         <p:spPr>
           <a:xfrm>
-            <a:off x="411480" y="1143000"/>
+            <a:off x="411480" y="1097280"/>
             <a:ext cx="11338560" cy="2789689"/>
           </a:xfrm>
           <a:prstGeom prst="rect">
@@ -6788,8 +7308,8 @@
         </p:nvSpPr>
         <p:spPr>
           <a:xfrm>
-            <a:off x="457200" y="201168"/>
-            <a:ext cx="11247120" cy="777240"/>
+            <a:off x="457200" y="182880"/>
+            <a:ext cx="11247120" cy="731520"/>
           </a:xfrm>
           <a:prstGeom prst="rect">
             <a:avLst/>
@@ -6803,13 +7323,13 @@
           <a:lstStyle/>
           <a:p>
             <a:r>
-              <a:rPr sz="2800" b="1">
+              <a:rPr sz="2700" b="1">
                 <a:solidFill>
                   <a:srgbClr val="1B5EA8"/>
                 </a:solidFill>
                 <a:latin typeface="Meiryo"/>
               </a:rPr>
-              <a:t>エクスポートツールと ONNX の注意点</a:t>
+              <a:t>まとめ — 環境設計こそが学習を決める</a:t>
             </a:r>
           </a:p>
         </p:txBody>
@@ -6822,8 +7342,8 @@
         </p:nvSpPr>
         <p:spPr>
           <a:xfrm>
-            <a:off x="548640" y="1325880"/>
-            <a:ext cx="11064240" cy="5394960"/>
+            <a:off x="548640" y="1371600"/>
+            <a:ext cx="11064240" cy="5486400"/>
           </a:xfrm>
           <a:prstGeom prst="rect">
             <a:avLst/>
@@ -6838,284 +7358,97 @@
           <a:p>
             <a:pPr>
               <a:spcAft>
-                <a:spcPts val="500"/>
-              </a:spcAft>
-            </a:pPr>
-            <a:r>
-              <a:rPr sz="1700" b="1">
+                <a:spcPts val="600"/>
+              </a:spcAft>
+            </a:pPr>
+            <a:r>
+              <a:rPr sz="1800" b="1">
                 <a:solidFill>
                   <a:srgbClr val="222222"/>
                 </a:solidFill>
                 <a:latin typeface="Meiryo"/>
               </a:rPr>
-              <a:t>python export_onnx.py &lt;model.zip&gt; -m 3   # エンジン用 NHWC [1,12,12,10] (推奨)</a:t>
-            </a:r>
-          </a:p>
-          <a:p>
-            <a:pPr lvl="1">
-              <a:spcAft>
-                <a:spcPts val="500"/>
-              </a:spcAft>
-            </a:pPr>
-            <a:r>
-              <a:rPr sz="1500" b="0">
-                <a:solidFill>
-                  <a:srgbClr val="595959"/>
-                </a:solidFill>
-                <a:latin typeface="Meiryo"/>
-              </a:rPr>
-              <a:t>  -m 1: full policy / 2: actor CHW / 3: actor NHWC / 0: 全部 — 各エクスポートは torch と自動照合</a:t>
+              <a:t>環境の進化: 行動 → 壁 → 報酬 → 観測 → トラックの 5 段階で「ゲームのレース」に到達</a:t>
             </a:r>
           </a:p>
           <a:p>
             <a:pPr>
               <a:spcAft>
-                <a:spcPts val="500"/>
-              </a:spcAft>
-            </a:pPr>
-            <a:r>
-              <a:rPr sz="1700" b="0">
+                <a:spcPts val="600"/>
+              </a:spcAft>
+            </a:pPr>
+            <a:r>
+              <a:rPr sz="1800" b="1">
                 <a:solidFill>
                   <a:srgbClr val="222222"/>
                 </a:solidFill>
                 <a:latin typeface="Meiryo"/>
               </a:rPr>
-              <a:t>python re_engine/convert_onnx_nhwc.py &lt;actor.onnx&gt;   # 既存 CHW を NHWC 化</a:t>
+              <a:t>抜け道 (ショートカット / wall-riding / 壁這い) は報酬の経済設計で排除 → 6 万 step で周回</a:t>
             </a:r>
           </a:p>
           <a:p>
             <a:pPr>
               <a:spcAft>
-                <a:spcPts val="500"/>
-              </a:spcAft>
-            </a:pPr>
-            <a:r>
-              <a:rPr sz="1700" b="0">
+                <a:spcPts val="600"/>
+              </a:spcAft>
+            </a:pPr>
+            <a:r>
+              <a:rPr sz="1800" b="1">
                 <a:solidFill>
                   <a:srgbClr val="222222"/>
                 </a:solidFill>
                 <a:latin typeface="Meiryo"/>
               </a:rPr>
-              <a:t>python re_engine/export_track_json.py   # トラック/観測変更後に参照データ再生成</a:t>
+              <a:t>汎化 = 自己位置を見せない観測の帰納バイアス (ランダム化はその補強)</a:t>
             </a:r>
           </a:p>
           <a:p>
             <a:pPr>
               <a:spcAft>
-                <a:spcPts val="500"/>
-              </a:spcAft>
-            </a:pPr>
-            <a:r>
-              <a:rPr sz="1700" b="1">
-                <a:solidFill>
-                  <a:srgbClr val="B32D2D"/>
-                </a:solidFill>
-                <a:latin typeface="Meiryo"/>
-              </a:rPr>
-              <a:t>症状で覚える: 出力がほぼ一定 (throttle≈0.4, steer≈0.2) = レイアウト不一致</a:t>
+                <a:spcPts val="600"/>
+              </a:spcAft>
+            </a:pPr>
+            <a:r>
+              <a:rPr sz="1800" b="1">
+                <a:solidFill>
+                  <a:srgbClr val="222222"/>
+                </a:solidFill>
+                <a:latin typeface="Meiryo"/>
+              </a:rPr>
+              <a:t>実ゲームギャップは一覧化済み: 数値一致移植で消す + デプロイ側フィルタで吸収の二層</a:t>
             </a:r>
           </a:p>
           <a:p>
             <a:pPr>
               <a:spcAft>
-                <a:spcPts val="500"/>
-              </a:spcAft>
-            </a:pPr>
-            <a:r>
-              <a:rPr sz="1700" b="0">
+                <a:spcPts val="600"/>
+              </a:spcAft>
+            </a:pPr>
+            <a:r>
+              <a:rPr sz="1800" b="0">
                 <a:solidFill>
                   <a:srgbClr val="222222"/>
                 </a:solidFill>
                 <a:latin typeface="Meiryo"/>
               </a:rPr>
-              <a:t>定数同期: accel/steer レンジ・5 Hz・グリッド設定は C# に複製 — 変更時は 4 点セット</a:t>
+              <a:t>本スライドの図・動画はすべてノートブックから再現可能 (Presentation Media セル)</a:t>
             </a:r>
           </a:p>
           <a:p>
             <a:pPr>
               <a:spcAft>
-                <a:spcPts val="500"/>
-              </a:spcAft>
-            </a:pPr>
-            <a:r>
-              <a:rPr sz="1700" b="0">
+                <a:spcPts val="600"/>
+              </a:spcAft>
+            </a:pPr>
+            <a:r>
+              <a:rPr sz="1800" b="0">
                 <a:solidFill>
                   <a:srgbClr val="222222"/>
                 </a:solidFill>
                 <a:latin typeface="Meiryo"/>
               </a:rPr>
-              <a:t>単位は全て m/s・m・rad。km/h の Vector3 は KphToMs で変換 (kph 直入れは無警告で劣化)</a:t>
-            </a:r>
-          </a:p>
-        </p:txBody>
-      </p:sp>
-    </p:spTree>
-  </p:cSld>
-  <p:clrMapOvr>
-    <a:masterClrMapping/>
-  </p:clrMapOvr>
-</p:sld>
-</file>
-
-<file path=ppt/slides/slide21.xml><?xml version="1.0" encoding="utf-8"?>
-<p:sld xmlns:a="http://schemas.openxmlformats.org/drawingml/2006/main" xmlns:p="http://schemas.openxmlformats.org/presentationml/2006/main" xmlns:r="http://schemas.openxmlformats.org/officeDocument/2006/relationships">
-  <p:cSld>
-    <p:spTree>
-      <p:nvGrpSpPr>
-        <p:cNvPr id="1" name=""/>
-        <p:cNvGrpSpPr/>
-        <p:nvPr/>
-      </p:nvGrpSpPr>
-      <p:grpSpPr/>
-      <p:sp>
-        <p:nvSpPr>
-          <p:cNvPr id="2" name="TextBox 1"/>
-          <p:cNvSpPr txBox="1"/>
-          <p:nvPr/>
-        </p:nvSpPr>
-        <p:spPr>
-          <a:xfrm>
-            <a:off x="457200" y="201168"/>
-            <a:ext cx="11247120" cy="777240"/>
-          </a:xfrm>
-          <a:prstGeom prst="rect">
-            <a:avLst/>
-          </a:prstGeom>
-          <a:noFill/>
-        </p:spPr>
-        <p:txBody>
-          <a:bodyPr wrap="none">
-            <a:spAutoFit/>
-          </a:bodyPr>
-          <a:lstStyle/>
-          <a:p>
-            <a:r>
-              <a:rPr sz="2800" b="1">
-                <a:solidFill>
-                  <a:srgbClr val="1B5EA8"/>
-                </a:solidFill>
-                <a:latin typeface="Meiryo"/>
-              </a:rPr>
-              <a:t>まとめ — 環境設計こそが学習を決める</a:t>
-            </a:r>
-          </a:p>
-        </p:txBody>
-      </p:sp>
-      <p:sp>
-        <p:nvSpPr>
-          <p:cNvPr id="3" name="TextBox 2"/>
-          <p:cNvSpPr txBox="1"/>
-          <p:nvPr/>
-        </p:nvSpPr>
-        <p:spPr>
-          <a:xfrm>
-            <a:off x="548640" y="1417320"/>
-            <a:ext cx="11064240" cy="5394960"/>
-          </a:xfrm>
-          <a:prstGeom prst="rect">
-            <a:avLst/>
-          </a:prstGeom>
-          <a:noFill/>
-        </p:spPr>
-        <p:txBody>
-          <a:bodyPr wrap="square">
-            <a:spAutoFit/>
-          </a:bodyPr>
-          <a:lstStyle/>
-          <a:p>
-            <a:pPr>
-              <a:spcAft>
-                <a:spcPts val="500"/>
-              </a:spcAft>
-            </a:pPr>
-            <a:r>
-              <a:rPr sz="1900" b="1">
-                <a:solidFill>
-                  <a:srgbClr val="222222"/>
-                </a:solidFill>
-                <a:latin typeface="Meiryo"/>
-              </a:rPr>
-              <a:t>デフォルト racetrack → ゲーム環境へ: 行動・壁・報酬・観測・トラックを段階的に進化</a:t>
-            </a:r>
-          </a:p>
-          <a:p>
-            <a:pPr>
-              <a:spcAft>
-                <a:spcPts val="500"/>
-              </a:spcAft>
-            </a:pPr>
-            <a:r>
-              <a:rPr sz="1900" b="1">
-                <a:solidFill>
-                  <a:srgbClr val="222222"/>
-                </a:solidFill>
-                <a:latin typeface="Meiryo"/>
-              </a:rPr>
-              <a:t>抜け道 (ショートカット / wall-riding / 壁這い) を報酬の経済設計で排除 → 6 万ステップで周回</a:t>
-            </a:r>
-          </a:p>
-          <a:p>
-            <a:pPr>
-              <a:spcAft>
-                <a:spcPts val="500"/>
-              </a:spcAft>
-            </a:pPr>
-            <a:r>
-              <a:rPr sz="1900" b="1">
-                <a:solidFill>
-                  <a:srgbClr val="222222"/>
-                </a:solidFill>
-                <a:latin typeface="Meiryo"/>
-              </a:rPr>
-              <a:t>自己位置を観測に入れない設計が 5 コース汎化を生んだ</a:t>
-            </a:r>
-          </a:p>
-          <a:p>
-            <a:pPr>
-              <a:spcAft>
-                <a:spcPts val="500"/>
-              </a:spcAft>
-            </a:pPr>
-            <a:r>
-              <a:rPr sz="1900" b="0">
-                <a:solidFill>
-                  <a:srgbClr val="222222"/>
-                </a:solidFill>
-                <a:latin typeface="Meiryo"/>
-              </a:rPr>
-              <a:t>C# ポートは観測ビット一致 + 物理 1e-7 一致 — 「動くはず」ではなく「同じ」</a:t>
-            </a:r>
-          </a:p>
-          <a:p>
-            <a:pPr>
-              <a:spcAft>
-                <a:spcPts val="500"/>
-              </a:spcAft>
-            </a:pPr>
-            <a:r>
-              <a:rPr sz="1900" b="0">
-                <a:solidFill>
-                  <a:srgbClr val="222222"/>
-                </a:solidFill>
-                <a:latin typeface="Meiryo"/>
-              </a:rPr>
-              <a:t>媒体生成コードはすべてノートブック内 (Presentation Media セル) — 本スライドは再現可能</a:t>
-            </a:r>
-          </a:p>
-          <a:p>
-            <a:pPr>
-              <a:spcAft>
-                <a:spcPts val="500"/>
-              </a:spcAft>
-            </a:pPr>
-            <a:r>
-              <a:rPr sz="1900" b="0">
-                <a:solidFill>
-                  <a:srgbClr val="222222"/>
-                </a:solidFill>
-                <a:latin typeface="Meiryo"/>
-              </a:rPr>
-              <a:t>次のステップ: RE Engine 実走検証・実車ダイナミクス適合・NPC レース</a:t>
+              <a:t>次: RE Engine 実走検証 / 壁摩擦・動力学の実測適合 / NPC レース</a:t>
             </a:r>
           </a:p>
         </p:txBody>
@@ -7146,8 +7479,8 @@
         </p:nvSpPr>
         <p:spPr>
           <a:xfrm>
-            <a:off x="457200" y="201168"/>
-            <a:ext cx="11247120" cy="777240"/>
+            <a:off x="457200" y="182880"/>
+            <a:ext cx="11247120" cy="731520"/>
           </a:xfrm>
           <a:prstGeom prst="rect">
             <a:avLst/>
@@ -7161,7 +7494,7 @@
           <a:lstStyle/>
           <a:p>
             <a:r>
-              <a:rPr sz="2800" b="1">
+              <a:rPr sz="2700" b="1">
                 <a:solidFill>
                   <a:srgbClr val="1B5EA8"/>
                 </a:solidFill>
@@ -7188,7 +7521,7 @@
         </p:blipFill>
         <p:spPr>
           <a:xfrm>
-            <a:off x="2468880" y="1234440"/>
+            <a:off x="2468880" y="1188720"/>
             <a:ext cx="7315200" cy="4096512"/>
           </a:xfrm>
           <a:prstGeom prst="rect">
@@ -7222,8 +7555,8 @@
         </p:nvSpPr>
         <p:spPr>
           <a:xfrm>
-            <a:off x="457200" y="201168"/>
-            <a:ext cx="11247120" cy="777240"/>
+            <a:off x="457200" y="182880"/>
+            <a:ext cx="11247120" cy="731520"/>
           </a:xfrm>
           <a:prstGeom prst="rect">
             <a:avLst/>
@@ -7237,7 +7570,7 @@
           <a:lstStyle/>
           <a:p>
             <a:r>
-              <a:rPr sz="2800" b="1">
+              <a:rPr sz="2700" b="1">
                 <a:solidFill>
                   <a:srgbClr val="1B5EA8"/>
                 </a:solidFill>
@@ -7264,7 +7597,7 @@
         </p:blipFill>
         <p:spPr>
           <a:xfrm>
-            <a:off x="2834640" y="1188720"/>
+            <a:off x="2834640" y="1143000"/>
             <a:ext cx="6583680" cy="4389120"/>
           </a:xfrm>
           <a:prstGeom prst="rect">
@@ -7298,8 +7631,8 @@
         </p:nvSpPr>
         <p:spPr>
           <a:xfrm>
-            <a:off x="457200" y="201168"/>
-            <a:ext cx="11247120" cy="777240"/>
+            <a:off x="457200" y="182880"/>
+            <a:ext cx="11247120" cy="731520"/>
           </a:xfrm>
           <a:prstGeom prst="rect">
             <a:avLst/>
@@ -7313,7 +7646,7 @@
           <a:lstStyle/>
           <a:p>
             <a:r>
-              <a:rPr sz="2800" b="1">
+              <a:rPr sz="2700" b="1">
                 <a:solidFill>
                   <a:srgbClr val="1B5EA8"/>
                 </a:solidFill>
@@ -7332,8 +7665,8 @@
         </p:nvSpPr>
         <p:spPr>
           <a:xfrm>
-            <a:off x="548640" y="1325880"/>
-            <a:ext cx="11064240" cy="5394960"/>
+            <a:off x="548640" y="1234440"/>
+            <a:ext cx="11064240" cy="5486400"/>
           </a:xfrm>
           <a:prstGeom prst="rect">
             <a:avLst/>
@@ -7348,7 +7681,7 @@
           <a:p>
             <a:pPr>
               <a:spcAft>
-                <a:spcPts val="500"/>
+                <a:spcPts val="600"/>
               </a:spcAft>
             </a:pPr>
             <a:r>
@@ -7358,87 +7691,151 @@
                 </a:solidFill>
                 <a:latin typeface="Meiryo"/>
               </a:rPr>
-              <a:t>fast トラック: 37 周 / 800 秒・16 m/s (制限速度)・無衝突</a:t>
+              <a:t>走行性能</a:t>
+            </a:r>
+          </a:p>
+          <a:p>
+            <a:pPr lvl="1">
+              <a:spcAft>
+                <a:spcPts val="200"/>
+              </a:spcAft>
+            </a:pPr>
+            <a:r>
+              <a:rPr sz="1700" b="0">
+                <a:solidFill>
+                  <a:srgbClr val="595959"/>
+                </a:solidFill>
+                <a:latin typeface="Meiryo"/>
+              </a:rPr>
+              <a:t>・fast トラック: 37 周 / 800 秒、16 m/s (制限速度)、無衝突</a:t>
+            </a:r>
+          </a:p>
+          <a:p>
+            <a:pPr lvl="1">
+              <a:spcAft>
+                <a:spcPts val="200"/>
+              </a:spcAft>
+            </a:pPr>
+            <a:r>
+              <a:rPr sz="1700" b="0">
+                <a:solidFill>
+                  <a:srgbClr val="595959"/>
+                </a:solidFill>
+                <a:latin typeface="Meiryo"/>
+              </a:rPr>
+              <a:t>・汎化モデル: 5 トラックすべて 2 分間ノーミス、平均 15.7 m/s</a:t>
+            </a:r>
+          </a:p>
+          <a:p>
+            <a:pPr lvl="1">
+              <a:spcAft>
+                <a:spcPts val="200"/>
+              </a:spcAft>
+            </a:pPr>
+            <a:r>
+              <a:rPr sz="1700" b="0">
+                <a:solidFill>
+                  <a:srgbClr val="595959"/>
+                </a:solidFill>
+                <a:latin typeface="Meiryo"/>
+              </a:rPr>
+              <a:t>・ゼロショット転移: fast 専用モデルが未見の 4 コースも制限速度で走行</a:t>
             </a:r>
           </a:p>
           <a:p>
             <a:pPr>
               <a:spcAft>
-                <a:spcPts val="500"/>
-              </a:spcAft>
-            </a:pPr>
-            <a:r>
-              <a:rPr sz="1900" b="0">
+                <a:spcPts val="600"/>
+              </a:spcAft>
+            </a:pPr>
+            <a:r>
+              <a:rPr sz="1900" b="1">
                 <a:solidFill>
                   <a:srgbClr val="222222"/>
                 </a:solidFill>
                 <a:latin typeface="Meiryo"/>
               </a:rPr>
-              <a:t>周回能力の獲得: 3〜6 万ステップ (6 万で 32 周 → 9 万で 36 周)</a:t>
+              <a:t>学習効率</a:t>
+            </a:r>
+          </a:p>
+          <a:p>
+            <a:pPr lvl="1">
+              <a:spcAft>
+                <a:spcPts val="200"/>
+              </a:spcAft>
+            </a:pPr>
+            <a:r>
+              <a:rPr sz="1700" b="0">
+                <a:solidFill>
+                  <a:srgbClr val="595959"/>
+                </a:solidFill>
+                <a:latin typeface="Meiryo"/>
+              </a:rPr>
+              <a:t>・周回能力の獲得: 3〜6 万ステップ (6 万で 32 周 → 9 万で 36 周)</a:t>
+            </a:r>
+          </a:p>
+          <a:p>
+            <a:pPr lvl="1">
+              <a:spcAft>
+                <a:spcPts val="200"/>
+              </a:spcAft>
+            </a:pPr>
+            <a:r>
+              <a:rPr sz="1700" b="0">
+                <a:solidFill>
+                  <a:srgbClr val="595959"/>
+                </a:solidFill>
+                <a:latin typeface="Meiryo"/>
+              </a:rPr>
+              <a:t>・fast-dev (12 万・本番ハイパラ): フェーズ 2 (NPC あり) 込みで 37 周 — 退行なし</a:t>
             </a:r>
           </a:p>
           <a:p>
             <a:pPr>
               <a:spcAft>
-                <a:spcPts val="500"/>
-              </a:spcAft>
-            </a:pPr>
-            <a:r>
-              <a:rPr sz="1900" b="0">
+                <a:spcPts val="600"/>
+              </a:spcAft>
+            </a:pPr>
+            <a:r>
+              <a:rPr sz="1900" b="1">
                 <a:solidFill>
                   <a:srgbClr val="222222"/>
                 </a:solidFill>
                 <a:latin typeface="Meiryo"/>
               </a:rPr>
-              <a:t>fast-dev (12 万, 本番ハイパラ): フェーズ 2 (NPC あり lr 3e-4) 込みで 37 周 — 退行なし</a:t>
-            </a:r>
-          </a:p>
-          <a:p>
-            <a:pPr>
-              <a:spcAft>
-                <a:spcPts val="500"/>
-              </a:spcAft>
-            </a:pPr>
-            <a:r>
-              <a:rPr sz="1900" b="1">
-                <a:solidFill>
-                  <a:srgbClr val="222222"/>
-                </a:solidFill>
-                <a:latin typeface="Meiryo"/>
-              </a:rPr>
-              <a:t>汎化モデル (random 学習 15 万): 5 トラックすべて 2 分間ノーミス・平均 15.7 m/s</a:t>
-            </a:r>
-          </a:p>
-          <a:p>
-            <a:pPr>
-              <a:spcAft>
-                <a:spcPts val="500"/>
-              </a:spcAft>
-            </a:pPr>
-            <a:r>
-              <a:rPr sz="1900" b="0">
-                <a:solidFill>
-                  <a:srgbClr val="222222"/>
-                </a:solidFill>
-                <a:latin typeface="Meiryo"/>
-              </a:rPr>
-              <a:t>ゼロショット転移: fast 専用モデルも他 4 コースを制限速度で走行 (自己位置非観測が鍵)</a:t>
-            </a:r>
-          </a:p>
-          <a:p>
-            <a:pPr>
-              <a:spcAft>
-                <a:spcPts val="500"/>
-              </a:spcAft>
-            </a:pPr>
-            <a:r>
-              <a:rPr sz="1900" b="1">
-                <a:solidFill>
-                  <a:srgbClr val="222222"/>
-                </a:solidFill>
-                <a:latin typeface="Meiryo"/>
-              </a:rPr>
-              <a:t>C# デプロイ: 観測ビット一致 (maxDiff=0.0) + 車両物理 1e-7 一致 — 検証ハーネスで自動確認</a:t>
+              <a:t>デプロイ品質</a:t>
+            </a:r>
+          </a:p>
+          <a:p>
+            <a:pPr lvl="1">
+              <a:spcAft>
+                <a:spcPts val="200"/>
+              </a:spcAft>
+            </a:pPr>
+            <a:r>
+              <a:rPr sz="1700" b="0">
+                <a:solidFill>
+                  <a:srgbClr val="595959"/>
+                </a:solidFill>
+                <a:latin typeface="Meiryo"/>
+              </a:rPr>
+              <a:t>・C# 観測ポート: Python とビット一致 (maxDiff = 0.0) — 検証ハーネスで自動確認</a:t>
+            </a:r>
+          </a:p>
+          <a:p>
+            <a:pPr lvl="1">
+              <a:spcAft>
+                <a:spcPts val="200"/>
+              </a:spcAft>
+            </a:pPr>
+            <a:r>
+              <a:rPr sz="1700" b="0">
+                <a:solidFill>
+                  <a:srgbClr val="595959"/>
+                </a:solidFill>
+                <a:latin typeface="Meiryo"/>
+              </a:rPr>
+              <a:t>・C# 車両物理 (CarController): BicycleVehicle と 1e-7 一致</a:t>
             </a:r>
           </a:p>
         </p:txBody>
@@ -7469,8 +7866,8 @@
         </p:nvSpPr>
         <p:spPr>
           <a:xfrm>
-            <a:off x="457200" y="201168"/>
-            <a:ext cx="11247120" cy="777240"/>
+            <a:off x="457200" y="182880"/>
+            <a:ext cx="11247120" cy="731520"/>
           </a:xfrm>
           <a:prstGeom prst="rect">
             <a:avLst/>
@@ -7484,13 +7881,13 @@
           <a:lstStyle/>
           <a:p>
             <a:r>
-              <a:rPr sz="2800" b="1">
+              <a:rPr sz="2700" b="1">
                 <a:solidFill>
                   <a:srgbClr val="1B5EA8"/>
                 </a:solidFill>
                 <a:latin typeface="Meiryo"/>
               </a:rPr>
-              <a:t>ベースライン: highway-env の racetrack 環境 (デフォルト設定)</a:t>
+              <a:t>前提知識 — highway-env と本タスクの位置づけ</a:t>
             </a:r>
           </a:p>
         </p:txBody>
@@ -7503,8 +7900,8 @@
         </p:nvSpPr>
         <p:spPr>
           <a:xfrm>
-            <a:off x="548640" y="1280160"/>
-            <a:ext cx="11064240" cy="5394960"/>
+            <a:off x="548640" y="1188720"/>
+            <a:ext cx="11064240" cy="5486400"/>
           </a:xfrm>
           <a:prstGeom prst="rect">
             <a:avLst/>
@@ -7519,7 +7916,7 @@
           <a:p>
             <a:pPr>
               <a:spcAft>
-                <a:spcPts val="500"/>
+                <a:spcPts val="600"/>
               </a:spcAft>
             </a:pPr>
             <a:r>
@@ -7529,13 +7926,61 @@
                 </a:solidFill>
                 <a:latin typeface="Meiryo"/>
               </a:rPr>
-              <a:t>行動: ステアリングのみ (longitudinal=False)。速度は離散 target_speeds [0, 5, 10] から選択</a:t>
+              <a:t>highway-env とは</a:t>
+            </a:r>
+          </a:p>
+          <a:p>
+            <a:pPr lvl="1">
+              <a:spcAft>
+                <a:spcPts val="200"/>
+              </a:spcAft>
+            </a:pPr>
+            <a:r>
+              <a:rPr sz="1500" b="0">
+                <a:solidFill>
+                  <a:srgbClr val="595959"/>
+                </a:solidFill>
+                <a:latin typeface="Meiryo"/>
+              </a:rPr>
+              <a:t>・自動運転研究用の 2D シミュレータ — 道路 = レーン中心線 (直線/円弧) の解析表現</a:t>
+            </a:r>
+          </a:p>
+          <a:p>
+            <a:pPr lvl="1">
+              <a:spcAft>
+                <a:spcPts val="200"/>
+              </a:spcAft>
+            </a:pPr>
+            <a:r>
+              <a:rPr sz="1500" b="0">
+                <a:solidFill>
+                  <a:srgbClr val="595959"/>
+                </a:solidFill>
+                <a:latin typeface="Meiryo"/>
+              </a:rPr>
+              <a:t>・OccupancyGrid 観測: 自車周辺を格子化し、セルに特徴量を書き込む鳥瞰表現</a:t>
+            </a:r>
+          </a:p>
+          <a:p>
+            <a:pPr lvl="1">
+              <a:spcAft>
+                <a:spcPts val="200"/>
+              </a:spcAft>
+            </a:pPr>
+            <a:r>
+              <a:rPr sz="1500" b="0">
+                <a:solidFill>
+                  <a:srgbClr val="595959"/>
+                </a:solidFill>
+                <a:latin typeface="Meiryo"/>
+              </a:rPr>
+              <a:t>・車両は Bicycle モデル (運動学 or 動力学) — ゲーム向けに軽量・決定論的</a:t>
             </a:r>
           </a:p>
           <a:p>
             <a:pPr>
               <a:spcAft>
-                <a:spcPts val="500"/>
+                <a:spcPts val="600"/>
               </a:spcAft>
             </a:pPr>
             <a:r>
@@ -7545,87 +7990,71 @@
                 </a:solidFill>
                 <a:latin typeface="Meiryo"/>
               </a:rPr>
-              <a:t>観測: OccupancyGrid 2ch (presence / on_road) のみ、±18 m の対称視野</a:t>
-            </a:r>
-          </a:p>
-          <a:p>
-            <a:pPr>
-              <a:spcAft>
-                <a:spcPts val="500"/>
-              </a:spcAft>
-            </a:pPr>
-            <a:r>
-              <a:rPr sz="1700" b="1">
-                <a:solidFill>
-                  <a:srgbClr val="222222"/>
-                </a:solidFill>
-                <a:latin typeface="Meiryo"/>
-              </a:rPr>
-              <a:t>報酬: 車線中央維持 1/(1+4·lat²) + 操作量ペナルティ −0.3·|action| + 衝突 −1</a:t>
-            </a:r>
-          </a:p>
-          <a:p>
-            <a:pPr>
-              <a:spcAft>
-                <a:spcPts val="500"/>
-              </a:spcAft>
-            </a:pPr>
-            <a:r>
-              <a:rPr sz="1700" b="0">
-                <a:solidFill>
-                  <a:srgbClr val="222222"/>
-                </a:solidFill>
-                <a:latin typeface="Meiryo"/>
-              </a:rPr>
-              <a:t>速度: speed_limit 10 m/s。「速く走る」インセンティブが存在しない</a:t>
-            </a:r>
-          </a:p>
-          <a:p>
-            <a:pPr>
-              <a:spcAft>
-                <a:spcPts val="500"/>
-              </a:spcAft>
-            </a:pPr>
-            <a:r>
-              <a:rPr sz="1700" b="1">
-                <a:solidFill>
-                  <a:srgbClr val="222222"/>
-                </a:solidFill>
-                <a:latin typeface="Meiryo"/>
-              </a:rPr>
-              <a:t>壁: 存在しない — 路外は終了 (または放置)。すり抜け・ショートカットが物理的に可能</a:t>
-            </a:r>
-          </a:p>
-          <a:p>
-            <a:pPr>
-              <a:spcAft>
-                <a:spcPts val="500"/>
-              </a:spcAft>
-            </a:pPr>
-            <a:r>
-              <a:rPr sz="1700" b="0">
-                <a:solidFill>
-                  <a:srgbClr val="222222"/>
-                </a:solidFill>
-                <a:latin typeface="Meiryo"/>
-              </a:rPr>
-              <a:t>車両: 運動学 Bicycle (スリップなし)。NPC 1 台、エピソード 300 秒</a:t>
-            </a:r>
-          </a:p>
-          <a:p>
-            <a:pPr>
-              <a:spcAft>
-                <a:spcPts val="500"/>
-              </a:spcAft>
-            </a:pPr>
-            <a:r>
-              <a:rPr sz="1700" b="1">
-                <a:solidFill>
-                  <a:srgbClr val="B32D2D"/>
-                </a:solidFill>
-                <a:latin typeface="Meiryo"/>
-              </a:rPr>
-              <a:t>→ 「レーンをなぞる」研究環境としては優秀。しかしゲームのレースには遠い</a:t>
+              <a:t>本タスクの形式化 (RL 実務者向け)</a:t>
+            </a:r>
+          </a:p>
+          <a:p>
+            <a:pPr lvl="1">
+              <a:spcAft>
+                <a:spcPts val="200"/>
+              </a:spcAft>
+            </a:pPr>
+            <a:r>
+              <a:rPr sz="1500" b="0">
+                <a:solidFill>
+                  <a:srgbClr val="595959"/>
+                </a:solidFill>
+                <a:latin typeface="Meiryo"/>
+              </a:rPr>
+              <a:t>・連続制御の POMDP: 自己座標なしのエゴセントリック局所観測のみ</a:t>
+            </a:r>
+          </a:p>
+          <a:p>
+            <a:pPr lvl="2">
+              <a:spcAft>
+                <a:spcPts val="200"/>
+              </a:spcAft>
+            </a:pPr>
+            <a:r>
+              <a:rPr sz="1300" b="0">
+                <a:solidFill>
+                  <a:srgbClr val="595959"/>
+                </a:solidFill>
+                <a:latin typeface="Meiryo"/>
+              </a:rPr>
+              <a:t>− 方策は平行移動・回転不変に制約 → コース暗記が表現不能 (汎化の帰納バイアス)</a:t>
+            </a:r>
+          </a:p>
+          <a:p>
+            <a:pPr lvl="1">
+              <a:spcAft>
+                <a:spcPts val="200"/>
+              </a:spcAft>
+            </a:pPr>
+            <a:r>
+              <a:rPr sz="1500" b="0">
+                <a:solidFill>
+                  <a:srgbClr val="595959"/>
+                </a:solidFill>
+                <a:latin typeface="Meiryo"/>
+              </a:rPr>
+              <a:t>・意思決定 5 Hz / 物理 15 Hz (action repeat 3)。相対速度と lat/ang_off で近似マルコフ</a:t>
+            </a:r>
+          </a:p>
+          <a:p>
+            <a:pPr lvl="1">
+              <a:spcAft>
+                <a:spcPts val="200"/>
+              </a:spcAft>
+            </a:pPr>
+            <a:r>
+              <a:rPr sz="1500" b="0">
+                <a:solidFill>
+                  <a:srgbClr val="595959"/>
+                </a:solidFill>
+                <a:latin typeface="Meiryo"/>
+              </a:rPr>
+              <a:t>・γ=0.99 @5 Hz → 実効ホライズン ≈ 20 s ≈ 1 周 — コーナー進入の信用割当が届く</a:t>
             </a:r>
           </a:p>
         </p:txBody>
@@ -7656,8 +8085,8 @@
         </p:nvSpPr>
         <p:spPr>
           <a:xfrm>
-            <a:off x="457200" y="201168"/>
-            <a:ext cx="11247120" cy="777240"/>
+            <a:off x="457200" y="182880"/>
+            <a:ext cx="11247120" cy="731520"/>
           </a:xfrm>
           <a:prstGeom prst="rect">
             <a:avLst/>
@@ -7671,41 +8100,216 @@
           <a:lstStyle/>
           <a:p>
             <a:r>
-              <a:rPr sz="2800" b="1">
+              <a:rPr sz="2700" b="1">
                 <a:solidFill>
                   <a:srgbClr val="1B5EA8"/>
                 </a:solidFill>
                 <a:latin typeface="Meiryo"/>
               </a:rPr>
-              <a:t>デフォルト racetrack と本プロジェクトの fast トラック</a:t>
-            </a:r>
-          </a:p>
-        </p:txBody>
-      </p:sp>
-      <p:pic>
-        <p:nvPicPr>
-          <p:cNvPr id="3" name="Picture 2" descr="default_vs_ours.png"/>
-          <p:cNvPicPr>
-            <a:picLocks noChangeAspect="1"/>
-          </p:cNvPicPr>
+              <a:t>highway-env racetrack のデフォルト設定 (v1.12 実物)</a:t>
+            </a:r>
+          </a:p>
+        </p:txBody>
+      </p:sp>
+      <p:sp>
+        <p:nvSpPr>
+          <p:cNvPr id="3" name="TextBox 2"/>
+          <p:cNvSpPr txBox="1"/>
           <p:nvPr/>
-        </p:nvPicPr>
-        <p:blipFill>
-          <a:blip r:embed="rId3"/>
-          <a:stretch>
-            <a:fillRect/>
-          </a:stretch>
-        </p:blipFill>
+        </p:nvSpPr>
         <p:spPr>
           <a:xfrm>
-            <a:off x="822960" y="1371600"/>
-            <a:ext cx="10515600" cy="3720905"/>
+            <a:off x="548640" y="1143000"/>
+            <a:ext cx="11064240" cy="5486400"/>
           </a:xfrm>
           <a:prstGeom prst="rect">
             <a:avLst/>
           </a:prstGeom>
+          <a:noFill/>
         </p:spPr>
-      </p:pic>
+        <p:txBody>
+          <a:bodyPr wrap="square">
+            <a:spAutoFit/>
+          </a:bodyPr>
+          <a:lstStyle/>
+          <a:p>
+            <a:pPr>
+              <a:spcAft>
+                <a:spcPts val="600"/>
+              </a:spcAft>
+            </a:pPr>
+            <a:r>
+              <a:rPr sz="1600" b="1">
+                <a:solidFill>
+                  <a:srgbClr val="222222"/>
+                </a:solidFill>
+                <a:latin typeface="Meiryo"/>
+              </a:rPr>
+              <a:t>行動空間</a:t>
+            </a:r>
+          </a:p>
+          <a:p>
+            <a:pPr lvl="1">
+              <a:spcAft>
+                <a:spcPts val="200"/>
+              </a:spcAft>
+            </a:pPr>
+            <a:r>
+              <a:rPr sz="1400" b="0">
+                <a:solidFill>
+                  <a:srgbClr val="595959"/>
+                </a:solidFill>
+                <a:latin typeface="Meiryo"/>
+              </a:rPr>
+              <a:t>・ステアリングのみ (longitudinal=False) — スロットルという概念がない</a:t>
+            </a:r>
+          </a:p>
+          <a:p>
+            <a:pPr lvl="1">
+              <a:spcAft>
+                <a:spcPts val="200"/>
+              </a:spcAft>
+            </a:pPr>
+            <a:r>
+              <a:rPr sz="1400" b="0">
+                <a:solidFill>
+                  <a:srgbClr val="595959"/>
+                </a:solidFill>
+                <a:latin typeface="Meiryo"/>
+              </a:rPr>
+              <a:t>・速度は離散 target_speeds [0, 5, 10] m/s から選択</a:t>
+            </a:r>
+          </a:p>
+          <a:p>
+            <a:pPr>
+              <a:spcAft>
+                <a:spcPts val="600"/>
+              </a:spcAft>
+            </a:pPr>
+            <a:r>
+              <a:rPr sz="1600" b="1">
+                <a:solidFill>
+                  <a:srgbClr val="222222"/>
+                </a:solidFill>
+                <a:latin typeface="Meiryo"/>
+              </a:rPr>
+              <a:t>観測空間</a:t>
+            </a:r>
+          </a:p>
+          <a:p>
+            <a:pPr lvl="1">
+              <a:spcAft>
+                <a:spcPts val="200"/>
+              </a:spcAft>
+            </a:pPr>
+            <a:r>
+              <a:rPr sz="1400" b="0">
+                <a:solidFill>
+                  <a:srgbClr val="595959"/>
+                </a:solidFill>
+                <a:latin typeface="Meiryo"/>
+              </a:rPr>
+              <a:t>・OccupancyGrid 2ch (presence / on_road)、±18 m の対称視野・3 m セル</a:t>
+            </a:r>
+          </a:p>
+          <a:p>
+            <a:pPr>
+              <a:spcAft>
+                <a:spcPts val="600"/>
+              </a:spcAft>
+            </a:pPr>
+            <a:r>
+              <a:rPr sz="1600" b="1">
+                <a:solidFill>
+                  <a:srgbClr val="222222"/>
+                </a:solidFill>
+                <a:latin typeface="Meiryo"/>
+              </a:rPr>
+              <a:t>報酬関数</a:t>
+            </a:r>
+          </a:p>
+          <a:p>
+            <a:pPr lvl="1">
+              <a:spcAft>
+                <a:spcPts val="200"/>
+              </a:spcAft>
+            </a:pPr>
+            <a:r>
+              <a:rPr sz="1400" b="0">
+                <a:solidFill>
+                  <a:srgbClr val="595959"/>
+                </a:solidFill>
+                <a:latin typeface="Meiryo"/>
+              </a:rPr>
+              <a:t>・車線中央維持 1/(1+4·lat²) + 操作量ペナルティ −0.3·‖a‖ + 衝突 −1</a:t>
+            </a:r>
+          </a:p>
+          <a:p>
+            <a:pPr lvl="1">
+              <a:spcAft>
+                <a:spcPts val="200"/>
+              </a:spcAft>
+            </a:pPr>
+            <a:r>
+              <a:rPr sz="1400" b="0">
+                <a:solidFill>
+                  <a:srgbClr val="595959"/>
+                </a:solidFill>
+                <a:latin typeface="Meiryo"/>
+              </a:rPr>
+              <a:t>・speed_limit 10 m/s — 「速く走る」インセンティブなし</a:t>
+            </a:r>
+          </a:p>
+          <a:p>
+            <a:pPr>
+              <a:spcAft>
+                <a:spcPts val="600"/>
+              </a:spcAft>
+            </a:pPr>
+            <a:r>
+              <a:rPr sz="1600" b="1">
+                <a:solidFill>
+                  <a:srgbClr val="222222"/>
+                </a:solidFill>
+                <a:latin typeface="Meiryo"/>
+              </a:rPr>
+              <a:t>物理</a:t>
+            </a:r>
+          </a:p>
+          <a:p>
+            <a:pPr lvl="1">
+              <a:spcAft>
+                <a:spcPts val="200"/>
+              </a:spcAft>
+            </a:pPr>
+            <a:r>
+              <a:rPr sz="1400" b="0">
+                <a:solidFill>
+                  <a:srgbClr val="595959"/>
+                </a:solidFill>
+                <a:latin typeface="Meiryo"/>
+              </a:rPr>
+              <a:t>・壁なし (路外 = 終了 or 放置)、運動学 Bicycle (スリップなし)、NPC 1 台</a:t>
+            </a:r>
+          </a:p>
+          <a:p>
+            <a:pPr>
+              <a:spcAft>
+                <a:spcPts val="600"/>
+              </a:spcAft>
+            </a:pPr>
+            <a:r>
+              <a:rPr sz="1600" b="1">
+                <a:solidFill>
+                  <a:srgbClr val="B32D2D"/>
+                </a:solidFill>
+                <a:latin typeface="Meiryo"/>
+              </a:rPr>
+              <a:t>→ レーン追従研究には十分。ゲームのレースには 4 つの欠落 (次頁から順に埋める)</a:t>
+            </a:r>
+          </a:p>
+        </p:txBody>
+      </p:sp>
     </p:spTree>
   </p:cSld>
   <p:clrMapOvr>
@@ -7732,8 +8336,8 @@
         </p:nvSpPr>
         <p:spPr>
           <a:xfrm>
-            <a:off x="457200" y="201168"/>
-            <a:ext cx="11247120" cy="777240"/>
+            <a:off x="457200" y="182880"/>
+            <a:ext cx="11247120" cy="731520"/>
           </a:xfrm>
           <a:prstGeom prst="rect">
             <a:avLst/>
@@ -7747,136 +8351,41 @@
           <a:lstStyle/>
           <a:p>
             <a:r>
-              <a:rPr sz="2800" b="1">
+              <a:rPr sz="2700" b="1">
                 <a:solidFill>
                   <a:srgbClr val="1B5EA8"/>
                 </a:solidFill>
                 <a:latin typeface="Meiryo"/>
               </a:rPr>
-              <a:t>問題の形式化 — POMDP・意思決定周波数・割引</a:t>
-            </a:r>
-          </a:p>
-        </p:txBody>
-      </p:sp>
-      <p:sp>
-        <p:nvSpPr>
-          <p:cNvPr id="3" name="TextBox 2"/>
-          <p:cNvSpPr txBox="1"/>
+              <a:t>デフォルト racetrack と本プロジェクトの fast トラック</a:t>
+            </a:r>
+          </a:p>
+        </p:txBody>
+      </p:sp>
+      <p:pic>
+        <p:nvPicPr>
+          <p:cNvPr id="3" name="Picture 2" descr="default_vs_ours.png"/>
+          <p:cNvPicPr>
+            <a:picLocks noChangeAspect="1"/>
+          </p:cNvPicPr>
           <p:nvPr/>
-        </p:nvSpPr>
+        </p:nvPicPr>
+        <p:blipFill>
+          <a:blip r:embed="rId3"/>
+          <a:stretch>
+            <a:fillRect/>
+          </a:stretch>
+        </p:blipFill>
         <p:spPr>
           <a:xfrm>
-            <a:off x="548640" y="1325880"/>
-            <a:ext cx="11064240" cy="5394960"/>
+            <a:off x="822960" y="1325880"/>
+            <a:ext cx="10515600" cy="3720905"/>
           </a:xfrm>
           <a:prstGeom prst="rect">
             <a:avLst/>
           </a:prstGeom>
-          <a:noFill/>
         </p:spPr>
-        <p:txBody>
-          <a:bodyPr wrap="square">
-            <a:spAutoFit/>
-          </a:bodyPr>
-          <a:lstStyle/>
-          <a:p>
-            <a:pPr>
-              <a:spcAft>
-                <a:spcPts val="500"/>
-              </a:spcAft>
-            </a:pPr>
-            <a:r>
-              <a:rPr sz="1700" b="1">
-                <a:solidFill>
-                  <a:srgbClr val="222222"/>
-                </a:solidFill>
-                <a:latin typeface="Meiryo"/>
-              </a:rPr>
-              <a:t>POMDP: 自己位置なし・前方 27 m の局所観測 — 方策は反射的 (メモリレス) に制約</a:t>
-            </a:r>
-          </a:p>
-          <a:p>
-            <a:pPr>
-              <a:spcAft>
-                <a:spcPts val="500"/>
-              </a:spcAft>
-            </a:pPr>
-            <a:r>
-              <a:rPr sz="1700" b="0">
-                <a:solidFill>
-                  <a:srgbClr val="222222"/>
-                </a:solidFill>
-                <a:latin typeface="Meiryo"/>
-              </a:rPr>
-              <a:t>意思決定 5 Hz / 物理 15 Hz (action repeat = 3) — 制御の滑らかさと学習効率のトレード</a:t>
-            </a:r>
-          </a:p>
-          <a:p>
-            <a:pPr>
-              <a:spcAft>
-                <a:spcPts val="500"/>
-              </a:spcAft>
-            </a:pPr>
-            <a:r>
-              <a:rPr sz="1700" b="0">
-                <a:solidFill>
-                  <a:srgbClr val="222222"/>
-                </a:solidFill>
-                <a:latin typeface="Meiryo"/>
-              </a:rPr>
-              <a:t>フレームスタック不使用: 相対速度 vx,vy と lat/ang_off が状態を近似マルコフ化</a:t>
-            </a:r>
-          </a:p>
-          <a:p>
-            <a:pPr>
-              <a:spcAft>
-                <a:spcPts val="500"/>
-              </a:spcAft>
-            </a:pPr>
-            <a:r>
-              <a:rPr sz="1700" b="1">
-                <a:solidFill>
-                  <a:srgbClr val="222222"/>
-                </a:solidFill>
-                <a:latin typeface="Meiryo"/>
-              </a:rPr>
-              <a:t>γ = 0.99 @5 Hz → 実効ホライズン ≈ 20 s ≈ 1 周 — コーナー進入の信用割当が届く</a:t>
-            </a:r>
-          </a:p>
-          <a:p>
-            <a:pPr>
-              <a:spcAft>
-                <a:spcPts val="500"/>
-              </a:spcAft>
-            </a:pPr>
-            <a:r>
-              <a:rPr sz="1700" b="0">
-                <a:solidFill>
-                  <a:srgbClr val="222222"/>
-                </a:solidFill>
-                <a:latin typeface="Meiryo"/>
-              </a:rPr>
-              <a:t>GAE λ = 0.98: 長ホライズンのバイアス-分散トレードを分散側に寄せる (密報酬なので許容)</a:t>
-            </a:r>
-          </a:p>
-          <a:p>
-            <a:pPr>
-              <a:spcAft>
-                <a:spcPts val="500"/>
-              </a:spcAft>
-            </a:pPr>
-            <a:r>
-              <a:rPr sz="1700" b="0">
-                <a:solidFill>
-                  <a:srgbClr val="222222"/>
-                </a:solidFill>
-                <a:latin typeface="Meiryo"/>
-              </a:rPr>
-              <a:t>報酬 ∈ [0,1]/step → 理論上の episodic return 上限 = ステップ数 (4000) — 診断が容易</a:t>
-            </a:r>
-          </a:p>
-        </p:txBody>
-      </p:sp>
+      </p:pic>
     </p:spTree>
   </p:cSld>
   <p:clrMapOvr>
@@ -7903,8 +8412,8 @@
         </p:nvSpPr>
         <p:spPr>
           <a:xfrm>
-            <a:off x="457200" y="201168"/>
-            <a:ext cx="11247120" cy="777240"/>
+            <a:off x="457200" y="182880"/>
+            <a:ext cx="11247120" cy="731520"/>
           </a:xfrm>
           <a:prstGeom prst="rect">
             <a:avLst/>
@@ -7918,13 +8427,13 @@
           <a:lstStyle/>
           <a:p>
             <a:r>
-              <a:rPr sz="2800" b="1">
+              <a:rPr sz="2700" b="1">
                 <a:solidFill>
                   <a:srgbClr val="1B5EA8"/>
                 </a:solidFill>
                 <a:latin typeface="Meiryo"/>
               </a:rPr>
-              <a:t>進化 (1) 行動と車両 — スロットルを持たせ、実車に近づける</a:t>
+              <a:t>進化 (1) 行動と車両 — スロットルの導入と制御量の設計</a:t>
             </a:r>
           </a:p>
         </p:txBody>
@@ -7938,7 +8447,7 @@
         <p:spPr>
           <a:xfrm>
             <a:off x="548640" y="1097280"/>
-            <a:ext cx="11064240" cy="5394960"/>
+            <a:ext cx="11064240" cy="5486400"/>
           </a:xfrm>
           <a:prstGeom prst="rect">
             <a:avLst/>
@@ -7953,7 +8462,7 @@
           <a:p>
             <a:pPr>
               <a:spcAft>
-                <a:spcPts val="500"/>
+                <a:spcPts val="600"/>
               </a:spcAft>
             </a:pPr>
             <a:r>
@@ -7963,23 +8472,55 @@
                 </a:solidFill>
                 <a:latin typeface="Meiryo"/>
               </a:rPr>
-              <a:t>ContinuousAction: ステアのみ → スロットル + ステア (±5 m/s², ±π/6)、dynamical=True</a:t>
-            </a:r>
-          </a:p>
-          <a:p>
-            <a:pPr>
-              <a:spcAft>
-                <a:spcPts val="500"/>
-              </a:spcAft>
-            </a:pPr>
-            <a:r>
-              <a:rPr sz="1600" b="0">
-                <a:solidFill>
-                  <a:srgbClr val="222222"/>
-                </a:solidFill>
-                <a:latin typeface="Meiryo"/>
-              </a:rPr>
-              <a:t>速度上限 10 → 16 m/s、前進報酬を追加 — 「速く走る」動機を導入</a:t>
+              <a:t>変更: ステアのみ → 連続 (スロットル, ステア)、dynamical=True (タイヤスリップ)</a:t>
+            </a:r>
+          </a:p>
+          <a:p>
+            <a:pPr lvl="1">
+              <a:spcAft>
+                <a:spcPts val="200"/>
+              </a:spcAft>
+            </a:pPr>
+            <a:r>
+              <a:rPr sz="1400" b="0">
+                <a:solidFill>
+                  <a:srgbClr val="595959"/>
+                </a:solidFill>
+                <a:latin typeface="Meiryo"/>
+              </a:rPr>
+              <a:t>・acceleration_range ±5 m/s²: 方策出力 [−1,1] → 加速度への写像係数</a:t>
+            </a:r>
+          </a:p>
+          <a:p>
+            <a:pPr lvl="1">
+              <a:spcAft>
+                <a:spcPts val="200"/>
+              </a:spcAft>
+            </a:pPr>
+            <a:r>
+              <a:rPr sz="1400" b="0">
+                <a:solidFill>
+                  <a:srgbClr val="595959"/>
+                </a:solidFill>
+                <a:latin typeface="Meiryo"/>
+              </a:rPr>
+              <a:t>・steering_range ±π/6 (30°): 前輪舵角上限 → 最小旋回半径 ≈ 8 m &lt; コーナー最小 10 m</a:t>
+            </a:r>
+          </a:p>
+          <a:p>
+            <a:pPr lvl="1">
+              <a:spcAft>
+                <a:spcPts val="200"/>
+              </a:spcAft>
+            </a:pPr>
+            <a:r>
+              <a:rPr sz="1400" b="0">
+                <a:solidFill>
+                  <a:srgbClr val="595959"/>
+                </a:solidFill>
+                <a:latin typeface="Meiryo"/>
+              </a:rPr>
+              <a:t>・speed_limit 16 m/s + 前進速度報酬 — 「速く走る」動機を導入</a:t>
             </a:r>
           </a:p>
         </p:txBody>
@@ -8000,8 +8541,8 @@
         </p:blipFill>
         <p:spPr>
           <a:xfrm>
-            <a:off x="3017520" y="2286000"/>
-            <a:ext cx="6217920" cy="3316224"/>
+            <a:off x="3108960" y="2651760"/>
+            <a:ext cx="5852160" cy="3121152"/>
           </a:xfrm>
           <a:prstGeom prst="rect">
             <a:avLst/>

--- a/docs/CircuitAgents_intro_ja.pptx
+++ b/docs/CircuitAgents_intro_ja.pptx
@@ -25,6 +25,7 @@
     <p:sldId id="273" r:id="rId25"/>
     <p:sldId id="274" r:id="rId26"/>
     <p:sldId id="275" r:id="rId27"/>
+    <p:sldId id="276" r:id="rId28"/>
   </p:sldIdLst>
   <p:sldSz cx="12191695" cy="6858000" type="screen4x3"/>
   <p:notesSz cx="6858000" cy="9144000"/>
@@ -591,7 +592,7 @@
           <a:lstStyle/>
           <a:p>
             <a:r>
-              <a:t>第二の変更、壁です。ここが一番試行錯誤しました。壁なしではコーナーを路外ショートカットする走りを学習します。反発壁を入れると、今度は壁に擦って曲がる wall-riding が最速解になりました。壁が方向転換を代行するのでステアを学ぶ必要がなくなるんです。最終形は停止壁です。壁に当たると止まり、バックでしか脱出できない。壁接触中は速度報酬ゼロ、接触 7 秒でクラッシュ扱い終了。加えて壁摩擦 0.6 を設定し、接線方向速度を物理フレーム毎に減衰させます。もう 1 つの要点は壁の定義で、コース外周のみが壁です。実装当初、最も近い車線単位で判定してしまい車線境界の白線が壁になるバグを踏みました。現在はコリドー両端の車線の外側だけを壁とする実装です。</a:t>
+              <a:t>第一の変更は行動空間です。連続スロットルとステアの 2 次元にし、動的 Bicycle モデルに切り替えました。ここで各レンジの意味を明確にしておきます。acceleration_range ±5 m/s² は方策の正規化出力 [−1,1] を実際の加速度に線形写像する係数です。steering_range ±π/6 は前輪舵角の上限で、最小旋回半径約 8 m を与え、最小コーナー半径 10 m に余裕を持って対応します。±5 という数字は実験で正当化しています。右のグラフの赤破線が ±2.5 m/s² 実験で、22 周までは学習するものの巡航が 10 m/s に頭打ちし終盤退行しました。原因は制動距離で、16 m/s から 2.5 m/s² では 51 m 必要ですが前方視野は 27 m しかない。「見えてから減速」が物理的に間に合わないのです。出力を絞るならブレーキだけ残す非対称 [−5, +2.5] を推奨します。</a:t>
             </a:r>
           </a:p>
         </p:txBody>
@@ -661,7 +662,7 @@
           <a:lstStyle/>
           <a:p>
             <a:r>
-              <a:t>第三の変更、報酬です。左のグラフは代表状態の 1 ステップ報酬の実測値です。設計目標は、どんな抜け道よりも普通に走る方が儲かる順序を作ること。運転 0.97 が最上位、壁からのバック脱出 0.51 がスタック 0.45 や壁擦り 0.42 より上、というのが要点です。壁脱出は最初、壁接触中しか報酬が出ず、脱出の一歩目でバックペナルティが復活して「壁を這う」局所解を生みました。現在は壁から 1 m の脱出ゾーンでバック免除、クリアランス増加に報酬を与えます。理論的には、クリアランスをポテンシャル関数とする potential-based shaping で、最適方策を原理的に歪めない形です。正規化にも罠があり、合成報酬を [-3,3]→[0,1] に写像しますが、この範囲が真の下限を覆わないと悪い状態が全部 0 に飽和し勾配が消えます。範囲の導出はコードにコメントで残し、重み変更時に再導出するルールです。</a:t>
+              <a:t>第二の変更、壁です。ここが一番試行錯誤しました。壁なしではコーナーを路外ショートカットする走りを学習します。反発壁を入れると、今度は壁に擦って曲がる wall-riding が最速解になりました。壁が方向転換を代行するのでステアを学ぶ必要がなくなるんです。最終形は停止壁です。壁に当たると止まり、バックでしか脱出できない。壁接触中は速度報酬ゼロ、接触 7 秒でクラッシュ扱い終了。加えて壁摩擦 0.6 を設定し、接線方向速度を物理フレーム毎に減衰させます。もう 1 つの要点は壁の定義で、コース外周のみが壁です。実装当初、最も近い車線単位で判定してしまい車線境界の白線が壁になるバグを踏みました。現在はコリドー両端の車線の外側だけを壁とする実装です。</a:t>
             </a:r>
           </a:p>
         </p:txBody>
@@ -731,7 +732,7 @@
           <a:lstStyle/>
           <a:p>
             <a:r>
-              <a:t>第四の変更、観測です。2 チャネルから 10 チャネルに拡張しました。各チャネルの意味を説明します。presence は車がいるセルに 1。on_road はレーン中心線が通るセルに 1 で、塗りつぶした路面マスクではない点が移植時の要注意です。x, y, vx, vy は他車の自車相対の位置と速度で、値はトラック座標系のまま、セルの位置だけが自車向きに回転します。cos_h, sin_h は各車の絶対進行方向。lat_off は最寄りレーン中心からの横ずれ、ang_off はレーン方向との角度差で、この 2 つが車線維持の主信号です。features_range は正規化の分母で、例えば vx の ±20 m/s は「±20 を ±1 に写像する」という意味です。ここに km/h の値を入れると 3.6 倍されて飽和する、という単位事故がデプロイで最も起きやすい罠です。視野は前方 27 m・後方 9 m の非対称で、27 m は制動距離 25.6 m から逆算しています。右の軌跡でヘアピン手前の減速開始位置がちょうど視野に対応しているのが分かります。</a:t>
+              <a:t>第三の変更、報酬です。左のグラフは代表状態の 1 ステップ報酬の実測値です。設計目標は、どんな抜け道よりも普通に走る方が儲かる順序を作ること。運転 0.97 が最上位、壁からのバック脱出 0.51 がスタック 0.45 や壁擦り 0.42 より上、というのが要点です。壁脱出は最初、壁接触中しか報酬が出ず、脱出の一歩目でバックペナルティが復活して「壁を這う」局所解を生みました。現在は壁から 1 m の脱出ゾーンでバック免除、クリアランス増加に報酬を与えます。理論的には、クリアランスをポテンシャル関数とする potential-based shaping で、最適方策を原理的に歪めない形です。正規化にも罠があり、合成報酬を [-3,3]→[0,1] に写像しますが、この範囲が真の下限を覆わないと悪い状態が全部 0 に飽和し勾配が消えます。範囲の導出はコードにコメントで残し、重み変更時に再導出するルールです。</a:t>
             </a:r>
           </a:p>
         </p:txBody>
@@ -801,7 +802,7 @@
           <a:lstStyle/>
           <a:p>
             <a:r>
-              <a:t>第五の変更、トラックです。oval と stadium が基礎、rect が 90 度の反復、chicane が左右切り返しと最小半径 10 m のキンク、fast がメインの難コース。track を random にするとエピソード毎に再抽選され、これはドメインランダマイゼーションの一種です。ただし汎化の本質は観測の帰納バイアス側にあり、fast 単体学習の方策も未見 4 コースをゼロショットで走ります。各トラックは C# プリセットと JSON に複製され、検証ハーネスが幾何一致を自動チェックします。</a:t>
+              <a:t>第四の変更、観測です。2 チャネルから 10 チャネルに拡張しました。各チャネルの意味を説明します。presence は車がいるセルに 1。on_road はレーン中心線が通るセルに 1 で、塗りつぶした路面マスクではない点が移植時の要注意です。x, y, vx, vy は他車の自車相対の位置と速度で、値はトラック座標系のまま、セルの位置だけが自車向きに回転します。cos_h, sin_h は各車の絶対進行方向。lat_off は最寄りレーン中心からの横ずれ、ang_off はレーン方向との角度差で、この 2 つが車線維持の主信号です。features_range は正規化の分母で、例えば vx の ±20 m/s は「±20 を ±1 に写像する」という意味です。ここに km/h の値を入れると 3.6 倍されて飽和する、という単位事故がデプロイで最も起きやすい罠です。視野は前方 27 m・後方 9 m の非対称で、27 m は制動距離 25.6 m から逆算しています。右の軌跡でヘアピン手前の減速開始位置がちょうど視野に対応しているのが分かります。</a:t>
             </a:r>
           </a:p>
         </p:txBody>
@@ -871,7 +872,7 @@
           <a:lstStyle/>
           <a:p>
             <a:r>
-              <a:t>学習の全体像です。フェーズ 1 で他車なしのレーン追従、フェーズ 2 で NPC を入れて学習率を下げ追い越しを学習します。特徴抽出はカスタム CNN で、初期方策のスロットルバイアスを +0.4 に手動シフトします。ガウス方策の平均が 0 のままだと前進と後退が等確率で、前進報酬を発見する前に壁ペナルティばかり集めるためです。動作確認用の fast-dev はかつてエントロピー係数 0.10 で、何度回しても曲がれませんでした。エントロピーボーナスが「ランダムでいること」に支払われ、[0,1] に圧縮された報酬差に勝ってしまうためです。現在は本番ハイパラのまま 12 万ステップに短縮し、周回到達をエンドツーエンドで実測保証しています。</a:t>
+              <a:t>第五の変更、トラックです。oval と stadium が基礎、rect が 90 度の反復、chicane が左右切り返しと最小半径 10 m のキンク、fast がメインの難コース。track を random にするとエピソード毎に再抽選され、これはドメインランダマイゼーションの一種です。ただし汎化の本質は観測の帰納バイアス側にあり、fast 単体学習の方策も未見 4 コースをゼロショットで走ります。各トラックは C# プリセットと JSON に複製され、検証ハーネスが幾何一致を自動チェックします。</a:t>
             </a:r>
           </a:p>
         </p:txBody>
@@ -941,7 +942,7 @@
           <a:lstStyle/>
           <a:p>
             <a:r>
-              <a:t>PPO の設定判断です。オンポリシーを選んだのは、環境を頻繁に改造するためリプレイ経験がすぐ無効になること、シミュレータが軽く壁時計効率が支配的なことによります。クリップ範囲 0.15 は標準の 0.2 より狭く、壁ペナルティ由来の高分散アドバンテージでの方策崩壊を抑えます。GAE λ 0.98 は密報酬前提で分散側に寄せ、コーナー 1 つ分の信用割当を確保します。エントロピー係数は報酬スケールと結合する、が本プロジェクト最大の教訓の 1 つです。なお PPO はアドバンテージ正規化により報酬のアフィン変換に不変なので、[0,1] 正規化自体は学習のためではなく診断のための設計です。</a:t>
+              <a:t>学習の全体像です。フェーズ 1 で他車なしのレーン追従、フェーズ 2 で NPC を入れて学習率を下げ追い越しを学習します。特徴抽出はカスタム CNN で、初期方策のスロットルバイアスを +0.4 に手動シフトします。ガウス方策の平均が 0 のままだと前進と後退が等確率で、前進報酬を発見する前に壁ペナルティばかり集めるためです。動作確認用の fast-dev はかつてエントロピー係数 0.10 で、何度回しても曲がれませんでした。エントロピーボーナスが「ランダムでいること」に支払われ、[0,1] に圧縮された報酬差に勝ってしまうためです。現在は本番ハイパラのまま 12 万ステップに短縮し、周回到達をエンドツーエンドで実測保証しています。</a:t>
             </a:r>
           </a:p>
         </p:txBody>
@@ -1011,7 +1012,7 @@
           <a:lstStyle/>
           <a:p>
             <a:r>
-              <a:t>ここは正直に、シミュレータが実ゲームから何を省いているかの一覧です。車両動力学では、タイヤが線形モデルでグリップ飽和がありません。実車はスリップ角が深くなると横力が頭打ちになりますが、シムでは増え続けます。質量は 1 kg の正規化値で、荷重移動もサスもない。加速度は直接指令で、エンジン特性・ギア・空気抵抗・転がり抵抗がありません。つまりシムの車は惰性で減速しない。壁は速度を消す理想化された壁で、実ゲームの衝突インパルスや車体の回転、ダメージはモデル化していません。壁摩擦 0.6 も実測合わせが必要な仮の値です。ステアは瞬時に舵角が立つ理想アクチュエータ。タイミング面では、5 Hz の等間隔意思決定を仮定しており、フレーム時間の揺らぎや推論レイテンシ 1 フレーム分は学習に含まれていません。地形も 2D 平面で、縁石・バンク・高低差・路面 μ の変化はありません。</a:t>
+              <a:t>PPO の設定判断です。オンポリシーを選んだのは、環境を頻繁に改造するためリプレイ経験がすぐ無効になること、シミュレータが軽く壁時計効率が支配的なことによります。クリップ範囲 0.15 は標準の 0.2 より狭く、壁ペナルティ由来の高分散アドバンテージでの方策崩壊を抑えます。GAE λ 0.98 は密報酬前提で分散側に寄せ、コーナー 1 つ分の信用割当を確保します。エントロピー係数は報酬スケールと結合する、が本プロジェクト最大の教訓の 1 つです。なお PPO はアドバンテージ正規化により報酬のアフィン変換に不変なので、[0,1] 正規化自体は学習のためではなく診断のための設計です。</a:t>
             </a:r>
           </a:p>
         </p:txBody>
@@ -1081,7 +1082,7 @@
           <a:lstStyle/>
           <a:p>
             <a:r>
-              <a:t>ギャップへの対処は二層です。第一層、消せるギャップは移植の数値一致で消す。観測ビルダーはビット一致、車両物理は 1e-7 一致で C# に移植済みなので、『移植したら挙動が変わった』という自由度は存在しません。第二層、実ゲーム固有の動力学差は方策を再学習せず、デプロイ側のアクションフィルタで吸収します。EMA 平滑化は観測の 3 m 量子化由来のステア蛇行を消し、実測で符号反転が 1/3 になります。CorneringLimiter はステア速度制限と、曲率から計算した限界速度超過に比例する弱いブレーキで、グリップ飽和がないシム方策の過信を抑えます。StuckRecovery は移動距離ベースで壁刺さりを検出しバックを指示します。フィルタは閉ループ特性を変えるため、シミュレータ内で同じフィルタを通した評価で周回数が落ちないことを確認しています。それでも残る差が大きければ、壁摩擦・加速度レンジなどを実ゲーム実測に合わせて環境側を再調整し、再学習する道があります。</a:t>
+              <a:t>ここは正直に、シミュレータが実ゲームから何を省いているかの一覧です。車両動力学では、タイヤが線形モデルでグリップ飽和がありません。実車はスリップ角が深くなると横力が頭打ちになりますが、シムでは増え続けます。質量は 1 kg の正規化値で、荷重移動もサスもない。加速度は直接指令で、エンジン特性・ギア・空気抵抗・転がり抵抗がありません。つまりシムの車は惰性で減速しない。壁は速度を消す理想化された壁で、実ゲームの衝突インパルスや車体の回転、ダメージはモデル化していません。壁摩擦 0.6 も実測合わせが必要な仮の値です。ステアは瞬時に舵角が立つ理想アクチュエータ。タイミング面では、5 Hz の等間隔意思決定を仮定しており、フレーム時間の揺らぎや推論レイテンシ 1 フレーム分は学習に含まれていません。地形も 2D 平面で、縁石・バンク・高低差・路面 μ の変化はありません。</a:t>
             </a:r>
           </a:p>
         </p:txBody>
@@ -1151,7 +1152,7 @@
           <a:lstStyle/>
           <a:p>
             <a:r>
-              <a:t>使い方です。環境構築は 1 行。リポジトリ直下の requirements.txt は旧スタック用なので使いません。ノートブックは task2 が fast 専用、task3 が汎化学習。FAST_DEV_RUN で短縮と本番を切り替えます。学習の判断材料として、eval 報酬を周回数に換算するヤードスティックセルがあり、TensorBoard の数字だけで局所解か周回かを判別できます。スライドの図と動画を生成・保存するセルもノートブック内にあります。</a:t>
+              <a:t>ギャップへの対処は二層です。第一層、消せるギャップは移植の数値一致で消す。観測ビルダーはビット一致、車両物理は 1e-7 一致で C# に移植済みなので、『移植したら挙動が変わった』という自由度は存在しません。第二層、実ゲーム固有の動力学差は方策を再学習せず、デプロイ側のアクションフィルタで吸収します。EMA 平滑化は観測の 3 m 量子化由来のステア蛇行を消し、実測で符号反転が 1/3 になります。CorneringLimiter はステア速度制限と、曲率から計算した限界速度超過に比例する弱いブレーキで、グリップ飽和がないシム方策の過信を抑えます。StuckRecovery は移動距離ベースで壁刺さりを検出しバックを指示します。フィルタは閉ループ特性を変えるため、シミュレータ内で同じフィルタを通した評価で周回数が落ちないことを確認しています。それでも残る差が大きければ、壁摩擦・加速度レンジなどを実ゲーム実測に合わせて環境側を再調整し、再学習する道があります。</a:t>
             </a:r>
           </a:p>
         </p:txBody>
@@ -1221,7 +1222,7 @@
           <a:lstStyle/>
           <a:p>
             <a:r>
-              <a:t>エクスポートは export_onnx.py で、モード 3 のエンジン用 NHWC 版が推奨です。C# ビルダーは H×W×C の平坦配列を出すため、channels-first 版に入れるとチャネルが混ざり、スロットル 0.4・ステア 0.2 程度のほぼ一定出力に退化します。この症状は実際にデバッグで踏んだので、症状として覚えてください。トラックや観測を変えたらexport_track_json.py で C# 側の正解データを再生成し検証ハーネスを回します。レンジ等の定数は C# に意図的に複製されているので、変更時は 4 点セットを忘れずに。</a:t>
+              <a:t>使い方です。環境構築は 1 行。リポジトリ直下の requirements.txt は旧スタック用なので使いません。ノートブックは task2 が fast 専用、task3 が汎化学習。FAST_DEV_RUN で短縮と本番を切り替えます。学習の判断材料として、eval 報酬を周回数に換算するヤードスティックセルがあり、TensorBoard の数字だけで局所解か周回かを判別できます。スライドの図と動画を生成・保存するセルもノートブック内にあります。</a:t>
             </a:r>
           </a:p>
         </p:txBody>
@@ -1361,6 +1362,76 @@
           <a:lstStyle/>
           <a:p>
             <a:r>
+              <a:t>エクスポートは export_onnx.py で、モード 3 のエンジン用 NHWC 版が推奨です。C# ビルダーは H×W×C の平坦配列を出すため、channels-first 版に入れるとチャネルが混ざり、スロットル 0.4・ステア 0.2 程度のほぼ一定出力に退化します。この症状は実際にデバッグで踏んだので、症状として覚えてください。トラックや観測を変えたらexport_track_json.py で C# 側の正解データを再生成し検証ハーネスを回します。レンジ等の定数は C# に意図的に複製されているので、変更時は 4 点セットを忘れずに。</a:t>
+            </a:r>
+          </a:p>
+        </p:txBody>
+      </p:sp>
+      <p:sp>
+        <p:nvSpPr>
+          <p:cNvPr id="4" name="Slide Number Placeholder 3"/>
+          <p:cNvSpPr>
+            <a:spLocks noGrp="1"/>
+          </p:cNvSpPr>
+          <p:nvPr>
+            <p:ph type="sldNum" idx="5" sz="quarter"/>
+          </p:nvPr>
+        </p:nvSpPr>
+        <p:spPr/>
+      </p:sp>
+    </p:spTree>
+  </p:cSld>
+  <p:clrMapOvr>
+    <a:masterClrMapping/>
+  </p:clrMapOvr>
+</p:notes>
+</file>
+
+<file path=ppt/notesSlides/notesSlide21.xml><?xml version="1.0" encoding="utf-8"?>
+<p:notes xmlns:a="http://schemas.openxmlformats.org/drawingml/2006/main" xmlns:p="http://schemas.openxmlformats.org/presentationml/2006/main" xmlns:r="http://schemas.openxmlformats.org/officeDocument/2006/relationships">
+  <p:cSld>
+    <p:spTree>
+      <p:nvGrpSpPr>
+        <p:cNvPr id="1" name=""/>
+        <p:cNvGrpSpPr/>
+        <p:nvPr/>
+      </p:nvGrpSpPr>
+      <p:grpSpPr>
+        <a:xfrm>
+          <a:off x="0" y="0"/>
+          <a:ext cx="0" cy="0"/>
+          <a:chOff x="0" y="0"/>
+          <a:chExt cx="0" cy="0"/>
+        </a:xfrm>
+      </p:grpSpPr>
+      <p:sp>
+        <p:nvSpPr>
+          <p:cNvPr id="2" name="Slide Image Placeholder 1"/>
+          <p:cNvSpPr>
+            <a:spLocks noGrp="1"/>
+          </p:cNvSpPr>
+          <p:nvPr>
+            <p:ph type="sldImg" idx="2"/>
+          </p:nvPr>
+        </p:nvSpPr>
+        <p:spPr/>
+      </p:sp>
+      <p:sp>
+        <p:nvSpPr>
+          <p:cNvPr id="3" name="Notes Placeholder 2"/>
+          <p:cNvSpPr>
+            <a:spLocks noGrp="1"/>
+          </p:cNvSpPr>
+          <p:nvPr>
+            <p:ph type="body" idx="3" sz="quarter"/>
+          </p:nvPr>
+        </p:nvSpPr>
+        <p:spPr/>
+        <p:txBody>
+          <a:bodyPr/>
+          <a:lstStyle/>
+          <a:p>
+            <a:r>
               <a:t>まとめです。デフォルトのステア専用レーン追従環境に、行動・壁・報酬・観測・トラックの5 段階の進化を施し、抜け道を経済的に割に合わなくした結果、6 万ステップで周回を学習する環境になりました。汎化は自己位置を見せない観測設計の帰結です。実ゲームとのギャップは一覧化した上で、消せるものは数値一致移植で消し、残差はデプロイ側フィルタで吸収する二層戦略を取っています。次のステップは RE Engine 内での実走検証と、実測に基づく壁摩擦・動力学パラメータの適合です。ご清聴ありがとうございました。</a:t>
             </a:r>
           </a:p>
@@ -1851,7 +1922,7 @@
           <a:lstStyle/>
           <a:p>
             <a:r>
-              <a:t>第一の変更は行動空間です。連続スロットルとステアの 2 次元にし、動的 Bicycle モデルに切り替えました。ここで各レンジの意味を明確にしておきます。acceleration_range ±5 m/s² は方策の正規化出力 [−1,1] を実際の加速度に線形写像する係数です。steering_range ±π/6 は前輪舵角の上限で、最小旋回半径約 8 m を与え、最小コーナー半径 10 m に余裕を持って対応します。±5 という数字は実験で正当化しています。右のグラフの赤破線が ±2.5 m/s² 実験で、22 周までは学習するものの巡航が 10 m/s に頭打ちし終盤退行しました。原因は制動距離で、16 m/s から 2.5 m/s² では 51 m 必要ですが前方視野は 27 m しかない。「見えてから減速」が物理的に間に合わないのです。出力を絞るならブレーキだけ残す非対称 [−5, +2.5] を推奨します。</a:t>
+              <a:t>個別の説明に入る前に、変更点を一枚の表で俯瞰します。左が highway-env のデフォルト、真ん中が我々の設定、右がその狙いです。行動はステアのみから連続スロットル＋ステアへ、車両は運動学から動的モデルへ。速度目標は 10 から 16 m/s に上げ前進報酬を足して『速く走る』動機を作りました。壁は存在しないデフォルトに対し、外周のみ物理的な停止壁と摩擦を導入。報酬は中央維持だけの薄い信号から、速度・前進・周回を含む密な設計に。観測は 2 チャネルから 10 チャネルへ拡張し視野も前方に伸ばしました。トラックは単一から 5 種＋ランダムへ。以降のスライドはこの表の各行を一つずつ掘り下げ、変更の理由と実測で確認した副作用を説明します。</a:t>
             </a:r>
           </a:p>
         </p:txBody>
@@ -4960,7 +5031,7 @@
                 </a:solidFill>
                 <a:latin typeface="Meiryo"/>
               </a:rPr>
-              <a:t>進化 (2) 壁の物理 — なし → 反発 → 停止</a:t>
+              <a:t>進化 (1) 行動と車両 — スロットルの導入と制御量の設計</a:t>
             </a:r>
           </a:p>
         </p:txBody>
@@ -4993,13 +5064,13 @@
               </a:spcAft>
             </a:pPr>
             <a:r>
-              <a:rPr sz="1500" b="1">
+              <a:rPr sz="1600" b="1">
                 <a:solidFill>
                   <a:srgbClr val="222222"/>
                 </a:solidFill>
                 <a:latin typeface="Meiryo"/>
               </a:rPr>
-              <a:t>変遷と各段階の失敗</a:t>
+              <a:t>変更: ステアのみ → 連続 (スロットル, ステア)、dynamical=True (タイヤスリップ)</a:t>
             </a:r>
           </a:p>
           <a:p>
@@ -5009,13 +5080,13 @@
               </a:spcAft>
             </a:pPr>
             <a:r>
-              <a:rPr sz="1300" b="0">
+              <a:rPr sz="1400" b="0">
                 <a:solidFill>
                   <a:srgbClr val="595959"/>
                 </a:solidFill>
                 <a:latin typeface="Meiryo"/>
               </a:rPr>
-              <a:t>・v0 壁なし (デフォルト): 路外ショートカットを学習</a:t>
+              <a:t>・acceleration_range ±5 m/s²: 方策出力 [−1,1] → 加速度への写像係数</a:t>
             </a:r>
           </a:p>
           <a:p>
@@ -5025,13 +5096,13 @@
               </a:spcAft>
             </a:pPr>
             <a:r>
-              <a:rPr sz="1300" b="0">
-                <a:solidFill>
-                  <a:srgbClr val="B32D2D"/>
-                </a:solidFill>
-                <a:latin typeface="Meiryo"/>
-              </a:rPr>
-              <a:t>・v1 反発壁 (bounce): wall-riding — 壁が方向転換を代行し最速解に</a:t>
+              <a:rPr sz="1400" b="0">
+                <a:solidFill>
+                  <a:srgbClr val="595959"/>
+                </a:solidFill>
+                <a:latin typeface="Meiryo"/>
+              </a:rPr>
+              <a:t>・steering_range ±π/6 (30°): 前輪舵角上限 → 最小旋回半径 ≈ 8 m &lt; コーナー最小 10 m</a:t>
             </a:r>
           </a:p>
           <a:p>
@@ -5041,129 +5112,41 @@
               </a:spcAft>
             </a:pPr>
             <a:r>
-              <a:rPr sz="1300" b="1">
+              <a:rPr sz="1400" b="0">
                 <a:solidFill>
                   <a:srgbClr val="595959"/>
                 </a:solidFill>
                 <a:latin typeface="Meiryo"/>
               </a:rPr>
-              <a:t>・v2 停止壁 (stop): 接触で停止、バックのみで脱出可 — ゲーム物理と一致</a:t>
-            </a:r>
-          </a:p>
-          <a:p>
-            <a:pPr>
-              <a:spcAft>
-                <a:spcPts val="600"/>
-              </a:spcAft>
-            </a:pPr>
-            <a:r>
-              <a:rPr sz="1500" b="1">
-                <a:solidFill>
-                  <a:srgbClr val="222222"/>
-                </a:solidFill>
-                <a:latin typeface="Meiryo"/>
-              </a:rPr>
-              <a:t>抜け道の遮断</a:t>
-            </a:r>
-          </a:p>
-          <a:p>
-            <a:pPr lvl="1">
-              <a:spcAft>
-                <a:spcPts val="200"/>
-              </a:spcAft>
-            </a:pPr>
-            <a:r>
-              <a:rPr sz="1300" b="0">
-                <a:solidFill>
-                  <a:srgbClr val="595959"/>
-                </a:solidFill>
-                <a:latin typeface="Meiryo"/>
-              </a:rPr>
-              <a:t>・壁接触中は速度・前進報酬をゼロ化 (wall-riding の収益を絶つ)</a:t>
-            </a:r>
-          </a:p>
-          <a:p>
-            <a:pPr lvl="1">
-              <a:spcAft>
-                <a:spcPts val="200"/>
-              </a:spcAft>
-            </a:pPr>
-            <a:r>
-              <a:rPr sz="1300" b="0">
-                <a:solidFill>
-                  <a:srgbClr val="595959"/>
-                </a:solidFill>
-                <a:latin typeface="Meiryo"/>
-              </a:rPr>
-              <a:t>・接触 35 ステップ (7 秒) 継続でクラッシュ扱い終了 (壁沿い周回の禁止)</a:t>
-            </a:r>
-          </a:p>
-          <a:p>
-            <a:pPr lvl="1">
-              <a:spcAft>
-                <a:spcPts val="200"/>
-              </a:spcAft>
-            </a:pPr>
-            <a:r>
-              <a:rPr sz="1300" b="0">
-                <a:solidFill>
-                  <a:srgbClr val="595959"/>
-                </a:solidFill>
-                <a:latin typeface="Meiryo"/>
-              </a:rPr>
-              <a:t>・壁摩擦 0.6: 接線速度を物理フレーム毎に減衰 — 擦っても速度が残らない</a:t>
-            </a:r>
-          </a:p>
-          <a:p>
-            <a:pPr>
-              <a:spcAft>
-                <a:spcPts val="600"/>
-              </a:spcAft>
-            </a:pPr>
-            <a:r>
-              <a:rPr sz="1500" b="1">
-                <a:solidFill>
-                  <a:srgbClr val="222222"/>
-                </a:solidFill>
-                <a:latin typeface="Meiryo"/>
-              </a:rPr>
-              <a:t>壁の定義</a:t>
-            </a:r>
-          </a:p>
-          <a:p>
-            <a:pPr lvl="1">
-              <a:spcAft>
-                <a:spcPts val="200"/>
-              </a:spcAft>
-            </a:pPr>
-            <a:r>
-              <a:rPr sz="1300" b="1">
-                <a:solidFill>
-                  <a:srgbClr val="595959"/>
-                </a:solidFill>
-                <a:latin typeface="Meiryo"/>
-              </a:rPr>
-              <a:t>・コース外周のみが壁。車線境界の白線は壁ではない (2 車線を使うライン取りを許す)</a:t>
-            </a:r>
-          </a:p>
-          <a:p>
-            <a:pPr lvl="2">
-              <a:spcAft>
-                <a:spcPts val="200"/>
-              </a:spcAft>
-            </a:pPr>
-            <a:r>
-              <a:rPr sz="1100" b="0">
-                <a:solidFill>
-                  <a:srgbClr val="595959"/>
-                </a:solidFill>
-                <a:latin typeface="Meiryo"/>
-              </a:rPr>
-              <a:t>− 初期実装は車線単位判定で白線が壁化するバグ → コリドー両端判定に修正</a:t>
-            </a:r>
-          </a:p>
-        </p:txBody>
-      </p:sp>
+              <a:t>・speed_limit 16 m/s + 前進速度報酬 — 「速く走る」動機を導入</a:t>
+            </a:r>
+          </a:p>
+        </p:txBody>
+      </p:sp>
+      <p:pic>
+        <p:nvPicPr>
+          <p:cNvPr id="4" name="Picture 3" descr="range_experiment.png"/>
+          <p:cNvPicPr>
+            <a:picLocks noChangeAspect="1"/>
+          </p:cNvPicPr>
+          <p:nvPr/>
+        </p:nvPicPr>
+        <p:blipFill>
+          <a:blip r:embed="rId3"/>
+          <a:stretch>
+            <a:fillRect/>
+          </a:stretch>
+        </p:blipFill>
+        <p:spPr>
+          <a:xfrm>
+            <a:off x="3108960" y="2651760"/>
+            <a:ext cx="5852160" cy="3121152"/>
+          </a:xfrm>
+          <a:prstGeom prst="rect">
+            <a:avLst/>
+          </a:prstGeom>
+        </p:spPr>
+      </p:pic>
     </p:spTree>
   </p:cSld>
   <p:clrMapOvr>
@@ -5173,6 +5156,257 @@
 </file>
 
 <file path=ppt/slides/slide11.xml><?xml version="1.0" encoding="utf-8"?>
+<p:sld xmlns:a="http://schemas.openxmlformats.org/drawingml/2006/main" xmlns:p="http://schemas.openxmlformats.org/presentationml/2006/main" xmlns:r="http://schemas.openxmlformats.org/officeDocument/2006/relationships">
+  <p:cSld>
+    <p:spTree>
+      <p:nvGrpSpPr>
+        <p:cNvPr id="1" name=""/>
+        <p:cNvGrpSpPr/>
+        <p:nvPr/>
+      </p:nvGrpSpPr>
+      <p:grpSpPr/>
+      <p:sp>
+        <p:nvSpPr>
+          <p:cNvPr id="2" name="TextBox 1"/>
+          <p:cNvSpPr txBox="1"/>
+          <p:nvPr/>
+        </p:nvSpPr>
+        <p:spPr>
+          <a:xfrm>
+            <a:off x="457200" y="182880"/>
+            <a:ext cx="11247120" cy="731520"/>
+          </a:xfrm>
+          <a:prstGeom prst="rect">
+            <a:avLst/>
+          </a:prstGeom>
+          <a:noFill/>
+        </p:spPr>
+        <p:txBody>
+          <a:bodyPr wrap="none">
+            <a:spAutoFit/>
+          </a:bodyPr>
+          <a:lstStyle/>
+          <a:p>
+            <a:r>
+              <a:rPr sz="2700" b="1">
+                <a:solidFill>
+                  <a:srgbClr val="1B5EA8"/>
+                </a:solidFill>
+                <a:latin typeface="Meiryo"/>
+              </a:rPr>
+              <a:t>進化 (2) 壁の物理 — なし → 反発 → 停止</a:t>
+            </a:r>
+          </a:p>
+        </p:txBody>
+      </p:sp>
+      <p:sp>
+        <p:nvSpPr>
+          <p:cNvPr id="3" name="TextBox 2"/>
+          <p:cNvSpPr txBox="1"/>
+          <p:nvPr/>
+        </p:nvSpPr>
+        <p:spPr>
+          <a:xfrm>
+            <a:off x="548640" y="1097280"/>
+            <a:ext cx="11064240" cy="5486400"/>
+          </a:xfrm>
+          <a:prstGeom prst="rect">
+            <a:avLst/>
+          </a:prstGeom>
+          <a:noFill/>
+        </p:spPr>
+        <p:txBody>
+          <a:bodyPr wrap="square">
+            <a:spAutoFit/>
+          </a:bodyPr>
+          <a:lstStyle/>
+          <a:p>
+            <a:pPr>
+              <a:spcAft>
+                <a:spcPts val="600"/>
+              </a:spcAft>
+            </a:pPr>
+            <a:r>
+              <a:rPr sz="1500" b="1">
+                <a:solidFill>
+                  <a:srgbClr val="222222"/>
+                </a:solidFill>
+                <a:latin typeface="Meiryo"/>
+              </a:rPr>
+              <a:t>変遷と各段階の失敗</a:t>
+            </a:r>
+          </a:p>
+          <a:p>
+            <a:pPr lvl="1">
+              <a:spcAft>
+                <a:spcPts val="200"/>
+              </a:spcAft>
+            </a:pPr>
+            <a:r>
+              <a:rPr sz="1300" b="0">
+                <a:solidFill>
+                  <a:srgbClr val="595959"/>
+                </a:solidFill>
+                <a:latin typeface="Meiryo"/>
+              </a:rPr>
+              <a:t>・v0 壁なし (デフォルト): 路外ショートカットを学習</a:t>
+            </a:r>
+          </a:p>
+          <a:p>
+            <a:pPr lvl="1">
+              <a:spcAft>
+                <a:spcPts val="200"/>
+              </a:spcAft>
+            </a:pPr>
+            <a:r>
+              <a:rPr sz="1300" b="0">
+                <a:solidFill>
+                  <a:srgbClr val="B32D2D"/>
+                </a:solidFill>
+                <a:latin typeface="Meiryo"/>
+              </a:rPr>
+              <a:t>・v1 反発壁 (bounce): wall-riding — 壁が方向転換を代行し最速解に</a:t>
+            </a:r>
+          </a:p>
+          <a:p>
+            <a:pPr lvl="1">
+              <a:spcAft>
+                <a:spcPts val="200"/>
+              </a:spcAft>
+            </a:pPr>
+            <a:r>
+              <a:rPr sz="1300" b="1">
+                <a:solidFill>
+                  <a:srgbClr val="595959"/>
+                </a:solidFill>
+                <a:latin typeface="Meiryo"/>
+              </a:rPr>
+              <a:t>・v2 停止壁 (stop): 接触で停止、バックのみで脱出可 — ゲーム物理と一致</a:t>
+            </a:r>
+          </a:p>
+          <a:p>
+            <a:pPr>
+              <a:spcAft>
+                <a:spcPts val="600"/>
+              </a:spcAft>
+            </a:pPr>
+            <a:r>
+              <a:rPr sz="1500" b="1">
+                <a:solidFill>
+                  <a:srgbClr val="222222"/>
+                </a:solidFill>
+                <a:latin typeface="Meiryo"/>
+              </a:rPr>
+              <a:t>抜け道の遮断</a:t>
+            </a:r>
+          </a:p>
+          <a:p>
+            <a:pPr lvl="1">
+              <a:spcAft>
+                <a:spcPts val="200"/>
+              </a:spcAft>
+            </a:pPr>
+            <a:r>
+              <a:rPr sz="1300" b="0">
+                <a:solidFill>
+                  <a:srgbClr val="595959"/>
+                </a:solidFill>
+                <a:latin typeface="Meiryo"/>
+              </a:rPr>
+              <a:t>・壁接触中は速度・前進報酬をゼロ化 (wall-riding の収益を絶つ)</a:t>
+            </a:r>
+          </a:p>
+          <a:p>
+            <a:pPr lvl="1">
+              <a:spcAft>
+                <a:spcPts val="200"/>
+              </a:spcAft>
+            </a:pPr>
+            <a:r>
+              <a:rPr sz="1300" b="0">
+                <a:solidFill>
+                  <a:srgbClr val="595959"/>
+                </a:solidFill>
+                <a:latin typeface="Meiryo"/>
+              </a:rPr>
+              <a:t>・接触 35 ステップ (7 秒) 継続でクラッシュ扱い終了 (壁沿い周回の禁止)</a:t>
+            </a:r>
+          </a:p>
+          <a:p>
+            <a:pPr lvl="1">
+              <a:spcAft>
+                <a:spcPts val="200"/>
+              </a:spcAft>
+            </a:pPr>
+            <a:r>
+              <a:rPr sz="1300" b="0">
+                <a:solidFill>
+                  <a:srgbClr val="595959"/>
+                </a:solidFill>
+                <a:latin typeface="Meiryo"/>
+              </a:rPr>
+              <a:t>・壁摩擦 0.6: 接線速度を物理フレーム毎に減衰 — 擦っても速度が残らない</a:t>
+            </a:r>
+          </a:p>
+          <a:p>
+            <a:pPr>
+              <a:spcAft>
+                <a:spcPts val="600"/>
+              </a:spcAft>
+            </a:pPr>
+            <a:r>
+              <a:rPr sz="1500" b="1">
+                <a:solidFill>
+                  <a:srgbClr val="222222"/>
+                </a:solidFill>
+                <a:latin typeface="Meiryo"/>
+              </a:rPr>
+              <a:t>壁の定義</a:t>
+            </a:r>
+          </a:p>
+          <a:p>
+            <a:pPr lvl="1">
+              <a:spcAft>
+                <a:spcPts val="200"/>
+              </a:spcAft>
+            </a:pPr>
+            <a:r>
+              <a:rPr sz="1300" b="1">
+                <a:solidFill>
+                  <a:srgbClr val="595959"/>
+                </a:solidFill>
+                <a:latin typeface="Meiryo"/>
+              </a:rPr>
+              <a:t>・コース外周のみが壁。車線境界の白線は壁ではない (2 車線を使うライン取りを許す)</a:t>
+            </a:r>
+          </a:p>
+          <a:p>
+            <a:pPr lvl="2">
+              <a:spcAft>
+                <a:spcPts val="200"/>
+              </a:spcAft>
+            </a:pPr>
+            <a:r>
+              <a:rPr sz="1100" b="0">
+                <a:solidFill>
+                  <a:srgbClr val="595959"/>
+                </a:solidFill>
+                <a:latin typeface="Meiryo"/>
+              </a:rPr>
+              <a:t>− 初期実装は車線単位判定で白線が壁化するバグ → コリドー両端判定に修正</a:t>
+            </a:r>
+          </a:p>
+        </p:txBody>
+      </p:sp>
+    </p:spTree>
+  </p:cSld>
+  <p:clrMapOvr>
+    <a:masterClrMapping/>
+  </p:clrMapOvr>
+</p:sld>
+</file>
+
+<file path=ppt/slides/slide12.xml><?xml version="1.0" encoding="utf-8"?>
 <p:sld xmlns:a="http://schemas.openxmlformats.org/drawingml/2006/main" xmlns:p="http://schemas.openxmlformats.org/presentationml/2006/main" xmlns:r="http://schemas.openxmlformats.org/officeDocument/2006/relationships">
   <p:cSld>
     <p:spTree>
@@ -5431,7 +5665,7 @@
 </p:sld>
 </file>
 
-<file path=ppt/slides/slide12.xml><?xml version="1.0" encoding="utf-8"?>
+<file path=ppt/slides/slide13.xml><?xml version="1.0" encoding="utf-8"?>
 <p:sld xmlns:a="http://schemas.openxmlformats.org/drawingml/2006/main" xmlns:p="http://schemas.openxmlformats.org/presentationml/2006/main" xmlns:r="http://schemas.openxmlformats.org/officeDocument/2006/relationships">
   <p:cSld>
     <p:spTree>
@@ -5658,7 +5892,7 @@
 </p:sld>
 </file>
 
-<file path=ppt/slides/slide13.xml><?xml version="1.0" encoding="utf-8"?>
+<file path=ppt/slides/slide14.xml><?xml version="1.0" encoding="utf-8"?>
 <p:sld xmlns:a="http://schemas.openxmlformats.org/drawingml/2006/main" xmlns:p="http://schemas.openxmlformats.org/presentationml/2006/main" xmlns:r="http://schemas.openxmlformats.org/officeDocument/2006/relationships">
   <p:cSld>
     <p:spTree>
@@ -5773,7 +6007,7 @@
 </p:sld>
 </file>
 
-<file path=ppt/slides/slide14.xml><?xml version="1.0" encoding="utf-8"?>
+<file path=ppt/slides/slide15.xml><?xml version="1.0" encoding="utf-8"?>
 <p:sld xmlns:a="http://schemas.openxmlformats.org/drawingml/2006/main" xmlns:p="http://schemas.openxmlformats.org/presentationml/2006/main" xmlns:r="http://schemas.openxmlformats.org/officeDocument/2006/relationships">
   <p:cSld>
     <p:spTree>
@@ -5996,209 +6230,6 @@
                 <a:latin typeface="Meiryo"/>
               </a:rPr>
               <a:t>・EvalCallback の決定論的評価ベスト採用 (PPO は終盤退行あり / stochastic 評価は過小評価)</a:t>
-            </a:r>
-          </a:p>
-        </p:txBody>
-      </p:sp>
-    </p:spTree>
-  </p:cSld>
-  <p:clrMapOvr>
-    <a:masterClrMapping/>
-  </p:clrMapOvr>
-</p:sld>
-</file>
-
-<file path=ppt/slides/slide15.xml><?xml version="1.0" encoding="utf-8"?>
-<p:sld xmlns:a="http://schemas.openxmlformats.org/drawingml/2006/main" xmlns:p="http://schemas.openxmlformats.org/presentationml/2006/main" xmlns:r="http://schemas.openxmlformats.org/officeDocument/2006/relationships">
-  <p:cSld>
-    <p:spTree>
-      <p:nvGrpSpPr>
-        <p:cNvPr id="1" name=""/>
-        <p:cNvGrpSpPr/>
-        <p:nvPr/>
-      </p:nvGrpSpPr>
-      <p:grpSpPr/>
-      <p:sp>
-        <p:nvSpPr>
-          <p:cNvPr id="2" name="TextBox 1"/>
-          <p:cNvSpPr txBox="1"/>
-          <p:nvPr/>
-        </p:nvSpPr>
-        <p:spPr>
-          <a:xfrm>
-            <a:off x="457200" y="182880"/>
-            <a:ext cx="11247120" cy="731520"/>
-          </a:xfrm>
-          <a:prstGeom prst="rect">
-            <a:avLst/>
-          </a:prstGeom>
-          <a:noFill/>
-        </p:spPr>
-        <p:txBody>
-          <a:bodyPr wrap="none">
-            <a:spAutoFit/>
-          </a:bodyPr>
-          <a:lstStyle/>
-          <a:p>
-            <a:r>
-              <a:rPr sz="2700" b="1">
-                <a:solidFill>
-                  <a:srgbClr val="1B5EA8"/>
-                </a:solidFill>
-                <a:latin typeface="Meiryo"/>
-              </a:rPr>
-              <a:t>PPO ハイパーパラメータの設計判断 (専門家向け)</a:t>
-            </a:r>
-          </a:p>
-        </p:txBody>
-      </p:sp>
-      <p:sp>
-        <p:nvSpPr>
-          <p:cNvPr id="3" name="TextBox 2"/>
-          <p:cNvSpPr txBox="1"/>
-          <p:nvPr/>
-        </p:nvSpPr>
-        <p:spPr>
-          <a:xfrm>
-            <a:off x="548640" y="1188720"/>
-            <a:ext cx="11064240" cy="5486400"/>
-          </a:xfrm>
-          <a:prstGeom prst="rect">
-            <a:avLst/>
-          </a:prstGeom>
-          <a:noFill/>
-        </p:spPr>
-        <p:txBody>
-          <a:bodyPr wrap="square">
-            <a:spAutoFit/>
-          </a:bodyPr>
-          <a:lstStyle/>
-          <a:p>
-            <a:pPr>
-              <a:spcAft>
-                <a:spcPts val="600"/>
-              </a:spcAft>
-            </a:pPr>
-            <a:r>
-              <a:rPr sz="1600" b="1">
-                <a:solidFill>
-                  <a:srgbClr val="222222"/>
-                </a:solidFill>
-                <a:latin typeface="Meiryo"/>
-              </a:rPr>
-              <a:t>アルゴリズム選択</a:t>
-            </a:r>
-          </a:p>
-          <a:p>
-            <a:pPr lvl="1">
-              <a:spcAft>
-                <a:spcPts val="200"/>
-              </a:spcAft>
-            </a:pPr>
-            <a:r>
-              <a:rPr sz="1400" b="0">
-                <a:solidFill>
-                  <a:srgbClr val="595959"/>
-                </a:solidFill>
-                <a:latin typeface="Meiryo"/>
-              </a:rPr>
-              <a:t>・オンポリシー (PPO): 環境改造が頻繁 → 古い経験が即無効 / sim 軽量で wall-clock 優位</a:t>
-            </a:r>
-          </a:p>
-          <a:p>
-            <a:pPr>
-              <a:spcAft>
-                <a:spcPts val="600"/>
-              </a:spcAft>
-            </a:pPr>
-            <a:r>
-              <a:rPr sz="1600" b="1">
-                <a:solidFill>
-                  <a:srgbClr val="222222"/>
-                </a:solidFill>
-                <a:latin typeface="Meiryo"/>
-              </a:rPr>
-              <a:t>主要ハイパラ</a:t>
-            </a:r>
-          </a:p>
-          <a:p>
-            <a:pPr lvl="1">
-              <a:spcAft>
-                <a:spcPts val="200"/>
-              </a:spcAft>
-            </a:pPr>
-            <a:r>
-              <a:rPr sz="1400" b="0">
-                <a:solidFill>
-                  <a:srgbClr val="595959"/>
-                </a:solidFill>
-                <a:latin typeface="Meiryo"/>
-              </a:rPr>
-              <a:t>・clip ε 0.15 (&lt;0.2): 高分散アドバンテージ下の方策崩壊を抑制</a:t>
-            </a:r>
-          </a:p>
-          <a:p>
-            <a:pPr lvl="1">
-              <a:spcAft>
-                <a:spcPts val="200"/>
-              </a:spcAft>
-            </a:pPr>
-            <a:r>
-              <a:rPr sz="1400" b="0">
-                <a:solidFill>
-                  <a:srgbClr val="595959"/>
-                </a:solidFill>
-                <a:latin typeface="Meiryo"/>
-              </a:rPr>
-              <a:t>・γ 0.99 / GAE λ 0.98 / n_steps 512×8env / minibatch 256 / 8〜15 epochs / linear LR decay</a:t>
-            </a:r>
-          </a:p>
-          <a:p>
-            <a:pPr lvl="1">
-              <a:spcAft>
-                <a:spcPts val="200"/>
-              </a:spcAft>
-            </a:pPr>
-            <a:r>
-              <a:rPr sz="1400" b="1">
-                <a:solidFill>
-                  <a:srgbClr val="595959"/>
-                </a:solidFill>
-                <a:latin typeface="Meiryo"/>
-              </a:rPr>
-              <a:t>・ent_coef 0.02: [0,1] 圧縮報酬との結合に注意 (0.10 は実質ランダム方策に収束)</a:t>
-            </a:r>
-          </a:p>
-          <a:p>
-            <a:pPr>
-              <a:spcAft>
-                <a:spcPts val="600"/>
-              </a:spcAft>
-            </a:pPr>
-            <a:r>
-              <a:rPr sz="1600" b="1">
-                <a:solidFill>
-                  <a:srgbClr val="222222"/>
-                </a:solidFill>
-                <a:latin typeface="Meiryo"/>
-              </a:rPr>
-              <a:t>備考</a:t>
-            </a:r>
-          </a:p>
-          <a:p>
-            <a:pPr lvl="1">
-              <a:spcAft>
-                <a:spcPts val="200"/>
-              </a:spcAft>
-            </a:pPr>
-            <a:r>
-              <a:rPr sz="1400" b="0">
-                <a:solidFill>
-                  <a:srgbClr val="595959"/>
-                </a:solidFill>
-                <a:latin typeface="Meiryo"/>
-              </a:rPr>
-              <a:t>・アドバンテージ正規化 → 報酬のアフィン変換に不変。[0,1] 化は診断用の設計</a:t>
             </a:r>
           </a:p>
         </p:txBody>
@@ -6250,6 +6281,209 @@
                 </a:solidFill>
                 <a:latin typeface="Meiryo"/>
               </a:rPr>
+              <a:t>PPO ハイパーパラメータの設計判断 (専門家向け)</a:t>
+            </a:r>
+          </a:p>
+        </p:txBody>
+      </p:sp>
+      <p:sp>
+        <p:nvSpPr>
+          <p:cNvPr id="3" name="TextBox 2"/>
+          <p:cNvSpPr txBox="1"/>
+          <p:nvPr/>
+        </p:nvSpPr>
+        <p:spPr>
+          <a:xfrm>
+            <a:off x="548640" y="1188720"/>
+            <a:ext cx="11064240" cy="5486400"/>
+          </a:xfrm>
+          <a:prstGeom prst="rect">
+            <a:avLst/>
+          </a:prstGeom>
+          <a:noFill/>
+        </p:spPr>
+        <p:txBody>
+          <a:bodyPr wrap="square">
+            <a:spAutoFit/>
+          </a:bodyPr>
+          <a:lstStyle/>
+          <a:p>
+            <a:pPr>
+              <a:spcAft>
+                <a:spcPts val="600"/>
+              </a:spcAft>
+            </a:pPr>
+            <a:r>
+              <a:rPr sz="1600" b="1">
+                <a:solidFill>
+                  <a:srgbClr val="222222"/>
+                </a:solidFill>
+                <a:latin typeface="Meiryo"/>
+              </a:rPr>
+              <a:t>アルゴリズム選択</a:t>
+            </a:r>
+          </a:p>
+          <a:p>
+            <a:pPr lvl="1">
+              <a:spcAft>
+                <a:spcPts val="200"/>
+              </a:spcAft>
+            </a:pPr>
+            <a:r>
+              <a:rPr sz="1400" b="0">
+                <a:solidFill>
+                  <a:srgbClr val="595959"/>
+                </a:solidFill>
+                <a:latin typeface="Meiryo"/>
+              </a:rPr>
+              <a:t>・オンポリシー (PPO): 環境改造が頻繁 → 古い経験が即無効 / sim 軽量で wall-clock 優位</a:t>
+            </a:r>
+          </a:p>
+          <a:p>
+            <a:pPr>
+              <a:spcAft>
+                <a:spcPts val="600"/>
+              </a:spcAft>
+            </a:pPr>
+            <a:r>
+              <a:rPr sz="1600" b="1">
+                <a:solidFill>
+                  <a:srgbClr val="222222"/>
+                </a:solidFill>
+                <a:latin typeface="Meiryo"/>
+              </a:rPr>
+              <a:t>主要ハイパラ</a:t>
+            </a:r>
+          </a:p>
+          <a:p>
+            <a:pPr lvl="1">
+              <a:spcAft>
+                <a:spcPts val="200"/>
+              </a:spcAft>
+            </a:pPr>
+            <a:r>
+              <a:rPr sz="1400" b="0">
+                <a:solidFill>
+                  <a:srgbClr val="595959"/>
+                </a:solidFill>
+                <a:latin typeface="Meiryo"/>
+              </a:rPr>
+              <a:t>・clip ε 0.15 (&lt;0.2): 高分散アドバンテージ下の方策崩壊を抑制</a:t>
+            </a:r>
+          </a:p>
+          <a:p>
+            <a:pPr lvl="1">
+              <a:spcAft>
+                <a:spcPts val="200"/>
+              </a:spcAft>
+            </a:pPr>
+            <a:r>
+              <a:rPr sz="1400" b="0">
+                <a:solidFill>
+                  <a:srgbClr val="595959"/>
+                </a:solidFill>
+                <a:latin typeface="Meiryo"/>
+              </a:rPr>
+              <a:t>・γ 0.99 / GAE λ 0.98 / n_steps 512×8env / minibatch 256 / 8〜15 epochs / linear LR decay</a:t>
+            </a:r>
+          </a:p>
+          <a:p>
+            <a:pPr lvl="1">
+              <a:spcAft>
+                <a:spcPts val="200"/>
+              </a:spcAft>
+            </a:pPr>
+            <a:r>
+              <a:rPr sz="1400" b="1">
+                <a:solidFill>
+                  <a:srgbClr val="595959"/>
+                </a:solidFill>
+                <a:latin typeface="Meiryo"/>
+              </a:rPr>
+              <a:t>・ent_coef 0.02: [0,1] 圧縮報酬との結合に注意 (0.10 は実質ランダム方策に収束)</a:t>
+            </a:r>
+          </a:p>
+          <a:p>
+            <a:pPr>
+              <a:spcAft>
+                <a:spcPts val="600"/>
+              </a:spcAft>
+            </a:pPr>
+            <a:r>
+              <a:rPr sz="1600" b="1">
+                <a:solidFill>
+                  <a:srgbClr val="222222"/>
+                </a:solidFill>
+                <a:latin typeface="Meiryo"/>
+              </a:rPr>
+              <a:t>備考</a:t>
+            </a:r>
+          </a:p>
+          <a:p>
+            <a:pPr lvl="1">
+              <a:spcAft>
+                <a:spcPts val="200"/>
+              </a:spcAft>
+            </a:pPr>
+            <a:r>
+              <a:rPr sz="1400" b="0">
+                <a:solidFill>
+                  <a:srgbClr val="595959"/>
+                </a:solidFill>
+                <a:latin typeface="Meiryo"/>
+              </a:rPr>
+              <a:t>・アドバンテージ正規化 → 報酬のアフィン変換に不変。[0,1] 化は診断用の設計</a:t>
+            </a:r>
+          </a:p>
+        </p:txBody>
+      </p:sp>
+    </p:spTree>
+  </p:cSld>
+  <p:clrMapOvr>
+    <a:masterClrMapping/>
+  </p:clrMapOvr>
+</p:sld>
+</file>
+
+<file path=ppt/slides/slide17.xml><?xml version="1.0" encoding="utf-8"?>
+<p:sld xmlns:a="http://schemas.openxmlformats.org/drawingml/2006/main" xmlns:p="http://schemas.openxmlformats.org/presentationml/2006/main" xmlns:r="http://schemas.openxmlformats.org/officeDocument/2006/relationships">
+  <p:cSld>
+    <p:spTree>
+      <p:nvGrpSpPr>
+        <p:cNvPr id="1" name=""/>
+        <p:cNvGrpSpPr/>
+        <p:nvPr/>
+      </p:nvGrpSpPr>
+      <p:grpSpPr/>
+      <p:sp>
+        <p:nvSpPr>
+          <p:cNvPr id="2" name="TextBox 1"/>
+          <p:cNvSpPr txBox="1"/>
+          <p:nvPr/>
+        </p:nvSpPr>
+        <p:spPr>
+          <a:xfrm>
+            <a:off x="457200" y="182880"/>
+            <a:ext cx="11247120" cy="731520"/>
+          </a:xfrm>
+          <a:prstGeom prst="rect">
+            <a:avLst/>
+          </a:prstGeom>
+          <a:noFill/>
+        </p:spPr>
+        <p:txBody>
+          <a:bodyPr wrap="none">
+            <a:spAutoFit/>
+          </a:bodyPr>
+          <a:lstStyle/>
+          <a:p>
+            <a:r>
+              <a:rPr sz="2700" b="1">
+                <a:solidFill>
+                  <a:srgbClr val="1B5EA8"/>
+                </a:solidFill>
+                <a:latin typeface="Meiryo"/>
+              </a:rPr>
               <a:t>実ゲームとのギャップ — シミュレーションが省いているもの</a:t>
             </a:r>
           </a:p>
@@ -6446,7 +6680,7 @@
 </p:sld>
 </file>
 
-<file path=ppt/slides/slide17.xml><?xml version="1.0" encoding="utf-8"?>
+<file path=ppt/slides/slide18.xml><?xml version="1.0" encoding="utf-8"?>
 <p:sld xmlns:a="http://schemas.openxmlformats.org/drawingml/2006/main" xmlns:p="http://schemas.openxmlformats.org/presentationml/2006/main" xmlns:r="http://schemas.openxmlformats.org/officeDocument/2006/relationships">
   <p:cSld>
     <p:spTree>
@@ -6673,7 +6907,7 @@
 </p:sld>
 </file>
 
-<file path=ppt/slides/slide18.xml><?xml version="1.0" encoding="utf-8"?>
+<file path=ppt/slides/slide19.xml><?xml version="1.0" encoding="utf-8"?>
 <p:sld xmlns:a="http://schemas.openxmlformats.org/drawingml/2006/main" xmlns:p="http://schemas.openxmlformats.org/presentationml/2006/main" xmlns:r="http://schemas.openxmlformats.org/officeDocument/2006/relationships">
   <p:cSld>
     <p:spTree>
@@ -6896,257 +7130,6 @@
                 <a:latin typeface="Meiryo"/>
               </a:rPr>
               <a:t>C# 検証: cd re_engine/verify &amp;&amp; dotnet run -- ..  → ALL SCENARIOS MATCH</a:t>
-            </a:r>
-          </a:p>
-        </p:txBody>
-      </p:sp>
-    </p:spTree>
-  </p:cSld>
-  <p:clrMapOvr>
-    <a:masterClrMapping/>
-  </p:clrMapOvr>
-</p:sld>
-</file>
-
-<file path=ppt/slides/slide19.xml><?xml version="1.0" encoding="utf-8"?>
-<p:sld xmlns:a="http://schemas.openxmlformats.org/drawingml/2006/main" xmlns:p="http://schemas.openxmlformats.org/presentationml/2006/main" xmlns:r="http://schemas.openxmlformats.org/officeDocument/2006/relationships">
-  <p:cSld>
-    <p:spTree>
-      <p:nvGrpSpPr>
-        <p:cNvPr id="1" name=""/>
-        <p:cNvGrpSpPr/>
-        <p:nvPr/>
-      </p:nvGrpSpPr>
-      <p:grpSpPr/>
-      <p:sp>
-        <p:nvSpPr>
-          <p:cNvPr id="2" name="TextBox 1"/>
-          <p:cNvSpPr txBox="1"/>
-          <p:nvPr/>
-        </p:nvSpPr>
-        <p:spPr>
-          <a:xfrm>
-            <a:off x="457200" y="182880"/>
-            <a:ext cx="11247120" cy="731520"/>
-          </a:xfrm>
-          <a:prstGeom prst="rect">
-            <a:avLst/>
-          </a:prstGeom>
-          <a:noFill/>
-        </p:spPr>
-        <p:txBody>
-          <a:bodyPr wrap="none">
-            <a:spAutoFit/>
-          </a:bodyPr>
-          <a:lstStyle/>
-          <a:p>
-            <a:r>
-              <a:rPr sz="2700" b="1">
-                <a:solidFill>
-                  <a:srgbClr val="1B5EA8"/>
-                </a:solidFill>
-                <a:latin typeface="Meiryo"/>
-              </a:rPr>
-              <a:t>エクスポートツールと ONNX の注意点</a:t>
-            </a:r>
-          </a:p>
-        </p:txBody>
-      </p:sp>
-      <p:sp>
-        <p:nvSpPr>
-          <p:cNvPr id="3" name="TextBox 2"/>
-          <p:cNvSpPr txBox="1"/>
-          <p:nvPr/>
-        </p:nvSpPr>
-        <p:spPr>
-          <a:xfrm>
-            <a:off x="548640" y="1143000"/>
-            <a:ext cx="11064240" cy="5486400"/>
-          </a:xfrm>
-          <a:prstGeom prst="rect">
-            <a:avLst/>
-          </a:prstGeom>
-          <a:noFill/>
-        </p:spPr>
-        <p:txBody>
-          <a:bodyPr wrap="square">
-            <a:spAutoFit/>
-          </a:bodyPr>
-          <a:lstStyle/>
-          <a:p>
-            <a:pPr>
-              <a:spcAft>
-                <a:spcPts val="600"/>
-              </a:spcAft>
-            </a:pPr>
-            <a:r>
-              <a:rPr sz="1500" b="1">
-                <a:solidFill>
-                  <a:srgbClr val="222222"/>
-                </a:solidFill>
-                <a:latin typeface="Meiryo"/>
-              </a:rPr>
-              <a:t>エクスポート</a:t>
-            </a:r>
-          </a:p>
-          <a:p>
-            <a:pPr lvl="1">
-              <a:spcAft>
-                <a:spcPts val="200"/>
-              </a:spcAft>
-            </a:pPr>
-            <a:r>
-              <a:rPr sz="1300" b="1">
-                <a:solidFill>
-                  <a:srgbClr val="595959"/>
-                </a:solidFill>
-                <a:latin typeface="Meiryo"/>
-              </a:rPr>
-              <a:t>・python export_onnx.py &lt;model.zip&gt; -m 3   # NHWC [1,12,12,10] エンジン用 (推奨)</a:t>
-            </a:r>
-          </a:p>
-          <a:p>
-            <a:pPr lvl="2">
-              <a:spcAft>
-                <a:spcPts val="200"/>
-              </a:spcAft>
-            </a:pPr>
-            <a:r>
-              <a:rPr sz="1100" b="0">
-                <a:solidFill>
-                  <a:srgbClr val="595959"/>
-                </a:solidFill>
-                <a:latin typeface="Meiryo"/>
-              </a:rPr>
-              <a:t>− -m 1: full policy / 2: actor CHW / 0: 全部 — 各出力は torch と自動照合 (≤4e-6)</a:t>
-            </a:r>
-          </a:p>
-          <a:p>
-            <a:pPr lvl="1">
-              <a:spcAft>
-                <a:spcPts val="200"/>
-              </a:spcAft>
-            </a:pPr>
-            <a:r>
-              <a:rPr sz="1300" b="0">
-                <a:solidFill>
-                  <a:srgbClr val="595959"/>
-                </a:solidFill>
-                <a:latin typeface="Meiryo"/>
-              </a:rPr>
-              <a:t>・python re_engine/convert_onnx_nhwc.py &lt;actor.onnx&gt;  # 既存 CHW の NHWC 化</a:t>
-            </a:r>
-          </a:p>
-          <a:p>
-            <a:pPr>
-              <a:spcAft>
-                <a:spcPts val="600"/>
-              </a:spcAft>
-            </a:pPr>
-            <a:r>
-              <a:rPr sz="1500" b="1">
-                <a:solidFill>
-                  <a:srgbClr val="222222"/>
-                </a:solidFill>
-                <a:latin typeface="Meiryo"/>
-              </a:rPr>
-              <a:t>再生成・検証</a:t>
-            </a:r>
-          </a:p>
-          <a:p>
-            <a:pPr lvl="1">
-              <a:spcAft>
-                <a:spcPts val="200"/>
-              </a:spcAft>
-            </a:pPr>
-            <a:r>
-              <a:rPr sz="1300" b="0">
-                <a:solidFill>
-                  <a:srgbClr val="595959"/>
-                </a:solidFill>
-                <a:latin typeface="Meiryo"/>
-              </a:rPr>
-              <a:t>・python re_engine/export_track_json.py  → dotnet run で ALL SCENARIOS MATCH を確認</a:t>
-            </a:r>
-          </a:p>
-          <a:p>
-            <a:pPr>
-              <a:spcAft>
-                <a:spcPts val="600"/>
-              </a:spcAft>
-            </a:pPr>
-            <a:r>
-              <a:rPr sz="1500" b="1">
-                <a:solidFill>
-                  <a:srgbClr val="222222"/>
-                </a:solidFill>
-                <a:latin typeface="Meiryo"/>
-              </a:rPr>
-              <a:t>よくある事故 (症状で覚える)</a:t>
-            </a:r>
-          </a:p>
-          <a:p>
-            <a:pPr lvl="1">
-              <a:spcAft>
-                <a:spcPts val="200"/>
-              </a:spcAft>
-            </a:pPr>
-            <a:r>
-              <a:rPr sz="1300" b="1">
-                <a:solidFill>
-                  <a:srgbClr val="B32D2D"/>
-                </a:solidFill>
-                <a:latin typeface="Meiryo"/>
-              </a:rPr>
-              <a:t>・出力がほぼ一定 (thr≈0.4, str≈0.2) = テンソルレイアウト不一致</a:t>
-            </a:r>
-          </a:p>
-          <a:p>
-            <a:pPr lvl="1">
-              <a:spcAft>
-                <a:spcPts val="200"/>
-              </a:spcAft>
-            </a:pPr>
-            <a:r>
-              <a:rPr sz="1300" b="0">
-                <a:solidFill>
-                  <a:srgbClr val="B32D2D"/>
-                </a:solidFill>
-                <a:latin typeface="Meiryo"/>
-              </a:rPr>
-              <a:t>・観測が全部飽和・挙動が雑 = km/h を m/s に変換し忘れ (KphToMs)</a:t>
-            </a:r>
-          </a:p>
-          <a:p>
-            <a:pPr lvl="1">
-              <a:spcAft>
-                <a:spcPts val="200"/>
-              </a:spcAft>
-            </a:pPr>
-            <a:r>
-              <a:rPr sz="1300" b="0">
-                <a:solidFill>
-                  <a:srgbClr val="B32D2D"/>
-                </a:solidFill>
-                <a:latin typeface="Meiryo"/>
-              </a:rPr>
-              <a:t>・グリッドが横向き = heading に生の yaw を使用 (正: 90° − yaw または forward から Atan2)</a:t>
-            </a:r>
-          </a:p>
-          <a:p>
-            <a:pPr>
-              <a:spcAft>
-                <a:spcPts val="600"/>
-              </a:spcAft>
-            </a:pPr>
-            <a:r>
-              <a:rPr sz="1500" b="0">
-                <a:solidFill>
-                  <a:srgbClr val="222222"/>
-                </a:solidFill>
-                <a:latin typeface="Meiryo"/>
-              </a:rPr>
-              <a:t>定数同期: レンジ・5 Hz・グリッド設定の変更は C# 定数 + JSON + 検証 + ONNX の 4 点セット</a:t>
             </a:r>
           </a:p>
         </p:txBody>
@@ -7329,6 +7312,257 @@
                 </a:solidFill>
                 <a:latin typeface="Meiryo"/>
               </a:rPr>
+              <a:t>エクスポートツールと ONNX の注意点</a:t>
+            </a:r>
+          </a:p>
+        </p:txBody>
+      </p:sp>
+      <p:sp>
+        <p:nvSpPr>
+          <p:cNvPr id="3" name="TextBox 2"/>
+          <p:cNvSpPr txBox="1"/>
+          <p:nvPr/>
+        </p:nvSpPr>
+        <p:spPr>
+          <a:xfrm>
+            <a:off x="548640" y="1143000"/>
+            <a:ext cx="11064240" cy="5486400"/>
+          </a:xfrm>
+          <a:prstGeom prst="rect">
+            <a:avLst/>
+          </a:prstGeom>
+          <a:noFill/>
+        </p:spPr>
+        <p:txBody>
+          <a:bodyPr wrap="square">
+            <a:spAutoFit/>
+          </a:bodyPr>
+          <a:lstStyle/>
+          <a:p>
+            <a:pPr>
+              <a:spcAft>
+                <a:spcPts val="600"/>
+              </a:spcAft>
+            </a:pPr>
+            <a:r>
+              <a:rPr sz="1500" b="1">
+                <a:solidFill>
+                  <a:srgbClr val="222222"/>
+                </a:solidFill>
+                <a:latin typeface="Meiryo"/>
+              </a:rPr>
+              <a:t>エクスポート</a:t>
+            </a:r>
+          </a:p>
+          <a:p>
+            <a:pPr lvl="1">
+              <a:spcAft>
+                <a:spcPts val="200"/>
+              </a:spcAft>
+            </a:pPr>
+            <a:r>
+              <a:rPr sz="1300" b="1">
+                <a:solidFill>
+                  <a:srgbClr val="595959"/>
+                </a:solidFill>
+                <a:latin typeface="Meiryo"/>
+              </a:rPr>
+              <a:t>・python export_onnx.py &lt;model.zip&gt; -m 3   # NHWC [1,12,12,10] エンジン用 (推奨)</a:t>
+            </a:r>
+          </a:p>
+          <a:p>
+            <a:pPr lvl="2">
+              <a:spcAft>
+                <a:spcPts val="200"/>
+              </a:spcAft>
+            </a:pPr>
+            <a:r>
+              <a:rPr sz="1100" b="0">
+                <a:solidFill>
+                  <a:srgbClr val="595959"/>
+                </a:solidFill>
+                <a:latin typeface="Meiryo"/>
+              </a:rPr>
+              <a:t>− -m 1: full policy / 2: actor CHW / 0: 全部 — 各出力は torch と自動照合 (≤4e-6)</a:t>
+            </a:r>
+          </a:p>
+          <a:p>
+            <a:pPr lvl="1">
+              <a:spcAft>
+                <a:spcPts val="200"/>
+              </a:spcAft>
+            </a:pPr>
+            <a:r>
+              <a:rPr sz="1300" b="0">
+                <a:solidFill>
+                  <a:srgbClr val="595959"/>
+                </a:solidFill>
+                <a:latin typeface="Meiryo"/>
+              </a:rPr>
+              <a:t>・python re_engine/convert_onnx_nhwc.py &lt;actor.onnx&gt;  # 既存 CHW の NHWC 化</a:t>
+            </a:r>
+          </a:p>
+          <a:p>
+            <a:pPr>
+              <a:spcAft>
+                <a:spcPts val="600"/>
+              </a:spcAft>
+            </a:pPr>
+            <a:r>
+              <a:rPr sz="1500" b="1">
+                <a:solidFill>
+                  <a:srgbClr val="222222"/>
+                </a:solidFill>
+                <a:latin typeface="Meiryo"/>
+              </a:rPr>
+              <a:t>再生成・検証</a:t>
+            </a:r>
+          </a:p>
+          <a:p>
+            <a:pPr lvl="1">
+              <a:spcAft>
+                <a:spcPts val="200"/>
+              </a:spcAft>
+            </a:pPr>
+            <a:r>
+              <a:rPr sz="1300" b="0">
+                <a:solidFill>
+                  <a:srgbClr val="595959"/>
+                </a:solidFill>
+                <a:latin typeface="Meiryo"/>
+              </a:rPr>
+              <a:t>・python re_engine/export_track_json.py  → dotnet run で ALL SCENARIOS MATCH を確認</a:t>
+            </a:r>
+          </a:p>
+          <a:p>
+            <a:pPr>
+              <a:spcAft>
+                <a:spcPts val="600"/>
+              </a:spcAft>
+            </a:pPr>
+            <a:r>
+              <a:rPr sz="1500" b="1">
+                <a:solidFill>
+                  <a:srgbClr val="222222"/>
+                </a:solidFill>
+                <a:latin typeface="Meiryo"/>
+              </a:rPr>
+              <a:t>よくある事故 (症状で覚える)</a:t>
+            </a:r>
+          </a:p>
+          <a:p>
+            <a:pPr lvl="1">
+              <a:spcAft>
+                <a:spcPts val="200"/>
+              </a:spcAft>
+            </a:pPr>
+            <a:r>
+              <a:rPr sz="1300" b="1">
+                <a:solidFill>
+                  <a:srgbClr val="B32D2D"/>
+                </a:solidFill>
+                <a:latin typeface="Meiryo"/>
+              </a:rPr>
+              <a:t>・出力がほぼ一定 (thr≈0.4, str≈0.2) = テンソルレイアウト不一致</a:t>
+            </a:r>
+          </a:p>
+          <a:p>
+            <a:pPr lvl="1">
+              <a:spcAft>
+                <a:spcPts val="200"/>
+              </a:spcAft>
+            </a:pPr>
+            <a:r>
+              <a:rPr sz="1300" b="0">
+                <a:solidFill>
+                  <a:srgbClr val="B32D2D"/>
+                </a:solidFill>
+                <a:latin typeface="Meiryo"/>
+              </a:rPr>
+              <a:t>・観測が全部飽和・挙動が雑 = km/h を m/s に変換し忘れ (KphToMs)</a:t>
+            </a:r>
+          </a:p>
+          <a:p>
+            <a:pPr lvl="1">
+              <a:spcAft>
+                <a:spcPts val="200"/>
+              </a:spcAft>
+            </a:pPr>
+            <a:r>
+              <a:rPr sz="1300" b="0">
+                <a:solidFill>
+                  <a:srgbClr val="B32D2D"/>
+                </a:solidFill>
+                <a:latin typeface="Meiryo"/>
+              </a:rPr>
+              <a:t>・グリッドが横向き = heading に生の yaw を使用 (正: 90° − yaw または forward から Atan2)</a:t>
+            </a:r>
+          </a:p>
+          <a:p>
+            <a:pPr>
+              <a:spcAft>
+                <a:spcPts val="600"/>
+              </a:spcAft>
+            </a:pPr>
+            <a:r>
+              <a:rPr sz="1500" b="0">
+                <a:solidFill>
+                  <a:srgbClr val="222222"/>
+                </a:solidFill>
+                <a:latin typeface="Meiryo"/>
+              </a:rPr>
+              <a:t>定数同期: レンジ・5 Hz・グリッド設定の変更は C# 定数 + JSON + 検証 + ONNX の 4 点セット</a:t>
+            </a:r>
+          </a:p>
+        </p:txBody>
+      </p:sp>
+    </p:spTree>
+  </p:cSld>
+  <p:clrMapOvr>
+    <a:masterClrMapping/>
+  </p:clrMapOvr>
+</p:sld>
+</file>
+
+<file path=ppt/slides/slide21.xml><?xml version="1.0" encoding="utf-8"?>
+<p:sld xmlns:a="http://schemas.openxmlformats.org/drawingml/2006/main" xmlns:p="http://schemas.openxmlformats.org/presentationml/2006/main" xmlns:r="http://schemas.openxmlformats.org/officeDocument/2006/relationships">
+  <p:cSld>
+    <p:spTree>
+      <p:nvGrpSpPr>
+        <p:cNvPr id="1" name=""/>
+        <p:cNvGrpSpPr/>
+        <p:nvPr/>
+      </p:nvGrpSpPr>
+      <p:grpSpPr/>
+      <p:sp>
+        <p:nvSpPr>
+          <p:cNvPr id="2" name="TextBox 1"/>
+          <p:cNvSpPr txBox="1"/>
+          <p:nvPr/>
+        </p:nvSpPr>
+        <p:spPr>
+          <a:xfrm>
+            <a:off x="457200" y="182880"/>
+            <a:ext cx="11247120" cy="731520"/>
+          </a:xfrm>
+          <a:prstGeom prst="rect">
+            <a:avLst/>
+          </a:prstGeom>
+          <a:noFill/>
+        </p:spPr>
+        <p:txBody>
+          <a:bodyPr wrap="none">
+            <a:spAutoFit/>
+          </a:bodyPr>
+          <a:lstStyle/>
+          <a:p>
+            <a:r>
+              <a:rPr sz="2700" b="1">
+                <a:solidFill>
+                  <a:srgbClr val="1B5EA8"/>
+                </a:solidFill>
+                <a:latin typeface="Meiryo"/>
+              </a:rPr>
               <a:t>まとめ — 環境設計こそが学習を決める</a:t>
             </a:r>
           </a:p>
@@ -8433,122 +8667,669 @@
                 </a:solidFill>
                 <a:latin typeface="Meiryo"/>
               </a:rPr>
-              <a:t>進化 (1) 行動と車両 — スロットルの導入と制御量の設計</a:t>
-            </a:r>
-          </a:p>
-        </p:txBody>
-      </p:sp>
-      <p:sp>
-        <p:nvSpPr>
-          <p:cNvPr id="3" name="TextBox 2"/>
-          <p:cNvSpPr txBox="1"/>
+              <a:t>全体比較表 — デフォルトから変えた軸と狙い</a:t>
+            </a:r>
+          </a:p>
+        </p:txBody>
+      </p:sp>
+      <p:graphicFrame>
+        <p:nvGraphicFramePr>
+          <p:cNvPr id="3" name="Table 2"/>
+          <p:cNvGraphicFramePr>
+            <a:graphicFrameLocks noGrp="1"/>
+          </p:cNvGraphicFramePr>
           <p:nvPr/>
-        </p:nvSpPr>
-        <p:spPr>
-          <a:xfrm>
-            <a:off x="548640" y="1097280"/>
-            <a:ext cx="11064240" cy="5486400"/>
-          </a:xfrm>
-          <a:prstGeom prst="rect">
-            <a:avLst/>
-          </a:prstGeom>
-          <a:noFill/>
-        </p:spPr>
-        <p:txBody>
-          <a:bodyPr wrap="square">
-            <a:spAutoFit/>
-          </a:bodyPr>
-          <a:lstStyle/>
-          <a:p>
-            <a:pPr>
-              <a:spcAft>
-                <a:spcPts val="600"/>
-              </a:spcAft>
-            </a:pPr>
-            <a:r>
-              <a:rPr sz="1600" b="1">
-                <a:solidFill>
-                  <a:srgbClr val="222222"/>
-                </a:solidFill>
-                <a:latin typeface="Meiryo"/>
-              </a:rPr>
-              <a:t>変更: ステアのみ → 連続 (スロットル, ステア)、dynamical=True (タイヤスリップ)</a:t>
-            </a:r>
-          </a:p>
-          <a:p>
-            <a:pPr lvl="1">
-              <a:spcAft>
-                <a:spcPts val="200"/>
-              </a:spcAft>
-            </a:pPr>
-            <a:r>
-              <a:rPr sz="1400" b="0">
-                <a:solidFill>
-                  <a:srgbClr val="595959"/>
-                </a:solidFill>
-                <a:latin typeface="Meiryo"/>
-              </a:rPr>
-              <a:t>・acceleration_range ±5 m/s²: 方策出力 [−1,1] → 加速度への写像係数</a:t>
-            </a:r>
-          </a:p>
-          <a:p>
-            <a:pPr lvl="1">
-              <a:spcAft>
-                <a:spcPts val="200"/>
-              </a:spcAft>
-            </a:pPr>
-            <a:r>
-              <a:rPr sz="1400" b="0">
-                <a:solidFill>
-                  <a:srgbClr val="595959"/>
-                </a:solidFill>
-                <a:latin typeface="Meiryo"/>
-              </a:rPr>
-              <a:t>・steering_range ±π/6 (30°): 前輪舵角上限 → 最小旋回半径 ≈ 8 m &lt; コーナー最小 10 m</a:t>
-            </a:r>
-          </a:p>
-          <a:p>
-            <a:pPr lvl="1">
-              <a:spcAft>
-                <a:spcPts val="200"/>
-              </a:spcAft>
-            </a:pPr>
-            <a:r>
-              <a:rPr sz="1400" b="0">
-                <a:solidFill>
-                  <a:srgbClr val="595959"/>
-                </a:solidFill>
-                <a:latin typeface="Meiryo"/>
-              </a:rPr>
-              <a:t>・speed_limit 16 m/s + 前進速度報酬 — 「速く走る」動機を導入</a:t>
-            </a:r>
-          </a:p>
-        </p:txBody>
-      </p:sp>
-      <p:pic>
-        <p:nvPicPr>
-          <p:cNvPr id="4" name="Picture 3" descr="range_experiment.png"/>
-          <p:cNvPicPr>
-            <a:picLocks noChangeAspect="1"/>
-          </p:cNvPicPr>
-          <p:nvPr/>
-        </p:nvPicPr>
-        <p:blipFill>
-          <a:blip r:embed="rId3"/>
-          <a:stretch>
-            <a:fillRect/>
-          </a:stretch>
-        </p:blipFill>
-        <p:spPr>
-          <a:xfrm>
-            <a:off x="3108960" y="2651760"/>
-            <a:ext cx="5852160" cy="3121152"/>
-          </a:xfrm>
-          <a:prstGeom prst="rect">
-            <a:avLst/>
-          </a:prstGeom>
-        </p:spPr>
-      </p:pic>
+        </p:nvGraphicFramePr>
+        <p:xfrm>
+          <a:off x="411480" y="1234440"/>
+          <a:ext cx="11384280" cy="5120633"/>
+        </p:xfrm>
+        <a:graphic>
+          <a:graphicData uri="http://schemas.openxmlformats.org/drawingml/2006/table">
+            <a:tbl>
+              <a:tblPr firstRow="1" bandRow="1">
+                <a:tableStyleId>{5C22544A-7EE6-4342-B048-85BDC9FD1C3A}</a:tableStyleId>
+              </a:tblPr>
+              <a:tblGrid>
+                <a:gridCol w="1417320"/>
+                <a:gridCol w="3063240"/>
+                <a:gridCol w="3246120"/>
+                <a:gridCol w="3657600"/>
+              </a:tblGrid>
+              <a:tr h="731519">
+                <a:tc>
+                  <a:txBody>
+                    <a:bodyPr wrap="square"/>
+                    <a:lstStyle/>
+                    <a:p>
+                      <a:r>
+                        <a:rPr sz="1300" b="1">
+                          <a:solidFill>
+                            <a:srgbClr val="FFFFFF"/>
+                          </a:solidFill>
+                          <a:latin typeface="Meiryo"/>
+                        </a:rPr>
+                        <a:t>軸</a:t>
+                      </a:r>
+                    </a:p>
+                  </a:txBody>
+                  <a:tcPr marL="64008" marR="64008" marT="27432" marB="27432">
+                    <a:solidFill>
+                      <a:srgbClr val="1B5EA8"/>
+                    </a:solidFill>
+                  </a:tcPr>
+                </a:tc>
+                <a:tc>
+                  <a:txBody>
+                    <a:bodyPr wrap="square"/>
+                    <a:lstStyle/>
+                    <a:p>
+                      <a:r>
+                        <a:rPr sz="1300" b="1">
+                          <a:solidFill>
+                            <a:srgbClr val="FFFFFF"/>
+                          </a:solidFill>
+                          <a:latin typeface="Meiryo"/>
+                        </a:rPr>
+                        <a:t>highway-env デフォルト</a:t>
+                      </a:r>
+                    </a:p>
+                  </a:txBody>
+                  <a:tcPr marL="64008" marR="64008" marT="27432" marB="27432">
+                    <a:solidFill>
+                      <a:srgbClr val="1B5EA8"/>
+                    </a:solidFill>
+                  </a:tcPr>
+                </a:tc>
+                <a:tc>
+                  <a:txBody>
+                    <a:bodyPr wrap="square"/>
+                    <a:lstStyle/>
+                    <a:p>
+                      <a:r>
+                        <a:rPr sz="1300" b="1">
+                          <a:solidFill>
+                            <a:srgbClr val="FFFFFF"/>
+                          </a:solidFill>
+                          <a:latin typeface="Meiryo"/>
+                        </a:rPr>
+                        <a:t>CircuitAgents</a:t>
+                      </a:r>
+                    </a:p>
+                  </a:txBody>
+                  <a:tcPr marL="64008" marR="64008" marT="27432" marB="27432">
+                    <a:solidFill>
+                      <a:srgbClr val="1B5EA8"/>
+                    </a:solidFill>
+                  </a:tcPr>
+                </a:tc>
+                <a:tc>
+                  <a:txBody>
+                    <a:bodyPr wrap="square"/>
+                    <a:lstStyle/>
+                    <a:p>
+                      <a:r>
+                        <a:rPr sz="1300" b="1">
+                          <a:solidFill>
+                            <a:srgbClr val="FFFFFF"/>
+                          </a:solidFill>
+                          <a:latin typeface="Meiryo"/>
+                        </a:rPr>
+                        <a:t>狙い</a:t>
+                      </a:r>
+                    </a:p>
+                  </a:txBody>
+                  <a:tcPr marL="64008" marR="64008" marT="27432" marB="27432">
+                    <a:solidFill>
+                      <a:srgbClr val="1B5EA8"/>
+                    </a:solidFill>
+                  </a:tcPr>
+                </a:tc>
+              </a:tr>
+              <a:tr h="731519">
+                <a:tc>
+                  <a:txBody>
+                    <a:bodyPr wrap="square"/>
+                    <a:lstStyle/>
+                    <a:p>
+                      <a:r>
+                        <a:rPr sz="1200" b="1">
+                          <a:solidFill>
+                            <a:srgbClr val="1B5EA8"/>
+                          </a:solidFill>
+                          <a:latin typeface="Meiryo"/>
+                        </a:rPr>
+                        <a:t>行動・車両</a:t>
+                      </a:r>
+                    </a:p>
+                  </a:txBody>
+                  <a:tcPr marL="64008" marR="64008" marT="27432" marB="27432">
+                    <a:solidFill>
+                      <a:srgbClr val="F2F5FA"/>
+                    </a:solidFill>
+                  </a:tcPr>
+                </a:tc>
+                <a:tc>
+                  <a:txBody>
+                    <a:bodyPr wrap="square"/>
+                    <a:lstStyle/>
+                    <a:p>
+                      <a:r>
+                        <a:rPr sz="1200" b="0">
+                          <a:solidFill>
+                            <a:srgbClr val="222222"/>
+                          </a:solidFill>
+                          <a:latin typeface="Meiryo"/>
+                        </a:rPr>
+                        <a:t>ステアのみ / 運動学 Bicycle</a:t>
+                      </a:r>
+                    </a:p>
+                  </a:txBody>
+                  <a:tcPr marL="64008" marR="64008" marT="27432" marB="27432">
+                    <a:solidFill>
+                      <a:srgbClr val="F2F5FA"/>
+                    </a:solidFill>
+                  </a:tcPr>
+                </a:tc>
+                <a:tc>
+                  <a:txBody>
+                    <a:bodyPr wrap="square"/>
+                    <a:lstStyle/>
+                    <a:p>
+                      <a:r>
+                        <a:rPr sz="1200" b="0">
+                          <a:solidFill>
+                            <a:srgbClr val="222222"/>
+                          </a:solidFill>
+                          <a:latin typeface="Meiryo"/>
+                        </a:rPr>
+                        <a:t>連続 (スロットル,ステア) / 動的 Bicycle</a:t>
+                      </a:r>
+                    </a:p>
+                  </a:txBody>
+                  <a:tcPr marL="64008" marR="64008" marT="27432" marB="27432">
+                    <a:solidFill>
+                      <a:srgbClr val="F2F5FA"/>
+                    </a:solidFill>
+                  </a:tcPr>
+                </a:tc>
+                <a:tc>
+                  <a:txBody>
+                    <a:bodyPr wrap="square"/>
+                    <a:lstStyle/>
+                    <a:p>
+                      <a:r>
+                        <a:rPr sz="1200" b="0">
+                          <a:solidFill>
+                            <a:srgbClr val="222222"/>
+                          </a:solidFill>
+                          <a:latin typeface="Meiryo"/>
+                        </a:rPr>
+                        <a:t>アクセルを踏むレースにし慣性・横滑りを再現</a:t>
+                      </a:r>
+                    </a:p>
+                  </a:txBody>
+                  <a:tcPr marL="64008" marR="64008" marT="27432" marB="27432">
+                    <a:solidFill>
+                      <a:srgbClr val="F2F5FA"/>
+                    </a:solidFill>
+                  </a:tcPr>
+                </a:tc>
+              </a:tr>
+              <a:tr h="731519">
+                <a:tc>
+                  <a:txBody>
+                    <a:bodyPr wrap="square"/>
+                    <a:lstStyle/>
+                    <a:p>
+                      <a:r>
+                        <a:rPr sz="1200" b="1">
+                          <a:solidFill>
+                            <a:srgbClr val="1B5EA8"/>
+                          </a:solidFill>
+                          <a:latin typeface="Meiryo"/>
+                        </a:rPr>
+                        <a:t>速度目標</a:t>
+                      </a:r>
+                    </a:p>
+                  </a:txBody>
+                  <a:tcPr marL="64008" marR="64008" marT="27432" marB="27432">
+                    <a:solidFill>
+                      <a:srgbClr val="FFFFFF"/>
+                    </a:solidFill>
+                  </a:tcPr>
+                </a:tc>
+                <a:tc>
+                  <a:txBody>
+                    <a:bodyPr wrap="square"/>
+                    <a:lstStyle/>
+                    <a:p>
+                      <a:r>
+                        <a:rPr sz="1200" b="0">
+                          <a:solidFill>
+                            <a:srgbClr val="222222"/>
+                          </a:solidFill>
+                          <a:latin typeface="Meiryo"/>
+                        </a:rPr>
+                        <a:t>離散 [0,5,10] m/s、速さの動機なし</a:t>
+                      </a:r>
+                    </a:p>
+                  </a:txBody>
+                  <a:tcPr marL="64008" marR="64008" marT="27432" marB="27432">
+                    <a:solidFill>
+                      <a:srgbClr val="FFFFFF"/>
+                    </a:solidFill>
+                  </a:tcPr>
+                </a:tc>
+                <a:tc>
+                  <a:txBody>
+                    <a:bodyPr wrap="square"/>
+                    <a:lstStyle/>
+                    <a:p>
+                      <a:r>
+                        <a:rPr sz="1200" b="0">
+                          <a:solidFill>
+                            <a:srgbClr val="222222"/>
+                          </a:solidFill>
+                          <a:latin typeface="Meiryo"/>
+                        </a:rPr>
+                        <a:t>16 m/s + 前進速度報酬</a:t>
+                      </a:r>
+                    </a:p>
+                  </a:txBody>
+                  <a:tcPr marL="64008" marR="64008" marT="27432" marB="27432">
+                    <a:solidFill>
+                      <a:srgbClr val="FFFFFF"/>
+                    </a:solidFill>
+                  </a:tcPr>
+                </a:tc>
+                <a:tc>
+                  <a:txBody>
+                    <a:bodyPr wrap="square"/>
+                    <a:lstStyle/>
+                    <a:p>
+                      <a:r>
+                        <a:rPr sz="1200" b="0">
+                          <a:solidFill>
+                            <a:srgbClr val="222222"/>
+                          </a:solidFill>
+                          <a:latin typeface="Meiryo"/>
+                        </a:rPr>
+                        <a:t>「速さを競う」動機を導入</a:t>
+                      </a:r>
+                    </a:p>
+                  </a:txBody>
+                  <a:tcPr marL="64008" marR="64008" marT="27432" marB="27432">
+                    <a:solidFill>
+                      <a:srgbClr val="FFFFFF"/>
+                    </a:solidFill>
+                  </a:tcPr>
+                </a:tc>
+              </a:tr>
+              <a:tr h="731519">
+                <a:tc>
+                  <a:txBody>
+                    <a:bodyPr wrap="square"/>
+                    <a:lstStyle/>
+                    <a:p>
+                      <a:r>
+                        <a:rPr sz="1200" b="1">
+                          <a:solidFill>
+                            <a:srgbClr val="1B5EA8"/>
+                          </a:solidFill>
+                          <a:latin typeface="Meiryo"/>
+                        </a:rPr>
+                        <a:t>壁</a:t>
+                      </a:r>
+                    </a:p>
+                  </a:txBody>
+                  <a:tcPr marL="64008" marR="64008" marT="27432" marB="27432">
+                    <a:solidFill>
+                      <a:srgbClr val="F2F5FA"/>
+                    </a:solidFill>
+                  </a:tcPr>
+                </a:tc>
+                <a:tc>
+                  <a:txBody>
+                    <a:bodyPr wrap="square"/>
+                    <a:lstStyle/>
+                    <a:p>
+                      <a:r>
+                        <a:rPr sz="1200" b="0">
+                          <a:solidFill>
+                            <a:srgbClr val="222222"/>
+                          </a:solidFill>
+                          <a:latin typeface="Meiryo"/>
+                        </a:rPr>
+                        <a:t>存在しない (路外=終了/すり抜け)</a:t>
+                      </a:r>
+                    </a:p>
+                  </a:txBody>
+                  <a:tcPr marL="64008" marR="64008" marT="27432" marB="27432">
+                    <a:solidFill>
+                      <a:srgbClr val="F2F5FA"/>
+                    </a:solidFill>
+                  </a:tcPr>
+                </a:tc>
+                <a:tc>
+                  <a:txBody>
+                    <a:bodyPr wrap="square"/>
+                    <a:lstStyle/>
+                    <a:p>
+                      <a:r>
+                        <a:rPr sz="1200" b="0">
+                          <a:solidFill>
+                            <a:srgbClr val="222222"/>
+                          </a:solidFill>
+                          <a:latin typeface="Meiryo"/>
+                        </a:rPr>
+                        <a:t>外周のみ停止壁 + 摩擦 0.6</a:t>
+                      </a:r>
+                    </a:p>
+                  </a:txBody>
+                  <a:tcPr marL="64008" marR="64008" marT="27432" marB="27432">
+                    <a:solidFill>
+                      <a:srgbClr val="F2F5FA"/>
+                    </a:solidFill>
+                  </a:tcPr>
+                </a:tc>
+                <a:tc>
+                  <a:txBody>
+                    <a:bodyPr wrap="square"/>
+                    <a:lstStyle/>
+                    <a:p>
+                      <a:r>
+                        <a:rPr sz="1200" b="0">
+                          <a:solidFill>
+                            <a:srgbClr val="222222"/>
+                          </a:solidFill>
+                          <a:latin typeface="Meiryo"/>
+                        </a:rPr>
+                        <a:t>ゲームの壁制約 / ショートカット・壁擦りを封じる</a:t>
+                      </a:r>
+                    </a:p>
+                  </a:txBody>
+                  <a:tcPr marL="64008" marR="64008" marT="27432" marB="27432">
+                    <a:solidFill>
+                      <a:srgbClr val="F2F5FA"/>
+                    </a:solidFill>
+                  </a:tcPr>
+                </a:tc>
+              </a:tr>
+              <a:tr h="731519">
+                <a:tc>
+                  <a:txBody>
+                    <a:bodyPr wrap="square"/>
+                    <a:lstStyle/>
+                    <a:p>
+                      <a:r>
+                        <a:rPr sz="1200" b="1">
+                          <a:solidFill>
+                            <a:srgbClr val="1B5EA8"/>
+                          </a:solidFill>
+                          <a:latin typeface="Meiryo"/>
+                        </a:rPr>
+                        <a:t>報酬</a:t>
+                      </a:r>
+                    </a:p>
+                  </a:txBody>
+                  <a:tcPr marL="64008" marR="64008" marT="27432" marB="27432">
+                    <a:solidFill>
+                      <a:srgbClr val="FFFFFF"/>
+                    </a:solidFill>
+                  </a:tcPr>
+                </a:tc>
+                <a:tc>
+                  <a:txBody>
+                    <a:bodyPr wrap="square"/>
+                    <a:lstStyle/>
+                    <a:p>
+                      <a:r>
+                        <a:rPr sz="1200" b="0">
+                          <a:solidFill>
+                            <a:srgbClr val="222222"/>
+                          </a:solidFill>
+                          <a:latin typeface="Meiryo"/>
+                        </a:rPr>
+                        <a:t>中央維持 1/(1+4·lat²) − 0.3‖a‖</a:t>
+                      </a:r>
+                    </a:p>
+                  </a:txBody>
+                  <a:tcPr marL="64008" marR="64008" marT="27432" marB="27432">
+                    <a:solidFill>
+                      <a:srgbClr val="FFFFFF"/>
+                    </a:solidFill>
+                  </a:tcPr>
+                </a:tc>
+                <a:tc>
+                  <a:txBody>
+                    <a:bodyPr wrap="square"/>
+                    <a:lstStyle/>
+                    <a:p>
+                      <a:r>
+                        <a:rPr sz="1200" b="0">
+                          <a:solidFill>
+                            <a:srgbClr val="222222"/>
+                          </a:solidFill>
+                          <a:latin typeface="Meiryo"/>
+                        </a:rPr>
+                        <a:t>dense(速度+中央+前進)+sparse(周回)</a:t>
+                      </a:r>
+                    </a:p>
+                  </a:txBody>
+                  <a:tcPr marL="64008" marR="64008" marT="27432" marB="27432">
+                    <a:solidFill>
+                      <a:srgbClr val="FFFFFF"/>
+                    </a:solidFill>
+                  </a:tcPr>
+                </a:tc>
+                <a:tc>
+                  <a:txBody>
+                    <a:bodyPr wrap="square"/>
+                    <a:lstStyle/>
+                    <a:p>
+                      <a:r>
+                        <a:rPr sz="1200" b="0">
+                          <a:solidFill>
+                            <a:srgbClr val="222222"/>
+                          </a:solidFill>
+                          <a:latin typeface="Meiryo"/>
+                        </a:rPr>
+                        <a:t>周回に密な勾配 / 抜け道を経済的に不利に</a:t>
+                      </a:r>
+                    </a:p>
+                  </a:txBody>
+                  <a:tcPr marL="64008" marR="64008" marT="27432" marB="27432">
+                    <a:solidFill>
+                      <a:srgbClr val="FFFFFF"/>
+                    </a:solidFill>
+                  </a:tcPr>
+                </a:tc>
+              </a:tr>
+              <a:tr h="731519">
+                <a:tc>
+                  <a:txBody>
+                    <a:bodyPr wrap="square"/>
+                    <a:lstStyle/>
+                    <a:p>
+                      <a:r>
+                        <a:rPr sz="1200" b="1">
+                          <a:solidFill>
+                            <a:srgbClr val="1B5EA8"/>
+                          </a:solidFill>
+                          <a:latin typeface="Meiryo"/>
+                        </a:rPr>
+                        <a:t>観測</a:t>
+                      </a:r>
+                    </a:p>
+                  </a:txBody>
+                  <a:tcPr marL="64008" marR="64008" marT="27432" marB="27432">
+                    <a:solidFill>
+                      <a:srgbClr val="F2F5FA"/>
+                    </a:solidFill>
+                  </a:tcPr>
+                </a:tc>
+                <a:tc>
+                  <a:txBody>
+                    <a:bodyPr wrap="square"/>
+                    <a:lstStyle/>
+                    <a:p>
+                      <a:r>
+                        <a:rPr sz="1200" b="0">
+                          <a:solidFill>
+                            <a:srgbClr val="222222"/>
+                          </a:solidFill>
+                          <a:latin typeface="Meiryo"/>
+                        </a:rPr>
+                        <a:t>2ch (presence/on_road)、±18 m 対称</a:t>
+                      </a:r>
+                    </a:p>
+                  </a:txBody>
+                  <a:tcPr marL="64008" marR="64008" marT="27432" marB="27432">
+                    <a:solidFill>
+                      <a:srgbClr val="F2F5FA"/>
+                    </a:solidFill>
+                  </a:tcPr>
+                </a:tc>
+                <a:tc>
+                  <a:txBody>
+                    <a:bodyPr wrap="square"/>
+                    <a:lstStyle/>
+                    <a:p>
+                      <a:r>
+                        <a:rPr sz="1200" b="0">
+                          <a:solidFill>
+                            <a:srgbClr val="222222"/>
+                          </a:solidFill>
+                          <a:latin typeface="Meiryo"/>
+                        </a:rPr>
+                        <a:t>10ch、前方 27 m / 後方 9 m 非対称</a:t>
+                      </a:r>
+                    </a:p>
+                  </a:txBody>
+                  <a:tcPr marL="64008" marR="64008" marT="27432" marB="27432">
+                    <a:solidFill>
+                      <a:srgbClr val="F2F5FA"/>
+                    </a:solidFill>
+                  </a:tcPr>
+                </a:tc>
+                <a:tc>
+                  <a:txBody>
+                    <a:bodyPr wrap="square"/>
+                    <a:lstStyle/>
+                    <a:p>
+                      <a:r>
+                        <a:rPr sz="1200" b="0">
+                          <a:solidFill>
+                            <a:srgbClr val="222222"/>
+                          </a:solidFill>
+                          <a:latin typeface="Meiryo"/>
+                        </a:rPr>
+                        <a:t>相対速度・車線ずれを可視化 / 制動距離を視野に</a:t>
+                      </a:r>
+                    </a:p>
+                  </a:txBody>
+                  <a:tcPr marL="64008" marR="64008" marT="27432" marB="27432">
+                    <a:solidFill>
+                      <a:srgbClr val="F2F5FA"/>
+                    </a:solidFill>
+                  </a:tcPr>
+                </a:tc>
+              </a:tr>
+              <a:tr h="731519">
+                <a:tc>
+                  <a:txBody>
+                    <a:bodyPr wrap="square"/>
+                    <a:lstStyle/>
+                    <a:p>
+                      <a:r>
+                        <a:rPr sz="1200" b="1">
+                          <a:solidFill>
+                            <a:srgbClr val="1B5EA8"/>
+                          </a:solidFill>
+                          <a:latin typeface="Meiryo"/>
+                        </a:rPr>
+                        <a:t>トラック</a:t>
+                      </a:r>
+                    </a:p>
+                  </a:txBody>
+                  <a:tcPr marL="64008" marR="64008" marT="27432" marB="27432">
+                    <a:solidFill>
+                      <a:srgbClr val="FFFFFF"/>
+                    </a:solidFill>
+                  </a:tcPr>
+                </a:tc>
+                <a:tc>
+                  <a:txBody>
+                    <a:bodyPr wrap="square"/>
+                    <a:lstStyle/>
+                    <a:p>
+                      <a:r>
+                        <a:rPr sz="1200" b="0">
+                          <a:solidFill>
+                            <a:srgbClr val="222222"/>
+                          </a:solidFill>
+                          <a:latin typeface="Meiryo"/>
+                        </a:rPr>
+                        <a:t>単一レイアウト、NPC 1 台</a:t>
+                      </a:r>
+                    </a:p>
+                  </a:txBody>
+                  <a:tcPr marL="64008" marR="64008" marT="27432" marB="27432">
+                    <a:solidFill>
+                      <a:srgbClr val="FFFFFF"/>
+                    </a:solidFill>
+                  </a:tcPr>
+                </a:tc>
+                <a:tc>
+                  <a:txBody>
+                    <a:bodyPr wrap="square"/>
+                    <a:lstStyle/>
+                    <a:p>
+                      <a:r>
+                        <a:rPr sz="1200" b="0">
+                          <a:solidFill>
+                            <a:srgbClr val="222222"/>
+                          </a:solidFill>
+                          <a:latin typeface="Meiryo"/>
+                        </a:rPr>
+                        <a:t>5 種 + random、NPC は P2 で追加</a:t>
+                      </a:r>
+                    </a:p>
+                  </a:txBody>
+                  <a:tcPr marL="64008" marR="64008" marT="27432" marB="27432">
+                    <a:solidFill>
+                      <a:srgbClr val="FFFFFF"/>
+                    </a:solidFill>
+                  </a:tcPr>
+                </a:tc>
+                <a:tc>
+                  <a:txBody>
+                    <a:bodyPr wrap="square"/>
+                    <a:lstStyle/>
+                    <a:p>
+                      <a:r>
+                        <a:rPr sz="1200" b="0">
+                          <a:solidFill>
+                            <a:srgbClr val="222222"/>
+                          </a:solidFill>
+                          <a:latin typeface="Meiryo"/>
+                        </a:rPr>
+                        <a:t>ドメインランダム化で汎化を補強</a:t>
+                      </a:r>
+                    </a:p>
+                  </a:txBody>
+                  <a:tcPr marL="64008" marR="64008" marT="27432" marB="27432">
+                    <a:solidFill>
+                      <a:srgbClr val="FFFFFF"/>
+                    </a:solidFill>
+                  </a:tcPr>
+                </a:tc>
+              </a:tr>
+            </a:tbl>
+          </a:graphicData>
+        </a:graphic>
+      </p:graphicFrame>
     </p:spTree>
   </p:cSld>
   <p:clrMapOvr>

--- a/docs/CircuitAgents_intro_ja.pptx
+++ b/docs/CircuitAgents_intro_ja.pptx
@@ -26,6 +26,7 @@
     <p:sldId id="274" r:id="rId26"/>
     <p:sldId id="275" r:id="rId27"/>
     <p:sldId id="276" r:id="rId28"/>
+    <p:sldId id="277" r:id="rId29"/>
   </p:sldIdLst>
   <p:sldSz cx="12191695" cy="6858000" type="screen4x3"/>
   <p:notesSz cx="6858000" cy="9144000"/>
@@ -802,7 +803,7 @@
           <a:lstStyle/>
           <a:p>
             <a:r>
-              <a:t>第四の変更、観測です。2 チャネルから 10 チャネルに拡張しました。各チャネルの意味を説明します。presence は車がいるセルに 1。on_road はレーン中心線が通るセルに 1 で、塗りつぶした路面マスクではない点が移植時の要注意です。x, y, vx, vy は他車の自車相対の位置と速度で、値はトラック座標系のまま、セルの位置だけが自車向きに回転します。cos_h, sin_h は各車の絶対進行方向。lat_off は最寄りレーン中心からの横ずれ、ang_off はレーン方向との角度差で、この 2 つが車線維持の主信号です。features_range は正規化の分母で、例えば vx の ±20 m/s は「±20 を ±1 に写像する」という意味です。ここに km/h の値を入れると 3.6 倍されて飽和する、という単位事故がデプロイで最も起きやすい罠です。視野は前方 27 m・後方 9 m の非対称で、27 m は制動距離 25.6 m から逆算しています。右の軌跡でヘアピン手前の減速開始位置がちょうど視野に対応しているのが分かります。</a:t>
+              <a:t>実際に使った設定値を左右の表にまとめます。左が報酬の重み、右がシミュレーションと行動・観測です。報酬は中央維持を基礎に、速度と前進投影で『前へ速く』を作り、後退・停止・壁擦りに離散ペナルティ、チェックポイントとラップは生単位で加算します。全項を合成したあと lmap で [0,1] に正規化し、範囲 [−3,3] は通常ステップの上下限 ±2.8 を覆うように選んでいます。右側、物理は 15 Hz・意思決定は 5 Hz で 1 アクションを 3 回保持。加速度は ±5 m/s²、舵角は ±π/6。壁は停止モードで摩擦 0.6、7 秒接触で終端。これらの定数は C# 側にも複製されるため、変更時は 4 点セットの同期が必要です。</a:t>
             </a:r>
           </a:p>
         </p:txBody>
@@ -872,7 +873,7 @@
           <a:lstStyle/>
           <a:p>
             <a:r>
-              <a:t>第五の変更、トラックです。oval と stadium が基礎、rect が 90 度の反復、chicane が左右切り返しと最小半径 10 m のキンク、fast がメインの難コース。track を random にするとエピソード毎に再抽選され、これはドメインランダマイゼーションの一種です。ただし汎化の本質は観測の帰納バイアス側にあり、fast 単体学習の方策も未見 4 コースをゼロショットで走ります。各トラックは C# プリセットと JSON に複製され、検証ハーネスが幾何一致を自動チェックします。</a:t>
+              <a:t>第四の変更、観測です。2 チャネルから 10 チャネルに拡張しました。各チャネルの意味を説明します。presence は車がいるセルに 1。on_road はレーン中心線が通るセルに 1 で、塗りつぶした路面マスクではない点が移植時の要注意です。x, y, vx, vy は他車の自車相対の位置と速度で、値はトラック座標系のまま、セルの位置だけが自車向きに回転します。cos_h, sin_h は各車の絶対進行方向。lat_off は最寄りレーン中心からの横ずれ、ang_off はレーン方向との角度差で、この 2 つが車線維持の主信号です。features_range は正規化の分母で、例えば vx の ±20 m/s は「±20 を ±1 に写像する」という意味です。ここに km/h の値を入れると 3.6 倍されて飽和する、という単位事故がデプロイで最も起きやすい罠です。視野は前方 27 m・後方 9 m の非対称で、27 m は制動距離 25.6 m から逆算しています。右の軌跡でヘアピン手前の減速開始位置がちょうど視野に対応しているのが分かります。</a:t>
             </a:r>
           </a:p>
         </p:txBody>
@@ -942,7 +943,7 @@
           <a:lstStyle/>
           <a:p>
             <a:r>
-              <a:t>学習の全体像です。フェーズ 1 で他車なしのレーン追従、フェーズ 2 で NPC を入れて学習率を下げ追い越しを学習します。特徴抽出はカスタム CNN で、初期方策のスロットルバイアスを +0.4 に手動シフトします。ガウス方策の平均が 0 のままだと前進と後退が等確率で、前進報酬を発見する前に壁ペナルティばかり集めるためです。動作確認用の fast-dev はかつてエントロピー係数 0.10 で、何度回しても曲がれませんでした。エントロピーボーナスが「ランダムでいること」に支払われ、[0,1] に圧縮された報酬差に勝ってしまうためです。現在は本番ハイパラのまま 12 万ステップに短縮し、周回到達をエンドツーエンドで実測保証しています。</a:t>
+              <a:t>第五の変更、トラックです。oval と stadium が基礎、rect が 90 度の反復、chicane が左右切り返しと最小半径 10 m のキンク、fast がメインの難コース。track を random にするとエピソード毎に再抽選され、これはドメインランダマイゼーションの一種です。ただし汎化の本質は観測の帰納バイアス側にあり、fast 単体学習の方策も未見 4 コースをゼロショットで走ります。各トラックは C# プリセットと JSON に複製され、検証ハーネスが幾何一致を自動チェックします。</a:t>
             </a:r>
           </a:p>
         </p:txBody>
@@ -1012,7 +1013,7 @@
           <a:lstStyle/>
           <a:p>
             <a:r>
-              <a:t>PPO の設定判断です。オンポリシーを選んだのは、環境を頻繁に改造するためリプレイ経験がすぐ無効になること、シミュレータが軽く壁時計効率が支配的なことによります。クリップ範囲 0.15 は標準の 0.2 より狭く、壁ペナルティ由来の高分散アドバンテージでの方策崩壊を抑えます。GAE λ 0.98 は密報酬前提で分散側に寄せ、コーナー 1 つ分の信用割当を確保します。エントロピー係数は報酬スケールと結合する、が本プロジェクト最大の教訓の 1 つです。なお PPO はアドバンテージ正規化により報酬のアフィン変換に不変なので、[0,1] 正規化自体は学習のためではなく診断のための設計です。</a:t>
+              <a:t>学習の全体像です。フェーズ 1 で他車なしのレーン追従、フェーズ 2 で NPC を入れて学習率を下げ追い越しを学習します。特徴抽出はカスタム CNN で、初期方策のスロットルバイアスを +0.4 に手動シフトします。ガウス方策の平均が 0 のままだと前進と後退が等確率で、前進報酬を発見する前に壁ペナルティばかり集めるためです。動作確認用の fast-dev はかつてエントロピー係数 0.10 で、何度回しても曲がれませんでした。エントロピーボーナスが「ランダムでいること」に支払われ、[0,1] に圧縮された報酬差に勝ってしまうためです。現在は本番ハイパラのまま 12 万ステップに短縮し、周回到達をエンドツーエンドで実測保証しています。</a:t>
             </a:r>
           </a:p>
         </p:txBody>
@@ -1082,7 +1083,7 @@
           <a:lstStyle/>
           <a:p>
             <a:r>
-              <a:t>ここは正直に、シミュレータが実ゲームから何を省いているかの一覧です。車両動力学では、タイヤが線形モデルでグリップ飽和がありません。実車はスリップ角が深くなると横力が頭打ちになりますが、シムでは増え続けます。質量は 1 kg の正規化値で、荷重移動もサスもない。加速度は直接指令で、エンジン特性・ギア・空気抵抗・転がり抵抗がありません。つまりシムの車は惰性で減速しない。壁は速度を消す理想化された壁で、実ゲームの衝突インパルスや車体の回転、ダメージはモデル化していません。壁摩擦 0.6 も実測合わせが必要な仮の値です。ステアは瞬時に舵角が立つ理想アクチュエータ。タイミング面では、5 Hz の等間隔意思決定を仮定しており、フレーム時間の揺らぎや推論レイテンシ 1 フレーム分は学習に含まれていません。地形も 2D 平面で、縁石・バンク・高低差・路面 μ の変化はありません。</a:t>
+              <a:t>PPO の設定判断です。オンポリシーを選んだのは、環境を頻繁に改造するためリプレイ経験がすぐ無効になること、シミュレータが軽く壁時計効率が支配的なことによります。クリップ範囲 0.15 は標準の 0.2 より狭く、壁ペナルティ由来の高分散アドバンテージでの方策崩壊を抑えます。GAE λ 0.98 は密報酬前提で分散側に寄せ、コーナー 1 つ分の信用割当を確保します。エントロピー係数は報酬スケールと結合する、が本プロジェクト最大の教訓の 1 つです。なお PPO はアドバンテージ正規化により報酬のアフィン変換に不変なので、[0,1] 正規化自体は学習のためではなく診断のための設計です。</a:t>
             </a:r>
           </a:p>
         </p:txBody>
@@ -1152,7 +1153,7 @@
           <a:lstStyle/>
           <a:p>
             <a:r>
-              <a:t>ギャップへの対処は二層です。第一層、消せるギャップは移植の数値一致で消す。観測ビルダーはビット一致、車両物理は 1e-7 一致で C# に移植済みなので、『移植したら挙動が変わった』という自由度は存在しません。第二層、実ゲーム固有の動力学差は方策を再学習せず、デプロイ側のアクションフィルタで吸収します。EMA 平滑化は観測の 3 m 量子化由来のステア蛇行を消し、実測で符号反転が 1/3 になります。CorneringLimiter はステア速度制限と、曲率から計算した限界速度超過に比例する弱いブレーキで、グリップ飽和がないシム方策の過信を抑えます。StuckRecovery は移動距離ベースで壁刺さりを検出しバックを指示します。フィルタは閉ループ特性を変えるため、シミュレータ内で同じフィルタを通した評価で周回数が落ちないことを確認しています。それでも残る差が大きければ、壁摩擦・加速度レンジなどを実ゲーム実測に合わせて環境側を再調整し、再学習する道があります。</a:t>
+              <a:t>ここは正直に、シミュレータが実ゲームから何を省いているかの一覧です。車両動力学では、タイヤが線形モデルでグリップ飽和がありません。実車はスリップ角が深くなると横力が頭打ちになりますが、シムでは増え続けます。質量は 1 kg の正規化値で、荷重移動もサスもない。加速度は直接指令で、エンジン特性・ギア・空気抵抗・転がり抵抗がありません。つまりシムの車は惰性で減速しない。壁は速度を消す理想化された壁で、実ゲームの衝突インパルスや車体の回転、ダメージはモデル化していません。壁摩擦 0.6 も実測合わせが必要な仮の値です。ステアは瞬時に舵角が立つ理想アクチュエータ。タイミング面では、5 Hz の等間隔意思決定を仮定しており、フレーム時間の揺らぎや推論レイテンシ 1 フレーム分は学習に含まれていません。地形も 2D 平面で、縁石・バンク・高低差・路面 μ の変化はありません。</a:t>
             </a:r>
           </a:p>
         </p:txBody>
@@ -1222,7 +1223,7 @@
           <a:lstStyle/>
           <a:p>
             <a:r>
-              <a:t>使い方です。環境構築は 1 行。リポジトリ直下の requirements.txt は旧スタック用なので使いません。ノートブックは task2 が fast 専用、task3 が汎化学習。FAST_DEV_RUN で短縮と本番を切り替えます。学習の判断材料として、eval 報酬を周回数に換算するヤードスティックセルがあり、TensorBoard の数字だけで局所解か周回かを判別できます。スライドの図と動画を生成・保存するセルもノートブック内にあります。</a:t>
+              <a:t>ギャップへの対処は二層です。第一層、消せるギャップは移植の数値一致で消す。観測ビルダーはビット一致、車両物理は 1e-7 一致で C# に移植済みなので、『移植したら挙動が変わった』という自由度は存在しません。第二層、実ゲーム固有の動力学差は方策を再学習せず、デプロイ側のアクションフィルタで吸収します。EMA 平滑化は観測の 3 m 量子化由来のステア蛇行を消し、実測で符号反転が 1/3 になります。CorneringLimiter はステア速度制限と、曲率から計算した限界速度超過に比例する弱いブレーキで、グリップ飽和がないシム方策の過信を抑えます。StuckRecovery は移動距離ベースで壁刺さりを検出しバックを指示します。フィルタは閉ループ特性を変えるため、シミュレータ内で同じフィルタを通した評価で周回数が落ちないことを確認しています。それでも残る差が大きければ、壁摩擦・加速度レンジなどを実ゲーム実測に合わせて環境側を再調整し、再学習する道があります。</a:t>
             </a:r>
           </a:p>
         </p:txBody>
@@ -1362,7 +1363,7 @@
           <a:lstStyle/>
           <a:p>
             <a:r>
-              <a:t>エクスポートは export_onnx.py で、モード 3 のエンジン用 NHWC 版が推奨です。C# ビルダーは H×W×C の平坦配列を出すため、channels-first 版に入れるとチャネルが混ざり、スロットル 0.4・ステア 0.2 程度のほぼ一定出力に退化します。この症状は実際にデバッグで踏んだので、症状として覚えてください。トラックや観測を変えたらexport_track_json.py で C# 側の正解データを再生成し検証ハーネスを回します。レンジ等の定数は C# に意図的に複製されているので、変更時は 4 点セットを忘れずに。</a:t>
+              <a:t>使い方です。環境構築は 1 行。リポジトリ直下の requirements.txt は旧スタック用なので使いません。ノートブックは task2 が fast 専用、task3 が汎化学習。FAST_DEV_RUN で短縮と本番を切り替えます。学習の判断材料として、eval 報酬を周回数に換算するヤードスティックセルがあり、TensorBoard の数字だけで局所解か周回かを判別できます。スライドの図と動画を生成・保存するセルもノートブック内にあります。</a:t>
             </a:r>
           </a:p>
         </p:txBody>
@@ -1388,6 +1389,76 @@
 </file>
 
 <file path=ppt/notesSlides/notesSlide21.xml><?xml version="1.0" encoding="utf-8"?>
+<p:notes xmlns:a="http://schemas.openxmlformats.org/drawingml/2006/main" xmlns:p="http://schemas.openxmlformats.org/presentationml/2006/main" xmlns:r="http://schemas.openxmlformats.org/officeDocument/2006/relationships">
+  <p:cSld>
+    <p:spTree>
+      <p:nvGrpSpPr>
+        <p:cNvPr id="1" name=""/>
+        <p:cNvGrpSpPr/>
+        <p:nvPr/>
+      </p:nvGrpSpPr>
+      <p:grpSpPr>
+        <a:xfrm>
+          <a:off x="0" y="0"/>
+          <a:ext cx="0" cy="0"/>
+          <a:chOff x="0" y="0"/>
+          <a:chExt cx="0" cy="0"/>
+        </a:xfrm>
+      </p:grpSpPr>
+      <p:sp>
+        <p:nvSpPr>
+          <p:cNvPr id="2" name="Slide Image Placeholder 1"/>
+          <p:cNvSpPr>
+            <a:spLocks noGrp="1"/>
+          </p:cNvSpPr>
+          <p:nvPr>
+            <p:ph type="sldImg" idx="2"/>
+          </p:nvPr>
+        </p:nvSpPr>
+        <p:spPr/>
+      </p:sp>
+      <p:sp>
+        <p:nvSpPr>
+          <p:cNvPr id="3" name="Notes Placeholder 2"/>
+          <p:cNvSpPr>
+            <a:spLocks noGrp="1"/>
+          </p:cNvSpPr>
+          <p:nvPr>
+            <p:ph type="body" idx="3" sz="quarter"/>
+          </p:nvPr>
+        </p:nvSpPr>
+        <p:spPr/>
+        <p:txBody>
+          <a:bodyPr/>
+          <a:lstStyle/>
+          <a:p>
+            <a:r>
+              <a:t>エクスポートは export_onnx.py で、モード 3 のエンジン用 NHWC 版が推奨です。C# ビルダーは H×W×C の平坦配列を出すため、channels-first 版に入れるとチャネルが混ざり、スロットル 0.4・ステア 0.2 程度のほぼ一定出力に退化します。この症状は実際にデバッグで踏んだので、症状として覚えてください。トラックや観測を変えたらexport_track_json.py で C# 側の正解データを再生成し検証ハーネスを回します。レンジ等の定数は C# に意図的に複製されているので、変更時は 4 点セットを忘れずに。</a:t>
+            </a:r>
+          </a:p>
+        </p:txBody>
+      </p:sp>
+      <p:sp>
+        <p:nvSpPr>
+          <p:cNvPr id="4" name="Slide Number Placeholder 3"/>
+          <p:cNvSpPr>
+            <a:spLocks noGrp="1"/>
+          </p:cNvSpPr>
+          <p:nvPr>
+            <p:ph type="sldNum" idx="5" sz="quarter"/>
+          </p:nvPr>
+        </p:nvSpPr>
+        <p:spPr/>
+      </p:sp>
+    </p:spTree>
+  </p:cSld>
+  <p:clrMapOvr>
+    <a:masterClrMapping/>
+  </p:clrMapOvr>
+</p:notes>
+</file>
+
+<file path=ppt/notesSlides/notesSlide22.xml><?xml version="1.0" encoding="utf-8"?>
 <p:notes xmlns:a="http://schemas.openxmlformats.org/drawingml/2006/main" xmlns:p="http://schemas.openxmlformats.org/presentationml/2006/main" xmlns:r="http://schemas.openxmlformats.org/officeDocument/2006/relationships">
   <p:cSld>
     <p:spTree>
@@ -5704,6 +5775,1030 @@
                 </a:solidFill>
                 <a:latin typeface="Meiryo"/>
               </a:rPr>
+              <a:t>設定リファレンス — 報酬とシミュレーションの実値</a:t>
+            </a:r>
+          </a:p>
+        </p:txBody>
+      </p:sp>
+      <p:graphicFrame>
+        <p:nvGraphicFramePr>
+          <p:cNvPr id="3" name="Table 2"/>
+          <p:cNvGraphicFramePr>
+            <a:graphicFrameLocks noGrp="1"/>
+          </p:cNvGraphicFramePr>
+          <p:nvPr/>
+        </p:nvGraphicFramePr>
+        <p:xfrm>
+          <a:off x="365760" y="1280160"/>
+          <a:ext cx="5623560" cy="5029200"/>
+        </p:xfrm>
+        <a:graphic>
+          <a:graphicData uri="http://schemas.openxmlformats.org/drawingml/2006/table">
+            <a:tbl>
+              <a:tblPr firstRow="1" bandRow="1">
+                <a:tableStyleId>{5C22544A-7EE6-4342-B048-85BDC9FD1C3A}</a:tableStyleId>
+              </a:tblPr>
+              <a:tblGrid>
+                <a:gridCol w="2834640"/>
+                <a:gridCol w="2788920"/>
+              </a:tblGrid>
+              <a:tr h="502920">
+                <a:tc>
+                  <a:txBody>
+                    <a:bodyPr wrap="square"/>
+                    <a:lstStyle/>
+                    <a:p>
+                      <a:r>
+                        <a:rPr sz="1300" b="1">
+                          <a:solidFill>
+                            <a:srgbClr val="FFFFFF"/>
+                          </a:solidFill>
+                          <a:latin typeface="Meiryo"/>
+                        </a:rPr>
+                        <a:t>報酬の重み</a:t>
+                      </a:r>
+                    </a:p>
+                  </a:txBody>
+                  <a:tcPr marL="64008" marR="64008" marT="27432" marB="27432">
+                    <a:solidFill>
+                      <a:srgbClr val="1B5EA8"/>
+                    </a:solidFill>
+                  </a:tcPr>
+                </a:tc>
+                <a:tc>
+                  <a:txBody>
+                    <a:bodyPr wrap="square"/>
+                    <a:lstStyle/>
+                    <a:p>
+                      <a:r>
+                        <a:rPr sz="1300" b="1">
+                          <a:solidFill>
+                            <a:srgbClr val="FFFFFF"/>
+                          </a:solidFill>
+                          <a:latin typeface="Meiryo"/>
+                        </a:rPr>
+                        <a:t>値 / 範囲寄与</a:t>
+                      </a:r>
+                    </a:p>
+                  </a:txBody>
+                  <a:tcPr marL="64008" marR="64008" marT="27432" marB="27432">
+                    <a:solidFill>
+                      <a:srgbClr val="1B5EA8"/>
+                    </a:solidFill>
+                  </a:tcPr>
+                </a:tc>
+              </a:tr>
+              <a:tr h="502920">
+                <a:tc>
+                  <a:txBody>
+                    <a:bodyPr wrap="square"/>
+                    <a:lstStyle/>
+                    <a:p>
+                      <a:r>
+                        <a:rPr sz="1200" b="1">
+                          <a:solidFill>
+                            <a:srgbClr val="1B5EA8"/>
+                          </a:solidFill>
+                          <a:latin typeface="Meiryo"/>
+                        </a:rPr>
+                        <a:t>中央維持 1/(1+6·lat²)</a:t>
+                      </a:r>
+                    </a:p>
+                  </a:txBody>
+                  <a:tcPr marL="64008" marR="64008" marT="27432" marB="27432">
+                    <a:solidFill>
+                      <a:srgbClr val="F2F5FA"/>
+                    </a:solidFill>
+                  </a:tcPr>
+                </a:tc>
+                <a:tc>
+                  <a:txBody>
+                    <a:bodyPr wrap="square"/>
+                    <a:lstStyle/>
+                    <a:p>
+                      <a:r>
+                        <a:rPr sz="1200" b="0">
+                          <a:solidFill>
+                            <a:srgbClr val="222222"/>
+                          </a:solidFill>
+                          <a:latin typeface="Meiryo"/>
+                        </a:rPr>
+                        <a:t>重み 1.0 → [0, +1]</a:t>
+                      </a:r>
+                    </a:p>
+                  </a:txBody>
+                  <a:tcPr marL="64008" marR="64008" marT="27432" marB="27432">
+                    <a:solidFill>
+                      <a:srgbClr val="F2F5FA"/>
+                    </a:solidFill>
+                  </a:tcPr>
+                </a:tc>
+              </a:tr>
+              <a:tr h="502920">
+                <a:tc>
+                  <a:txBody>
+                    <a:bodyPr wrap="square"/>
+                    <a:lstStyle/>
+                    <a:p>
+                      <a:r>
+                        <a:rPr sz="1200" b="1">
+                          <a:solidFill>
+                            <a:srgbClr val="1B5EA8"/>
+                          </a:solidFill>
+                          <a:latin typeface="Meiryo"/>
+                        </a:rPr>
+                        <a:t>速度 (÷16 m/s)</a:t>
+                      </a:r>
+                    </a:p>
+                  </a:txBody>
+                  <a:tcPr marL="64008" marR="64008" marT="27432" marB="27432">
+                    <a:solidFill>
+                      <a:srgbClr val="FFFFFF"/>
+                    </a:solidFill>
+                  </a:tcPr>
+                </a:tc>
+                <a:tc>
+                  <a:txBody>
+                    <a:bodyPr wrap="square"/>
+                    <a:lstStyle/>
+                    <a:p>
+                      <a:r>
+                        <a:rPr sz="1200" b="0">
+                          <a:solidFill>
+                            <a:srgbClr val="222222"/>
+                          </a:solidFill>
+                          <a:latin typeface="Meiryo"/>
+                        </a:rPr>
+                        <a:t>1.0 → [−1, +1]</a:t>
+                      </a:r>
+                    </a:p>
+                  </a:txBody>
+                  <a:tcPr marL="64008" marR="64008" marT="27432" marB="27432">
+                    <a:solidFill>
+                      <a:srgbClr val="FFFFFF"/>
+                    </a:solidFill>
+                  </a:tcPr>
+                </a:tc>
+              </a:tr>
+              <a:tr h="502920">
+                <a:tc>
+                  <a:txBody>
+                    <a:bodyPr wrap="square"/>
+                    <a:lstStyle/>
+                    <a:p>
+                      <a:r>
+                        <a:rPr sz="1200" b="1">
+                          <a:solidFill>
+                            <a:srgbClr val="1B5EA8"/>
+                          </a:solidFill>
+                          <a:latin typeface="Meiryo"/>
+                        </a:rPr>
+                        <a:t>前進速度投影</a:t>
+                      </a:r>
+                    </a:p>
+                  </a:txBody>
+                  <a:tcPr marL="64008" marR="64008" marT="27432" marB="27432">
+                    <a:solidFill>
+                      <a:srgbClr val="F2F5FA"/>
+                    </a:solidFill>
+                  </a:tcPr>
+                </a:tc>
+                <a:tc>
+                  <a:txBody>
+                    <a:bodyPr wrap="square"/>
+                    <a:lstStyle/>
+                    <a:p>
+                      <a:r>
+                        <a:rPr sz="1200" b="0">
+                          <a:solidFill>
+                            <a:srgbClr val="222222"/>
+                          </a:solidFill>
+                          <a:latin typeface="Meiryo"/>
+                        </a:rPr>
+                        <a:t>0.8 → [−0.4, +0.8]</a:t>
+                      </a:r>
+                    </a:p>
+                  </a:txBody>
+                  <a:tcPr marL="64008" marR="64008" marT="27432" marB="27432">
+                    <a:solidFill>
+                      <a:srgbClr val="F2F5FA"/>
+                    </a:solidFill>
+                  </a:tcPr>
+                </a:tc>
+              </a:tr>
+              <a:tr h="502920">
+                <a:tc>
+                  <a:txBody>
+                    <a:bodyPr wrap="square"/>
+                    <a:lstStyle/>
+                    <a:p>
+                      <a:r>
+                        <a:rPr sz="1200" b="1">
+                          <a:solidFill>
+                            <a:srgbClr val="1B5EA8"/>
+                          </a:solidFill>
+                          <a:latin typeface="Meiryo"/>
+                        </a:rPr>
+                        <a:t>操舵 / ジャーク罰</a:t>
+                      </a:r>
+                    </a:p>
+                  </a:txBody>
+                  <a:tcPr marL="64008" marR="64008" marT="27432" marB="27432">
+                    <a:solidFill>
+                      <a:srgbClr val="FFFFFF"/>
+                    </a:solidFill>
+                  </a:tcPr>
+                </a:tc>
+                <a:tc>
+                  <a:txBody>
+                    <a:bodyPr wrap="square"/>
+                    <a:lstStyle/>
+                    <a:p>
+                      <a:r>
+                        <a:rPr sz="1200" b="0">
+                          <a:solidFill>
+                            <a:srgbClr val="222222"/>
+                          </a:solidFill>
+                          <a:latin typeface="Meiryo"/>
+                        </a:rPr>
+                        <a:t>0.10 / 0.20</a:t>
+                      </a:r>
+                    </a:p>
+                  </a:txBody>
+                  <a:tcPr marL="64008" marR="64008" marT="27432" marB="27432">
+                    <a:solidFill>
+                      <a:srgbClr val="FFFFFF"/>
+                    </a:solidFill>
+                  </a:tcPr>
+                </a:tc>
+              </a:tr>
+              <a:tr h="502920">
+                <a:tc>
+                  <a:txBody>
+                    <a:bodyPr wrap="square"/>
+                    <a:lstStyle/>
+                    <a:p>
+                      <a:r>
+                        <a:rPr sz="1200" b="1">
+                          <a:solidFill>
+                            <a:srgbClr val="1B5EA8"/>
+                          </a:solidFill>
+                          <a:latin typeface="Meiryo"/>
+                        </a:rPr>
+                        <a:t>後退 / 停止罰</a:t>
+                      </a:r>
+                    </a:p>
+                  </a:txBody>
+                  <a:tcPr marL="64008" marR="64008" marT="27432" marB="27432">
+                    <a:solidFill>
+                      <a:srgbClr val="F2F5FA"/>
+                    </a:solidFill>
+                  </a:tcPr>
+                </a:tc>
+                <a:tc>
+                  <a:txBody>
+                    <a:bodyPr wrap="square"/>
+                    <a:lstStyle/>
+                    <a:p>
+                      <a:r>
+                        <a:rPr sz="1200" b="0">
+                          <a:solidFill>
+                            <a:srgbClr val="222222"/>
+                          </a:solidFill>
+                          <a:latin typeface="Meiryo"/>
+                        </a:rPr>
+                        <a:t>0.80 / 0.80 (15 step 免除)</a:t>
+                      </a:r>
+                    </a:p>
+                  </a:txBody>
+                  <a:tcPr marL="64008" marR="64008" marT="27432" marB="27432">
+                    <a:solidFill>
+                      <a:srgbClr val="F2F5FA"/>
+                    </a:solidFill>
+                  </a:tcPr>
+                </a:tc>
+              </a:tr>
+              <a:tr h="502920">
+                <a:tc>
+                  <a:txBody>
+                    <a:bodyPr wrap="square"/>
+                    <a:lstStyle/>
+                    <a:p>
+                      <a:r>
+                        <a:rPr sz="1200" b="1">
+                          <a:solidFill>
+                            <a:srgbClr val="1B5EA8"/>
+                          </a:solidFill>
+                          <a:latin typeface="Meiryo"/>
+                        </a:rPr>
+                        <a:t>壁脱出 / 壁擦り</a:t>
+                      </a:r>
+                    </a:p>
+                  </a:txBody>
+                  <a:tcPr marL="64008" marR="64008" marT="27432" marB="27432">
+                    <a:solidFill>
+                      <a:srgbClr val="FFFFFF"/>
+                    </a:solidFill>
+                  </a:tcPr>
+                </a:tc>
+                <a:tc>
+                  <a:txBody>
+                    <a:bodyPr wrap="square"/>
+                    <a:lstStyle/>
+                    <a:p>
+                      <a:r>
+                        <a:rPr sz="1200" b="0">
+                          <a:solidFill>
+                            <a:srgbClr val="222222"/>
+                          </a:solidFill>
+                          <a:latin typeface="Meiryo"/>
+                        </a:rPr>
+                        <a:t>+0.4 / −0.6 (ゾーン 1 m)</a:t>
+                      </a:r>
+                    </a:p>
+                  </a:txBody>
+                  <a:tcPr marL="64008" marR="64008" marT="27432" marB="27432">
+                    <a:solidFill>
+                      <a:srgbClr val="FFFFFF"/>
+                    </a:solidFill>
+                  </a:tcPr>
+                </a:tc>
+              </a:tr>
+              <a:tr h="502920">
+                <a:tc>
+                  <a:txBody>
+                    <a:bodyPr wrap="square"/>
+                    <a:lstStyle/>
+                    <a:p>
+                      <a:r>
+                        <a:rPr sz="1200" b="1">
+                          <a:solidFill>
+                            <a:srgbClr val="1B5EA8"/>
+                          </a:solidFill>
+                          <a:latin typeface="Meiryo"/>
+                        </a:rPr>
+                        <a:t>CP / ラップ (生単位)</a:t>
+                      </a:r>
+                    </a:p>
+                  </a:txBody>
+                  <a:tcPr marL="64008" marR="64008" marT="27432" marB="27432">
+                    <a:solidFill>
+                      <a:srgbClr val="F2F5FA"/>
+                    </a:solidFill>
+                  </a:tcPr>
+                </a:tc>
+                <a:tc>
+                  <a:txBody>
+                    <a:bodyPr wrap="square"/>
+                    <a:lstStyle/>
+                    <a:p>
+                      <a:r>
+                        <a:rPr sz="1200" b="0">
+                          <a:solidFill>
+                            <a:srgbClr val="222222"/>
+                          </a:solidFill>
+                          <a:latin typeface="Meiryo"/>
+                        </a:rPr>
+                        <a:t>+1.0 / +2.0</a:t>
+                      </a:r>
+                    </a:p>
+                  </a:txBody>
+                  <a:tcPr marL="64008" marR="64008" marT="27432" marB="27432">
+                    <a:solidFill>
+                      <a:srgbClr val="F2F5FA"/>
+                    </a:solidFill>
+                  </a:tcPr>
+                </a:tc>
+              </a:tr>
+              <a:tr h="502920">
+                <a:tc>
+                  <a:txBody>
+                    <a:bodyPr wrap="square"/>
+                    <a:lstStyle/>
+                    <a:p>
+                      <a:r>
+                        <a:rPr sz="1200" b="1">
+                          <a:solidFill>
+                            <a:srgbClr val="1B5EA8"/>
+                          </a:solidFill>
+                          <a:latin typeface="Meiryo"/>
+                        </a:rPr>
+                        <a:t>衝突 (終端上書き)</a:t>
+                      </a:r>
+                    </a:p>
+                  </a:txBody>
+                  <a:tcPr marL="64008" marR="64008" marT="27432" marB="27432">
+                    <a:solidFill>
+                      <a:srgbClr val="FFFFFF"/>
+                    </a:solidFill>
+                  </a:tcPr>
+                </a:tc>
+                <a:tc>
+                  <a:txBody>
+                    <a:bodyPr wrap="square"/>
+                    <a:lstStyle/>
+                    <a:p>
+                      <a:r>
+                        <a:rPr sz="1200" b="0">
+                          <a:solidFill>
+                            <a:srgbClr val="222222"/>
+                          </a:solidFill>
+                          <a:latin typeface="Meiryo"/>
+                        </a:rPr>
+                        <a:t>−5.0</a:t>
+                      </a:r>
+                    </a:p>
+                  </a:txBody>
+                  <a:tcPr marL="64008" marR="64008" marT="27432" marB="27432">
+                    <a:solidFill>
+                      <a:srgbClr val="FFFFFF"/>
+                    </a:solidFill>
+                  </a:tcPr>
+                </a:tc>
+              </a:tr>
+              <a:tr h="502920">
+                <a:tc>
+                  <a:txBody>
+                    <a:bodyPr wrap="square"/>
+                    <a:lstStyle/>
+                    <a:p>
+                      <a:r>
+                        <a:rPr sz="1200" b="1">
+                          <a:solidFill>
+                            <a:srgbClr val="1B5EA8"/>
+                          </a:solidFill>
+                          <a:latin typeface="Meiryo"/>
+                        </a:rPr>
+                        <a:t>正規化</a:t>
+                      </a:r>
+                    </a:p>
+                  </a:txBody>
+                  <a:tcPr marL="64008" marR="64008" marT="27432" marB="27432">
+                    <a:solidFill>
+                      <a:srgbClr val="F2F5FA"/>
+                    </a:solidFill>
+                  </a:tcPr>
+                </a:tc>
+                <a:tc>
+                  <a:txBody>
+                    <a:bodyPr wrap="square"/>
+                    <a:lstStyle/>
+                    <a:p>
+                      <a:r>
+                        <a:rPr sz="1200" b="0">
+                          <a:solidFill>
+                            <a:srgbClr val="222222"/>
+                          </a:solidFill>
+                          <a:latin typeface="Meiryo"/>
+                        </a:rPr>
+                        <a:t>lmap [−3,3] → [0,1] → clip</a:t>
+                      </a:r>
+                    </a:p>
+                  </a:txBody>
+                  <a:tcPr marL="64008" marR="64008" marT="27432" marB="27432">
+                    <a:solidFill>
+                      <a:srgbClr val="F2F5FA"/>
+                    </a:solidFill>
+                  </a:tcPr>
+                </a:tc>
+              </a:tr>
+            </a:tbl>
+          </a:graphicData>
+        </a:graphic>
+      </p:graphicFrame>
+      <p:graphicFrame>
+        <p:nvGraphicFramePr>
+          <p:cNvPr id="4" name="Table 3"/>
+          <p:cNvGraphicFramePr>
+            <a:graphicFrameLocks noGrp="1"/>
+          </p:cNvGraphicFramePr>
+          <p:nvPr/>
+        </p:nvGraphicFramePr>
+        <p:xfrm>
+          <a:off x="6263640" y="1280160"/>
+          <a:ext cx="5577840" cy="5029200"/>
+        </p:xfrm>
+        <a:graphic>
+          <a:graphicData uri="http://schemas.openxmlformats.org/drawingml/2006/table">
+            <a:tbl>
+              <a:tblPr firstRow="1" bandRow="1">
+                <a:tableStyleId>{5C22544A-7EE6-4342-B048-85BDC9FD1C3A}</a:tableStyleId>
+              </a:tblPr>
+              <a:tblGrid>
+                <a:gridCol w="2606040"/>
+                <a:gridCol w="2971800"/>
+              </a:tblGrid>
+              <a:tr h="502920">
+                <a:tc>
+                  <a:txBody>
+                    <a:bodyPr wrap="square"/>
+                    <a:lstStyle/>
+                    <a:p>
+                      <a:r>
+                        <a:rPr sz="1300" b="1">
+                          <a:solidFill>
+                            <a:srgbClr val="FFFFFF"/>
+                          </a:solidFill>
+                          <a:latin typeface="Meiryo"/>
+                        </a:rPr>
+                        <a:t>シミュレーション / 行動 / 観測</a:t>
+                      </a:r>
+                    </a:p>
+                  </a:txBody>
+                  <a:tcPr marL="64008" marR="64008" marT="27432" marB="27432">
+                    <a:solidFill>
+                      <a:srgbClr val="1B5EA8"/>
+                    </a:solidFill>
+                  </a:tcPr>
+                </a:tc>
+                <a:tc>
+                  <a:txBody>
+                    <a:bodyPr wrap="square"/>
+                    <a:lstStyle/>
+                    <a:p>
+                      <a:r>
+                        <a:rPr sz="1300" b="1">
+                          <a:solidFill>
+                            <a:srgbClr val="FFFFFF"/>
+                          </a:solidFill>
+                          <a:latin typeface="Meiryo"/>
+                        </a:rPr>
+                        <a:t>値</a:t>
+                      </a:r>
+                    </a:p>
+                  </a:txBody>
+                  <a:tcPr marL="64008" marR="64008" marT="27432" marB="27432">
+                    <a:solidFill>
+                      <a:srgbClr val="1B5EA8"/>
+                    </a:solidFill>
+                  </a:tcPr>
+                </a:tc>
+              </a:tr>
+              <a:tr h="502920">
+                <a:tc>
+                  <a:txBody>
+                    <a:bodyPr wrap="square"/>
+                    <a:lstStyle/>
+                    <a:p>
+                      <a:r>
+                        <a:rPr sz="1200" b="1">
+                          <a:solidFill>
+                            <a:srgbClr val="1B5EA8"/>
+                          </a:solidFill>
+                          <a:latin typeface="Meiryo"/>
+                        </a:rPr>
+                        <a:t>物理 / 意思決定</a:t>
+                      </a:r>
+                    </a:p>
+                  </a:txBody>
+                  <a:tcPr marL="64008" marR="64008" marT="27432" marB="27432">
+                    <a:solidFill>
+                      <a:srgbClr val="F2F5FA"/>
+                    </a:solidFill>
+                  </a:tcPr>
+                </a:tc>
+                <a:tc>
+                  <a:txBody>
+                    <a:bodyPr wrap="square"/>
+                    <a:lstStyle/>
+                    <a:p>
+                      <a:r>
+                        <a:rPr sz="1200" b="0">
+                          <a:solidFill>
+                            <a:srgbClr val="222222"/>
+                          </a:solidFill>
+                          <a:latin typeface="Meiryo"/>
+                        </a:rPr>
+                        <a:t>15 Hz / 5 Hz (repeat 3)</a:t>
+                      </a:r>
+                    </a:p>
+                  </a:txBody>
+                  <a:tcPr marL="64008" marR="64008" marT="27432" marB="27432">
+                    <a:solidFill>
+                      <a:srgbClr val="F2F5FA"/>
+                    </a:solidFill>
+                  </a:tcPr>
+                </a:tc>
+              </a:tr>
+              <a:tr h="502920">
+                <a:tc>
+                  <a:txBody>
+                    <a:bodyPr wrap="square"/>
+                    <a:lstStyle/>
+                    <a:p>
+                      <a:r>
+                        <a:rPr sz="1200" b="1">
+                          <a:solidFill>
+                            <a:srgbClr val="1B5EA8"/>
+                          </a:solidFill>
+                          <a:latin typeface="Meiryo"/>
+                        </a:rPr>
+                        <a:t>制限速度</a:t>
+                      </a:r>
+                    </a:p>
+                  </a:txBody>
+                  <a:tcPr marL="64008" marR="64008" marT="27432" marB="27432">
+                    <a:solidFill>
+                      <a:srgbClr val="FFFFFF"/>
+                    </a:solidFill>
+                  </a:tcPr>
+                </a:tc>
+                <a:tc>
+                  <a:txBody>
+                    <a:bodyPr wrap="square"/>
+                    <a:lstStyle/>
+                    <a:p>
+                      <a:r>
+                        <a:rPr sz="1200" b="0">
+                          <a:solidFill>
+                            <a:srgbClr val="222222"/>
+                          </a:solidFill>
+                          <a:latin typeface="Meiryo"/>
+                        </a:rPr>
+                        <a:t>16 m/s</a:t>
+                      </a:r>
+                    </a:p>
+                  </a:txBody>
+                  <a:tcPr marL="64008" marR="64008" marT="27432" marB="27432">
+                    <a:solidFill>
+                      <a:srgbClr val="FFFFFF"/>
+                    </a:solidFill>
+                  </a:tcPr>
+                </a:tc>
+              </a:tr>
+              <a:tr h="502920">
+                <a:tc>
+                  <a:txBody>
+                    <a:bodyPr wrap="square"/>
+                    <a:lstStyle/>
+                    <a:p>
+                      <a:r>
+                        <a:rPr sz="1200" b="1">
+                          <a:solidFill>
+                            <a:srgbClr val="1B5EA8"/>
+                          </a:solidFill>
+                          <a:latin typeface="Meiryo"/>
+                        </a:rPr>
+                        <a:t>加速度レンジ</a:t>
+                      </a:r>
+                    </a:p>
+                  </a:txBody>
+                  <a:tcPr marL="64008" marR="64008" marT="27432" marB="27432">
+                    <a:solidFill>
+                      <a:srgbClr val="F2F5FA"/>
+                    </a:solidFill>
+                  </a:tcPr>
+                </a:tc>
+                <a:tc>
+                  <a:txBody>
+                    <a:bodyPr wrap="square"/>
+                    <a:lstStyle/>
+                    <a:p>
+                      <a:r>
+                        <a:rPr sz="1200" b="0">
+                          <a:solidFill>
+                            <a:srgbClr val="222222"/>
+                          </a:solidFill>
+                          <a:latin typeface="Meiryo"/>
+                        </a:rPr>
+                        <a:t>±5 m/s²</a:t>
+                      </a:r>
+                    </a:p>
+                  </a:txBody>
+                  <a:tcPr marL="64008" marR="64008" marT="27432" marB="27432">
+                    <a:solidFill>
+                      <a:srgbClr val="F2F5FA"/>
+                    </a:solidFill>
+                  </a:tcPr>
+                </a:tc>
+              </a:tr>
+              <a:tr h="502920">
+                <a:tc>
+                  <a:txBody>
+                    <a:bodyPr wrap="square"/>
+                    <a:lstStyle/>
+                    <a:p>
+                      <a:r>
+                        <a:rPr sz="1200" b="1">
+                          <a:solidFill>
+                            <a:srgbClr val="1B5EA8"/>
+                          </a:solidFill>
+                          <a:latin typeface="Meiryo"/>
+                        </a:rPr>
+                        <a:t>舵角レンジ</a:t>
+                      </a:r>
+                    </a:p>
+                  </a:txBody>
+                  <a:tcPr marL="64008" marR="64008" marT="27432" marB="27432">
+                    <a:solidFill>
+                      <a:srgbClr val="FFFFFF"/>
+                    </a:solidFill>
+                  </a:tcPr>
+                </a:tc>
+                <a:tc>
+                  <a:txBody>
+                    <a:bodyPr wrap="square"/>
+                    <a:lstStyle/>
+                    <a:p>
+                      <a:r>
+                        <a:rPr sz="1200" b="0">
+                          <a:solidFill>
+                            <a:srgbClr val="222222"/>
+                          </a:solidFill>
+                          <a:latin typeface="Meiryo"/>
+                        </a:rPr>
+                        <a:t>±π/6 (30°)</a:t>
+                      </a:r>
+                    </a:p>
+                  </a:txBody>
+                  <a:tcPr marL="64008" marR="64008" marT="27432" marB="27432">
+                    <a:solidFill>
+                      <a:srgbClr val="FFFFFF"/>
+                    </a:solidFill>
+                  </a:tcPr>
+                </a:tc>
+              </a:tr>
+              <a:tr h="502920">
+                <a:tc>
+                  <a:txBody>
+                    <a:bodyPr wrap="square"/>
+                    <a:lstStyle/>
+                    <a:p>
+                      <a:r>
+                        <a:rPr sz="1200" b="1">
+                          <a:solidFill>
+                            <a:srgbClr val="1B5EA8"/>
+                          </a:solidFill>
+                          <a:latin typeface="Meiryo"/>
+                        </a:rPr>
+                        <a:t>車両モデル</a:t>
+                      </a:r>
+                    </a:p>
+                  </a:txBody>
+                  <a:tcPr marL="64008" marR="64008" marT="27432" marB="27432">
+                    <a:solidFill>
+                      <a:srgbClr val="F2F5FA"/>
+                    </a:solidFill>
+                  </a:tcPr>
+                </a:tc>
+                <a:tc>
+                  <a:txBody>
+                    <a:bodyPr wrap="square"/>
+                    <a:lstStyle/>
+                    <a:p>
+                      <a:r>
+                        <a:rPr sz="1200" b="0">
+                          <a:solidFill>
+                            <a:srgbClr val="222222"/>
+                          </a:solidFill>
+                          <a:latin typeface="Meiryo"/>
+                        </a:rPr>
+                        <a:t>動的 Bicycle (RK4)</a:t>
+                      </a:r>
+                    </a:p>
+                  </a:txBody>
+                  <a:tcPr marL="64008" marR="64008" marT="27432" marB="27432">
+                    <a:solidFill>
+                      <a:srgbClr val="F2F5FA"/>
+                    </a:solidFill>
+                  </a:tcPr>
+                </a:tc>
+              </a:tr>
+              <a:tr h="502920">
+                <a:tc>
+                  <a:txBody>
+                    <a:bodyPr wrap="square"/>
+                    <a:lstStyle/>
+                    <a:p>
+                      <a:r>
+                        <a:rPr sz="1200" b="1">
+                          <a:solidFill>
+                            <a:srgbClr val="1B5EA8"/>
+                          </a:solidFill>
+                          <a:latin typeface="Meiryo"/>
+                        </a:rPr>
+                        <a:t>観測</a:t>
+                      </a:r>
+                    </a:p>
+                  </a:txBody>
+                  <a:tcPr marL="64008" marR="64008" marT="27432" marB="27432">
+                    <a:solidFill>
+                      <a:srgbClr val="FFFFFF"/>
+                    </a:solidFill>
+                  </a:tcPr>
+                </a:tc>
+                <a:tc>
+                  <a:txBody>
+                    <a:bodyPr wrap="square"/>
+                    <a:lstStyle/>
+                    <a:p>
+                      <a:r>
+                        <a:rPr sz="1200" b="0">
+                          <a:solidFill>
+                            <a:srgbClr val="222222"/>
+                          </a:solidFill>
+                          <a:latin typeface="Meiryo"/>
+                        </a:rPr>
+                        <a:t>10ch, 前27/後9/横±18 m, 3 m</a:t>
+                      </a:r>
+                    </a:p>
+                  </a:txBody>
+                  <a:tcPr marL="64008" marR="64008" marT="27432" marB="27432">
+                    <a:solidFill>
+                      <a:srgbClr val="FFFFFF"/>
+                    </a:solidFill>
+                  </a:tcPr>
+                </a:tc>
+              </a:tr>
+              <a:tr h="502920">
+                <a:tc>
+                  <a:txBody>
+                    <a:bodyPr wrap="square"/>
+                    <a:lstStyle/>
+                    <a:p>
+                      <a:r>
+                        <a:rPr sz="1200" b="1">
+                          <a:solidFill>
+                            <a:srgbClr val="1B5EA8"/>
+                          </a:solidFill>
+                          <a:latin typeface="Meiryo"/>
+                        </a:rPr>
+                        <a:t>壁</a:t>
+                      </a:r>
+                    </a:p>
+                  </a:txBody>
+                  <a:tcPr marL="64008" marR="64008" marT="27432" marB="27432">
+                    <a:solidFill>
+                      <a:srgbClr val="F2F5FA"/>
+                    </a:solidFill>
+                  </a:tcPr>
+                </a:tc>
+                <a:tc>
+                  <a:txBody>
+                    <a:bodyPr wrap="square"/>
+                    <a:lstStyle/>
+                    <a:p>
+                      <a:r>
+                        <a:rPr sz="1200" b="0">
+                          <a:solidFill>
+                            <a:srgbClr val="222222"/>
+                          </a:solidFill>
+                          <a:latin typeface="Meiryo"/>
+                        </a:rPr>
+                        <a:t>stop + 摩擦 0.6, 35 step 終端</a:t>
+                      </a:r>
+                    </a:p>
+                  </a:txBody>
+                  <a:tcPr marL="64008" marR="64008" marT="27432" marB="27432">
+                    <a:solidFill>
+                      <a:srgbClr val="F2F5FA"/>
+                    </a:solidFill>
+                  </a:tcPr>
+                </a:tc>
+              </a:tr>
+              <a:tr h="502920">
+                <a:tc>
+                  <a:txBody>
+                    <a:bodyPr wrap="square"/>
+                    <a:lstStyle/>
+                    <a:p>
+                      <a:r>
+                        <a:rPr sz="1200" b="1">
+                          <a:solidFill>
+                            <a:srgbClr val="1B5EA8"/>
+                          </a:solidFill>
+                          <a:latin typeface="Meiryo"/>
+                        </a:rPr>
+                        <a:t>エピソード長</a:t>
+                      </a:r>
+                    </a:p>
+                  </a:txBody>
+                  <a:tcPr marL="64008" marR="64008" marT="27432" marB="27432">
+                    <a:solidFill>
+                      <a:srgbClr val="FFFFFF"/>
+                    </a:solidFill>
+                  </a:tcPr>
+                </a:tc>
+                <a:tc>
+                  <a:txBody>
+                    <a:bodyPr wrap="square"/>
+                    <a:lstStyle/>
+                    <a:p>
+                      <a:r>
+                        <a:rPr sz="1200" b="0">
+                          <a:solidFill>
+                            <a:srgbClr val="222222"/>
+                          </a:solidFill>
+                          <a:latin typeface="Meiryo"/>
+                        </a:rPr>
+                        <a:t>800 s (評価 120/60 s)</a:t>
+                      </a:r>
+                    </a:p>
+                  </a:txBody>
+                  <a:tcPr marL="64008" marR="64008" marT="27432" marB="27432">
+                    <a:solidFill>
+                      <a:srgbClr val="FFFFFF"/>
+                    </a:solidFill>
+                  </a:tcPr>
+                </a:tc>
+              </a:tr>
+              <a:tr h="502920">
+                <a:tc>
+                  <a:txBody>
+                    <a:bodyPr wrap="square"/>
+                    <a:lstStyle/>
+                    <a:p>
+                      <a:r>
+                        <a:rPr sz="1200" b="1">
+                          <a:solidFill>
+                            <a:srgbClr val="1B5EA8"/>
+                          </a:solidFill>
+                          <a:latin typeface="Meiryo"/>
+                        </a:rPr>
+                        <a:t>路外</a:t>
+                      </a:r>
+                    </a:p>
+                  </a:txBody>
+                  <a:tcPr marL="64008" marR="64008" marT="27432" marB="27432">
+                    <a:solidFill>
+                      <a:srgbClr val="F2F5FA"/>
+                    </a:solidFill>
+                  </a:tcPr>
+                </a:tc>
+                <a:tc>
+                  <a:txBody>
+                    <a:bodyPr wrap="square"/>
+                    <a:lstStyle/>
+                    <a:p>
+                      <a:r>
+                        <a:rPr sz="1200" b="0">
+                          <a:solidFill>
+                            <a:srgbClr val="222222"/>
+                          </a:solidFill>
+                          <a:latin typeface="Meiryo"/>
+                        </a:rPr>
+                        <a:t>terminate_off_road=True</a:t>
+                      </a:r>
+                    </a:p>
+                  </a:txBody>
+                  <a:tcPr marL="64008" marR="64008" marT="27432" marB="27432">
+                    <a:solidFill>
+                      <a:srgbClr val="F2F5FA"/>
+                    </a:solidFill>
+                  </a:tcPr>
+                </a:tc>
+              </a:tr>
+            </a:tbl>
+          </a:graphicData>
+        </a:graphic>
+      </p:graphicFrame>
+    </p:spTree>
+  </p:cSld>
+  <p:clrMapOvr>
+    <a:masterClrMapping/>
+  </p:clrMapOvr>
+</p:sld>
+</file>
+
+<file path=ppt/slides/slide14.xml><?xml version="1.0" encoding="utf-8"?>
+<p:sld xmlns:a="http://schemas.openxmlformats.org/drawingml/2006/main" xmlns:p="http://schemas.openxmlformats.org/presentationml/2006/main" xmlns:r="http://schemas.openxmlformats.org/officeDocument/2006/relationships">
+  <p:cSld>
+    <p:spTree>
+      <p:nvGrpSpPr>
+        <p:cNvPr id="1" name=""/>
+        <p:cNvGrpSpPr/>
+        <p:nvPr/>
+      </p:nvGrpSpPr>
+      <p:grpSpPr/>
+      <p:sp>
+        <p:nvSpPr>
+          <p:cNvPr id="2" name="TextBox 1"/>
+          <p:cNvSpPr txBox="1"/>
+          <p:nvPr/>
+        </p:nvSpPr>
+        <p:spPr>
+          <a:xfrm>
+            <a:off x="457200" y="182880"/>
+            <a:ext cx="11247120" cy="731520"/>
+          </a:xfrm>
+          <a:prstGeom prst="rect">
+            <a:avLst/>
+          </a:prstGeom>
+          <a:noFill/>
+        </p:spPr>
+        <p:txBody>
+          <a:bodyPr wrap="none">
+            <a:spAutoFit/>
+          </a:bodyPr>
+          <a:lstStyle/>
+          <a:p>
+            <a:r>
+              <a:rPr sz="2700" b="1">
+                <a:solidFill>
+                  <a:srgbClr val="1B5EA8"/>
+                </a:solidFill>
+                <a:latin typeface="Meiryo"/>
+              </a:rPr>
               <a:t>進化 (4) 観測 — 10 チャネルの内訳と正規化レンジ</a:t>
             </a:r>
           </a:p>
@@ -5892,7 +6987,7 @@
 </p:sld>
 </file>
 
-<file path=ppt/slides/slide14.xml><?xml version="1.0" encoding="utf-8"?>
+<file path=ppt/slides/slide15.xml><?xml version="1.0" encoding="utf-8"?>
 <p:sld xmlns:a="http://schemas.openxmlformats.org/drawingml/2006/main" xmlns:p="http://schemas.openxmlformats.org/presentationml/2006/main" xmlns:r="http://schemas.openxmlformats.org/officeDocument/2006/relationships">
   <p:cSld>
     <p:spTree>
@@ -6007,7 +7102,7 @@
 </p:sld>
 </file>
 
-<file path=ppt/slides/slide15.xml><?xml version="1.0" encoding="utf-8"?>
+<file path=ppt/slides/slide16.xml><?xml version="1.0" encoding="utf-8"?>
 <p:sld xmlns:a="http://schemas.openxmlformats.org/drawingml/2006/main" xmlns:p="http://schemas.openxmlformats.org/presentationml/2006/main" xmlns:r="http://schemas.openxmlformats.org/officeDocument/2006/relationships">
   <p:cSld>
     <p:spTree>
@@ -6230,209 +7325,6 @@
                 <a:latin typeface="Meiryo"/>
               </a:rPr>
               <a:t>・EvalCallback の決定論的評価ベスト採用 (PPO は終盤退行あり / stochastic 評価は過小評価)</a:t>
-            </a:r>
-          </a:p>
-        </p:txBody>
-      </p:sp>
-    </p:spTree>
-  </p:cSld>
-  <p:clrMapOvr>
-    <a:masterClrMapping/>
-  </p:clrMapOvr>
-</p:sld>
-</file>
-
-<file path=ppt/slides/slide16.xml><?xml version="1.0" encoding="utf-8"?>
-<p:sld xmlns:a="http://schemas.openxmlformats.org/drawingml/2006/main" xmlns:p="http://schemas.openxmlformats.org/presentationml/2006/main" xmlns:r="http://schemas.openxmlformats.org/officeDocument/2006/relationships">
-  <p:cSld>
-    <p:spTree>
-      <p:nvGrpSpPr>
-        <p:cNvPr id="1" name=""/>
-        <p:cNvGrpSpPr/>
-        <p:nvPr/>
-      </p:nvGrpSpPr>
-      <p:grpSpPr/>
-      <p:sp>
-        <p:nvSpPr>
-          <p:cNvPr id="2" name="TextBox 1"/>
-          <p:cNvSpPr txBox="1"/>
-          <p:nvPr/>
-        </p:nvSpPr>
-        <p:spPr>
-          <a:xfrm>
-            <a:off x="457200" y="182880"/>
-            <a:ext cx="11247120" cy="731520"/>
-          </a:xfrm>
-          <a:prstGeom prst="rect">
-            <a:avLst/>
-          </a:prstGeom>
-          <a:noFill/>
-        </p:spPr>
-        <p:txBody>
-          <a:bodyPr wrap="none">
-            <a:spAutoFit/>
-          </a:bodyPr>
-          <a:lstStyle/>
-          <a:p>
-            <a:r>
-              <a:rPr sz="2700" b="1">
-                <a:solidFill>
-                  <a:srgbClr val="1B5EA8"/>
-                </a:solidFill>
-                <a:latin typeface="Meiryo"/>
-              </a:rPr>
-              <a:t>PPO ハイパーパラメータの設計判断 (専門家向け)</a:t>
-            </a:r>
-          </a:p>
-        </p:txBody>
-      </p:sp>
-      <p:sp>
-        <p:nvSpPr>
-          <p:cNvPr id="3" name="TextBox 2"/>
-          <p:cNvSpPr txBox="1"/>
-          <p:nvPr/>
-        </p:nvSpPr>
-        <p:spPr>
-          <a:xfrm>
-            <a:off x="548640" y="1188720"/>
-            <a:ext cx="11064240" cy="5486400"/>
-          </a:xfrm>
-          <a:prstGeom prst="rect">
-            <a:avLst/>
-          </a:prstGeom>
-          <a:noFill/>
-        </p:spPr>
-        <p:txBody>
-          <a:bodyPr wrap="square">
-            <a:spAutoFit/>
-          </a:bodyPr>
-          <a:lstStyle/>
-          <a:p>
-            <a:pPr>
-              <a:spcAft>
-                <a:spcPts val="600"/>
-              </a:spcAft>
-            </a:pPr>
-            <a:r>
-              <a:rPr sz="1600" b="1">
-                <a:solidFill>
-                  <a:srgbClr val="222222"/>
-                </a:solidFill>
-                <a:latin typeface="Meiryo"/>
-              </a:rPr>
-              <a:t>アルゴリズム選択</a:t>
-            </a:r>
-          </a:p>
-          <a:p>
-            <a:pPr lvl="1">
-              <a:spcAft>
-                <a:spcPts val="200"/>
-              </a:spcAft>
-            </a:pPr>
-            <a:r>
-              <a:rPr sz="1400" b="0">
-                <a:solidFill>
-                  <a:srgbClr val="595959"/>
-                </a:solidFill>
-                <a:latin typeface="Meiryo"/>
-              </a:rPr>
-              <a:t>・オンポリシー (PPO): 環境改造が頻繁 → 古い経験が即無効 / sim 軽量で wall-clock 優位</a:t>
-            </a:r>
-          </a:p>
-          <a:p>
-            <a:pPr>
-              <a:spcAft>
-                <a:spcPts val="600"/>
-              </a:spcAft>
-            </a:pPr>
-            <a:r>
-              <a:rPr sz="1600" b="1">
-                <a:solidFill>
-                  <a:srgbClr val="222222"/>
-                </a:solidFill>
-                <a:latin typeface="Meiryo"/>
-              </a:rPr>
-              <a:t>主要ハイパラ</a:t>
-            </a:r>
-          </a:p>
-          <a:p>
-            <a:pPr lvl="1">
-              <a:spcAft>
-                <a:spcPts val="200"/>
-              </a:spcAft>
-            </a:pPr>
-            <a:r>
-              <a:rPr sz="1400" b="0">
-                <a:solidFill>
-                  <a:srgbClr val="595959"/>
-                </a:solidFill>
-                <a:latin typeface="Meiryo"/>
-              </a:rPr>
-              <a:t>・clip ε 0.15 (&lt;0.2): 高分散アドバンテージ下の方策崩壊を抑制</a:t>
-            </a:r>
-          </a:p>
-          <a:p>
-            <a:pPr lvl="1">
-              <a:spcAft>
-                <a:spcPts val="200"/>
-              </a:spcAft>
-            </a:pPr>
-            <a:r>
-              <a:rPr sz="1400" b="0">
-                <a:solidFill>
-                  <a:srgbClr val="595959"/>
-                </a:solidFill>
-                <a:latin typeface="Meiryo"/>
-              </a:rPr>
-              <a:t>・γ 0.99 / GAE λ 0.98 / n_steps 512×8env / minibatch 256 / 8〜15 epochs / linear LR decay</a:t>
-            </a:r>
-          </a:p>
-          <a:p>
-            <a:pPr lvl="1">
-              <a:spcAft>
-                <a:spcPts val="200"/>
-              </a:spcAft>
-            </a:pPr>
-            <a:r>
-              <a:rPr sz="1400" b="1">
-                <a:solidFill>
-                  <a:srgbClr val="595959"/>
-                </a:solidFill>
-                <a:latin typeface="Meiryo"/>
-              </a:rPr>
-              <a:t>・ent_coef 0.02: [0,1] 圧縮報酬との結合に注意 (0.10 は実質ランダム方策に収束)</a:t>
-            </a:r>
-          </a:p>
-          <a:p>
-            <a:pPr>
-              <a:spcAft>
-                <a:spcPts val="600"/>
-              </a:spcAft>
-            </a:pPr>
-            <a:r>
-              <a:rPr sz="1600" b="1">
-                <a:solidFill>
-                  <a:srgbClr val="222222"/>
-                </a:solidFill>
-                <a:latin typeface="Meiryo"/>
-              </a:rPr>
-              <a:t>備考</a:t>
-            </a:r>
-          </a:p>
-          <a:p>
-            <a:pPr lvl="1">
-              <a:spcAft>
-                <a:spcPts val="200"/>
-              </a:spcAft>
-            </a:pPr>
-            <a:r>
-              <a:rPr sz="1400" b="0">
-                <a:solidFill>
-                  <a:srgbClr val="595959"/>
-                </a:solidFill>
-                <a:latin typeface="Meiryo"/>
-              </a:rPr>
-              <a:t>・アドバンテージ正規化 → 報酬のアフィン変換に不変。[0,1] 化は診断用の設計</a:t>
             </a:r>
           </a:p>
         </p:txBody>
@@ -6484,6 +7376,209 @@
                 </a:solidFill>
                 <a:latin typeface="Meiryo"/>
               </a:rPr>
+              <a:t>PPO ハイパーパラメータの設計判断 (専門家向け)</a:t>
+            </a:r>
+          </a:p>
+        </p:txBody>
+      </p:sp>
+      <p:sp>
+        <p:nvSpPr>
+          <p:cNvPr id="3" name="TextBox 2"/>
+          <p:cNvSpPr txBox="1"/>
+          <p:nvPr/>
+        </p:nvSpPr>
+        <p:spPr>
+          <a:xfrm>
+            <a:off x="548640" y="1188720"/>
+            <a:ext cx="11064240" cy="5486400"/>
+          </a:xfrm>
+          <a:prstGeom prst="rect">
+            <a:avLst/>
+          </a:prstGeom>
+          <a:noFill/>
+        </p:spPr>
+        <p:txBody>
+          <a:bodyPr wrap="square">
+            <a:spAutoFit/>
+          </a:bodyPr>
+          <a:lstStyle/>
+          <a:p>
+            <a:pPr>
+              <a:spcAft>
+                <a:spcPts val="600"/>
+              </a:spcAft>
+            </a:pPr>
+            <a:r>
+              <a:rPr sz="1600" b="1">
+                <a:solidFill>
+                  <a:srgbClr val="222222"/>
+                </a:solidFill>
+                <a:latin typeface="Meiryo"/>
+              </a:rPr>
+              <a:t>アルゴリズム選択</a:t>
+            </a:r>
+          </a:p>
+          <a:p>
+            <a:pPr lvl="1">
+              <a:spcAft>
+                <a:spcPts val="200"/>
+              </a:spcAft>
+            </a:pPr>
+            <a:r>
+              <a:rPr sz="1400" b="0">
+                <a:solidFill>
+                  <a:srgbClr val="595959"/>
+                </a:solidFill>
+                <a:latin typeface="Meiryo"/>
+              </a:rPr>
+              <a:t>・オンポリシー (PPO): 環境改造が頻繁 → 古い経験が即無効 / sim 軽量で wall-clock 優位</a:t>
+            </a:r>
+          </a:p>
+          <a:p>
+            <a:pPr>
+              <a:spcAft>
+                <a:spcPts val="600"/>
+              </a:spcAft>
+            </a:pPr>
+            <a:r>
+              <a:rPr sz="1600" b="1">
+                <a:solidFill>
+                  <a:srgbClr val="222222"/>
+                </a:solidFill>
+                <a:latin typeface="Meiryo"/>
+              </a:rPr>
+              <a:t>主要ハイパラ</a:t>
+            </a:r>
+          </a:p>
+          <a:p>
+            <a:pPr lvl="1">
+              <a:spcAft>
+                <a:spcPts val="200"/>
+              </a:spcAft>
+            </a:pPr>
+            <a:r>
+              <a:rPr sz="1400" b="0">
+                <a:solidFill>
+                  <a:srgbClr val="595959"/>
+                </a:solidFill>
+                <a:latin typeface="Meiryo"/>
+              </a:rPr>
+              <a:t>・clip ε 0.15 (&lt;0.2): 高分散アドバンテージ下の方策崩壊を抑制</a:t>
+            </a:r>
+          </a:p>
+          <a:p>
+            <a:pPr lvl="1">
+              <a:spcAft>
+                <a:spcPts val="200"/>
+              </a:spcAft>
+            </a:pPr>
+            <a:r>
+              <a:rPr sz="1400" b="0">
+                <a:solidFill>
+                  <a:srgbClr val="595959"/>
+                </a:solidFill>
+                <a:latin typeface="Meiryo"/>
+              </a:rPr>
+              <a:t>・γ 0.99 / GAE λ 0.98 / n_steps 512×8env / minibatch 256 / 8〜15 epochs / linear LR decay</a:t>
+            </a:r>
+          </a:p>
+          <a:p>
+            <a:pPr lvl="1">
+              <a:spcAft>
+                <a:spcPts val="200"/>
+              </a:spcAft>
+            </a:pPr>
+            <a:r>
+              <a:rPr sz="1400" b="1">
+                <a:solidFill>
+                  <a:srgbClr val="595959"/>
+                </a:solidFill>
+                <a:latin typeface="Meiryo"/>
+              </a:rPr>
+              <a:t>・ent_coef 0.02: [0,1] 圧縮報酬との結合に注意 (0.10 は実質ランダム方策に収束)</a:t>
+            </a:r>
+          </a:p>
+          <a:p>
+            <a:pPr>
+              <a:spcAft>
+                <a:spcPts val="600"/>
+              </a:spcAft>
+            </a:pPr>
+            <a:r>
+              <a:rPr sz="1600" b="1">
+                <a:solidFill>
+                  <a:srgbClr val="222222"/>
+                </a:solidFill>
+                <a:latin typeface="Meiryo"/>
+              </a:rPr>
+              <a:t>備考</a:t>
+            </a:r>
+          </a:p>
+          <a:p>
+            <a:pPr lvl="1">
+              <a:spcAft>
+                <a:spcPts val="200"/>
+              </a:spcAft>
+            </a:pPr>
+            <a:r>
+              <a:rPr sz="1400" b="0">
+                <a:solidFill>
+                  <a:srgbClr val="595959"/>
+                </a:solidFill>
+                <a:latin typeface="Meiryo"/>
+              </a:rPr>
+              <a:t>・アドバンテージ正規化 → 報酬のアフィン変換に不変。[0,1] 化は診断用の設計</a:t>
+            </a:r>
+          </a:p>
+        </p:txBody>
+      </p:sp>
+    </p:spTree>
+  </p:cSld>
+  <p:clrMapOvr>
+    <a:masterClrMapping/>
+  </p:clrMapOvr>
+</p:sld>
+</file>
+
+<file path=ppt/slides/slide18.xml><?xml version="1.0" encoding="utf-8"?>
+<p:sld xmlns:a="http://schemas.openxmlformats.org/drawingml/2006/main" xmlns:p="http://schemas.openxmlformats.org/presentationml/2006/main" xmlns:r="http://schemas.openxmlformats.org/officeDocument/2006/relationships">
+  <p:cSld>
+    <p:spTree>
+      <p:nvGrpSpPr>
+        <p:cNvPr id="1" name=""/>
+        <p:cNvGrpSpPr/>
+        <p:nvPr/>
+      </p:nvGrpSpPr>
+      <p:grpSpPr/>
+      <p:sp>
+        <p:nvSpPr>
+          <p:cNvPr id="2" name="TextBox 1"/>
+          <p:cNvSpPr txBox="1"/>
+          <p:nvPr/>
+        </p:nvSpPr>
+        <p:spPr>
+          <a:xfrm>
+            <a:off x="457200" y="182880"/>
+            <a:ext cx="11247120" cy="731520"/>
+          </a:xfrm>
+          <a:prstGeom prst="rect">
+            <a:avLst/>
+          </a:prstGeom>
+          <a:noFill/>
+        </p:spPr>
+        <p:txBody>
+          <a:bodyPr wrap="none">
+            <a:spAutoFit/>
+          </a:bodyPr>
+          <a:lstStyle/>
+          <a:p>
+            <a:r>
+              <a:rPr sz="2700" b="1">
+                <a:solidFill>
+                  <a:srgbClr val="1B5EA8"/>
+                </a:solidFill>
+                <a:latin typeface="Meiryo"/>
+              </a:rPr>
               <a:t>実ゲームとのギャップ — シミュレーションが省いているもの</a:t>
             </a:r>
           </a:p>
@@ -6680,7 +7775,7 @@
 </p:sld>
 </file>
 
-<file path=ppt/slides/slide18.xml><?xml version="1.0" encoding="utf-8"?>
+<file path=ppt/slides/slide19.xml><?xml version="1.0" encoding="utf-8"?>
 <p:sld xmlns:a="http://schemas.openxmlformats.org/drawingml/2006/main" xmlns:p="http://schemas.openxmlformats.org/presentationml/2006/main" xmlns:r="http://schemas.openxmlformats.org/officeDocument/2006/relationships">
   <p:cSld>
     <p:spTree>
@@ -6899,241 +7994,6 @@
           </a:prstGeom>
         </p:spPr>
       </p:pic>
-    </p:spTree>
-  </p:cSld>
-  <p:clrMapOvr>
-    <a:masterClrMapping/>
-  </p:clrMapOvr>
-</p:sld>
-</file>
-
-<file path=ppt/slides/slide19.xml><?xml version="1.0" encoding="utf-8"?>
-<p:sld xmlns:a="http://schemas.openxmlformats.org/drawingml/2006/main" xmlns:p="http://schemas.openxmlformats.org/presentationml/2006/main" xmlns:r="http://schemas.openxmlformats.org/officeDocument/2006/relationships">
-  <p:cSld>
-    <p:spTree>
-      <p:nvGrpSpPr>
-        <p:cNvPr id="1" name=""/>
-        <p:cNvGrpSpPr/>
-        <p:nvPr/>
-      </p:nvGrpSpPr>
-      <p:grpSpPr/>
-      <p:sp>
-        <p:nvSpPr>
-          <p:cNvPr id="2" name="TextBox 1"/>
-          <p:cNvSpPr txBox="1"/>
-          <p:nvPr/>
-        </p:nvSpPr>
-        <p:spPr>
-          <a:xfrm>
-            <a:off x="457200" y="182880"/>
-            <a:ext cx="11247120" cy="731520"/>
-          </a:xfrm>
-          <a:prstGeom prst="rect">
-            <a:avLst/>
-          </a:prstGeom>
-          <a:noFill/>
-        </p:spPr>
-        <p:txBody>
-          <a:bodyPr wrap="none">
-            <a:spAutoFit/>
-          </a:bodyPr>
-          <a:lstStyle/>
-          <a:p>
-            <a:r>
-              <a:rPr sz="2700" b="1">
-                <a:solidFill>
-                  <a:srgbClr val="1B5EA8"/>
-                </a:solidFill>
-                <a:latin typeface="Meiryo"/>
-              </a:rPr>
-              <a:t>セットアップとノートブックの使い方</a:t>
-            </a:r>
-          </a:p>
-        </p:txBody>
-      </p:sp>
-      <p:sp>
-        <p:nvSpPr>
-          <p:cNvPr id="3" name="TextBox 2"/>
-          <p:cNvSpPr txBox="1"/>
-          <p:nvPr/>
-        </p:nvSpPr>
-        <p:spPr>
-          <a:xfrm>
-            <a:off x="548640" y="1188720"/>
-            <a:ext cx="11064240" cy="5486400"/>
-          </a:xfrm>
-          <a:prstGeom prst="rect">
-            <a:avLst/>
-          </a:prstGeom>
-          <a:noFill/>
-        </p:spPr>
-        <p:txBody>
-          <a:bodyPr wrap="square">
-            <a:spAutoFit/>
-          </a:bodyPr>
-          <a:lstStyle/>
-          <a:p>
-            <a:pPr>
-              <a:spcAft>
-                <a:spcPts val="600"/>
-              </a:spcAft>
-            </a:pPr>
-            <a:r>
-              <a:rPr sz="1600" b="1">
-                <a:solidFill>
-                  <a:srgbClr val="222222"/>
-                </a:solidFill>
-                <a:latin typeface="Meiryo"/>
-              </a:rPr>
-              <a:t>環境構築</a:t>
-            </a:r>
-          </a:p>
-          <a:p>
-            <a:pPr lvl="1">
-              <a:spcAft>
-                <a:spcPts val="200"/>
-              </a:spcAft>
-            </a:pPr>
-            <a:r>
-              <a:rPr sz="1400" b="0">
-                <a:solidFill>
-                  <a:srgbClr val="595959"/>
-                </a:solidFill>
-                <a:latin typeface="Meiryo"/>
-              </a:rPr>
-              <a:t>・pip install "highway-env&gt;=1.8" "stable-baselines3[extra]&gt;=2.0" gymnasium torch tensorboard moviepy onnx onnxruntime</a:t>
-            </a:r>
-          </a:p>
-          <a:p>
-            <a:pPr lvl="1">
-              <a:spcAft>
-                <a:spcPts val="200"/>
-              </a:spcAft>
-            </a:pPr>
-            <a:r>
-              <a:rPr sz="1400" b="0">
-                <a:solidFill>
-                  <a:srgbClr val="B32D2D"/>
-                </a:solidFill>
-                <a:latin typeface="Meiryo"/>
-              </a:rPr>
-              <a:t>・リポジトリの requirements.txt は旧 TF スタック用 — 使わない</a:t>
-            </a:r>
-          </a:p>
-          <a:p>
-            <a:pPr>
-              <a:spcAft>
-                <a:spcPts val="600"/>
-              </a:spcAft>
-            </a:pPr>
-            <a:r>
-              <a:rPr sz="1600" b="1">
-                <a:solidFill>
-                  <a:srgbClr val="222222"/>
-                </a:solidFill>
-                <a:latin typeface="Meiryo"/>
-              </a:rPr>
-              <a:t>ノートブック</a:t>
-            </a:r>
-          </a:p>
-          <a:p>
-            <a:pPr lvl="1">
-              <a:spcAft>
-                <a:spcPts val="200"/>
-              </a:spcAft>
-            </a:pPr>
-            <a:r>
-              <a:rPr sz="1400" b="0">
-                <a:solidFill>
-                  <a:srgbClr val="595959"/>
-                </a:solidFill>
-                <a:latin typeface="Meiryo"/>
-              </a:rPr>
-              <a:t>・task2: fast トラック学習 / task3: random 学習 + トラック別レポート + 5 連動画</a:t>
-            </a:r>
-          </a:p>
-          <a:p>
-            <a:pPr lvl="1">
-              <a:spcAft>
-                <a:spcPts val="200"/>
-              </a:spcAft>
-            </a:pPr>
-            <a:r>
-              <a:rPr sz="1400" b="0">
-                <a:solidFill>
-                  <a:srgbClr val="595959"/>
-                </a:solidFill>
-                <a:latin typeface="Meiryo"/>
-              </a:rPr>
-              <a:t>・FAST_DEV_RUN=True: 12〜15 万 step (周回到達を実測保証) / False: 本番 100 万+</a:t>
-            </a:r>
-          </a:p>
-          <a:p>
-            <a:pPr>
-              <a:spcAft>
-                <a:spcPts val="600"/>
-              </a:spcAft>
-            </a:pPr>
-            <a:r>
-              <a:rPr sz="1600" b="1">
-                <a:solidFill>
-                  <a:srgbClr val="222222"/>
-                </a:solidFill>
-                <a:latin typeface="Meiryo"/>
-              </a:rPr>
-              <a:t>進捗の読み方</a:t>
-            </a:r>
-          </a:p>
-          <a:p>
-            <a:pPr lvl="1">
-              <a:spcAft>
-                <a:spcPts val="200"/>
-              </a:spcAft>
-            </a:pPr>
-            <a:r>
-              <a:rPr sz="1400" b="0">
-                <a:solidFill>
-                  <a:srgbClr val="595959"/>
-                </a:solidFill>
-                <a:latin typeface="Meiryo"/>
-              </a:rPr>
-              <a:t>・Reward yardstick: 1 周 ≈ 101 / アイドル床 ≈ 0.53/step — eval 値を周回数として読む</a:t>
-            </a:r>
-          </a:p>
-          <a:p>
-            <a:pPr lvl="1">
-              <a:spcAft>
-                <a:spcPts val="200"/>
-              </a:spcAft>
-            </a:pPr>
-            <a:r>
-              <a:rPr sz="1400" b="0">
-                <a:solidFill>
-                  <a:srgbClr val="595959"/>
-                </a:solidFill>
-                <a:latin typeface="Meiryo"/>
-              </a:rPr>
-              <a:t>・Presentation Media セル: 学習曲線・軌跡・5 連動画を生成し VIDEO_DIR に保存</a:t>
-            </a:r>
-          </a:p>
-          <a:p>
-            <a:pPr>
-              <a:spcAft>
-                <a:spcPts val="600"/>
-              </a:spcAft>
-            </a:pPr>
-            <a:r>
-              <a:rPr sz="1600" b="0">
-                <a:solidFill>
-                  <a:srgbClr val="222222"/>
-                </a:solidFill>
-                <a:latin typeface="Meiryo"/>
-              </a:rPr>
-              <a:t>C# 検証: cd re_engine/verify &amp;&amp; dotnet run -- ..  → ALL SCENARIOS MATCH</a:t>
-            </a:r>
-          </a:p>
-        </p:txBody>
-      </p:sp>
     </p:spTree>
   </p:cSld>
   <p:clrMapOvr>
@@ -7312,6 +8172,241 @@
                 </a:solidFill>
                 <a:latin typeface="Meiryo"/>
               </a:rPr>
+              <a:t>セットアップとノートブックの使い方</a:t>
+            </a:r>
+          </a:p>
+        </p:txBody>
+      </p:sp>
+      <p:sp>
+        <p:nvSpPr>
+          <p:cNvPr id="3" name="TextBox 2"/>
+          <p:cNvSpPr txBox="1"/>
+          <p:nvPr/>
+        </p:nvSpPr>
+        <p:spPr>
+          <a:xfrm>
+            <a:off x="548640" y="1188720"/>
+            <a:ext cx="11064240" cy="5486400"/>
+          </a:xfrm>
+          <a:prstGeom prst="rect">
+            <a:avLst/>
+          </a:prstGeom>
+          <a:noFill/>
+        </p:spPr>
+        <p:txBody>
+          <a:bodyPr wrap="square">
+            <a:spAutoFit/>
+          </a:bodyPr>
+          <a:lstStyle/>
+          <a:p>
+            <a:pPr>
+              <a:spcAft>
+                <a:spcPts val="600"/>
+              </a:spcAft>
+            </a:pPr>
+            <a:r>
+              <a:rPr sz="1600" b="1">
+                <a:solidFill>
+                  <a:srgbClr val="222222"/>
+                </a:solidFill>
+                <a:latin typeface="Meiryo"/>
+              </a:rPr>
+              <a:t>環境構築</a:t>
+            </a:r>
+          </a:p>
+          <a:p>
+            <a:pPr lvl="1">
+              <a:spcAft>
+                <a:spcPts val="200"/>
+              </a:spcAft>
+            </a:pPr>
+            <a:r>
+              <a:rPr sz="1400" b="0">
+                <a:solidFill>
+                  <a:srgbClr val="595959"/>
+                </a:solidFill>
+                <a:latin typeface="Meiryo"/>
+              </a:rPr>
+              <a:t>・pip install "highway-env&gt;=1.8" "stable-baselines3[extra]&gt;=2.0" gymnasium torch tensorboard moviepy onnx onnxruntime</a:t>
+            </a:r>
+          </a:p>
+          <a:p>
+            <a:pPr lvl="1">
+              <a:spcAft>
+                <a:spcPts val="200"/>
+              </a:spcAft>
+            </a:pPr>
+            <a:r>
+              <a:rPr sz="1400" b="0">
+                <a:solidFill>
+                  <a:srgbClr val="B32D2D"/>
+                </a:solidFill>
+                <a:latin typeface="Meiryo"/>
+              </a:rPr>
+              <a:t>・リポジトリの requirements.txt は旧 TF スタック用 — 使わない</a:t>
+            </a:r>
+          </a:p>
+          <a:p>
+            <a:pPr>
+              <a:spcAft>
+                <a:spcPts val="600"/>
+              </a:spcAft>
+            </a:pPr>
+            <a:r>
+              <a:rPr sz="1600" b="1">
+                <a:solidFill>
+                  <a:srgbClr val="222222"/>
+                </a:solidFill>
+                <a:latin typeface="Meiryo"/>
+              </a:rPr>
+              <a:t>ノートブック</a:t>
+            </a:r>
+          </a:p>
+          <a:p>
+            <a:pPr lvl="1">
+              <a:spcAft>
+                <a:spcPts val="200"/>
+              </a:spcAft>
+            </a:pPr>
+            <a:r>
+              <a:rPr sz="1400" b="0">
+                <a:solidFill>
+                  <a:srgbClr val="595959"/>
+                </a:solidFill>
+                <a:latin typeface="Meiryo"/>
+              </a:rPr>
+              <a:t>・task2: fast トラック学習 / task3: random 学習 + トラック別レポート + 5 連動画</a:t>
+            </a:r>
+          </a:p>
+          <a:p>
+            <a:pPr lvl="1">
+              <a:spcAft>
+                <a:spcPts val="200"/>
+              </a:spcAft>
+            </a:pPr>
+            <a:r>
+              <a:rPr sz="1400" b="0">
+                <a:solidFill>
+                  <a:srgbClr val="595959"/>
+                </a:solidFill>
+                <a:latin typeface="Meiryo"/>
+              </a:rPr>
+              <a:t>・FAST_DEV_RUN=True: 12〜15 万 step (周回到達を実測保証) / False: 本番 100 万+</a:t>
+            </a:r>
+          </a:p>
+          <a:p>
+            <a:pPr>
+              <a:spcAft>
+                <a:spcPts val="600"/>
+              </a:spcAft>
+            </a:pPr>
+            <a:r>
+              <a:rPr sz="1600" b="1">
+                <a:solidFill>
+                  <a:srgbClr val="222222"/>
+                </a:solidFill>
+                <a:latin typeface="Meiryo"/>
+              </a:rPr>
+              <a:t>進捗の読み方</a:t>
+            </a:r>
+          </a:p>
+          <a:p>
+            <a:pPr lvl="1">
+              <a:spcAft>
+                <a:spcPts val="200"/>
+              </a:spcAft>
+            </a:pPr>
+            <a:r>
+              <a:rPr sz="1400" b="0">
+                <a:solidFill>
+                  <a:srgbClr val="595959"/>
+                </a:solidFill>
+                <a:latin typeface="Meiryo"/>
+              </a:rPr>
+              <a:t>・Reward yardstick: 1 周 ≈ 101 / アイドル床 ≈ 0.53/step — eval 値を周回数として読む</a:t>
+            </a:r>
+          </a:p>
+          <a:p>
+            <a:pPr lvl="1">
+              <a:spcAft>
+                <a:spcPts val="200"/>
+              </a:spcAft>
+            </a:pPr>
+            <a:r>
+              <a:rPr sz="1400" b="0">
+                <a:solidFill>
+                  <a:srgbClr val="595959"/>
+                </a:solidFill>
+                <a:latin typeface="Meiryo"/>
+              </a:rPr>
+              <a:t>・Presentation Media セル: 学習曲線・軌跡・5 連動画を生成し VIDEO_DIR に保存</a:t>
+            </a:r>
+          </a:p>
+          <a:p>
+            <a:pPr>
+              <a:spcAft>
+                <a:spcPts val="600"/>
+              </a:spcAft>
+            </a:pPr>
+            <a:r>
+              <a:rPr sz="1600" b="0">
+                <a:solidFill>
+                  <a:srgbClr val="222222"/>
+                </a:solidFill>
+                <a:latin typeface="Meiryo"/>
+              </a:rPr>
+              <a:t>C# 検証: cd re_engine/verify &amp;&amp; dotnet run -- ..  → ALL SCENARIOS MATCH</a:t>
+            </a:r>
+          </a:p>
+        </p:txBody>
+      </p:sp>
+    </p:spTree>
+  </p:cSld>
+  <p:clrMapOvr>
+    <a:masterClrMapping/>
+  </p:clrMapOvr>
+</p:sld>
+</file>
+
+<file path=ppt/slides/slide21.xml><?xml version="1.0" encoding="utf-8"?>
+<p:sld xmlns:a="http://schemas.openxmlformats.org/drawingml/2006/main" xmlns:p="http://schemas.openxmlformats.org/presentationml/2006/main" xmlns:r="http://schemas.openxmlformats.org/officeDocument/2006/relationships">
+  <p:cSld>
+    <p:spTree>
+      <p:nvGrpSpPr>
+        <p:cNvPr id="1" name=""/>
+        <p:cNvGrpSpPr/>
+        <p:nvPr/>
+      </p:nvGrpSpPr>
+      <p:grpSpPr/>
+      <p:sp>
+        <p:nvSpPr>
+          <p:cNvPr id="2" name="TextBox 1"/>
+          <p:cNvSpPr txBox="1"/>
+          <p:nvPr/>
+        </p:nvSpPr>
+        <p:spPr>
+          <a:xfrm>
+            <a:off x="457200" y="182880"/>
+            <a:ext cx="11247120" cy="731520"/>
+          </a:xfrm>
+          <a:prstGeom prst="rect">
+            <a:avLst/>
+          </a:prstGeom>
+          <a:noFill/>
+        </p:spPr>
+        <p:txBody>
+          <a:bodyPr wrap="none">
+            <a:spAutoFit/>
+          </a:bodyPr>
+          <a:lstStyle/>
+          <a:p>
+            <a:r>
+              <a:rPr sz="2700" b="1">
+                <a:solidFill>
+                  <a:srgbClr val="1B5EA8"/>
+                </a:solidFill>
+                <a:latin typeface="Meiryo"/>
+              </a:rPr>
               <a:t>エクスポートツールと ONNX の注意点</a:t>
             </a:r>
           </a:p>
@@ -7524,7 +8619,7 @@
 </p:sld>
 </file>
 
-<file path=ppt/slides/slide21.xml><?xml version="1.0" encoding="utf-8"?>
+<file path=ppt/slides/slide22.xml><?xml version="1.0" encoding="utf-8"?>
 <p:sld xmlns:a="http://schemas.openxmlformats.org/drawingml/2006/main" xmlns:p="http://schemas.openxmlformats.org/presentationml/2006/main" xmlns:r="http://schemas.openxmlformats.org/officeDocument/2006/relationships">
   <p:cSld>
     <p:spTree>

--- a/docs/CircuitAgents_intro_ja.pptx
+++ b/docs/CircuitAgents_intro_ja.pptx
@@ -27,6 +27,7 @@
     <p:sldId id="275" r:id="rId27"/>
     <p:sldId id="276" r:id="rId28"/>
     <p:sldId id="277" r:id="rId29"/>
+    <p:sldId id="278" r:id="rId30"/>
   </p:sldIdLst>
   <p:sldSz cx="12191695" cy="6858000" type="screen4x3"/>
   <p:notesSz cx="6858000" cy="9144000"/>
@@ -1503,7 +1504,77 @@
           <a:lstStyle/>
           <a:p>
             <a:r>
-              <a:t>まとめです。デフォルトのステア専用レーン追従環境に、行動・壁・報酬・観測・トラックの5 段階の進化を施し、抜け道を経済的に割に合わなくした結果、6 万ステップで周回を学習する環境になりました。汎化は自己位置を見せない観測設計の帰結です。実ゲームとのギャップは一覧化した上で、消せるものは数値一致移植で消し、残差はデプロイ側フィルタで吸収する二層戦略を取っています。次のステップは RE Engine 内での実走検証と、実測に基づく壁摩擦・動力学パラメータの適合です。ご清聴ありがとうございました。</a:t>
+              <a:t>正直な残課題です。今回はエージェントをゲーム内で動かすところまでは到達できませんでした。理由は ONNX の変換とレイヤ対応です。まず前提知識として、ONNX モデルは計算グラフで、ノードと呼ばれる演算子 (レイヤ) の有向グラフです。各ノードは op_type (Gemm や Conv など)、入力・出力、そして属性 (attributes) を持ちます。属性はその演算の静的パラメータで、例えば Gemm の transB は重み行列を転置するフラグ、Conv の strides はストライド幅です。推論ランタイム、ここでは RE Engine が、使われている全ての op_type と属性を正しく実装していないと、グラフは失敗するか誤った出力を出します。今回対応したのは 3 つです。Flatten は多次元を平坦化するレイヤですが、RE Engine は入力を 1 次元として扱うため実質no-op で問題なし。Gemm の transB 属性は変換スクリプトで転置を解決済み。ConstantOfShape は指定形状を定数で埋めるレイヤで、変換側では 0 次元出力を許容して対応しましたが、RE Engine 側の対応は未実装です。必要な全レイヤの対応を終えられず、結果としてモデルはゲーム内で正しく振る舞いませんでした。ここが次にやるべき最優先の作業です。</a:t>
+            </a:r>
+          </a:p>
+        </p:txBody>
+      </p:sp>
+      <p:sp>
+        <p:nvSpPr>
+          <p:cNvPr id="4" name="Slide Number Placeholder 3"/>
+          <p:cNvSpPr>
+            <a:spLocks noGrp="1"/>
+          </p:cNvSpPr>
+          <p:nvPr>
+            <p:ph type="sldNum" idx="5" sz="quarter"/>
+          </p:nvPr>
+        </p:nvSpPr>
+        <p:spPr/>
+      </p:sp>
+    </p:spTree>
+  </p:cSld>
+  <p:clrMapOvr>
+    <a:masterClrMapping/>
+  </p:clrMapOvr>
+</p:notes>
+</file>
+
+<file path=ppt/notesSlides/notesSlide23.xml><?xml version="1.0" encoding="utf-8"?>
+<p:notes xmlns:a="http://schemas.openxmlformats.org/drawingml/2006/main" xmlns:p="http://schemas.openxmlformats.org/presentationml/2006/main" xmlns:r="http://schemas.openxmlformats.org/officeDocument/2006/relationships">
+  <p:cSld>
+    <p:spTree>
+      <p:nvGrpSpPr>
+        <p:cNvPr id="1" name=""/>
+        <p:cNvGrpSpPr/>
+        <p:nvPr/>
+      </p:nvGrpSpPr>
+      <p:grpSpPr>
+        <a:xfrm>
+          <a:off x="0" y="0"/>
+          <a:ext cx="0" cy="0"/>
+          <a:chOff x="0" y="0"/>
+          <a:chExt cx="0" cy="0"/>
+        </a:xfrm>
+      </p:grpSpPr>
+      <p:sp>
+        <p:nvSpPr>
+          <p:cNvPr id="2" name="Slide Image Placeholder 1"/>
+          <p:cNvSpPr>
+            <a:spLocks noGrp="1"/>
+          </p:cNvSpPr>
+          <p:nvPr>
+            <p:ph type="sldImg" idx="2"/>
+          </p:nvPr>
+        </p:nvSpPr>
+        <p:spPr/>
+      </p:sp>
+      <p:sp>
+        <p:nvSpPr>
+          <p:cNvPr id="3" name="Notes Placeholder 2"/>
+          <p:cNvSpPr>
+            <a:spLocks noGrp="1"/>
+          </p:cNvSpPr>
+          <p:nvPr>
+            <p:ph type="body" idx="3" sz="quarter"/>
+          </p:nvPr>
+        </p:nvSpPr>
+        <p:spPr/>
+        <p:txBody>
+          <a:bodyPr/>
+          <a:lstStyle/>
+          <a:p>
+            <a:r>
+              <a:t>最後に、今回の最大の学びです。良いゲーム AI をシミュレーションで作れるかは、そのゲームが何を必要とするかに全面的に依存します。だからこそ、AI を設計する前に『目的』を定めることが不可欠です。目的はゲームごとに大きく異なります。今回はレースゲームを想定し、壁・摩擦・特定の車サイズ・トラックサイズといった要素を模擬しました。しかし別のゲームなら、模擬すべきものも省けるものも変わります。目的を先に決めるからこそ、何を環境に作り込み、何を捨てるかが決まるのです。技術面の振り返りとしては、ステア専用のレーン追従環境に行動・壁・報酬・観測・トラックの5 段階の進化を施し、抜け道を報酬の経済設計で割に合わなくした結果、6 万ステップで周回を学習する環境になりました。汎化は自己位置を見せない観測設計の帰結です。残る課題は ONNX レイヤ対応を完了しゲーム内で実走させること。ご清聴ありがとうございました。</a:t>
             </a:r>
           </a:p>
         </p:txBody>
@@ -8658,7 +8729,7 @@
                 </a:solidFill>
                 <a:latin typeface="Meiryo"/>
               </a:rPr>
-              <a:t>まとめ — 環境設計こそが学習を決める</a:t>
+              <a:t>残課題 — ONNX をゲームエンジンで動かす (今回は実機デモ未到達)</a:t>
             </a:r>
           </a:p>
         </p:txBody>
@@ -8671,7 +8742,545 @@
         </p:nvSpPr>
         <p:spPr>
           <a:xfrm>
-            <a:off x="548640" y="1371600"/>
+            <a:off x="457200" y="1234440"/>
+            <a:ext cx="11247120" cy="5486400"/>
+          </a:xfrm>
+          <a:prstGeom prst="rect">
+            <a:avLst/>
+          </a:prstGeom>
+          <a:noFill/>
+        </p:spPr>
+        <p:txBody>
+          <a:bodyPr wrap="square">
+            <a:spAutoFit/>
+          </a:bodyPr>
+          <a:lstStyle/>
+          <a:p>
+            <a:pPr>
+              <a:spcAft>
+                <a:spcPts val="600"/>
+              </a:spcAft>
+            </a:pPr>
+            <a:r>
+              <a:rPr sz="1500" b="1">
+                <a:solidFill>
+                  <a:srgbClr val="222222"/>
+                </a:solidFill>
+                <a:latin typeface="Meiryo"/>
+              </a:rPr>
+              <a:t>前提知識: ONNX モデル = 計算グラフ (ノード = レイヤ/演算子 の有向グラフ)</a:t>
+            </a:r>
+          </a:p>
+          <a:p>
+            <a:pPr lvl="1">
+              <a:spcAft>
+                <a:spcPts val="200"/>
+              </a:spcAft>
+            </a:pPr>
+            <a:r>
+              <a:rPr sz="1300" b="0">
+                <a:solidFill>
+                  <a:srgbClr val="595959"/>
+                </a:solidFill>
+                <a:latin typeface="Meiryo"/>
+              </a:rPr>
+              <a:t>・各ノード = op_type (Gemm/Conv/Flatten…) + 入力/出力 + 属性 (attributes)</a:t>
+            </a:r>
+          </a:p>
+          <a:p>
+            <a:pPr lvl="1">
+              <a:spcAft>
+                <a:spcPts val="200"/>
+              </a:spcAft>
+            </a:pPr>
+            <a:r>
+              <a:rPr sz="1300" b="0">
+                <a:solidFill>
+                  <a:srgbClr val="595959"/>
+                </a:solidFill>
+                <a:latin typeface="Meiryo"/>
+              </a:rPr>
+              <a:t>・属性 = 演算の静的パラメータ (例: Gemm の transB=重み転置, Conv の strides)</a:t>
+            </a:r>
+          </a:p>
+          <a:p>
+            <a:pPr lvl="1">
+              <a:spcAft>
+                <a:spcPts val="200"/>
+              </a:spcAft>
+            </a:pPr>
+            <a:r>
+              <a:rPr sz="1300" b="0">
+                <a:solidFill>
+                  <a:srgbClr val="B32D2D"/>
+                </a:solidFill>
+                <a:latin typeface="Meiryo"/>
+              </a:rPr>
+              <a:t>・ランタイム (RE Engine) は全 op_type と属性を実装要 — 未対応なら失敗 or 誤出力</a:t>
+            </a:r>
+          </a:p>
+          <a:p>
+            <a:pPr>
+              <a:spcAft>
+                <a:spcPts val="600"/>
+              </a:spcAft>
+            </a:pPr>
+            <a:r>
+              <a:rPr sz="1500" b="1">
+                <a:solidFill>
+                  <a:srgbClr val="B32D2D"/>
+                </a:solidFill>
+                <a:latin typeface="Meiryo"/>
+              </a:rPr>
+              <a:t>今回の状況: モデルは変換 (transform) を経ないと RE Engine で使えず、</a:t>
+            </a:r>
+          </a:p>
+          <a:p>
+            <a:pPr lvl="1">
+              <a:spcAft>
+                <a:spcPts val="200"/>
+              </a:spcAft>
+            </a:pPr>
+            <a:r>
+              <a:rPr sz="1300" b="0">
+                <a:solidFill>
+                  <a:srgbClr val="B32D2D"/>
+                </a:solidFill>
+                <a:latin typeface="Meiryo"/>
+              </a:rPr>
+              <a:t>・未対応レイヤ/属性が残り、ゲーム内で正しく動作せず → 実機デモに未到達</a:t>
+            </a:r>
+          </a:p>
+        </p:txBody>
+      </p:sp>
+      <p:graphicFrame>
+        <p:nvGraphicFramePr>
+          <p:cNvPr id="4" name="Table 3"/>
+          <p:cNvGraphicFramePr>
+            <a:graphicFrameLocks noGrp="1"/>
+          </p:cNvGraphicFramePr>
+          <p:nvPr/>
+        </p:nvGraphicFramePr>
+        <p:xfrm>
+          <a:off x="457200" y="3886200"/>
+          <a:ext cx="11247120" cy="2377440"/>
+        </p:xfrm>
+        <a:graphic>
+          <a:graphicData uri="http://schemas.openxmlformats.org/drawingml/2006/table">
+            <a:tbl>
+              <a:tblPr firstRow="1" bandRow="1">
+                <a:tableStyleId>{5C22544A-7EE6-4342-B048-85BDC9FD1C3A}</a:tableStyleId>
+              </a:tblPr>
+              <a:tblGrid>
+                <a:gridCol w="2468880"/>
+                <a:gridCol w="3657600"/>
+                <a:gridCol w="5120640"/>
+              </a:tblGrid>
+              <a:tr h="475488">
+                <a:tc>
+                  <a:txBody>
+                    <a:bodyPr wrap="square"/>
+                    <a:lstStyle/>
+                    <a:p>
+                      <a:r>
+                        <a:rPr sz="1200" b="1">
+                          <a:solidFill>
+                            <a:srgbClr val="FFFFFF"/>
+                          </a:solidFill>
+                          <a:latin typeface="Meiryo"/>
+                        </a:rPr>
+                        <a:t>レイヤ (op_type)</a:t>
+                      </a:r>
+                    </a:p>
+                  </a:txBody>
+                  <a:tcPr marL="64008" marR="64008" marT="27432" marB="27432">
+                    <a:solidFill>
+                      <a:srgbClr val="1B5EA8"/>
+                    </a:solidFill>
+                  </a:tcPr>
+                </a:tc>
+                <a:tc>
+                  <a:txBody>
+                    <a:bodyPr wrap="square"/>
+                    <a:lstStyle/>
+                    <a:p>
+                      <a:r>
+                        <a:rPr sz="1200" b="1">
+                          <a:solidFill>
+                            <a:srgbClr val="FFFFFF"/>
+                          </a:solidFill>
+                          <a:latin typeface="Meiryo"/>
+                        </a:rPr>
+                        <a:t>役割</a:t>
+                      </a:r>
+                    </a:p>
+                  </a:txBody>
+                  <a:tcPr marL="64008" marR="64008" marT="27432" marB="27432">
+                    <a:solidFill>
+                      <a:srgbClr val="1B5EA8"/>
+                    </a:solidFill>
+                  </a:tcPr>
+                </a:tc>
+                <a:tc>
+                  <a:txBody>
+                    <a:bodyPr wrap="square"/>
+                    <a:lstStyle/>
+                    <a:p>
+                      <a:r>
+                        <a:rPr sz="1200" b="1">
+                          <a:solidFill>
+                            <a:srgbClr val="FFFFFF"/>
+                          </a:solidFill>
+                          <a:latin typeface="Meiryo"/>
+                        </a:rPr>
+                        <a:t>今回の対応</a:t>
+                      </a:r>
+                    </a:p>
+                  </a:txBody>
+                  <a:tcPr marL="64008" marR="64008" marT="27432" marB="27432">
+                    <a:solidFill>
+                      <a:srgbClr val="1B5EA8"/>
+                    </a:solidFill>
+                  </a:tcPr>
+                </a:tc>
+              </a:tr>
+              <a:tr h="475488">
+                <a:tc>
+                  <a:txBody>
+                    <a:bodyPr wrap="square"/>
+                    <a:lstStyle/>
+                    <a:p>
+                      <a:r>
+                        <a:rPr sz="1200" b="1">
+                          <a:solidFill>
+                            <a:srgbClr val="1B5EA8"/>
+                          </a:solidFill>
+                          <a:latin typeface="Meiryo"/>
+                        </a:rPr>
+                        <a:t>Flatten</a:t>
+                      </a:r>
+                    </a:p>
+                  </a:txBody>
+                  <a:tcPr marL="64008" marR="64008" marT="27432" marB="27432">
+                    <a:solidFill>
+                      <a:srgbClr val="F2F5FA"/>
+                    </a:solidFill>
+                  </a:tcPr>
+                </a:tc>
+                <a:tc>
+                  <a:txBody>
+                    <a:bodyPr wrap="square"/>
+                    <a:lstStyle/>
+                    <a:p>
+                      <a:r>
+                        <a:rPr sz="1200" b="0">
+                          <a:solidFill>
+                            <a:srgbClr val="222222"/>
+                          </a:solidFill>
+                          <a:latin typeface="Meiryo"/>
+                        </a:rPr>
+                        <a:t>多次元テンソルを平坦化</a:t>
+                      </a:r>
+                    </a:p>
+                  </a:txBody>
+                  <a:tcPr marL="64008" marR="64008" marT="27432" marB="27432">
+                    <a:solidFill>
+                      <a:srgbClr val="F2F5FA"/>
+                    </a:solidFill>
+                  </a:tcPr>
+                </a:tc>
+                <a:tc>
+                  <a:txBody>
+                    <a:bodyPr wrap="square"/>
+                    <a:lstStyle/>
+                    <a:p>
+                      <a:r>
+                        <a:rPr sz="1200" b="0">
+                          <a:solidFill>
+                            <a:srgbClr val="222222"/>
+                          </a:solidFill>
+                          <a:latin typeface="Meiryo"/>
+                        </a:rPr>
+                        <a:t>RE Engine は入力を 1 次元扱い → 実質 no-op で問題なし ✓</a:t>
+                      </a:r>
+                    </a:p>
+                  </a:txBody>
+                  <a:tcPr marL="64008" marR="64008" marT="27432" marB="27432">
+                    <a:solidFill>
+                      <a:srgbClr val="F2F5FA"/>
+                    </a:solidFill>
+                  </a:tcPr>
+                </a:tc>
+              </a:tr>
+              <a:tr h="475488">
+                <a:tc>
+                  <a:txBody>
+                    <a:bodyPr wrap="square"/>
+                    <a:lstStyle/>
+                    <a:p>
+                      <a:r>
+                        <a:rPr sz="1200" b="1">
+                          <a:solidFill>
+                            <a:srgbClr val="1B5EA8"/>
+                          </a:solidFill>
+                          <a:latin typeface="Meiryo"/>
+                        </a:rPr>
+                        <a:t>Gemm (transB)</a:t>
+                      </a:r>
+                    </a:p>
+                  </a:txBody>
+                  <a:tcPr marL="64008" marR="64008" marT="27432" marB="27432">
+                    <a:solidFill>
+                      <a:srgbClr val="FFFFFF"/>
+                    </a:solidFill>
+                  </a:tcPr>
+                </a:tc>
+                <a:tc>
+                  <a:txBody>
+                    <a:bodyPr wrap="square"/>
+                    <a:lstStyle/>
+                    <a:p>
+                      <a:r>
+                        <a:rPr sz="1200" b="0">
+                          <a:solidFill>
+                            <a:srgbClr val="222222"/>
+                          </a:solidFill>
+                          <a:latin typeface="Meiryo"/>
+                        </a:rPr>
+                        <a:t>全結合。transB は重み B を転置</a:t>
+                      </a:r>
+                    </a:p>
+                  </a:txBody>
+                  <a:tcPr marL="64008" marR="64008" marT="27432" marB="27432">
+                    <a:solidFill>
+                      <a:srgbClr val="FFFFFF"/>
+                    </a:solidFill>
+                  </a:tcPr>
+                </a:tc>
+                <a:tc>
+                  <a:txBody>
+                    <a:bodyPr wrap="square"/>
+                    <a:lstStyle/>
+                    <a:p>
+                      <a:r>
+                        <a:rPr sz="1200" b="0">
+                          <a:solidFill>
+                            <a:srgbClr val="222222"/>
+                          </a:solidFill>
+                          <a:latin typeface="Meiryo"/>
+                        </a:rPr>
+                        <a:t>変換スクリプトで転置を解決済み ✓</a:t>
+                      </a:r>
+                    </a:p>
+                  </a:txBody>
+                  <a:tcPr marL="64008" marR="64008" marT="27432" marB="27432">
+                    <a:solidFill>
+                      <a:srgbClr val="FFFFFF"/>
+                    </a:solidFill>
+                  </a:tcPr>
+                </a:tc>
+              </a:tr>
+              <a:tr h="475488">
+                <a:tc>
+                  <a:txBody>
+                    <a:bodyPr wrap="square"/>
+                    <a:lstStyle/>
+                    <a:p>
+                      <a:r>
+                        <a:rPr sz="1200" b="1">
+                          <a:solidFill>
+                            <a:srgbClr val="1B5EA8"/>
+                          </a:solidFill>
+                          <a:latin typeface="Meiryo"/>
+                        </a:rPr>
+                        <a:t>ConstantOfShape</a:t>
+                      </a:r>
+                    </a:p>
+                  </a:txBody>
+                  <a:tcPr marL="64008" marR="64008" marT="27432" marB="27432">
+                    <a:solidFill>
+                      <a:srgbClr val="F2F5FA"/>
+                    </a:solidFill>
+                  </a:tcPr>
+                </a:tc>
+                <a:tc>
+                  <a:txBody>
+                    <a:bodyPr wrap="square"/>
+                    <a:lstStyle/>
+                    <a:p>
+                      <a:r>
+                        <a:rPr sz="1200" b="0">
+                          <a:solidFill>
+                            <a:srgbClr val="222222"/>
+                          </a:solidFill>
+                          <a:latin typeface="Meiryo"/>
+                        </a:rPr>
+                        <a:t>指定形状を定数で充填 (ゼロ等)</a:t>
+                      </a:r>
+                    </a:p>
+                  </a:txBody>
+                  <a:tcPr marL="64008" marR="64008" marT="27432" marB="27432">
+                    <a:solidFill>
+                      <a:srgbClr val="F2F5FA"/>
+                    </a:solidFill>
+                  </a:tcPr>
+                </a:tc>
+                <a:tc>
+                  <a:txBody>
+                    <a:bodyPr wrap="square"/>
+                    <a:lstStyle/>
+                    <a:p>
+                      <a:r>
+                        <a:rPr sz="1200" b="0">
+                          <a:solidFill>
+                            <a:srgbClr val="222222"/>
+                          </a:solidFill>
+                          <a:latin typeface="Meiryo"/>
+                        </a:rPr>
+                        <a:t>変換側は 0 次元出力を許容 / RE Engine 側は未対応 △</a:t>
+                      </a:r>
+                    </a:p>
+                  </a:txBody>
+                  <a:tcPr marL="64008" marR="64008" marT="27432" marB="27432">
+                    <a:solidFill>
+                      <a:srgbClr val="F2F5FA"/>
+                    </a:solidFill>
+                  </a:tcPr>
+                </a:tc>
+              </a:tr>
+              <a:tr h="475488">
+                <a:tc>
+                  <a:txBody>
+                    <a:bodyPr wrap="square"/>
+                    <a:lstStyle/>
+                    <a:p>
+                      <a:r>
+                        <a:rPr sz="1200" b="1">
+                          <a:solidFill>
+                            <a:srgbClr val="1B5EA8"/>
+                          </a:solidFill>
+                          <a:latin typeface="Meiryo"/>
+                        </a:rPr>
+                        <a:t>その他の必要レイヤ</a:t>
+                      </a:r>
+                    </a:p>
+                  </a:txBody>
+                  <a:tcPr marL="64008" marR="64008" marT="27432" marB="27432">
+                    <a:solidFill>
+                      <a:srgbClr val="FFFFFF"/>
+                    </a:solidFill>
+                  </a:tcPr>
+                </a:tc>
+                <a:tc>
+                  <a:txBody>
+                    <a:bodyPr wrap="square"/>
+                    <a:lstStyle/>
+                    <a:p>
+                      <a:r>
+                        <a:rPr sz="1200" b="0">
+                          <a:solidFill>
+                            <a:srgbClr val="222222"/>
+                          </a:solidFill>
+                          <a:latin typeface="Meiryo"/>
+                        </a:rPr>
+                        <a:t>—</a:t>
+                      </a:r>
+                    </a:p>
+                  </a:txBody>
+                  <a:tcPr marL="64008" marR="64008" marT="27432" marB="27432">
+                    <a:solidFill>
+                      <a:srgbClr val="FFFFFF"/>
+                    </a:solidFill>
+                  </a:tcPr>
+                </a:tc>
+                <a:tc>
+                  <a:txBody>
+                    <a:bodyPr wrap="square"/>
+                    <a:lstStyle/>
+                    <a:p>
+                      <a:r>
+                        <a:rPr sz="1200" b="0">
+                          <a:solidFill>
+                            <a:srgbClr val="222222"/>
+                          </a:solidFill>
+                          <a:latin typeface="Meiryo"/>
+                        </a:rPr>
+                        <a:t>未完 → ゲーム内で誤動作 (次の最優先課題) ✗</a:t>
+                      </a:r>
+                    </a:p>
+                  </a:txBody>
+                  <a:tcPr marL="64008" marR="64008" marT="27432" marB="27432">
+                    <a:solidFill>
+                      <a:srgbClr val="FFFFFF"/>
+                    </a:solidFill>
+                  </a:tcPr>
+                </a:tc>
+              </a:tr>
+            </a:tbl>
+          </a:graphicData>
+        </a:graphic>
+      </p:graphicFrame>
+    </p:spTree>
+  </p:cSld>
+  <p:clrMapOvr>
+    <a:masterClrMapping/>
+  </p:clrMapOvr>
+</p:sld>
+</file>
+
+<file path=ppt/slides/slide23.xml><?xml version="1.0" encoding="utf-8"?>
+<p:sld xmlns:a="http://schemas.openxmlformats.org/drawingml/2006/main" xmlns:p="http://schemas.openxmlformats.org/presentationml/2006/main" xmlns:r="http://schemas.openxmlformats.org/officeDocument/2006/relationships">
+  <p:cSld>
+    <p:spTree>
+      <p:nvGrpSpPr>
+        <p:cNvPr id="1" name=""/>
+        <p:cNvGrpSpPr/>
+        <p:nvPr/>
+      </p:nvGrpSpPr>
+      <p:grpSpPr/>
+      <p:sp>
+        <p:nvSpPr>
+          <p:cNvPr id="2" name="TextBox 1"/>
+          <p:cNvSpPr txBox="1"/>
+          <p:nvPr/>
+        </p:nvSpPr>
+        <p:spPr>
+          <a:xfrm>
+            <a:off x="457200" y="182880"/>
+            <a:ext cx="11247120" cy="731520"/>
+          </a:xfrm>
+          <a:prstGeom prst="rect">
+            <a:avLst/>
+          </a:prstGeom>
+          <a:noFill/>
+        </p:spPr>
+        <p:txBody>
+          <a:bodyPr wrap="none">
+            <a:spAutoFit/>
+          </a:bodyPr>
+          <a:lstStyle/>
+          <a:p>
+            <a:r>
+              <a:rPr sz="2700" b="1">
+                <a:solidFill>
+                  <a:srgbClr val="1B5EA8"/>
+                </a:solidFill>
+                <a:latin typeface="Meiryo"/>
+              </a:rPr>
+              <a:t>まとめ — ゲーム AI は「目的ファースト」で環境を設計する</a:t>
+            </a:r>
+          </a:p>
+        </p:txBody>
+      </p:sp>
+      <p:sp>
+        <p:nvSpPr>
+          <p:cNvPr id="3" name="TextBox 2"/>
+          <p:cNvSpPr txBox="1"/>
+          <p:nvPr/>
+        </p:nvSpPr>
+        <p:spPr>
+          <a:xfrm>
+            <a:off x="548640" y="1234440"/>
             <a:ext cx="11064240" cy="5486400"/>
           </a:xfrm>
           <a:prstGeom prst="rect">
@@ -8691,13 +9300,109 @@
               </a:spcAft>
             </a:pPr>
             <a:r>
-              <a:rPr sz="1800" b="1">
+              <a:rPr sz="1600" b="1">
+                <a:solidFill>
+                  <a:srgbClr val="1B5EA8"/>
+                </a:solidFill>
+                <a:latin typeface="Meiryo"/>
+              </a:rPr>
+              <a:t>最大の学び: 良いゲーム AI は「ゲームの要件」次第 — 設計前に目的を定める</a:t>
+            </a:r>
+          </a:p>
+          <a:p>
+            <a:pPr lvl="1">
+              <a:spcAft>
+                <a:spcPts val="200"/>
+              </a:spcAft>
+            </a:pPr>
+            <a:r>
+              <a:rPr sz="1400" b="0">
+                <a:solidFill>
+                  <a:srgbClr val="595959"/>
+                </a:solidFill>
+                <a:latin typeface="Meiryo"/>
+              </a:rPr>
+              <a:t>・目的はゲームごとに大きく異なる → 何を模擬し何を省くかは目的が決める</a:t>
+            </a:r>
+          </a:p>
+          <a:p>
+            <a:pPr lvl="1">
+              <a:spcAft>
+                <a:spcPts val="200"/>
+              </a:spcAft>
+            </a:pPr>
+            <a:r>
+              <a:rPr sz="1400" b="0">
+                <a:solidFill>
+                  <a:srgbClr val="595959"/>
+                </a:solidFill>
+                <a:latin typeface="Meiryo"/>
+              </a:rPr>
+              <a:t>・今回の目的 (レース) が要求した模擬: 壁・摩擦・車サイズ・トラックサイズ など</a:t>
+            </a:r>
+          </a:p>
+          <a:p>
+            <a:pPr lvl="1">
+              <a:spcAft>
+                <a:spcPts val="200"/>
+              </a:spcAft>
+            </a:pPr>
+            <a:r>
+              <a:rPr sz="1400" b="0">
+                <a:solidFill>
+                  <a:srgbClr val="595959"/>
+                </a:solidFill>
+                <a:latin typeface="Meiryo"/>
+              </a:rPr>
+              <a:t>・別ゲームでは模擬対象が変わる (地形・武器・群衆・経済…) — 汎用の正解はない</a:t>
+            </a:r>
+          </a:p>
+          <a:p>
+            <a:pPr>
+              <a:spcAft>
+                <a:spcPts val="600"/>
+              </a:spcAft>
+            </a:pPr>
+            <a:r>
+              <a:rPr sz="1600" b="1">
                 <a:solidFill>
                   <a:srgbClr val="222222"/>
                 </a:solidFill>
                 <a:latin typeface="Meiryo"/>
               </a:rPr>
-              <a:t>環境の進化: 行動 → 壁 → 報酬 → 観測 → トラックの 5 段階で「ゲームのレース」に到達</a:t>
+              <a:t>技術の振り返り</a:t>
+            </a:r>
+          </a:p>
+          <a:p>
+            <a:pPr lvl="1">
+              <a:spcAft>
+                <a:spcPts val="200"/>
+              </a:spcAft>
+            </a:pPr>
+            <a:r>
+              <a:rPr sz="1400" b="0">
+                <a:solidFill>
+                  <a:srgbClr val="595959"/>
+                </a:solidFill>
+                <a:latin typeface="Meiryo"/>
+              </a:rPr>
+              <a:t>・環境の 5 段階進化 (行動→壁→報酬→観測→トラック) + 報酬の経済設計 → 6 万 step で周回</a:t>
+            </a:r>
+          </a:p>
+          <a:p>
+            <a:pPr lvl="1">
+              <a:spcAft>
+                <a:spcPts val="200"/>
+              </a:spcAft>
+            </a:pPr>
+            <a:r>
+              <a:rPr sz="1400" b="0">
+                <a:solidFill>
+                  <a:srgbClr val="595959"/>
+                </a:solidFill>
+                <a:latin typeface="Meiryo"/>
+              </a:rPr>
+              <a:t>・汎化 = 自己位置を見せない観測の帰納バイアス / 図・動画はノートブックから再現可</a:t>
             </a:r>
           </a:p>
           <a:p>
@@ -8707,77 +9412,13 @@
               </a:spcAft>
             </a:pPr>
             <a:r>
-              <a:rPr sz="1800" b="1">
-                <a:solidFill>
-                  <a:srgbClr val="222222"/>
-                </a:solidFill>
-                <a:latin typeface="Meiryo"/>
-              </a:rPr>
-              <a:t>抜け道 (ショートカット / wall-riding / 壁這い) は報酬の経済設計で排除 → 6 万 step で周回</a:t>
-            </a:r>
-          </a:p>
-          <a:p>
-            <a:pPr>
-              <a:spcAft>
-                <a:spcPts val="600"/>
-              </a:spcAft>
-            </a:pPr>
-            <a:r>
-              <a:rPr sz="1800" b="1">
-                <a:solidFill>
-                  <a:srgbClr val="222222"/>
-                </a:solidFill>
-                <a:latin typeface="Meiryo"/>
-              </a:rPr>
-              <a:t>汎化 = 自己位置を見せない観測の帰納バイアス (ランダム化はその補強)</a:t>
-            </a:r>
-          </a:p>
-          <a:p>
-            <a:pPr>
-              <a:spcAft>
-                <a:spcPts val="600"/>
-              </a:spcAft>
-            </a:pPr>
-            <a:r>
-              <a:rPr sz="1800" b="1">
-                <a:solidFill>
-                  <a:srgbClr val="222222"/>
-                </a:solidFill>
-                <a:latin typeface="Meiryo"/>
-              </a:rPr>
-              <a:t>実ゲームギャップは一覧化済み: 数値一致移植で消す + デプロイ側フィルタで吸収の二層</a:t>
-            </a:r>
-          </a:p>
-          <a:p>
-            <a:pPr>
-              <a:spcAft>
-                <a:spcPts val="600"/>
-              </a:spcAft>
-            </a:pPr>
-            <a:r>
-              <a:rPr sz="1800" b="0">
-                <a:solidFill>
-                  <a:srgbClr val="222222"/>
-                </a:solidFill>
-                <a:latin typeface="Meiryo"/>
-              </a:rPr>
-              <a:t>本スライドの図・動画はすべてノートブックから再現可能 (Presentation Media セル)</a:t>
-            </a:r>
-          </a:p>
-          <a:p>
-            <a:pPr>
-              <a:spcAft>
-                <a:spcPts val="600"/>
-              </a:spcAft>
-            </a:pPr>
-            <a:r>
-              <a:rPr sz="1800" b="0">
-                <a:solidFill>
-                  <a:srgbClr val="222222"/>
-                </a:solidFill>
-                <a:latin typeface="Meiryo"/>
-              </a:rPr>
-              <a:t>次: RE Engine 実走検証 / 壁摩擦・動力学の実測適合 / NPC レース</a:t>
+              <a:rPr sz="1600" b="1">
+                <a:solidFill>
+                  <a:srgbClr val="B32D2D"/>
+                </a:solidFill>
+                <a:latin typeface="Meiryo"/>
+              </a:rPr>
+              <a:t>残課題: ONNX 全レイヤ対応を完了し RE Engine で実走 → 壁摩擦・動力学の実測適合</a:t>
             </a:r>
           </a:p>
         </p:txBody>

--- a/docs/CircuitAgents_intro_ja.pptx
+++ b/docs/CircuitAgents_intro_ja.pptx
@@ -21,6 +21,9 @@
     <p:sldId id="269" r:id="rId21"/>
     <p:sldId id="270" r:id="rId22"/>
     <p:sldId id="271" r:id="rId23"/>
+    <p:sldId id="277" r:id="rId29"/>
+    <p:sldId id="278" r:id="rId30"/>
+    <p:sldId id="279" r:id="rId31"/>
     <p:sldId id="272" r:id="rId24"/>
     <p:sldId id="273" r:id="rId25"/>
     <p:sldId id="274" r:id="rId26"/>
@@ -7683,6 +7686,530 @@
                 <a:latin typeface="Meiryo"/>
               </a:rPr>
               <a:t>次: RE Engine 実走検証 / 壁摩擦・動力学の実測適合 / NPC レース</a:t>
+            </a:r>
+          </a:p>
+        </p:txBody>
+      </p:sp>
+    </p:spTree>
+  </p:cSld>
+  <p:clrMapOvr>
+    <a:masterClrMapping/>
+  </p:clrMapOvr>
+</p:sld>
+</file>
+
+<file path=ppt/slides/slide22.xml><?xml version="1.0" encoding="utf-8"?>
+<p:sld xmlns:a="http://schemas.openxmlformats.org/drawingml/2006/main" xmlns:p="http://schemas.openxmlformats.org/presentationml/2006/main" xmlns:r="http://schemas.openxmlformats.org/officeDocument/2006/relationships">
+  <p:cSld>
+    <p:spTree>
+      <p:nvGrpSpPr>
+        <p:cNvPr id="1" name=""/>
+        <p:cNvGrpSpPr/>
+        <p:nvPr/>
+      </p:nvGrpSpPr>
+      <p:grpSpPr/>
+      <p:sp>
+        <p:nvSpPr>
+          <p:cNvPr id="2" name="TextBox 1"/>
+          <p:cNvSpPr txBox="1"/>
+          <p:nvPr/>
+        </p:nvSpPr>
+        <p:spPr>
+          <a:xfrm>
+            <a:off x="457200" y="182880"/>
+            <a:ext cx="11247120" cy="731520"/>
+          </a:xfrm>
+          <a:prstGeom prst="rect">
+            <a:avLst/>
+          </a:prstGeom>
+          <a:noFill/>
+        </p:spPr>
+        <p:txBody>
+          <a:bodyPr wrap="none">
+            <a:spAutoFit/>
+          </a:bodyPr>
+          <a:lstStyle/>
+          <a:p>
+            <a:r>
+              <a:rPr sz="2700" b="1">
+                <a:solidFill>
+                  <a:srgbClr val="1B5EA8"/>
+                </a:solidFill>
+                <a:latin typeface="Meiryo"/>
+              </a:rPr>
+              <a:t>TensorBoard 指標の読み方 — チートシート</a:t>
+            </a:r>
+          </a:p>
+        </p:txBody>
+      </p:sp>
+      <p:sp>
+        <p:nvSpPr>
+          <p:cNvPr id="3" name="TextBox 2"/>
+          <p:cNvSpPr txBox="1"/>
+          <p:nvPr/>
+        </p:nvSpPr>
+        <p:spPr>
+          <a:xfrm>
+            <a:off x="548640" y="1051560"/>
+            <a:ext cx="5486400" cy="5577840"/>
+          </a:xfrm>
+          <a:prstGeom prst="rect">
+            <a:avLst/>
+          </a:prstGeom>
+          <a:noFill/>
+        </p:spPr>
+        <p:txBody>
+          <a:bodyPr wrap="square">
+            <a:spAutoFit/>
+          </a:bodyPr>
+          <a:lstStyle/>
+          <a:p>
+            <a:pPr/>
+            <a:r>
+              <a:rPr sz="1600" b="1">
+                <a:solidFill>
+                  <a:srgbClr val="222222"/>
+                </a:solidFill>
+                <a:latin typeface="Meiryo"/>
+              </a:rPr>
+              <a:t>リターン系 (per-step 比で読む)</a:t>
+            </a:r>
+          </a:p>
+          <a:p>
+            <a:pPr lvl="1"/>
+            <a:r>
+              <a:rPr sz="1300" b="0">
+                <a:solidFill>
+                  <a:srgbClr val="595959"/>
+                </a:solidFill>
+                <a:latin typeface="Meiryo"/>
+              </a:rPr>
+              <a:t>・rollout/ep_rew_mean・ep_len_mean: 報酬は 1 step [0,1] → リターン ≈ 生存 step × 報酬率。絶対値の増減はまずエピソード長要因を疑う</a:t>
+            </a:r>
+          </a:p>
+          <a:p>
+            <a:pPr lvl="1"/>
+            <a:r>
+              <a:rPr sz="1300" b="0">
+                <a:solidFill>
+                  <a:srgbClr val="595959"/>
+                </a:solidFill>
+                <a:latin typeface="Meiryo"/>
+              </a:rPr>
+              <a:t>・eval/mean_reward: EvalCallback の決定論評価 = ベストモデル選択の根拠。eval の duration が違うと上限も違う (fast 4000 step / 汎化 600 step)</a:t>
+            </a:r>
+          </a:p>
+          <a:p>
+            <a:pPr/>
+            <a:r>
+              <a:rPr sz="1600" b="1">
+                <a:solidFill>
+                  <a:srgbClr val="222222"/>
+                </a:solidFill>
+                <a:latin typeface="Meiryo"/>
+              </a:rPr>
+              <a:t>探索系</a:t>
+            </a:r>
+          </a:p>
+          <a:p>
+            <a:pPr lvl="1"/>
+            <a:r>
+              <a:rPr sz="1300" b="0">
+                <a:solidFill>
+                  <a:srgbClr val="595959"/>
+                </a:solidFill>
+                <a:latin typeface="Meiryo"/>
+              </a:rPr>
+              <a:t>・train/std: ガウス方策の σ。1.0 → 0.15〜0.18 へ単調減が健康形。増えるなら ent_coef 過大 (fastdev では σ→1.6 の実測事故)</a:t>
+            </a:r>
+          </a:p>
+          <a:p>
+            <a:pPr lvl="1"/>
+            <a:r>
+              <a:rPr sz="1300" b="0">
+                <a:solidFill>
+                  <a:srgbClr val="595959"/>
+                </a:solidFill>
+                <a:latin typeface="Meiryo"/>
+              </a:rPr>
+              <a:t>・entropy_loss = −エントロピー: σ &lt; 0.24 でガウスのエントロピーは負 → 曲線が正に出るのは収束のサイン</a:t>
+            </a:r>
+          </a:p>
+        </p:txBody>
+      </p:sp>
+      <p:sp>
+        <p:nvSpPr>
+          <p:cNvPr id="4" name="TextBox 3"/>
+          <p:cNvSpPr txBox="1"/>
+          <p:nvPr/>
+        </p:nvSpPr>
+        <p:spPr>
+          <a:xfrm>
+            <a:off x="6217920" y="1051560"/>
+            <a:ext cx="5486400" cy="5577840"/>
+          </a:xfrm>
+          <a:prstGeom prst="rect">
+            <a:avLst/>
+          </a:prstGeom>
+          <a:noFill/>
+        </p:spPr>
+        <p:txBody>
+          <a:bodyPr wrap="square">
+            <a:spAutoFit/>
+          </a:bodyPr>
+          <a:lstStyle/>
+          <a:p>
+            <a:pPr/>
+            <a:r>
+              <a:rPr sz="1600" b="1">
+                <a:solidFill>
+                  <a:srgbClr val="222222"/>
+                </a:solidFill>
+                <a:latin typeface="Meiryo"/>
+              </a:rPr>
+              <a:t>更新の大きさ</a:t>
+            </a:r>
+          </a:p>
+          <a:p>
+            <a:pPr lvl="1"/>
+            <a:r>
+              <a:rPr sz="1300" b="0">
+                <a:solidFill>
+                  <a:srgbClr val="595959"/>
+                </a:solidFill>
+                <a:latin typeface="Meiryo"/>
+              </a:rPr>
+              <a:t>・learning_rate: P1 は線形減衰 2e-4→~0 (仕様。停滞ではない) / P2 は定数 1e-4</a:t>
+            </a:r>
+          </a:p>
+          <a:p>
+            <a:pPr lvl="1"/>
+            <a:r>
+              <a:rPr sz="1300" b="0">
+                <a:solidFill>
+                  <a:srgbClr val="595959"/>
+                </a:solidFill>
+                <a:latin typeface="Meiryo"/>
+              </a:rPr>
+              <a:t>・approx_kl・clip_fraction: 1 更新の方策移動量とクリップ率。KL &gt; 0.1 が常態なら epochs/LR 過大 → 終盤 ckpt でなく EvalCallback ベストを使う根拠</a:t>
+            </a:r>
+          </a:p>
+          <a:p>
+            <a:pPr/>
+            <a:r>
+              <a:rPr sz="1600" b="1">
+                <a:solidFill>
+                  <a:srgbClr val="222222"/>
+                </a:solidFill>
+                <a:latin typeface="Meiryo"/>
+              </a:rPr>
+              <a:t>批評家 (価値関数) 系</a:t>
+            </a:r>
+          </a:p>
+          <a:p>
+            <a:pPr lvl="1"/>
+            <a:r>
+              <a:rPr sz="1300" b="0">
+                <a:solidFill>
+                  <a:srgbClr val="595959"/>
+                </a:solidFill>
+                <a:latin typeface="Meiryo"/>
+              </a:rPr>
+              <a:t>・explained_variance: 1=完璧 / 0=平均並み / 負=有害。序盤の負は正常、上昇傾向だけ見る</a:t>
+            </a:r>
+          </a:p>
+          <a:p>
+            <a:pPr lvl="1"/>
+            <a:r>
+              <a:rPr sz="1300" b="0">
+                <a:solidFill>
+                  <a:srgbClr val="595959"/>
+                </a:solidFill>
+                <a:latin typeface="Meiryo"/>
+              </a:rPr>
+              <a:t>・value_loss: リターンスケールに比例 — 絶対値の比較は無意味。リターン分散の増減の鏡</a:t>
+            </a:r>
+          </a:p>
+          <a:p>
+            <a:pPr lvl="1"/>
+            <a:r>
+              <a:rPr sz="1300" b="0">
+                <a:solidFill>
+                  <a:srgbClr val="595959"/>
+                </a:solidFill>
+                <a:latin typeface="Meiryo"/>
+              </a:rPr>
+              <a:t>・loss・policy_gradient_loss: クリッピングにより大きさの診断価値は薄い</a:t>
+            </a:r>
+          </a:p>
+        </p:txBody>
+      </p:sp>
+    </p:spTree>
+  </p:cSld>
+  <p:clrMapOvr>
+    <a:masterClrMapping/>
+  </p:clrMapOvr>
+</p:sld>
+</file>
+
+<file path=ppt/slides/slide23.xml><?xml version="1.0" encoding="utf-8"?>
+<p:sld xmlns:a="http://schemas.openxmlformats.org/drawingml/2006/main" xmlns:p="http://schemas.openxmlformats.org/presentationml/2006/main" xmlns:r="http://schemas.openxmlformats.org/officeDocument/2006/relationships">
+  <p:cSld>
+    <p:spTree>
+      <p:nvGrpSpPr>
+        <p:cNvPr id="1" name=""/>
+        <p:cNvGrpSpPr/>
+        <p:nvPr/>
+      </p:nvGrpSpPr>
+      <p:grpSpPr/>
+      <p:sp>
+        <p:nvSpPr>
+          <p:cNvPr id="2" name="TextBox 1"/>
+          <p:cNvSpPr txBox="1"/>
+          <p:nvPr/>
+        </p:nvSpPr>
+        <p:spPr>
+          <a:xfrm>
+            <a:off x="457200" y="182880"/>
+            <a:ext cx="11247120" cy="731520"/>
+          </a:xfrm>
+          <a:prstGeom prst="rect">
+            <a:avLst/>
+          </a:prstGeom>
+          <a:noFill/>
+        </p:spPr>
+        <p:txBody>
+          <a:bodyPr wrap="none">
+            <a:spAutoFit/>
+          </a:bodyPr>
+          <a:lstStyle/>
+          <a:p>
+            <a:r>
+              <a:rPr sz="2700" b="1">
+                <a:solidFill>
+                  <a:srgbClr val="1B5EA8"/>
+                </a:solidFill>
+                <a:latin typeface="Meiryo"/>
+              </a:rPr>
+              <a:t>実測 (1) fast トラック agent — runs/sb3_ppo_cnn_full (401 万 step)</a:t>
+            </a:r>
+          </a:p>
+        </p:txBody>
+      </p:sp>
+      <p:pic>
+        <p:nvPicPr>
+          <p:cNvPr id="3" name="Picture 2" descr="tb_task2_fast_indicators.png"/>
+          <p:cNvPicPr>
+            <a:picLocks noChangeAspect="1"/>
+          </p:cNvPicPr>
+          <p:nvPr/>
+        </p:nvPicPr>
+        <p:blipFill>
+          <a:blip r:embed="rId2"/>
+          <a:stretch>
+            <a:fillRect/>
+          </a:stretch>
+        </p:blipFill>
+        <p:spPr>
+          <a:xfrm>
+            <a:off x="790956" y="960120"/>
+            <a:ext cx="10607040" cy="4186989"/>
+          </a:xfrm>
+          <a:prstGeom prst="rect">
+            <a:avLst/>
+          </a:prstGeom>
+        </p:spPr>
+      </p:pic>
+      <p:sp>
+        <p:nvSpPr>
+          <p:cNvPr id="4" name="TextBox 3"/>
+          <p:cNvSpPr txBox="1"/>
+          <p:nvPr/>
+        </p:nvSpPr>
+        <p:spPr>
+          <a:xfrm>
+            <a:off x="548640" y="5284269"/>
+            <a:ext cx="11064240" cy="1528010"/>
+          </a:xfrm>
+          <a:prstGeom prst="rect">
+            <a:avLst/>
+          </a:prstGeom>
+          <a:noFill/>
+        </p:spPr>
+        <p:txBody>
+          <a:bodyPr wrap="square">
+            <a:spAutoFit/>
+          </a:bodyPr>
+          <a:lstStyle/>
+          <a:p>
+            <a:pPr lvl="1"/>
+            <a:r>
+              <a:rPr sz="1300" b="0">
+                <a:solidFill>
+                  <a:srgbClr val="595959"/>
+                </a:solidFill>
+                <a:latin typeface="Meiryo"/>
+              </a:rPr>
+              <a:t>・フェーズ 1 末: リターン 3498 / 3975 step = 0.88/step — 800 秒打ち切り上限に張り付き (無限周回)。KL 6.6e-4 / clip 0.3% = 収束</a:t>
+            </a:r>
+          </a:p>
+          <a:p>
+            <a:pPr lvl="1"/>
+            <a:r>
+              <a:rPr sz="1300" b="0">
+                <a:solidFill>
+                  <a:srgbClr val="595959"/>
+                </a:solidFill>
+                <a:latin typeface="Meiryo"/>
+              </a:rPr>
+              <a:t>・フェーズ 2 (破線以降、NPC 追加): 177 / 270 step = 0.65/step — 「低下」ではなく終端が truncation → 衝突に変わった正常形</a:t>
+            </a:r>
+          </a:p>
+          <a:p>
+            <a:pPr lvl="1"/>
+            <a:r>
+              <a:rPr sz="1300" b="0">
+                <a:solidFill>
+                  <a:srgbClr val="595959"/>
+                </a:solidFill>
+                <a:latin typeface="Meiryo"/>
+              </a:rPr>
+              <a:t>・終盤は KL 0.73 / clip 77% のチャーン → 最終 ckpt ではなく EvalCallback ベストを採用。σ は 1.0 → 0.165 で焼きなまし完了</a:t>
+            </a:r>
+          </a:p>
+        </p:txBody>
+      </p:sp>
+    </p:spTree>
+  </p:cSld>
+  <p:clrMapOvr>
+    <a:masterClrMapping/>
+  </p:clrMapOvr>
+</p:sld>
+</file>
+
+<file path=ppt/slides/slide24.xml><?xml version="1.0" encoding="utf-8"?>
+<p:sld xmlns:a="http://schemas.openxmlformats.org/drawingml/2006/main" xmlns:p="http://schemas.openxmlformats.org/presentationml/2006/main" xmlns:r="http://schemas.openxmlformats.org/officeDocument/2006/relationships">
+  <p:cSld>
+    <p:spTree>
+      <p:nvGrpSpPr>
+        <p:cNvPr id="1" name=""/>
+        <p:cNvGrpSpPr/>
+        <p:nvPr/>
+      </p:nvGrpSpPr>
+      <p:grpSpPr/>
+      <p:sp>
+        <p:nvSpPr>
+          <p:cNvPr id="2" name="TextBox 1"/>
+          <p:cNvSpPr txBox="1"/>
+          <p:nvPr/>
+        </p:nvSpPr>
+        <p:spPr>
+          <a:xfrm>
+            <a:off x="457200" y="182880"/>
+            <a:ext cx="11247120" cy="731520"/>
+          </a:xfrm>
+          <a:prstGeom prst="rect">
+            <a:avLst/>
+          </a:prstGeom>
+          <a:noFill/>
+        </p:spPr>
+        <p:txBody>
+          <a:bodyPr wrap="none">
+            <a:spAutoFit/>
+          </a:bodyPr>
+          <a:lstStyle/>
+          <a:p>
+            <a:r>
+              <a:rPr sz="2700" b="1">
+                <a:solidFill>
+                  <a:srgbClr val="1B5EA8"/>
+                </a:solidFill>
+                <a:latin typeface="Meiryo"/>
+              </a:rPr>
+              <a:t>実測 (2) 汎化 agent — runs/sb3_ppo_gen_cnn (451 万 step)</a:t>
+            </a:r>
+          </a:p>
+        </p:txBody>
+      </p:sp>
+      <p:pic>
+        <p:nvPicPr>
+          <p:cNvPr id="3" name="Picture 2" descr="tb_task3_gen_indicators.png"/>
+          <p:cNvPicPr>
+            <a:picLocks noChangeAspect="1"/>
+          </p:cNvPicPr>
+          <p:nvPr/>
+        </p:nvPicPr>
+        <p:blipFill>
+          <a:blip r:embed="rId2"/>
+          <a:stretch>
+            <a:fillRect/>
+          </a:stretch>
+        </p:blipFill>
+        <p:spPr>
+          <a:xfrm>
+            <a:off x="790956" y="960120"/>
+            <a:ext cx="10607040" cy="4186989"/>
+          </a:xfrm>
+          <a:prstGeom prst="rect">
+            <a:avLst/>
+          </a:prstGeom>
+        </p:spPr>
+      </p:pic>
+      <p:sp>
+        <p:nvSpPr>
+          <p:cNvPr id="4" name="TextBox 3"/>
+          <p:cNvSpPr txBox="1"/>
+          <p:nvPr/>
+        </p:nvSpPr>
+        <p:spPr>
+          <a:xfrm>
+            <a:off x="548640" y="5284269"/>
+            <a:ext cx="11064240" cy="1528010"/>
+          </a:xfrm>
+          <a:prstGeom prst="rect">
+            <a:avLst/>
+          </a:prstGeom>
+          <a:noFill/>
+        </p:spPr>
+        <p:txBody>
+          <a:bodyPr wrap="square">
+            <a:spAutoFit/>
+          </a:bodyPr>
+          <a:lstStyle/>
+          <a:p>
+            <a:pPr lvl="1"/>
+            <a:r>
+              <a:rPr sz="1300" b="0">
+                <a:solidFill>
+                  <a:srgbClr val="595959"/>
+                </a:solidFill>
+                <a:latin typeface="Meiryo"/>
+              </a:rPr>
+              <a:t>・フェーズ 1 末: 2953 / 3236 step = 0.91/step — ランダムトラックでも打ち切り上限級で周回</a:t>
+            </a:r>
+          </a:p>
+          <a:p>
+            <a:pPr lvl="1"/>
+            <a:r>
+              <a:rPr sz="1300" b="0">
+                <a:solidFill>
+                  <a:srgbClr val="595959"/>
+                </a:solidFill>
+                <a:latin typeface="Meiryo"/>
+              </a:rPr>
+              <a:t>・eval は duration 120 秒 (600 step 上限) — 最大 517 = 0.86/step。fast ランと絶対値の比較は不可 (per-step で見る)</a:t>
+            </a:r>
+          </a:p>
+          <a:p>
+            <a:pPr lvl="1"/>
+            <a:r>
+              <a:rPr sz="1300" b="0">
+                <a:solidFill>
+                  <a:srgbClr val="595959"/>
+                </a:solidFill>
+                <a:latin typeface="Meiryo"/>
+              </a:rPr>
+              <a:t>・explained_variance 最終 0.63 (fast 0.32 より良好)。value_loss 117 はトラック + NPC ランダム性によるリターン分散の反映で悪化ではない</a:t>
             </a:r>
           </a:p>
         </p:txBody>

--- a/docs/CircuitAgents_intro_ja.pptx
+++ b/docs/CircuitAgents_intro_ja.pptx
@@ -28,6 +28,7 @@
     <p:sldId id="273" r:id="rId25"/>
     <p:sldId id="274" r:id="rId26"/>
     <p:sldId id="275" r:id="rId27"/>
+    <p:sldId id="280" r:id="rId32"/>
     <p:sldId id="276" r:id="rId28"/>
   </p:sldIdLst>
   <p:sldSz cx="12191695" cy="6858000" type="screen4x3"/>
@@ -6487,7 +6488,7 @@
                 </a:solidFill>
                 <a:latin typeface="Meiryo"/>
               </a:rPr>
-              <a:t>実ゲームとのギャップ — シミュレーションが省いているもの</a:t>
+              <a:t>TensorBoard 指標の読み方 — チートシート</a:t>
             </a:r>
           </a:p>
         </p:txBody>
@@ -6500,8 +6501,8 @@
         </p:nvSpPr>
         <p:spPr>
           <a:xfrm>
-            <a:off x="548640" y="1143000"/>
-            <a:ext cx="11064240" cy="5486400"/>
+            <a:off x="548640" y="1051560"/>
+            <a:ext cx="5486400" cy="5577840"/>
           </a:xfrm>
           <a:prstGeom prst="rect">
             <a:avLst/>
@@ -6514,27 +6515,19 @@
           </a:bodyPr>
           <a:lstStyle/>
           <a:p>
-            <a:pPr>
-              <a:spcAft>
-                <a:spcPts val="600"/>
-              </a:spcAft>
-            </a:pPr>
-            <a:r>
-              <a:rPr sz="1500" b="1">
+            <a:pPr/>
+            <a:r>
+              <a:rPr sz="1600" b="1">
                 <a:solidFill>
                   <a:srgbClr val="222222"/>
                 </a:solidFill>
                 <a:latin typeface="Meiryo"/>
               </a:rPr>
-              <a:t>車両動力学</a:t>
-            </a:r>
-          </a:p>
-          <a:p>
-            <a:pPr lvl="1">
-              <a:spcAft>
-                <a:spcPts val="200"/>
-              </a:spcAft>
-            </a:pPr>
+              <a:t>リターン系 (per-step 比で読む)</a:t>
+            </a:r>
+          </a:p>
+          <a:p>
+            <a:pPr lvl="1"/>
             <a:r>
               <a:rPr sz="1300" b="0">
                 <a:solidFill>
@@ -6542,15 +6535,11 @@
                 </a:solidFill>
                 <a:latin typeface="Meiryo"/>
               </a:rPr>
-              <a:t>・線形タイヤ (グリップ飽和なし) / 質量 1 kg 正規化 / 荷重移動・サスなし</a:t>
-            </a:r>
-          </a:p>
-          <a:p>
-            <a:pPr lvl="1">
-              <a:spcAft>
-                <a:spcPts val="200"/>
-              </a:spcAft>
-            </a:pPr>
+              <a:t>・rollout/ep_rew_mean・ep_len_mean: 報酬は 1 step [0,1] → リターン ≈ 生存 step × 報酬率。絶対値の増減はまずエピソード長要因を疑う</a:t>
+            </a:r>
+          </a:p>
+          <a:p>
+            <a:pPr lvl="1"/>
             <a:r>
               <a:rPr sz="1300" b="0">
                 <a:solidFill>
@@ -6558,31 +6547,23 @@
                 </a:solidFill>
                 <a:latin typeface="Meiryo"/>
               </a:rPr>
-              <a:t>・加速度は直接指令: エンジン/ブレーキ特性・ギア・空気抵抗・転がり抵抗なし (惰性で減速しない)</a:t>
-            </a:r>
-          </a:p>
-          <a:p>
-            <a:pPr>
-              <a:spcAft>
-                <a:spcPts val="600"/>
-              </a:spcAft>
-            </a:pPr>
-            <a:r>
-              <a:rPr sz="1500" b="1">
+              <a:t>・eval/mean_reward: EvalCallback の決定論評価 = ベストモデル選択の根拠。eval の duration が違うと上限も違う (fast 4000 step / 汎化 600 step)</a:t>
+            </a:r>
+          </a:p>
+          <a:p>
+            <a:pPr/>
+            <a:r>
+              <a:rPr sz="1600" b="1">
                 <a:solidFill>
                   <a:srgbClr val="222222"/>
                 </a:solidFill>
                 <a:latin typeface="Meiryo"/>
               </a:rPr>
-              <a:t>壁・衝突</a:t>
-            </a:r>
-          </a:p>
-          <a:p>
-            <a:pPr lvl="1">
-              <a:spcAft>
-                <a:spcPts val="200"/>
-              </a:spcAft>
-            </a:pPr>
+              <a:t>探索系</a:t>
+            </a:r>
+          </a:p>
+          <a:p>
+            <a:pPr lvl="1"/>
             <a:r>
               <a:rPr sz="1300" b="0">
                 <a:solidFill>
@@ -6590,15 +6571,11 @@
                 </a:solidFill>
                 <a:latin typeface="Meiryo"/>
               </a:rPr>
-              <a:t>・停止壁は理想化 (速度を消すだけ): 衝突インパルス・スピン・ダメージなし</a:t>
-            </a:r>
-          </a:p>
-          <a:p>
-            <a:pPr lvl="1">
-              <a:spcAft>
-                <a:spcPts val="200"/>
-              </a:spcAft>
-            </a:pPr>
+              <a:t>・train/std: ガウス方策の σ。1.0 → 0.15〜0.18 へ単調減が健康形。増えるなら ent_coef 過大 (fastdev では σ→1.6 の実測事故)</a:t>
+            </a:r>
+          </a:p>
+          <a:p>
+            <a:pPr lvl="1"/>
             <a:r>
               <a:rPr sz="1300" b="0">
                 <a:solidFill>
@@ -6606,31 +6583,46 @@
                 </a:solidFill>
                 <a:latin typeface="Meiryo"/>
               </a:rPr>
-              <a:t>・壁摩擦 0.6 は仮値 — 実ゲームの壁材質に合わせた再調整ポイント</a:t>
-            </a:r>
-          </a:p>
-          <a:p>
-            <a:pPr>
-              <a:spcAft>
-                <a:spcPts val="600"/>
-              </a:spcAft>
-            </a:pPr>
-            <a:r>
-              <a:rPr sz="1500" b="1">
+              <a:t>・entropy_loss = −エントロピー: σ &lt; 0.24 でガウスのエントロピーは負 → 曲線が正に出るのは収束のサイン</a:t>
+            </a:r>
+          </a:p>
+        </p:txBody>
+      </p:sp>
+      <p:sp>
+        <p:nvSpPr>
+          <p:cNvPr id="4" name="TextBox 3"/>
+          <p:cNvSpPr txBox="1"/>
+          <p:nvPr/>
+        </p:nvSpPr>
+        <p:spPr>
+          <a:xfrm>
+            <a:off x="6217920" y="1051560"/>
+            <a:ext cx="5486400" cy="5577840"/>
+          </a:xfrm>
+          <a:prstGeom prst="rect">
+            <a:avLst/>
+          </a:prstGeom>
+          <a:noFill/>
+        </p:spPr>
+        <p:txBody>
+          <a:bodyPr wrap="square">
+            <a:spAutoFit/>
+          </a:bodyPr>
+          <a:lstStyle/>
+          <a:p>
+            <a:pPr/>
+            <a:r>
+              <a:rPr sz="1600" b="1">
                 <a:solidFill>
                   <a:srgbClr val="222222"/>
                 </a:solidFill>
                 <a:latin typeface="Meiryo"/>
               </a:rPr>
-              <a:t>制御・タイミング</a:t>
-            </a:r>
-          </a:p>
-          <a:p>
-            <a:pPr lvl="1">
-              <a:spcAft>
-                <a:spcPts val="200"/>
-              </a:spcAft>
-            </a:pPr>
+              <a:t>更新の大きさ</a:t>
+            </a:r>
+          </a:p>
+          <a:p>
+            <a:pPr lvl="1"/>
             <a:r>
               <a:rPr sz="1300" b="0">
                 <a:solidFill>
@@ -6638,31 +6630,35 @@
                 </a:solidFill>
                 <a:latin typeface="Meiryo"/>
               </a:rPr>
-              <a:t>・ステア瞬時応答 (アクチュエータ遅れなし) / 5 Hz 等間隔・推論レイテンシ未モデル化</a:t>
-            </a:r>
-          </a:p>
-          <a:p>
-            <a:pPr>
-              <a:spcAft>
-                <a:spcPts val="600"/>
-              </a:spcAft>
-            </a:pPr>
-            <a:r>
-              <a:rPr sz="1500" b="1">
+              <a:t>・learning_rate: P1 は線形減衰 2e-4→~0 (仕様。停滞ではない) / P2 は定数 1e-4</a:t>
+            </a:r>
+          </a:p>
+          <a:p>
+            <a:pPr lvl="1"/>
+            <a:r>
+              <a:rPr sz="1300" b="0">
+                <a:solidFill>
+                  <a:srgbClr val="595959"/>
+                </a:solidFill>
+                <a:latin typeface="Meiryo"/>
+              </a:rPr>
+              <a:t>・approx_kl・clip_fraction: 1 更新の方策移動量とクリップ率。KL &gt; 0.1 が常態なら epochs/LR 過大 → 終盤 ckpt でなく EvalCallback ベストを使う根拠</a:t>
+            </a:r>
+          </a:p>
+          <a:p>
+            <a:pPr/>
+            <a:r>
+              <a:rPr sz="1600" b="1">
                 <a:solidFill>
                   <a:srgbClr val="222222"/>
                 </a:solidFill>
                 <a:latin typeface="Meiryo"/>
               </a:rPr>
-              <a:t>環境</a:t>
-            </a:r>
-          </a:p>
-          <a:p>
-            <a:pPr lvl="1">
-              <a:spcAft>
-                <a:spcPts val="200"/>
-              </a:spcAft>
-            </a:pPr>
+              <a:t>批評家 (価値関数) 系</a:t>
+            </a:r>
+          </a:p>
+          <a:p>
+            <a:pPr lvl="1"/>
             <a:r>
               <a:rPr sz="1300" b="0">
                 <a:solidFill>
@@ -6670,7 +6666,31 @@
                 </a:solidFill>
                 <a:latin typeface="Meiryo"/>
               </a:rPr>
-              <a:t>・2D 平面: 縁石・バンク・高低差・路面 μ 変化なし / NPC は IDM (ゲーム AI と別物)</a:t>
+              <a:t>・explained_variance: 1=完璧 / 0=平均並み / 負=有害。序盤の負は正常、上昇傾向だけ見る</a:t>
+            </a:r>
+          </a:p>
+          <a:p>
+            <a:pPr lvl="1"/>
+            <a:r>
+              <a:rPr sz="1300" b="0">
+                <a:solidFill>
+                  <a:srgbClr val="595959"/>
+                </a:solidFill>
+                <a:latin typeface="Meiryo"/>
+              </a:rPr>
+              <a:t>・value_loss: リターンスケールに比例 — 絶対値の比較は無意味。リターン分散の増減の鏡</a:t>
+            </a:r>
+          </a:p>
+          <a:p>
+            <a:pPr lvl="1"/>
+            <a:r>
+              <a:rPr sz="1300" b="0">
+                <a:solidFill>
+                  <a:srgbClr val="595959"/>
+                </a:solidFill>
+                <a:latin typeface="Meiryo"/>
+              </a:rPr>
+              <a:t>・loss・policy_gradient_loss: クリッピングにより大きさの診断価値は薄い</a:t>
             </a:r>
           </a:p>
         </p:txBody>
@@ -6722,21 +6742,45 @@
                 </a:solidFill>
                 <a:latin typeface="Meiryo"/>
               </a:rPr>
-              <a:t>ギャップの二層戦略 — 消せるものは消し、残りは吸収する</a:t>
-            </a:r>
-          </a:p>
-        </p:txBody>
-      </p:sp>
-      <p:sp>
-        <p:nvSpPr>
-          <p:cNvPr id="3" name="TextBox 2"/>
+              <a:t>実測 (1) fast トラック agent — runs/sb3_ppo_cnn_full (401 万 step)</a:t>
+            </a:r>
+          </a:p>
+        </p:txBody>
+      </p:sp>
+      <p:pic>
+        <p:nvPicPr>
+          <p:cNvPr id="3" name="Picture 2" descr="tb_task2_fast_indicators.png"/>
+          <p:cNvPicPr>
+            <a:picLocks noChangeAspect="1"/>
+          </p:cNvPicPr>
+          <p:nvPr/>
+        </p:nvPicPr>
+        <p:blipFill>
+          <a:blip r:embed="rId2"/>
+          <a:stretch>
+            <a:fillRect/>
+          </a:stretch>
+        </p:blipFill>
+        <p:spPr>
+          <a:xfrm>
+            <a:off x="790956" y="960120"/>
+            <a:ext cx="10607040" cy="4186989"/>
+          </a:xfrm>
+          <a:prstGeom prst="rect">
+            <a:avLst/>
+          </a:prstGeom>
+        </p:spPr>
+      </p:pic>
+      <p:sp>
+        <p:nvSpPr>
+          <p:cNvPr id="4" name="TextBox 3"/>
           <p:cNvSpPr txBox="1"/>
           <p:nvPr/>
         </p:nvSpPr>
         <p:spPr>
           <a:xfrm>
-            <a:off x="548640" y="1188720"/>
-            <a:ext cx="11064240" cy="5486400"/>
+            <a:off x="548640" y="5284269"/>
+            <a:ext cx="11064240" cy="1528010"/>
           </a:xfrm>
           <a:prstGeom prst="rect">
             <a:avLst/>
@@ -6749,27 +6793,7 @@
           </a:bodyPr>
           <a:lstStyle/>
           <a:p>
-            <a:pPr>
-              <a:spcAft>
-                <a:spcPts val="600"/>
-              </a:spcAft>
-            </a:pPr>
-            <a:r>
-              <a:rPr sz="1500" b="1">
-                <a:solidFill>
-                  <a:srgbClr val="222222"/>
-                </a:solidFill>
-                <a:latin typeface="Meiryo"/>
-              </a:rPr>
-              <a:t>第一層: ギャップ自体を消す</a:t>
-            </a:r>
-          </a:p>
-          <a:p>
-            <a:pPr lvl="1">
-              <a:spcAft>
-                <a:spcPts val="200"/>
-              </a:spcAft>
-            </a:pPr>
+            <a:pPr lvl="1"/>
             <a:r>
               <a:rPr sz="1300" b="0">
                 <a:solidFill>
@@ -6777,31 +6801,11 @@
                 </a:solidFill>
                 <a:latin typeface="Meiryo"/>
               </a:rPr>
-              <a:t>・観測ビット一致 + 物理 1e-7 一致の C# 移植 — 移植起因の挙動差をゼロに</a:t>
-            </a:r>
-          </a:p>
-          <a:p>
-            <a:pPr>
-              <a:spcAft>
-                <a:spcPts val="600"/>
-              </a:spcAft>
-            </a:pPr>
-            <a:r>
-              <a:rPr sz="1500" b="1">
-                <a:solidFill>
-                  <a:srgbClr val="222222"/>
-                </a:solidFill>
-                <a:latin typeface="Meiryo"/>
-              </a:rPr>
-              <a:t>第二層: 残差をデプロイ側フィルタで吸収 (再学習不要)</a:t>
-            </a:r>
-          </a:p>
-          <a:p>
-            <a:pPr lvl="1">
-              <a:spcAft>
-                <a:spcPts val="200"/>
-              </a:spcAft>
-            </a:pPr>
+              <a:t>・フェーズ 1 末: リターン 3498 / 3975 step = 0.88/step — 800 秒打ち切り上限に張り付き (無限周回)。KL 6.6e-4 / clip 0.3% = 収束</a:t>
+            </a:r>
+          </a:p>
+          <a:p>
+            <a:pPr lvl="1"/>
             <a:r>
               <a:rPr sz="1300" b="0">
                 <a:solidFill>
@@ -6809,15 +6813,11 @@
                 </a:solidFill>
                 <a:latin typeface="Meiryo"/>
               </a:rPr>
-              <a:t>・SteeringSmoother (EMA α0.6): 蛇行 34→12 回/100步、直線の中央維持も改善</a:t>
-            </a:r>
-          </a:p>
-          <a:p>
-            <a:pPr lvl="1">
-              <a:spcAft>
-                <a:spcPts val="200"/>
-              </a:spcAft>
-            </a:pPr>
+              <a:t>・フェーズ 2 (破線以降、NPC 追加): 177 / 270 step = 0.65/step — 「低下」ではなく終端が truncation → 衝突に変わった正常形</a:t>
+            </a:r>
+          </a:p>
+          <a:p>
+            <a:pPr lvl="1"/>
             <a:r>
               <a:rPr sz="1300" b="0">
                 <a:solidFill>
@@ -6825,83 +6825,11 @@
                 </a:solidFill>
                 <a:latin typeface="Meiryo"/>
               </a:rPr>
-              <a:t>・CorneringLimiter: ステア速度制限 + 曲率ベース比例ブレーキ (速度床 5 m/s で停止しない)</a:t>
-            </a:r>
-          </a:p>
-          <a:p>
-            <a:pPr lvl="1">
-              <a:spcAft>
-                <a:spcPts val="200"/>
-              </a:spcAft>
-            </a:pPr>
-            <a:r>
-              <a:rPr sz="1300" b="0">
-                <a:solidFill>
-                  <a:srgbClr val="595959"/>
-                </a:solidFill>
-                <a:latin typeface="Meiryo"/>
-              </a:rPr>
-              <a:t>・StuckRecovery: 「前進指示なのに 1 秒 0.3 m 未満」で壁刺さり検出 → バック 1.6 秒</a:t>
-            </a:r>
-          </a:p>
-          <a:p>
-            <a:pPr lvl="2">
-              <a:spcAft>
-                <a:spcPts val="200"/>
-              </a:spcAft>
-            </a:pPr>
-            <a:r>
-              <a:rPr sz="1100" b="0">
-                <a:solidFill>
-                  <a:srgbClr val="595959"/>
-                </a:solidFill>
-                <a:latin typeface="Meiryo"/>
-              </a:rPr>
-              <a:t>− 検証: フィルタ通しでシム内評価 — 周回数維持を確認 (閉ループ変化のチェック)</a:t>
-            </a:r>
-          </a:p>
-          <a:p>
-            <a:pPr>
-              <a:spcAft>
-                <a:spcPts val="600"/>
-              </a:spcAft>
-            </a:pPr>
-            <a:r>
-              <a:rPr sz="1500" b="0">
-                <a:solidFill>
-                  <a:srgbClr val="222222"/>
-                </a:solidFill>
-                <a:latin typeface="Meiryo"/>
-              </a:rPr>
-              <a:t>第三層 (必要時): 壁摩擦・レンジを実測に合わせ環境を再調整して再学習</a:t>
-            </a:r>
-          </a:p>
-        </p:txBody>
-      </p:sp>
-      <p:pic>
-        <p:nvPicPr>
-          <p:cNvPr id="4" name="Picture 3" descr="smoothing_effect.png"/>
-          <p:cNvPicPr>
-            <a:picLocks noChangeAspect="1"/>
-          </p:cNvPicPr>
-          <p:nvPr/>
-        </p:nvPicPr>
-        <p:blipFill>
-          <a:blip r:embed="rId3"/>
-          <a:stretch>
-            <a:fillRect/>
-          </a:stretch>
-        </p:blipFill>
-        <p:spPr>
-          <a:xfrm>
-            <a:off x="6949440" y="4434840"/>
-            <a:ext cx="4846320" cy="1674183"/>
-          </a:xfrm>
-          <a:prstGeom prst="rect">
-            <a:avLst/>
-          </a:prstGeom>
-        </p:spPr>
-      </p:pic>
+              <a:t>・終盤は KL 0.73 / clip 77% のチャーン → 最終 ckpt ではなく EvalCallback ベストを採用。σ は 1.0 → 0.165 で焼きなまし完了</a:t>
+            </a:r>
+          </a:p>
+        </p:txBody>
+      </p:sp>
     </p:spTree>
   </p:cSld>
   <p:clrMapOvr>
@@ -6949,21 +6877,45 @@
                 </a:solidFill>
                 <a:latin typeface="Meiryo"/>
               </a:rPr>
-              <a:t>セットアップとノートブックの使い方</a:t>
-            </a:r>
-          </a:p>
-        </p:txBody>
-      </p:sp>
-      <p:sp>
-        <p:nvSpPr>
-          <p:cNvPr id="3" name="TextBox 2"/>
+              <a:t>実測 (2) 汎化 agent — runs/sb3_ppo_gen_cnn (451 万 step)</a:t>
+            </a:r>
+          </a:p>
+        </p:txBody>
+      </p:sp>
+      <p:pic>
+        <p:nvPicPr>
+          <p:cNvPr id="3" name="Picture 2" descr="tb_task3_gen_indicators.png"/>
+          <p:cNvPicPr>
+            <a:picLocks noChangeAspect="1"/>
+          </p:cNvPicPr>
+          <p:nvPr/>
+        </p:nvPicPr>
+        <p:blipFill>
+          <a:blip r:embed="rId2"/>
+          <a:stretch>
+            <a:fillRect/>
+          </a:stretch>
+        </p:blipFill>
+        <p:spPr>
+          <a:xfrm>
+            <a:off x="790956" y="960120"/>
+            <a:ext cx="10607040" cy="4186989"/>
+          </a:xfrm>
+          <a:prstGeom prst="rect">
+            <a:avLst/>
+          </a:prstGeom>
+        </p:spPr>
+      </p:pic>
+      <p:sp>
+        <p:nvSpPr>
+          <p:cNvPr id="4" name="TextBox 3"/>
           <p:cNvSpPr txBox="1"/>
           <p:nvPr/>
         </p:nvSpPr>
         <p:spPr>
           <a:xfrm>
-            <a:off x="548640" y="1188720"/>
-            <a:ext cx="11064240" cy="5486400"/>
+            <a:off x="548640" y="5284269"/>
+            <a:ext cx="11064240" cy="1528010"/>
           </a:xfrm>
           <a:prstGeom prst="rect">
             <a:avLst/>
@@ -6976,163 +6928,39 @@
           </a:bodyPr>
           <a:lstStyle/>
           <a:p>
-            <a:pPr>
-              <a:spcAft>
-                <a:spcPts val="600"/>
-              </a:spcAft>
-            </a:pPr>
-            <a:r>
-              <a:rPr sz="1600" b="1">
-                <a:solidFill>
-                  <a:srgbClr val="222222"/>
-                </a:solidFill>
-                <a:latin typeface="Meiryo"/>
-              </a:rPr>
-              <a:t>環境構築</a:t>
-            </a:r>
-          </a:p>
-          <a:p>
-            <a:pPr lvl="1">
-              <a:spcAft>
-                <a:spcPts val="200"/>
-              </a:spcAft>
-            </a:pPr>
-            <a:r>
-              <a:rPr sz="1400" b="0">
+            <a:pPr lvl="1"/>
+            <a:r>
+              <a:rPr sz="1300" b="0">
                 <a:solidFill>
                   <a:srgbClr val="595959"/>
                 </a:solidFill>
                 <a:latin typeface="Meiryo"/>
               </a:rPr>
-              <a:t>・pip install "highway-env&gt;=1.8" "stable-baselines3[extra]&gt;=2.0" gymnasium torch tensorboard moviepy onnx onnxruntime</a:t>
-            </a:r>
-          </a:p>
-          <a:p>
-            <a:pPr lvl="1">
-              <a:spcAft>
-                <a:spcPts val="200"/>
-              </a:spcAft>
-            </a:pPr>
-            <a:r>
-              <a:rPr sz="1400" b="0">
-                <a:solidFill>
-                  <a:srgbClr val="B32D2D"/>
-                </a:solidFill>
-                <a:latin typeface="Meiryo"/>
-              </a:rPr>
-              <a:t>・リポジトリの requirements.txt は旧 TF スタック用 — 使わない</a:t>
-            </a:r>
-          </a:p>
-          <a:p>
-            <a:pPr>
-              <a:spcAft>
-                <a:spcPts val="600"/>
-              </a:spcAft>
-            </a:pPr>
-            <a:r>
-              <a:rPr sz="1600" b="1">
-                <a:solidFill>
-                  <a:srgbClr val="222222"/>
-                </a:solidFill>
-                <a:latin typeface="Meiryo"/>
-              </a:rPr>
-              <a:t>ノートブック</a:t>
-            </a:r>
-          </a:p>
-          <a:p>
-            <a:pPr lvl="1">
-              <a:spcAft>
-                <a:spcPts val="200"/>
-              </a:spcAft>
-            </a:pPr>
-            <a:r>
-              <a:rPr sz="1400" b="0">
+              <a:t>・フェーズ 1 末: 2953 / 3236 step = 0.91/step — ランダムトラックでも打ち切り上限級で周回</a:t>
+            </a:r>
+          </a:p>
+          <a:p>
+            <a:pPr lvl="1"/>
+            <a:r>
+              <a:rPr sz="1300" b="0">
                 <a:solidFill>
                   <a:srgbClr val="595959"/>
                 </a:solidFill>
                 <a:latin typeface="Meiryo"/>
               </a:rPr>
-              <a:t>・task2: fast トラック学習 / task3: random 学習 + トラック別レポート + 5 連動画</a:t>
-            </a:r>
-          </a:p>
-          <a:p>
-            <a:pPr lvl="1">
-              <a:spcAft>
-                <a:spcPts val="200"/>
-              </a:spcAft>
-            </a:pPr>
-            <a:r>
-              <a:rPr sz="1400" b="0">
+              <a:t>・eval は duration 120 秒 (600 step 上限) — 最大 517 = 0.86/step。fast ランと絶対値の比較は不可 (per-step で見る)</a:t>
+            </a:r>
+          </a:p>
+          <a:p>
+            <a:pPr lvl="1"/>
+            <a:r>
+              <a:rPr sz="1300" b="0">
                 <a:solidFill>
                   <a:srgbClr val="595959"/>
                 </a:solidFill>
                 <a:latin typeface="Meiryo"/>
               </a:rPr>
-              <a:t>・FAST_DEV_RUN=True: 12〜15 万 step (周回到達を実測保証) / False: 本番 100 万+</a:t>
-            </a:r>
-          </a:p>
-          <a:p>
-            <a:pPr>
-              <a:spcAft>
-                <a:spcPts val="600"/>
-              </a:spcAft>
-            </a:pPr>
-            <a:r>
-              <a:rPr sz="1600" b="1">
-                <a:solidFill>
-                  <a:srgbClr val="222222"/>
-                </a:solidFill>
-                <a:latin typeface="Meiryo"/>
-              </a:rPr>
-              <a:t>進捗の読み方</a:t>
-            </a:r>
-          </a:p>
-          <a:p>
-            <a:pPr lvl="1">
-              <a:spcAft>
-                <a:spcPts val="200"/>
-              </a:spcAft>
-            </a:pPr>
-            <a:r>
-              <a:rPr sz="1400" b="0">
-                <a:solidFill>
-                  <a:srgbClr val="595959"/>
-                </a:solidFill>
-                <a:latin typeface="Meiryo"/>
-              </a:rPr>
-              <a:t>・Reward yardstick: 1 周 ≈ 101 / アイドル床 ≈ 0.53/step — eval 値を周回数として読む</a:t>
-            </a:r>
-          </a:p>
-          <a:p>
-            <a:pPr lvl="1">
-              <a:spcAft>
-                <a:spcPts val="200"/>
-              </a:spcAft>
-            </a:pPr>
-            <a:r>
-              <a:rPr sz="1400" b="0">
-                <a:solidFill>
-                  <a:srgbClr val="595959"/>
-                </a:solidFill>
-                <a:latin typeface="Meiryo"/>
-              </a:rPr>
-              <a:t>・Presentation Media セル: 学習曲線・軌跡・5 連動画を生成し VIDEO_DIR に保存</a:t>
-            </a:r>
-          </a:p>
-          <a:p>
-            <a:pPr>
-              <a:spcAft>
-                <a:spcPts val="600"/>
-              </a:spcAft>
-            </a:pPr>
-            <a:r>
-              <a:rPr sz="1600" b="0">
-                <a:solidFill>
-                  <a:srgbClr val="222222"/>
-                </a:solidFill>
-                <a:latin typeface="Meiryo"/>
-              </a:rPr>
-              <a:t>C# 検証: cd re_engine/verify &amp;&amp; dotnet run -- ..  → ALL SCENARIOS MATCH</a:t>
+              <a:t>・explained_variance 最終 0.63 (fast 0.32 より良好)。value_loss 117 はトラック + NPC ランダム性によるリターン分散の反映で悪化ではない</a:t>
             </a:r>
           </a:p>
         </p:txBody>
@@ -7315,7 +7143,7 @@
                 </a:solidFill>
                 <a:latin typeface="Meiryo"/>
               </a:rPr>
-              <a:t>エクスポートツールと ONNX の注意点</a:t>
+              <a:t>実ゲームとのギャップ — シミュレーションが省いているもの</a:t>
             </a:r>
           </a:p>
         </p:txBody>
@@ -7354,7 +7182,7 @@
                 </a:solidFill>
                 <a:latin typeface="Meiryo"/>
               </a:rPr>
-              <a:t>エクスポート</a:t>
+              <a:t>車両動力学</a:t>
             </a:r>
           </a:p>
           <a:p>
@@ -7364,29 +7192,45 @@
               </a:spcAft>
             </a:pPr>
             <a:r>
-              <a:rPr sz="1300" b="1">
+              <a:rPr sz="1300" b="0">
                 <a:solidFill>
                   <a:srgbClr val="595959"/>
                 </a:solidFill>
                 <a:latin typeface="Meiryo"/>
               </a:rPr>
-              <a:t>・python export_onnx.py &lt;model.zip&gt; -m 3   # NHWC [1,12,12,10] エンジン用 (推奨)</a:t>
-            </a:r>
-          </a:p>
-          <a:p>
-            <a:pPr lvl="2">
+              <a:t>・線形タイヤ (グリップ飽和なし) / 質量 1 kg 正規化 / 荷重移動・サスなし</a:t>
+            </a:r>
+          </a:p>
+          <a:p>
+            <a:pPr lvl="1">
               <a:spcAft>
                 <a:spcPts val="200"/>
               </a:spcAft>
             </a:pPr>
             <a:r>
-              <a:rPr sz="1100" b="0">
+              <a:rPr sz="1300" b="0">
                 <a:solidFill>
                   <a:srgbClr val="595959"/>
                 </a:solidFill>
                 <a:latin typeface="Meiryo"/>
               </a:rPr>
-              <a:t>− -m 1: full policy / 2: actor CHW / 0: 全部 — 各出力は torch と自動照合 (≤4e-6)</a:t>
+              <a:t>・加速度は直接指令: エンジン/ブレーキ特性・ギア・空気抵抗・転がり抵抗なし (惰性で減速しない)</a:t>
+            </a:r>
+          </a:p>
+          <a:p>
+            <a:pPr>
+              <a:spcAft>
+                <a:spcPts val="600"/>
+              </a:spcAft>
+            </a:pPr>
+            <a:r>
+              <a:rPr sz="1500" b="1">
+                <a:solidFill>
+                  <a:srgbClr val="222222"/>
+                </a:solidFill>
+                <a:latin typeface="Meiryo"/>
+              </a:rPr>
+              <a:t>壁・衝突</a:t>
             </a:r>
           </a:p>
           <a:p>
@@ -7402,7 +7246,23 @@
                 </a:solidFill>
                 <a:latin typeface="Meiryo"/>
               </a:rPr>
-              <a:t>・python re_engine/convert_onnx_nhwc.py &lt;actor.onnx&gt;  # 既存 CHW の NHWC 化</a:t>
+              <a:t>・停止壁は理想化 (速度を消すだけ): 衝突インパルス・スピン・ダメージなし</a:t>
+            </a:r>
+          </a:p>
+          <a:p>
+            <a:pPr lvl="1">
+              <a:spcAft>
+                <a:spcPts val="200"/>
+              </a:spcAft>
+            </a:pPr>
+            <a:r>
+              <a:rPr sz="1300" b="0">
+                <a:solidFill>
+                  <a:srgbClr val="595959"/>
+                </a:solidFill>
+                <a:latin typeface="Meiryo"/>
+              </a:rPr>
+              <a:t>・壁摩擦 0.6 は仮値 — 実ゲームの壁材質に合わせた再調整ポイント</a:t>
             </a:r>
           </a:p>
           <a:p>
@@ -7418,7 +7278,7 @@
                 </a:solidFill>
                 <a:latin typeface="Meiryo"/>
               </a:rPr>
-              <a:t>再生成・検証</a:t>
+              <a:t>制御・タイミング</a:t>
             </a:r>
           </a:p>
           <a:p>
@@ -7434,7 +7294,7 @@
                 </a:solidFill>
                 <a:latin typeface="Meiryo"/>
               </a:rPr>
-              <a:t>・python re_engine/export_track_json.py  → dotnet run で ALL SCENARIOS MATCH を確認</a:t>
+              <a:t>・ステア瞬時応答 (アクチュエータ遅れなし) / 5 Hz 等間隔・推論レイテンシ未モデル化</a:t>
             </a:r>
           </a:p>
           <a:p>
@@ -7450,7 +7310,7 @@
                 </a:solidFill>
                 <a:latin typeface="Meiryo"/>
               </a:rPr>
-              <a:t>よくある事故 (症状で覚える)</a:t>
+              <a:t>環境</a:t>
             </a:r>
           </a:p>
           <a:p>
@@ -7460,61 +7320,13 @@
               </a:spcAft>
             </a:pPr>
             <a:r>
-              <a:rPr sz="1300" b="1">
-                <a:solidFill>
-                  <a:srgbClr val="B32D2D"/>
-                </a:solidFill>
-                <a:latin typeface="Meiryo"/>
-              </a:rPr>
-              <a:t>・出力がほぼ一定 (thr≈0.4, str≈0.2) = テンソルレイアウト不一致</a:t>
-            </a:r>
-          </a:p>
-          <a:p>
-            <a:pPr lvl="1">
-              <a:spcAft>
-                <a:spcPts val="200"/>
-              </a:spcAft>
-            </a:pPr>
-            <a:r>
               <a:rPr sz="1300" b="0">
                 <a:solidFill>
-                  <a:srgbClr val="B32D2D"/>
-                </a:solidFill>
-                <a:latin typeface="Meiryo"/>
-              </a:rPr>
-              <a:t>・観測が全部飽和・挙動が雑 = km/h を m/s に変換し忘れ (KphToMs)</a:t>
-            </a:r>
-          </a:p>
-          <a:p>
-            <a:pPr lvl="1">
-              <a:spcAft>
-                <a:spcPts val="200"/>
-              </a:spcAft>
-            </a:pPr>
-            <a:r>
-              <a:rPr sz="1300" b="0">
-                <a:solidFill>
-                  <a:srgbClr val="B32D2D"/>
-                </a:solidFill>
-                <a:latin typeface="Meiryo"/>
-              </a:rPr>
-              <a:t>・グリッドが横向き = heading に生の yaw を使用 (正: 90° − yaw または forward から Atan2)</a:t>
-            </a:r>
-          </a:p>
-          <a:p>
-            <a:pPr>
-              <a:spcAft>
-                <a:spcPts val="600"/>
-              </a:spcAft>
-            </a:pPr>
-            <a:r>
-              <a:rPr sz="1500" b="0">
-                <a:solidFill>
-                  <a:srgbClr val="222222"/>
-                </a:solidFill>
-                <a:latin typeface="Meiryo"/>
-              </a:rPr>
-              <a:t>定数同期: レンジ・5 Hz・グリッド設定の変更は C# 定数 + JSON + 検証 + ONNX の 4 点セット</a:t>
+                  <a:srgbClr val="595959"/>
+                </a:solidFill>
+                <a:latin typeface="Meiryo"/>
+              </a:rPr>
+              <a:t>・2D 平面: 縁石・バンク・高低差・路面 μ 変化なし / NPC は IDM (ゲーム AI と別物)</a:t>
             </a:r>
           </a:p>
         </p:txBody>
@@ -7566,7 +7378,7 @@
                 </a:solidFill>
                 <a:latin typeface="Meiryo"/>
               </a:rPr>
-              <a:t>まとめ — 環境設計こそが学習を決める</a:t>
+              <a:t>ギャップの二層戦略 — 消せるものは消し、残りは吸収する</a:t>
             </a:r>
           </a:p>
         </p:txBody>
@@ -7579,7 +7391,7 @@
         </p:nvSpPr>
         <p:spPr>
           <a:xfrm>
-            <a:off x="548640" y="1371600"/>
+            <a:off x="548640" y="1188720"/>
             <a:ext cx="11064240" cy="5486400"/>
           </a:xfrm>
           <a:prstGeom prst="rect">
@@ -7599,13 +7411,29 @@
               </a:spcAft>
             </a:pPr>
             <a:r>
-              <a:rPr sz="1800" b="1">
+              <a:rPr sz="1500" b="1">
                 <a:solidFill>
                   <a:srgbClr val="222222"/>
                 </a:solidFill>
                 <a:latin typeface="Meiryo"/>
               </a:rPr>
-              <a:t>環境の進化: 行動 → 壁 → 報酬 → 観測 → トラックの 5 段階で「ゲームのレース」に到達</a:t>
+              <a:t>第一層: ギャップ自体を消す</a:t>
+            </a:r>
+          </a:p>
+          <a:p>
+            <a:pPr lvl="1">
+              <a:spcAft>
+                <a:spcPts val="200"/>
+              </a:spcAft>
+            </a:pPr>
+            <a:r>
+              <a:rPr sz="1300" b="0">
+                <a:solidFill>
+                  <a:srgbClr val="595959"/>
+                </a:solidFill>
+                <a:latin typeface="Meiryo"/>
+              </a:rPr>
+              <a:t>・観測ビット一致 + 物理 1e-7 一致の C# 移植 — 移植起因の挙動差をゼロに</a:t>
             </a:r>
           </a:p>
           <a:p>
@@ -7615,13 +7443,77 @@
               </a:spcAft>
             </a:pPr>
             <a:r>
-              <a:rPr sz="1800" b="1">
+              <a:rPr sz="1500" b="1">
                 <a:solidFill>
                   <a:srgbClr val="222222"/>
                 </a:solidFill>
                 <a:latin typeface="Meiryo"/>
               </a:rPr>
-              <a:t>抜け道 (ショートカット / wall-riding / 壁這い) は報酬の経済設計で排除 → 6 万 step で周回</a:t>
+              <a:t>第二層: 残差をデプロイ側フィルタで吸収 (再学習不要)</a:t>
+            </a:r>
+          </a:p>
+          <a:p>
+            <a:pPr lvl="1">
+              <a:spcAft>
+                <a:spcPts val="200"/>
+              </a:spcAft>
+            </a:pPr>
+            <a:r>
+              <a:rPr sz="1300" b="0">
+                <a:solidFill>
+                  <a:srgbClr val="595959"/>
+                </a:solidFill>
+                <a:latin typeface="Meiryo"/>
+              </a:rPr>
+              <a:t>・SteeringSmoother (EMA α0.6): 蛇行 34→12 回/100步、直線の中央維持も改善</a:t>
+            </a:r>
+          </a:p>
+          <a:p>
+            <a:pPr lvl="1">
+              <a:spcAft>
+                <a:spcPts val="200"/>
+              </a:spcAft>
+            </a:pPr>
+            <a:r>
+              <a:rPr sz="1300" b="0">
+                <a:solidFill>
+                  <a:srgbClr val="595959"/>
+                </a:solidFill>
+                <a:latin typeface="Meiryo"/>
+              </a:rPr>
+              <a:t>・CorneringLimiter: ステア速度制限 + 曲率ベース比例ブレーキ (速度床 5 m/s で停止しない)</a:t>
+            </a:r>
+          </a:p>
+          <a:p>
+            <a:pPr lvl="1">
+              <a:spcAft>
+                <a:spcPts val="200"/>
+              </a:spcAft>
+            </a:pPr>
+            <a:r>
+              <a:rPr sz="1300" b="0">
+                <a:solidFill>
+                  <a:srgbClr val="595959"/>
+                </a:solidFill>
+                <a:latin typeface="Meiryo"/>
+              </a:rPr>
+              <a:t>・StuckRecovery: 「前進指示なのに 1 秒 0.3 m 未満」で壁刺さり検出 → バック 1.6 秒</a:t>
+            </a:r>
+          </a:p>
+          <a:p>
+            <a:pPr lvl="2">
+              <a:spcAft>
+                <a:spcPts val="200"/>
+              </a:spcAft>
+            </a:pPr>
+            <a:r>
+              <a:rPr sz="1100" b="0">
+                <a:solidFill>
+                  <a:srgbClr val="595959"/>
+                </a:solidFill>
+                <a:latin typeface="Meiryo"/>
+              </a:rPr>
+              <a:t>− 検証: フィルタ通しでシム内評価 — 周回数維持を確認 (閉ループ変化のチェック)</a:t>
             </a:r>
           </a:p>
           <a:p>
@@ -7631,65 +7523,41 @@
               </a:spcAft>
             </a:pPr>
             <a:r>
-              <a:rPr sz="1800" b="1">
+              <a:rPr sz="1500" b="0">
                 <a:solidFill>
                   <a:srgbClr val="222222"/>
                 </a:solidFill>
                 <a:latin typeface="Meiryo"/>
               </a:rPr>
-              <a:t>汎化 = 自己位置を見せない観測の帰納バイアス (ランダム化はその補強)</a:t>
-            </a:r>
-          </a:p>
-          <a:p>
-            <a:pPr>
-              <a:spcAft>
-                <a:spcPts val="600"/>
-              </a:spcAft>
-            </a:pPr>
-            <a:r>
-              <a:rPr sz="1800" b="1">
-                <a:solidFill>
-                  <a:srgbClr val="222222"/>
-                </a:solidFill>
-                <a:latin typeface="Meiryo"/>
-              </a:rPr>
-              <a:t>実ゲームギャップは一覧化済み: 数値一致移植で消す + デプロイ側フィルタで吸収の二層</a:t>
-            </a:r>
-          </a:p>
-          <a:p>
-            <a:pPr>
-              <a:spcAft>
-                <a:spcPts val="600"/>
-              </a:spcAft>
-            </a:pPr>
-            <a:r>
-              <a:rPr sz="1800" b="0">
-                <a:solidFill>
-                  <a:srgbClr val="222222"/>
-                </a:solidFill>
-                <a:latin typeface="Meiryo"/>
-              </a:rPr>
-              <a:t>本スライドの図・動画はすべてノートブックから再現可能 (Presentation Media セル)</a:t>
-            </a:r>
-          </a:p>
-          <a:p>
-            <a:pPr>
-              <a:spcAft>
-                <a:spcPts val="600"/>
-              </a:spcAft>
-            </a:pPr>
-            <a:r>
-              <a:rPr sz="1800" b="0">
-                <a:solidFill>
-                  <a:srgbClr val="222222"/>
-                </a:solidFill>
-                <a:latin typeface="Meiryo"/>
-              </a:rPr>
-              <a:t>次: RE Engine 実走検証 / 壁摩擦・動力学の実測適合 / NPC レース</a:t>
-            </a:r>
-          </a:p>
-        </p:txBody>
-      </p:sp>
+              <a:t>第三層 (必要時): 壁摩擦・レンジを実測に合わせ環境を再調整して再学習</a:t>
+            </a:r>
+          </a:p>
+        </p:txBody>
+      </p:sp>
+      <p:pic>
+        <p:nvPicPr>
+          <p:cNvPr id="4" name="Picture 3" descr="smoothing_effect.png"/>
+          <p:cNvPicPr>
+            <a:picLocks noChangeAspect="1"/>
+          </p:cNvPicPr>
+          <p:nvPr/>
+        </p:nvPicPr>
+        <p:blipFill>
+          <a:blip r:embed="rId3"/>
+          <a:stretch>
+            <a:fillRect/>
+          </a:stretch>
+        </p:blipFill>
+        <p:spPr>
+          <a:xfrm>
+            <a:off x="6949440" y="4434840"/>
+            <a:ext cx="4846320" cy="1674183"/>
+          </a:xfrm>
+          <a:prstGeom prst="rect">
+            <a:avLst/>
+          </a:prstGeom>
+        </p:spPr>
+      </p:pic>
     </p:spTree>
   </p:cSld>
   <p:clrMapOvr>
@@ -7737,7 +7605,7 @@
                 </a:solidFill>
                 <a:latin typeface="Meiryo"/>
               </a:rPr>
-              <a:t>TensorBoard 指標の読み方 — チートシート</a:t>
+              <a:t>セットアップとノートブックの使い方</a:t>
             </a:r>
           </a:p>
         </p:txBody>
@@ -7750,8 +7618,8 @@
         </p:nvSpPr>
         <p:spPr>
           <a:xfrm>
-            <a:off x="548640" y="1051560"/>
-            <a:ext cx="5486400" cy="5577840"/>
+            <a:off x="548640" y="1188720"/>
+            <a:ext cx="11064240" cy="5486400"/>
           </a:xfrm>
           <a:prstGeom prst="rect">
             <a:avLst/>
@@ -7764,7 +7632,11 @@
           </a:bodyPr>
           <a:lstStyle/>
           <a:p>
-            <a:pPr/>
+            <a:pPr>
+              <a:spcAft>
+                <a:spcPts val="600"/>
+              </a:spcAft>
+            </a:pPr>
             <a:r>
               <a:rPr sz="1600" b="1">
                 <a:solidFill>
@@ -7772,35 +7644,95 @@
                 </a:solidFill>
                 <a:latin typeface="Meiryo"/>
               </a:rPr>
-              <a:t>リターン系 (per-step 比で読む)</a:t>
-            </a:r>
-          </a:p>
-          <a:p>
-            <a:pPr lvl="1"/>
-            <a:r>
-              <a:rPr sz="1300" b="0">
+              <a:t>環境構築</a:t>
+            </a:r>
+          </a:p>
+          <a:p>
+            <a:pPr lvl="1">
+              <a:spcAft>
+                <a:spcPts val="200"/>
+              </a:spcAft>
+            </a:pPr>
+            <a:r>
+              <a:rPr sz="1400" b="0">
                 <a:solidFill>
                   <a:srgbClr val="595959"/>
                 </a:solidFill>
                 <a:latin typeface="Meiryo"/>
               </a:rPr>
-              <a:t>・rollout/ep_rew_mean・ep_len_mean: 報酬は 1 step [0,1] → リターン ≈ 生存 step × 報酬率。絶対値の増減はまずエピソード長要因を疑う</a:t>
-            </a:r>
-          </a:p>
-          <a:p>
-            <a:pPr lvl="1"/>
-            <a:r>
-              <a:rPr sz="1300" b="0">
+              <a:t>・pip install "highway-env&gt;=1.8" "stable-baselines3[extra]&gt;=2.0" gymnasium torch tensorboard moviepy onnx onnxruntime</a:t>
+            </a:r>
+          </a:p>
+          <a:p>
+            <a:pPr lvl="1">
+              <a:spcAft>
+                <a:spcPts val="200"/>
+              </a:spcAft>
+            </a:pPr>
+            <a:r>
+              <a:rPr sz="1400" b="0">
+                <a:solidFill>
+                  <a:srgbClr val="B32D2D"/>
+                </a:solidFill>
+                <a:latin typeface="Meiryo"/>
+              </a:rPr>
+              <a:t>・リポジトリの requirements.txt は旧 TF スタック用 — 使わない</a:t>
+            </a:r>
+          </a:p>
+          <a:p>
+            <a:pPr>
+              <a:spcAft>
+                <a:spcPts val="600"/>
+              </a:spcAft>
+            </a:pPr>
+            <a:r>
+              <a:rPr sz="1600" b="1">
+                <a:solidFill>
+                  <a:srgbClr val="222222"/>
+                </a:solidFill>
+                <a:latin typeface="Meiryo"/>
+              </a:rPr>
+              <a:t>ノートブック</a:t>
+            </a:r>
+          </a:p>
+          <a:p>
+            <a:pPr lvl="1">
+              <a:spcAft>
+                <a:spcPts val="200"/>
+              </a:spcAft>
+            </a:pPr>
+            <a:r>
+              <a:rPr sz="1400" b="0">
                 <a:solidFill>
                   <a:srgbClr val="595959"/>
                 </a:solidFill>
                 <a:latin typeface="Meiryo"/>
               </a:rPr>
-              <a:t>・eval/mean_reward: EvalCallback の決定論評価 = ベストモデル選択の根拠。eval の duration が違うと上限も違う (fast 4000 step / 汎化 600 step)</a:t>
-            </a:r>
-          </a:p>
-          <a:p>
-            <a:pPr/>
+              <a:t>・task2: fast トラック学習 / task3: random 学習 + トラック別レポート + 5 連動画</a:t>
+            </a:r>
+          </a:p>
+          <a:p>
+            <a:pPr lvl="1">
+              <a:spcAft>
+                <a:spcPts val="200"/>
+              </a:spcAft>
+            </a:pPr>
+            <a:r>
+              <a:rPr sz="1400" b="0">
+                <a:solidFill>
+                  <a:srgbClr val="595959"/>
+                </a:solidFill>
+                <a:latin typeface="Meiryo"/>
+              </a:rPr>
+              <a:t>・FAST_DEV_RUN=True: 12〜15 万 step (周回到達を実測保証) / False: 本番 100 万+</a:t>
+            </a:r>
+          </a:p>
+          <a:p>
+            <a:pPr>
+              <a:spcAft>
+                <a:spcPts val="600"/>
+              </a:spcAft>
+            </a:pPr>
             <a:r>
               <a:rPr sz="1600" b="1">
                 <a:solidFill>
@@ -7808,138 +7740,55 @@
                 </a:solidFill>
                 <a:latin typeface="Meiryo"/>
               </a:rPr>
-              <a:t>探索系</a:t>
-            </a:r>
-          </a:p>
-          <a:p>
-            <a:pPr lvl="1"/>
-            <a:r>
-              <a:rPr sz="1300" b="0">
+              <a:t>進捗の読み方</a:t>
+            </a:r>
+          </a:p>
+          <a:p>
+            <a:pPr lvl="1">
+              <a:spcAft>
+                <a:spcPts val="200"/>
+              </a:spcAft>
+            </a:pPr>
+            <a:r>
+              <a:rPr sz="1400" b="0">
                 <a:solidFill>
                   <a:srgbClr val="595959"/>
                 </a:solidFill>
                 <a:latin typeface="Meiryo"/>
               </a:rPr>
-              <a:t>・train/std: ガウス方策の σ。1.0 → 0.15〜0.18 へ単調減が健康形。増えるなら ent_coef 過大 (fastdev では σ→1.6 の実測事故)</a:t>
-            </a:r>
-          </a:p>
-          <a:p>
-            <a:pPr lvl="1"/>
-            <a:r>
-              <a:rPr sz="1300" b="0">
+              <a:t>・Reward yardstick: 1 周 ≈ 101 / アイドル床 ≈ 0.53/step — eval 値を周回数として読む</a:t>
+            </a:r>
+          </a:p>
+          <a:p>
+            <a:pPr lvl="1">
+              <a:spcAft>
+                <a:spcPts val="200"/>
+              </a:spcAft>
+            </a:pPr>
+            <a:r>
+              <a:rPr sz="1400" b="0">
                 <a:solidFill>
                   <a:srgbClr val="595959"/>
                 </a:solidFill>
                 <a:latin typeface="Meiryo"/>
               </a:rPr>
-              <a:t>・entropy_loss = −エントロピー: σ &lt; 0.24 でガウスのエントロピーは負 → 曲線が正に出るのは収束のサイン</a:t>
-            </a:r>
-          </a:p>
-        </p:txBody>
-      </p:sp>
-      <p:sp>
-        <p:nvSpPr>
-          <p:cNvPr id="4" name="TextBox 3"/>
-          <p:cNvSpPr txBox="1"/>
-          <p:nvPr/>
-        </p:nvSpPr>
-        <p:spPr>
-          <a:xfrm>
-            <a:off x="6217920" y="1051560"/>
-            <a:ext cx="5486400" cy="5577840"/>
-          </a:xfrm>
-          <a:prstGeom prst="rect">
-            <a:avLst/>
-          </a:prstGeom>
-          <a:noFill/>
-        </p:spPr>
-        <p:txBody>
-          <a:bodyPr wrap="square">
-            <a:spAutoFit/>
-          </a:bodyPr>
-          <a:lstStyle/>
-          <a:p>
-            <a:pPr/>
-            <a:r>
-              <a:rPr sz="1600" b="1">
+              <a:t>・Presentation Media セル: 学習曲線・軌跡・5 連動画を生成し VIDEO_DIR に保存</a:t>
+            </a:r>
+          </a:p>
+          <a:p>
+            <a:pPr>
+              <a:spcAft>
+                <a:spcPts val="600"/>
+              </a:spcAft>
+            </a:pPr>
+            <a:r>
+              <a:rPr sz="1600" b="0">
                 <a:solidFill>
                   <a:srgbClr val="222222"/>
                 </a:solidFill>
                 <a:latin typeface="Meiryo"/>
               </a:rPr>
-              <a:t>更新の大きさ</a:t>
-            </a:r>
-          </a:p>
-          <a:p>
-            <a:pPr lvl="1"/>
-            <a:r>
-              <a:rPr sz="1300" b="0">
-                <a:solidFill>
-                  <a:srgbClr val="595959"/>
-                </a:solidFill>
-                <a:latin typeface="Meiryo"/>
-              </a:rPr>
-              <a:t>・learning_rate: P1 は線形減衰 2e-4→~0 (仕様。停滞ではない) / P2 は定数 1e-4</a:t>
-            </a:r>
-          </a:p>
-          <a:p>
-            <a:pPr lvl="1"/>
-            <a:r>
-              <a:rPr sz="1300" b="0">
-                <a:solidFill>
-                  <a:srgbClr val="595959"/>
-                </a:solidFill>
-                <a:latin typeface="Meiryo"/>
-              </a:rPr>
-              <a:t>・approx_kl・clip_fraction: 1 更新の方策移動量とクリップ率。KL &gt; 0.1 が常態なら epochs/LR 過大 → 終盤 ckpt でなく EvalCallback ベストを使う根拠</a:t>
-            </a:r>
-          </a:p>
-          <a:p>
-            <a:pPr/>
-            <a:r>
-              <a:rPr sz="1600" b="1">
-                <a:solidFill>
-                  <a:srgbClr val="222222"/>
-                </a:solidFill>
-                <a:latin typeface="Meiryo"/>
-              </a:rPr>
-              <a:t>批評家 (価値関数) 系</a:t>
-            </a:r>
-          </a:p>
-          <a:p>
-            <a:pPr lvl="1"/>
-            <a:r>
-              <a:rPr sz="1300" b="0">
-                <a:solidFill>
-                  <a:srgbClr val="595959"/>
-                </a:solidFill>
-                <a:latin typeface="Meiryo"/>
-              </a:rPr>
-              <a:t>・explained_variance: 1=完璧 / 0=平均並み / 負=有害。序盤の負は正常、上昇傾向だけ見る</a:t>
-            </a:r>
-          </a:p>
-          <a:p>
-            <a:pPr lvl="1"/>
-            <a:r>
-              <a:rPr sz="1300" b="0">
-                <a:solidFill>
-                  <a:srgbClr val="595959"/>
-                </a:solidFill>
-                <a:latin typeface="Meiryo"/>
-              </a:rPr>
-              <a:t>・value_loss: リターンスケールに比例 — 絶対値の比較は無意味。リターン分散の増減の鏡</a:t>
-            </a:r>
-          </a:p>
-          <a:p>
-            <a:pPr lvl="1"/>
-            <a:r>
-              <a:rPr sz="1300" b="0">
-                <a:solidFill>
-                  <a:srgbClr val="595959"/>
-                </a:solidFill>
-                <a:latin typeface="Meiryo"/>
-              </a:rPr>
-              <a:t>・loss・policy_gradient_loss: クリッピングにより大きさの診断価値は薄い</a:t>
+              <a:t>C# 検証: cd re_engine/verify &amp;&amp; dotnet run -- ..  → ALL SCENARIOS MATCH</a:t>
             </a:r>
           </a:p>
         </p:txBody>
@@ -7991,45 +7840,21 @@
                 </a:solidFill>
                 <a:latin typeface="Meiryo"/>
               </a:rPr>
-              <a:t>実測 (1) fast トラック agent — runs/sb3_ppo_cnn_full (401 万 step)</a:t>
-            </a:r>
-          </a:p>
-        </p:txBody>
-      </p:sp>
-      <p:pic>
-        <p:nvPicPr>
-          <p:cNvPr id="3" name="Picture 2" descr="tb_task2_fast_indicators.png"/>
-          <p:cNvPicPr>
-            <a:picLocks noChangeAspect="1"/>
-          </p:cNvPicPr>
+              <a:t>エクスポートツールと ONNX の注意点</a:t>
+            </a:r>
+          </a:p>
+        </p:txBody>
+      </p:sp>
+      <p:sp>
+        <p:nvSpPr>
+          <p:cNvPr id="3" name="TextBox 2"/>
+          <p:cNvSpPr txBox="1"/>
           <p:nvPr/>
-        </p:nvPicPr>
-        <p:blipFill>
-          <a:blip r:embed="rId2"/>
-          <a:stretch>
-            <a:fillRect/>
-          </a:stretch>
-        </p:blipFill>
+        </p:nvSpPr>
         <p:spPr>
           <a:xfrm>
-            <a:off x="790956" y="960120"/>
-            <a:ext cx="10607040" cy="4186989"/>
-          </a:xfrm>
-          <a:prstGeom prst="rect">
-            <a:avLst/>
-          </a:prstGeom>
-        </p:spPr>
-      </p:pic>
-      <p:sp>
-        <p:nvSpPr>
-          <p:cNvPr id="4" name="TextBox 3"/>
-          <p:cNvSpPr txBox="1"/>
-          <p:nvPr/>
-        </p:nvSpPr>
-        <p:spPr>
-          <a:xfrm>
-            <a:off x="548640" y="5284269"/>
-            <a:ext cx="11064240" cy="1528010"/>
+            <a:off x="548640" y="1143000"/>
+            <a:ext cx="11064240" cy="5486400"/>
           </a:xfrm>
           <a:prstGeom prst="rect">
             <a:avLst/>
@@ -8042,7 +7867,59 @@
           </a:bodyPr>
           <a:lstStyle/>
           <a:p>
-            <a:pPr lvl="1"/>
+            <a:pPr>
+              <a:spcAft>
+                <a:spcPts val="600"/>
+              </a:spcAft>
+            </a:pPr>
+            <a:r>
+              <a:rPr sz="1500" b="1">
+                <a:solidFill>
+                  <a:srgbClr val="222222"/>
+                </a:solidFill>
+                <a:latin typeface="Meiryo"/>
+              </a:rPr>
+              <a:t>エクスポート</a:t>
+            </a:r>
+          </a:p>
+          <a:p>
+            <a:pPr lvl="1">
+              <a:spcAft>
+                <a:spcPts val="200"/>
+              </a:spcAft>
+            </a:pPr>
+            <a:r>
+              <a:rPr sz="1300" b="1">
+                <a:solidFill>
+                  <a:srgbClr val="595959"/>
+                </a:solidFill>
+                <a:latin typeface="Meiryo"/>
+              </a:rPr>
+              <a:t>・python export_onnx.py &lt;model.zip&gt; -m 3   # NHWC [1,12,12,10] エンジン用 (推奨)</a:t>
+            </a:r>
+          </a:p>
+          <a:p>
+            <a:pPr lvl="2">
+              <a:spcAft>
+                <a:spcPts val="200"/>
+              </a:spcAft>
+            </a:pPr>
+            <a:r>
+              <a:rPr sz="1100" b="0">
+                <a:solidFill>
+                  <a:srgbClr val="595959"/>
+                </a:solidFill>
+                <a:latin typeface="Meiryo"/>
+              </a:rPr>
+              <a:t>− -m 1: full policy / 2: actor CHW / 0: 全部 — 各出力は torch と自動照合 (≤4e-6)</a:t>
+            </a:r>
+          </a:p>
+          <a:p>
+            <a:pPr lvl="1">
+              <a:spcAft>
+                <a:spcPts val="200"/>
+              </a:spcAft>
+            </a:pPr>
             <a:r>
               <a:rPr sz="1300" b="0">
                 <a:solidFill>
@@ -8050,11 +7927,31 @@
                 </a:solidFill>
                 <a:latin typeface="Meiryo"/>
               </a:rPr>
-              <a:t>・フェーズ 1 末: リターン 3498 / 3975 step = 0.88/step — 800 秒打ち切り上限に張り付き (無限周回)。KL 6.6e-4 / clip 0.3% = 収束</a:t>
-            </a:r>
-          </a:p>
-          <a:p>
-            <a:pPr lvl="1"/>
+              <a:t>・python re_engine/convert_onnx_nhwc.py &lt;actor.onnx&gt;  # 既存 CHW の NHWC 化</a:t>
+            </a:r>
+          </a:p>
+          <a:p>
+            <a:pPr>
+              <a:spcAft>
+                <a:spcPts val="600"/>
+              </a:spcAft>
+            </a:pPr>
+            <a:r>
+              <a:rPr sz="1500" b="1">
+                <a:solidFill>
+                  <a:srgbClr val="222222"/>
+                </a:solidFill>
+                <a:latin typeface="Meiryo"/>
+              </a:rPr>
+              <a:t>再生成・検証</a:t>
+            </a:r>
+          </a:p>
+          <a:p>
+            <a:pPr lvl="1">
+              <a:spcAft>
+                <a:spcPts val="200"/>
+              </a:spcAft>
+            </a:pPr>
             <a:r>
               <a:rPr sz="1300" b="0">
                 <a:solidFill>
@@ -8062,19 +7959,87 @@
                 </a:solidFill>
                 <a:latin typeface="Meiryo"/>
               </a:rPr>
-              <a:t>・フェーズ 2 (破線以降、NPC 追加): 177 / 270 step = 0.65/step — 「低下」ではなく終端が truncation → 衝突に変わった正常形</a:t>
-            </a:r>
-          </a:p>
-          <a:p>
-            <a:pPr lvl="1"/>
+              <a:t>・python re_engine/export_track_json.py  → dotnet run で ALL SCENARIOS MATCH を確認</a:t>
+            </a:r>
+          </a:p>
+          <a:p>
+            <a:pPr>
+              <a:spcAft>
+                <a:spcPts val="600"/>
+              </a:spcAft>
+            </a:pPr>
+            <a:r>
+              <a:rPr sz="1500" b="1">
+                <a:solidFill>
+                  <a:srgbClr val="222222"/>
+                </a:solidFill>
+                <a:latin typeface="Meiryo"/>
+              </a:rPr>
+              <a:t>よくある事故 (症状で覚える)</a:t>
+            </a:r>
+          </a:p>
+          <a:p>
+            <a:pPr lvl="1">
+              <a:spcAft>
+                <a:spcPts val="200"/>
+              </a:spcAft>
+            </a:pPr>
+            <a:r>
+              <a:rPr sz="1300" b="1">
+                <a:solidFill>
+                  <a:srgbClr val="B32D2D"/>
+                </a:solidFill>
+                <a:latin typeface="Meiryo"/>
+              </a:rPr>
+              <a:t>・出力がほぼ一定 (thr≈0.4, str≈0.2) = テンソルレイアウト不一致</a:t>
+            </a:r>
+          </a:p>
+          <a:p>
+            <a:pPr lvl="1">
+              <a:spcAft>
+                <a:spcPts val="200"/>
+              </a:spcAft>
+            </a:pPr>
             <a:r>
               <a:rPr sz="1300" b="0">
                 <a:solidFill>
-                  <a:srgbClr val="595959"/>
-                </a:solidFill>
-                <a:latin typeface="Meiryo"/>
-              </a:rPr>
-              <a:t>・終盤は KL 0.73 / clip 77% のチャーン → 最終 ckpt ではなく EvalCallback ベストを採用。σ は 1.0 → 0.165 で焼きなまし完了</a:t>
+                  <a:srgbClr val="B32D2D"/>
+                </a:solidFill>
+                <a:latin typeface="Meiryo"/>
+              </a:rPr>
+              <a:t>・観測が全部飽和・挙動が雑 = km/h を m/s に変換し忘れ (KphToMs)</a:t>
+            </a:r>
+          </a:p>
+          <a:p>
+            <a:pPr lvl="1">
+              <a:spcAft>
+                <a:spcPts val="200"/>
+              </a:spcAft>
+            </a:pPr>
+            <a:r>
+              <a:rPr sz="1300" b="0">
+                <a:solidFill>
+                  <a:srgbClr val="B32D2D"/>
+                </a:solidFill>
+                <a:latin typeface="Meiryo"/>
+              </a:rPr>
+              <a:t>・グリッドが横向き = heading に生の yaw を使用 (正: 90° − yaw または forward から Atan2)</a:t>
+            </a:r>
+          </a:p>
+          <a:p>
+            <a:pPr>
+              <a:spcAft>
+                <a:spcPts val="600"/>
+              </a:spcAft>
+            </a:pPr>
+            <a:r>
+              <a:rPr sz="1500" b="0">
+                <a:solidFill>
+                  <a:srgbClr val="222222"/>
+                </a:solidFill>
+                <a:latin typeface="Meiryo"/>
+              </a:rPr>
+              <a:t>定数同期: レンジ・5 Hz・グリッド設定の変更は C# 定数 + JSON + 検証 + ONNX の 4 点セット</a:t>
             </a:r>
           </a:p>
         </p:txBody>
@@ -8126,45 +8091,21 @@
                 </a:solidFill>
                 <a:latin typeface="Meiryo"/>
               </a:rPr>
-              <a:t>実測 (2) 汎化 agent — runs/sb3_ppo_gen_cnn (451 万 step)</a:t>
-            </a:r>
-          </a:p>
-        </p:txBody>
-      </p:sp>
-      <p:pic>
-        <p:nvPicPr>
-          <p:cNvPr id="3" name="Picture 2" descr="tb_task3_gen_indicators.png"/>
-          <p:cNvPicPr>
-            <a:picLocks noChangeAspect="1"/>
-          </p:cNvPicPr>
+              <a:t>まとめ — 環境設計こそが学習を決める</a:t>
+            </a:r>
+          </a:p>
+        </p:txBody>
+      </p:sp>
+      <p:sp>
+        <p:nvSpPr>
+          <p:cNvPr id="3" name="TextBox 2"/>
+          <p:cNvSpPr txBox="1"/>
           <p:nvPr/>
-        </p:nvPicPr>
-        <p:blipFill>
-          <a:blip r:embed="rId2"/>
-          <a:stretch>
-            <a:fillRect/>
-          </a:stretch>
-        </p:blipFill>
+        </p:nvSpPr>
         <p:spPr>
           <a:xfrm>
-            <a:off x="790956" y="960120"/>
-            <a:ext cx="10607040" cy="4186989"/>
-          </a:xfrm>
-          <a:prstGeom prst="rect">
-            <a:avLst/>
-          </a:prstGeom>
-        </p:spPr>
-      </p:pic>
-      <p:sp>
-        <p:nvSpPr>
-          <p:cNvPr id="4" name="TextBox 3"/>
-          <p:cNvSpPr txBox="1"/>
-          <p:nvPr/>
-        </p:nvSpPr>
-        <p:spPr>
-          <a:xfrm>
-            <a:off x="548640" y="5284269"/>
-            <a:ext cx="11064240" cy="1528010"/>
+            <a:off x="548640" y="1371600"/>
+            <a:ext cx="11064240" cy="5486400"/>
           </a:xfrm>
           <a:prstGeom prst="rect">
             <a:avLst/>
@@ -8177,6 +8118,189 @@
           </a:bodyPr>
           <a:lstStyle/>
           <a:p>
+            <a:pPr>
+              <a:spcAft>
+                <a:spcPts val="600"/>
+              </a:spcAft>
+            </a:pPr>
+            <a:r>
+              <a:rPr sz="1800" b="1">
+                <a:solidFill>
+                  <a:srgbClr val="222222"/>
+                </a:solidFill>
+                <a:latin typeface="Meiryo"/>
+              </a:rPr>
+              <a:t>環境の進化: 行動 → 壁 → 報酬 → 観測 → トラックの 5 段階で「ゲームのレース」に到達</a:t>
+            </a:r>
+          </a:p>
+          <a:p>
+            <a:pPr>
+              <a:spcAft>
+                <a:spcPts val="600"/>
+              </a:spcAft>
+            </a:pPr>
+            <a:r>
+              <a:rPr sz="1800" b="1">
+                <a:solidFill>
+                  <a:srgbClr val="222222"/>
+                </a:solidFill>
+                <a:latin typeface="Meiryo"/>
+              </a:rPr>
+              <a:t>抜け道 (ショートカット / wall-riding / 壁這い) は報酬の経済設計で排除 → 6 万 step で周回</a:t>
+            </a:r>
+          </a:p>
+          <a:p>
+            <a:pPr>
+              <a:spcAft>
+                <a:spcPts val="600"/>
+              </a:spcAft>
+            </a:pPr>
+            <a:r>
+              <a:rPr sz="1800" b="1">
+                <a:solidFill>
+                  <a:srgbClr val="222222"/>
+                </a:solidFill>
+                <a:latin typeface="Meiryo"/>
+              </a:rPr>
+              <a:t>汎化 = 自己位置を見せない観測の帰納バイアス (ランダム化はその補強)</a:t>
+            </a:r>
+          </a:p>
+          <a:p>
+            <a:pPr>
+              <a:spcAft>
+                <a:spcPts val="600"/>
+              </a:spcAft>
+            </a:pPr>
+            <a:r>
+              <a:rPr sz="1800" b="1">
+                <a:solidFill>
+                  <a:srgbClr val="222222"/>
+                </a:solidFill>
+                <a:latin typeface="Meiryo"/>
+              </a:rPr>
+              <a:t>実ゲームギャップは一覧化済み: 数値一致移植で消す + デプロイ側フィルタで吸収の二層</a:t>
+            </a:r>
+          </a:p>
+          <a:p>
+            <a:pPr>
+              <a:spcAft>
+                <a:spcPts val="600"/>
+              </a:spcAft>
+            </a:pPr>
+            <a:r>
+              <a:rPr sz="1800" b="0">
+                <a:solidFill>
+                  <a:srgbClr val="222222"/>
+                </a:solidFill>
+                <a:latin typeface="Meiryo"/>
+              </a:rPr>
+              <a:t>本スライドの図・動画はすべてノートブックから再現可能 (Presentation Media セル)</a:t>
+            </a:r>
+          </a:p>
+          <a:p>
+            <a:pPr>
+              <a:spcAft>
+                <a:spcPts val="600"/>
+              </a:spcAft>
+            </a:pPr>
+            <a:r>
+              <a:rPr sz="1800" b="0">
+                <a:solidFill>
+                  <a:srgbClr val="222222"/>
+                </a:solidFill>
+                <a:latin typeface="Meiryo"/>
+              </a:rPr>
+              <a:t>次: RE Engine 実走検証 / 壁摩擦・動力学の実測適合 / NPC レース</a:t>
+            </a:r>
+          </a:p>
+        </p:txBody>
+      </p:sp>
+    </p:spTree>
+  </p:cSld>
+  <p:clrMapOvr>
+    <a:masterClrMapping/>
+  </p:clrMapOvr>
+</p:sld>
+</file>
+
+<file path=ppt/slides/slide25.xml><?xml version="1.0" encoding="utf-8"?>
+<p:sld xmlns:a="http://schemas.openxmlformats.org/drawingml/2006/main" xmlns:p="http://schemas.openxmlformats.org/presentationml/2006/main" xmlns:r="http://schemas.openxmlformats.org/officeDocument/2006/relationships">
+  <p:cSld>
+    <p:spTree>
+      <p:nvGrpSpPr>
+        <p:cNvPr id="1" name=""/>
+        <p:cNvGrpSpPr/>
+        <p:nvPr/>
+      </p:nvGrpSpPr>
+      <p:grpSpPr/>
+      <p:sp>
+        <p:nvSpPr>
+          <p:cNvPr id="2" name="TextBox 1"/>
+          <p:cNvSpPr txBox="1"/>
+          <p:nvPr/>
+        </p:nvSpPr>
+        <p:spPr>
+          <a:xfrm>
+            <a:off x="457200" y="182880"/>
+            <a:ext cx="11247120" cy="731520"/>
+          </a:xfrm>
+          <a:prstGeom prst="rect">
+            <a:avLst/>
+          </a:prstGeom>
+          <a:noFill/>
+        </p:spPr>
+        <p:txBody>
+          <a:bodyPr wrap="none">
+            <a:spAutoFit/>
+          </a:bodyPr>
+          <a:lstStyle/>
+          <a:p>
+            <a:r>
+              <a:rPr sz="2700" b="1">
+                <a:solidFill>
+                  <a:srgbClr val="1B5EA8"/>
+                </a:solidFill>
+                <a:latin typeface="Meiryo"/>
+              </a:rPr>
+              <a:t>C# 観測生成 — highway-env をビット一致で移植</a:t>
+            </a:r>
+          </a:p>
+        </p:txBody>
+      </p:sp>
+      <p:sp>
+        <p:nvSpPr>
+          <p:cNvPr id="3" name="TextBox 2"/>
+          <p:cNvSpPr txBox="1"/>
+          <p:nvPr/>
+        </p:nvSpPr>
+        <p:spPr>
+          <a:xfrm>
+            <a:off x="548640" y="1051560"/>
+            <a:ext cx="5532120" cy="5577840"/>
+          </a:xfrm>
+          <a:prstGeom prst="rect">
+            <a:avLst/>
+          </a:prstGeom>
+          <a:noFill/>
+        </p:spPr>
+        <p:txBody>
+          <a:bodyPr wrap="square">
+            <a:spAutoFit/>
+          </a:bodyPr>
+          <a:lstStyle/>
+          <a:p>
+            <a:pPr/>
+            <a:r>
+              <a:rPr sz="1600" b="1">
+                <a:solidFill>
+                  <a:srgbClr val="222222"/>
+                </a:solidFill>
+                <a:latin typeface="Meiryo"/>
+              </a:rPr>
+              <a:t>素朴な移植との差分 8 点 (実測検証済)</a:t>
+            </a:r>
+          </a:p>
+          <a:p>
             <a:pPr lvl="1"/>
             <a:r>
               <a:rPr sz="1300" b="0">
@@ -8185,7 +8309,7 @@
                 </a:solidFill>
                 <a:latin typeface="Meiryo"/>
               </a:rPr>
-              <a:t>・フェーズ 1 末: 2953 / 3236 step = 0.91/step — ランダムトラックでも打ち切り上限級で周回</a:t>
+              <a:t>・グリッドは非対称: x −9〜+27 m / y ±18 m、自車はセル (3,6) で中央でない</a:t>
             </a:r>
           </a:p>
           <a:p>
@@ -8197,7 +8321,7 @@
                 </a:solidFill>
                 <a:latin typeface="Meiryo"/>
               </a:rPr>
-              <a:t>・eval は duration 120 秒 (600 step 上限) — 最大 517 = 0.86/step。fast ランと絶対値の比較は不可 (per-step で見る)</a:t>
+              <a:t>・x/y/vx/vy の値はトラック軸のまま。回転するのはセル添字だけ</a:t>
             </a:r>
           </a:p>
           <a:p>
@@ -8209,7 +8333,174 @@
                 </a:solidFill>
                 <a:latin typeface="Meiryo"/>
               </a:rPr>
-              <a:t>・explained_variance 最終 0.63 (fast 0.32 より良好)。value_loss 117 はトラック + NPC ランダム性によるリターン分散の反映で悪化ではない</a:t>
+              <a:t>・vx/vy は自車速度との相対、cos_h/sin_h は各車の絶対 heading</a:t>
+            </a:r>
+          </a:p>
+          <a:p>
+            <a:pPr lvl="1"/>
+            <a:r>
+              <a:rPr sz="1300" b="0">
+                <a:solidFill>
+                  <a:srgbClr val="595959"/>
+                </a:solidFill>
+                <a:latin typeface="Meiryo"/>
+              </a:rPr>
+              <a:t>・正規化は [−1,1] (値÷レンジ、clip)、[0,1] ではない</a:t>
+            </a:r>
+          </a:p>
+          <a:p>
+            <a:pPr lvl="1"/>
+            <a:r>
+              <a:rPr sz="1300" b="0">
+                <a:solidFill>
+                  <a:srgbClr val="595959"/>
+                </a:solidFill>
+                <a:latin typeface="Meiryo"/>
+              </a:rPr>
+              <a:t>・自車も NPC の後に最後に書き込み、自セルを勝ち取る</a:t>
+            </a:r>
+          </a:p>
+          <a:p>
+            <a:pPr lvl="1"/>
+            <a:r>
+              <a:rPr sz="1300" b="0">
+                <a:solidFill>
+                  <a:srgbClr val="595959"/>
+                </a:solidFill>
+                <a:latin typeface="Meiryo"/>
+              </a:rPr>
+              <a:t>・最近傍レーンは全18レーンの |lat|+はみ出し+|heading差| の argmin</a:t>
+            </a:r>
+          </a:p>
+        </p:txBody>
+      </p:sp>
+      <p:sp>
+        <p:nvSpPr>
+          <p:cNvPr id="4" name="TextBox 3"/>
+          <p:cNvSpPr txBox="1"/>
+          <p:nvPr/>
+        </p:nvSpPr>
+        <p:spPr>
+          <a:xfrm>
+            <a:off x="6263640" y="1051560"/>
+            <a:ext cx="5486400" cy="5577840"/>
+          </a:xfrm>
+          <a:prstGeom prst="rect">
+            <a:avLst/>
+          </a:prstGeom>
+          <a:noFill/>
+        </p:spPr>
+        <p:txBody>
+          <a:bodyPr wrap="square">
+            <a:spAutoFit/>
+          </a:bodyPr>
+          <a:lstStyle/>
+          <a:p>
+            <a:pPr/>
+            <a:r>
+              <a:rPr sz="1600" b="1">
+                <a:solidFill>
+                  <a:srgbClr val="222222"/>
+                </a:solidFill>
+                <a:latin typeface="Meiryo"/>
+              </a:rPr>
+              <a:t>on_road — レイキャストしない</a:t>
+            </a:r>
+          </a:p>
+          <a:p>
+            <a:pPr lvl="1"/>
+            <a:r>
+              <a:rPr sz="1300" b="0">
+                <a:solidFill>
+                  <a:srgbClr val="595959"/>
+                </a:solidFill>
+                <a:latin typeface="Meiryo"/>
+              </a:rPr>
+              <a:t>・レーン中心線を 3 m 刻みで歩きセルを 1 にする「中心線トレース」</a:t>
+            </a:r>
+          </a:p>
+          <a:p>
+            <a:pPr lvl="1"/>
+            <a:r>
+              <a:rPr sz="1300" b="0">
+                <a:solidFill>
+                  <a:srgbClr val="595959"/>
+                </a:solidFill>
+                <a:latin typeface="Meiryo"/>
+              </a:rPr>
+              <a:t>・道路面を塗ると幅3セルの帯になり学習時と別物 → 劣化</a:t>
+            </a:r>
+          </a:p>
+          <a:p>
+            <a:pPr/>
+            <a:r>
+              <a:rPr sz="1600" b="1">
+                <a:solidFill>
+                  <a:srgbClr val="222222"/>
+                </a:solidFill>
+                <a:latin typeface="Meiryo"/>
+              </a:rPr>
+              <a:t>lat_off / ang_off — 中心線の幾何だけで</a:t>
+            </a:r>
+          </a:p>
+          <a:p>
+            <a:pPr lvl="1"/>
+            <a:r>
+              <a:rPr sz="1300" b="0">
+                <a:solidFill>
+                  <a:srgbClr val="595959"/>
+                </a:solidFill>
+                <a:latin typeface="Meiryo"/>
+              </a:rPr>
+              <a:t>・コライダー不要。最近傍レーンのローカル座標で横オフセット + heading 差</a:t>
+            </a:r>
+          </a:p>
+          <a:p>
+            <a:pPr lvl="1"/>
+            <a:r>
+              <a:rPr sz="1300" b="0">
+                <a:solidFill>
+                  <a:srgbClr val="595959"/>
+                </a:solidFill>
+                <a:latin typeface="Meiryo"/>
+              </a:rPr>
+              <a:t>・レーンは _make_road のハードコピー or track_&lt;name&gt;.json から供給</a:t>
+            </a:r>
+          </a:p>
+          <a:p>
+            <a:pPr/>
+            <a:r>
+              <a:rPr sz="1600" b="1">
+                <a:solidFill>
+                  <a:srgbClr val="222222"/>
+                </a:solidFill>
+                <a:latin typeface="Meiryo"/>
+              </a:rPr>
+              <a:t>実行と検証</a:t>
+            </a:r>
+          </a:p>
+          <a:p>
+            <a:pPr lvl="1"/>
+            <a:r>
+              <a:rPr sz="1300" b="0">
+                <a:solidFill>
+                  <a:srgbClr val="595959"/>
+                </a:solidFill>
+                <a:latin typeface="Meiryo"/>
+              </a:rPr>
+              <a:t>・HWC 平坦配列 → NHWC モデル直結 / 5 Hz 推論 / action_mean を clip して decode</a:t>
+            </a:r>
+          </a:p>
+          <a:p>
+            <a:pPr lvl="1"/>
+            <a:r>
+              <a:rPr sz="1300" b="0">
+                <a:solidFill>
+                  <a:srgbClr val="595959"/>
+                </a:solidFill>
+                <a:latin typeface="Meiryo"/>
+              </a:rPr>
+              <a:t>・verify/ で実環境の参照観測とセル単位照合 → maxDiff 0.0 (ビット一致)</a:t>
             </a:r>
           </a:p>
         </p:txBody>

--- a/docs/CircuitAgents_intro_ja.pptx
+++ b/docs/CircuitAgents_intro_ja.pptx
@@ -25,6 +25,7 @@
     <p:sldId id="279" r:id="rId31"/>
     <p:sldId id="280" r:id="rId32"/>
     <p:sldId id="281" r:id="rId33"/>
+    <p:sldId id="283" r:id="rId35"/>
     <p:sldId id="273" r:id="rId25"/>
     <p:sldId id="274" r:id="rId26"/>
     <p:sldId id="275" r:id="rId27"/>
@@ -1579,6 +1580,76 @@
           <a:p>
             <a:r>
               <a:t>最後に、今回の最大の学びです。良いゲーム AI をシミュレーションで作れるかは、そのゲームが何を必要とするかに全面的に依存します。だからこそ、AI を設計する前に『目的』を定めることが不可欠です。目的はゲームごとに大きく異なります。今回はレースゲームを想定し、壁・摩擦・特定の車サイズ・トラックサイズといった要素を模擬しました。しかし別のゲームなら、模擬すべきものも省けるものも変わります。目的を先に決めるからこそ、何を環境に作り込み、何を捨てるかが決まるのです。技術面の振り返りとしては、ステア専用のレーン追従環境に行動・壁・報酬・観測・トラックの5 段階の進化を施し、抜け道を報酬の経済設計で割に合わなくした結果、6 万ステップで周回を学習する環境になりました。汎化は自己位置を見せない観測設計の帰結です。残る課題は ONNX レイヤ対応を完了しゲーム内で実走させること。ご清聴ありがとうございました。</a:t>
+            </a:r>
+          </a:p>
+        </p:txBody>
+      </p:sp>
+      <p:sp>
+        <p:nvSpPr>
+          <p:cNvPr id="4" name="Slide Number Placeholder 3"/>
+          <p:cNvSpPr>
+            <a:spLocks noGrp="1"/>
+          </p:cNvSpPr>
+          <p:nvPr>
+            <p:ph type="sldNum" idx="5" sz="quarter"/>
+          </p:nvPr>
+        </p:nvSpPr>
+        <p:spPr/>
+      </p:sp>
+    </p:spTree>
+  </p:cSld>
+  <p:clrMapOvr>
+    <a:masterClrMapping/>
+  </p:clrMapOvr>
+</p:notes>
+</file>
+
+<file path=ppt/notesSlides/notesSlide24.xml><?xml version="1.0" encoding="utf-8"?>
+<p:notes xmlns:a="http://schemas.openxmlformats.org/drawingml/2006/main" xmlns:p="http://schemas.openxmlformats.org/presentationml/2006/main" xmlns:r="http://schemas.openxmlformats.org/officeDocument/2006/relationships">
+  <p:cSld>
+    <p:spTree>
+      <p:nvGrpSpPr>
+        <p:cNvPr id="1" name=""/>
+        <p:cNvGrpSpPr/>
+        <p:nvPr/>
+      </p:nvGrpSpPr>
+      <p:grpSpPr>
+        <a:xfrm>
+          <a:off x="0" y="0"/>
+          <a:ext cx="0" cy="0"/>
+          <a:chOff x="0" y="0"/>
+          <a:chExt cx="0" cy="0"/>
+        </a:xfrm>
+      </p:grpSpPr>
+      <p:sp>
+        <p:nvSpPr>
+          <p:cNvPr id="2" name="Slide Image Placeholder 1"/>
+          <p:cNvSpPr>
+            <a:spLocks noGrp="1"/>
+          </p:cNvSpPr>
+          <p:nvPr>
+            <p:ph type="sldImg" idx="2"/>
+          </p:nvPr>
+        </p:nvSpPr>
+        <p:spPr/>
+      </p:sp>
+      <p:sp>
+        <p:nvSpPr>
+          <p:cNvPr id="3" name="Notes Placeholder 2"/>
+          <p:cNvSpPr>
+            <a:spLocks noGrp="1"/>
+          </p:cNvSpPr>
+          <p:nvPr>
+            <p:ph type="body" idx="3" sz="quarter"/>
+          </p:nvPr>
+        </p:nvSpPr>
+        <p:spPr/>
+        <p:txBody>
+          <a:bodyPr/>
+          <a:lstStyle/>
+          <a:p>
+            <a:r>
+              <a:t>ログを見て設定を変えるべきかの結論です。まずフェーズ 1 は両ランとも健全で、毎ステップ 0.88 から 0.91 の報酬率でフル周回に張り付き、KL も収束しているので触りません。問題はフェーズ 2 で、二つの警告が出ています。一つは終盤チャーンで、KL が 0.73、クリップ率が 77% と健康域を大きく超えています。もう一つは汎化ランで約 380 万ステップ地点の方策崩壊で、eval 報酬が 517 から 193 に落ち、value_loss がスパイクし、explained_variance がマイナス 1 近くまで急落します。これはタスクが難しくなったのではなく崩壊です。原因は定数学習率 1e-4 での 15 エポックが同じデータを絞り切ることと、NPC 導入時に実効学習率が跳ね上がることです。推奨はフェーズ 2 に限定した四点で、target_kl の追加、学習率の低減、エポック数の削減、そしてフェーズ 2 の短縮または早期停止です。恒久対策としては既に per-phase のEvalCallback ベスト採用が効いていて、崩壊後のチェックポイントは使われません。今デプロイするなら NPC 無しトラックはフェーズ 1 のベストが最良です。なお、これらはフェーズ 1 の成功を壊さないようフェーズ 2 に閉じ、再学習で検証してから適用します。</a:t>
             </a:r>
           </a:p>
         </p:txBody>
@@ -7654,7 +7725,7 @@
                 </a:solidFill>
                 <a:latin typeface="Meiryo"/>
               </a:rPr>
-              <a:t>実ゲームとのギャップ — シミュレーションが省いているもの</a:t>
+              <a:t>TensorBoard 指標の読み方 — チートシート</a:t>
             </a:r>
           </a:p>
         </p:txBody>
@@ -7667,8 +7738,8 @@
         </p:nvSpPr>
         <p:spPr>
           <a:xfrm>
-            <a:off x="548640" y="1143000"/>
-            <a:ext cx="11064240" cy="5486400"/>
+            <a:off x="548640" y="1051560"/>
+            <a:ext cx="5486400" cy="5577840"/>
           </a:xfrm>
           <a:prstGeom prst="rect">
             <a:avLst/>
@@ -7681,27 +7752,19 @@
           </a:bodyPr>
           <a:lstStyle/>
           <a:p>
-            <a:pPr>
-              <a:spcAft>
-                <a:spcPts val="600"/>
-              </a:spcAft>
-            </a:pPr>
-            <a:r>
-              <a:rPr sz="1500" b="1">
+            <a:pPr/>
+            <a:r>
+              <a:rPr sz="1600" b="1">
                 <a:solidFill>
                   <a:srgbClr val="222222"/>
                 </a:solidFill>
                 <a:latin typeface="Meiryo"/>
               </a:rPr>
-              <a:t>車両動力学</a:t>
-            </a:r>
-          </a:p>
-          <a:p>
-            <a:pPr lvl="1">
-              <a:spcAft>
-                <a:spcPts val="200"/>
-              </a:spcAft>
-            </a:pPr>
+              <a:t>リターン系 (per-step 比で読む)</a:t>
+            </a:r>
+          </a:p>
+          <a:p>
+            <a:pPr lvl="1"/>
             <a:r>
               <a:rPr sz="1300" b="0">
                 <a:solidFill>
@@ -7709,15 +7772,11 @@
                 </a:solidFill>
                 <a:latin typeface="Meiryo"/>
               </a:rPr>
-              <a:t>・線形タイヤ (グリップ飽和なし) / 質量 1 kg 正規化 / 荷重移動・サスなし</a:t>
-            </a:r>
-          </a:p>
-          <a:p>
-            <a:pPr lvl="1">
-              <a:spcAft>
-                <a:spcPts val="200"/>
-              </a:spcAft>
-            </a:pPr>
+              <a:t>・rollout/ep_rew_mean・ep_len_mean: 報酬は 1 step [0,1] → リターン ≈ 生存 step × 報酬率。絶対値の増減はまずエピソード長要因を疑う</a:t>
+            </a:r>
+          </a:p>
+          <a:p>
+            <a:pPr lvl="1"/>
             <a:r>
               <a:rPr sz="1300" b="0">
                 <a:solidFill>
@@ -7725,31 +7784,23 @@
                 </a:solidFill>
                 <a:latin typeface="Meiryo"/>
               </a:rPr>
-              <a:t>・加速度は直接指令: エンジン/ブレーキ特性・ギア・空気抵抗・転がり抵抗なし (惰性で減速しない)</a:t>
-            </a:r>
-          </a:p>
-          <a:p>
-            <a:pPr>
-              <a:spcAft>
-                <a:spcPts val="600"/>
-              </a:spcAft>
-            </a:pPr>
-            <a:r>
-              <a:rPr sz="1500" b="1">
+              <a:t>・eval/mean_reward: EvalCallback の決定論評価 = ベストモデル選択の根拠。eval の duration が違うと上限も違う (fast 4000 step / 汎化 600 step)</a:t>
+            </a:r>
+          </a:p>
+          <a:p>
+            <a:pPr/>
+            <a:r>
+              <a:rPr sz="1600" b="1">
                 <a:solidFill>
                   <a:srgbClr val="222222"/>
                 </a:solidFill>
                 <a:latin typeface="Meiryo"/>
               </a:rPr>
-              <a:t>壁・衝突</a:t>
-            </a:r>
-          </a:p>
-          <a:p>
-            <a:pPr lvl="1">
-              <a:spcAft>
-                <a:spcPts val="200"/>
-              </a:spcAft>
-            </a:pPr>
+              <a:t>探索系</a:t>
+            </a:r>
+          </a:p>
+          <a:p>
+            <a:pPr lvl="1"/>
             <a:r>
               <a:rPr sz="1300" b="0">
                 <a:solidFill>
@@ -7757,15 +7808,11 @@
                 </a:solidFill>
                 <a:latin typeface="Meiryo"/>
               </a:rPr>
-              <a:t>・停止壁は理想化 (速度を消すだけ): 衝突インパルス・スピン・ダメージなし</a:t>
-            </a:r>
-          </a:p>
-          <a:p>
-            <a:pPr lvl="1">
-              <a:spcAft>
-                <a:spcPts val="200"/>
-              </a:spcAft>
-            </a:pPr>
+              <a:t>・train/std: ガウス方策の σ。1.0 → 0.15〜0.18 へ単調減が健康形。増えるなら ent_coef 過大 (fastdev では σ→1.6 の実測事故)</a:t>
+            </a:r>
+          </a:p>
+          <a:p>
+            <a:pPr lvl="1"/>
             <a:r>
               <a:rPr sz="1300" b="0">
                 <a:solidFill>
@@ -7773,31 +7820,46 @@
                 </a:solidFill>
                 <a:latin typeface="Meiryo"/>
               </a:rPr>
-              <a:t>・壁摩擦 0.6 は仮値 — 実ゲームの壁材質に合わせた再調整ポイント</a:t>
-            </a:r>
-          </a:p>
-          <a:p>
-            <a:pPr>
-              <a:spcAft>
-                <a:spcPts val="600"/>
-              </a:spcAft>
-            </a:pPr>
-            <a:r>
-              <a:rPr sz="1500" b="1">
+              <a:t>・entropy_loss = −エントロピー: σ &lt; 0.24 でガウスのエントロピーは負 → 曲線が正に出るのは収束のサイン</a:t>
+            </a:r>
+          </a:p>
+        </p:txBody>
+      </p:sp>
+      <p:sp>
+        <p:nvSpPr>
+          <p:cNvPr id="4" name="TextBox 3"/>
+          <p:cNvSpPr txBox="1"/>
+          <p:nvPr/>
+        </p:nvSpPr>
+        <p:spPr>
+          <a:xfrm>
+            <a:off x="6217920" y="1051560"/>
+            <a:ext cx="5486400" cy="5577840"/>
+          </a:xfrm>
+          <a:prstGeom prst="rect">
+            <a:avLst/>
+          </a:prstGeom>
+          <a:noFill/>
+        </p:spPr>
+        <p:txBody>
+          <a:bodyPr wrap="square">
+            <a:spAutoFit/>
+          </a:bodyPr>
+          <a:lstStyle/>
+          <a:p>
+            <a:pPr/>
+            <a:r>
+              <a:rPr sz="1600" b="1">
                 <a:solidFill>
                   <a:srgbClr val="222222"/>
                 </a:solidFill>
                 <a:latin typeface="Meiryo"/>
               </a:rPr>
-              <a:t>制御・タイミング</a:t>
-            </a:r>
-          </a:p>
-          <a:p>
-            <a:pPr lvl="1">
-              <a:spcAft>
-                <a:spcPts val="200"/>
-              </a:spcAft>
-            </a:pPr>
+              <a:t>更新の大きさ</a:t>
+            </a:r>
+          </a:p>
+          <a:p>
+            <a:pPr lvl="1"/>
             <a:r>
               <a:rPr sz="1300" b="0">
                 <a:solidFill>
@@ -7805,31 +7867,35 @@
                 </a:solidFill>
                 <a:latin typeface="Meiryo"/>
               </a:rPr>
-              <a:t>・ステア瞬時応答 (アクチュエータ遅れなし) / 5 Hz 等間隔・推論レイテンシ未モデル化</a:t>
-            </a:r>
-          </a:p>
-          <a:p>
-            <a:pPr>
-              <a:spcAft>
-                <a:spcPts val="600"/>
-              </a:spcAft>
-            </a:pPr>
-            <a:r>
-              <a:rPr sz="1500" b="1">
+              <a:t>・learning_rate: P1 は線形減衰 2e-4→~0 (仕様。停滞ではない) / P2 は定数 1e-4</a:t>
+            </a:r>
+          </a:p>
+          <a:p>
+            <a:pPr lvl="1"/>
+            <a:r>
+              <a:rPr sz="1300" b="0">
+                <a:solidFill>
+                  <a:srgbClr val="595959"/>
+                </a:solidFill>
+                <a:latin typeface="Meiryo"/>
+              </a:rPr>
+              <a:t>・approx_kl・clip_fraction: 1 更新の方策移動量とクリップ率。KL &gt; 0.1 が常態なら epochs/LR 過大 → 終盤 ckpt でなく EvalCallback ベストを使う根拠</a:t>
+            </a:r>
+          </a:p>
+          <a:p>
+            <a:pPr/>
+            <a:r>
+              <a:rPr sz="1600" b="1">
                 <a:solidFill>
                   <a:srgbClr val="222222"/>
                 </a:solidFill>
                 <a:latin typeface="Meiryo"/>
               </a:rPr>
-              <a:t>環境</a:t>
-            </a:r>
-          </a:p>
-          <a:p>
-            <a:pPr lvl="1">
-              <a:spcAft>
-                <a:spcPts val="200"/>
-              </a:spcAft>
-            </a:pPr>
+              <a:t>批評家 (価値関数) 系</a:t>
+            </a:r>
+          </a:p>
+          <a:p>
+            <a:pPr lvl="1"/>
             <a:r>
               <a:rPr sz="1300" b="0">
                 <a:solidFill>
@@ -7837,7 +7903,31 @@
                 </a:solidFill>
                 <a:latin typeface="Meiryo"/>
               </a:rPr>
-              <a:t>・2D 平面: 縁石・バンク・高低差・路面 μ 変化なし / NPC は IDM (ゲーム AI と別物)</a:t>
+              <a:t>・explained_variance: 1=完璧 / 0=平均並み / 負=有害。序盤の負は正常、上昇傾向だけ見る</a:t>
+            </a:r>
+          </a:p>
+          <a:p>
+            <a:pPr lvl="1"/>
+            <a:r>
+              <a:rPr sz="1300" b="0">
+                <a:solidFill>
+                  <a:srgbClr val="595959"/>
+                </a:solidFill>
+                <a:latin typeface="Meiryo"/>
+              </a:rPr>
+              <a:t>・value_loss: リターンスケールに比例 — 絶対値の比較は無意味。リターン分散の増減の鏡</a:t>
+            </a:r>
+          </a:p>
+          <a:p>
+            <a:pPr lvl="1"/>
+            <a:r>
+              <a:rPr sz="1300" b="0">
+                <a:solidFill>
+                  <a:srgbClr val="595959"/>
+                </a:solidFill>
+                <a:latin typeface="Meiryo"/>
+              </a:rPr>
+              <a:t>・loss・policy_gradient_loss: クリッピングにより大きさの診断価値は薄い</a:t>
             </a:r>
           </a:p>
         </p:txBody>
@@ -7889,21 +7979,45 @@
                 </a:solidFill>
                 <a:latin typeface="Meiryo"/>
               </a:rPr>
-              <a:t>ギャップの二層戦略 — 消せるものは消し、残りは吸収する</a:t>
-            </a:r>
-          </a:p>
-        </p:txBody>
-      </p:sp>
-      <p:sp>
-        <p:nvSpPr>
-          <p:cNvPr id="3" name="TextBox 2"/>
+              <a:t>実測 (1) fast トラック agent — runs/sb3_ppo_cnn_full (401 万 step)</a:t>
+            </a:r>
+          </a:p>
+        </p:txBody>
+      </p:sp>
+      <p:pic>
+        <p:nvPicPr>
+          <p:cNvPr id="3" name="Picture 2" descr="tb_task2_fast_indicators.png"/>
+          <p:cNvPicPr>
+            <a:picLocks noChangeAspect="1"/>
+          </p:cNvPicPr>
+          <p:nvPr/>
+        </p:nvPicPr>
+        <p:blipFill>
+          <a:blip r:embed="rId2"/>
+          <a:stretch>
+            <a:fillRect/>
+          </a:stretch>
+        </p:blipFill>
+        <p:spPr>
+          <a:xfrm>
+            <a:off x="790956" y="960120"/>
+            <a:ext cx="10607040" cy="4186989"/>
+          </a:xfrm>
+          <a:prstGeom prst="rect">
+            <a:avLst/>
+          </a:prstGeom>
+        </p:spPr>
+      </p:pic>
+      <p:sp>
+        <p:nvSpPr>
+          <p:cNvPr id="4" name="TextBox 3"/>
           <p:cNvSpPr txBox="1"/>
           <p:nvPr/>
         </p:nvSpPr>
         <p:spPr>
           <a:xfrm>
-            <a:off x="548640" y="1188720"/>
-            <a:ext cx="11064240" cy="5486400"/>
+            <a:off x="548640" y="5284269"/>
+            <a:ext cx="11064240" cy="1528010"/>
           </a:xfrm>
           <a:prstGeom prst="rect">
             <a:avLst/>
@@ -7916,27 +8030,7 @@
           </a:bodyPr>
           <a:lstStyle/>
           <a:p>
-            <a:pPr>
-              <a:spcAft>
-                <a:spcPts val="600"/>
-              </a:spcAft>
-            </a:pPr>
-            <a:r>
-              <a:rPr sz="1500" b="1">
-                <a:solidFill>
-                  <a:srgbClr val="222222"/>
-                </a:solidFill>
-                <a:latin typeface="Meiryo"/>
-              </a:rPr>
-              <a:t>第一層: ギャップ自体を消す</a:t>
-            </a:r>
-          </a:p>
-          <a:p>
-            <a:pPr lvl="1">
-              <a:spcAft>
-                <a:spcPts val="200"/>
-              </a:spcAft>
-            </a:pPr>
+            <a:pPr lvl="1"/>
             <a:r>
               <a:rPr sz="1300" b="0">
                 <a:solidFill>
@@ -7944,31 +8038,11 @@
                 </a:solidFill>
                 <a:latin typeface="Meiryo"/>
               </a:rPr>
-              <a:t>・観測ビット一致 + 物理 1e-7 一致の C# 移植 — 移植起因の挙動差をゼロに</a:t>
-            </a:r>
-          </a:p>
-          <a:p>
-            <a:pPr>
-              <a:spcAft>
-                <a:spcPts val="600"/>
-              </a:spcAft>
-            </a:pPr>
-            <a:r>
-              <a:rPr sz="1500" b="1">
-                <a:solidFill>
-                  <a:srgbClr val="222222"/>
-                </a:solidFill>
-                <a:latin typeface="Meiryo"/>
-              </a:rPr>
-              <a:t>第二層: 残差をデプロイ側フィルタで吸収 (再学習不要)</a:t>
-            </a:r>
-          </a:p>
-          <a:p>
-            <a:pPr lvl="1">
-              <a:spcAft>
-                <a:spcPts val="200"/>
-              </a:spcAft>
-            </a:pPr>
+              <a:t>・フェーズ 1 末: リターン 3498 / 3975 step = 0.88/step — 800 秒打ち切り上限に張り付き (無限周回)。KL 6.6e-4 / clip 0.3% = 収束</a:t>
+            </a:r>
+          </a:p>
+          <a:p>
+            <a:pPr lvl="1"/>
             <a:r>
               <a:rPr sz="1300" b="0">
                 <a:solidFill>
@@ -7976,15 +8050,11 @@
                 </a:solidFill>
                 <a:latin typeface="Meiryo"/>
               </a:rPr>
-              <a:t>・SteeringSmoother (EMA α0.6): 蛇行 34→12 回/100步、直線の中央維持も改善</a:t>
-            </a:r>
-          </a:p>
-          <a:p>
-            <a:pPr lvl="1">
-              <a:spcAft>
-                <a:spcPts val="200"/>
-              </a:spcAft>
-            </a:pPr>
+              <a:t>・フェーズ 2 (破線以降、NPC 追加): 177 / 270 step = 0.65/step — 「低下」ではなく終端が truncation → 衝突に変わった正常形</a:t>
+            </a:r>
+          </a:p>
+          <a:p>
+            <a:pPr lvl="1"/>
             <a:r>
               <a:rPr sz="1300" b="0">
                 <a:solidFill>
@@ -7992,83 +8062,11 @@
                 </a:solidFill>
                 <a:latin typeface="Meiryo"/>
               </a:rPr>
-              <a:t>・CorneringLimiter: ステア速度制限 + 曲率ベース比例ブレーキ (速度床 5 m/s で停止しない)</a:t>
-            </a:r>
-          </a:p>
-          <a:p>
-            <a:pPr lvl="1">
-              <a:spcAft>
-                <a:spcPts val="200"/>
-              </a:spcAft>
-            </a:pPr>
-            <a:r>
-              <a:rPr sz="1300" b="0">
-                <a:solidFill>
-                  <a:srgbClr val="595959"/>
-                </a:solidFill>
-                <a:latin typeface="Meiryo"/>
-              </a:rPr>
-              <a:t>・StuckRecovery: 「前進指示なのに 1 秒 0.3 m 未満」で壁刺さり検出 → バック 1.6 秒</a:t>
-            </a:r>
-          </a:p>
-          <a:p>
-            <a:pPr lvl="2">
-              <a:spcAft>
-                <a:spcPts val="200"/>
-              </a:spcAft>
-            </a:pPr>
-            <a:r>
-              <a:rPr sz="1100" b="0">
-                <a:solidFill>
-                  <a:srgbClr val="595959"/>
-                </a:solidFill>
-                <a:latin typeface="Meiryo"/>
-              </a:rPr>
-              <a:t>− 検証: フィルタ通しでシム内評価 — 周回数維持を確認 (閉ループ変化のチェック)</a:t>
-            </a:r>
-          </a:p>
-          <a:p>
-            <a:pPr>
-              <a:spcAft>
-                <a:spcPts val="600"/>
-              </a:spcAft>
-            </a:pPr>
-            <a:r>
-              <a:rPr sz="1500" b="0">
-                <a:solidFill>
-                  <a:srgbClr val="222222"/>
-                </a:solidFill>
-                <a:latin typeface="Meiryo"/>
-              </a:rPr>
-              <a:t>第三層 (必要時): 壁摩擦・レンジを実測に合わせ環境を再調整して再学習</a:t>
-            </a:r>
-          </a:p>
-        </p:txBody>
-      </p:sp>
-      <p:pic>
-        <p:nvPicPr>
-          <p:cNvPr id="4" name="Picture 3" descr="smoothing_effect.png"/>
-          <p:cNvPicPr>
-            <a:picLocks noChangeAspect="1"/>
-          </p:cNvPicPr>
-          <p:nvPr/>
-        </p:nvPicPr>
-        <p:blipFill>
-          <a:blip r:embed="rId3"/>
-          <a:stretch>
-            <a:fillRect/>
-          </a:stretch>
-        </p:blipFill>
-        <p:spPr>
-          <a:xfrm>
-            <a:off x="6949440" y="4434840"/>
-            <a:ext cx="4846320" cy="1674183"/>
-          </a:xfrm>
-          <a:prstGeom prst="rect">
-            <a:avLst/>
-          </a:prstGeom>
-        </p:spPr>
-      </p:pic>
+              <a:t>・終盤は KL 0.73 / clip 77% のチャーン → 最終 ckpt ではなく EvalCallback ベストを採用。σ は 1.0 → 0.165 で焼きなまし完了</a:t>
+            </a:r>
+          </a:p>
+        </p:txBody>
+      </p:sp>
     </p:spTree>
   </p:cSld>
   <p:clrMapOvr>
@@ -8247,21 +8245,45 @@
                 </a:solidFill>
                 <a:latin typeface="Meiryo"/>
               </a:rPr>
-              <a:t>セットアップとノートブックの使い方</a:t>
-            </a:r>
-          </a:p>
-        </p:txBody>
-      </p:sp>
-      <p:sp>
-        <p:nvSpPr>
-          <p:cNvPr id="3" name="TextBox 2"/>
+              <a:t>実測 (2) 汎化 agent — runs/sb3_ppo_gen_cnn (451 万 step)</a:t>
+            </a:r>
+          </a:p>
+        </p:txBody>
+      </p:sp>
+      <p:pic>
+        <p:nvPicPr>
+          <p:cNvPr id="3" name="Picture 2" descr="tb_task3_gen_indicators.png"/>
+          <p:cNvPicPr>
+            <a:picLocks noChangeAspect="1"/>
+          </p:cNvPicPr>
+          <p:nvPr/>
+        </p:nvPicPr>
+        <p:blipFill>
+          <a:blip r:embed="rId2"/>
+          <a:stretch>
+            <a:fillRect/>
+          </a:stretch>
+        </p:blipFill>
+        <p:spPr>
+          <a:xfrm>
+            <a:off x="790956" y="960120"/>
+            <a:ext cx="10607040" cy="4186989"/>
+          </a:xfrm>
+          <a:prstGeom prst="rect">
+            <a:avLst/>
+          </a:prstGeom>
+        </p:spPr>
+      </p:pic>
+      <p:sp>
+        <p:nvSpPr>
+          <p:cNvPr id="4" name="TextBox 3"/>
           <p:cNvSpPr txBox="1"/>
           <p:nvPr/>
         </p:nvSpPr>
         <p:spPr>
           <a:xfrm>
-            <a:off x="548640" y="1188720"/>
-            <a:ext cx="11064240" cy="5486400"/>
+            <a:off x="548640" y="5284269"/>
+            <a:ext cx="11064240" cy="1528010"/>
           </a:xfrm>
           <a:prstGeom prst="rect">
             <a:avLst/>
@@ -8274,163 +8296,39 @@
           </a:bodyPr>
           <a:lstStyle/>
           <a:p>
-            <a:pPr>
-              <a:spcAft>
-                <a:spcPts val="600"/>
-              </a:spcAft>
-            </a:pPr>
-            <a:r>
-              <a:rPr sz="1600" b="1">
-                <a:solidFill>
-                  <a:srgbClr val="222222"/>
-                </a:solidFill>
-                <a:latin typeface="Meiryo"/>
-              </a:rPr>
-              <a:t>環境構築</a:t>
-            </a:r>
-          </a:p>
-          <a:p>
-            <a:pPr lvl="1">
-              <a:spcAft>
-                <a:spcPts val="200"/>
-              </a:spcAft>
-            </a:pPr>
-            <a:r>
-              <a:rPr sz="1400" b="0">
+            <a:pPr lvl="1"/>
+            <a:r>
+              <a:rPr sz="1300" b="0">
                 <a:solidFill>
                   <a:srgbClr val="595959"/>
                 </a:solidFill>
                 <a:latin typeface="Meiryo"/>
               </a:rPr>
-              <a:t>・pip install "highway-env&gt;=1.8" "stable-baselines3[extra]&gt;=2.0" gymnasium torch tensorboard moviepy onnx onnxruntime</a:t>
-            </a:r>
-          </a:p>
-          <a:p>
-            <a:pPr lvl="1">
-              <a:spcAft>
-                <a:spcPts val="200"/>
-              </a:spcAft>
-            </a:pPr>
-            <a:r>
-              <a:rPr sz="1400" b="0">
-                <a:solidFill>
-                  <a:srgbClr val="B32D2D"/>
-                </a:solidFill>
-                <a:latin typeface="Meiryo"/>
-              </a:rPr>
-              <a:t>・リポジトリの requirements.txt は旧 TF スタック用 — 使わない</a:t>
-            </a:r>
-          </a:p>
-          <a:p>
-            <a:pPr>
-              <a:spcAft>
-                <a:spcPts val="600"/>
-              </a:spcAft>
-            </a:pPr>
-            <a:r>
-              <a:rPr sz="1600" b="1">
-                <a:solidFill>
-                  <a:srgbClr val="222222"/>
-                </a:solidFill>
-                <a:latin typeface="Meiryo"/>
-              </a:rPr>
-              <a:t>ノートブック</a:t>
-            </a:r>
-          </a:p>
-          <a:p>
-            <a:pPr lvl="1">
-              <a:spcAft>
-                <a:spcPts val="200"/>
-              </a:spcAft>
-            </a:pPr>
-            <a:r>
-              <a:rPr sz="1400" b="0">
+              <a:t>・フェーズ 1 末: 2953 / 3236 step = 0.91/step — ランダムトラックでも打ち切り上限級で周回</a:t>
+            </a:r>
+          </a:p>
+          <a:p>
+            <a:pPr lvl="1"/>
+            <a:r>
+              <a:rPr sz="1300" b="0">
                 <a:solidFill>
                   <a:srgbClr val="595959"/>
                 </a:solidFill>
                 <a:latin typeface="Meiryo"/>
               </a:rPr>
-              <a:t>・task2: fast トラック学習 / task3: random 学習 + トラック別レポート + 5 連動画</a:t>
-            </a:r>
-          </a:p>
-          <a:p>
-            <a:pPr lvl="1">
-              <a:spcAft>
-                <a:spcPts val="200"/>
-              </a:spcAft>
-            </a:pPr>
-            <a:r>
-              <a:rPr sz="1400" b="0">
+              <a:t>・eval は duration 120 秒 (600 step 上限) — 最大 517 = 0.86/step。fast ランと絶対値の比較は不可 (per-step で見る)</a:t>
+            </a:r>
+          </a:p>
+          <a:p>
+            <a:pPr lvl="1"/>
+            <a:r>
+              <a:rPr sz="1300" b="0">
                 <a:solidFill>
                   <a:srgbClr val="595959"/>
                 </a:solidFill>
                 <a:latin typeface="Meiryo"/>
               </a:rPr>
-              <a:t>・FAST_DEV_RUN=True: 12〜15 万 step (周回到達を実測保証) / False: 本番 100 万+</a:t>
-            </a:r>
-          </a:p>
-          <a:p>
-            <a:pPr>
-              <a:spcAft>
-                <a:spcPts val="600"/>
-              </a:spcAft>
-            </a:pPr>
-            <a:r>
-              <a:rPr sz="1600" b="1">
-                <a:solidFill>
-                  <a:srgbClr val="222222"/>
-                </a:solidFill>
-                <a:latin typeface="Meiryo"/>
-              </a:rPr>
-              <a:t>進捗の読み方</a:t>
-            </a:r>
-          </a:p>
-          <a:p>
-            <a:pPr lvl="1">
-              <a:spcAft>
-                <a:spcPts val="200"/>
-              </a:spcAft>
-            </a:pPr>
-            <a:r>
-              <a:rPr sz="1400" b="0">
-                <a:solidFill>
-                  <a:srgbClr val="595959"/>
-                </a:solidFill>
-                <a:latin typeface="Meiryo"/>
-              </a:rPr>
-              <a:t>・Reward yardstick: 1 周 ≈ 101 / アイドル床 ≈ 0.53/step — eval 値を周回数として読む</a:t>
-            </a:r>
-          </a:p>
-          <a:p>
-            <a:pPr lvl="1">
-              <a:spcAft>
-                <a:spcPts val="200"/>
-              </a:spcAft>
-            </a:pPr>
-            <a:r>
-              <a:rPr sz="1400" b="0">
-                <a:solidFill>
-                  <a:srgbClr val="595959"/>
-                </a:solidFill>
-                <a:latin typeface="Meiryo"/>
-              </a:rPr>
-              <a:t>・Presentation Media セル: 学習曲線・軌跡・5 連動画を生成し VIDEO_DIR に保存</a:t>
-            </a:r>
-          </a:p>
-          <a:p>
-            <a:pPr>
-              <a:spcAft>
-                <a:spcPts val="600"/>
-              </a:spcAft>
-            </a:pPr>
-            <a:r>
-              <a:rPr sz="1600" b="0">
-                <a:solidFill>
-                  <a:srgbClr val="222222"/>
-                </a:solidFill>
-                <a:latin typeface="Meiryo"/>
-              </a:rPr>
-              <a:t>C# 検証: cd re_engine/verify &amp;&amp; dotnet run -- ..  → ALL SCENARIOS MATCH</a:t>
+              <a:t>・explained_variance 最終 0.63 (fast 0.32 より良好)。value_loss 117 はトラック + NPC ランダム性によるリターン分散の反映で悪化ではない</a:t>
             </a:r>
           </a:p>
         </p:txBody>
@@ -8482,7 +8380,7 @@
                 </a:solidFill>
                 <a:latin typeface="Meiryo"/>
               </a:rPr>
-              <a:t>エクスポートツールと ONNX の注意点</a:t>
+              <a:t>実ゲームとのギャップ — シミュレーションが省いているもの</a:t>
             </a:r>
           </a:p>
         </p:txBody>
@@ -8521,7 +8419,7 @@
                 </a:solidFill>
                 <a:latin typeface="Meiryo"/>
               </a:rPr>
-              <a:t>エクスポート</a:t>
+              <a:t>車両動力学</a:t>
             </a:r>
           </a:p>
           <a:p>
@@ -8531,29 +8429,45 @@
               </a:spcAft>
             </a:pPr>
             <a:r>
-              <a:rPr sz="1300" b="1">
+              <a:rPr sz="1300" b="0">
                 <a:solidFill>
                   <a:srgbClr val="595959"/>
                 </a:solidFill>
                 <a:latin typeface="Meiryo"/>
               </a:rPr>
-              <a:t>・python export_onnx.py &lt;model.zip&gt; -m 3   # NHWC [1,12,12,10] エンジン用 (推奨)</a:t>
-            </a:r>
-          </a:p>
-          <a:p>
-            <a:pPr lvl="2">
+              <a:t>・線形タイヤ (グリップ飽和なし) / 質量 1 kg 正規化 / 荷重移動・サスなし</a:t>
+            </a:r>
+          </a:p>
+          <a:p>
+            <a:pPr lvl="1">
               <a:spcAft>
                 <a:spcPts val="200"/>
               </a:spcAft>
             </a:pPr>
             <a:r>
-              <a:rPr sz="1100" b="0">
+              <a:rPr sz="1300" b="0">
                 <a:solidFill>
                   <a:srgbClr val="595959"/>
                 </a:solidFill>
                 <a:latin typeface="Meiryo"/>
               </a:rPr>
-              <a:t>− -m 1: full policy / 2: actor CHW / 0: 全部 — 各出力は torch と自動照合 (≤4e-6)</a:t>
+              <a:t>・加速度は直接指令: エンジン/ブレーキ特性・ギア・空気抵抗・転がり抵抗なし (惰性で減速しない)</a:t>
+            </a:r>
+          </a:p>
+          <a:p>
+            <a:pPr>
+              <a:spcAft>
+                <a:spcPts val="600"/>
+              </a:spcAft>
+            </a:pPr>
+            <a:r>
+              <a:rPr sz="1500" b="1">
+                <a:solidFill>
+                  <a:srgbClr val="222222"/>
+                </a:solidFill>
+                <a:latin typeface="Meiryo"/>
+              </a:rPr>
+              <a:t>壁・衝突</a:t>
             </a:r>
           </a:p>
           <a:p>
@@ -8569,7 +8483,23 @@
                 </a:solidFill>
                 <a:latin typeface="Meiryo"/>
               </a:rPr>
-              <a:t>・python re_engine/convert_onnx_nhwc.py &lt;actor.onnx&gt;  # 既存 CHW の NHWC 化</a:t>
+              <a:t>・停止壁は理想化 (速度を消すだけ): 衝突インパルス・スピン・ダメージなし</a:t>
+            </a:r>
+          </a:p>
+          <a:p>
+            <a:pPr lvl="1">
+              <a:spcAft>
+                <a:spcPts val="200"/>
+              </a:spcAft>
+            </a:pPr>
+            <a:r>
+              <a:rPr sz="1300" b="0">
+                <a:solidFill>
+                  <a:srgbClr val="595959"/>
+                </a:solidFill>
+                <a:latin typeface="Meiryo"/>
+              </a:rPr>
+              <a:t>・壁摩擦 0.6 は仮値 — 実ゲームの壁材質に合わせた再調整ポイント</a:t>
             </a:r>
           </a:p>
           <a:p>
@@ -8585,7 +8515,7 @@
                 </a:solidFill>
                 <a:latin typeface="Meiryo"/>
               </a:rPr>
-              <a:t>再生成・検証</a:t>
+              <a:t>制御・タイミング</a:t>
             </a:r>
           </a:p>
           <a:p>
@@ -8601,7 +8531,7 @@
                 </a:solidFill>
                 <a:latin typeface="Meiryo"/>
               </a:rPr>
-              <a:t>・python re_engine/export_track_json.py  → dotnet run で ALL SCENARIOS MATCH を確認</a:t>
+              <a:t>・ステア瞬時応答 (アクチュエータ遅れなし) / 5 Hz 等間隔・推論レイテンシ未モデル化</a:t>
             </a:r>
           </a:p>
           <a:p>
@@ -8617,7 +8547,7 @@
                 </a:solidFill>
                 <a:latin typeface="Meiryo"/>
               </a:rPr>
-              <a:t>よくある事故 (症状で覚える)</a:t>
+              <a:t>環境</a:t>
             </a:r>
           </a:p>
           <a:p>
@@ -8627,61 +8557,13 @@
               </a:spcAft>
             </a:pPr>
             <a:r>
-              <a:rPr sz="1300" b="1">
-                <a:solidFill>
-                  <a:srgbClr val="B32D2D"/>
-                </a:solidFill>
-                <a:latin typeface="Meiryo"/>
-              </a:rPr>
-              <a:t>・出力がほぼ一定 (thr≈0.4, str≈0.2) = テンソルレイアウト不一致</a:t>
-            </a:r>
-          </a:p>
-          <a:p>
-            <a:pPr lvl="1">
-              <a:spcAft>
-                <a:spcPts val="200"/>
-              </a:spcAft>
-            </a:pPr>
-            <a:r>
               <a:rPr sz="1300" b="0">
                 <a:solidFill>
-                  <a:srgbClr val="B32D2D"/>
-                </a:solidFill>
-                <a:latin typeface="Meiryo"/>
-              </a:rPr>
-              <a:t>・観測が全部飽和・挙動が雑 = km/h を m/s に変換し忘れ (KphToMs)</a:t>
-            </a:r>
-          </a:p>
-          <a:p>
-            <a:pPr lvl="1">
-              <a:spcAft>
-                <a:spcPts val="200"/>
-              </a:spcAft>
-            </a:pPr>
-            <a:r>
-              <a:rPr sz="1300" b="0">
-                <a:solidFill>
-                  <a:srgbClr val="B32D2D"/>
-                </a:solidFill>
-                <a:latin typeface="Meiryo"/>
-              </a:rPr>
-              <a:t>・グリッドが横向き = heading に生の yaw を使用 (正: 90° − yaw または forward から Atan2)</a:t>
-            </a:r>
-          </a:p>
-          <a:p>
-            <a:pPr>
-              <a:spcAft>
-                <a:spcPts val="600"/>
-              </a:spcAft>
-            </a:pPr>
-            <a:r>
-              <a:rPr sz="1500" b="0">
-                <a:solidFill>
-                  <a:srgbClr val="222222"/>
-                </a:solidFill>
-                <a:latin typeface="Meiryo"/>
-              </a:rPr>
-              <a:t>定数同期: レンジ・5 Hz・グリッド設定の変更は C# 定数 + JSON + 検証 + ONNX の 4 点セット</a:t>
+                  <a:srgbClr val="595959"/>
+                </a:solidFill>
+                <a:latin typeface="Meiryo"/>
+              </a:rPr>
+              <a:t>・2D 平面: 縁石・バンク・高低差・路面 μ 変化なし / NPC は IDM (ゲーム AI と別物)</a:t>
             </a:r>
           </a:p>
         </p:txBody>
@@ -8695,6 +8577,1009 @@
 </file>
 
 <file path=ppt/slides/slide22.xml><?xml version="1.0" encoding="utf-8"?>
+<p:sld xmlns:a="http://schemas.openxmlformats.org/drawingml/2006/main" xmlns:p="http://schemas.openxmlformats.org/presentationml/2006/main" xmlns:r="http://schemas.openxmlformats.org/officeDocument/2006/relationships">
+  <p:cSld>
+    <p:spTree>
+      <p:nvGrpSpPr>
+        <p:cNvPr id="1" name=""/>
+        <p:cNvGrpSpPr/>
+        <p:nvPr/>
+      </p:nvGrpSpPr>
+      <p:grpSpPr/>
+      <p:sp>
+        <p:nvSpPr>
+          <p:cNvPr id="2" name="TextBox 1"/>
+          <p:cNvSpPr txBox="1"/>
+          <p:nvPr/>
+        </p:nvSpPr>
+        <p:spPr>
+          <a:xfrm>
+            <a:off x="457200" y="182880"/>
+            <a:ext cx="11247120" cy="731520"/>
+          </a:xfrm>
+          <a:prstGeom prst="rect">
+            <a:avLst/>
+          </a:prstGeom>
+          <a:noFill/>
+        </p:spPr>
+        <p:txBody>
+          <a:bodyPr wrap="none">
+            <a:spAutoFit/>
+          </a:bodyPr>
+          <a:lstStyle/>
+          <a:p>
+            <a:r>
+              <a:rPr sz="2700" b="1">
+                <a:solidFill>
+                  <a:srgbClr val="1B5EA8"/>
+                </a:solidFill>
+                <a:latin typeface="Meiryo"/>
+              </a:rPr>
+              <a:t>ギャップの二層戦略 — 消せるものは消し、残りは吸収する</a:t>
+            </a:r>
+          </a:p>
+        </p:txBody>
+      </p:sp>
+      <p:sp>
+        <p:nvSpPr>
+          <p:cNvPr id="3" name="TextBox 2"/>
+          <p:cNvSpPr txBox="1"/>
+          <p:nvPr/>
+        </p:nvSpPr>
+        <p:spPr>
+          <a:xfrm>
+            <a:off x="548640" y="1188720"/>
+            <a:ext cx="11064240" cy="5486400"/>
+          </a:xfrm>
+          <a:prstGeom prst="rect">
+            <a:avLst/>
+          </a:prstGeom>
+          <a:noFill/>
+        </p:spPr>
+        <p:txBody>
+          <a:bodyPr wrap="square">
+            <a:spAutoFit/>
+          </a:bodyPr>
+          <a:lstStyle/>
+          <a:p>
+            <a:pPr>
+              <a:spcAft>
+                <a:spcPts val="600"/>
+              </a:spcAft>
+            </a:pPr>
+            <a:r>
+              <a:rPr sz="1500" b="1">
+                <a:solidFill>
+                  <a:srgbClr val="222222"/>
+                </a:solidFill>
+                <a:latin typeface="Meiryo"/>
+              </a:rPr>
+              <a:t>第一層: ギャップ自体を消す</a:t>
+            </a:r>
+          </a:p>
+          <a:p>
+            <a:pPr lvl="1">
+              <a:spcAft>
+                <a:spcPts val="200"/>
+              </a:spcAft>
+            </a:pPr>
+            <a:r>
+              <a:rPr sz="1300" b="0">
+                <a:solidFill>
+                  <a:srgbClr val="595959"/>
+                </a:solidFill>
+                <a:latin typeface="Meiryo"/>
+              </a:rPr>
+              <a:t>・観測ビット一致 + 物理 1e-7 一致の C# 移植 — 移植起因の挙動差をゼロに</a:t>
+            </a:r>
+          </a:p>
+          <a:p>
+            <a:pPr>
+              <a:spcAft>
+                <a:spcPts val="600"/>
+              </a:spcAft>
+            </a:pPr>
+            <a:r>
+              <a:rPr sz="1500" b="1">
+                <a:solidFill>
+                  <a:srgbClr val="222222"/>
+                </a:solidFill>
+                <a:latin typeface="Meiryo"/>
+              </a:rPr>
+              <a:t>第二層: 残差をデプロイ側フィルタで吸収 (再学習不要)</a:t>
+            </a:r>
+          </a:p>
+          <a:p>
+            <a:pPr lvl="1">
+              <a:spcAft>
+                <a:spcPts val="200"/>
+              </a:spcAft>
+            </a:pPr>
+            <a:r>
+              <a:rPr sz="1300" b="0">
+                <a:solidFill>
+                  <a:srgbClr val="595959"/>
+                </a:solidFill>
+                <a:latin typeface="Meiryo"/>
+              </a:rPr>
+              <a:t>・SteeringSmoother (EMA α0.6): 蛇行 34→12 回/100步、直線の中央維持も改善</a:t>
+            </a:r>
+          </a:p>
+          <a:p>
+            <a:pPr lvl="1">
+              <a:spcAft>
+                <a:spcPts val="200"/>
+              </a:spcAft>
+            </a:pPr>
+            <a:r>
+              <a:rPr sz="1300" b="0">
+                <a:solidFill>
+                  <a:srgbClr val="595959"/>
+                </a:solidFill>
+                <a:latin typeface="Meiryo"/>
+              </a:rPr>
+              <a:t>・CorneringLimiter: ステア速度制限 + 曲率ベース比例ブレーキ (速度床 5 m/s で停止しない)</a:t>
+            </a:r>
+          </a:p>
+          <a:p>
+            <a:pPr lvl="1">
+              <a:spcAft>
+                <a:spcPts val="200"/>
+              </a:spcAft>
+            </a:pPr>
+            <a:r>
+              <a:rPr sz="1300" b="0">
+                <a:solidFill>
+                  <a:srgbClr val="595959"/>
+                </a:solidFill>
+                <a:latin typeface="Meiryo"/>
+              </a:rPr>
+              <a:t>・StuckRecovery: 「前進指示なのに 1 秒 0.3 m 未満」で壁刺さり検出 → バック 1.6 秒</a:t>
+            </a:r>
+          </a:p>
+          <a:p>
+            <a:pPr lvl="2">
+              <a:spcAft>
+                <a:spcPts val="200"/>
+              </a:spcAft>
+            </a:pPr>
+            <a:r>
+              <a:rPr sz="1100" b="0">
+                <a:solidFill>
+                  <a:srgbClr val="595959"/>
+                </a:solidFill>
+                <a:latin typeface="Meiryo"/>
+              </a:rPr>
+              <a:t>− 検証: フィルタ通しでシム内評価 — 周回数維持を確認 (閉ループ変化のチェック)</a:t>
+            </a:r>
+          </a:p>
+          <a:p>
+            <a:pPr>
+              <a:spcAft>
+                <a:spcPts val="600"/>
+              </a:spcAft>
+            </a:pPr>
+            <a:r>
+              <a:rPr sz="1500" b="0">
+                <a:solidFill>
+                  <a:srgbClr val="222222"/>
+                </a:solidFill>
+                <a:latin typeface="Meiryo"/>
+              </a:rPr>
+              <a:t>第三層 (必要時): 壁摩擦・レンジを実測に合わせ環境を再調整して再学習</a:t>
+            </a:r>
+          </a:p>
+        </p:txBody>
+      </p:sp>
+      <p:pic>
+        <p:nvPicPr>
+          <p:cNvPr id="4" name="Picture 3" descr="smoothing_effect.png"/>
+          <p:cNvPicPr>
+            <a:picLocks noChangeAspect="1"/>
+          </p:cNvPicPr>
+          <p:nvPr/>
+        </p:nvPicPr>
+        <p:blipFill>
+          <a:blip r:embed="rId3"/>
+          <a:stretch>
+            <a:fillRect/>
+          </a:stretch>
+        </p:blipFill>
+        <p:spPr>
+          <a:xfrm>
+            <a:off x="6949440" y="4434840"/>
+            <a:ext cx="4846320" cy="1674183"/>
+          </a:xfrm>
+          <a:prstGeom prst="rect">
+            <a:avLst/>
+          </a:prstGeom>
+        </p:spPr>
+      </p:pic>
+    </p:spTree>
+  </p:cSld>
+  <p:clrMapOvr>
+    <a:masterClrMapping/>
+  </p:clrMapOvr>
+</p:sld>
+</file>
+
+<file path=ppt/slides/slide23.xml><?xml version="1.0" encoding="utf-8"?>
+<p:sld xmlns:a="http://schemas.openxmlformats.org/drawingml/2006/main" xmlns:p="http://schemas.openxmlformats.org/presentationml/2006/main" xmlns:r="http://schemas.openxmlformats.org/officeDocument/2006/relationships">
+  <p:cSld>
+    <p:spTree>
+      <p:nvGrpSpPr>
+        <p:cNvPr id="1" name=""/>
+        <p:cNvGrpSpPr/>
+        <p:nvPr/>
+      </p:nvGrpSpPr>
+      <p:grpSpPr/>
+      <p:sp>
+        <p:nvSpPr>
+          <p:cNvPr id="2" name="TextBox 1"/>
+          <p:cNvSpPr txBox="1"/>
+          <p:nvPr/>
+        </p:nvSpPr>
+        <p:spPr>
+          <a:xfrm>
+            <a:off x="457200" y="182880"/>
+            <a:ext cx="11247120" cy="731520"/>
+          </a:xfrm>
+          <a:prstGeom prst="rect">
+            <a:avLst/>
+          </a:prstGeom>
+          <a:noFill/>
+        </p:spPr>
+        <p:txBody>
+          <a:bodyPr wrap="none">
+            <a:spAutoFit/>
+          </a:bodyPr>
+          <a:lstStyle/>
+          <a:p>
+            <a:r>
+              <a:rPr sz="2700" b="1">
+                <a:solidFill>
+                  <a:srgbClr val="1B5EA8"/>
+                </a:solidFill>
+                <a:latin typeface="Meiryo"/>
+              </a:rPr>
+              <a:t>セットアップとノートブックの使い方</a:t>
+            </a:r>
+          </a:p>
+        </p:txBody>
+      </p:sp>
+      <p:sp>
+        <p:nvSpPr>
+          <p:cNvPr id="3" name="TextBox 2"/>
+          <p:cNvSpPr txBox="1"/>
+          <p:nvPr/>
+        </p:nvSpPr>
+        <p:spPr>
+          <a:xfrm>
+            <a:off x="548640" y="1188720"/>
+            <a:ext cx="11064240" cy="5486400"/>
+          </a:xfrm>
+          <a:prstGeom prst="rect">
+            <a:avLst/>
+          </a:prstGeom>
+          <a:noFill/>
+        </p:spPr>
+        <p:txBody>
+          <a:bodyPr wrap="square">
+            <a:spAutoFit/>
+          </a:bodyPr>
+          <a:lstStyle/>
+          <a:p>
+            <a:pPr>
+              <a:spcAft>
+                <a:spcPts val="600"/>
+              </a:spcAft>
+            </a:pPr>
+            <a:r>
+              <a:rPr sz="1600" b="1">
+                <a:solidFill>
+                  <a:srgbClr val="222222"/>
+                </a:solidFill>
+                <a:latin typeface="Meiryo"/>
+              </a:rPr>
+              <a:t>環境構築</a:t>
+            </a:r>
+          </a:p>
+          <a:p>
+            <a:pPr lvl="1">
+              <a:spcAft>
+                <a:spcPts val="200"/>
+              </a:spcAft>
+            </a:pPr>
+            <a:r>
+              <a:rPr sz="1400" b="0">
+                <a:solidFill>
+                  <a:srgbClr val="595959"/>
+                </a:solidFill>
+                <a:latin typeface="Meiryo"/>
+              </a:rPr>
+              <a:t>・pip install "highway-env&gt;=1.8" "stable-baselines3[extra]&gt;=2.0" gymnasium torch tensorboard moviepy onnx onnxruntime</a:t>
+            </a:r>
+          </a:p>
+          <a:p>
+            <a:pPr lvl="1">
+              <a:spcAft>
+                <a:spcPts val="200"/>
+              </a:spcAft>
+            </a:pPr>
+            <a:r>
+              <a:rPr sz="1400" b="0">
+                <a:solidFill>
+                  <a:srgbClr val="B32D2D"/>
+                </a:solidFill>
+                <a:latin typeface="Meiryo"/>
+              </a:rPr>
+              <a:t>・リポジトリの requirements.txt は旧 TF スタック用 — 使わない</a:t>
+            </a:r>
+          </a:p>
+          <a:p>
+            <a:pPr>
+              <a:spcAft>
+                <a:spcPts val="600"/>
+              </a:spcAft>
+            </a:pPr>
+            <a:r>
+              <a:rPr sz="1600" b="1">
+                <a:solidFill>
+                  <a:srgbClr val="222222"/>
+                </a:solidFill>
+                <a:latin typeface="Meiryo"/>
+              </a:rPr>
+              <a:t>ノートブック</a:t>
+            </a:r>
+          </a:p>
+          <a:p>
+            <a:pPr lvl="1">
+              <a:spcAft>
+                <a:spcPts val="200"/>
+              </a:spcAft>
+            </a:pPr>
+            <a:r>
+              <a:rPr sz="1400" b="0">
+                <a:solidFill>
+                  <a:srgbClr val="595959"/>
+                </a:solidFill>
+                <a:latin typeface="Meiryo"/>
+              </a:rPr>
+              <a:t>・task2: fast トラック学習 / task3: random 学習 + トラック別レポート + 5 連動画</a:t>
+            </a:r>
+          </a:p>
+          <a:p>
+            <a:pPr lvl="1">
+              <a:spcAft>
+                <a:spcPts val="200"/>
+              </a:spcAft>
+            </a:pPr>
+            <a:r>
+              <a:rPr sz="1400" b="0">
+                <a:solidFill>
+                  <a:srgbClr val="595959"/>
+                </a:solidFill>
+                <a:latin typeface="Meiryo"/>
+              </a:rPr>
+              <a:t>・FAST_DEV_RUN=True: 12〜15 万 step (周回到達を実測保証) / False: 本番 100 万+</a:t>
+            </a:r>
+          </a:p>
+          <a:p>
+            <a:pPr>
+              <a:spcAft>
+                <a:spcPts val="600"/>
+              </a:spcAft>
+            </a:pPr>
+            <a:r>
+              <a:rPr sz="1600" b="1">
+                <a:solidFill>
+                  <a:srgbClr val="222222"/>
+                </a:solidFill>
+                <a:latin typeface="Meiryo"/>
+              </a:rPr>
+              <a:t>進捗の読み方</a:t>
+            </a:r>
+          </a:p>
+          <a:p>
+            <a:pPr lvl="1">
+              <a:spcAft>
+                <a:spcPts val="200"/>
+              </a:spcAft>
+            </a:pPr>
+            <a:r>
+              <a:rPr sz="1400" b="0">
+                <a:solidFill>
+                  <a:srgbClr val="595959"/>
+                </a:solidFill>
+                <a:latin typeface="Meiryo"/>
+              </a:rPr>
+              <a:t>・Reward yardstick: 1 周 ≈ 101 / アイドル床 ≈ 0.53/step — eval 値を周回数として読む</a:t>
+            </a:r>
+          </a:p>
+          <a:p>
+            <a:pPr lvl="1">
+              <a:spcAft>
+                <a:spcPts val="200"/>
+              </a:spcAft>
+            </a:pPr>
+            <a:r>
+              <a:rPr sz="1400" b="0">
+                <a:solidFill>
+                  <a:srgbClr val="595959"/>
+                </a:solidFill>
+                <a:latin typeface="Meiryo"/>
+              </a:rPr>
+              <a:t>・Presentation Media セル: 学習曲線・軌跡・5 連動画を生成し VIDEO_DIR に保存</a:t>
+            </a:r>
+          </a:p>
+          <a:p>
+            <a:pPr>
+              <a:spcAft>
+                <a:spcPts val="600"/>
+              </a:spcAft>
+            </a:pPr>
+            <a:r>
+              <a:rPr sz="1600" b="0">
+                <a:solidFill>
+                  <a:srgbClr val="222222"/>
+                </a:solidFill>
+                <a:latin typeface="Meiryo"/>
+              </a:rPr>
+              <a:t>C# 検証: cd re_engine/verify &amp;&amp; dotnet run -- ..  → ALL SCENARIOS MATCH</a:t>
+            </a:r>
+          </a:p>
+        </p:txBody>
+      </p:sp>
+    </p:spTree>
+  </p:cSld>
+  <p:clrMapOvr>
+    <a:masterClrMapping/>
+  </p:clrMapOvr>
+</p:sld>
+</file>
+
+<file path=ppt/slides/slide24.xml><?xml version="1.0" encoding="utf-8"?>
+<p:sld xmlns:a="http://schemas.openxmlformats.org/drawingml/2006/main" xmlns:p="http://schemas.openxmlformats.org/presentationml/2006/main" xmlns:r="http://schemas.openxmlformats.org/officeDocument/2006/relationships">
+  <p:cSld>
+    <p:spTree>
+      <p:nvGrpSpPr>
+        <p:cNvPr id="1" name=""/>
+        <p:cNvGrpSpPr/>
+        <p:nvPr/>
+      </p:nvGrpSpPr>
+      <p:grpSpPr/>
+      <p:sp>
+        <p:nvSpPr>
+          <p:cNvPr id="2" name="TextBox 1"/>
+          <p:cNvSpPr txBox="1"/>
+          <p:nvPr/>
+        </p:nvSpPr>
+        <p:spPr>
+          <a:xfrm>
+            <a:off x="457200" y="182880"/>
+            <a:ext cx="11247120" cy="731520"/>
+          </a:xfrm>
+          <a:prstGeom prst="rect">
+            <a:avLst/>
+          </a:prstGeom>
+          <a:noFill/>
+        </p:spPr>
+        <p:txBody>
+          <a:bodyPr wrap="none">
+            <a:spAutoFit/>
+          </a:bodyPr>
+          <a:lstStyle/>
+          <a:p>
+            <a:r>
+              <a:rPr sz="2700" b="1">
+                <a:solidFill>
+                  <a:srgbClr val="1B5EA8"/>
+                </a:solidFill>
+                <a:latin typeface="Meiryo"/>
+              </a:rPr>
+              <a:t>エクスポートツールと ONNX の注意点</a:t>
+            </a:r>
+          </a:p>
+        </p:txBody>
+      </p:sp>
+      <p:sp>
+        <p:nvSpPr>
+          <p:cNvPr id="3" name="TextBox 2"/>
+          <p:cNvSpPr txBox="1"/>
+          <p:nvPr/>
+        </p:nvSpPr>
+        <p:spPr>
+          <a:xfrm>
+            <a:off x="548640" y="1143000"/>
+            <a:ext cx="11064240" cy="5486400"/>
+          </a:xfrm>
+          <a:prstGeom prst="rect">
+            <a:avLst/>
+          </a:prstGeom>
+          <a:noFill/>
+        </p:spPr>
+        <p:txBody>
+          <a:bodyPr wrap="square">
+            <a:spAutoFit/>
+          </a:bodyPr>
+          <a:lstStyle/>
+          <a:p>
+            <a:pPr>
+              <a:spcAft>
+                <a:spcPts val="600"/>
+              </a:spcAft>
+            </a:pPr>
+            <a:r>
+              <a:rPr sz="1500" b="1">
+                <a:solidFill>
+                  <a:srgbClr val="222222"/>
+                </a:solidFill>
+                <a:latin typeface="Meiryo"/>
+              </a:rPr>
+              <a:t>エクスポート</a:t>
+            </a:r>
+          </a:p>
+          <a:p>
+            <a:pPr lvl="1">
+              <a:spcAft>
+                <a:spcPts val="200"/>
+              </a:spcAft>
+            </a:pPr>
+            <a:r>
+              <a:rPr sz="1300" b="1">
+                <a:solidFill>
+                  <a:srgbClr val="595959"/>
+                </a:solidFill>
+                <a:latin typeface="Meiryo"/>
+              </a:rPr>
+              <a:t>・python export_onnx.py &lt;model.zip&gt; -m 3   # NHWC [1,12,12,10] エンジン用 (推奨)</a:t>
+            </a:r>
+          </a:p>
+          <a:p>
+            <a:pPr lvl="2">
+              <a:spcAft>
+                <a:spcPts val="200"/>
+              </a:spcAft>
+            </a:pPr>
+            <a:r>
+              <a:rPr sz="1100" b="0">
+                <a:solidFill>
+                  <a:srgbClr val="595959"/>
+                </a:solidFill>
+                <a:latin typeface="Meiryo"/>
+              </a:rPr>
+              <a:t>− -m 1: full policy / 2: actor CHW / 0: 全部 — 各出力は torch と自動照合 (≤4e-6)</a:t>
+            </a:r>
+          </a:p>
+          <a:p>
+            <a:pPr lvl="1">
+              <a:spcAft>
+                <a:spcPts val="200"/>
+              </a:spcAft>
+            </a:pPr>
+            <a:r>
+              <a:rPr sz="1300" b="0">
+                <a:solidFill>
+                  <a:srgbClr val="595959"/>
+                </a:solidFill>
+                <a:latin typeface="Meiryo"/>
+              </a:rPr>
+              <a:t>・python re_engine/convert_onnx_nhwc.py &lt;actor.onnx&gt;  # 既存 CHW の NHWC 化</a:t>
+            </a:r>
+          </a:p>
+          <a:p>
+            <a:pPr>
+              <a:spcAft>
+                <a:spcPts val="600"/>
+              </a:spcAft>
+            </a:pPr>
+            <a:r>
+              <a:rPr sz="1500" b="1">
+                <a:solidFill>
+                  <a:srgbClr val="222222"/>
+                </a:solidFill>
+                <a:latin typeface="Meiryo"/>
+              </a:rPr>
+              <a:t>再生成・検証</a:t>
+            </a:r>
+          </a:p>
+          <a:p>
+            <a:pPr lvl="1">
+              <a:spcAft>
+                <a:spcPts val="200"/>
+              </a:spcAft>
+            </a:pPr>
+            <a:r>
+              <a:rPr sz="1300" b="0">
+                <a:solidFill>
+                  <a:srgbClr val="595959"/>
+                </a:solidFill>
+                <a:latin typeface="Meiryo"/>
+              </a:rPr>
+              <a:t>・python re_engine/export_track_json.py  → dotnet run で ALL SCENARIOS MATCH を確認</a:t>
+            </a:r>
+          </a:p>
+          <a:p>
+            <a:pPr>
+              <a:spcAft>
+                <a:spcPts val="600"/>
+              </a:spcAft>
+            </a:pPr>
+            <a:r>
+              <a:rPr sz="1500" b="1">
+                <a:solidFill>
+                  <a:srgbClr val="222222"/>
+                </a:solidFill>
+                <a:latin typeface="Meiryo"/>
+              </a:rPr>
+              <a:t>よくある事故 (症状で覚える)</a:t>
+            </a:r>
+          </a:p>
+          <a:p>
+            <a:pPr lvl="1">
+              <a:spcAft>
+                <a:spcPts val="200"/>
+              </a:spcAft>
+            </a:pPr>
+            <a:r>
+              <a:rPr sz="1300" b="1">
+                <a:solidFill>
+                  <a:srgbClr val="B32D2D"/>
+                </a:solidFill>
+                <a:latin typeface="Meiryo"/>
+              </a:rPr>
+              <a:t>・出力がほぼ一定 (thr≈0.4, str≈0.2) = テンソルレイアウト不一致</a:t>
+            </a:r>
+          </a:p>
+          <a:p>
+            <a:pPr lvl="1">
+              <a:spcAft>
+                <a:spcPts val="200"/>
+              </a:spcAft>
+            </a:pPr>
+            <a:r>
+              <a:rPr sz="1300" b="0">
+                <a:solidFill>
+                  <a:srgbClr val="B32D2D"/>
+                </a:solidFill>
+                <a:latin typeface="Meiryo"/>
+              </a:rPr>
+              <a:t>・観測が全部飽和・挙動が雑 = km/h を m/s に変換し忘れ (KphToMs)</a:t>
+            </a:r>
+          </a:p>
+          <a:p>
+            <a:pPr lvl="1">
+              <a:spcAft>
+                <a:spcPts val="200"/>
+              </a:spcAft>
+            </a:pPr>
+            <a:r>
+              <a:rPr sz="1300" b="0">
+                <a:solidFill>
+                  <a:srgbClr val="B32D2D"/>
+                </a:solidFill>
+                <a:latin typeface="Meiryo"/>
+              </a:rPr>
+              <a:t>・グリッドが横向き = heading に生の yaw を使用 (正: 90° − yaw または forward から Atan2)</a:t>
+            </a:r>
+          </a:p>
+          <a:p>
+            <a:pPr>
+              <a:spcAft>
+                <a:spcPts val="600"/>
+              </a:spcAft>
+            </a:pPr>
+            <a:r>
+              <a:rPr sz="1500" b="0">
+                <a:solidFill>
+                  <a:srgbClr val="222222"/>
+                </a:solidFill>
+                <a:latin typeface="Meiryo"/>
+              </a:rPr>
+              <a:t>定数同期: レンジ・5 Hz・グリッド設定の変更は C# 定数 + JSON + 検証 + ONNX の 4 点セット</a:t>
+            </a:r>
+          </a:p>
+        </p:txBody>
+      </p:sp>
+    </p:spTree>
+  </p:cSld>
+  <p:clrMapOvr>
+    <a:masterClrMapping/>
+  </p:clrMapOvr>
+</p:sld>
+</file>
+
+<file path=ppt/slides/slide25.xml><?xml version="1.0" encoding="utf-8"?>
+<p:sld xmlns:a="http://schemas.openxmlformats.org/drawingml/2006/main" xmlns:p="http://schemas.openxmlformats.org/presentationml/2006/main" xmlns:r="http://schemas.openxmlformats.org/officeDocument/2006/relationships">
+  <p:cSld>
+    <p:spTree>
+      <p:nvGrpSpPr>
+        <p:cNvPr id="1" name=""/>
+        <p:cNvGrpSpPr/>
+        <p:nvPr/>
+      </p:nvGrpSpPr>
+      <p:grpSpPr/>
+      <p:sp>
+        <p:nvSpPr>
+          <p:cNvPr id="2" name="TextBox 1"/>
+          <p:cNvSpPr txBox="1"/>
+          <p:nvPr/>
+        </p:nvSpPr>
+        <p:spPr>
+          <a:xfrm>
+            <a:off x="457200" y="182880"/>
+            <a:ext cx="11247120" cy="731520"/>
+          </a:xfrm>
+          <a:prstGeom prst="rect">
+            <a:avLst/>
+          </a:prstGeom>
+          <a:noFill/>
+        </p:spPr>
+        <p:txBody>
+          <a:bodyPr wrap="none">
+            <a:spAutoFit/>
+          </a:bodyPr>
+          <a:lstStyle/>
+          <a:p>
+            <a:r>
+              <a:rPr sz="2700" b="1">
+                <a:solidFill>
+                  <a:srgbClr val="1B5EA8"/>
+                </a:solidFill>
+                <a:latin typeface="Meiryo"/>
+              </a:rPr>
+              <a:t>C# 観測生成 — highway-env をビット一致で移植</a:t>
+            </a:r>
+          </a:p>
+        </p:txBody>
+      </p:sp>
+      <p:sp>
+        <p:nvSpPr>
+          <p:cNvPr id="3" name="TextBox 2"/>
+          <p:cNvSpPr txBox="1"/>
+          <p:nvPr/>
+        </p:nvSpPr>
+        <p:spPr>
+          <a:xfrm>
+            <a:off x="548640" y="1051560"/>
+            <a:ext cx="5532120" cy="5577840"/>
+          </a:xfrm>
+          <a:prstGeom prst="rect">
+            <a:avLst/>
+          </a:prstGeom>
+          <a:noFill/>
+        </p:spPr>
+        <p:txBody>
+          <a:bodyPr wrap="square">
+            <a:spAutoFit/>
+          </a:bodyPr>
+          <a:lstStyle/>
+          <a:p>
+            <a:pPr/>
+            <a:r>
+              <a:rPr sz="1600" b="1">
+                <a:solidFill>
+                  <a:srgbClr val="222222"/>
+                </a:solidFill>
+                <a:latin typeface="Meiryo"/>
+              </a:rPr>
+              <a:t>素朴な移植との差分 8 点 (実測検証済)</a:t>
+            </a:r>
+          </a:p>
+          <a:p>
+            <a:pPr lvl="1"/>
+            <a:r>
+              <a:rPr sz="1300" b="0">
+                <a:solidFill>
+                  <a:srgbClr val="595959"/>
+                </a:solidFill>
+                <a:latin typeface="Meiryo"/>
+              </a:rPr>
+              <a:t>・グリッドは非対称: x −9〜+27 m / y ±18 m、自車はセル (3,6) で中央でない</a:t>
+            </a:r>
+          </a:p>
+          <a:p>
+            <a:pPr lvl="1"/>
+            <a:r>
+              <a:rPr sz="1300" b="0">
+                <a:solidFill>
+                  <a:srgbClr val="595959"/>
+                </a:solidFill>
+                <a:latin typeface="Meiryo"/>
+              </a:rPr>
+              <a:t>・x/y/vx/vy の値はトラック軸のまま。回転するのはセル添字だけ</a:t>
+            </a:r>
+          </a:p>
+          <a:p>
+            <a:pPr lvl="1"/>
+            <a:r>
+              <a:rPr sz="1300" b="0">
+                <a:solidFill>
+                  <a:srgbClr val="595959"/>
+                </a:solidFill>
+                <a:latin typeface="Meiryo"/>
+              </a:rPr>
+              <a:t>・vx/vy は自車速度との相対、cos_h/sin_h は各車の絶対 heading</a:t>
+            </a:r>
+          </a:p>
+          <a:p>
+            <a:pPr lvl="1"/>
+            <a:r>
+              <a:rPr sz="1300" b="0">
+                <a:solidFill>
+                  <a:srgbClr val="595959"/>
+                </a:solidFill>
+                <a:latin typeface="Meiryo"/>
+              </a:rPr>
+              <a:t>・正規化は [−1,1] (値÷レンジ、clip)、[0,1] ではない</a:t>
+            </a:r>
+          </a:p>
+          <a:p>
+            <a:pPr lvl="1"/>
+            <a:r>
+              <a:rPr sz="1300" b="0">
+                <a:solidFill>
+                  <a:srgbClr val="595959"/>
+                </a:solidFill>
+                <a:latin typeface="Meiryo"/>
+              </a:rPr>
+              <a:t>・自車も NPC の後に最後に書き込み、自セルを勝ち取る</a:t>
+            </a:r>
+          </a:p>
+          <a:p>
+            <a:pPr lvl="1"/>
+            <a:r>
+              <a:rPr sz="1300" b="0">
+                <a:solidFill>
+                  <a:srgbClr val="595959"/>
+                </a:solidFill>
+                <a:latin typeface="Meiryo"/>
+              </a:rPr>
+              <a:t>・最近傍レーンは全18レーンの |lat|+はみ出し+|heading差| の argmin</a:t>
+            </a:r>
+          </a:p>
+        </p:txBody>
+      </p:sp>
+      <p:sp>
+        <p:nvSpPr>
+          <p:cNvPr id="4" name="TextBox 3"/>
+          <p:cNvSpPr txBox="1"/>
+          <p:nvPr/>
+        </p:nvSpPr>
+        <p:spPr>
+          <a:xfrm>
+            <a:off x="6263640" y="1051560"/>
+            <a:ext cx="5486400" cy="5577840"/>
+          </a:xfrm>
+          <a:prstGeom prst="rect">
+            <a:avLst/>
+          </a:prstGeom>
+          <a:noFill/>
+        </p:spPr>
+        <p:txBody>
+          <a:bodyPr wrap="square">
+            <a:spAutoFit/>
+          </a:bodyPr>
+          <a:lstStyle/>
+          <a:p>
+            <a:pPr/>
+            <a:r>
+              <a:rPr sz="1600" b="1">
+                <a:solidFill>
+                  <a:srgbClr val="222222"/>
+                </a:solidFill>
+                <a:latin typeface="Meiryo"/>
+              </a:rPr>
+              <a:t>on_road — レイキャストしない</a:t>
+            </a:r>
+          </a:p>
+          <a:p>
+            <a:pPr lvl="1"/>
+            <a:r>
+              <a:rPr sz="1300" b="0">
+                <a:solidFill>
+                  <a:srgbClr val="595959"/>
+                </a:solidFill>
+                <a:latin typeface="Meiryo"/>
+              </a:rPr>
+              <a:t>・レーン中心線を 3 m 刻みで歩きセルを 1 にする「中心線トレース」</a:t>
+            </a:r>
+          </a:p>
+          <a:p>
+            <a:pPr lvl="1"/>
+            <a:r>
+              <a:rPr sz="1300" b="0">
+                <a:solidFill>
+                  <a:srgbClr val="595959"/>
+                </a:solidFill>
+                <a:latin typeface="Meiryo"/>
+              </a:rPr>
+              <a:t>・道路面を塗ると幅3セルの帯になり学習時と別物 → 劣化</a:t>
+            </a:r>
+          </a:p>
+          <a:p>
+            <a:pPr/>
+            <a:r>
+              <a:rPr sz="1600" b="1">
+                <a:solidFill>
+                  <a:srgbClr val="222222"/>
+                </a:solidFill>
+                <a:latin typeface="Meiryo"/>
+              </a:rPr>
+              <a:t>lat_off / ang_off — 中心線の幾何だけで</a:t>
+            </a:r>
+          </a:p>
+          <a:p>
+            <a:pPr lvl="1"/>
+            <a:r>
+              <a:rPr sz="1300" b="0">
+                <a:solidFill>
+                  <a:srgbClr val="595959"/>
+                </a:solidFill>
+                <a:latin typeface="Meiryo"/>
+              </a:rPr>
+              <a:t>・コライダー不要。最近傍レーンのローカル座標で横オフセット + heading 差</a:t>
+            </a:r>
+          </a:p>
+          <a:p>
+            <a:pPr lvl="1"/>
+            <a:r>
+              <a:rPr sz="1300" b="0">
+                <a:solidFill>
+                  <a:srgbClr val="595959"/>
+                </a:solidFill>
+                <a:latin typeface="Meiryo"/>
+              </a:rPr>
+              <a:t>・レーンは _make_road のハードコピー or track_&lt;name&gt;.json から供給</a:t>
+            </a:r>
+          </a:p>
+          <a:p>
+            <a:pPr/>
+            <a:r>
+              <a:rPr sz="1600" b="1">
+                <a:solidFill>
+                  <a:srgbClr val="222222"/>
+                </a:solidFill>
+                <a:latin typeface="Meiryo"/>
+              </a:rPr>
+              <a:t>実行と検証</a:t>
+            </a:r>
+          </a:p>
+          <a:p>
+            <a:pPr lvl="1"/>
+            <a:r>
+              <a:rPr sz="1300" b="0">
+                <a:solidFill>
+                  <a:srgbClr val="595959"/>
+                </a:solidFill>
+                <a:latin typeface="Meiryo"/>
+              </a:rPr>
+              <a:t>・HWC 平坦配列 → NHWC モデル直結 / 5 Hz 推論 / action_mean を clip して decode</a:t>
+            </a:r>
+          </a:p>
+          <a:p>
+            <a:pPr lvl="1"/>
+            <a:r>
+              <a:rPr sz="1300" b="0">
+                <a:solidFill>
+                  <a:srgbClr val="595959"/>
+                </a:solidFill>
+                <a:latin typeface="Meiryo"/>
+              </a:rPr>
+              <a:t>・verify/ で実環境の参照観測とセル単位照合 → maxDiff 0.0 (ビット一致)</a:t>
+            </a:r>
+          </a:p>
+        </p:txBody>
+      </p:sp>
+    </p:spTree>
+  </p:cSld>
+  <p:clrMapOvr>
+    <a:masterClrMapping/>
+  </p:clrMapOvr>
+</p:sld>
+</file>
+
+<file path=ppt/slides/slide26.xml><?xml version="1.0" encoding="utf-8"?>
 <p:sld xmlns:a="http://schemas.openxmlformats.org/drawingml/2006/main" xmlns:p="http://schemas.openxmlformats.org/presentationml/2006/main" xmlns:r="http://schemas.openxmlformats.org/officeDocument/2006/relationships">
   <p:cSld>
     <p:spTree>
@@ -9232,7 +10117,7 @@
 </p:sld>
 </file>
 
-<file path=ppt/slides/slide23.xml><?xml version="1.0" encoding="utf-8"?>
+<file path=ppt/slides/slide27.xml><?xml version="1.0" encoding="utf-8"?>
 <p:sld xmlns:a="http://schemas.openxmlformats.org/drawingml/2006/main" xmlns:p="http://schemas.openxmlformats.org/presentationml/2006/main" xmlns:r="http://schemas.openxmlformats.org/officeDocument/2006/relationships">
   <p:cSld>
     <p:spTree>
@@ -9435,7 +10320,7 @@
 </p:sld>
 </file>
 
-<file path=ppt/slides/slide24.xml><?xml version="1.0" encoding="utf-8"?>
+<file path=ppt/slides/slide28.xml><?xml version="1.0" encoding="utf-8"?>
 <p:sld xmlns:a="http://schemas.openxmlformats.org/drawingml/2006/main" xmlns:p="http://schemas.openxmlformats.org/presentationml/2006/main" xmlns:r="http://schemas.openxmlformats.org/officeDocument/2006/relationships">
   <p:cSld>
     <p:spTree>
@@ -9474,7 +10359,7 @@
                 </a:solidFill>
                 <a:latin typeface="Meiryo"/>
               </a:rPr>
-              <a:t>TensorBoard 指標の読み方 — チートシート</a:t>
+              <a:t>ログから導く設定判断 — フェーズ 2 の改善余地</a:t>
             </a:r>
           </a:p>
         </p:txBody>
@@ -9487,8 +10372,8 @@
         </p:nvSpPr>
         <p:spPr>
           <a:xfrm>
-            <a:off x="548640" y="1051560"/>
-            <a:ext cx="5486400" cy="5577840"/>
+            <a:off x="548640" y="1097280"/>
+            <a:ext cx="11064240" cy="5486400"/>
           </a:xfrm>
           <a:prstGeom prst="rect">
             <a:avLst/>
@@ -9501,742 +10386,211 @@
           </a:bodyPr>
           <a:lstStyle/>
           <a:p>
-            <a:pPr/>
-            <a:r>
-              <a:rPr sz="1600" b="1">
+            <a:pPr>
+              <a:spcAft>
+                <a:spcPts val="600"/>
+              </a:spcAft>
+            </a:pPr>
+            <a:r>
+              <a:rPr sz="1500" b="1">
+                <a:solidFill>
+                  <a:srgbClr val="2E7D32"/>
+                </a:solidFill>
+                <a:latin typeface="Meiryo"/>
+              </a:rPr>
+              <a:t>フェーズ 1 は変更不要 — 両ラン 0.88〜0.91/step でフル周回・KL 収束・std 焼きなまし完了</a:t>
+            </a:r>
+          </a:p>
+          <a:p>
+            <a:pPr>
+              <a:spcAft>
+                <a:spcPts val="600"/>
+              </a:spcAft>
+            </a:pPr>
+            <a:r>
+              <a:rPr sz="1500" b="1">
+                <a:solidFill>
+                  <a:srgbClr val="B32D2D"/>
+                </a:solidFill>
+                <a:latin typeface="Meiryo"/>
+              </a:rPr>
+              <a:t>フェーズ 2 に 2 つの警告サイン</a:t>
+            </a:r>
+          </a:p>
+          <a:p>
+            <a:pPr lvl="1">
+              <a:spcAft>
+                <a:spcPts val="200"/>
+              </a:spcAft>
+            </a:pPr>
+            <a:r>
+              <a:rPr sz="1300" b="0">
+                <a:solidFill>
+                  <a:srgbClr val="595959"/>
+                </a:solidFill>
+                <a:latin typeface="Meiryo"/>
+              </a:rPr>
+              <a:t>・終盤チャーン: KL 0.73 / clip 77% (fast)・0.27 / 60% (汎化) — 健康域 (KL&lt;0.05, clip&lt;25%) を大きく超過</a:t>
+            </a:r>
+          </a:p>
+          <a:p>
+            <a:pPr lvl="1">
+              <a:spcAft>
+                <a:spcPts val="200"/>
+              </a:spcAft>
+            </a:pPr>
+            <a:r>
+              <a:rPr sz="1300" b="0">
+                <a:solidFill>
+                  <a:srgbClr val="B32D2D"/>
+                </a:solidFill>
+                <a:latin typeface="Meiryo"/>
+              </a:rPr>
+              <a:t>・汎化ランの方策崩壊 (~380 万 step): eval 517→193・ep_len→245・value_loss スパイク 150+・EV が −1 近くへ</a:t>
+            </a:r>
+          </a:p>
+          <a:p>
+            <a:pPr lvl="1">
+              <a:spcAft>
+                <a:spcPts val="200"/>
+              </a:spcAft>
+            </a:pPr>
+            <a:r>
+              <a:rPr sz="1300" b="0">
+                <a:solidFill>
+                  <a:srgbClr val="595959"/>
+                </a:solidFill>
+                <a:latin typeface="Meiryo"/>
+              </a:rPr>
+              <a:t>・原因: 定数 LR 1e-4 × 15 epochs が同一データを絞り切る + NPC 導入時に実効 LR が跳ね上がる</a:t>
+            </a:r>
+          </a:p>
+          <a:p>
+            <a:pPr>
+              <a:spcAft>
+                <a:spcPts val="600"/>
+              </a:spcAft>
+            </a:pPr>
+            <a:r>
+              <a:rPr sz="1500" b="1">
+                <a:solidFill>
+                  <a:srgbClr val="1B5EA8"/>
+                </a:solidFill>
+                <a:latin typeface="Meiryo"/>
+              </a:rPr>
+              <a:t>推奨変更 (フェーズ 2 のみ / フェーズ 1 はそのまま)</a:t>
+            </a:r>
+          </a:p>
+          <a:p>
+            <a:pPr lvl="1">
+              <a:spcAft>
+                <a:spcPts val="200"/>
+              </a:spcAft>
+            </a:pPr>
+            <a:r>
+              <a:rPr sz="1300" b="1">
+                <a:solidFill>
+                  <a:srgbClr val="595959"/>
+                </a:solidFill>
+                <a:latin typeface="Meiryo"/>
+              </a:rPr>
+              <a:t>・target_kl ≈ 0.03〜0.05 を追加 → KL 超過で epoch 早期打ち切り (暴走更新と崩壊を予防)</a:t>
+            </a:r>
+          </a:p>
+          <a:p>
+            <a:pPr lvl="1">
+              <a:spcAft>
+                <a:spcPts val="200"/>
+              </a:spcAft>
+            </a:pPr>
+            <a:r>
+              <a:rPr sz="1300" b="0">
+                <a:solidFill>
+                  <a:srgbClr val="595959"/>
+                </a:solidFill>
+                <a:latin typeface="Meiryo"/>
+              </a:rPr>
+              <a:t>・フェーズ 2 の LR を下げる/減衰: 定数 1e-4 → 3〜5e-5 → NPC 導入時の破壊的更新を緩和</a:t>
+            </a:r>
+          </a:p>
+          <a:p>
+            <a:pPr lvl="1">
+              <a:spcAft>
+                <a:spcPts val="200"/>
+              </a:spcAft>
+            </a:pPr>
+            <a:r>
+              <a:rPr sz="1300" b="0">
+                <a:solidFill>
+                  <a:srgbClr val="595959"/>
+                </a:solidFill>
+                <a:latin typeface="Meiryo"/>
+              </a:rPr>
+              <a:t>・フェーズ 2 の n_epochs を 15 → 8 → バッチ過剰再利用による高 clip 率を是正</a:t>
+            </a:r>
+          </a:p>
+          <a:p>
+            <a:pPr lvl="1">
+              <a:spcAft>
+                <a:spcPts val="200"/>
+              </a:spcAft>
+            </a:pPr>
+            <a:r>
+              <a:rPr sz="1300" b="0">
+                <a:solidFill>
+                  <a:srgbClr val="595959"/>
+                </a:solidFill>
+                <a:latin typeface="Meiryo"/>
+              </a:rPr>
+              <a:t>・フェーズ 2 を短縮 or eval 早期停止 → ~380 万 step の崩壊前にベストで打ち切る</a:t>
+            </a:r>
+          </a:p>
+          <a:p>
+            <a:pPr>
+              <a:spcAft>
+                <a:spcPts val="600"/>
+              </a:spcAft>
+            </a:pPr>
+            <a:r>
+              <a:rPr sz="1500" b="1">
                 <a:solidFill>
                   <a:srgbClr val="222222"/>
                 </a:solidFill>
                 <a:latin typeface="Meiryo"/>
               </a:rPr>
-              <a:t>リターン系 (per-step 比で読む)</a:t>
-            </a:r>
-          </a:p>
-          <a:p>
-            <a:pPr lvl="1"/>
-            <a:r>
-              <a:rPr sz="1300" b="0">
+              <a:t>恒久対策は既に有効: per-phase EvalCallback ベスト採用 — 崩壊後の ckpt を排除 (実測グラフがその根拠)</a:t>
+            </a:r>
+          </a:p>
+          <a:p>
+            <a:pPr>
+              <a:spcAft>
+                <a:spcPts val="600"/>
+              </a:spcAft>
+            </a:pPr>
+            <a:r>
+              <a:rPr sz="1500" b="0">
+                <a:solidFill>
+                  <a:srgbClr val="222222"/>
+                </a:solidFill>
+                <a:latin typeface="Meiryo"/>
+              </a:rPr>
+              <a:t>現状のデプロイ: NPC 無しトラックは phase1/best (3601 = フル 800 秒周回) が最良 — フェーズ 2 (最良 1279) より上</a:t>
+            </a:r>
+          </a:p>
+          <a:p>
+            <a:pPr>
+              <a:spcAft>
+                <a:spcPts val="600"/>
+              </a:spcAft>
+            </a:pPr>
+            <a:r>
+              <a:rPr sz="1500" b="0">
                 <a:solidFill>
                   <a:srgbClr val="595959"/>
                 </a:solidFill>
                 <a:latin typeface="Meiryo"/>
               </a:rPr>
-              <a:t>・rollout/ep_rew_mean・ep_len_mean: 報酬は 1 step [0,1] → リターン ≈ 生存 step × 報酬率。絶対値の増減はまずエピソード長要因を疑う</a:t>
-            </a:r>
-          </a:p>
-          <a:p>
-            <a:pPr lvl="1"/>
-            <a:r>
-              <a:rPr sz="1300" b="0">
-                <a:solidFill>
-                  <a:srgbClr val="595959"/>
-                </a:solidFill>
-                <a:latin typeface="Meiryo"/>
-              </a:rPr>
-              <a:t>・eval/mean_reward: EvalCallback の決定論評価 = ベストモデル選択の根拠。eval の duration が違うと上限も違う (fast 4000 step / 汎化 600 step)</a:t>
-            </a:r>
-          </a:p>
-          <a:p>
-            <a:pPr/>
-            <a:r>
-              <a:rPr sz="1600" b="1">
-                <a:solidFill>
-                  <a:srgbClr val="222222"/>
-                </a:solidFill>
-                <a:latin typeface="Meiryo"/>
-              </a:rPr>
-              <a:t>探索系</a:t>
-            </a:r>
-          </a:p>
-          <a:p>
-            <a:pPr lvl="1"/>
-            <a:r>
-              <a:rPr sz="1300" b="0">
-                <a:solidFill>
-                  <a:srgbClr val="595959"/>
-                </a:solidFill>
-                <a:latin typeface="Meiryo"/>
-              </a:rPr>
-              <a:t>・train/std: ガウス方策の σ。1.0 → 0.15〜0.18 へ単調減が健康形。増えるなら ent_coef 過大 (fastdev では σ→1.6 の実測事故)</a:t>
-            </a:r>
-          </a:p>
-          <a:p>
-            <a:pPr lvl="1"/>
-            <a:r>
-              <a:rPr sz="1300" b="0">
-                <a:solidFill>
-                  <a:srgbClr val="595959"/>
-                </a:solidFill>
-                <a:latin typeface="Meiryo"/>
-              </a:rPr>
-              <a:t>・entropy_loss = −エントロピー: σ &lt; 0.24 でガウスのエントロピーは負 → 曲線が正に出るのは収束のサイン</a:t>
-            </a:r>
-          </a:p>
-        </p:txBody>
-      </p:sp>
-      <p:sp>
-        <p:nvSpPr>
-          <p:cNvPr id="4" name="TextBox 3"/>
-          <p:cNvSpPr txBox="1"/>
-          <p:nvPr/>
-        </p:nvSpPr>
-        <p:spPr>
-          <a:xfrm>
-            <a:off x="6217920" y="1051560"/>
-            <a:ext cx="5486400" cy="5577840"/>
-          </a:xfrm>
-          <a:prstGeom prst="rect">
-            <a:avLst/>
-          </a:prstGeom>
-          <a:noFill/>
-        </p:spPr>
-        <p:txBody>
-          <a:bodyPr wrap="square">
-            <a:spAutoFit/>
-          </a:bodyPr>
-          <a:lstStyle/>
-          <a:p>
-            <a:pPr/>
-            <a:r>
-              <a:rPr sz="1600" b="1">
-                <a:solidFill>
-                  <a:srgbClr val="222222"/>
-                </a:solidFill>
-                <a:latin typeface="Meiryo"/>
-              </a:rPr>
-              <a:t>更新の大きさ</a:t>
-            </a:r>
-          </a:p>
-          <a:p>
-            <a:pPr lvl="1"/>
-            <a:r>
-              <a:rPr sz="1300" b="0">
-                <a:solidFill>
-                  <a:srgbClr val="595959"/>
-                </a:solidFill>
-                <a:latin typeface="Meiryo"/>
-              </a:rPr>
-              <a:t>・learning_rate: P1 は線形減衰 2e-4→~0 (仕様。停滞ではない) / P2 は定数 1e-4</a:t>
-            </a:r>
-          </a:p>
-          <a:p>
-            <a:pPr lvl="1"/>
-            <a:r>
-              <a:rPr sz="1300" b="0">
-                <a:solidFill>
-                  <a:srgbClr val="595959"/>
-                </a:solidFill>
-                <a:latin typeface="Meiryo"/>
-              </a:rPr>
-              <a:t>・approx_kl・clip_fraction: 1 更新の方策移動量とクリップ率。KL &gt; 0.1 が常態なら epochs/LR 過大 → 終盤 ckpt でなく EvalCallback ベストを使う根拠</a:t>
-            </a:r>
-          </a:p>
-          <a:p>
-            <a:pPr/>
-            <a:r>
-              <a:rPr sz="1600" b="1">
-                <a:solidFill>
-                  <a:srgbClr val="222222"/>
-                </a:solidFill>
-                <a:latin typeface="Meiryo"/>
-              </a:rPr>
-              <a:t>批評家 (価値関数) 系</a:t>
-            </a:r>
-          </a:p>
-          <a:p>
-            <a:pPr lvl="1"/>
-            <a:r>
-              <a:rPr sz="1300" b="0">
-                <a:solidFill>
-                  <a:srgbClr val="595959"/>
-                </a:solidFill>
-                <a:latin typeface="Meiryo"/>
-              </a:rPr>
-              <a:t>・explained_variance: 1=完璧 / 0=平均並み / 負=有害。序盤の負は正常、上昇傾向だけ見る</a:t>
-            </a:r>
-          </a:p>
-          <a:p>
-            <a:pPr lvl="1"/>
-            <a:r>
-              <a:rPr sz="1300" b="0">
-                <a:solidFill>
-                  <a:srgbClr val="595959"/>
-                </a:solidFill>
-                <a:latin typeface="Meiryo"/>
-              </a:rPr>
-              <a:t>・value_loss: リターンスケールに比例 — 絶対値の比較は無意味。リターン分散の増減の鏡</a:t>
-            </a:r>
-          </a:p>
-          <a:p>
-            <a:pPr lvl="1"/>
-            <a:r>
-              <a:rPr sz="1300" b="0">
-                <a:solidFill>
-                  <a:srgbClr val="595959"/>
-                </a:solidFill>
-                <a:latin typeface="Meiryo"/>
-              </a:rPr>
-              <a:t>・loss・policy_gradient_loss: クリッピングにより大きさの診断価値は薄い</a:t>
-            </a:r>
-          </a:p>
-        </p:txBody>
-      </p:sp>
-    </p:spTree>
-  </p:cSld>
-  <p:clrMapOvr>
-    <a:masterClrMapping/>
-  </p:clrMapOvr>
-</p:sld>
-</file>
-
-<file path=ppt/slides/slide25.xml><?xml version="1.0" encoding="utf-8"?>
-<p:sld xmlns:a="http://schemas.openxmlformats.org/drawingml/2006/main" xmlns:p="http://schemas.openxmlformats.org/presentationml/2006/main" xmlns:r="http://schemas.openxmlformats.org/officeDocument/2006/relationships">
-  <p:cSld>
-    <p:spTree>
-      <p:nvGrpSpPr>
-        <p:cNvPr id="1" name=""/>
-        <p:cNvGrpSpPr/>
-        <p:nvPr/>
-      </p:nvGrpSpPr>
-      <p:grpSpPr/>
-      <p:sp>
-        <p:nvSpPr>
-          <p:cNvPr id="2" name="TextBox 1"/>
-          <p:cNvSpPr txBox="1"/>
-          <p:nvPr/>
-        </p:nvSpPr>
-        <p:spPr>
-          <a:xfrm>
-            <a:off x="457200" y="182880"/>
-            <a:ext cx="11247120" cy="731520"/>
-          </a:xfrm>
-          <a:prstGeom prst="rect">
-            <a:avLst/>
-          </a:prstGeom>
-          <a:noFill/>
-        </p:spPr>
-        <p:txBody>
-          <a:bodyPr wrap="none">
-            <a:spAutoFit/>
-          </a:bodyPr>
-          <a:lstStyle/>
-          <a:p>
-            <a:r>
-              <a:rPr sz="2700" b="1">
-                <a:solidFill>
-                  <a:srgbClr val="1B5EA8"/>
-                </a:solidFill>
-                <a:latin typeface="Meiryo"/>
-              </a:rPr>
-              <a:t>実測 (1) fast トラック agent — runs/sb3_ppo_cnn_full (401 万 step)</a:t>
-            </a:r>
-          </a:p>
-        </p:txBody>
-      </p:sp>
-      <p:pic>
-        <p:nvPicPr>
-          <p:cNvPr id="3" name="Picture 2" descr="tb_task2_fast_indicators.png"/>
-          <p:cNvPicPr>
-            <a:picLocks noChangeAspect="1"/>
-          </p:cNvPicPr>
-          <p:nvPr/>
-        </p:nvPicPr>
-        <p:blipFill>
-          <a:blip r:embed="rId2"/>
-          <a:stretch>
-            <a:fillRect/>
-          </a:stretch>
-        </p:blipFill>
-        <p:spPr>
-          <a:xfrm>
-            <a:off x="790956" y="960120"/>
-            <a:ext cx="10607040" cy="4186989"/>
-          </a:xfrm>
-          <a:prstGeom prst="rect">
-            <a:avLst/>
-          </a:prstGeom>
-        </p:spPr>
-      </p:pic>
-      <p:sp>
-        <p:nvSpPr>
-          <p:cNvPr id="4" name="TextBox 3"/>
-          <p:cNvSpPr txBox="1"/>
-          <p:nvPr/>
-        </p:nvSpPr>
-        <p:spPr>
-          <a:xfrm>
-            <a:off x="548640" y="5284269"/>
-            <a:ext cx="11064240" cy="1528010"/>
-          </a:xfrm>
-          <a:prstGeom prst="rect">
-            <a:avLst/>
-          </a:prstGeom>
-          <a:noFill/>
-        </p:spPr>
-        <p:txBody>
-          <a:bodyPr wrap="square">
-            <a:spAutoFit/>
-          </a:bodyPr>
-          <a:lstStyle/>
-          <a:p>
-            <a:pPr lvl="1"/>
-            <a:r>
-              <a:rPr sz="1300" b="0">
-                <a:solidFill>
-                  <a:srgbClr val="595959"/>
-                </a:solidFill>
-                <a:latin typeface="Meiryo"/>
-              </a:rPr>
-              <a:t>・フェーズ 1 末: リターン 3498 / 3975 step = 0.88/step — 800 秒打ち切り上限に張り付き (無限周回)。KL 6.6e-4 / clip 0.3% = 収束</a:t>
-            </a:r>
-          </a:p>
-          <a:p>
-            <a:pPr lvl="1"/>
-            <a:r>
-              <a:rPr sz="1300" b="0">
-                <a:solidFill>
-                  <a:srgbClr val="595959"/>
-                </a:solidFill>
-                <a:latin typeface="Meiryo"/>
-              </a:rPr>
-              <a:t>・フェーズ 2 (破線以降、NPC 追加): 177 / 270 step = 0.65/step — 「低下」ではなく終端が truncation → 衝突に変わった正常形</a:t>
-            </a:r>
-          </a:p>
-          <a:p>
-            <a:pPr lvl="1"/>
-            <a:r>
-              <a:rPr sz="1300" b="0">
-                <a:solidFill>
-                  <a:srgbClr val="595959"/>
-                </a:solidFill>
-                <a:latin typeface="Meiryo"/>
-              </a:rPr>
-              <a:t>・終盤は KL 0.73 / clip 77% のチャーン → 最終 ckpt ではなく EvalCallback ベストを採用。σ は 1.0 → 0.165 で焼きなまし完了</a:t>
-            </a:r>
-          </a:p>
-        </p:txBody>
-      </p:sp>
-    </p:spTree>
-  </p:cSld>
-  <p:clrMapOvr>
-    <a:masterClrMapping/>
-  </p:clrMapOvr>
-</p:sld>
-</file>
-
-<file path=ppt/slides/slide26.xml><?xml version="1.0" encoding="utf-8"?>
-<p:sld xmlns:a="http://schemas.openxmlformats.org/drawingml/2006/main" xmlns:p="http://schemas.openxmlformats.org/presentationml/2006/main" xmlns:r="http://schemas.openxmlformats.org/officeDocument/2006/relationships">
-  <p:cSld>
-    <p:spTree>
-      <p:nvGrpSpPr>
-        <p:cNvPr id="1" name=""/>
-        <p:cNvGrpSpPr/>
-        <p:nvPr/>
-      </p:nvGrpSpPr>
-      <p:grpSpPr/>
-      <p:sp>
-        <p:nvSpPr>
-          <p:cNvPr id="2" name="TextBox 1"/>
-          <p:cNvSpPr txBox="1"/>
-          <p:nvPr/>
-        </p:nvSpPr>
-        <p:spPr>
-          <a:xfrm>
-            <a:off x="457200" y="182880"/>
-            <a:ext cx="11247120" cy="731520"/>
-          </a:xfrm>
-          <a:prstGeom prst="rect">
-            <a:avLst/>
-          </a:prstGeom>
-          <a:noFill/>
-        </p:spPr>
-        <p:txBody>
-          <a:bodyPr wrap="none">
-            <a:spAutoFit/>
-          </a:bodyPr>
-          <a:lstStyle/>
-          <a:p>
-            <a:r>
-              <a:rPr sz="2700" b="1">
-                <a:solidFill>
-                  <a:srgbClr val="1B5EA8"/>
-                </a:solidFill>
-                <a:latin typeface="Meiryo"/>
-              </a:rPr>
-              <a:t>実測 (2) 汎化 agent — runs/sb3_ppo_gen_cnn (451 万 step)</a:t>
-            </a:r>
-          </a:p>
-        </p:txBody>
-      </p:sp>
-      <p:pic>
-        <p:nvPicPr>
-          <p:cNvPr id="3" name="Picture 2" descr="tb_task3_gen_indicators.png"/>
-          <p:cNvPicPr>
-            <a:picLocks noChangeAspect="1"/>
-          </p:cNvPicPr>
-          <p:nvPr/>
-        </p:nvPicPr>
-        <p:blipFill>
-          <a:blip r:embed="rId2"/>
-          <a:stretch>
-            <a:fillRect/>
-          </a:stretch>
-        </p:blipFill>
-        <p:spPr>
-          <a:xfrm>
-            <a:off x="790956" y="960120"/>
-            <a:ext cx="10607040" cy="4186989"/>
-          </a:xfrm>
-          <a:prstGeom prst="rect">
-            <a:avLst/>
-          </a:prstGeom>
-        </p:spPr>
-      </p:pic>
-      <p:sp>
-        <p:nvSpPr>
-          <p:cNvPr id="4" name="TextBox 3"/>
-          <p:cNvSpPr txBox="1"/>
-          <p:nvPr/>
-        </p:nvSpPr>
-        <p:spPr>
-          <a:xfrm>
-            <a:off x="548640" y="5284269"/>
-            <a:ext cx="11064240" cy="1528010"/>
-          </a:xfrm>
-          <a:prstGeom prst="rect">
-            <a:avLst/>
-          </a:prstGeom>
-          <a:noFill/>
-        </p:spPr>
-        <p:txBody>
-          <a:bodyPr wrap="square">
-            <a:spAutoFit/>
-          </a:bodyPr>
-          <a:lstStyle/>
-          <a:p>
-            <a:pPr lvl="1"/>
-            <a:r>
-              <a:rPr sz="1300" b="0">
-                <a:solidFill>
-                  <a:srgbClr val="595959"/>
-                </a:solidFill>
-                <a:latin typeface="Meiryo"/>
-              </a:rPr>
-              <a:t>・フェーズ 1 末: 2953 / 3236 step = 0.91/step — ランダムトラックでも打ち切り上限級で周回</a:t>
-            </a:r>
-          </a:p>
-          <a:p>
-            <a:pPr lvl="1"/>
-            <a:r>
-              <a:rPr sz="1300" b="0">
-                <a:solidFill>
-                  <a:srgbClr val="595959"/>
-                </a:solidFill>
-                <a:latin typeface="Meiryo"/>
-              </a:rPr>
-              <a:t>・eval は duration 120 秒 (600 step 上限) — 最大 517 = 0.86/step。fast ランと絶対値の比較は不可 (per-step で見る)</a:t>
-            </a:r>
-          </a:p>
-          <a:p>
-            <a:pPr lvl="1"/>
-            <a:r>
-              <a:rPr sz="1300" b="0">
-                <a:solidFill>
-                  <a:srgbClr val="595959"/>
-                </a:solidFill>
-                <a:latin typeface="Meiryo"/>
-              </a:rPr>
-              <a:t>・explained_variance 最終 0.63 (fast 0.32 より良好)。value_loss 117 はトラック + NPC ランダム性によるリターン分散の反映で悪化ではない</a:t>
-            </a:r>
-          </a:p>
-        </p:txBody>
-      </p:sp>
-    </p:spTree>
-  </p:cSld>
-  <p:clrMapOvr>
-    <a:masterClrMapping/>
-  </p:clrMapOvr>
-</p:sld>
-</file>
-
-<file path=ppt/slides/slide27.xml><?xml version="1.0" encoding="utf-8"?>
-<p:sld xmlns:a="http://schemas.openxmlformats.org/drawingml/2006/main" xmlns:p="http://schemas.openxmlformats.org/presentationml/2006/main" xmlns:r="http://schemas.openxmlformats.org/officeDocument/2006/relationships">
-  <p:cSld>
-    <p:spTree>
-      <p:nvGrpSpPr>
-        <p:cNvPr id="1" name=""/>
-        <p:cNvGrpSpPr/>
-        <p:nvPr/>
-      </p:nvGrpSpPr>
-      <p:grpSpPr/>
-      <p:sp>
-        <p:nvSpPr>
-          <p:cNvPr id="2" name="TextBox 1"/>
-          <p:cNvSpPr txBox="1"/>
-          <p:nvPr/>
-        </p:nvSpPr>
-        <p:spPr>
-          <a:xfrm>
-            <a:off x="457200" y="182880"/>
-            <a:ext cx="11247120" cy="731520"/>
-          </a:xfrm>
-          <a:prstGeom prst="rect">
-            <a:avLst/>
-          </a:prstGeom>
-          <a:noFill/>
-        </p:spPr>
-        <p:txBody>
-          <a:bodyPr wrap="none">
-            <a:spAutoFit/>
-          </a:bodyPr>
-          <a:lstStyle/>
-          <a:p>
-            <a:r>
-              <a:rPr sz="2700" b="1">
-                <a:solidFill>
-                  <a:srgbClr val="1B5EA8"/>
-                </a:solidFill>
-                <a:latin typeface="Meiryo"/>
-              </a:rPr>
-              <a:t>C# 観測生成 — highway-env をビット一致で移植</a:t>
-            </a:r>
-          </a:p>
-        </p:txBody>
-      </p:sp>
-      <p:sp>
-        <p:nvSpPr>
-          <p:cNvPr id="3" name="TextBox 2"/>
-          <p:cNvSpPr txBox="1"/>
-          <p:nvPr/>
-        </p:nvSpPr>
-        <p:spPr>
-          <a:xfrm>
-            <a:off x="548640" y="1051560"/>
-            <a:ext cx="5532120" cy="5577840"/>
-          </a:xfrm>
-          <a:prstGeom prst="rect">
-            <a:avLst/>
-          </a:prstGeom>
-          <a:noFill/>
-        </p:spPr>
-        <p:txBody>
-          <a:bodyPr wrap="square">
-            <a:spAutoFit/>
-          </a:bodyPr>
-          <a:lstStyle/>
-          <a:p>
-            <a:pPr/>
-            <a:r>
-              <a:rPr sz="1600" b="1">
-                <a:solidFill>
-                  <a:srgbClr val="222222"/>
-                </a:solidFill>
-                <a:latin typeface="Meiryo"/>
-              </a:rPr>
-              <a:t>素朴な移植との差分 8 点 (実測検証済)</a:t>
-            </a:r>
-          </a:p>
-          <a:p>
-            <a:pPr lvl="1"/>
-            <a:r>
-              <a:rPr sz="1300" b="0">
-                <a:solidFill>
-                  <a:srgbClr val="595959"/>
-                </a:solidFill>
-                <a:latin typeface="Meiryo"/>
-              </a:rPr>
-              <a:t>・グリッドは非対称: x −9〜+27 m / y ±18 m、自車はセル (3,6) で中央でない</a:t>
-            </a:r>
-          </a:p>
-          <a:p>
-            <a:pPr lvl="1"/>
-            <a:r>
-              <a:rPr sz="1300" b="0">
-                <a:solidFill>
-                  <a:srgbClr val="595959"/>
-                </a:solidFill>
-                <a:latin typeface="Meiryo"/>
-              </a:rPr>
-              <a:t>・x/y/vx/vy の値はトラック軸のまま。回転するのはセル添字だけ</a:t>
-            </a:r>
-          </a:p>
-          <a:p>
-            <a:pPr lvl="1"/>
-            <a:r>
-              <a:rPr sz="1300" b="0">
-                <a:solidFill>
-                  <a:srgbClr val="595959"/>
-                </a:solidFill>
-                <a:latin typeface="Meiryo"/>
-              </a:rPr>
-              <a:t>・vx/vy は自車速度との相対、cos_h/sin_h は各車の絶対 heading</a:t>
-            </a:r>
-          </a:p>
-          <a:p>
-            <a:pPr lvl="1"/>
-            <a:r>
-              <a:rPr sz="1300" b="0">
-                <a:solidFill>
-                  <a:srgbClr val="595959"/>
-                </a:solidFill>
-                <a:latin typeface="Meiryo"/>
-              </a:rPr>
-              <a:t>・正規化は [−1,1] (値÷レンジ、clip)、[0,1] ではない</a:t>
-            </a:r>
-          </a:p>
-          <a:p>
-            <a:pPr lvl="1"/>
-            <a:r>
-              <a:rPr sz="1300" b="0">
-                <a:solidFill>
-                  <a:srgbClr val="595959"/>
-                </a:solidFill>
-                <a:latin typeface="Meiryo"/>
-              </a:rPr>
-              <a:t>・自車も NPC の後に最後に書き込み、自セルを勝ち取る</a:t>
-            </a:r>
-          </a:p>
-          <a:p>
-            <a:pPr lvl="1"/>
-            <a:r>
-              <a:rPr sz="1300" b="0">
-                <a:solidFill>
-                  <a:srgbClr val="595959"/>
-                </a:solidFill>
-                <a:latin typeface="Meiryo"/>
-              </a:rPr>
-              <a:t>・最近傍レーンは全18レーンの |lat|+はみ出し+|heading差| の argmin</a:t>
-            </a:r>
-          </a:p>
-        </p:txBody>
-      </p:sp>
-      <p:sp>
-        <p:nvSpPr>
-          <p:cNvPr id="4" name="TextBox 3"/>
-          <p:cNvSpPr txBox="1"/>
-          <p:nvPr/>
-        </p:nvSpPr>
-        <p:spPr>
-          <a:xfrm>
-            <a:off x="6263640" y="1051560"/>
-            <a:ext cx="5486400" cy="5577840"/>
-          </a:xfrm>
-          <a:prstGeom prst="rect">
-            <a:avLst/>
-          </a:prstGeom>
-          <a:noFill/>
-        </p:spPr>
-        <p:txBody>
-          <a:bodyPr wrap="square">
-            <a:spAutoFit/>
-          </a:bodyPr>
-          <a:lstStyle/>
-          <a:p>
-            <a:pPr/>
-            <a:r>
-              <a:rPr sz="1600" b="1">
-                <a:solidFill>
-                  <a:srgbClr val="222222"/>
-                </a:solidFill>
-                <a:latin typeface="Meiryo"/>
-              </a:rPr>
-              <a:t>on_road — レイキャストしない</a:t>
-            </a:r>
-          </a:p>
-          <a:p>
-            <a:pPr lvl="1"/>
-            <a:r>
-              <a:rPr sz="1300" b="0">
-                <a:solidFill>
-                  <a:srgbClr val="595959"/>
-                </a:solidFill>
-                <a:latin typeface="Meiryo"/>
-              </a:rPr>
-              <a:t>・レーン中心線を 3 m 刻みで歩きセルを 1 にする「中心線トレース」</a:t>
-            </a:r>
-          </a:p>
-          <a:p>
-            <a:pPr lvl="1"/>
-            <a:r>
-              <a:rPr sz="1300" b="0">
-                <a:solidFill>
-                  <a:srgbClr val="595959"/>
-                </a:solidFill>
-                <a:latin typeface="Meiryo"/>
-              </a:rPr>
-              <a:t>・道路面を塗ると幅3セルの帯になり学習時と別物 → 劣化</a:t>
-            </a:r>
-          </a:p>
-          <a:p>
-            <a:pPr/>
-            <a:r>
-              <a:rPr sz="1600" b="1">
-                <a:solidFill>
-                  <a:srgbClr val="222222"/>
-                </a:solidFill>
-                <a:latin typeface="Meiryo"/>
-              </a:rPr>
-              <a:t>lat_off / ang_off — 中心線の幾何だけで</a:t>
-            </a:r>
-          </a:p>
-          <a:p>
-            <a:pPr lvl="1"/>
-            <a:r>
-              <a:rPr sz="1300" b="0">
-                <a:solidFill>
-                  <a:srgbClr val="595959"/>
-                </a:solidFill>
-                <a:latin typeface="Meiryo"/>
-              </a:rPr>
-              <a:t>・コライダー不要。最近傍レーンのローカル座標で横オフセット + heading 差</a:t>
-            </a:r>
-          </a:p>
-          <a:p>
-            <a:pPr lvl="1"/>
-            <a:r>
-              <a:rPr sz="1300" b="0">
-                <a:solidFill>
-                  <a:srgbClr val="595959"/>
-                </a:solidFill>
-                <a:latin typeface="Meiryo"/>
-              </a:rPr>
-              <a:t>・レーンは _make_road のハードコピー or track_&lt;name&gt;.json から供給</a:t>
-            </a:r>
-          </a:p>
-          <a:p>
-            <a:pPr/>
-            <a:r>
-              <a:rPr sz="1600" b="1">
-                <a:solidFill>
-                  <a:srgbClr val="222222"/>
-                </a:solidFill>
-                <a:latin typeface="Meiryo"/>
-              </a:rPr>
-              <a:t>実行と検証</a:t>
-            </a:r>
-          </a:p>
-          <a:p>
-            <a:pPr lvl="1"/>
-            <a:r>
-              <a:rPr sz="1300" b="0">
-                <a:solidFill>
-                  <a:srgbClr val="595959"/>
-                </a:solidFill>
-                <a:latin typeface="Meiryo"/>
-              </a:rPr>
-              <a:t>・HWC 平坦配列 → NHWC モデル直結 / 5 Hz 推論 / action_mean を clip して decode</a:t>
-            </a:r>
-          </a:p>
-          <a:p>
-            <a:pPr lvl="1"/>
-            <a:r>
-              <a:rPr sz="1300" b="0">
-                <a:solidFill>
-                  <a:srgbClr val="595959"/>
-                </a:solidFill>
-                <a:latin typeface="Meiryo"/>
-              </a:rPr>
-              <a:t>・verify/ で実環境の参照観測とセル単位照合 → maxDiff 0.0 (ビット一致)</a:t>
+              <a:t>※ 変更はフェーズ 1 の成功を壊さぬようフェーズ 2 に閉じ、再学習で検証してから適用</a:t>
             </a:r>
           </a:p>
         </p:txBody>
